--- a/docs/AIForgeCrew-CTO-Summary.pptx
+++ b/docs/AIForgeCrew-CTO-Summary.pptx
@@ -6,8 +6,8 @@
   </p:sldMasterIdLst>
   <p:sldIdLst>
     <p:sldId id="256" r:id="rId7"/>
-    <p:sldId id="257" r:id="rId8"/>
-    <p:sldId id="258" r:id="rId9"/>
+    <p:sldId id="257" r:id="rId9"/>
+    <p:sldId id="258" r:id="rId10"/>
   </p:sldIdLst>
   <p:sldSz cx="12191695" cy="6858000" type="screen4x3"/>
   <p:notesSz cx="6858000" cy="9144000"/>
@@ -107,6 +107,1049 @@
     </a:lvl9pPr>
   </p:defaultTextStyle>
 </p:presentation>
+</file>
+
+<file path=ppt/notesMasters/notesMaster1.xml><?xml version="1.0" encoding="utf-8"?>
+<p:notesMaster xmlns:a="http://schemas.openxmlformats.org/drawingml/2006/main" xmlns:p="http://schemas.openxmlformats.org/presentationml/2006/main" xmlns:r="http://schemas.openxmlformats.org/officeDocument/2006/relationships">
+  <p:cSld>
+    <p:bg>
+      <p:bgRef idx="1001">
+        <a:schemeClr val="bg1"/>
+      </p:bgRef>
+    </p:bg>
+    <p:spTree>
+      <p:nvGrpSpPr>
+        <p:cNvPr id="1" name=""/>
+        <p:cNvGrpSpPr/>
+        <p:nvPr/>
+      </p:nvGrpSpPr>
+      <p:grpSpPr>
+        <a:xfrm>
+          <a:off x="0" y="0"/>
+          <a:ext cx="0" cy="0"/>
+          <a:chOff x="0" y="0"/>
+          <a:chExt cx="0" cy="0"/>
+        </a:xfrm>
+      </p:grpSpPr>
+      <p:sp>
+        <p:nvSpPr>
+          <p:cNvPr id="2" name="Header Placeholder 1"/>
+          <p:cNvSpPr>
+            <a:spLocks noGrp="1"/>
+          </p:cNvSpPr>
+          <p:nvPr>
+            <p:ph type="hdr" sz="quarter"/>
+          </p:nvPr>
+        </p:nvSpPr>
+        <p:spPr>
+          <a:xfrm>
+            <a:off x="0" y="0"/>
+            <a:ext cx="2971800" cy="457200"/>
+          </a:xfrm>
+          <a:prstGeom prst="rect">
+            <a:avLst/>
+          </a:prstGeom>
+        </p:spPr>
+        <p:txBody>
+          <a:bodyPr vert="horz" lIns="91440" tIns="45720" rIns="91440" bIns="45720" rtlCol="0"/>
+          <a:lstStyle>
+            <a:lvl1pPr algn="l">
+              <a:defRPr sz="1200"/>
+            </a:lvl1pPr>
+          </a:lstStyle>
+          <a:p>
+            <a:endParaRPr lang="en-US"/>
+          </a:p>
+        </p:txBody>
+      </p:sp>
+      <p:sp>
+        <p:nvSpPr>
+          <p:cNvPr id="3" name="Date Placeholder 2"/>
+          <p:cNvSpPr>
+            <a:spLocks noGrp="1"/>
+          </p:cNvSpPr>
+          <p:nvPr>
+            <p:ph type="dt" idx="1"/>
+          </p:nvPr>
+        </p:nvSpPr>
+        <p:spPr>
+          <a:xfrm>
+            <a:off x="3884613" y="0"/>
+            <a:ext cx="2971800" cy="457200"/>
+          </a:xfrm>
+          <a:prstGeom prst="rect">
+            <a:avLst/>
+          </a:prstGeom>
+        </p:spPr>
+        <p:txBody>
+          <a:bodyPr vert="horz" lIns="91440" tIns="45720" rIns="91440" bIns="45720" rtlCol="0"/>
+          <a:lstStyle>
+            <a:lvl1pPr algn="r">
+              <a:defRPr sz="1200"/>
+            </a:lvl1pPr>
+          </a:lstStyle>
+          <a:p>
+            <a:fld id="{0F89C1C7-3DCD-1040-A9CF-14679D8B5DDD}" type="datetimeFigureOut">
+              <a:rPr lang="en-US" smtClean="0"/>
+              <a:t>10/17/16</a:t>
+            </a:fld>
+            <a:endParaRPr lang="en-US"/>
+          </a:p>
+        </p:txBody>
+      </p:sp>
+      <p:sp>
+        <p:nvSpPr>
+          <p:cNvPr id="4" name="Slide Image Placeholder 3"/>
+          <p:cNvSpPr>
+            <a:spLocks noGrp="1" noRot="1" noChangeAspect="1"/>
+          </p:cNvSpPr>
+          <p:nvPr>
+            <p:ph type="sldImg" idx="2"/>
+          </p:nvPr>
+        </p:nvSpPr>
+        <p:spPr>
+          <a:xfrm>
+            <a:off x="1143000" y="685800"/>
+            <a:ext cx="4572000" cy="3429000"/>
+          </a:xfrm>
+          <a:prstGeom prst="rect">
+            <a:avLst/>
+          </a:prstGeom>
+          <a:noFill/>
+          <a:ln w="12700">
+            <a:solidFill>
+              <a:prstClr val="black"/>
+            </a:solidFill>
+          </a:ln>
+        </p:spPr>
+        <p:txBody>
+          <a:bodyPr vert="horz" lIns="91440" tIns="45720" rIns="91440" bIns="45720" rtlCol="0" anchor="ctr"/>
+          <a:lstStyle/>
+          <a:p>
+            <a:endParaRPr lang="en-US"/>
+          </a:p>
+        </p:txBody>
+      </p:sp>
+      <p:sp>
+        <p:nvSpPr>
+          <p:cNvPr id="5" name="Notes Placeholder 4"/>
+          <p:cNvSpPr>
+            <a:spLocks noGrp="1"/>
+          </p:cNvSpPr>
+          <p:nvPr>
+            <p:ph type="body" sz="quarter" idx="3"/>
+          </p:nvPr>
+        </p:nvSpPr>
+        <p:spPr>
+          <a:xfrm>
+            <a:off x="685800" y="4343400"/>
+            <a:ext cx="5486400" cy="4114800"/>
+          </a:xfrm>
+          <a:prstGeom prst="rect">
+            <a:avLst/>
+          </a:prstGeom>
+        </p:spPr>
+        <p:txBody>
+          <a:bodyPr vert="horz" lIns="91440" tIns="45720" rIns="91440" bIns="45720" rtlCol="0"/>
+          <a:lstStyle/>
+          <a:p>
+            <a:pPr lvl="0"/>
+            <a:r>
+              <a:rPr lang="en-US" smtClean="0"/>
+              <a:t>Click to edit Master text styles</a:t>
+            </a:r>
+          </a:p>
+          <a:p>
+            <a:pPr lvl="1"/>
+            <a:r>
+              <a:rPr lang="en-US" smtClean="0"/>
+              <a:t>Second level</a:t>
+            </a:r>
+          </a:p>
+          <a:p>
+            <a:pPr lvl="2"/>
+            <a:r>
+              <a:rPr lang="en-US" smtClean="0"/>
+              <a:t>Third level</a:t>
+            </a:r>
+          </a:p>
+          <a:p>
+            <a:pPr lvl="3"/>
+            <a:r>
+              <a:rPr lang="en-US" smtClean="0"/>
+              <a:t>Fourth level</a:t>
+            </a:r>
+          </a:p>
+          <a:p>
+            <a:pPr lvl="4"/>
+            <a:r>
+              <a:rPr lang="en-US" smtClean="0"/>
+              <a:t>Fifth level</a:t>
+            </a:r>
+            <a:endParaRPr lang="en-US"/>
+          </a:p>
+        </p:txBody>
+      </p:sp>
+      <p:sp>
+        <p:nvSpPr>
+          <p:cNvPr id="6" name="Footer Placeholder 5"/>
+          <p:cNvSpPr>
+            <a:spLocks noGrp="1"/>
+          </p:cNvSpPr>
+          <p:nvPr>
+            <p:ph type="ftr" sz="quarter" idx="4"/>
+          </p:nvPr>
+        </p:nvSpPr>
+        <p:spPr>
+          <a:xfrm>
+            <a:off x="0" y="8685213"/>
+            <a:ext cx="2971800" cy="457200"/>
+          </a:xfrm>
+          <a:prstGeom prst="rect">
+            <a:avLst/>
+          </a:prstGeom>
+        </p:spPr>
+        <p:txBody>
+          <a:bodyPr vert="horz" lIns="91440" tIns="45720" rIns="91440" bIns="45720" rtlCol="0" anchor="b"/>
+          <a:lstStyle>
+            <a:lvl1pPr algn="l">
+              <a:defRPr sz="1200"/>
+            </a:lvl1pPr>
+          </a:lstStyle>
+          <a:p>
+            <a:endParaRPr lang="en-US"/>
+          </a:p>
+        </p:txBody>
+      </p:sp>
+      <p:sp>
+        <p:nvSpPr>
+          <p:cNvPr id="7" name="Slide Number Placeholder 6"/>
+          <p:cNvSpPr>
+            <a:spLocks noGrp="1"/>
+          </p:cNvSpPr>
+          <p:nvPr>
+            <p:ph type="sldNum" sz="quarter" idx="5"/>
+          </p:nvPr>
+        </p:nvSpPr>
+        <p:spPr>
+          <a:xfrm>
+            <a:off x="3884613" y="8685213"/>
+            <a:ext cx="2971800" cy="457200"/>
+          </a:xfrm>
+          <a:prstGeom prst="rect">
+            <a:avLst/>
+          </a:prstGeom>
+        </p:spPr>
+        <p:txBody>
+          <a:bodyPr vert="horz" lIns="91440" tIns="45720" rIns="91440" bIns="45720" rtlCol="0" anchor="b"/>
+          <a:lstStyle>
+            <a:lvl1pPr algn="r">
+              <a:defRPr sz="1200"/>
+            </a:lvl1pPr>
+          </a:lstStyle>
+          <a:p>
+            <a:fld id="{BB5E49A5-4136-284D-997B-48E1D791AD67}" type="slidenum">
+              <a:rPr lang="en-US" smtClean="0"/>
+              <a:t>‹#›</a:t>
+            </a:fld>
+            <a:endParaRPr lang="en-US"/>
+          </a:p>
+        </p:txBody>
+      </p:sp>
+    </p:spTree>
+    <p:extLst>
+      <p:ext uri="{BB962C8B-B14F-4D97-AF65-F5344CB8AC3E}">
+        <p14:creationId xmlns:p14="http://schemas.microsoft.com/office/powerpoint/2010/main" val="2623252185"/>
+      </p:ext>
+    </p:extLst>
+  </p:cSld>
+  <p:clrMap bg1="lt1" tx1="dk1" bg2="lt2" tx2="dk2" accent1="accent1" accent2="accent2" accent3="accent3" accent4="accent4" accent5="accent5" accent6="accent6" hlink="hlink" folHlink="folHlink"/>
+  <p:notesStyle>
+    <a:lvl1pPr marL="0" algn="l" defTabSz="457200" rtl="0" eaLnBrk="1" latinLnBrk="0" hangingPunct="1">
+      <a:defRPr sz="1200" kern="1200">
+        <a:solidFill>
+          <a:schemeClr val="tx1"/>
+        </a:solidFill>
+        <a:latin typeface="+mn-lt"/>
+        <a:ea typeface="+mn-ea"/>
+        <a:cs typeface="+mn-cs"/>
+      </a:defRPr>
+    </a:lvl1pPr>
+    <a:lvl2pPr marL="457200" algn="l" defTabSz="457200" rtl="0" eaLnBrk="1" latinLnBrk="0" hangingPunct="1">
+      <a:defRPr sz="1200" kern="1200">
+        <a:solidFill>
+          <a:schemeClr val="tx1"/>
+        </a:solidFill>
+        <a:latin typeface="+mn-lt"/>
+        <a:ea typeface="+mn-ea"/>
+        <a:cs typeface="+mn-cs"/>
+      </a:defRPr>
+    </a:lvl2pPr>
+    <a:lvl3pPr marL="914400" algn="l" defTabSz="457200" rtl="0" eaLnBrk="1" latinLnBrk="0" hangingPunct="1">
+      <a:defRPr sz="1200" kern="1200">
+        <a:solidFill>
+          <a:schemeClr val="tx1"/>
+        </a:solidFill>
+        <a:latin typeface="+mn-lt"/>
+        <a:ea typeface="+mn-ea"/>
+        <a:cs typeface="+mn-cs"/>
+      </a:defRPr>
+    </a:lvl3pPr>
+    <a:lvl4pPr marL="1371600" algn="l" defTabSz="457200" rtl="0" eaLnBrk="1" latinLnBrk="0" hangingPunct="1">
+      <a:defRPr sz="1200" kern="1200">
+        <a:solidFill>
+          <a:schemeClr val="tx1"/>
+        </a:solidFill>
+        <a:latin typeface="+mn-lt"/>
+        <a:ea typeface="+mn-ea"/>
+        <a:cs typeface="+mn-cs"/>
+      </a:defRPr>
+    </a:lvl4pPr>
+    <a:lvl5pPr marL="1828800" algn="l" defTabSz="457200" rtl="0" eaLnBrk="1" latinLnBrk="0" hangingPunct="1">
+      <a:defRPr sz="1200" kern="1200">
+        <a:solidFill>
+          <a:schemeClr val="tx1"/>
+        </a:solidFill>
+        <a:latin typeface="+mn-lt"/>
+        <a:ea typeface="+mn-ea"/>
+        <a:cs typeface="+mn-cs"/>
+      </a:defRPr>
+    </a:lvl5pPr>
+    <a:lvl6pPr marL="2286000" algn="l" defTabSz="457200" rtl="0" eaLnBrk="1" latinLnBrk="0" hangingPunct="1">
+      <a:defRPr sz="1200" kern="1200">
+        <a:solidFill>
+          <a:schemeClr val="tx1"/>
+        </a:solidFill>
+        <a:latin typeface="+mn-lt"/>
+        <a:ea typeface="+mn-ea"/>
+        <a:cs typeface="+mn-cs"/>
+      </a:defRPr>
+    </a:lvl6pPr>
+    <a:lvl7pPr marL="2743200" algn="l" defTabSz="457200" rtl="0" eaLnBrk="1" latinLnBrk="0" hangingPunct="1">
+      <a:defRPr sz="1200" kern="1200">
+        <a:solidFill>
+          <a:schemeClr val="tx1"/>
+        </a:solidFill>
+        <a:latin typeface="+mn-lt"/>
+        <a:ea typeface="+mn-ea"/>
+        <a:cs typeface="+mn-cs"/>
+      </a:defRPr>
+    </a:lvl7pPr>
+    <a:lvl8pPr marL="3200400" algn="l" defTabSz="457200" rtl="0" eaLnBrk="1" latinLnBrk="0" hangingPunct="1">
+      <a:defRPr sz="1200" kern="1200">
+        <a:solidFill>
+          <a:schemeClr val="tx1"/>
+        </a:solidFill>
+        <a:latin typeface="+mn-lt"/>
+        <a:ea typeface="+mn-ea"/>
+        <a:cs typeface="+mn-cs"/>
+      </a:defRPr>
+    </a:lvl8pPr>
+    <a:lvl9pPr marL="3657600" algn="l" defTabSz="457200" rtl="0" eaLnBrk="1" latinLnBrk="0" hangingPunct="1">
+      <a:defRPr sz="1200" kern="1200">
+        <a:solidFill>
+          <a:schemeClr val="tx1"/>
+        </a:solidFill>
+        <a:latin typeface="+mn-lt"/>
+        <a:ea typeface="+mn-ea"/>
+        <a:cs typeface="+mn-cs"/>
+      </a:defRPr>
+    </a:lvl9pPr>
+  </p:notesStyle>
+</p:notesMaster>
+</file>
+
+<file path=ppt/notesSlides/notesSlide1.xml><?xml version="1.0" encoding="utf-8"?>
+<p:notes xmlns:a="http://schemas.openxmlformats.org/drawingml/2006/main" xmlns:p="http://schemas.openxmlformats.org/presentationml/2006/main" xmlns:r="http://schemas.openxmlformats.org/officeDocument/2006/relationships">
+  <p:cSld>
+    <p:spTree>
+      <p:nvGrpSpPr>
+        <p:cNvPr id="1" name=""/>
+        <p:cNvGrpSpPr/>
+        <p:nvPr/>
+      </p:nvGrpSpPr>
+      <p:grpSpPr>
+        <a:xfrm>
+          <a:off x="0" y="0"/>
+          <a:ext cx="0" cy="0"/>
+          <a:chOff x="0" y="0"/>
+          <a:chExt cx="0" cy="0"/>
+        </a:xfrm>
+      </p:grpSpPr>
+      <p:sp>
+        <p:nvSpPr>
+          <p:cNvPr id="2" name="Slide Image Placeholder 1"/>
+          <p:cNvSpPr>
+            <a:spLocks noGrp="1"/>
+          </p:cNvSpPr>
+          <p:nvPr>
+            <p:ph type="sldImg" idx="2"/>
+          </p:nvPr>
+        </p:nvSpPr>
+        <p:spPr/>
+      </p:sp>
+      <p:sp>
+        <p:nvSpPr>
+          <p:cNvPr id="3" name="Notes Placeholder 2"/>
+          <p:cNvSpPr>
+            <a:spLocks noGrp="1"/>
+          </p:cNvSpPr>
+          <p:nvPr>
+            <p:ph type="body" idx="3" sz="quarter"/>
+          </p:nvPr>
+        </p:nvSpPr>
+        <p:spPr/>
+        <p:txBody>
+          <a:bodyPr/>
+          <a:lstStyle/>
+          <a:p>
+            <a:r>
+              <a:t>One FastAPI process, port 8799, React UI plus REST and streaming; chat engine,</a:t>
+            </a:r>
+          </a:p>
+          <a:p>
+            <a:r>
+              <a:t>agent pipeline, memory, integrations and job scheduler are libraries inside it.</a:t>
+            </a:r>
+          </a:p>
+          <a:p>
+            <a:r>
+              <a:t>Python 3.12 and one model endpoint; no GPU, torch, Postgres, Neo4j, vector</a:t>
+            </a:r>
+          </a:p>
+          <a:p>
+            <a:r>
+              <a:t>store or message broker. Runs on a desktop, a NUC, a server under systemd or a</a:t>
+            </a:r>
+          </a:p>
+          <a:p>
+            <a:r>
+              <a:t>container — the same single command, and an unset admin URL means this box is</a:t>
+            </a:r>
+          </a:p>
+          <a:p>
+            <a:r>
+              <a:t>it. Upgrade is git pull and run.sh, which converges the environment and</a:t>
+            </a:r>
+          </a:p>
+          <a:p>
+            <a:r>
+              <a:t>migrates in place.</a:t>
+            </a:r>
+          </a:p>
+          <a:p/>
+          <a:p>
+            <a:r>
+              <a:t>Pipeline: Triage, Enhancer, Architect, Planner, Verifier, then a build loop of</a:t>
+            </a:r>
+          </a:p>
+          <a:p>
+            <a:r>
+              <a:t>up to four parallel subtasks each in its own git worktree (Doer edits, tests</a:t>
+            </a:r>
+          </a:p>
+          <a:p>
+            <a:r>
+              <a:t>run, Feedback reads failures, Refiner fixes), then Validator gates,</a:t>
+            </a:r>
+          </a:p>
+          <a:p>
+            <a:r>
+              <a:t>Live-verifier runs the real recipe, Learner writes memory back, and the result</a:t>
+            </a:r>
+          </a:p>
+          <a:p>
+            <a:r>
+              <a:t>is a merge request a human reviews. Reasoning is plain text, so any model</a:t>
+            </a:r>
+          </a:p>
+          <a:p>
+            <a:r>
+              <a:t>drives it — no vendor function-calling. Simple mode writes, Plan mode is</a:t>
+            </a:r>
+          </a:p>
+          <a:p>
+            <a:r>
+              <a:t>read-only, Team mode runs the pipeline.</a:t>
+            </a:r>
+          </a:p>
+          <a:p/>
+          <a:p>
+            <a:r>
+              <a:t>Library: rules, skills and workflows are markdown the agent writes and reuses;</a:t>
+            </a:r>
+          </a:p>
+          <a:p>
+            <a:r>
+              <a:t>a nightly sweep merges near-duplicates so the prompt does not bloat, and a</a:t>
+            </a:r>
+          </a:p>
+          <a:p>
+            <a:r>
+              <a:t>merge unions the members' scopes rather than silently narrowing one.</a:t>
+            </a:r>
+          </a:p>
+          <a:p/>
+          <a:p>
+            <a:r>
+              <a:t>Memory: each desktop compacts locally, a client-side redaction filter blocks</a:t>
+            </a:r>
+          </a:p>
+          <a:p>
+            <a:r>
+              <a:t>credential-shaped and private notes before anything is advertised, one team</a:t>
+            </a:r>
+          </a:p>
+          <a:p>
+            <a:r>
+              <a:t>admin merges, and one admin can serve many independent fleets. Only distilled</a:t>
+            </a:r>
+          </a:p>
+          <a:p>
+            <a:r>
+              <a:t>knowledge nodes travel; transcripts, captures and working notes never leave the</a:t>
+            </a:r>
+          </a:p>
+          <a:p>
+            <a:r>
+              <a:t>machine that made them. Every merge is snapshotted with a revert endpoint.</a:t>
+            </a:r>
+          </a:p>
+          <a:p/>
+          <a:p>
+            <a:r>
+              <a:t>Integrations: Jira 21 tools, Confluence 14, GitLab 10, plus GitHub, email and</a:t>
+            </a:r>
+          </a:p>
+          <a:p>
+            <a:r>
+              <a:t>any MCP server; a tool with no credentials hides itself. A tree-sitter and</a:t>
+            </a:r>
+          </a:p>
+          <a:p>
+            <a:r>
+              <a:t>PageRank repo map plus 5 knowledge-graph tools choose context instead of</a:t>
+            </a:r>
+          </a:p>
+          <a:p>
+            <a:r>
+              <a:t>pasting it. A local vision model can screenshot the running app. The real</a:t>
+            </a:r>
+          </a:p>
+          <a:p>
+            <a:r>
+              <a:t>toolchain is present: shell, language server, type-checker, test runner, an</a:t>
+            </a:r>
+          </a:p>
+          <a:p>
+            <a:r>
+              <a:t>IPython kernel.</a:t>
+            </a:r>
+          </a:p>
+        </p:txBody>
+      </p:sp>
+      <p:sp>
+        <p:nvSpPr>
+          <p:cNvPr id="4" name="Slide Number Placeholder 3"/>
+          <p:cNvSpPr>
+            <a:spLocks noGrp="1"/>
+          </p:cNvSpPr>
+          <p:nvPr>
+            <p:ph type="sldNum" idx="5" sz="quarter"/>
+          </p:nvPr>
+        </p:nvSpPr>
+        <p:spPr/>
+      </p:sp>
+    </p:spTree>
+  </p:cSld>
+  <p:clrMapOvr>
+    <a:masterClrMapping/>
+  </p:clrMapOvr>
+</p:notes>
+</file>
+
+<file path=ppt/notesSlides/notesSlide2.xml><?xml version="1.0" encoding="utf-8"?>
+<p:notes xmlns:a="http://schemas.openxmlformats.org/drawingml/2006/main" xmlns:p="http://schemas.openxmlformats.org/presentationml/2006/main" xmlns:r="http://schemas.openxmlformats.org/officeDocument/2006/relationships">
+  <p:cSld>
+    <p:spTree>
+      <p:nvGrpSpPr>
+        <p:cNvPr id="1" name=""/>
+        <p:cNvGrpSpPr/>
+        <p:nvPr/>
+      </p:nvGrpSpPr>
+      <p:grpSpPr>
+        <a:xfrm>
+          <a:off x="0" y="0"/>
+          <a:ext cx="0" cy="0"/>
+          <a:chOff x="0" y="0"/>
+          <a:chExt cx="0" cy="0"/>
+        </a:xfrm>
+      </p:grpSpPr>
+      <p:sp>
+        <p:nvSpPr>
+          <p:cNvPr id="2" name="Slide Image Placeholder 1"/>
+          <p:cNvSpPr>
+            <a:spLocks noGrp="1"/>
+          </p:cNvSpPr>
+          <p:nvPr>
+            <p:ph type="sldImg" idx="2"/>
+          </p:nvPr>
+        </p:nvSpPr>
+        <p:spPr/>
+      </p:sp>
+      <p:sp>
+        <p:nvSpPr>
+          <p:cNvPr id="3" name="Notes Placeholder 2"/>
+          <p:cNvSpPr>
+            <a:spLocks noGrp="1"/>
+          </p:cNvSpPr>
+          <p:nvPr>
+            <p:ph type="body" idx="3" sz="quarter"/>
+          </p:nvPr>
+        </p:nvSpPr>
+        <p:spPr/>
+        <p:txBody>
+          <a:bodyPr/>
+          <a:lstStyle/>
+          <a:p>
+            <a:r>
+              <a:t>The incident that set the bar: a fetch the tool refused was rerouted through a</a:t>
+            </a:r>
+          </a:p>
+          <a:p>
+            <a:r>
+              <a:t>shell curl, then through a notebook cell, and it worked. A boundary you can</a:t>
+            </a:r>
+          </a:p>
+          <a:p>
+            <a:r>
+              <a:t>walk around by changing transport is a suggestion, so one module answers on all</a:t>
+            </a:r>
+          </a:p>
+          <a:p>
+            <a:r>
+              <a:t>three paths and after every redirect, and a missing allow-list entry is DENIED</a:t>
+            </a:r>
+          </a:p>
+          <a:p>
+            <a:r>
+              <a:t>rather than escalated to a human.</a:t>
+            </a:r>
+          </a:p>
+          <a:p/>
+          <a:p>
+            <a:r>
+              <a:t>Outbound, refused: scp, rsync, sftp, ssh host 'cmd', curl -d/-F/-T, aws s3 cp,</a:t>
+            </a:r>
+          </a:p>
+          <a:p>
+            <a:r>
+              <a:t>docker push, npm publish, git push to a URL, and bash's own &gt; /dev/tcp/host/port.</a:t>
+            </a:r>
+          </a:p>
+          <a:p>
+            <a:r>
+              <a:t>Inbound: web fetch, crawl, headless browser, @mention expansion. Web SEARCH was</a:t>
+            </a:r>
+          </a:p>
+          <a:p>
+            <a:r>
+              <a:t>deleted outright because the query string is our own data leaving the box, and</a:t>
+            </a:r>
+          </a:p>
+          <a:p>
+            <a:r>
+              <a:t>deleting the tool closed nothing until the refusal moved to the fetch layer.</a:t>
+            </a:r>
+          </a:p>
+          <a:p>
+            <a:r>
+              <a:t>AIFORGE_EGRESS_OFF closes everything in one switch; per-class switches cover</a:t>
+            </a:r>
+          </a:p>
+          <a:p>
+            <a:r>
+              <a:t>integrations, email, telemetry, MCP and fleet sync. Loopback, LAN, a local</a:t>
+            </a:r>
+          </a:p>
+          <a:p>
+            <a:r>
+              <a:t>registry and a git push to a named remote stay allowed on purpose — a control</a:t>
+            </a:r>
+          </a:p>
+          <a:p>
+            <a:r>
+              <a:t>that blocks ordinary work is a control that gets switched off.</a:t>
+            </a:r>
+          </a:p>
+          <a:p/>
+          <a:p>
+            <a:r>
+              <a:t>Access: a token is required on every API route but health; a non-loopback bind</a:t>
+            </a:r>
+          </a:p>
+          <a:p>
+            <a:r>
+              <a:t>with NO token refuses to boot, and the guard inspects the real server rather</a:t>
+            </a:r>
+          </a:p>
+          <a:p>
+            <a:r>
+              <a:t>than an env var only run.sh sets. Loopback trust must be declared, because</a:t>
+            </a:r>
+          </a:p>
+          <a:p>
+            <a:r>
+              <a:t>behind a same-host reverse proxy every request looks like 127.0.0.1 — which was</a:t>
+            </a:r>
+          </a:p>
+          <a:p>
+            <a:r>
+              <a:t>a full auth bypass. CORS is an allow-list, never a wildcard. Limits: one shared</a:t>
+            </a:r>
+          </a:p>
+          <a:p>
+            <a:r>
+              <a:t>token, so no per-user identity or SSO yet, and fleet sync is open unless closed.</a:t>
+            </a:r>
+          </a:p>
+          <a:p/>
+          <a:p>
+            <a:r>
+              <a:t>Untrusted input: a ticket description, a fetched page or a review comment</a:t>
+            </a:r>
+          </a:p>
+          <a:p>
+            <a:r>
+              <a:t>reaches the model beside your own instruction and we do not classify it. So the</a:t>
+            </a:r>
+          </a:p>
+          <a:p>
+            <a:r>
+              <a:t>answer is containment: the egress refusal is code rather than model judgement,</a:t>
+            </a:r>
+          </a:p>
+          <a:p>
+            <a:r>
+              <a:t>the 20 external-write tools ask a human, file tools are clamped to the</a:t>
+            </a:r>
+          </a:p>
+          <a:p>
+            <a:r>
+              <a:t>workspace, Plan mode cannot write, and unattended runs refuse writes outright.</a:t>
+            </a:r>
+          </a:p>
+          <a:p/>
+          <a:p>
+            <a:r>
+              <a:t>Trust and secrets: no CERT_NONE anywhere — each endpoint's certificate is</a:t>
+            </a:r>
+          </a:p>
+          <a:p>
+            <a:r>
+              <a:t>verified, and one AIFORGE_CA_BUNDLE covers the model endpoint, the</a:t>
+            </a:r>
+          </a:p>
+          <a:p>
+            <a:r>
+              <a:t>integrations, AIForge's own HTTP and every subprocess (git, curl, npm), or a</a:t>
+            </a:r>
+          </a:p>
+          <a:p>
+            <a:r>
+              <a:t>self-signed host is pinned on first use. Credentials, MCP headers and the</a:t>
+            </a:r>
+          </a:p>
+          <a:p>
+            <a:r>
+              <a:t>runtime env live in one 0700 folder, files 0600, repaired on boot.</a:t>
+            </a:r>
+          </a:p>
+          <a:p/>
+          <a:p>
+            <a:r>
+              <a:t>Cost: a rate ceiling in requests per minute per role keeps background work from</a:t>
+            </a:r>
+          </a:p>
+          <a:p>
+            <a:r>
+              <a:t>out-shouting a person, a request meter attributes every call to a role and a</a:t>
+            </a:r>
+          </a:p>
+          <a:p>
+            <a:r>
+              <a:t>task, long sessions compact into briefs, and escalation to a cloud model</a:t>
+            </a:r>
+          </a:p>
+          <a:p>
+            <a:r>
+              <a:t>happens only after a local failure and only if you registered one. With a local</a:t>
+            </a:r>
+          </a:p>
+          <a:p>
+            <a:r>
+              <a:t>endpoint the marginal cost of a run is electricity.</a:t>
+            </a:r>
+          </a:p>
+          <a:p/>
+          <a:p>
+            <a:r>
+              <a:t>Supply chain: one build emits sonar/, blackduck/ and a CycloneDX SBOM; a heavy</a:t>
+            </a:r>
+          </a:p>
+          <a:p>
+            <a:r>
+              <a:t>dependency was dropped and its repo-map vendored under Apache-2.0, 212 packages</a:t>
+            </a:r>
+          </a:p>
+          <a:p>
+            <a:r>
+              <a:t>to 186. Every control above began as a bypass that WORKED in testing, and each</a:t>
+            </a:r>
+          </a:p>
+          <a:p>
+            <a:r>
+              <a:t>is pinned by a test verified to fail on the tree before the fix.</a:t>
+            </a:r>
+          </a:p>
+        </p:txBody>
+      </p:sp>
+      <p:sp>
+        <p:nvSpPr>
+          <p:cNvPr id="4" name="Slide Number Placeholder 3"/>
+          <p:cNvSpPr>
+            <a:spLocks noGrp="1"/>
+          </p:cNvSpPr>
+          <p:nvPr>
+            <p:ph type="sldNum" idx="5" sz="quarter"/>
+          </p:nvPr>
+        </p:nvSpPr>
+        <p:spPr/>
+      </p:sp>
+    </p:spTree>
+  </p:cSld>
+  <p:clrMapOvr>
+    <a:masterClrMapping/>
+  </p:clrMapOvr>
+</p:notes>
+</file>
+
+<file path=ppt/notesSlides/notesSlide3.xml><?xml version="1.0" encoding="utf-8"?>
+<p:notes xmlns:a="http://schemas.openxmlformats.org/drawingml/2006/main" xmlns:p="http://schemas.openxmlformats.org/presentationml/2006/main" xmlns:r="http://schemas.openxmlformats.org/officeDocument/2006/relationships">
+  <p:cSld>
+    <p:spTree>
+      <p:nvGrpSpPr>
+        <p:cNvPr id="1" name=""/>
+        <p:cNvGrpSpPr/>
+        <p:nvPr/>
+      </p:nvGrpSpPr>
+      <p:grpSpPr>
+        <a:xfrm>
+          <a:off x="0" y="0"/>
+          <a:ext cx="0" cy="0"/>
+          <a:chOff x="0" y="0"/>
+          <a:chExt cx="0" cy="0"/>
+        </a:xfrm>
+      </p:grpSpPr>
+      <p:sp>
+        <p:nvSpPr>
+          <p:cNvPr id="2" name="Slide Image Placeholder 1"/>
+          <p:cNvSpPr>
+            <a:spLocks noGrp="1"/>
+          </p:cNvSpPr>
+          <p:nvPr>
+            <p:ph type="sldImg" idx="2"/>
+          </p:nvPr>
+        </p:nvSpPr>
+        <p:spPr/>
+      </p:sp>
+      <p:sp>
+        <p:nvSpPr>
+          <p:cNvPr id="3" name="Notes Placeholder 2"/>
+          <p:cNvSpPr>
+            <a:spLocks noGrp="1"/>
+          </p:cNvSpPr>
+          <p:nvPr>
+            <p:ph type="body" idx="3" sz="quarter"/>
+          </p:nvPr>
+        </p:nvSpPr>
+        <p:spPr/>
+        <p:txBody>
+          <a:bodyPr/>
+          <a:lstStyle/>
+          <a:p>
+            <a:r>
+              <a:t>Why the zero is real: the scan covers the whole repository — an earlier config</a:t>
+            </a:r>
+          </a:p>
+          <a:p>
+            <a:r>
+              <a:t>scanned two directories, reported zero, and CI still failed. Duplicate build</a:t>
+            </a:r>
+          </a:p>
+          <a:p>
+            <a:r>
+              <a:t>copies are excluded so nothing is counted twice, and coverage is regenerated</a:t>
+            </a:r>
+          </a:p>
+          <a:p>
+            <a:r>
+              <a:t>with every scan because one out-of-range line makes the whole report read 0%.</a:t>
+            </a:r>
+          </a:p>
+          <a:p>
+            <a:r>
+              <a:t>The suite's own line coverage is 86.7%; Sonar reports 82.8% because it also</a:t>
+            </a:r>
+          </a:p>
+          <a:p>
+            <a:r>
+              <a:t>counts files the unit suite never imports. 8,606 tests ran: 3 failed, 0 errors,</a:t>
+            </a:r>
+          </a:p>
+          <a:p>
+            <a:r>
+              <a:t>0 skipped, all three in one file needing a model actually served on the shared</a:t>
+            </a:r>
+          </a:p>
+          <a:p>
+            <a:r>
+              <a:t>endpoint, which was empty — stated rather than rounded to zero. Nine standing</a:t>
+            </a:r>
+          </a:p>
+          <a:p>
+            <a:r>
+              <a:t>vulnerabilities were closed by CHANGING CODE (TLS pinning, scheme validation,</a:t>
+            </a:r>
+          </a:p>
+          <a:p>
+            <a:r>
+              <a:t>digest usage) after two earlier passes had triaged them as accepted decisions.</a:t>
+            </a:r>
+          </a:p>
+          <a:p>
+            <a:r>
+              <a:t>They were decisions; they were the wrong ones.</a:t>
+            </a:r>
+          </a:p>
+          <a:p/>
+          <a:p>
+            <a:r>
+              <a:t>What the number does not say: it is the platform's quality, not the agent's</a:t>
+            </a:r>
+          </a:p>
+          <a:p>
+            <a:r>
+              <a:t>output. A tree with zero findings can still write a wrong patch. There is no</a:t>
+            </a:r>
+          </a:p>
+          <a:p>
+            <a:r>
+              <a:t>evaluation harness — no frozen set of closed tickets replayed each release, no</a:t>
+            </a:r>
+          </a:p>
+          <a:p>
+            <a:r>
+              <a:t>acceptance rate (merged without a rewrite), no edit distance between what the</a:t>
+            </a:r>
+          </a:p>
+          <a:p>
+            <a:r>
+              <a:t>agent wrote and what shipped, and nothing re-run when the model is swapped.</a:t>
+            </a:r>
+          </a:p>
+          <a:p>
+            <a:r>
+              <a:t>There is no load test, so no honest number for developers per box, VRAM for a</a:t>
+            </a:r>
+          </a:p>
+          <a:p>
+            <a:r>
+              <a:t>team of N, or wall-clock per ticket. Backup is copying one folder, but there is</a:t>
+            </a:r>
+          </a:p>
+          <a:p>
+            <a:r>
+              <a:t>no documented restore drill, and the traces that record every tool call name</a:t>
+            </a:r>
+          </a:p>
+          <a:p>
+            <a:r>
+              <a:t>the BOX rather than a person, with no retention or tamper-evidence: good for</a:t>
+            </a:r>
+          </a:p>
+          <a:p>
+            <a:r>
+              <a:t>debugging a run, not yet evidence for an auditor.</a:t>
+            </a:r>
+          </a:p>
+          <a:p/>
+          <a:p>
+            <a:r>
+              <a:t>The comparison a budget actually faces: a per-seat assistant prices per</a:t>
+            </a:r>
+          </a:p>
+          <a:p>
+            <a:r>
+              <a:t>developer per month and sends the source to its vendor; this prices as hardware</a:t>
+            </a:r>
+          </a:p>
+          <a:p>
+            <a:r>
+              <a:t>you already own and sends it to the endpoint you set. Cost is the easy half —</a:t>
+            </a:r>
+          </a:p>
+          <a:p>
+            <a:r>
+              <a:t>output quality is the argument worth having, which is why the first ask is to</a:t>
+            </a:r>
+          </a:p>
+          <a:p>
+            <a:r>
+              <a:t>fund the harness.</a:t>
+            </a:r>
+          </a:p>
+          <a:p/>
+          <a:p>
+            <a:r>
+              <a:t>The five asks, in order: prove the output; name an owner and a support rota;</a:t>
+            </a:r>
+          </a:p>
+          <a:p>
+            <a:r>
+              <a:t>decide which network holds the merged company memory and who owns it; add the</a:t>
+            </a:r>
+          </a:p>
+          <a:p>
+            <a:r>
+              <a:t>OS-level firewall rule the shell still needs and decide on per-user identity;</a:t>
+            </a:r>
+          </a:p>
+          <a:p>
+            <a:r>
+              <a:t>and confirm the corporate scanner profile so both servers agree.</a:t>
+            </a:r>
+          </a:p>
+        </p:txBody>
+      </p:sp>
+      <p:sp>
+        <p:nvSpPr>
+          <p:cNvPr id="4" name="Slide Number Placeholder 3"/>
+          <p:cNvSpPr>
+            <a:spLocks noGrp="1"/>
+          </p:cNvSpPr>
+          <p:nvPr>
+            <p:ph type="sldNum" idx="5" sz="quarter"/>
+          </p:nvPr>
+        </p:nvSpPr>
+        <p:spPr/>
+      </p:sp>
+    </p:spTree>
+  </p:cSld>
+  <p:clrMapOvr>
+    <a:masterClrMapping/>
+  </p:clrMapOvr>
+</p:notes>
 </file>
 
 <file path=ppt/slideLayouts/slideLayout1.xml><?xml version="1.0" encoding="utf-8"?>
@@ -3163,7 +4206,7 @@
                 </a:solidFill>
                 <a:latin typeface="Segoe UI"/>
               </a:rPr>
-              <a:t>A ticket becomes a merge request; a question becomes work on the filesystem. One process, one folder of state, no database to operate.</a:t>
+              <a:t>A ticket becomes a merge request. On your hardware, against your model, with no database anywhere in it.</a:t>
             </a:r>
           </a:p>
         </p:txBody>
@@ -3246,7 +4289,7 @@
                 </a:solidFill>
                 <a:latin typeface="Segoe UI"/>
               </a:rPr>
-              <a:t>Measured on main @ 7d9e60ae, 2026-09-06. Python 3.12 and one model endpoint. No GPU required, no torch, no Postgres, no Neo4j, no vector store, no message broker — the removals are the product as much as the features are.</a:t>
+              <a:t>Measured on main @ 7d9e60ae, 2026-09-06. One Python service, one port, one folder of state.</a:t>
             </a:r>
           </a:p>
         </p:txBody>
@@ -3298,8 +4341,8 @@
         </p:nvSpPr>
         <p:spPr>
           <a:xfrm>
-            <a:off x="566928" y="1280160"/>
-            <a:ext cx="2212848" cy="384048"/>
+            <a:off x="566928" y="1243584"/>
+            <a:ext cx="1844040" cy="384048"/>
           </a:xfrm>
           <a:prstGeom prst="rect">
             <a:avLst/>
@@ -3337,8 +4380,8 @@
         </p:nvSpPr>
         <p:spPr>
           <a:xfrm>
-            <a:off x="640080" y="1682496"/>
-            <a:ext cx="2066544" cy="384048"/>
+            <a:off x="640080" y="1645920"/>
+            <a:ext cx="1697736" cy="384048"/>
           </a:xfrm>
           <a:prstGeom prst="rect">
             <a:avLst/>
@@ -3363,7 +4406,7 @@
                 </a:solidFill>
                 <a:latin typeface="Segoe UI"/>
               </a:rPr>
-              <a:t>tools the chat agent drives</a:t>
+              <a:t>tools</a:t>
             </a:r>
           </a:p>
         </p:txBody>
@@ -3376,8 +4419,8 @@
         </p:nvSpPr>
         <p:spPr>
           <a:xfrm>
-            <a:off x="2779776" y="1280160"/>
-            <a:ext cx="2212848" cy="384048"/>
+            <a:off x="2410968" y="1243584"/>
+            <a:ext cx="1844040" cy="384048"/>
           </a:xfrm>
           <a:prstGeom prst="rect">
             <a:avLst/>
@@ -3415,8 +4458,8 @@
         </p:nvSpPr>
         <p:spPr>
           <a:xfrm>
-            <a:off x="2852928" y="1682496"/>
-            <a:ext cx="2066544" cy="384048"/>
+            <a:off x="2484120" y="1645920"/>
+            <a:ext cx="1697736" cy="384048"/>
           </a:xfrm>
           <a:prstGeom prst="rect">
             <a:avLst/>
@@ -3441,7 +4484,7 @@
                 </a:solidFill>
                 <a:latin typeface="Segoe UI"/>
               </a:rPr>
-              <a:t>specialised agent roles</a:t>
+              <a:t>agent roles</a:t>
             </a:r>
           </a:p>
         </p:txBody>
@@ -3454,7 +4497,7 @@
         </p:nvSpPr>
         <p:spPr>
           <a:xfrm>
-            <a:off x="2779776" y="1316736"/>
+            <a:off x="2410968" y="1280160"/>
             <a:ext cx="9525" cy="566928"/>
           </a:xfrm>
           <a:prstGeom prst="rect">
@@ -3498,8 +4541,8 @@
         </p:nvSpPr>
         <p:spPr>
           <a:xfrm>
-            <a:off x="4992624" y="1280160"/>
-            <a:ext cx="2212848" cy="384048"/>
+            <a:off x="4255008" y="1243584"/>
+            <a:ext cx="1844040" cy="384048"/>
           </a:xfrm>
           <a:prstGeom prst="rect">
             <a:avLst/>
@@ -3537,8 +4580,8 @@
         </p:nvSpPr>
         <p:spPr>
           <a:xfrm>
-            <a:off x="5065776" y="1682496"/>
-            <a:ext cx="2066544" cy="384048"/>
+            <a:off x="4328160" y="1645920"/>
+            <a:ext cx="1697736" cy="384048"/>
           </a:xfrm>
           <a:prstGeom prst="rect">
             <a:avLst/>
@@ -3563,7 +4606,7 @@
                 </a:solidFill>
                 <a:latin typeface="Segoe UI"/>
               </a:rPr>
-              <a:t>chat modes on one engine</a:t>
+              <a:t>chat modes</a:t>
             </a:r>
           </a:p>
         </p:txBody>
@@ -3576,7 +4619,7 @@
         </p:nvSpPr>
         <p:spPr>
           <a:xfrm>
-            <a:off x="4992624" y="1316736"/>
+            <a:off x="4255008" y="1280160"/>
             <a:ext cx="9525" cy="566928"/>
           </a:xfrm>
           <a:prstGeom prst="rect">
@@ -3620,8 +4663,8 @@
         </p:nvSpPr>
         <p:spPr>
           <a:xfrm>
-            <a:off x="7205472" y="1280160"/>
-            <a:ext cx="2212848" cy="384048"/>
+            <a:off x="6099048" y="1243584"/>
+            <a:ext cx="1844040" cy="384048"/>
           </a:xfrm>
           <a:prstGeom prst="rect">
             <a:avLst/>
@@ -3659,8 +4702,8 @@
         </p:nvSpPr>
         <p:spPr>
           <a:xfrm>
-            <a:off x="7278624" y="1682496"/>
-            <a:ext cx="2066544" cy="384048"/>
+            <a:off x="6172200" y="1645920"/>
+            <a:ext cx="1697736" cy="384048"/>
           </a:xfrm>
           <a:prstGeom prst="rect">
             <a:avLst/>
@@ -3685,7 +4728,7 @@
                 </a:solidFill>
                 <a:latin typeface="Segoe UI"/>
               </a:rPr>
-              <a:t>databases to install or tune</a:t>
+              <a:t>databases</a:t>
             </a:r>
           </a:p>
         </p:txBody>
@@ -3698,7 +4741,7 @@
         </p:nvSpPr>
         <p:spPr>
           <a:xfrm>
-            <a:off x="7205472" y="1316736"/>
+            <a:off x="6099048" y="1280160"/>
             <a:ext cx="9525" cy="566928"/>
           </a:xfrm>
           <a:prstGeom prst="rect">
@@ -3742,8 +4785,8 @@
         </p:nvSpPr>
         <p:spPr>
           <a:xfrm>
-            <a:off x="9418320" y="1280160"/>
-            <a:ext cx="2212848" cy="384048"/>
+            <a:off x="7943088" y="1243584"/>
+            <a:ext cx="1844040" cy="384048"/>
           </a:xfrm>
           <a:prstGeom prst="rect">
             <a:avLst/>
@@ -3764,11 +4807,11 @@
             <a:r>
               <a:rPr sz="2500" b="1">
                 <a:solidFill>
-                  <a:srgbClr val="3A3A3A"/>
-                </a:solidFill>
-                <a:latin typeface="Segoe UI"/>
-              </a:rPr>
-              <a:t>71,204</a:t>
+                  <a:srgbClr val="1E6B52"/>
+                </a:solidFill>
+                <a:latin typeface="Segoe UI"/>
+              </a:rPr>
+              <a:t>8,606</a:t>
             </a:r>
           </a:p>
         </p:txBody>
@@ -3781,8 +4824,8 @@
         </p:nvSpPr>
         <p:spPr>
           <a:xfrm>
-            <a:off x="9491472" y="1682496"/>
-            <a:ext cx="2066544" cy="384048"/>
+            <a:off x="8016240" y="1645920"/>
+            <a:ext cx="1697736" cy="384048"/>
           </a:xfrm>
           <a:prstGeom prst="rect">
             <a:avLst/>
@@ -3807,7 +4850,7 @@
                 </a:solidFill>
                 <a:latin typeface="Segoe UI"/>
               </a:rPr>
-              <a:t>lines of production code</a:t>
+              <a:t>tests</a:t>
             </a:r>
           </a:p>
         </p:txBody>
@@ -3820,7 +4863,7 @@
         </p:nvSpPr>
         <p:spPr>
           <a:xfrm>
-            <a:off x="9418320" y="1316736"/>
+            <a:off x="7943088" y="1280160"/>
             <a:ext cx="9525" cy="566928"/>
           </a:xfrm>
           <a:prstGeom prst="rect">
@@ -3858,14 +4901,451 @@
       </p:sp>
       <p:sp>
         <p:nvSpPr>
-          <p:cNvPr id="21" name="Rounded Rectangle 20"/>
+          <p:cNvPr id="21" name="TextBox 20"/>
+          <p:cNvSpPr txBox="1"/>
+          <p:nvPr/>
+        </p:nvSpPr>
+        <p:spPr>
+          <a:xfrm>
+            <a:off x="9787128" y="1243584"/>
+            <a:ext cx="1844040" cy="384048"/>
+          </a:xfrm>
+          <a:prstGeom prst="rect">
+            <a:avLst/>
+          </a:prstGeom>
+          <a:noFill/>
+        </p:spPr>
+        <p:txBody>
+          <a:bodyPr wrap="square" anchor="t" lIns="0" rIns="0" tIns="0" bIns="0">
+            <a:spAutoFit/>
+          </a:bodyPr>
+          <a:lstStyle/>
+          <a:p>
+            <a:pPr algn="ctr">
+              <a:spcAft>
+                <a:spcPts val="0"/>
+              </a:spcAft>
+            </a:pPr>
+            <a:r>
+              <a:rPr sz="2500" b="1">
+                <a:solidFill>
+                  <a:srgbClr val="1E6B52"/>
+                </a:solidFill>
+                <a:latin typeface="Segoe UI"/>
+              </a:rPr>
+              <a:t>0</a:t>
+            </a:r>
+          </a:p>
+        </p:txBody>
+      </p:sp>
+      <p:sp>
+        <p:nvSpPr>
+          <p:cNvPr id="22" name="TextBox 21"/>
+          <p:cNvSpPr txBox="1"/>
+          <p:nvPr/>
+        </p:nvSpPr>
+        <p:spPr>
+          <a:xfrm>
+            <a:off x="9860280" y="1645920"/>
+            <a:ext cx="1697736" cy="384048"/>
+          </a:xfrm>
+          <a:prstGeom prst="rect">
+            <a:avLst/>
+          </a:prstGeom>
+          <a:noFill/>
+        </p:spPr>
+        <p:txBody>
+          <a:bodyPr wrap="square" anchor="t" lIns="0" rIns="0" tIns="0" bIns="0">
+            <a:spAutoFit/>
+          </a:bodyPr>
+          <a:lstStyle/>
+          <a:p>
+            <a:pPr algn="ctr">
+              <a:spcAft>
+                <a:spcPts val="0"/>
+              </a:spcAft>
+            </a:pPr>
+            <a:r>
+              <a:rPr sz="1050" b="0">
+                <a:solidFill>
+                  <a:srgbClr val="6B6B6B"/>
+                </a:solidFill>
+                <a:latin typeface="Segoe UI"/>
+              </a:rPr>
+              <a:t>Sonar findings</a:t>
+            </a:r>
+          </a:p>
+        </p:txBody>
+      </p:sp>
+      <p:sp>
+        <p:nvSpPr>
+          <p:cNvPr id="23" name="Rectangle 22"/>
           <p:cNvSpPr/>
           <p:nvPr/>
         </p:nvSpPr>
         <p:spPr>
           <a:xfrm>
-            <a:off x="566928" y="2048256"/>
-            <a:ext cx="11064240" cy="859536"/>
+            <a:off x="9787128" y="1280160"/>
+            <a:ext cx="9525" cy="566928"/>
+          </a:xfrm>
+          <a:prstGeom prst="rect">
+            <a:avLst/>
+          </a:prstGeom>
+          <a:solidFill>
+            <a:srgbClr val="C9C9C9"/>
+          </a:solidFill>
+          <a:ln>
+            <a:noFill/>
+          </a:ln>
+          <a:effectLst/>
+        </p:spPr>
+        <p:style>
+          <a:lnRef idx="1">
+            <a:schemeClr val="accent1"/>
+          </a:lnRef>
+          <a:fillRef idx="3">
+            <a:schemeClr val="accent1"/>
+          </a:fillRef>
+          <a:effectRef idx="2">
+            <a:schemeClr val="accent1"/>
+          </a:effectRef>
+          <a:fontRef idx="minor">
+            <a:schemeClr val="lt1"/>
+          </a:fontRef>
+        </p:style>
+        <p:txBody>
+          <a:bodyPr rtlCol="0" anchor="ctr"/>
+          <a:lstStyle/>
+          <a:p>
+            <a:pPr algn="ctr"/>
+          </a:p>
+        </p:txBody>
+      </p:sp>
+      <p:sp>
+        <p:nvSpPr>
+          <p:cNvPr id="24" name="Rounded Rectangle 23"/>
+          <p:cNvSpPr/>
+          <p:nvPr/>
+        </p:nvSpPr>
+        <p:spPr>
+          <a:xfrm>
+            <a:off x="566928" y="2103120"/>
+            <a:ext cx="1920240" cy="438912"/>
+          </a:xfrm>
+          <a:prstGeom prst="roundRect">
+            <a:avLst>
+              <a:gd name="adj" fmla="val 10000"/>
+            </a:avLst>
+          </a:prstGeom>
+          <a:solidFill>
+            <a:srgbClr val="DCE7F2"/>
+          </a:solidFill>
+          <a:ln w="12700">
+            <a:solidFill>
+              <a:srgbClr val="1F4E79"/>
+            </a:solidFill>
+          </a:ln>
+          <a:effectLst/>
+        </p:spPr>
+        <p:style>
+          <a:lnRef idx="1">
+            <a:schemeClr val="accent1"/>
+          </a:lnRef>
+          <a:fillRef idx="3">
+            <a:schemeClr val="accent1"/>
+          </a:fillRef>
+          <a:effectRef idx="2">
+            <a:schemeClr val="accent1"/>
+          </a:effectRef>
+          <a:fontRef idx="minor">
+            <a:schemeClr val="lt1"/>
+          </a:fontRef>
+        </p:style>
+        <p:txBody>
+          <a:bodyPr rtlCol="0" anchor="ctr" wrap="square" lIns="54864" rIns="54864" tIns="27432" bIns="27432"/>
+          <a:lstStyle/>
+          <a:p>
+            <a:pPr algn="ctr"/>
+            <a:r>
+              <a:rPr sz="1100" b="1">
+                <a:solidFill>
+                  <a:srgbClr val="1F4E79"/>
+                </a:solidFill>
+                <a:latin typeface="Segoe UI"/>
+              </a:rPr>
+              <a:t>Ticket</a:t>
+            </a:r>
+          </a:p>
+          <a:p>
+            <a:pPr algn="ctr"/>
+            <a:r>
+              <a:rPr sz="800" b="0">
+                <a:solidFill>
+                  <a:srgbClr val="1A1A1A"/>
+                </a:solidFill>
+                <a:latin typeface="Segoe UI"/>
+              </a:rPr>
+              <a:t>Jira · GitLab</a:t>
+            </a:r>
+          </a:p>
+        </p:txBody>
+      </p:sp>
+      <p:cxnSp>
+        <p:nvCxnSpPr>
+          <p:cNvPr id="25" name="Connector 24"/>
+          <p:cNvCxnSpPr/>
+          <p:nvPr/>
+        </p:nvCxnSpPr>
+        <p:spPr>
+          <a:xfrm>
+            <a:off x="2487168" y="2322576"/>
+            <a:ext cx="530352" cy="292608"/>
+          </a:xfrm>
+          <a:prstGeom prst="line">
+            <a:avLst/>
+          </a:prstGeom>
+          <a:ln w="19050">
+            <a:solidFill>
+              <a:srgbClr val="C9C9C9"/>
+            </a:solidFill>
+            <a:tailEnd type="triangle" w="med" len="med"/>
+          </a:ln>
+        </p:spPr>
+        <p:style>
+          <a:lnRef idx="2">
+            <a:schemeClr val="accent1"/>
+          </a:lnRef>
+          <a:fillRef idx="0">
+            <a:schemeClr val="accent1"/>
+          </a:fillRef>
+          <a:effectRef idx="1">
+            <a:schemeClr val="accent1"/>
+          </a:effectRef>
+          <a:fontRef idx="minor">
+            <a:schemeClr val="tx1"/>
+          </a:fontRef>
+        </p:style>
+      </p:cxnSp>
+      <p:sp>
+        <p:nvSpPr>
+          <p:cNvPr id="26" name="Rounded Rectangle 25"/>
+          <p:cNvSpPr/>
+          <p:nvPr/>
+        </p:nvSpPr>
+        <p:spPr>
+          <a:xfrm>
+            <a:off x="566928" y="2615184"/>
+            <a:ext cx="1920240" cy="438912"/>
+          </a:xfrm>
+          <a:prstGeom prst="roundRect">
+            <a:avLst>
+              <a:gd name="adj" fmla="val 10000"/>
+            </a:avLst>
+          </a:prstGeom>
+          <a:solidFill>
+            <a:srgbClr val="DCEEE7"/>
+          </a:solidFill>
+          <a:ln w="12700">
+            <a:solidFill>
+              <a:srgbClr val="1E6B52"/>
+            </a:solidFill>
+          </a:ln>
+          <a:effectLst/>
+        </p:spPr>
+        <p:style>
+          <a:lnRef idx="1">
+            <a:schemeClr val="accent1"/>
+          </a:lnRef>
+          <a:fillRef idx="3">
+            <a:schemeClr val="accent1"/>
+          </a:fillRef>
+          <a:effectRef idx="2">
+            <a:schemeClr val="accent1"/>
+          </a:effectRef>
+          <a:fontRef idx="minor">
+            <a:schemeClr val="lt1"/>
+          </a:fontRef>
+        </p:style>
+        <p:txBody>
+          <a:bodyPr rtlCol="0" anchor="ctr" wrap="square" lIns="54864" rIns="54864" tIns="27432" bIns="27432"/>
+          <a:lstStyle/>
+          <a:p>
+            <a:pPr algn="ctr"/>
+            <a:r>
+              <a:rPr sz="1100" b="1">
+                <a:solidFill>
+                  <a:srgbClr val="1E6B52"/>
+                </a:solidFill>
+                <a:latin typeface="Segoe UI"/>
+              </a:rPr>
+              <a:t>Chat</a:t>
+            </a:r>
+          </a:p>
+          <a:p>
+            <a:pPr algn="ctr"/>
+            <a:r>
+              <a:rPr sz="800" b="0">
+                <a:solidFill>
+                  <a:srgbClr val="1A1A1A"/>
+                </a:solidFill>
+                <a:latin typeface="Segoe UI"/>
+              </a:rPr>
+              <a:t>ask · plan · team</a:t>
+            </a:r>
+          </a:p>
+        </p:txBody>
+      </p:sp>
+      <p:cxnSp>
+        <p:nvCxnSpPr>
+          <p:cNvPr id="27" name="Connector 26"/>
+          <p:cNvCxnSpPr/>
+          <p:nvPr/>
+        </p:nvCxnSpPr>
+        <p:spPr>
+          <a:xfrm flipV="1">
+            <a:off x="2487168" y="2615184"/>
+            <a:ext cx="530352" cy="219456"/>
+          </a:xfrm>
+          <a:prstGeom prst="line">
+            <a:avLst/>
+          </a:prstGeom>
+          <a:ln w="19050">
+            <a:solidFill>
+              <a:srgbClr val="C9C9C9"/>
+            </a:solidFill>
+            <a:tailEnd type="triangle" w="med" len="med"/>
+          </a:ln>
+        </p:spPr>
+        <p:style>
+          <a:lnRef idx="2">
+            <a:schemeClr val="accent1"/>
+          </a:lnRef>
+          <a:fillRef idx="0">
+            <a:schemeClr val="accent1"/>
+          </a:fillRef>
+          <a:effectRef idx="1">
+            <a:schemeClr val="accent1"/>
+          </a:effectRef>
+          <a:fontRef idx="minor">
+            <a:schemeClr val="tx1"/>
+          </a:fontRef>
+        </p:style>
+      </p:cxnSp>
+      <p:sp>
+        <p:nvSpPr>
+          <p:cNvPr id="28" name="Rounded Rectangle 27"/>
+          <p:cNvSpPr/>
+          <p:nvPr/>
+        </p:nvSpPr>
+        <p:spPr>
+          <a:xfrm>
+            <a:off x="566928" y="3127248"/>
+            <a:ext cx="1920240" cy="438912"/>
+          </a:xfrm>
+          <a:prstGeom prst="roundRect">
+            <a:avLst>
+              <a:gd name="adj" fmla="val 10000"/>
+            </a:avLst>
+          </a:prstGeom>
+          <a:solidFill>
+            <a:srgbClr val="EAE1F0"/>
+          </a:solidFill>
+          <a:ln w="12700">
+            <a:solidFill>
+              <a:srgbClr val="5B3A6E"/>
+            </a:solidFill>
+          </a:ln>
+          <a:effectLst/>
+        </p:spPr>
+        <p:style>
+          <a:lnRef idx="1">
+            <a:schemeClr val="accent1"/>
+          </a:lnRef>
+          <a:fillRef idx="3">
+            <a:schemeClr val="accent1"/>
+          </a:fillRef>
+          <a:effectRef idx="2">
+            <a:schemeClr val="accent1"/>
+          </a:effectRef>
+          <a:fontRef idx="minor">
+            <a:schemeClr val="lt1"/>
+          </a:fontRef>
+        </p:style>
+        <p:txBody>
+          <a:bodyPr rtlCol="0" anchor="ctr" wrap="square" lIns="54864" rIns="54864" tIns="27432" bIns="27432"/>
+          <a:lstStyle/>
+          <a:p>
+            <a:pPr algn="ctr"/>
+            <a:r>
+              <a:rPr sz="1100" b="1">
+                <a:solidFill>
+                  <a:srgbClr val="5B3A6E"/>
+                </a:solidFill>
+                <a:latin typeface="Segoe UI"/>
+              </a:rPr>
+              <a:t>Schedule</a:t>
+            </a:r>
+          </a:p>
+          <a:p>
+            <a:pPr algn="ctr"/>
+            <a:r>
+              <a:rPr sz="800" b="0">
+                <a:solidFill>
+                  <a:srgbClr val="1A1A1A"/>
+                </a:solidFill>
+                <a:latin typeface="Segoe UI"/>
+              </a:rPr>
+              <a:t>cron, unattended</a:t>
+            </a:r>
+          </a:p>
+        </p:txBody>
+      </p:sp>
+      <p:cxnSp>
+        <p:nvCxnSpPr>
+          <p:cNvPr id="29" name="Connector 28"/>
+          <p:cNvCxnSpPr/>
+          <p:nvPr/>
+        </p:nvCxnSpPr>
+        <p:spPr>
+          <a:xfrm flipV="1">
+            <a:off x="2487168" y="2615184"/>
+            <a:ext cx="530352" cy="731520"/>
+          </a:xfrm>
+          <a:prstGeom prst="line">
+            <a:avLst/>
+          </a:prstGeom>
+          <a:ln w="19050">
+            <a:solidFill>
+              <a:srgbClr val="C9C9C9"/>
+            </a:solidFill>
+            <a:tailEnd type="triangle" w="med" len="med"/>
+          </a:ln>
+        </p:spPr>
+        <p:style>
+          <a:lnRef idx="2">
+            <a:schemeClr val="accent1"/>
+          </a:lnRef>
+          <a:fillRef idx="0">
+            <a:schemeClr val="accent1"/>
+          </a:fillRef>
+          <a:effectRef idx="1">
+            <a:schemeClr val="accent1"/>
+          </a:effectRef>
+          <a:fontRef idx="minor">
+            <a:schemeClr val="tx1"/>
+          </a:fontRef>
+        </p:style>
+      </p:cxnSp>
+      <p:sp>
+        <p:nvSpPr>
+          <p:cNvPr id="30" name="Rounded Rectangle 29"/>
+          <p:cNvSpPr/>
+          <p:nvPr/>
+        </p:nvSpPr>
+        <p:spPr>
+          <a:xfrm>
+            <a:off x="3017520" y="2103120"/>
+            <a:ext cx="3017520" cy="1463040"/>
           </a:xfrm>
           <a:prstGeom prst="roundRect">
             <a:avLst>
@@ -3902,42 +5382,1013 @@
           <a:p>
             <a:pPr algn="ctr"/>
             <a:r>
-              <a:rPr sz="1250" b="1">
+              <a:rPr sz="1200" b="1">
                 <a:solidFill>
                   <a:srgbClr val="3A3A3A"/>
                 </a:solidFill>
                 <a:latin typeface="Segoe UI"/>
               </a:rPr>
-              <a:t>Ticket · chat · schedule   →   one FastAPI process, React UI, REST and streaming   →   any OpenAI-compatible endpoint you point it at</a:t>
+              <a:t>One process · :8799</a:t>
             </a:r>
           </a:p>
           <a:p>
             <a:pPr algn="ctr"/>
             <a:r>
-              <a:rPr sz="950" b="0">
+              <a:rPr sz="900" b="0">
                 <a:solidFill>
                   <a:srgbClr val="1A1A1A"/>
                 </a:solidFill>
                 <a:latin typeface="Segoe UI"/>
               </a:rPr>
-              <a:t>Triage → Enhancer → Architect → Planner → Verifier → a build loop of up to four parallel subtasks, each in its own git worktree (Doer edits ↔ tests run ↔ Feedback reads failures ↔ Refiner fixes) → Validator gates → Live-verifier runs the real recipe → Learner writes memory back → merge request. Simple mode writes, Plan mode is read-only, Team mode runs the whole pipeline; reasoning is plain text, so any model drives it with no vendor function-calling.</a:t>
-            </a:r>
-          </a:p>
-        </p:txBody>
-      </p:sp>
-      <p:sp>
-        <p:nvSpPr>
-          <p:cNvPr id="22" name="Rounded Rectangle 21"/>
+              <a:t>chat engine · pipeline</a:t>
+            </a:r>
+          </a:p>
+          <a:p>
+            <a:pPr algn="ctr"/>
+            <a:r>
+              <a:rPr sz="900" b="0">
+                <a:solidFill>
+                  <a:srgbClr val="1A1A1A"/>
+                </a:solidFill>
+                <a:latin typeface="Segoe UI"/>
+              </a:rPr>
+              <a:t>memory · integrations</a:t>
+            </a:r>
+          </a:p>
+          <a:p>
+            <a:pPr algn="ctr"/>
+            <a:r>
+              <a:rPr sz="900" b="0">
+                <a:solidFill>
+                  <a:srgbClr val="1A1A1A"/>
+                </a:solidFill>
+                <a:latin typeface="Segoe UI"/>
+              </a:rPr>
+              <a:t>scheduler</a:t>
+            </a:r>
+          </a:p>
+        </p:txBody>
+      </p:sp>
+      <p:cxnSp>
+        <p:nvCxnSpPr>
+          <p:cNvPr id="31" name="Connector 30"/>
+          <p:cNvCxnSpPr/>
+          <p:nvPr/>
+        </p:nvCxnSpPr>
+        <p:spPr>
+          <a:xfrm>
+            <a:off x="6035040" y="2834640"/>
+            <a:ext cx="548640" cy="0"/>
+          </a:xfrm>
+          <a:prstGeom prst="line">
+            <a:avLst/>
+          </a:prstGeom>
+          <a:ln w="19050">
+            <a:solidFill>
+              <a:srgbClr val="C9C9C9"/>
+            </a:solidFill>
+            <a:tailEnd type="triangle" w="med" len="med"/>
+          </a:ln>
+        </p:spPr>
+        <p:style>
+          <a:lnRef idx="2">
+            <a:schemeClr val="accent1"/>
+          </a:lnRef>
+          <a:fillRef idx="0">
+            <a:schemeClr val="accent1"/>
+          </a:fillRef>
+          <a:effectRef idx="1">
+            <a:schemeClr val="accent1"/>
+          </a:effectRef>
+          <a:fontRef idx="minor">
+            <a:schemeClr val="tx1"/>
+          </a:fontRef>
+        </p:style>
+      </p:cxnSp>
+      <p:sp>
+        <p:nvSpPr>
+          <p:cNvPr id="32" name="Rounded Rectangle 31"/>
           <p:cNvSpPr/>
           <p:nvPr/>
         </p:nvSpPr>
         <p:spPr>
           <a:xfrm>
-            <a:off x="566928" y="3072384"/>
-            <a:ext cx="2628900" cy="3307842"/>
+            <a:off x="6583680" y="2103120"/>
+            <a:ext cx="2377440" cy="1463040"/>
           </a:xfrm>
           <a:prstGeom prst="roundRect">
+            <a:avLst>
+              <a:gd name="adj" fmla="val 10000"/>
+            </a:avLst>
+          </a:prstGeom>
+          <a:solidFill>
+            <a:srgbClr val="DCEEE7"/>
+          </a:solidFill>
+          <a:ln w="12700">
+            <a:solidFill>
+              <a:srgbClr val="1E6B52"/>
+            </a:solidFill>
+          </a:ln>
+          <a:effectLst/>
+        </p:spPr>
+        <p:style>
+          <a:lnRef idx="1">
+            <a:schemeClr val="accent1"/>
+          </a:lnRef>
+          <a:fillRef idx="3">
+            <a:schemeClr val="accent1"/>
+          </a:fillRef>
+          <a:effectRef idx="2">
+            <a:schemeClr val="accent1"/>
+          </a:effectRef>
+          <a:fontRef idx="minor">
+            <a:schemeClr val="lt1"/>
+          </a:fontRef>
+        </p:style>
+        <p:txBody>
+          <a:bodyPr rtlCol="0" anchor="ctr" wrap="square" lIns="54864" rIns="54864" tIns="27432" bIns="27432"/>
+          <a:lstStyle/>
+          <a:p>
+            <a:pPr algn="ctr"/>
+            <a:r>
+              <a:rPr sz="1200" b="1">
+                <a:solidFill>
+                  <a:srgbClr val="1E6B52"/>
+                </a:solidFill>
+                <a:latin typeface="Segoe UI"/>
+              </a:rPr>
+              <a:t>Your endpoint</a:t>
+            </a:r>
+          </a:p>
+          <a:p>
+            <a:pPr algn="ctr"/>
+            <a:r>
+              <a:rPr sz="850" b="0">
+                <a:solidFill>
+                  <a:srgbClr val="1A1A1A"/>
+                </a:solidFill>
+                <a:latin typeface="Segoe UI"/>
+              </a:rPr>
+              <a:t>LM Studio · vLLM · mlx</a:t>
+            </a:r>
+          </a:p>
+          <a:p>
+            <a:pPr algn="ctr"/>
+            <a:r>
+              <a:rPr sz="850" b="0">
+                <a:solidFill>
+                  <a:srgbClr val="1A1A1A"/>
+                </a:solidFill>
+                <a:latin typeface="Segoe UI"/>
+              </a:rPr>
+              <a:t>on hardware you own</a:t>
+            </a:r>
+          </a:p>
+          <a:p>
+            <a:pPr algn="ctr"/>
+          </a:p>
+          <a:p>
+            <a:pPr algn="ctr"/>
+            <a:r>
+              <a:rPr sz="850" b="0">
+                <a:solidFill>
+                  <a:srgbClr val="1A1A1A"/>
+                </a:solidFill>
+                <a:latin typeface="Segoe UI"/>
+              </a:rPr>
+              <a:t>cloud only if YOU</a:t>
+            </a:r>
+          </a:p>
+          <a:p>
+            <a:pPr algn="ctr"/>
+            <a:r>
+              <a:rPr sz="850" b="0">
+                <a:solidFill>
+                  <a:srgbClr val="1A1A1A"/>
+                </a:solidFill>
+                <a:latin typeface="Segoe UI"/>
+              </a:rPr>
+              <a:t>register one</a:t>
+            </a:r>
+          </a:p>
+        </p:txBody>
+      </p:sp>
+      <p:sp>
+        <p:nvSpPr>
+          <p:cNvPr id="33" name="Rounded Rectangle 32"/>
+          <p:cNvSpPr/>
+          <p:nvPr/>
+        </p:nvSpPr>
+        <p:spPr>
+          <a:xfrm>
+            <a:off x="9235440" y="2103120"/>
+            <a:ext cx="2395728" cy="1463040"/>
+          </a:xfrm>
+          <a:prstGeom prst="roundRect">
+            <a:avLst>
+              <a:gd name="adj" fmla="val 10000"/>
+            </a:avLst>
+          </a:prstGeom>
+          <a:solidFill>
+            <a:srgbClr val="FFFFFF"/>
+          </a:solidFill>
+          <a:ln w="12700">
+            <a:solidFill>
+              <a:srgbClr val="1F4E79"/>
+            </a:solidFill>
+          </a:ln>
+          <a:effectLst/>
+        </p:spPr>
+        <p:style>
+          <a:lnRef idx="1">
+            <a:schemeClr val="accent1"/>
+          </a:lnRef>
+          <a:fillRef idx="3">
+            <a:schemeClr val="accent1"/>
+          </a:fillRef>
+          <a:effectRef idx="2">
+            <a:schemeClr val="accent1"/>
+          </a:effectRef>
+          <a:fontRef idx="minor">
+            <a:schemeClr val="lt1"/>
+          </a:fontRef>
+        </p:style>
+        <p:txBody>
+          <a:bodyPr rtlCol="0" anchor="ctr" wrap="square" lIns="54864" rIns="54864" tIns="27432" bIns="27432"/>
+          <a:lstStyle/>
+          <a:p>
+            <a:pPr algn="ctr"/>
+            <a:r>
+              <a:rPr sz="1200" b="1">
+                <a:solidFill>
+                  <a:srgbClr val="1F4E79"/>
+                </a:solidFill>
+                <a:latin typeface="Segoe UI"/>
+              </a:rPr>
+              <a:t>No database</a:t>
+            </a:r>
+          </a:p>
+          <a:p>
+            <a:pPr algn="ctr"/>
+            <a:r>
+              <a:rPr sz="850" b="0">
+                <a:solidFill>
+                  <a:srgbClr val="1A1A1A"/>
+                </a:solidFill>
+                <a:latin typeface="Segoe UI"/>
+              </a:rPr>
+              <a:t>no vector store</a:t>
+            </a:r>
+          </a:p>
+          <a:p>
+            <a:pPr algn="ctr"/>
+            <a:r>
+              <a:rPr sz="850" b="0">
+                <a:solidFill>
+                  <a:srgbClr val="1A1A1A"/>
+                </a:solidFill>
+                <a:latin typeface="Segoe UI"/>
+              </a:rPr>
+              <a:t>no Postgres · no Neo4j</a:t>
+            </a:r>
+          </a:p>
+          <a:p>
+            <a:pPr algn="ctr"/>
+            <a:r>
+              <a:rPr sz="850" b="0">
+                <a:solidFill>
+                  <a:srgbClr val="1A1A1A"/>
+                </a:solidFill>
+                <a:latin typeface="Segoe UI"/>
+              </a:rPr>
+              <a:t>no broker · no GPU</a:t>
+            </a:r>
+          </a:p>
+          <a:p>
+            <a:pPr algn="ctr"/>
+          </a:p>
+          <a:p>
+            <a:pPr algn="ctr"/>
+            <a:r>
+              <a:rPr sz="850" b="0">
+                <a:solidFill>
+                  <a:srgbClr val="1A1A1A"/>
+                </a:solidFill>
+                <a:latin typeface="Segoe UI"/>
+              </a:rPr>
+              <a:t>markdown + one SQLite</a:t>
+            </a:r>
+          </a:p>
+        </p:txBody>
+      </p:sp>
+      <p:sp>
+        <p:nvSpPr>
+          <p:cNvPr id="34" name="TextBox 33"/>
+          <p:cNvSpPr txBox="1"/>
+          <p:nvPr/>
+        </p:nvSpPr>
+        <p:spPr>
+          <a:xfrm>
+            <a:off x="566928" y="3511295"/>
+            <a:ext cx="3657600" cy="201168"/>
+          </a:xfrm>
+          <a:prstGeom prst="rect">
             <a:avLst/>
+          </a:prstGeom>
+          <a:noFill/>
+        </p:spPr>
+        <p:txBody>
+          <a:bodyPr wrap="square" anchor="t" lIns="0" rIns="0" tIns="0" bIns="0">
+            <a:spAutoFit/>
+          </a:bodyPr>
+          <a:lstStyle/>
+          <a:p>
+            <a:pPr algn="l">
+              <a:spcAft>
+                <a:spcPts val="0"/>
+              </a:spcAft>
+            </a:pPr>
+            <a:r>
+              <a:rPr sz="1000" b="1">
+                <a:solidFill>
+                  <a:srgbClr val="6B6B6B"/>
+                </a:solidFill>
+                <a:latin typeface="Segoe UI"/>
+              </a:rPr>
+              <a:t>How a ticket becomes a merge request</a:t>
+            </a:r>
+          </a:p>
+        </p:txBody>
+      </p:sp>
+      <p:sp>
+        <p:nvSpPr>
+          <p:cNvPr id="35" name="Rounded Rectangle 34"/>
+          <p:cNvSpPr/>
+          <p:nvPr/>
+        </p:nvSpPr>
+        <p:spPr>
+          <a:xfrm>
+            <a:off x="566928" y="3749039"/>
+            <a:ext cx="1316736" cy="384048"/>
+          </a:xfrm>
+          <a:prstGeom prst="roundRect">
+            <a:avLst>
+              <a:gd name="adj" fmla="val 10000"/>
+            </a:avLst>
+          </a:prstGeom>
+          <a:solidFill>
+            <a:srgbClr val="DCE7F2"/>
+          </a:solidFill>
+          <a:ln w="12700">
+            <a:solidFill>
+              <a:srgbClr val="1F4E79"/>
+            </a:solidFill>
+          </a:ln>
+          <a:effectLst/>
+        </p:spPr>
+        <p:style>
+          <a:lnRef idx="1">
+            <a:schemeClr val="accent1"/>
+          </a:lnRef>
+          <a:fillRef idx="3">
+            <a:schemeClr val="accent1"/>
+          </a:fillRef>
+          <a:effectRef idx="2">
+            <a:schemeClr val="accent1"/>
+          </a:effectRef>
+          <a:fontRef idx="minor">
+            <a:schemeClr val="lt1"/>
+          </a:fontRef>
+        </p:style>
+        <p:txBody>
+          <a:bodyPr rtlCol="0" anchor="ctr" wrap="square" lIns="54864" rIns="54864" tIns="27432" bIns="27432"/>
+          <a:lstStyle/>
+          <a:p>
+            <a:pPr algn="ctr"/>
+            <a:r>
+              <a:rPr sz="1000" b="1">
+                <a:solidFill>
+                  <a:srgbClr val="1F4E79"/>
+                </a:solidFill>
+                <a:latin typeface="Segoe UI"/>
+              </a:rPr>
+              <a:t>Triage</a:t>
+            </a:r>
+          </a:p>
+        </p:txBody>
+      </p:sp>
+      <p:cxnSp>
+        <p:nvCxnSpPr>
+          <p:cNvPr id="36" name="Connector 35"/>
+          <p:cNvCxnSpPr/>
+          <p:nvPr/>
+        </p:nvCxnSpPr>
+        <p:spPr>
+          <a:xfrm>
+            <a:off x="1883664" y="3941063"/>
+            <a:ext cx="118872" cy="0"/>
+          </a:xfrm>
+          <a:prstGeom prst="line">
+            <a:avLst/>
+          </a:prstGeom>
+          <a:ln w="19050">
+            <a:solidFill>
+              <a:srgbClr val="C9C9C9"/>
+            </a:solidFill>
+            <a:tailEnd type="triangle" w="med" len="med"/>
+          </a:ln>
+        </p:spPr>
+        <p:style>
+          <a:lnRef idx="2">
+            <a:schemeClr val="accent1"/>
+          </a:lnRef>
+          <a:fillRef idx="0">
+            <a:schemeClr val="accent1"/>
+          </a:fillRef>
+          <a:effectRef idx="1">
+            <a:schemeClr val="accent1"/>
+          </a:effectRef>
+          <a:fontRef idx="minor">
+            <a:schemeClr val="tx1"/>
+          </a:fontRef>
+        </p:style>
+      </p:cxnSp>
+      <p:sp>
+        <p:nvSpPr>
+          <p:cNvPr id="37" name="Rounded Rectangle 36"/>
+          <p:cNvSpPr/>
+          <p:nvPr/>
+        </p:nvSpPr>
+        <p:spPr>
+          <a:xfrm>
+            <a:off x="2002536" y="3749039"/>
+            <a:ext cx="1316736" cy="384048"/>
+          </a:xfrm>
+          <a:prstGeom prst="roundRect">
+            <a:avLst>
+              <a:gd name="adj" fmla="val 10000"/>
+            </a:avLst>
+          </a:prstGeom>
+          <a:solidFill>
+            <a:srgbClr val="DCE7F2"/>
+          </a:solidFill>
+          <a:ln w="12700">
+            <a:solidFill>
+              <a:srgbClr val="1F4E79"/>
+            </a:solidFill>
+          </a:ln>
+          <a:effectLst/>
+        </p:spPr>
+        <p:style>
+          <a:lnRef idx="1">
+            <a:schemeClr val="accent1"/>
+          </a:lnRef>
+          <a:fillRef idx="3">
+            <a:schemeClr val="accent1"/>
+          </a:fillRef>
+          <a:effectRef idx="2">
+            <a:schemeClr val="accent1"/>
+          </a:effectRef>
+          <a:fontRef idx="minor">
+            <a:schemeClr val="lt1"/>
+          </a:fontRef>
+        </p:style>
+        <p:txBody>
+          <a:bodyPr rtlCol="0" anchor="ctr" wrap="square" lIns="54864" rIns="54864" tIns="27432" bIns="27432"/>
+          <a:lstStyle/>
+          <a:p>
+            <a:pPr algn="ctr"/>
+            <a:r>
+              <a:rPr sz="1000" b="1">
+                <a:solidFill>
+                  <a:srgbClr val="1F4E79"/>
+                </a:solidFill>
+                <a:latin typeface="Segoe UI"/>
+              </a:rPr>
+              <a:t>Enhancer</a:t>
+            </a:r>
+          </a:p>
+        </p:txBody>
+      </p:sp>
+      <p:cxnSp>
+        <p:nvCxnSpPr>
+          <p:cNvPr id="38" name="Connector 37"/>
+          <p:cNvCxnSpPr/>
+          <p:nvPr/>
+        </p:nvCxnSpPr>
+        <p:spPr>
+          <a:xfrm>
+            <a:off x="3319272" y="3941063"/>
+            <a:ext cx="118872" cy="0"/>
+          </a:xfrm>
+          <a:prstGeom prst="line">
+            <a:avLst/>
+          </a:prstGeom>
+          <a:ln w="19050">
+            <a:solidFill>
+              <a:srgbClr val="C9C9C9"/>
+            </a:solidFill>
+            <a:tailEnd type="triangle" w="med" len="med"/>
+          </a:ln>
+        </p:spPr>
+        <p:style>
+          <a:lnRef idx="2">
+            <a:schemeClr val="accent1"/>
+          </a:lnRef>
+          <a:fillRef idx="0">
+            <a:schemeClr val="accent1"/>
+          </a:fillRef>
+          <a:effectRef idx="1">
+            <a:schemeClr val="accent1"/>
+          </a:effectRef>
+          <a:fontRef idx="minor">
+            <a:schemeClr val="tx1"/>
+          </a:fontRef>
+        </p:style>
+      </p:cxnSp>
+      <p:sp>
+        <p:nvSpPr>
+          <p:cNvPr id="39" name="Rounded Rectangle 38"/>
+          <p:cNvSpPr/>
+          <p:nvPr/>
+        </p:nvSpPr>
+        <p:spPr>
+          <a:xfrm>
+            <a:off x="3438144" y="3749039"/>
+            <a:ext cx="1316736" cy="384048"/>
+          </a:xfrm>
+          <a:prstGeom prst="roundRect">
+            <a:avLst>
+              <a:gd name="adj" fmla="val 10000"/>
+            </a:avLst>
+          </a:prstGeom>
+          <a:solidFill>
+            <a:srgbClr val="DCE7F2"/>
+          </a:solidFill>
+          <a:ln w="12700">
+            <a:solidFill>
+              <a:srgbClr val="1F4E79"/>
+            </a:solidFill>
+          </a:ln>
+          <a:effectLst/>
+        </p:spPr>
+        <p:style>
+          <a:lnRef idx="1">
+            <a:schemeClr val="accent1"/>
+          </a:lnRef>
+          <a:fillRef idx="3">
+            <a:schemeClr val="accent1"/>
+          </a:fillRef>
+          <a:effectRef idx="2">
+            <a:schemeClr val="accent1"/>
+          </a:effectRef>
+          <a:fontRef idx="minor">
+            <a:schemeClr val="lt1"/>
+          </a:fontRef>
+        </p:style>
+        <p:txBody>
+          <a:bodyPr rtlCol="0" anchor="ctr" wrap="square" lIns="54864" rIns="54864" tIns="27432" bIns="27432"/>
+          <a:lstStyle/>
+          <a:p>
+            <a:pPr algn="ctr"/>
+            <a:r>
+              <a:rPr sz="1000" b="1">
+                <a:solidFill>
+                  <a:srgbClr val="1F4E79"/>
+                </a:solidFill>
+                <a:latin typeface="Segoe UI"/>
+              </a:rPr>
+              <a:t>Architect</a:t>
+            </a:r>
+          </a:p>
+        </p:txBody>
+      </p:sp>
+      <p:cxnSp>
+        <p:nvCxnSpPr>
+          <p:cNvPr id="40" name="Connector 39"/>
+          <p:cNvCxnSpPr/>
+          <p:nvPr/>
+        </p:nvCxnSpPr>
+        <p:spPr>
+          <a:xfrm>
+            <a:off x="4754880" y="3941063"/>
+            <a:ext cx="118872" cy="0"/>
+          </a:xfrm>
+          <a:prstGeom prst="line">
+            <a:avLst/>
+          </a:prstGeom>
+          <a:ln w="19050">
+            <a:solidFill>
+              <a:srgbClr val="C9C9C9"/>
+            </a:solidFill>
+            <a:tailEnd type="triangle" w="med" len="med"/>
+          </a:ln>
+        </p:spPr>
+        <p:style>
+          <a:lnRef idx="2">
+            <a:schemeClr val="accent1"/>
+          </a:lnRef>
+          <a:fillRef idx="0">
+            <a:schemeClr val="accent1"/>
+          </a:fillRef>
+          <a:effectRef idx="1">
+            <a:schemeClr val="accent1"/>
+          </a:effectRef>
+          <a:fontRef idx="minor">
+            <a:schemeClr val="tx1"/>
+          </a:fontRef>
+        </p:style>
+      </p:cxnSp>
+      <p:sp>
+        <p:nvSpPr>
+          <p:cNvPr id="41" name="Rounded Rectangle 40"/>
+          <p:cNvSpPr/>
+          <p:nvPr/>
+        </p:nvSpPr>
+        <p:spPr>
+          <a:xfrm>
+            <a:off x="4873752" y="3749039"/>
+            <a:ext cx="1316736" cy="384048"/>
+          </a:xfrm>
+          <a:prstGeom prst="roundRect">
+            <a:avLst>
+              <a:gd name="adj" fmla="val 10000"/>
+            </a:avLst>
+          </a:prstGeom>
+          <a:solidFill>
+            <a:srgbClr val="DCE7F2"/>
+          </a:solidFill>
+          <a:ln w="12700">
+            <a:solidFill>
+              <a:srgbClr val="1F4E79"/>
+            </a:solidFill>
+          </a:ln>
+          <a:effectLst/>
+        </p:spPr>
+        <p:style>
+          <a:lnRef idx="1">
+            <a:schemeClr val="accent1"/>
+          </a:lnRef>
+          <a:fillRef idx="3">
+            <a:schemeClr val="accent1"/>
+          </a:fillRef>
+          <a:effectRef idx="2">
+            <a:schemeClr val="accent1"/>
+          </a:effectRef>
+          <a:fontRef idx="minor">
+            <a:schemeClr val="lt1"/>
+          </a:fontRef>
+        </p:style>
+        <p:txBody>
+          <a:bodyPr rtlCol="0" anchor="ctr" wrap="square" lIns="54864" rIns="54864" tIns="27432" bIns="27432"/>
+          <a:lstStyle/>
+          <a:p>
+            <a:pPr algn="ctr"/>
+            <a:r>
+              <a:rPr sz="1000" b="1">
+                <a:solidFill>
+                  <a:srgbClr val="1F4E79"/>
+                </a:solidFill>
+                <a:latin typeface="Segoe UI"/>
+              </a:rPr>
+              <a:t>Planner</a:t>
+            </a:r>
+          </a:p>
+        </p:txBody>
+      </p:sp>
+      <p:cxnSp>
+        <p:nvCxnSpPr>
+          <p:cNvPr id="42" name="Connector 41"/>
+          <p:cNvCxnSpPr/>
+          <p:nvPr/>
+        </p:nvCxnSpPr>
+        <p:spPr>
+          <a:xfrm>
+            <a:off x="6190488" y="3941063"/>
+            <a:ext cx="118872" cy="0"/>
+          </a:xfrm>
+          <a:prstGeom prst="line">
+            <a:avLst/>
+          </a:prstGeom>
+          <a:ln w="19050">
+            <a:solidFill>
+              <a:srgbClr val="C9C9C9"/>
+            </a:solidFill>
+            <a:tailEnd type="triangle" w="med" len="med"/>
+          </a:ln>
+        </p:spPr>
+        <p:style>
+          <a:lnRef idx="2">
+            <a:schemeClr val="accent1"/>
+          </a:lnRef>
+          <a:fillRef idx="0">
+            <a:schemeClr val="accent1"/>
+          </a:fillRef>
+          <a:effectRef idx="1">
+            <a:schemeClr val="accent1"/>
+          </a:effectRef>
+          <a:fontRef idx="minor">
+            <a:schemeClr val="tx1"/>
+          </a:fontRef>
+        </p:style>
+      </p:cxnSp>
+      <p:sp>
+        <p:nvSpPr>
+          <p:cNvPr id="43" name="Rounded Rectangle 42"/>
+          <p:cNvSpPr/>
+          <p:nvPr/>
+        </p:nvSpPr>
+        <p:spPr>
+          <a:xfrm>
+            <a:off x="6309360" y="3749039"/>
+            <a:ext cx="1316736" cy="384048"/>
+          </a:xfrm>
+          <a:prstGeom prst="roundRect">
+            <a:avLst>
+              <a:gd name="adj" fmla="val 10000"/>
+            </a:avLst>
+          </a:prstGeom>
+          <a:solidFill>
+            <a:srgbClr val="DCE7F2"/>
+          </a:solidFill>
+          <a:ln w="12700">
+            <a:solidFill>
+              <a:srgbClr val="1F4E79"/>
+            </a:solidFill>
+          </a:ln>
+          <a:effectLst/>
+        </p:spPr>
+        <p:style>
+          <a:lnRef idx="1">
+            <a:schemeClr val="accent1"/>
+          </a:lnRef>
+          <a:fillRef idx="3">
+            <a:schemeClr val="accent1"/>
+          </a:fillRef>
+          <a:effectRef idx="2">
+            <a:schemeClr val="accent1"/>
+          </a:effectRef>
+          <a:fontRef idx="minor">
+            <a:schemeClr val="lt1"/>
+          </a:fontRef>
+        </p:style>
+        <p:txBody>
+          <a:bodyPr rtlCol="0" anchor="ctr" wrap="square" lIns="54864" rIns="54864" tIns="27432" bIns="27432"/>
+          <a:lstStyle/>
+          <a:p>
+            <a:pPr algn="ctr"/>
+            <a:r>
+              <a:rPr sz="1000" b="1">
+                <a:solidFill>
+                  <a:srgbClr val="1F4E79"/>
+                </a:solidFill>
+                <a:latin typeface="Segoe UI"/>
+              </a:rPr>
+              <a:t>Verifier</a:t>
+            </a:r>
+          </a:p>
+        </p:txBody>
+      </p:sp>
+      <p:cxnSp>
+        <p:nvCxnSpPr>
+          <p:cNvPr id="44" name="Connector 43"/>
+          <p:cNvCxnSpPr/>
+          <p:nvPr/>
+        </p:nvCxnSpPr>
+        <p:spPr>
+          <a:xfrm>
+            <a:off x="7626096" y="3941063"/>
+            <a:ext cx="164592" cy="0"/>
+          </a:xfrm>
+          <a:prstGeom prst="line">
+            <a:avLst/>
+          </a:prstGeom>
+          <a:ln w="19050">
+            <a:solidFill>
+              <a:srgbClr val="C9C9C9"/>
+            </a:solidFill>
+            <a:tailEnd type="triangle" w="med" len="med"/>
+          </a:ln>
+        </p:spPr>
+        <p:style>
+          <a:lnRef idx="2">
+            <a:schemeClr val="accent1"/>
+          </a:lnRef>
+          <a:fillRef idx="0">
+            <a:schemeClr val="accent1"/>
+          </a:fillRef>
+          <a:effectRef idx="1">
+            <a:schemeClr val="accent1"/>
+          </a:effectRef>
+          <a:fontRef idx="minor">
+            <a:schemeClr val="tx1"/>
+          </a:fontRef>
+        </p:style>
+      </p:cxnSp>
+      <p:sp>
+        <p:nvSpPr>
+          <p:cNvPr id="45" name="Rounded Rectangle 44"/>
+          <p:cNvSpPr/>
+          <p:nvPr/>
+        </p:nvSpPr>
+        <p:spPr>
+          <a:xfrm>
+            <a:off x="7790688" y="3749039"/>
+            <a:ext cx="1920240" cy="384048"/>
+          </a:xfrm>
+          <a:prstGeom prst="roundRect">
+            <a:avLst>
+              <a:gd name="adj" fmla="val 10000"/>
+            </a:avLst>
+          </a:prstGeom>
+          <a:solidFill>
+            <a:srgbClr val="DCEEE7"/>
+          </a:solidFill>
+          <a:ln w="12700">
+            <a:solidFill>
+              <a:srgbClr val="1E6B52"/>
+            </a:solidFill>
+          </a:ln>
+          <a:effectLst/>
+        </p:spPr>
+        <p:style>
+          <a:lnRef idx="1">
+            <a:schemeClr val="accent1"/>
+          </a:lnRef>
+          <a:fillRef idx="3">
+            <a:schemeClr val="accent1"/>
+          </a:fillRef>
+          <a:effectRef idx="2">
+            <a:schemeClr val="accent1"/>
+          </a:effectRef>
+          <a:fontRef idx="minor">
+            <a:schemeClr val="lt1"/>
+          </a:fontRef>
+        </p:style>
+        <p:txBody>
+          <a:bodyPr rtlCol="0" anchor="ctr" wrap="square" lIns="54864" rIns="54864" tIns="27432" bIns="27432"/>
+          <a:lstStyle/>
+          <a:p>
+            <a:pPr algn="ctr"/>
+            <a:r>
+              <a:rPr sz="1000" b="1">
+                <a:solidFill>
+                  <a:srgbClr val="1E6B52"/>
+                </a:solidFill>
+                <a:latin typeface="Segoe UI"/>
+              </a:rPr>
+              <a:t>Build loop</a:t>
+            </a:r>
+          </a:p>
+        </p:txBody>
+      </p:sp>
+      <p:cxnSp>
+        <p:nvCxnSpPr>
+          <p:cNvPr id="46" name="Connector 45"/>
+          <p:cNvCxnSpPr/>
+          <p:nvPr/>
+        </p:nvCxnSpPr>
+        <p:spPr>
+          <a:xfrm>
+            <a:off x="9710928" y="3941063"/>
+            <a:ext cx="118872" cy="0"/>
+          </a:xfrm>
+          <a:prstGeom prst="line">
+            <a:avLst/>
+          </a:prstGeom>
+          <a:ln w="19050">
+            <a:solidFill>
+              <a:srgbClr val="C9C9C9"/>
+            </a:solidFill>
+            <a:tailEnd type="triangle" w="med" len="med"/>
+          </a:ln>
+        </p:spPr>
+        <p:style>
+          <a:lnRef idx="2">
+            <a:schemeClr val="accent1"/>
+          </a:lnRef>
+          <a:fillRef idx="0">
+            <a:schemeClr val="accent1"/>
+          </a:fillRef>
+          <a:effectRef idx="1">
+            <a:schemeClr val="accent1"/>
+          </a:effectRef>
+          <a:fontRef idx="minor">
+            <a:schemeClr val="tx1"/>
+          </a:fontRef>
+        </p:style>
+      </p:cxnSp>
+      <p:sp>
+        <p:nvSpPr>
+          <p:cNvPr id="47" name="Rounded Rectangle 46"/>
+          <p:cNvSpPr/>
+          <p:nvPr/>
+        </p:nvSpPr>
+        <p:spPr>
+          <a:xfrm>
+            <a:off x="9829800" y="3749039"/>
+            <a:ext cx="1801368" cy="384048"/>
+          </a:xfrm>
+          <a:prstGeom prst="roundRect">
+            <a:avLst>
+              <a:gd name="adj" fmla="val 10000"/>
+            </a:avLst>
+          </a:prstGeom>
+          <a:solidFill>
+            <a:srgbClr val="ECECEC"/>
+          </a:solidFill>
+          <a:ln w="12700">
+            <a:solidFill>
+              <a:srgbClr val="3A3A3A"/>
+            </a:solidFill>
+          </a:ln>
+          <a:effectLst/>
+        </p:spPr>
+        <p:style>
+          <a:lnRef idx="1">
+            <a:schemeClr val="accent1"/>
+          </a:lnRef>
+          <a:fillRef idx="3">
+            <a:schemeClr val="accent1"/>
+          </a:fillRef>
+          <a:effectRef idx="2">
+            <a:schemeClr val="accent1"/>
+          </a:effectRef>
+          <a:fontRef idx="minor">
+            <a:schemeClr val="lt1"/>
+          </a:fontRef>
+        </p:style>
+        <p:txBody>
+          <a:bodyPr rtlCol="0" anchor="ctr" wrap="square" lIns="54864" rIns="54864" tIns="27432" bIns="27432"/>
+          <a:lstStyle/>
+          <a:p>
+            <a:pPr algn="ctr"/>
+            <a:r>
+              <a:rPr sz="1000" b="1">
+                <a:solidFill>
+                  <a:srgbClr val="3A3A3A"/>
+                </a:solidFill>
+                <a:latin typeface="Segoe UI"/>
+              </a:rPr>
+              <a:t>Merge request</a:t>
+            </a:r>
+          </a:p>
+        </p:txBody>
+      </p:sp>
+      <p:sp>
+        <p:nvSpPr>
+          <p:cNvPr id="48" name="TextBox 47"/>
+          <p:cNvSpPr txBox="1"/>
+          <p:nvPr/>
+        </p:nvSpPr>
+        <p:spPr>
+          <a:xfrm>
+            <a:off x="7790688" y="4169663"/>
+            <a:ext cx="3840480" cy="329184"/>
+          </a:xfrm>
+          <a:prstGeom prst="rect">
+            <a:avLst/>
+          </a:prstGeom>
+          <a:noFill/>
+        </p:spPr>
+        <p:txBody>
+          <a:bodyPr wrap="square" anchor="t" lIns="0" rIns="0" tIns="0" bIns="0">
+            <a:spAutoFit/>
+          </a:bodyPr>
+          <a:lstStyle/>
+          <a:p>
+            <a:pPr algn="l">
+              <a:spcAft>
+                <a:spcPts val="0"/>
+              </a:spcAft>
+            </a:pPr>
+            <a:r>
+              <a:rPr sz="850" b="0">
+                <a:solidFill>
+                  <a:srgbClr val="6B6B6B"/>
+                </a:solidFill>
+                <a:latin typeface="Segoe UI"/>
+              </a:rPr>
+              <a:t>4 parallel subtasks, each in its own git worktree  ·  Validator → Live-verifier → Learner</a:t>
+            </a:r>
+          </a:p>
+        </p:txBody>
+      </p:sp>
+      <p:sp>
+        <p:nvSpPr>
+          <p:cNvPr id="49" name="Rounded Rectangle 48"/>
+          <p:cNvSpPr/>
+          <p:nvPr/>
+        </p:nvSpPr>
+        <p:spPr>
+          <a:xfrm>
+            <a:off x="566928" y="4718304"/>
+            <a:ext cx="5486400" cy="1188720"/>
+          </a:xfrm>
+          <a:prstGeom prst="roundRect">
+            <a:avLst>
+              <a:gd name="adj" fmla="val 10000"/>
+            </a:avLst>
           </a:prstGeom>
           <a:solidFill>
             <a:srgbClr val="F7ECD5"/>
@@ -3964,23 +6415,296 @@
           </a:fontRef>
         </p:style>
         <p:txBody>
-          <a:bodyPr rtlCol="0" anchor="ctr"/>
+          <a:bodyPr rtlCol="0" anchor="ctr" wrap="square" lIns="54864" rIns="54864" tIns="27432" bIns="27432"/>
           <a:lstStyle/>
           <a:p>
             <a:pPr algn="ctr"/>
-          </a:p>
-        </p:txBody>
-      </p:sp>
-      <p:sp>
-        <p:nvSpPr>
-          <p:cNvPr id="23" name="TextBox 22"/>
+            <a:r>
+              <a:rPr sz="1150" b="1">
+                <a:solidFill>
+                  <a:srgbClr val="8A5A00"/>
+                </a:solidFill>
+                <a:latin typeface="Segoe UI"/>
+              </a:rPr>
+              <a:t>It writes its own procedures</a:t>
+            </a:r>
+          </a:p>
+        </p:txBody>
+      </p:sp>
+      <p:sp>
+        <p:nvSpPr>
+          <p:cNvPr id="50" name="Rounded Rectangle 49"/>
+          <p:cNvSpPr/>
+          <p:nvPr/>
+        </p:nvSpPr>
+        <p:spPr>
+          <a:xfrm>
+            <a:off x="768096" y="5102352"/>
+            <a:ext cx="1078992" cy="274320"/>
+          </a:xfrm>
+          <a:prstGeom prst="roundRect">
+            <a:avLst>
+              <a:gd name="adj" fmla="val 10000"/>
+            </a:avLst>
+          </a:prstGeom>
+          <a:solidFill>
+            <a:srgbClr val="FFFFFF"/>
+          </a:solidFill>
+          <a:ln w="12700">
+            <a:solidFill>
+              <a:srgbClr val="8A5A00"/>
+            </a:solidFill>
+          </a:ln>
+          <a:effectLst/>
+        </p:spPr>
+        <p:style>
+          <a:lnRef idx="1">
+            <a:schemeClr val="accent1"/>
+          </a:lnRef>
+          <a:fillRef idx="3">
+            <a:schemeClr val="accent1"/>
+          </a:fillRef>
+          <a:effectRef idx="2">
+            <a:schemeClr val="accent1"/>
+          </a:effectRef>
+          <a:fontRef idx="minor">
+            <a:schemeClr val="lt1"/>
+          </a:fontRef>
+        </p:style>
+        <p:txBody>
+          <a:bodyPr rtlCol="0" anchor="ctr" wrap="square" lIns="54864" rIns="54864" tIns="27432" bIns="27432"/>
+          <a:lstStyle/>
+          <a:p>
+            <a:pPr algn="ctr"/>
+            <a:r>
+              <a:rPr sz="950" b="0">
+                <a:solidFill>
+                  <a:srgbClr val="8A5A00"/>
+                </a:solidFill>
+                <a:latin typeface="Segoe UI"/>
+              </a:rPr>
+              <a:t>Rules</a:t>
+            </a:r>
+          </a:p>
+        </p:txBody>
+      </p:sp>
+      <p:sp>
+        <p:nvSpPr>
+          <p:cNvPr id="51" name="Rounded Rectangle 50"/>
+          <p:cNvSpPr/>
+          <p:nvPr/>
+        </p:nvSpPr>
+        <p:spPr>
+          <a:xfrm>
+            <a:off x="1956816" y="5102352"/>
+            <a:ext cx="1078992" cy="274320"/>
+          </a:xfrm>
+          <a:prstGeom prst="roundRect">
+            <a:avLst>
+              <a:gd name="adj" fmla="val 10000"/>
+            </a:avLst>
+          </a:prstGeom>
+          <a:solidFill>
+            <a:srgbClr val="FFFFFF"/>
+          </a:solidFill>
+          <a:ln w="12700">
+            <a:solidFill>
+              <a:srgbClr val="8A5A00"/>
+            </a:solidFill>
+          </a:ln>
+          <a:effectLst/>
+        </p:spPr>
+        <p:style>
+          <a:lnRef idx="1">
+            <a:schemeClr val="accent1"/>
+          </a:lnRef>
+          <a:fillRef idx="3">
+            <a:schemeClr val="accent1"/>
+          </a:fillRef>
+          <a:effectRef idx="2">
+            <a:schemeClr val="accent1"/>
+          </a:effectRef>
+          <a:fontRef idx="minor">
+            <a:schemeClr val="lt1"/>
+          </a:fontRef>
+        </p:style>
+        <p:txBody>
+          <a:bodyPr rtlCol="0" anchor="ctr" wrap="square" lIns="54864" rIns="54864" tIns="27432" bIns="27432"/>
+          <a:lstStyle/>
+          <a:p>
+            <a:pPr algn="ctr"/>
+            <a:r>
+              <a:rPr sz="950" b="0">
+                <a:solidFill>
+                  <a:srgbClr val="8A5A00"/>
+                </a:solidFill>
+                <a:latin typeface="Segoe UI"/>
+              </a:rPr>
+              <a:t>Skills</a:t>
+            </a:r>
+          </a:p>
+        </p:txBody>
+      </p:sp>
+      <p:sp>
+        <p:nvSpPr>
+          <p:cNvPr id="52" name="Rounded Rectangle 51"/>
+          <p:cNvSpPr/>
+          <p:nvPr/>
+        </p:nvSpPr>
+        <p:spPr>
+          <a:xfrm>
+            <a:off x="3145536" y="5102352"/>
+            <a:ext cx="1078992" cy="274320"/>
+          </a:xfrm>
+          <a:prstGeom prst="roundRect">
+            <a:avLst>
+              <a:gd name="adj" fmla="val 10000"/>
+            </a:avLst>
+          </a:prstGeom>
+          <a:solidFill>
+            <a:srgbClr val="FFFFFF"/>
+          </a:solidFill>
+          <a:ln w="12700">
+            <a:solidFill>
+              <a:srgbClr val="8A5A00"/>
+            </a:solidFill>
+          </a:ln>
+          <a:effectLst/>
+        </p:spPr>
+        <p:style>
+          <a:lnRef idx="1">
+            <a:schemeClr val="accent1"/>
+          </a:lnRef>
+          <a:fillRef idx="3">
+            <a:schemeClr val="accent1"/>
+          </a:fillRef>
+          <a:effectRef idx="2">
+            <a:schemeClr val="accent1"/>
+          </a:effectRef>
+          <a:fontRef idx="minor">
+            <a:schemeClr val="lt1"/>
+          </a:fontRef>
+        </p:style>
+        <p:txBody>
+          <a:bodyPr rtlCol="0" anchor="ctr" wrap="square" lIns="54864" rIns="54864" tIns="27432" bIns="27432"/>
+          <a:lstStyle/>
+          <a:p>
+            <a:pPr algn="ctr"/>
+            <a:r>
+              <a:rPr sz="950" b="0">
+                <a:solidFill>
+                  <a:srgbClr val="8A5A00"/>
+                </a:solidFill>
+                <a:latin typeface="Segoe UI"/>
+              </a:rPr>
+              <a:t>Workflows</a:t>
+            </a:r>
+          </a:p>
+        </p:txBody>
+      </p:sp>
+      <p:sp>
+        <p:nvSpPr>
+          <p:cNvPr id="53" name="Rounded Rectangle 52"/>
+          <p:cNvSpPr/>
+          <p:nvPr/>
+        </p:nvSpPr>
+        <p:spPr>
+          <a:xfrm>
+            <a:off x="4224528" y="5102352"/>
+            <a:ext cx="1115568" cy="274320"/>
+          </a:xfrm>
+          <a:prstGeom prst="roundRect">
+            <a:avLst>
+              <a:gd name="adj" fmla="val 10000"/>
+            </a:avLst>
+          </a:prstGeom>
+          <a:solidFill>
+            <a:srgbClr val="FFFFFF"/>
+          </a:solidFill>
+          <a:ln w="12700">
+            <a:solidFill>
+              <a:srgbClr val="8A5A00"/>
+            </a:solidFill>
+          </a:ln>
+          <a:effectLst/>
+        </p:spPr>
+        <p:style>
+          <a:lnRef idx="1">
+            <a:schemeClr val="accent1"/>
+          </a:lnRef>
+          <a:fillRef idx="3">
+            <a:schemeClr val="accent1"/>
+          </a:fillRef>
+          <a:effectRef idx="2">
+            <a:schemeClr val="accent1"/>
+          </a:effectRef>
+          <a:fontRef idx="minor">
+            <a:schemeClr val="lt1"/>
+          </a:fontRef>
+        </p:style>
+        <p:txBody>
+          <a:bodyPr rtlCol="0" anchor="ctr" wrap="square" lIns="54864" rIns="54864" tIns="27432" bIns="27432"/>
+          <a:lstStyle/>
+          <a:p>
+            <a:pPr algn="ctr"/>
+            <a:r>
+              <a:rPr sz="950" b="0">
+                <a:solidFill>
+                  <a:srgbClr val="8A5A00"/>
+                </a:solidFill>
+                <a:latin typeface="Segoe UI"/>
+              </a:rPr>
+              <a:t>nightly merge</a:t>
+            </a:r>
+          </a:p>
+        </p:txBody>
+      </p:sp>
+      <p:cxnSp>
+        <p:nvCxnSpPr>
+          <p:cNvPr id="54" name="Connector 53"/>
+          <p:cNvCxnSpPr/>
+          <p:nvPr/>
+        </p:nvCxnSpPr>
+        <p:spPr>
+          <a:xfrm>
+            <a:off x="4041648" y="5239511"/>
+            <a:ext cx="182880" cy="0"/>
+          </a:xfrm>
+          <a:prstGeom prst="line">
+            <a:avLst/>
+          </a:prstGeom>
+          <a:ln w="19050">
+            <a:solidFill>
+              <a:srgbClr val="8A5A00"/>
+            </a:solidFill>
+            <a:tailEnd type="triangle" w="med" len="med"/>
+          </a:ln>
+        </p:spPr>
+        <p:style>
+          <a:lnRef idx="2">
+            <a:schemeClr val="accent1"/>
+          </a:lnRef>
+          <a:fillRef idx="0">
+            <a:schemeClr val="accent1"/>
+          </a:fillRef>
+          <a:effectRef idx="1">
+            <a:schemeClr val="accent1"/>
+          </a:effectRef>
+          <a:fontRef idx="minor">
+            <a:schemeClr val="tx1"/>
+          </a:fontRef>
+        </p:style>
+      </p:cxnSp>
+      <p:sp>
+        <p:nvSpPr>
+          <p:cNvPr id="55" name="TextBox 54"/>
           <p:cNvSpPr txBox="1"/>
           <p:nvPr/>
         </p:nvSpPr>
         <p:spPr>
           <a:xfrm>
-            <a:off x="731520" y="3236976"/>
-            <a:ext cx="2299716" cy="379730"/>
+            <a:off x="768096" y="5504688"/>
+            <a:ext cx="5120640" cy="310896"/>
           </a:xfrm>
           <a:prstGeom prst="rect">
             <a:avLst/>
@@ -3999,186 +6723,32 @@
               </a:spcAft>
             </a:pPr>
             <a:r>
-              <a:rPr sz="1150" b="1">
-                <a:solidFill>
-                  <a:srgbClr val="8A5A00"/>
-                </a:solidFill>
-                <a:latin typeface="Segoe UI"/>
-              </a:rPr>
-              <a:t>It learns — and the learning is FILES</a:t>
-            </a:r>
-          </a:p>
-        </p:txBody>
-      </p:sp>
-      <p:sp>
-        <p:nvSpPr>
-          <p:cNvPr id="24" name="TextBox 23"/>
-          <p:cNvSpPr txBox="1"/>
-          <p:nvPr/>
-        </p:nvSpPr>
-        <p:spPr>
-          <a:xfrm>
-            <a:off x="731520" y="3708146"/>
-            <a:ext cx="2299716" cy="581152"/>
-          </a:xfrm>
-          <a:prstGeom prst="rect">
-            <a:avLst/>
-          </a:prstGeom>
-          <a:noFill/>
-        </p:spPr>
-        <p:txBody>
-          <a:bodyPr wrap="square" anchor="t" lIns="0" rIns="0" tIns="0" bIns="0">
-            <a:spAutoFit/>
-          </a:bodyPr>
-          <a:lstStyle/>
-          <a:p>
-            <a:pPr algn="l">
-              <a:spcAft>
-                <a:spcPts val="0"/>
-              </a:spcAft>
-            </a:pPr>
-            <a:r>
-              <a:rPr sz="880" b="0">
-                <a:solidFill>
-                  <a:srgbClr val="1A1A1A"/>
-                </a:solidFill>
-                <a:latin typeface="Segoe UI"/>
-              </a:rPr>
-              <a:t>·  The Learner writes objectives, results and lessons back after every run, and they are model-verified before they are saved.</a:t>
-            </a:r>
-          </a:p>
-        </p:txBody>
-      </p:sp>
-      <p:sp>
-        <p:nvSpPr>
-          <p:cNvPr id="25" name="TextBox 24"/>
-          <p:cNvSpPr txBox="1"/>
-          <p:nvPr/>
-        </p:nvSpPr>
-        <p:spPr>
-          <a:xfrm>
-            <a:off x="731520" y="4335018"/>
-            <a:ext cx="2299716" cy="726440"/>
-          </a:xfrm>
-          <a:prstGeom prst="rect">
-            <a:avLst/>
-          </a:prstGeom>
-          <a:noFill/>
-        </p:spPr>
-        <p:txBody>
-          <a:bodyPr wrap="square" anchor="t" lIns="0" rIns="0" tIns="0" bIns="0">
-            <a:spAutoFit/>
-          </a:bodyPr>
-          <a:lstStyle/>
-          <a:p>
-            <a:pPr algn="l">
-              <a:spcAft>
-                <a:spcPts val="0"/>
-              </a:spcAft>
-            </a:pPr>
-            <a:r>
-              <a:rPr sz="880" b="0">
-                <a:solidFill>
-                  <a:srgbClr val="1A1A1A"/>
-                </a:solidFill>
-                <a:latin typeface="Segoe UI"/>
-              </a:rPr>
-              <a:t>·  Rules, skills and workflows are markdown the agent writes, reuses and edits — a fix found once becomes a reusable procedure, not a paragraph in someone's notes.</a:t>
-            </a:r>
-          </a:p>
-        </p:txBody>
-      </p:sp>
-      <p:sp>
-        <p:nvSpPr>
-          <p:cNvPr id="26" name="TextBox 25"/>
-          <p:cNvSpPr txBox="1"/>
-          <p:nvPr/>
-        </p:nvSpPr>
-        <p:spPr>
-          <a:xfrm>
-            <a:off x="731520" y="5107178"/>
-            <a:ext cx="2299716" cy="726440"/>
-          </a:xfrm>
-          <a:prstGeom prst="rect">
-            <a:avLst/>
-          </a:prstGeom>
-          <a:noFill/>
-        </p:spPr>
-        <p:txBody>
-          <a:bodyPr wrap="square" anchor="t" lIns="0" rIns="0" tIns="0" bIns="0">
-            <a:spAutoFit/>
-          </a:bodyPr>
-          <a:lstStyle/>
-          <a:p>
-            <a:pPr algn="l">
-              <a:spcAft>
-                <a:spcPts val="0"/>
-              </a:spcAft>
-            </a:pPr>
-            <a:r>
-              <a:rPr sz="880" b="0">
-                <a:solidFill>
-                  <a:srgbClr val="1A1A1A"/>
-                </a:solidFill>
-                <a:latin typeface="Segoe UI"/>
-              </a:rPr>
-              <a:t>·  A nightly sweep merges near-duplicate rules, skills and workflows, so the prompt does not bloat by accretion; merges union their scopes rather than silently narrowing one.</a:t>
-            </a:r>
-          </a:p>
-        </p:txBody>
-      </p:sp>
-      <p:sp>
-        <p:nvSpPr>
-          <p:cNvPr id="27" name="TextBox 26"/>
-          <p:cNvSpPr txBox="1"/>
-          <p:nvPr/>
-        </p:nvSpPr>
-        <p:spPr>
-          <a:xfrm>
-            <a:off x="731520" y="5879338"/>
-            <a:ext cx="2299716" cy="290576"/>
-          </a:xfrm>
-          <a:prstGeom prst="rect">
-            <a:avLst/>
-          </a:prstGeom>
-          <a:noFill/>
-        </p:spPr>
-        <p:txBody>
-          <a:bodyPr wrap="square" anchor="t" lIns="0" rIns="0" tIns="0" bIns="0">
-            <a:spAutoFit/>
-          </a:bodyPr>
-          <a:lstStyle/>
-          <a:p>
-            <a:pPr algn="l">
-              <a:spcAft>
-                <a:spcPts val="0"/>
-              </a:spcAft>
-            </a:pPr>
-            <a:r>
-              <a:rPr sz="880" b="0">
-                <a:solidFill>
-                  <a:srgbClr val="1A1A1A"/>
-                </a:solidFill>
-                <a:latin typeface="Segoe UI"/>
-              </a:rPr>
-              <a:t>·  Every artefact is a file: read it, git diff it, delete it.</a:t>
-            </a:r>
-          </a:p>
-        </p:txBody>
-      </p:sp>
-      <p:sp>
-        <p:nvSpPr>
-          <p:cNvPr id="28" name="Rounded Rectangle 27"/>
+              <a:rPr sz="850" b="0">
+                <a:solidFill>
+                  <a:srgbClr val="6B6B6B"/>
+                </a:solidFill>
+                <a:latin typeface="Segoe UI"/>
+              </a:rPr>
+              <a:t>markdown the agent writes and reuses — a fix found once becomes a procedure, and duplicates are swept up nightly</a:t>
+            </a:r>
+          </a:p>
+        </p:txBody>
+      </p:sp>
+      <p:sp>
+        <p:nvSpPr>
+          <p:cNvPr id="56" name="Rounded Rectangle 55"/>
           <p:cNvSpPr/>
           <p:nvPr/>
         </p:nvSpPr>
         <p:spPr>
           <a:xfrm>
-            <a:off x="3378708" y="3072384"/>
-            <a:ext cx="2628900" cy="3307842"/>
+            <a:off x="6309360" y="4718304"/>
+            <a:ext cx="5321808" cy="1188720"/>
           </a:xfrm>
           <a:prstGeom prst="roundRect">
-            <a:avLst/>
+            <a:avLst>
+              <a:gd name="adj" fmla="val 10000"/>
+            </a:avLst>
           </a:prstGeom>
           <a:solidFill>
             <a:srgbClr val="DCEEE7"/>
@@ -4205,23 +6775,368 @@
           </a:fontRef>
         </p:style>
         <p:txBody>
-          <a:bodyPr rtlCol="0" anchor="ctr"/>
+          <a:bodyPr rtlCol="0" anchor="ctr" wrap="square" lIns="54864" rIns="54864" tIns="27432" bIns="27432"/>
           <a:lstStyle/>
           <a:p>
             <a:pPr algn="ctr"/>
-          </a:p>
-        </p:txBody>
-      </p:sp>
-      <p:sp>
-        <p:nvSpPr>
-          <p:cNvPr id="29" name="TextBox 28"/>
+            <a:r>
+              <a:rPr sz="1150" b="1">
+                <a:solidFill>
+                  <a:srgbClr val="1E6B52"/>
+                </a:solidFill>
+                <a:latin typeface="Segoe UI"/>
+              </a:rPr>
+              <a:t>It remembers, without a database</a:t>
+            </a:r>
+          </a:p>
+        </p:txBody>
+      </p:sp>
+      <p:sp>
+        <p:nvSpPr>
+          <p:cNvPr id="57" name="Rounded Rectangle 56"/>
+          <p:cNvSpPr/>
+          <p:nvPr/>
+        </p:nvSpPr>
+        <p:spPr>
+          <a:xfrm>
+            <a:off x="6510528" y="5102352"/>
+            <a:ext cx="1115568" cy="274320"/>
+          </a:xfrm>
+          <a:prstGeom prst="roundRect">
+            <a:avLst>
+              <a:gd name="adj" fmla="val 10000"/>
+            </a:avLst>
+          </a:prstGeom>
+          <a:solidFill>
+            <a:srgbClr val="FFFFFF"/>
+          </a:solidFill>
+          <a:ln w="12700">
+            <a:solidFill>
+              <a:srgbClr val="1E6B52"/>
+            </a:solidFill>
+          </a:ln>
+          <a:effectLst/>
+        </p:spPr>
+        <p:style>
+          <a:lnRef idx="1">
+            <a:schemeClr val="accent1"/>
+          </a:lnRef>
+          <a:fillRef idx="3">
+            <a:schemeClr val="accent1"/>
+          </a:fillRef>
+          <a:effectRef idx="2">
+            <a:schemeClr val="accent1"/>
+          </a:effectRef>
+          <a:fontRef idx="minor">
+            <a:schemeClr val="lt1"/>
+          </a:fontRef>
+        </p:style>
+        <p:txBody>
+          <a:bodyPr rtlCol="0" anchor="ctr" wrap="square" lIns="54864" rIns="54864" tIns="27432" bIns="27432"/>
+          <a:lstStyle/>
+          <a:p>
+            <a:pPr algn="ctr"/>
+            <a:r>
+              <a:rPr sz="950" b="0">
+                <a:solidFill>
+                  <a:srgbClr val="1E6B52"/>
+                </a:solidFill>
+                <a:latin typeface="Segoe UI"/>
+              </a:rPr>
+              <a:t>Desktop</a:t>
+            </a:r>
+          </a:p>
+        </p:txBody>
+      </p:sp>
+      <p:cxnSp>
+        <p:nvCxnSpPr>
+          <p:cNvPr id="58" name="Connector 57"/>
+          <p:cNvCxnSpPr/>
+          <p:nvPr/>
+        </p:nvCxnSpPr>
+        <p:spPr>
+          <a:xfrm>
+            <a:off x="7626096" y="5239511"/>
+            <a:ext cx="201168" cy="0"/>
+          </a:xfrm>
+          <a:prstGeom prst="line">
+            <a:avLst/>
+          </a:prstGeom>
+          <a:ln w="19050">
+            <a:solidFill>
+              <a:srgbClr val="1E6B52"/>
+            </a:solidFill>
+            <a:tailEnd type="triangle" w="med" len="med"/>
+          </a:ln>
+        </p:spPr>
+        <p:style>
+          <a:lnRef idx="2">
+            <a:schemeClr val="accent1"/>
+          </a:lnRef>
+          <a:fillRef idx="0">
+            <a:schemeClr val="accent1"/>
+          </a:fillRef>
+          <a:effectRef idx="1">
+            <a:schemeClr val="accent1"/>
+          </a:effectRef>
+          <a:fontRef idx="minor">
+            <a:schemeClr val="tx1"/>
+          </a:fontRef>
+        </p:style>
+      </p:cxnSp>
+      <p:sp>
+        <p:nvSpPr>
+          <p:cNvPr id="59" name="Rounded Rectangle 58"/>
+          <p:cNvSpPr/>
+          <p:nvPr/>
+        </p:nvSpPr>
+        <p:spPr>
+          <a:xfrm>
+            <a:off x="7827264" y="5102352"/>
+            <a:ext cx="1005840" cy="274320"/>
+          </a:xfrm>
+          <a:prstGeom prst="roundRect">
+            <a:avLst>
+              <a:gd name="adj" fmla="val 10000"/>
+            </a:avLst>
+          </a:prstGeom>
+          <a:solidFill>
+            <a:srgbClr val="FFFFFF"/>
+          </a:solidFill>
+          <a:ln w="12700">
+            <a:solidFill>
+              <a:srgbClr val="1E6B52"/>
+            </a:solidFill>
+          </a:ln>
+          <a:effectLst/>
+        </p:spPr>
+        <p:style>
+          <a:lnRef idx="1">
+            <a:schemeClr val="accent1"/>
+          </a:lnRef>
+          <a:fillRef idx="3">
+            <a:schemeClr val="accent1"/>
+          </a:fillRef>
+          <a:effectRef idx="2">
+            <a:schemeClr val="accent1"/>
+          </a:effectRef>
+          <a:fontRef idx="minor">
+            <a:schemeClr val="lt1"/>
+          </a:fontRef>
+        </p:style>
+        <p:txBody>
+          <a:bodyPr rtlCol="0" anchor="ctr" wrap="square" lIns="54864" rIns="54864" tIns="27432" bIns="27432"/>
+          <a:lstStyle/>
+          <a:p>
+            <a:pPr algn="ctr"/>
+            <a:r>
+              <a:rPr sz="950" b="0">
+                <a:solidFill>
+                  <a:srgbClr val="1E6B52"/>
+                </a:solidFill>
+                <a:latin typeface="Segoe UI"/>
+              </a:rPr>
+              <a:t>Redact</a:t>
+            </a:r>
+          </a:p>
+        </p:txBody>
+      </p:sp>
+      <p:cxnSp>
+        <p:nvCxnSpPr>
+          <p:cNvPr id="60" name="Connector 59"/>
+          <p:cNvCxnSpPr/>
+          <p:nvPr/>
+        </p:nvCxnSpPr>
+        <p:spPr>
+          <a:xfrm>
+            <a:off x="8833104" y="5239511"/>
+            <a:ext cx="201168" cy="0"/>
+          </a:xfrm>
+          <a:prstGeom prst="line">
+            <a:avLst/>
+          </a:prstGeom>
+          <a:ln w="19050">
+            <a:solidFill>
+              <a:srgbClr val="1E6B52"/>
+            </a:solidFill>
+            <a:tailEnd type="triangle" w="med" len="med"/>
+          </a:ln>
+        </p:spPr>
+        <p:style>
+          <a:lnRef idx="2">
+            <a:schemeClr val="accent1"/>
+          </a:lnRef>
+          <a:fillRef idx="0">
+            <a:schemeClr val="accent1"/>
+          </a:fillRef>
+          <a:effectRef idx="1">
+            <a:schemeClr val="accent1"/>
+          </a:effectRef>
+          <a:fontRef idx="minor">
+            <a:schemeClr val="tx1"/>
+          </a:fontRef>
+        </p:style>
+      </p:cxnSp>
+      <p:sp>
+        <p:nvSpPr>
+          <p:cNvPr id="61" name="Rounded Rectangle 60"/>
+          <p:cNvSpPr/>
+          <p:nvPr/>
+        </p:nvSpPr>
+        <p:spPr>
+          <a:xfrm>
+            <a:off x="9034272" y="5102352"/>
+            <a:ext cx="1188720" cy="274320"/>
+          </a:xfrm>
+          <a:prstGeom prst="roundRect">
+            <a:avLst>
+              <a:gd name="adj" fmla="val 10000"/>
+            </a:avLst>
+          </a:prstGeom>
+          <a:solidFill>
+            <a:srgbClr val="FFFFFF"/>
+          </a:solidFill>
+          <a:ln w="12700">
+            <a:solidFill>
+              <a:srgbClr val="1E6B52"/>
+            </a:solidFill>
+          </a:ln>
+          <a:effectLst/>
+        </p:spPr>
+        <p:style>
+          <a:lnRef idx="1">
+            <a:schemeClr val="accent1"/>
+          </a:lnRef>
+          <a:fillRef idx="3">
+            <a:schemeClr val="accent1"/>
+          </a:fillRef>
+          <a:effectRef idx="2">
+            <a:schemeClr val="accent1"/>
+          </a:effectRef>
+          <a:fontRef idx="minor">
+            <a:schemeClr val="lt1"/>
+          </a:fontRef>
+        </p:style>
+        <p:txBody>
+          <a:bodyPr rtlCol="0" anchor="ctr" wrap="square" lIns="54864" rIns="54864" tIns="27432" bIns="27432"/>
+          <a:lstStyle/>
+          <a:p>
+            <a:pPr algn="ctr"/>
+            <a:r>
+              <a:rPr sz="950" b="0">
+                <a:solidFill>
+                  <a:srgbClr val="1E6B52"/>
+                </a:solidFill>
+                <a:latin typeface="Segoe UI"/>
+              </a:rPr>
+              <a:t>Team admin</a:t>
+            </a:r>
+          </a:p>
+        </p:txBody>
+      </p:sp>
+      <p:cxnSp>
+        <p:nvCxnSpPr>
+          <p:cNvPr id="62" name="Connector 61"/>
+          <p:cNvCxnSpPr/>
+          <p:nvPr/>
+        </p:nvCxnSpPr>
+        <p:spPr>
+          <a:xfrm>
+            <a:off x="10222992" y="5239511"/>
+            <a:ext cx="201168" cy="0"/>
+          </a:xfrm>
+          <a:prstGeom prst="line">
+            <a:avLst/>
+          </a:prstGeom>
+          <a:ln w="19050">
+            <a:solidFill>
+              <a:srgbClr val="1E6B52"/>
+            </a:solidFill>
+            <a:tailEnd type="triangle" w="med" len="med"/>
+          </a:ln>
+        </p:spPr>
+        <p:style>
+          <a:lnRef idx="2">
+            <a:schemeClr val="accent1"/>
+          </a:lnRef>
+          <a:fillRef idx="0">
+            <a:schemeClr val="accent1"/>
+          </a:fillRef>
+          <a:effectRef idx="1">
+            <a:schemeClr val="accent1"/>
+          </a:effectRef>
+          <a:fontRef idx="minor">
+            <a:schemeClr val="tx1"/>
+          </a:fontRef>
+        </p:style>
+      </p:cxnSp>
+      <p:sp>
+        <p:nvSpPr>
+          <p:cNvPr id="63" name="Rounded Rectangle 62"/>
+          <p:cNvSpPr/>
+          <p:nvPr/>
+        </p:nvSpPr>
+        <p:spPr>
+          <a:xfrm>
+            <a:off x="10424160" y="5102352"/>
+            <a:ext cx="1097280" cy="274320"/>
+          </a:xfrm>
+          <a:prstGeom prst="roundRect">
+            <a:avLst>
+              <a:gd name="adj" fmla="val 10000"/>
+            </a:avLst>
+          </a:prstGeom>
+          <a:solidFill>
+            <a:srgbClr val="FFFFFF"/>
+          </a:solidFill>
+          <a:ln w="12700">
+            <a:solidFill>
+              <a:srgbClr val="1E6B52"/>
+            </a:solidFill>
+          </a:ln>
+          <a:effectLst/>
+        </p:spPr>
+        <p:style>
+          <a:lnRef idx="1">
+            <a:schemeClr val="accent1"/>
+          </a:lnRef>
+          <a:fillRef idx="3">
+            <a:schemeClr val="accent1"/>
+          </a:fillRef>
+          <a:effectRef idx="2">
+            <a:schemeClr val="accent1"/>
+          </a:effectRef>
+          <a:fontRef idx="minor">
+            <a:schemeClr val="lt1"/>
+          </a:fontRef>
+        </p:style>
+        <p:txBody>
+          <a:bodyPr rtlCol="0" anchor="ctr" wrap="square" lIns="54864" rIns="54864" tIns="27432" bIns="27432"/>
+          <a:lstStyle/>
+          <a:p>
+            <a:pPr algn="ctr"/>
+            <a:r>
+              <a:rPr sz="950" b="0">
+                <a:solidFill>
+                  <a:srgbClr val="1E6B52"/>
+                </a:solidFill>
+                <a:latin typeface="Segoe UI"/>
+              </a:rPr>
+              <a:t>Company</a:t>
+            </a:r>
+          </a:p>
+        </p:txBody>
+      </p:sp>
+      <p:sp>
+        <p:nvSpPr>
+          <p:cNvPr id="64" name="TextBox 63"/>
           <p:cNvSpPr txBox="1"/>
           <p:nvPr/>
         </p:nvSpPr>
         <p:spPr>
           <a:xfrm>
-            <a:off x="3543300" y="3236976"/>
-            <a:ext cx="2299716" cy="189865"/>
+            <a:off x="6510528" y="5504688"/>
+            <a:ext cx="4937760" cy="310896"/>
           </a:xfrm>
           <a:prstGeom prst="rect">
             <a:avLst/>
@@ -4240,651 +7155,13 @@
               </a:spcAft>
             </a:pPr>
             <a:r>
-              <a:rPr sz="1150" b="1">
-                <a:solidFill>
-                  <a:srgbClr val="1E6B52"/>
-                </a:solidFill>
-                <a:latin typeface="Segoe UI"/>
-              </a:rPr>
-              <a:t>Memory, with no database</a:t>
-            </a:r>
-          </a:p>
-        </p:txBody>
-      </p:sp>
-      <p:sp>
-        <p:nvSpPr>
-          <p:cNvPr id="30" name="TextBox 29"/>
-          <p:cNvSpPr txBox="1"/>
-          <p:nvPr/>
-        </p:nvSpPr>
-        <p:spPr>
-          <a:xfrm>
-            <a:off x="3543300" y="3518281"/>
-            <a:ext cx="2299716" cy="435864"/>
-          </a:xfrm>
-          <a:prstGeom prst="rect">
-            <a:avLst/>
-          </a:prstGeom>
-          <a:noFill/>
-        </p:spPr>
-        <p:txBody>
-          <a:bodyPr wrap="square" anchor="t" lIns="0" rIns="0" tIns="0" bIns="0">
-            <a:spAutoFit/>
-          </a:bodyPr>
-          <a:lstStyle/>
-          <a:p>
-            <a:pPr algn="l">
-              <a:spcAft>
-                <a:spcPts val="0"/>
-              </a:spcAft>
-            </a:pPr>
-            <a:r>
-              <a:rPr sz="880" b="0">
-                <a:solidFill>
-                  <a:srgbClr val="1A1A1A"/>
-                </a:solidFill>
-                <a:latin typeface="Segoe UI"/>
-              </a:rPr>
-              <a:t>·  A folder of markdown plus one SQLite file. Nothing to install, tune, back up or explain to an auditor.</a:t>
-            </a:r>
-          </a:p>
-        </p:txBody>
-      </p:sp>
-      <p:sp>
-        <p:nvSpPr>
-          <p:cNvPr id="31" name="TextBox 30"/>
-          <p:cNvSpPr txBox="1"/>
-          <p:nvPr/>
-        </p:nvSpPr>
-        <p:spPr>
-          <a:xfrm>
-            <a:off x="3543300" y="3999865"/>
-            <a:ext cx="2299716" cy="871728"/>
-          </a:xfrm>
-          <a:prstGeom prst="rect">
-            <a:avLst/>
-          </a:prstGeom>
-          <a:noFill/>
-        </p:spPr>
-        <p:txBody>
-          <a:bodyPr wrap="square" anchor="t" lIns="0" rIns="0" tIns="0" bIns="0">
-            <a:spAutoFit/>
-          </a:bodyPr>
-          <a:lstStyle/>
-          <a:p>
-            <a:pPr algn="l">
-              <a:spcAft>
-                <a:spcPts val="0"/>
-              </a:spcAft>
-            </a:pPr>
-            <a:r>
-              <a:rPr sz="880" b="0">
-                <a:solidFill>
-                  <a:srgbClr val="1A1A1A"/>
-                </a:solidFill>
-                <a:latin typeface="Segoe UI"/>
-              </a:rPr>
-              <a:t>·  Each desktop compacts locally; a client-side redaction filter blocks credential-shaped and private notes BEFORE anything is advertised; one team admin merges; one admin serves many fleets.</a:t>
-            </a:r>
-          </a:p>
-        </p:txBody>
-      </p:sp>
-      <p:sp>
-        <p:nvSpPr>
-          <p:cNvPr id="32" name="TextBox 31"/>
-          <p:cNvSpPr txBox="1"/>
-          <p:nvPr/>
-        </p:nvSpPr>
-        <p:spPr>
-          <a:xfrm>
-            <a:off x="3543300" y="4917313"/>
-            <a:ext cx="2299716" cy="435864"/>
-          </a:xfrm>
-          <a:prstGeom prst="rect">
-            <a:avLst/>
-          </a:prstGeom>
-          <a:noFill/>
-        </p:spPr>
-        <p:txBody>
-          <a:bodyPr wrap="square" anchor="t" lIns="0" rIns="0" tIns="0" bIns="0">
-            <a:spAutoFit/>
-          </a:bodyPr>
-          <a:lstStyle/>
-          <a:p>
-            <a:pPr algn="l">
-              <a:spcAft>
-                <a:spcPts val="0"/>
-              </a:spcAft>
-            </a:pPr>
-            <a:r>
-              <a:rPr sz="880" b="0">
-                <a:solidFill>
-                  <a:srgbClr val="1A1A1A"/>
-                </a:solidFill>
-                <a:latin typeface="Segoe UI"/>
-              </a:rPr>
-              <a:t>·  Only distilled knowledge nodes travel — transcripts, captures and working notes never leave the machine that made them.</a:t>
-            </a:r>
-          </a:p>
-        </p:txBody>
-      </p:sp>
-      <p:sp>
-        <p:nvSpPr>
-          <p:cNvPr id="33" name="TextBox 32"/>
-          <p:cNvSpPr txBox="1"/>
-          <p:nvPr/>
-        </p:nvSpPr>
-        <p:spPr>
-          <a:xfrm>
-            <a:off x="3543300" y="5398897"/>
-            <a:ext cx="2299716" cy="435864"/>
-          </a:xfrm>
-          <a:prstGeom prst="rect">
-            <a:avLst/>
-          </a:prstGeom>
-          <a:noFill/>
-        </p:spPr>
-        <p:txBody>
-          <a:bodyPr wrap="square" anchor="t" lIns="0" rIns="0" tIns="0" bIns="0">
-            <a:spAutoFit/>
-          </a:bodyPr>
-          <a:lstStyle/>
-          <a:p>
-            <a:pPr algn="l">
-              <a:spcAft>
-                <a:spcPts val="0"/>
-              </a:spcAft>
-            </a:pPr>
-            <a:r>
-              <a:rPr sz="880" b="0">
-                <a:solidFill>
-                  <a:srgbClr val="1A1A1A"/>
-                </a:solidFill>
-                <a:latin typeface="Segoe UI"/>
-              </a:rPr>
-              <a:t>·  Every merge is snapshotted and a revert endpoint restores it; delete the folder and it is gone, there is no second copy.</a:t>
-            </a:r>
-          </a:p>
-        </p:txBody>
-      </p:sp>
-      <p:sp>
-        <p:nvSpPr>
-          <p:cNvPr id="34" name="Rounded Rectangle 33"/>
-          <p:cNvSpPr/>
-          <p:nvPr/>
-        </p:nvSpPr>
-        <p:spPr>
-          <a:xfrm>
-            <a:off x="6190488" y="3072384"/>
-            <a:ext cx="2628900" cy="3307842"/>
-          </a:xfrm>
-          <a:prstGeom prst="roundRect">
-            <a:avLst/>
-          </a:prstGeom>
-          <a:solidFill>
-            <a:srgbClr val="DCE7F2"/>
-          </a:solidFill>
-          <a:ln w="12700">
-            <a:solidFill>
-              <a:srgbClr val="1F4E79"/>
-            </a:solidFill>
-          </a:ln>
-          <a:effectLst/>
-        </p:spPr>
-        <p:style>
-          <a:lnRef idx="1">
-            <a:schemeClr val="accent1"/>
-          </a:lnRef>
-          <a:fillRef idx="3">
-            <a:schemeClr val="accent1"/>
-          </a:fillRef>
-          <a:effectRef idx="2">
-            <a:schemeClr val="accent1"/>
-          </a:effectRef>
-          <a:fontRef idx="minor">
-            <a:schemeClr val="lt1"/>
-          </a:fontRef>
-        </p:style>
-        <p:txBody>
-          <a:bodyPr rtlCol="0" anchor="ctr"/>
-          <a:lstStyle/>
-          <a:p>
-            <a:pPr algn="ctr"/>
-          </a:p>
-        </p:txBody>
-      </p:sp>
-      <p:sp>
-        <p:nvSpPr>
-          <p:cNvPr id="35" name="TextBox 34"/>
-          <p:cNvSpPr txBox="1"/>
-          <p:nvPr/>
-        </p:nvSpPr>
-        <p:spPr>
-          <a:xfrm>
-            <a:off x="6355080" y="3236976"/>
-            <a:ext cx="2299716" cy="189865"/>
-          </a:xfrm>
-          <a:prstGeom prst="rect">
-            <a:avLst/>
-          </a:prstGeom>
-          <a:noFill/>
-        </p:spPr>
-        <p:txBody>
-          <a:bodyPr wrap="square" anchor="t" lIns="0" rIns="0" tIns="0" bIns="0">
-            <a:spAutoFit/>
-          </a:bodyPr>
-          <a:lstStyle/>
-          <a:p>
-            <a:pPr algn="l">
-              <a:spcAft>
-                <a:spcPts val="0"/>
-              </a:spcAft>
-            </a:pPr>
-            <a:r>
-              <a:rPr sz="1150" b="1">
-                <a:solidFill>
-                  <a:srgbClr val="1F4E79"/>
-                </a:solidFill>
-                <a:latin typeface="Segoe UI"/>
-              </a:rPr>
-              <a:t>What it can reach and read</a:t>
-            </a:r>
-          </a:p>
-        </p:txBody>
-      </p:sp>
-      <p:sp>
-        <p:nvSpPr>
-          <p:cNvPr id="36" name="TextBox 35"/>
-          <p:cNvSpPr txBox="1"/>
-          <p:nvPr/>
-        </p:nvSpPr>
-        <p:spPr>
-          <a:xfrm>
-            <a:off x="6355080" y="3518281"/>
-            <a:ext cx="2299716" cy="581152"/>
-          </a:xfrm>
-          <a:prstGeom prst="rect">
-            <a:avLst/>
-          </a:prstGeom>
-          <a:noFill/>
-        </p:spPr>
-        <p:txBody>
-          <a:bodyPr wrap="square" anchor="t" lIns="0" rIns="0" tIns="0" bIns="0">
-            <a:spAutoFit/>
-          </a:bodyPr>
-          <a:lstStyle/>
-          <a:p>
-            <a:pPr algn="l">
-              <a:spcAft>
-                <a:spcPts val="0"/>
-              </a:spcAft>
-            </a:pPr>
-            <a:r>
-              <a:rPr sz="880" b="0">
-                <a:solidFill>
-                  <a:srgbClr val="1A1A1A"/>
-                </a:solidFill>
-                <a:latin typeface="Segoe UI"/>
-              </a:rPr>
-              <a:t>·  Jira 21 tools, Confluence 14, GitLab 10, plus GitHub, email and any MCP server; a tool with no credentials hides itself.</a:t>
-            </a:r>
-          </a:p>
-        </p:txBody>
-      </p:sp>
-      <p:sp>
-        <p:nvSpPr>
-          <p:cNvPr id="37" name="TextBox 36"/>
-          <p:cNvSpPr txBox="1"/>
-          <p:nvPr/>
-        </p:nvSpPr>
-        <p:spPr>
-          <a:xfrm>
-            <a:off x="6355080" y="4145153"/>
-            <a:ext cx="2299716" cy="435864"/>
-          </a:xfrm>
-          <a:prstGeom prst="rect">
-            <a:avLst/>
-          </a:prstGeom>
-          <a:noFill/>
-        </p:spPr>
-        <p:txBody>
-          <a:bodyPr wrap="square" anchor="t" lIns="0" rIns="0" tIns="0" bIns="0">
-            <a:spAutoFit/>
-          </a:bodyPr>
-          <a:lstStyle/>
-          <a:p>
-            <a:pPr algn="l">
-              <a:spcAft>
-                <a:spcPts val="0"/>
-              </a:spcAft>
-            </a:pPr>
-            <a:r>
-              <a:rPr sz="880" b="0">
-                <a:solidFill>
-                  <a:srgbClr val="1A1A1A"/>
-                </a:solidFill>
-                <a:latin typeface="Segoe UI"/>
-              </a:rPr>
-              <a:t>·  A tree-sitter and PageRank repo map and 5 knowledge-graph tools, so context is chosen, not pasted.</a:t>
-            </a:r>
-          </a:p>
-        </p:txBody>
-      </p:sp>
-      <p:sp>
-        <p:nvSpPr>
-          <p:cNvPr id="38" name="TextBox 37"/>
-          <p:cNvSpPr txBox="1"/>
-          <p:nvPr/>
-        </p:nvSpPr>
-        <p:spPr>
-          <a:xfrm>
-            <a:off x="6355080" y="4626737"/>
-            <a:ext cx="2299716" cy="435864"/>
-          </a:xfrm>
-          <a:prstGeom prst="rect">
-            <a:avLst/>
-          </a:prstGeom>
-          <a:noFill/>
-        </p:spPr>
-        <p:txBody>
-          <a:bodyPr wrap="square" anchor="t" lIns="0" rIns="0" tIns="0" bIns="0">
-            <a:spAutoFit/>
-          </a:bodyPr>
-          <a:lstStyle/>
-          <a:p>
-            <a:pPr algn="l">
-              <a:spcAft>
-                <a:spcPts val="0"/>
-              </a:spcAft>
-            </a:pPr>
-            <a:r>
-              <a:rPr sz="880" b="0">
-                <a:solidFill>
-                  <a:srgbClr val="1A1A1A"/>
-                </a:solidFill>
-                <a:latin typeface="Segoe UI"/>
-              </a:rPr>
-              <a:t>·  The real toolchain: persistent shell, language server, type-checker, test runner and an IPython kernel.</a:t>
-            </a:r>
-          </a:p>
-        </p:txBody>
-      </p:sp>
-      <p:sp>
-        <p:nvSpPr>
-          <p:cNvPr id="39" name="TextBox 38"/>
-          <p:cNvSpPr txBox="1"/>
-          <p:nvPr/>
-        </p:nvSpPr>
-        <p:spPr>
-          <a:xfrm>
-            <a:off x="6355080" y="5108321"/>
-            <a:ext cx="2299716" cy="435864"/>
-          </a:xfrm>
-          <a:prstGeom prst="rect">
-            <a:avLst/>
-          </a:prstGeom>
-          <a:noFill/>
-        </p:spPr>
-        <p:txBody>
-          <a:bodyPr wrap="square" anchor="t" lIns="0" rIns="0" tIns="0" bIns="0">
-            <a:spAutoFit/>
-          </a:bodyPr>
-          <a:lstStyle/>
-          <a:p>
-            <a:pPr algn="l">
-              <a:spcAft>
-                <a:spcPts val="0"/>
-              </a:spcAft>
-            </a:pPr>
-            <a:r>
-              <a:rPr sz="880" b="0">
-                <a:solidFill>
-                  <a:srgbClr val="1A1A1A"/>
-                </a:solidFill>
-                <a:latin typeface="Segoe UI"/>
-              </a:rPr>
-              <a:t>·  A local vision model screenshots the running app and answers questions about it — no cloud vision service.</a:t>
-            </a:r>
-          </a:p>
-        </p:txBody>
-      </p:sp>
-      <p:sp>
-        <p:nvSpPr>
-          <p:cNvPr id="40" name="Rounded Rectangle 39"/>
-          <p:cNvSpPr/>
-          <p:nvPr/>
-        </p:nvSpPr>
-        <p:spPr>
-          <a:xfrm>
-            <a:off x="9002268" y="3072384"/>
-            <a:ext cx="2628900" cy="3307842"/>
-          </a:xfrm>
-          <a:prstGeom prst="roundRect">
-            <a:avLst/>
-          </a:prstGeom>
-          <a:solidFill>
-            <a:srgbClr val="EAE1F0"/>
-          </a:solidFill>
-          <a:ln w="12700">
-            <a:solidFill>
-              <a:srgbClr val="5B3A6E"/>
-            </a:solidFill>
-          </a:ln>
-          <a:effectLst/>
-        </p:spPr>
-        <p:style>
-          <a:lnRef idx="1">
-            <a:schemeClr val="accent1"/>
-          </a:lnRef>
-          <a:fillRef idx="3">
-            <a:schemeClr val="accent1"/>
-          </a:fillRef>
-          <a:effectRef idx="2">
-            <a:schemeClr val="accent1"/>
-          </a:effectRef>
-          <a:fontRef idx="minor">
-            <a:schemeClr val="lt1"/>
-          </a:fontRef>
-        </p:style>
-        <p:txBody>
-          <a:bodyPr rtlCol="0" anchor="ctr"/>
-          <a:lstStyle/>
-          <a:p>
-            <a:pPr algn="ctr"/>
-          </a:p>
-        </p:txBody>
-      </p:sp>
-      <p:sp>
-        <p:nvSpPr>
-          <p:cNvPr id="41" name="TextBox 40"/>
-          <p:cNvSpPr txBox="1"/>
-          <p:nvPr/>
-        </p:nvSpPr>
-        <p:spPr>
-          <a:xfrm>
-            <a:off x="9166860" y="3236976"/>
-            <a:ext cx="2299716" cy="189865"/>
-          </a:xfrm>
-          <a:prstGeom prst="rect">
-            <a:avLst/>
-          </a:prstGeom>
-          <a:noFill/>
-        </p:spPr>
-        <p:txBody>
-          <a:bodyPr wrap="square" anchor="t" lIns="0" rIns="0" tIns="0" bIns="0">
-            <a:spAutoFit/>
-          </a:bodyPr>
-          <a:lstStyle/>
-          <a:p>
-            <a:pPr algn="l">
-              <a:spcAft>
-                <a:spcPts val="0"/>
-              </a:spcAft>
-            </a:pPr>
-            <a:r>
-              <a:rPr sz="1150" b="1">
-                <a:solidFill>
-                  <a:srgbClr val="5B3A6E"/>
-                </a:solidFill>
-                <a:latin typeface="Segoe UI"/>
-              </a:rPr>
-              <a:t>Deploy and operate</a:t>
-            </a:r>
-          </a:p>
-        </p:txBody>
-      </p:sp>
-      <p:sp>
-        <p:nvSpPr>
-          <p:cNvPr id="42" name="TextBox 41"/>
-          <p:cNvSpPr txBox="1"/>
-          <p:nvPr/>
-        </p:nvSpPr>
-        <p:spPr>
-          <a:xfrm>
-            <a:off x="9166860" y="3518281"/>
-            <a:ext cx="2299716" cy="581152"/>
-          </a:xfrm>
-          <a:prstGeom prst="rect">
-            <a:avLst/>
-          </a:prstGeom>
-          <a:noFill/>
-        </p:spPr>
-        <p:txBody>
-          <a:bodyPr wrap="square" anchor="t" lIns="0" rIns="0" tIns="0" bIns="0">
-            <a:spAutoFit/>
-          </a:bodyPr>
-          <a:lstStyle/>
-          <a:p>
-            <a:pPr algn="l">
-              <a:spcAft>
-                <a:spcPts val="0"/>
-              </a:spcAft>
-            </a:pPr>
-            <a:r>
-              <a:rPr sz="880" b="0">
-                <a:solidFill>
-                  <a:srgbClr val="1A1A1A"/>
-                </a:solidFill>
-                <a:latin typeface="Segoe UI"/>
-              </a:rPr>
-              <a:t>·  A desktop, a NUC or a server under systemd, or a container — the same single command; an unset admin URL means this box is it.</a:t>
-            </a:r>
-          </a:p>
-        </p:txBody>
-      </p:sp>
-      <p:sp>
-        <p:nvSpPr>
-          <p:cNvPr id="43" name="TextBox 42"/>
-          <p:cNvSpPr txBox="1"/>
-          <p:nvPr/>
-        </p:nvSpPr>
-        <p:spPr>
-          <a:xfrm>
-            <a:off x="9166860" y="4145153"/>
-            <a:ext cx="2299716" cy="435864"/>
-          </a:xfrm>
-          <a:prstGeom prst="rect">
-            <a:avLst/>
-          </a:prstGeom>
-          <a:noFill/>
-        </p:spPr>
-        <p:txBody>
-          <a:bodyPr wrap="square" anchor="t" lIns="0" rIns="0" tIns="0" bIns="0">
-            <a:spAutoFit/>
-          </a:bodyPr>
-          <a:lstStyle/>
-          <a:p>
-            <a:pPr algn="l">
-              <a:spcAft>
-                <a:spcPts val="0"/>
-              </a:spcAft>
-            </a:pPr>
-            <a:r>
-              <a:rPr sz="880" b="0">
-                <a:solidFill>
-                  <a:srgbClr val="1A1A1A"/>
-                </a:solidFill>
-                <a:latin typeface="Segoe UI"/>
-              </a:rPr>
-              <a:t>·  State is one folder; upgrade is git pull and run.sh, which converges the environment and migrates in place.</a:t>
-            </a:r>
-          </a:p>
-        </p:txBody>
-      </p:sp>
-      <p:sp>
-        <p:nvSpPr>
-          <p:cNvPr id="44" name="TextBox 43"/>
-          <p:cNvSpPr txBox="1"/>
-          <p:nvPr/>
-        </p:nvSpPr>
-        <p:spPr>
-          <a:xfrm>
-            <a:off x="9166860" y="4626737"/>
-            <a:ext cx="2299716" cy="581152"/>
-          </a:xfrm>
-          <a:prstGeom prst="rect">
-            <a:avLst/>
-          </a:prstGeom>
-          <a:noFill/>
-        </p:spPr>
-        <p:txBody>
-          <a:bodyPr wrap="square" anchor="t" lIns="0" rIns="0" tIns="0" bIns="0">
-            <a:spAutoFit/>
-          </a:bodyPr>
-          <a:lstStyle/>
-          <a:p>
-            <a:pPr algn="l">
-              <a:spcAft>
-                <a:spcPts val="0"/>
-              </a:spcAft>
-            </a:pPr>
-            <a:r>
-              <a:rPr sz="880" b="0">
-                <a:solidFill>
-                  <a:srgbClr val="1A1A1A"/>
-                </a:solidFill>
-                <a:latin typeface="Segoe UI"/>
-              </a:rPr>
-              <a:t>·  A scheduler fires cron-shaped ticket pipelines, nightly memory compaction and the duplicate sweep, with no human in the loop.</a:t>
-            </a:r>
-          </a:p>
-        </p:txBody>
-      </p:sp>
-      <p:sp>
-        <p:nvSpPr>
-          <p:cNvPr id="45" name="TextBox 44"/>
-          <p:cNvSpPr txBox="1"/>
-          <p:nvPr/>
-        </p:nvSpPr>
-        <p:spPr>
-          <a:xfrm>
-            <a:off x="9166860" y="5253609"/>
-            <a:ext cx="2299716" cy="435864"/>
-          </a:xfrm>
-          <a:prstGeom prst="rect">
-            <a:avLst/>
-          </a:prstGeom>
-          <a:noFill/>
-        </p:spPr>
-        <p:txBody>
-          <a:bodyPr wrap="square" anchor="t" lIns="0" rIns="0" tIns="0" bIns="0">
-            <a:spAutoFit/>
-          </a:bodyPr>
-          <a:lstStyle/>
-          <a:p>
-            <a:pPr algn="l">
-              <a:spcAft>
-                <a:spcPts val="0"/>
-              </a:spcAft>
-            </a:pPr>
-            <a:r>
-              <a:rPr sz="880" b="0">
-                <a:solidFill>
-                  <a:srgbClr val="1A1A1A"/>
-                </a:solidFill>
-                <a:latin typeface="Segoe UI"/>
-              </a:rPr>
-              <a:t>·  One process with no worker fan-out: restart is the recovery, and nobody has load-tested users-per-box yet.</a:t>
+              <a:rPr sz="850" b="0">
+                <a:solidFill>
+                  <a:srgbClr val="6B6B6B"/>
+                </a:solidFill>
+                <a:latin typeface="Segoe UI"/>
+              </a:rPr>
+              <a:t>only distilled notes travel · credentials blocked before they are offered · delete the folder and it is gone</a:t>
             </a:r>
           </a:p>
         </p:txBody>
@@ -4941,7 +7218,7 @@
                 </a:solidFill>
                 <a:latin typeface="Segoe UI"/>
               </a:rPr>
-              <a:t>Containment, cost ceiling, and the limits we state out loud</a:t>
+              <a:t>Containment — one policy, every path</a:t>
             </a:r>
           </a:p>
         </p:txBody>
@@ -4980,7 +7257,7 @@
                 </a:solidFill>
                 <a:latin typeface="Segoe UI"/>
               </a:rPr>
-              <a:t>Self-hosted. Every control below began as a bypass that WORKED in testing, and each is pinned by a test that fails without the fix.</a:t>
+              <a:t>A refused fetch was rerouted through a shell curl, then a notebook cell, and it worked. So the policy sits under all three.</a:t>
             </a:r>
           </a:p>
         </p:txBody>
@@ -5063,7 +7340,7 @@
                 </a:solidFill>
                 <a:latin typeface="Segoe UI"/>
               </a:rPr>
-              <a:t>Measured on main @ 7d9e60ae, 2026-09-06. The limits in the last column are printed in the product's own docs and env template, not only on this slide: this is a guard, not a sandbox, and an OS egress firewall is still the outer boundary.</a:t>
+              <a:t>Measured on main @ 7d9e60ae, 2026-09-06. A guard, not a sandbox: an OS egress firewall is still the outer boundary, and that limit is printed in the product's own docs.</a:t>
             </a:r>
           </a:p>
         </p:txBody>
@@ -5115,8 +7392,8 @@
         </p:nvSpPr>
         <p:spPr>
           <a:xfrm>
-            <a:off x="566928" y="1316736"/>
-            <a:ext cx="2212848" cy="384048"/>
+            <a:off x="566928" y="1243584"/>
+            <a:ext cx="1844040" cy="384048"/>
           </a:xfrm>
           <a:prstGeom prst="rect">
             <a:avLst/>
@@ -5154,8 +7431,8 @@
         </p:nvSpPr>
         <p:spPr>
           <a:xfrm>
-            <a:off x="640080" y="1719072"/>
-            <a:ext cx="2066544" cy="384048"/>
+            <a:off x="640080" y="1645920"/>
+            <a:ext cx="1697736" cy="384048"/>
           </a:xfrm>
           <a:prstGeom prst="rect">
             <a:avLst/>
@@ -5193,8 +7470,8 @@
         </p:nvSpPr>
         <p:spPr>
           <a:xfrm>
-            <a:off x="2779776" y="1316736"/>
-            <a:ext cx="2212848" cy="384048"/>
+            <a:off x="2410968" y="1243584"/>
+            <a:ext cx="1844040" cy="384048"/>
           </a:xfrm>
           <a:prstGeom prst="rect">
             <a:avLst/>
@@ -5232,8 +7509,8 @@
         </p:nvSpPr>
         <p:spPr>
           <a:xfrm>
-            <a:off x="2852928" y="1719072"/>
-            <a:ext cx="2066544" cy="384048"/>
+            <a:off x="2484120" y="1645920"/>
+            <a:ext cx="1697736" cy="384048"/>
           </a:xfrm>
           <a:prstGeom prst="rect">
             <a:avLst/>
@@ -5258,7 +7535,7 @@
                 </a:solidFill>
                 <a:latin typeface="Segoe UI"/>
               </a:rPr>
-              <a:t>security hotspots to review</a:t>
+              <a:t>hotspots</a:t>
             </a:r>
           </a:p>
         </p:txBody>
@@ -5271,7 +7548,7 @@
         </p:nvSpPr>
         <p:spPr>
           <a:xfrm>
-            <a:off x="2779776" y="1353312"/>
+            <a:off x="2410968" y="1280160"/>
             <a:ext cx="9525" cy="566928"/>
           </a:xfrm>
           <a:prstGeom prst="rect">
@@ -5315,8 +7592,8 @@
         </p:nvSpPr>
         <p:spPr>
           <a:xfrm>
-            <a:off x="4992624" y="1316736"/>
-            <a:ext cx="2212848" cy="384048"/>
+            <a:off x="4255008" y="1243584"/>
+            <a:ext cx="1844040" cy="384048"/>
           </a:xfrm>
           <a:prstGeom prst="rect">
             <a:avLst/>
@@ -5354,8 +7631,8 @@
         </p:nvSpPr>
         <p:spPr>
           <a:xfrm>
-            <a:off x="5065776" y="1719072"/>
-            <a:ext cx="2066544" cy="384048"/>
+            <a:off x="4328160" y="1645920"/>
+            <a:ext cx="1697736" cy="384048"/>
           </a:xfrm>
           <a:prstGeom prst="rect">
             <a:avLst/>
@@ -5380,7 +7657,7 @@
                 </a:solidFill>
                 <a:latin typeface="Segoe UI"/>
               </a:rPr>
-              <a:t>telemetry in a default install</a:t>
+              <a:t>telemetry</a:t>
             </a:r>
           </a:p>
         </p:txBody>
@@ -5393,7 +7670,7 @@
         </p:nvSpPr>
         <p:spPr>
           <a:xfrm>
-            <a:off x="4992624" y="1353312"/>
+            <a:off x="4255008" y="1280160"/>
             <a:ext cx="9525" cy="566928"/>
           </a:xfrm>
           <a:prstGeom prst="rect">
@@ -5437,8 +7714,8 @@
         </p:nvSpPr>
         <p:spPr>
           <a:xfrm>
-            <a:off x="7205472" y="1316736"/>
-            <a:ext cx="2212848" cy="384048"/>
+            <a:off x="6099048" y="1243584"/>
+            <a:ext cx="1844040" cy="384048"/>
           </a:xfrm>
           <a:prstGeom prst="rect">
             <a:avLst/>
@@ -5476,8 +7753,8 @@
         </p:nvSpPr>
         <p:spPr>
           <a:xfrm>
-            <a:off x="7278624" y="1719072"/>
-            <a:ext cx="2066544" cy="384048"/>
+            <a:off x="6172200" y="1645920"/>
+            <a:ext cx="1697736" cy="384048"/>
           </a:xfrm>
           <a:prstGeom prst="rect">
             <a:avLst/>
@@ -5502,7 +7779,7 @@
                 </a:solidFill>
                 <a:latin typeface="Segoe UI"/>
               </a:rPr>
-              <a:t>unverified TLS calls in the tree</a:t>
+              <a:t>CERT_NONE in the tree</a:t>
             </a:r>
           </a:p>
         </p:txBody>
@@ -5515,7 +7792,7 @@
         </p:nvSpPr>
         <p:spPr>
           <a:xfrm>
-            <a:off x="7205472" y="1353312"/>
+            <a:off x="6099048" y="1280160"/>
             <a:ext cx="9525" cy="566928"/>
           </a:xfrm>
           <a:prstGeom prst="rect">
@@ -5559,8 +7836,8 @@
         </p:nvSpPr>
         <p:spPr>
           <a:xfrm>
-            <a:off x="9418320" y="1316736"/>
-            <a:ext cx="2212848" cy="384048"/>
+            <a:off x="7943088" y="1243584"/>
+            <a:ext cx="1844040" cy="384048"/>
           </a:xfrm>
           <a:prstGeom prst="rect">
             <a:avLst/>
@@ -5598,8 +7875,8 @@
         </p:nvSpPr>
         <p:spPr>
           <a:xfrm>
-            <a:off x="9491472" y="1719072"/>
-            <a:ext cx="2066544" cy="384048"/>
+            <a:off x="8016240" y="1645920"/>
+            <a:ext cx="1697736" cy="384048"/>
           </a:xfrm>
           <a:prstGeom prst="rect">
             <a:avLst/>
@@ -5624,7 +7901,7 @@
                 </a:solidFill>
                 <a:latin typeface="Segoe UI"/>
               </a:rPr>
-              <a:t>agent roles holding no tools at all</a:t>
+              <a:t>roles with no tools</a:t>
             </a:r>
           </a:p>
         </p:txBody>
@@ -5637,7 +7914,7 @@
         </p:nvSpPr>
         <p:spPr>
           <a:xfrm>
-            <a:off x="9418320" y="1353312"/>
+            <a:off x="7943088" y="1280160"/>
             <a:ext cx="9525" cy="566928"/>
           </a:xfrm>
           <a:prstGeom prst="rect">
@@ -5675,14 +7952,451 @@
       </p:sp>
       <p:sp>
         <p:nvSpPr>
-          <p:cNvPr id="21" name="Rounded Rectangle 20"/>
+          <p:cNvPr id="21" name="TextBox 20"/>
+          <p:cNvSpPr txBox="1"/>
+          <p:nvPr/>
+        </p:nvSpPr>
+        <p:spPr>
+          <a:xfrm>
+            <a:off x="9787128" y="1243584"/>
+            <a:ext cx="1844040" cy="384048"/>
+          </a:xfrm>
+          <a:prstGeom prst="rect">
+            <a:avLst/>
+          </a:prstGeom>
+          <a:noFill/>
+        </p:spPr>
+        <p:txBody>
+          <a:bodyPr wrap="square" anchor="t" lIns="0" rIns="0" tIns="0" bIns="0">
+            <a:spAutoFit/>
+          </a:bodyPr>
+          <a:lstStyle/>
+          <a:p>
+            <a:pPr algn="ctr">
+              <a:spcAft>
+                <a:spcPts val="0"/>
+              </a:spcAft>
+            </a:pPr>
+            <a:r>
+              <a:rPr sz="2500" b="1">
+                <a:solidFill>
+                  <a:srgbClr val="8A5A00"/>
+                </a:solidFill>
+                <a:latin typeface="Segoe UI"/>
+              </a:rPr>
+              <a:t>20</a:t>
+            </a:r>
+          </a:p>
+        </p:txBody>
+      </p:sp>
+      <p:sp>
+        <p:nvSpPr>
+          <p:cNvPr id="22" name="TextBox 21"/>
+          <p:cNvSpPr txBox="1"/>
+          <p:nvPr/>
+        </p:nvSpPr>
+        <p:spPr>
+          <a:xfrm>
+            <a:off x="9860280" y="1645920"/>
+            <a:ext cx="1697736" cy="384048"/>
+          </a:xfrm>
+          <a:prstGeom prst="rect">
+            <a:avLst/>
+          </a:prstGeom>
+          <a:noFill/>
+        </p:spPr>
+        <p:txBody>
+          <a:bodyPr wrap="square" anchor="t" lIns="0" rIns="0" tIns="0" bIns="0">
+            <a:spAutoFit/>
+          </a:bodyPr>
+          <a:lstStyle/>
+          <a:p>
+            <a:pPr algn="ctr">
+              <a:spcAft>
+                <a:spcPts val="0"/>
+              </a:spcAft>
+            </a:pPr>
+            <a:r>
+              <a:rPr sz="1050" b="0">
+                <a:solidFill>
+                  <a:srgbClr val="6B6B6B"/>
+                </a:solidFill>
+                <a:latin typeface="Segoe UI"/>
+              </a:rPr>
+              <a:t>writes that ask a human</a:t>
+            </a:r>
+          </a:p>
+        </p:txBody>
+      </p:sp>
+      <p:sp>
+        <p:nvSpPr>
+          <p:cNvPr id="23" name="Rectangle 22"/>
           <p:cNvSpPr/>
           <p:nvPr/>
         </p:nvSpPr>
         <p:spPr>
           <a:xfrm>
+            <a:off x="9787128" y="1280160"/>
+            <a:ext cx="9525" cy="566928"/>
+          </a:xfrm>
+          <a:prstGeom prst="rect">
+            <a:avLst/>
+          </a:prstGeom>
+          <a:solidFill>
+            <a:srgbClr val="C9C9C9"/>
+          </a:solidFill>
+          <a:ln>
+            <a:noFill/>
+          </a:ln>
+          <a:effectLst/>
+        </p:spPr>
+        <p:style>
+          <a:lnRef idx="1">
+            <a:schemeClr val="accent1"/>
+          </a:lnRef>
+          <a:fillRef idx="3">
+            <a:schemeClr val="accent1"/>
+          </a:fillRef>
+          <a:effectRef idx="2">
+            <a:schemeClr val="accent1"/>
+          </a:effectRef>
+          <a:fontRef idx="minor">
+            <a:schemeClr val="lt1"/>
+          </a:fontRef>
+        </p:style>
+        <p:txBody>
+          <a:bodyPr rtlCol="0" anchor="ctr"/>
+          <a:lstStyle/>
+          <a:p>
+            <a:pPr algn="ctr"/>
+          </a:p>
+        </p:txBody>
+      </p:sp>
+      <p:sp>
+        <p:nvSpPr>
+          <p:cNvPr id="24" name="Rounded Rectangle 23"/>
+          <p:cNvSpPr/>
+          <p:nvPr/>
+        </p:nvSpPr>
+        <p:spPr>
+          <a:xfrm>
             <a:off x="566928" y="2066543"/>
-            <a:ext cx="11064240" cy="640080"/>
+            <a:ext cx="2194560" cy="438912"/>
+          </a:xfrm>
+          <a:prstGeom prst="roundRect">
+            <a:avLst>
+              <a:gd name="adj" fmla="val 10000"/>
+            </a:avLst>
+          </a:prstGeom>
+          <a:solidFill>
+            <a:srgbClr val="ECECEC"/>
+          </a:solidFill>
+          <a:ln w="12700">
+            <a:solidFill>
+              <a:srgbClr val="3A3A3A"/>
+            </a:solidFill>
+          </a:ln>
+          <a:effectLst/>
+        </p:spPr>
+        <p:style>
+          <a:lnRef idx="1">
+            <a:schemeClr val="accent1"/>
+          </a:lnRef>
+          <a:fillRef idx="3">
+            <a:schemeClr val="accent1"/>
+          </a:fillRef>
+          <a:effectRef idx="2">
+            <a:schemeClr val="accent1"/>
+          </a:effectRef>
+          <a:fontRef idx="minor">
+            <a:schemeClr val="lt1"/>
+          </a:fontRef>
+        </p:style>
+        <p:txBody>
+          <a:bodyPr rtlCol="0" anchor="ctr" wrap="square" lIns="54864" rIns="54864" tIns="27432" bIns="27432"/>
+          <a:lstStyle/>
+          <a:p>
+            <a:pPr algn="ctr"/>
+            <a:r>
+              <a:rPr sz="1100" b="1">
+                <a:solidFill>
+                  <a:srgbClr val="3A3A3A"/>
+                </a:solidFill>
+                <a:latin typeface="Segoe UI"/>
+              </a:rPr>
+              <a:t>Tool call</a:t>
+            </a:r>
+          </a:p>
+          <a:p>
+            <a:pPr algn="ctr"/>
+            <a:r>
+              <a:rPr sz="800" b="0">
+                <a:solidFill>
+                  <a:srgbClr val="1A1A1A"/>
+                </a:solidFill>
+                <a:latin typeface="Segoe UI"/>
+              </a:rPr>
+              <a:t>web · Jira · MCP</a:t>
+            </a:r>
+          </a:p>
+        </p:txBody>
+      </p:sp>
+      <p:cxnSp>
+        <p:nvCxnSpPr>
+          <p:cNvPr id="25" name="Connector 24"/>
+          <p:cNvCxnSpPr/>
+          <p:nvPr/>
+        </p:nvCxnSpPr>
+        <p:spPr>
+          <a:xfrm>
+            <a:off x="2761488" y="2285999"/>
+            <a:ext cx="530352" cy="292609"/>
+          </a:xfrm>
+          <a:prstGeom prst="line">
+            <a:avLst/>
+          </a:prstGeom>
+          <a:ln w="19050">
+            <a:solidFill>
+              <a:srgbClr val="C9C9C9"/>
+            </a:solidFill>
+            <a:tailEnd type="triangle" w="med" len="med"/>
+          </a:ln>
+        </p:spPr>
+        <p:style>
+          <a:lnRef idx="2">
+            <a:schemeClr val="accent1"/>
+          </a:lnRef>
+          <a:fillRef idx="0">
+            <a:schemeClr val="accent1"/>
+          </a:fillRef>
+          <a:effectRef idx="1">
+            <a:schemeClr val="accent1"/>
+          </a:effectRef>
+          <a:fontRef idx="minor">
+            <a:schemeClr val="tx1"/>
+          </a:fontRef>
+        </p:style>
+      </p:cxnSp>
+      <p:sp>
+        <p:nvSpPr>
+          <p:cNvPr id="26" name="Rounded Rectangle 25"/>
+          <p:cNvSpPr/>
+          <p:nvPr/>
+        </p:nvSpPr>
+        <p:spPr>
+          <a:xfrm>
+            <a:off x="566928" y="2578607"/>
+            <a:ext cx="2194560" cy="438912"/>
+          </a:xfrm>
+          <a:prstGeom prst="roundRect">
+            <a:avLst>
+              <a:gd name="adj" fmla="val 10000"/>
+            </a:avLst>
+          </a:prstGeom>
+          <a:solidFill>
+            <a:srgbClr val="ECECEC"/>
+          </a:solidFill>
+          <a:ln w="12700">
+            <a:solidFill>
+              <a:srgbClr val="3A3A3A"/>
+            </a:solidFill>
+          </a:ln>
+          <a:effectLst/>
+        </p:spPr>
+        <p:style>
+          <a:lnRef idx="1">
+            <a:schemeClr val="accent1"/>
+          </a:lnRef>
+          <a:fillRef idx="3">
+            <a:schemeClr val="accent1"/>
+          </a:fillRef>
+          <a:effectRef idx="2">
+            <a:schemeClr val="accent1"/>
+          </a:effectRef>
+          <a:fontRef idx="minor">
+            <a:schemeClr val="lt1"/>
+          </a:fontRef>
+        </p:style>
+        <p:txBody>
+          <a:bodyPr rtlCol="0" anchor="ctr" wrap="square" lIns="54864" rIns="54864" tIns="27432" bIns="27432"/>
+          <a:lstStyle/>
+          <a:p>
+            <a:pPr algn="ctr"/>
+            <a:r>
+              <a:rPr sz="1100" b="1">
+                <a:solidFill>
+                  <a:srgbClr val="3A3A3A"/>
+                </a:solidFill>
+                <a:latin typeface="Segoe UI"/>
+              </a:rPr>
+              <a:t>Shell command</a:t>
+            </a:r>
+          </a:p>
+          <a:p>
+            <a:pPr algn="ctr"/>
+            <a:r>
+              <a:rPr sz="800" b="0">
+                <a:solidFill>
+                  <a:srgbClr val="1A1A1A"/>
+                </a:solidFill>
+                <a:latin typeface="Segoe UI"/>
+              </a:rPr>
+              <a:t>curl · scp · ssh</a:t>
+            </a:r>
+          </a:p>
+        </p:txBody>
+      </p:sp>
+      <p:cxnSp>
+        <p:nvCxnSpPr>
+          <p:cNvPr id="27" name="Connector 26"/>
+          <p:cNvCxnSpPr/>
+          <p:nvPr/>
+        </p:nvCxnSpPr>
+        <p:spPr>
+          <a:xfrm flipV="1">
+            <a:off x="2761488" y="2578608"/>
+            <a:ext cx="530352" cy="219455"/>
+          </a:xfrm>
+          <a:prstGeom prst="line">
+            <a:avLst/>
+          </a:prstGeom>
+          <a:ln w="19050">
+            <a:solidFill>
+              <a:srgbClr val="C9C9C9"/>
+            </a:solidFill>
+            <a:tailEnd type="triangle" w="med" len="med"/>
+          </a:ln>
+        </p:spPr>
+        <p:style>
+          <a:lnRef idx="2">
+            <a:schemeClr val="accent1"/>
+          </a:lnRef>
+          <a:fillRef idx="0">
+            <a:schemeClr val="accent1"/>
+          </a:fillRef>
+          <a:effectRef idx="1">
+            <a:schemeClr val="accent1"/>
+          </a:effectRef>
+          <a:fontRef idx="minor">
+            <a:schemeClr val="tx1"/>
+          </a:fontRef>
+        </p:style>
+      </p:cxnSp>
+      <p:sp>
+        <p:nvSpPr>
+          <p:cNvPr id="28" name="Rounded Rectangle 27"/>
+          <p:cNvSpPr/>
+          <p:nvPr/>
+        </p:nvSpPr>
+        <p:spPr>
+          <a:xfrm>
+            <a:off x="566928" y="3090671"/>
+            <a:ext cx="2194560" cy="438912"/>
+          </a:xfrm>
+          <a:prstGeom prst="roundRect">
+            <a:avLst>
+              <a:gd name="adj" fmla="val 10000"/>
+            </a:avLst>
+          </a:prstGeom>
+          <a:solidFill>
+            <a:srgbClr val="ECECEC"/>
+          </a:solidFill>
+          <a:ln w="12700">
+            <a:solidFill>
+              <a:srgbClr val="3A3A3A"/>
+            </a:solidFill>
+          </a:ln>
+          <a:effectLst/>
+        </p:spPr>
+        <p:style>
+          <a:lnRef idx="1">
+            <a:schemeClr val="accent1"/>
+          </a:lnRef>
+          <a:fillRef idx="3">
+            <a:schemeClr val="accent1"/>
+          </a:fillRef>
+          <a:effectRef idx="2">
+            <a:schemeClr val="accent1"/>
+          </a:effectRef>
+          <a:fontRef idx="minor">
+            <a:schemeClr val="lt1"/>
+          </a:fontRef>
+        </p:style>
+        <p:txBody>
+          <a:bodyPr rtlCol="0" anchor="ctr" wrap="square" lIns="54864" rIns="54864" tIns="27432" bIns="27432"/>
+          <a:lstStyle/>
+          <a:p>
+            <a:pPr algn="ctr"/>
+            <a:r>
+              <a:rPr sz="1100" b="1">
+                <a:solidFill>
+                  <a:srgbClr val="3A3A3A"/>
+                </a:solidFill>
+                <a:latin typeface="Segoe UI"/>
+              </a:rPr>
+              <a:t>Notebook cell</a:t>
+            </a:r>
+          </a:p>
+          <a:p>
+            <a:pPr algn="ctr"/>
+            <a:r>
+              <a:rPr sz="800" b="0">
+                <a:solidFill>
+                  <a:srgbClr val="1A1A1A"/>
+                </a:solidFill>
+                <a:latin typeface="Segoe UI"/>
+              </a:rPr>
+              <a:t>kernel getaddrinfo</a:t>
+            </a:r>
+          </a:p>
+        </p:txBody>
+      </p:sp>
+      <p:cxnSp>
+        <p:nvCxnSpPr>
+          <p:cNvPr id="29" name="Connector 28"/>
+          <p:cNvCxnSpPr/>
+          <p:nvPr/>
+        </p:nvCxnSpPr>
+        <p:spPr>
+          <a:xfrm flipV="1">
+            <a:off x="2761488" y="2578608"/>
+            <a:ext cx="530352" cy="731519"/>
+          </a:xfrm>
+          <a:prstGeom prst="line">
+            <a:avLst/>
+          </a:prstGeom>
+          <a:ln w="19050">
+            <a:solidFill>
+              <a:srgbClr val="C9C9C9"/>
+            </a:solidFill>
+            <a:tailEnd type="triangle" w="med" len="med"/>
+          </a:ln>
+        </p:spPr>
+        <p:style>
+          <a:lnRef idx="2">
+            <a:schemeClr val="accent1"/>
+          </a:lnRef>
+          <a:fillRef idx="0">
+            <a:schemeClr val="accent1"/>
+          </a:fillRef>
+          <a:effectRef idx="1">
+            <a:schemeClr val="accent1"/>
+          </a:effectRef>
+          <a:fontRef idx="minor">
+            <a:schemeClr val="tx1"/>
+          </a:fontRef>
+        </p:style>
+      </p:cxnSp>
+      <p:sp>
+        <p:nvSpPr>
+          <p:cNvPr id="30" name="Rounded Rectangle 29"/>
+          <p:cNvSpPr/>
+          <p:nvPr/>
+        </p:nvSpPr>
+        <p:spPr>
+          <a:xfrm>
+            <a:off x="3291840" y="2066543"/>
+            <a:ext cx="2377440" cy="1463040"/>
           </a:xfrm>
           <a:prstGeom prst="roundRect">
             <a:avLst>
@@ -5719,42 +8433,383 @@
           <a:p>
             <a:pPr algn="ctr"/>
             <a:r>
-              <a:rPr sz="1250" b="1">
+              <a:rPr sz="1200" b="1">
                 <a:solidFill>
                   <a:srgbClr val="1F4E79"/>
                 </a:solidFill>
                 <a:latin typeface="Segoe UI"/>
               </a:rPr>
-              <a:t>One policy module — net/egress.py — under all three transports: the tool call · the shell command line · the notebook kernel's own getaddrinfo and connect</a:t>
+              <a:t>net/egress.py</a:t>
             </a:r>
           </a:p>
           <a:p>
             <a:pPr algn="ctr"/>
             <a:r>
-              <a:rPr sz="950" b="0">
+              <a:rPr sz="850" b="0">
                 <a:solidFill>
                   <a:srgbClr val="1A1A1A"/>
                 </a:solidFill>
                 <a:latin typeface="Segoe UI"/>
               </a:rPr>
-              <a:t>the bar was set by an incident: a fetch the tool refused was rerouted through a shell curl, then through a notebook cell, and it worked. A boundary you can walk around by changing transport is a suggestion — so a missing allow-list entry is now DENIED on every path and after every redirect, never escalated to a human.</a:t>
-            </a:r>
-          </a:p>
-        </p:txBody>
-      </p:sp>
-      <p:sp>
-        <p:nvSpPr>
-          <p:cNvPr id="22" name="Rounded Rectangle 21"/>
+              <a:t>one policy</a:t>
+            </a:r>
+          </a:p>
+          <a:p>
+            <a:pPr algn="ctr"/>
+            <a:r>
+              <a:rPr sz="850" b="0">
+                <a:solidFill>
+                  <a:srgbClr val="1A1A1A"/>
+                </a:solidFill>
+                <a:latin typeface="Segoe UI"/>
+              </a:rPr>
+              <a:t>every transport</a:t>
+            </a:r>
+          </a:p>
+          <a:p>
+            <a:pPr algn="ctr"/>
+            <a:r>
+              <a:rPr sz="850" b="0">
+                <a:solidFill>
+                  <a:srgbClr val="1A1A1A"/>
+                </a:solidFill>
+                <a:latin typeface="Segoe UI"/>
+              </a:rPr>
+              <a:t>after every redirect</a:t>
+            </a:r>
+          </a:p>
+          <a:p>
+            <a:pPr algn="ctr"/>
+          </a:p>
+          <a:p>
+            <a:pPr algn="ctr"/>
+            <a:r>
+              <a:rPr sz="850" b="0">
+                <a:solidFill>
+                  <a:srgbClr val="1A1A1A"/>
+                </a:solidFill>
+                <a:latin typeface="Segoe UI"/>
+              </a:rPr>
+              <a:t>unlisted = DENIED</a:t>
+            </a:r>
+          </a:p>
+        </p:txBody>
+      </p:sp>
+      <p:cxnSp>
+        <p:nvCxnSpPr>
+          <p:cNvPr id="31" name="Connector 30"/>
+          <p:cNvCxnSpPr/>
+          <p:nvPr/>
+        </p:nvCxnSpPr>
+        <p:spPr>
+          <a:xfrm>
+            <a:off x="5669280" y="2432304"/>
+            <a:ext cx="603504" cy="0"/>
+          </a:xfrm>
+          <a:prstGeom prst="line">
+            <a:avLst/>
+          </a:prstGeom>
+          <a:ln w="19050">
+            <a:solidFill>
+              <a:srgbClr val="1E6B52"/>
+            </a:solidFill>
+            <a:tailEnd type="triangle" w="med" len="med"/>
+          </a:ln>
+        </p:spPr>
+        <p:style>
+          <a:lnRef idx="2">
+            <a:schemeClr val="accent1"/>
+          </a:lnRef>
+          <a:fillRef idx="0">
+            <a:schemeClr val="accent1"/>
+          </a:fillRef>
+          <a:effectRef idx="1">
+            <a:schemeClr val="accent1"/>
+          </a:effectRef>
+          <a:fontRef idx="minor">
+            <a:schemeClr val="tx1"/>
+          </a:fontRef>
+        </p:style>
+      </p:cxnSp>
+      <p:cxnSp>
+        <p:nvCxnSpPr>
+          <p:cNvPr id="32" name="Connector 31"/>
+          <p:cNvCxnSpPr/>
+          <p:nvPr/>
+        </p:nvCxnSpPr>
+        <p:spPr>
+          <a:xfrm>
+            <a:off x="5669280" y="3127248"/>
+            <a:ext cx="603504" cy="0"/>
+          </a:xfrm>
+          <a:prstGeom prst="line">
+            <a:avLst/>
+          </a:prstGeom>
+          <a:ln w="19050">
+            <a:solidFill>
+              <a:srgbClr val="8C2F2F"/>
+            </a:solidFill>
+            <a:tailEnd type="triangle" w="med" len="med"/>
+          </a:ln>
+        </p:spPr>
+        <p:style>
+          <a:lnRef idx="2">
+            <a:schemeClr val="accent1"/>
+          </a:lnRef>
+          <a:fillRef idx="0">
+            <a:schemeClr val="accent1"/>
+          </a:fillRef>
+          <a:effectRef idx="1">
+            <a:schemeClr val="accent1"/>
+          </a:effectRef>
+          <a:fontRef idx="minor">
+            <a:schemeClr val="tx1"/>
+          </a:fontRef>
+        </p:style>
+      </p:cxnSp>
+      <p:sp>
+        <p:nvSpPr>
+          <p:cNvPr id="33" name="Rounded Rectangle 32"/>
           <p:cNvSpPr/>
           <p:nvPr/>
         </p:nvSpPr>
         <p:spPr>
           <a:xfrm>
-            <a:off x="566928" y="2779776"/>
-            <a:ext cx="2628900" cy="3534029"/>
+            <a:off x="6272784" y="2212848"/>
+            <a:ext cx="2487168" cy="457200"/>
           </a:xfrm>
           <a:prstGeom prst="roundRect">
-            <a:avLst/>
+            <a:avLst>
+              <a:gd name="adj" fmla="val 10000"/>
+            </a:avLst>
+          </a:prstGeom>
+          <a:solidFill>
+            <a:srgbClr val="DCEEE7"/>
+          </a:solidFill>
+          <a:ln w="12700">
+            <a:solidFill>
+              <a:srgbClr val="1E6B52"/>
+            </a:solidFill>
+          </a:ln>
+          <a:effectLst/>
+        </p:spPr>
+        <p:style>
+          <a:lnRef idx="1">
+            <a:schemeClr val="accent1"/>
+          </a:lnRef>
+          <a:fillRef idx="3">
+            <a:schemeClr val="accent1"/>
+          </a:fillRef>
+          <a:effectRef idx="2">
+            <a:schemeClr val="accent1"/>
+          </a:effectRef>
+          <a:fontRef idx="minor">
+            <a:schemeClr val="lt1"/>
+          </a:fontRef>
+        </p:style>
+        <p:txBody>
+          <a:bodyPr rtlCol="0" anchor="ctr" wrap="square" lIns="54864" rIns="54864" tIns="27432" bIns="27432"/>
+          <a:lstStyle/>
+          <a:p>
+            <a:pPr algn="ctr"/>
+            <a:r>
+              <a:rPr sz="1050" b="1">
+                <a:solidFill>
+                  <a:srgbClr val="1E6B52"/>
+                </a:solidFill>
+                <a:latin typeface="Segoe UI"/>
+              </a:rPr>
+              <a:t>ALLOWED</a:t>
+            </a:r>
+          </a:p>
+        </p:txBody>
+      </p:sp>
+      <p:sp>
+        <p:nvSpPr>
+          <p:cNvPr id="34" name="Rounded Rectangle 33"/>
+          <p:cNvSpPr/>
+          <p:nvPr/>
+        </p:nvSpPr>
+        <p:spPr>
+          <a:xfrm>
+            <a:off x="6272784" y="2724912"/>
+            <a:ext cx="2487168" cy="274320"/>
+          </a:xfrm>
+          <a:prstGeom prst="roundRect">
+            <a:avLst>
+              <a:gd name="adj" fmla="val 10000"/>
+            </a:avLst>
+          </a:prstGeom>
+          <a:solidFill>
+            <a:srgbClr val="FFFFFF"/>
+          </a:solidFill>
+          <a:ln w="12700">
+            <a:solidFill>
+              <a:srgbClr val="1E6B52"/>
+            </a:solidFill>
+          </a:ln>
+          <a:effectLst/>
+        </p:spPr>
+        <p:style>
+          <a:lnRef idx="1">
+            <a:schemeClr val="accent1"/>
+          </a:lnRef>
+          <a:fillRef idx="3">
+            <a:schemeClr val="accent1"/>
+          </a:fillRef>
+          <a:effectRef idx="2">
+            <a:schemeClr val="accent1"/>
+          </a:effectRef>
+          <a:fontRef idx="minor">
+            <a:schemeClr val="lt1"/>
+          </a:fontRef>
+        </p:style>
+        <p:txBody>
+          <a:bodyPr rtlCol="0" anchor="ctr" wrap="square" lIns="54864" rIns="54864" tIns="27432" bIns="27432"/>
+          <a:lstStyle/>
+          <a:p>
+            <a:pPr algn="ctr"/>
+            <a:r>
+              <a:rPr sz="900" b="0">
+                <a:solidFill>
+                  <a:srgbClr val="1E6B52"/>
+                </a:solidFill>
+                <a:latin typeface="Segoe UI"/>
+              </a:rPr>
+              <a:t>loopback · LAN · local registry</a:t>
+            </a:r>
+          </a:p>
+        </p:txBody>
+      </p:sp>
+      <p:sp>
+        <p:nvSpPr>
+          <p:cNvPr id="35" name="Rounded Rectangle 34"/>
+          <p:cNvSpPr/>
+          <p:nvPr/>
+        </p:nvSpPr>
+        <p:spPr>
+          <a:xfrm>
+            <a:off x="6272784" y="3072384"/>
+            <a:ext cx="2487168" cy="274320"/>
+          </a:xfrm>
+          <a:prstGeom prst="roundRect">
+            <a:avLst>
+              <a:gd name="adj" fmla="val 10000"/>
+            </a:avLst>
+          </a:prstGeom>
+          <a:solidFill>
+            <a:srgbClr val="FFFFFF"/>
+          </a:solidFill>
+          <a:ln w="12700">
+            <a:solidFill>
+              <a:srgbClr val="1E6B52"/>
+            </a:solidFill>
+          </a:ln>
+          <a:effectLst/>
+        </p:spPr>
+        <p:style>
+          <a:lnRef idx="1">
+            <a:schemeClr val="accent1"/>
+          </a:lnRef>
+          <a:fillRef idx="3">
+            <a:schemeClr val="accent1"/>
+          </a:fillRef>
+          <a:effectRef idx="2">
+            <a:schemeClr val="accent1"/>
+          </a:effectRef>
+          <a:fontRef idx="minor">
+            <a:schemeClr val="lt1"/>
+          </a:fontRef>
+        </p:style>
+        <p:txBody>
+          <a:bodyPr rtlCol="0" anchor="ctr" wrap="square" lIns="54864" rIns="54864" tIns="27432" bIns="27432"/>
+          <a:lstStyle/>
+          <a:p>
+            <a:pPr algn="ctr"/>
+            <a:r>
+              <a:rPr sz="900" b="0">
+                <a:solidFill>
+                  <a:srgbClr val="1E6B52"/>
+                </a:solidFill>
+                <a:latin typeface="Segoe UI"/>
+              </a:rPr>
+              <a:t>git push to a named remote</a:t>
+            </a:r>
+          </a:p>
+        </p:txBody>
+      </p:sp>
+      <p:sp>
+        <p:nvSpPr>
+          <p:cNvPr id="36" name="Rounded Rectangle 35"/>
+          <p:cNvSpPr/>
+          <p:nvPr/>
+        </p:nvSpPr>
+        <p:spPr>
+          <a:xfrm>
+            <a:off x="6272784" y="3419856"/>
+            <a:ext cx="2487168" cy="274320"/>
+          </a:xfrm>
+          <a:prstGeom prst="roundRect">
+            <a:avLst>
+              <a:gd name="adj" fmla="val 10000"/>
+            </a:avLst>
+          </a:prstGeom>
+          <a:solidFill>
+            <a:srgbClr val="FFFFFF"/>
+          </a:solidFill>
+          <a:ln w="12700">
+            <a:solidFill>
+              <a:srgbClr val="1E6B52"/>
+            </a:solidFill>
+          </a:ln>
+          <a:effectLst/>
+        </p:spPr>
+        <p:style>
+          <a:lnRef idx="1">
+            <a:schemeClr val="accent1"/>
+          </a:lnRef>
+          <a:fillRef idx="3">
+            <a:schemeClr val="accent1"/>
+          </a:fillRef>
+          <a:effectRef idx="2">
+            <a:schemeClr val="accent1"/>
+          </a:effectRef>
+          <a:fontRef idx="minor">
+            <a:schemeClr val="lt1"/>
+          </a:fontRef>
+        </p:style>
+        <p:txBody>
+          <a:bodyPr rtlCol="0" anchor="ctr" wrap="square" lIns="54864" rIns="54864" tIns="27432" bIns="27432"/>
+          <a:lstStyle/>
+          <a:p>
+            <a:pPr algn="ctr"/>
+            <a:r>
+              <a:rPr sz="900" b="0">
+                <a:solidFill>
+                  <a:srgbClr val="1E6B52"/>
+                </a:solidFill>
+                <a:latin typeface="Segoe UI"/>
+              </a:rPr>
+              <a:t>ssh to a declared deploy box</a:t>
+            </a:r>
+          </a:p>
+        </p:txBody>
+      </p:sp>
+      <p:sp>
+        <p:nvSpPr>
+          <p:cNvPr id="37" name="Rounded Rectangle 36"/>
+          <p:cNvSpPr/>
+          <p:nvPr/>
+        </p:nvSpPr>
+        <p:spPr>
+          <a:xfrm>
+            <a:off x="8961120" y="2212848"/>
+            <a:ext cx="2670048" cy="457200"/>
+          </a:xfrm>
+          <a:prstGeom prst="roundRect">
+            <a:avLst>
+              <a:gd name="adj" fmla="val 10000"/>
+            </a:avLst>
           </a:prstGeom>
           <a:solidFill>
             <a:srgbClr val="F7DFDF"/>
@@ -5781,221 +8836,208 @@
           </a:fontRef>
         </p:style>
         <p:txBody>
-          <a:bodyPr rtlCol="0" anchor="ctr"/>
+          <a:bodyPr rtlCol="0" anchor="ctr" wrap="square" lIns="54864" rIns="54864" tIns="27432" bIns="27432"/>
           <a:lstStyle/>
           <a:p>
             <a:pPr algn="ctr"/>
-          </a:p>
-        </p:txBody>
-      </p:sp>
-      <p:sp>
-        <p:nvSpPr>
-          <p:cNvPr id="23" name="TextBox 22"/>
-          <p:cNvSpPr txBox="1"/>
-          <p:nvPr/>
-        </p:nvSpPr>
-        <p:spPr>
-          <a:xfrm>
-            <a:off x="731520" y="2944368"/>
-            <a:ext cx="2299716" cy="189865"/>
-          </a:xfrm>
-          <a:prstGeom prst="rect">
-            <a:avLst/>
-          </a:prstGeom>
-          <a:noFill/>
-        </p:spPr>
-        <p:txBody>
-          <a:bodyPr wrap="square" anchor="t" lIns="0" rIns="0" tIns="0" bIns="0">
-            <a:spAutoFit/>
-          </a:bodyPr>
-          <a:lstStyle/>
-          <a:p>
-            <a:pPr algn="l">
-              <a:spcAft>
-                <a:spcPts val="0"/>
-              </a:spcAft>
-            </a:pPr>
-            <a:r>
-              <a:rPr sz="1150" b="1">
+            <a:r>
+              <a:rPr sz="1050" b="1">
                 <a:solidFill>
                   <a:srgbClr val="8C2F2F"/>
                 </a:solidFill>
                 <a:latin typeface="Segoe UI"/>
               </a:rPr>
-              <a:t>Nothing leaves, either way</a:t>
-            </a:r>
-          </a:p>
-        </p:txBody>
-      </p:sp>
-      <p:sp>
-        <p:nvSpPr>
-          <p:cNvPr id="24" name="TextBox 23"/>
-          <p:cNvSpPr txBox="1"/>
-          <p:nvPr/>
-        </p:nvSpPr>
-        <p:spPr>
-          <a:xfrm>
-            <a:off x="731520" y="3225673"/>
-            <a:ext cx="2299716" cy="548132"/>
-          </a:xfrm>
-          <a:prstGeom prst="rect">
-            <a:avLst/>
-          </a:prstGeom>
-          <a:noFill/>
-        </p:spPr>
-        <p:txBody>
-          <a:bodyPr wrap="square" anchor="t" lIns="0" rIns="0" tIns="0" bIns="0">
-            <a:spAutoFit/>
-          </a:bodyPr>
-          <a:lstStyle/>
-          <a:p>
-            <a:pPr algn="l">
-              <a:spcAft>
-                <a:spcPts val="0"/>
-              </a:spcAft>
-            </a:pPr>
-            <a:r>
-              <a:rPr sz="830" b="0">
-                <a:solidFill>
-                  <a:srgbClr val="1A1A1A"/>
-                </a:solidFill>
-                <a:latin typeface="Segoe UI"/>
-              </a:rPr>
-              <a:t>·  Out: scp · rsync · sftp · ssh host 'cmd' · curl -d/-F/-T · aws s3 cp · docker push · npm publish · git push to a URL · bash's own &gt; /dev/tcp/host/port.</a:t>
-            </a:r>
-          </a:p>
-        </p:txBody>
-      </p:sp>
-      <p:sp>
-        <p:nvSpPr>
-          <p:cNvPr id="25" name="TextBox 24"/>
-          <p:cNvSpPr txBox="1"/>
-          <p:nvPr/>
-        </p:nvSpPr>
-        <p:spPr>
-          <a:xfrm>
-            <a:off x="731520" y="3819525"/>
-            <a:ext cx="2299716" cy="548132"/>
-          </a:xfrm>
-          <a:prstGeom prst="rect">
-            <a:avLst/>
-          </a:prstGeom>
-          <a:noFill/>
-        </p:spPr>
-        <p:txBody>
-          <a:bodyPr wrap="square" anchor="t" lIns="0" rIns="0" tIns="0" bIns="0">
-            <a:spAutoFit/>
-          </a:bodyPr>
-          <a:lstStyle/>
-          <a:p>
-            <a:pPr algn="l">
-              <a:spcAft>
-                <a:spcPts val="0"/>
-              </a:spcAft>
-            </a:pPr>
-            <a:r>
-              <a:rPr sz="830" b="0">
-                <a:solidFill>
-                  <a:srgbClr val="1A1A1A"/>
-                </a:solidFill>
-                <a:latin typeface="Segoe UI"/>
-              </a:rPr>
-              <a:t>·  In: web fetch, crawl, headless browser, @mention expansion. Web SEARCH was deleted outright — the query string is our own data leaving the box.</a:t>
-            </a:r>
-          </a:p>
-        </p:txBody>
-      </p:sp>
-      <p:sp>
-        <p:nvSpPr>
-          <p:cNvPr id="26" name="TextBox 25"/>
-          <p:cNvSpPr txBox="1"/>
-          <p:nvPr/>
-        </p:nvSpPr>
-        <p:spPr>
-          <a:xfrm>
-            <a:off x="731520" y="4413377"/>
-            <a:ext cx="2299716" cy="548132"/>
-          </a:xfrm>
-          <a:prstGeom prst="rect">
-            <a:avLst/>
-          </a:prstGeom>
-          <a:noFill/>
-        </p:spPr>
-        <p:txBody>
-          <a:bodyPr wrap="square" anchor="t" lIns="0" rIns="0" tIns="0" bIns="0">
-            <a:spAutoFit/>
-          </a:bodyPr>
-          <a:lstStyle/>
-          <a:p>
-            <a:pPr algn="l">
-              <a:spcAft>
-                <a:spcPts val="0"/>
-              </a:spcAft>
-            </a:pPr>
-            <a:r>
-              <a:rPr sz="830" b="0">
-                <a:solidFill>
-                  <a:srgbClr val="1A1A1A"/>
-                </a:solidFill>
-                <a:latin typeface="Segoe UI"/>
-              </a:rPr>
-              <a:t>·  AIFORGE_EGRESS_OFF closes everything in one switch; per-class switches cover integrations, email, telemetry, MCP and fleet sync.</a:t>
-            </a:r>
-          </a:p>
-        </p:txBody>
-      </p:sp>
-      <p:sp>
-        <p:nvSpPr>
-          <p:cNvPr id="27" name="TextBox 26"/>
-          <p:cNvSpPr txBox="1"/>
-          <p:nvPr/>
-        </p:nvSpPr>
-        <p:spPr>
-          <a:xfrm>
-            <a:off x="731520" y="5007229"/>
-            <a:ext cx="2299716" cy="548132"/>
-          </a:xfrm>
-          <a:prstGeom prst="rect">
-            <a:avLst/>
-          </a:prstGeom>
-          <a:noFill/>
-        </p:spPr>
-        <p:txBody>
-          <a:bodyPr wrap="square" anchor="t" lIns="0" rIns="0" tIns="0" bIns="0">
-            <a:spAutoFit/>
-          </a:bodyPr>
-          <a:lstStyle/>
-          <a:p>
-            <a:pPr algn="l">
-              <a:spcAft>
-                <a:spcPts val="0"/>
-              </a:spcAft>
-            </a:pPr>
-            <a:r>
-              <a:rPr sz="830" b="0">
-                <a:solidFill>
-                  <a:srgbClr val="1A1A1A"/>
-                </a:solidFill>
-                <a:latin typeface="Segoe UI"/>
-              </a:rPr>
-              <a:t>·  Deliberately still allowed: loopback and LAN, a local registry, git push to a named remote — a control that blocks ordinary work gets switched off.</a:t>
-            </a:r>
-          </a:p>
-        </p:txBody>
-      </p:sp>
-      <p:sp>
-        <p:nvSpPr>
-          <p:cNvPr id="28" name="Rounded Rectangle 27"/>
+              <a:t>DENIED</a:t>
+            </a:r>
+          </a:p>
+        </p:txBody>
+      </p:sp>
+      <p:sp>
+        <p:nvSpPr>
+          <p:cNvPr id="38" name="Rounded Rectangle 37"/>
           <p:cNvSpPr/>
           <p:nvPr/>
         </p:nvSpPr>
         <p:spPr>
           <a:xfrm>
-            <a:off x="3378708" y="2779776"/>
-            <a:ext cx="2628900" cy="3534029"/>
+            <a:off x="8961120" y="2724912"/>
+            <a:ext cx="2670048" cy="274320"/>
           </a:xfrm>
           <a:prstGeom prst="roundRect">
-            <a:avLst/>
+            <a:avLst>
+              <a:gd name="adj" fmla="val 10000"/>
+            </a:avLst>
+          </a:prstGeom>
+          <a:solidFill>
+            <a:srgbClr val="FFFFFF"/>
+          </a:solidFill>
+          <a:ln w="12700">
+            <a:solidFill>
+              <a:srgbClr val="8C2F2F"/>
+            </a:solidFill>
+          </a:ln>
+          <a:effectLst/>
+        </p:spPr>
+        <p:style>
+          <a:lnRef idx="1">
+            <a:schemeClr val="accent1"/>
+          </a:lnRef>
+          <a:fillRef idx="3">
+            <a:schemeClr val="accent1"/>
+          </a:fillRef>
+          <a:effectRef idx="2">
+            <a:schemeClr val="accent1"/>
+          </a:effectRef>
+          <a:fontRef idx="minor">
+            <a:schemeClr val="lt1"/>
+          </a:fontRef>
+        </p:style>
+        <p:txBody>
+          <a:bodyPr rtlCol="0" anchor="ctr" wrap="square" lIns="54864" rIns="54864" tIns="27432" bIns="27432"/>
+          <a:lstStyle/>
+          <a:p>
+            <a:pPr algn="ctr"/>
+            <a:r>
+              <a:rPr sz="900" b="0">
+                <a:solidFill>
+                  <a:srgbClr val="8C2F2F"/>
+                </a:solidFill>
+                <a:latin typeface="Segoe UI"/>
+              </a:rPr>
+              <a:t>scp · rsync · curl -d/-T · /dev/tcp</a:t>
+            </a:r>
+          </a:p>
+        </p:txBody>
+      </p:sp>
+      <p:sp>
+        <p:nvSpPr>
+          <p:cNvPr id="39" name="Rounded Rectangle 38"/>
+          <p:cNvSpPr/>
+          <p:nvPr/>
+        </p:nvSpPr>
+        <p:spPr>
+          <a:xfrm>
+            <a:off x="8961120" y="3072384"/>
+            <a:ext cx="2670048" cy="274320"/>
+          </a:xfrm>
+          <a:prstGeom prst="roundRect">
+            <a:avLst>
+              <a:gd name="adj" fmla="val 10000"/>
+            </a:avLst>
+          </a:prstGeom>
+          <a:solidFill>
+            <a:srgbClr val="FFFFFF"/>
+          </a:solidFill>
+          <a:ln w="12700">
+            <a:solidFill>
+              <a:srgbClr val="8C2F2F"/>
+            </a:solidFill>
+          </a:ln>
+          <a:effectLst/>
+        </p:spPr>
+        <p:style>
+          <a:lnRef idx="1">
+            <a:schemeClr val="accent1"/>
+          </a:lnRef>
+          <a:fillRef idx="3">
+            <a:schemeClr val="accent1"/>
+          </a:fillRef>
+          <a:effectRef idx="2">
+            <a:schemeClr val="accent1"/>
+          </a:effectRef>
+          <a:fontRef idx="minor">
+            <a:schemeClr val="lt1"/>
+          </a:fontRef>
+        </p:style>
+        <p:txBody>
+          <a:bodyPr rtlCol="0" anchor="ctr" wrap="square" lIns="54864" rIns="54864" tIns="27432" bIns="27432"/>
+          <a:lstStyle/>
+          <a:p>
+            <a:pPr algn="ctr"/>
+            <a:r>
+              <a:rPr sz="900" b="0">
+                <a:solidFill>
+                  <a:srgbClr val="8C2F2F"/>
+                </a:solidFill>
+                <a:latin typeface="Segoe UI"/>
+              </a:rPr>
+              <a:t>aws s3 cp · docker push · npm publish</a:t>
+            </a:r>
+          </a:p>
+        </p:txBody>
+      </p:sp>
+      <p:sp>
+        <p:nvSpPr>
+          <p:cNvPr id="40" name="Rounded Rectangle 39"/>
+          <p:cNvSpPr/>
+          <p:nvPr/>
+        </p:nvSpPr>
+        <p:spPr>
+          <a:xfrm>
+            <a:off x="8961120" y="3419856"/>
+            <a:ext cx="2670048" cy="274320"/>
+          </a:xfrm>
+          <a:prstGeom prst="roundRect">
+            <a:avLst>
+              <a:gd name="adj" fmla="val 10000"/>
+            </a:avLst>
+          </a:prstGeom>
+          <a:solidFill>
+            <a:srgbClr val="FFFFFF"/>
+          </a:solidFill>
+          <a:ln w="12700">
+            <a:solidFill>
+              <a:srgbClr val="8C2F2F"/>
+            </a:solidFill>
+          </a:ln>
+          <a:effectLst/>
+        </p:spPr>
+        <p:style>
+          <a:lnRef idx="1">
+            <a:schemeClr val="accent1"/>
+          </a:lnRef>
+          <a:fillRef idx="3">
+            <a:schemeClr val="accent1"/>
+          </a:fillRef>
+          <a:effectRef idx="2">
+            <a:schemeClr val="accent1"/>
+          </a:effectRef>
+          <a:fontRef idx="minor">
+            <a:schemeClr val="lt1"/>
+          </a:fontRef>
+        </p:style>
+        <p:txBody>
+          <a:bodyPr rtlCol="0" anchor="ctr" wrap="square" lIns="54864" rIns="54864" tIns="27432" bIns="27432"/>
+          <a:lstStyle/>
+          <a:p>
+            <a:pPr algn="ctr"/>
+            <a:r>
+              <a:rPr sz="900" b="0">
+                <a:solidFill>
+                  <a:srgbClr val="8C2F2F"/>
+                </a:solidFill>
+                <a:latin typeface="Segoe UI"/>
+              </a:rPr>
+              <a:t>web search — deleted outright</a:t>
+            </a:r>
+          </a:p>
+        </p:txBody>
+      </p:sp>
+      <p:sp>
+        <p:nvSpPr>
+          <p:cNvPr id="41" name="Rounded Rectangle 40"/>
+          <p:cNvSpPr/>
+          <p:nvPr/>
+        </p:nvSpPr>
+        <p:spPr>
+          <a:xfrm>
+            <a:off x="566928" y="3968496"/>
+            <a:ext cx="3621024" cy="1060704"/>
+          </a:xfrm>
+          <a:prstGeom prst="roundRect">
+            <a:avLst>
+              <a:gd name="adj" fmla="val 10000"/>
+            </a:avLst>
           </a:prstGeom>
           <a:solidFill>
             <a:srgbClr val="F7ECD5"/>
@@ -6022,40 +9064,10 @@
           </a:fontRef>
         </p:style>
         <p:txBody>
-          <a:bodyPr rtlCol="0" anchor="ctr"/>
+          <a:bodyPr rtlCol="0" anchor="ctr" wrap="square" lIns="54864" rIns="54864" tIns="27432" bIns="27432"/>
           <a:lstStyle/>
           <a:p>
             <a:pPr algn="ctr"/>
-          </a:p>
-        </p:txBody>
-      </p:sp>
-      <p:sp>
-        <p:nvSpPr>
-          <p:cNvPr id="29" name="TextBox 28"/>
-          <p:cNvSpPr txBox="1"/>
-          <p:nvPr/>
-        </p:nvSpPr>
-        <p:spPr>
-          <a:xfrm>
-            <a:off x="3543300" y="2944368"/>
-            <a:ext cx="2299716" cy="189865"/>
-          </a:xfrm>
-          <a:prstGeom prst="rect">
-            <a:avLst/>
-          </a:prstGeom>
-          <a:noFill/>
-        </p:spPr>
-        <p:txBody>
-          <a:bodyPr wrap="square" anchor="t" lIns="0" rIns="0" tIns="0" bIns="0">
-            <a:spAutoFit/>
-          </a:bodyPr>
-          <a:lstStyle/>
-          <a:p>
-            <a:pPr algn="l">
-              <a:spcAft>
-                <a:spcPts val="0"/>
-              </a:spcAft>
-            </a:pPr>
             <a:r>
               <a:rPr sz="1150" b="1">
                 <a:solidFill>
@@ -6063,180 +9075,311 @@
                 </a:solidFill>
                 <a:latin typeface="Segoe UI"/>
               </a:rPr>
-              <a:t>Access, and untrusted input</a:t>
-            </a:r>
-          </a:p>
-        </p:txBody>
-      </p:sp>
-      <p:sp>
-        <p:nvSpPr>
-          <p:cNvPr id="30" name="TextBox 29"/>
-          <p:cNvSpPr txBox="1"/>
-          <p:nvPr/>
-        </p:nvSpPr>
-        <p:spPr>
-          <a:xfrm>
-            <a:off x="3543300" y="3225673"/>
-            <a:ext cx="2299716" cy="822198"/>
-          </a:xfrm>
-          <a:prstGeom prst="rect">
-            <a:avLst/>
-          </a:prstGeom>
-          <a:noFill/>
-        </p:spPr>
-        <p:txBody>
-          <a:bodyPr wrap="square" anchor="t" lIns="0" rIns="0" tIns="0" bIns="0">
-            <a:spAutoFit/>
-          </a:bodyPr>
-          <a:lstStyle/>
-          <a:p>
-            <a:pPr algn="l">
-              <a:spcAft>
-                <a:spcPts val="0"/>
-              </a:spcAft>
-            </a:pPr>
-            <a:r>
-              <a:rPr sz="830" b="0">
-                <a:solidFill>
-                  <a:srgbClr val="1A1A1A"/>
-                </a:solidFill>
-                <a:latin typeface="Segoe UI"/>
-              </a:rPr>
-              <a:t>·  A token is required on every API route but health, and a non-loopback bind with NO token refuses to boot. Loopback trust must be declared: behind a same-host reverse proxy every request looks like 127.0.0.1, which was a full auth bypass.</a:t>
-            </a:r>
-          </a:p>
-        </p:txBody>
-      </p:sp>
-      <p:sp>
-        <p:nvSpPr>
-          <p:cNvPr id="31" name="TextBox 30"/>
-          <p:cNvSpPr txBox="1"/>
-          <p:nvPr/>
-        </p:nvSpPr>
-        <p:spPr>
-          <a:xfrm>
-            <a:off x="3543300" y="4093591"/>
-            <a:ext cx="2299716" cy="548132"/>
-          </a:xfrm>
-          <a:prstGeom prst="rect">
-            <a:avLst/>
-          </a:prstGeom>
-          <a:noFill/>
-        </p:spPr>
-        <p:txBody>
-          <a:bodyPr wrap="square" anchor="t" lIns="0" rIns="0" tIns="0" bIns="0">
-            <a:spAutoFit/>
-          </a:bodyPr>
-          <a:lstStyle/>
-          <a:p>
-            <a:pPr algn="l">
-              <a:spcAft>
-                <a:spcPts val="0"/>
-              </a:spcAft>
-            </a:pPr>
-            <a:r>
-              <a:rPr sz="830" b="0">
-                <a:solidFill>
-                  <a:srgbClr val="1A1A1A"/>
-                </a:solidFill>
-                <a:latin typeface="Segoe UI"/>
-              </a:rPr>
-              <a:t>·  CORS is an allow-list, never a wildcard. Limits: one shared token — no per-user identity or SSO yet — and fleet sync is open unless closed.</a:t>
-            </a:r>
-          </a:p>
-        </p:txBody>
-      </p:sp>
-      <p:sp>
-        <p:nvSpPr>
-          <p:cNvPr id="32" name="TextBox 31"/>
-          <p:cNvSpPr txBox="1"/>
-          <p:nvPr/>
-        </p:nvSpPr>
-        <p:spPr>
-          <a:xfrm>
-            <a:off x="3543300" y="4687443"/>
-            <a:ext cx="2299716" cy="548132"/>
-          </a:xfrm>
-          <a:prstGeom prst="rect">
-            <a:avLst/>
-          </a:prstGeom>
-          <a:noFill/>
-        </p:spPr>
-        <p:txBody>
-          <a:bodyPr wrap="square" anchor="t" lIns="0" rIns="0" tIns="0" bIns="0">
-            <a:spAutoFit/>
-          </a:bodyPr>
-          <a:lstStyle/>
-          <a:p>
-            <a:pPr algn="l">
-              <a:spcAft>
-                <a:spcPts val="0"/>
-              </a:spcAft>
-            </a:pPr>
-            <a:r>
-              <a:rPr sz="830" b="0">
-                <a:solidFill>
-                  <a:srgbClr val="1A1A1A"/>
-                </a:solidFill>
-                <a:latin typeface="Segoe UI"/>
-              </a:rPr>
-              <a:t>·  A ticket description or a fetched page is UNTRUSTED TEXT reaching the model beside your instruction, and we do not classify it.</a:t>
-            </a:r>
-          </a:p>
-        </p:txBody>
-      </p:sp>
-      <p:sp>
-        <p:nvSpPr>
-          <p:cNvPr id="33" name="TextBox 32"/>
-          <p:cNvSpPr txBox="1"/>
-          <p:nvPr/>
-        </p:nvSpPr>
-        <p:spPr>
-          <a:xfrm>
-            <a:off x="3543300" y="5281295"/>
-            <a:ext cx="2299716" cy="822198"/>
-          </a:xfrm>
-          <a:prstGeom prst="rect">
-            <a:avLst/>
-          </a:prstGeom>
-          <a:noFill/>
-        </p:spPr>
-        <p:txBody>
-          <a:bodyPr wrap="square" anchor="t" lIns="0" rIns="0" tIns="0" bIns="0">
-            <a:spAutoFit/>
-          </a:bodyPr>
-          <a:lstStyle/>
-          <a:p>
-            <a:pPr algn="l">
-              <a:spcAft>
-                <a:spcPts val="0"/>
-              </a:spcAft>
-            </a:pPr>
-            <a:r>
-              <a:rPr sz="830" b="0">
-                <a:solidFill>
-                  <a:srgbClr val="1A1A1A"/>
-                </a:solidFill>
-                <a:latin typeface="Segoe UI"/>
-              </a:rPr>
-              <a:t>·  So: containment, not detection. The egress refusal is code, the 20 external-write tools ask a human, file tools are clamped to the workspace, Plan mode cannot write, and unattended runs refuse writes.</a:t>
-            </a:r>
-          </a:p>
-        </p:txBody>
-      </p:sp>
-      <p:sp>
-        <p:nvSpPr>
-          <p:cNvPr id="34" name="Rounded Rectangle 33"/>
+              <a:t>Who gets in</a:t>
+            </a:r>
+          </a:p>
+        </p:txBody>
+      </p:sp>
+      <p:sp>
+        <p:nvSpPr>
+          <p:cNvPr id="42" name="Rounded Rectangle 41"/>
           <p:cNvSpPr/>
           <p:nvPr/>
         </p:nvSpPr>
         <p:spPr>
           <a:xfrm>
-            <a:off x="6190488" y="2779776"/>
-            <a:ext cx="2628900" cy="3534029"/>
+            <a:off x="713232" y="4315968"/>
+            <a:ext cx="3328416" cy="274320"/>
           </a:xfrm>
           <a:prstGeom prst="roundRect">
-            <a:avLst/>
+            <a:avLst>
+              <a:gd name="adj" fmla="val 10000"/>
+            </a:avLst>
+          </a:prstGeom>
+          <a:solidFill>
+            <a:srgbClr val="FFFFFF"/>
+          </a:solidFill>
+          <a:ln w="12700">
+            <a:solidFill>
+              <a:srgbClr val="8A5A00"/>
+            </a:solidFill>
+          </a:ln>
+          <a:effectLst/>
+        </p:spPr>
+        <p:style>
+          <a:lnRef idx="1">
+            <a:schemeClr val="accent1"/>
+          </a:lnRef>
+          <a:fillRef idx="3">
+            <a:schemeClr val="accent1"/>
+          </a:fillRef>
+          <a:effectRef idx="2">
+            <a:schemeClr val="accent1"/>
+          </a:effectRef>
+          <a:fontRef idx="minor">
+            <a:schemeClr val="lt1"/>
+          </a:fontRef>
+        </p:style>
+        <p:txBody>
+          <a:bodyPr rtlCol="0" anchor="ctr" wrap="square" lIns="54864" rIns="54864" tIns="27432" bIns="27432"/>
+          <a:lstStyle/>
+          <a:p>
+            <a:pPr algn="ctr"/>
+            <a:r>
+              <a:rPr sz="900" b="0">
+                <a:solidFill>
+                  <a:srgbClr val="8A5A00"/>
+                </a:solidFill>
+                <a:latin typeface="Segoe UI"/>
+              </a:rPr>
+              <a:t>token on every /api/*  ·  CORS allow-list</a:t>
+            </a:r>
+          </a:p>
+        </p:txBody>
+      </p:sp>
+      <p:sp>
+        <p:nvSpPr>
+          <p:cNvPr id="43" name="Rounded Rectangle 42"/>
+          <p:cNvSpPr/>
+          <p:nvPr/>
+        </p:nvSpPr>
+        <p:spPr>
+          <a:xfrm>
+            <a:off x="713232" y="4663440"/>
+            <a:ext cx="3328416" cy="274320"/>
+          </a:xfrm>
+          <a:prstGeom prst="roundRect">
+            <a:avLst>
+              <a:gd name="adj" fmla="val 10000"/>
+            </a:avLst>
+          </a:prstGeom>
+          <a:solidFill>
+            <a:srgbClr val="FFFFFF"/>
+          </a:solidFill>
+          <a:ln w="12700">
+            <a:solidFill>
+              <a:srgbClr val="8A5A00"/>
+            </a:solidFill>
+          </a:ln>
+          <a:effectLst/>
+        </p:spPr>
+        <p:style>
+          <a:lnRef idx="1">
+            <a:schemeClr val="accent1"/>
+          </a:lnRef>
+          <a:fillRef idx="3">
+            <a:schemeClr val="accent1"/>
+          </a:fillRef>
+          <a:effectRef idx="2">
+            <a:schemeClr val="accent1"/>
+          </a:effectRef>
+          <a:fontRef idx="minor">
+            <a:schemeClr val="lt1"/>
+          </a:fontRef>
+        </p:style>
+        <p:txBody>
+          <a:bodyPr rtlCol="0" anchor="ctr" wrap="square" lIns="54864" rIns="54864" tIns="27432" bIns="27432"/>
+          <a:lstStyle/>
+          <a:p>
+            <a:pPr algn="ctr"/>
+            <a:r>
+              <a:rPr sz="900" b="0">
+                <a:solidFill>
+                  <a:srgbClr val="8A5A00"/>
+                </a:solidFill>
+                <a:latin typeface="Segoe UI"/>
+              </a:rPr>
+              <a:t>public bind + no token → refuses to boot</a:t>
+            </a:r>
+          </a:p>
+        </p:txBody>
+      </p:sp>
+      <p:sp>
+        <p:nvSpPr>
+          <p:cNvPr id="44" name="Rounded Rectangle 43"/>
+          <p:cNvSpPr/>
+          <p:nvPr/>
+        </p:nvSpPr>
+        <p:spPr>
+          <a:xfrm>
+            <a:off x="4370832" y="3968496"/>
+            <a:ext cx="3621024" cy="1060704"/>
+          </a:xfrm>
+          <a:prstGeom prst="roundRect">
+            <a:avLst>
+              <a:gd name="adj" fmla="val 10000"/>
+            </a:avLst>
+          </a:prstGeom>
+          <a:solidFill>
+            <a:srgbClr val="F7DFDF"/>
+          </a:solidFill>
+          <a:ln w="12700">
+            <a:solidFill>
+              <a:srgbClr val="8C2F2F"/>
+            </a:solidFill>
+          </a:ln>
+          <a:effectLst/>
+        </p:spPr>
+        <p:style>
+          <a:lnRef idx="1">
+            <a:schemeClr val="accent1"/>
+          </a:lnRef>
+          <a:fillRef idx="3">
+            <a:schemeClr val="accent1"/>
+          </a:fillRef>
+          <a:effectRef idx="2">
+            <a:schemeClr val="accent1"/>
+          </a:effectRef>
+          <a:fontRef idx="minor">
+            <a:schemeClr val="lt1"/>
+          </a:fontRef>
+        </p:style>
+        <p:txBody>
+          <a:bodyPr rtlCol="0" anchor="ctr" wrap="square" lIns="54864" rIns="54864" tIns="27432" bIns="27432"/>
+          <a:lstStyle/>
+          <a:p>
+            <a:pPr algn="ctr"/>
+            <a:r>
+              <a:rPr sz="1150" b="1">
+                <a:solidFill>
+                  <a:srgbClr val="8C2F2F"/>
+                </a:solidFill>
+                <a:latin typeface="Segoe UI"/>
+              </a:rPr>
+              <a:t>What drives it</a:t>
+            </a:r>
+          </a:p>
+        </p:txBody>
+      </p:sp>
+      <p:sp>
+        <p:nvSpPr>
+          <p:cNvPr id="45" name="Rounded Rectangle 44"/>
+          <p:cNvSpPr/>
+          <p:nvPr/>
+        </p:nvSpPr>
+        <p:spPr>
+          <a:xfrm>
+            <a:off x="4517136" y="4315968"/>
+            <a:ext cx="3328416" cy="274320"/>
+          </a:xfrm>
+          <a:prstGeom prst="roundRect">
+            <a:avLst>
+              <a:gd name="adj" fmla="val 10000"/>
+            </a:avLst>
+          </a:prstGeom>
+          <a:solidFill>
+            <a:srgbClr val="FFFFFF"/>
+          </a:solidFill>
+          <a:ln w="12700">
+            <a:solidFill>
+              <a:srgbClr val="8C2F2F"/>
+            </a:solidFill>
+          </a:ln>
+          <a:effectLst/>
+        </p:spPr>
+        <p:style>
+          <a:lnRef idx="1">
+            <a:schemeClr val="accent1"/>
+          </a:lnRef>
+          <a:fillRef idx="3">
+            <a:schemeClr val="accent1"/>
+          </a:fillRef>
+          <a:effectRef idx="2">
+            <a:schemeClr val="accent1"/>
+          </a:effectRef>
+          <a:fontRef idx="minor">
+            <a:schemeClr val="lt1"/>
+          </a:fontRef>
+        </p:style>
+        <p:txBody>
+          <a:bodyPr rtlCol="0" anchor="ctr" wrap="square" lIns="54864" rIns="54864" tIns="27432" bIns="27432"/>
+          <a:lstStyle/>
+          <a:p>
+            <a:pPr algn="ctr"/>
+            <a:r>
+              <a:rPr sz="900" b="0">
+                <a:solidFill>
+                  <a:srgbClr val="8C2F2F"/>
+                </a:solidFill>
+                <a:latin typeface="Segoe UI"/>
+              </a:rPr>
+              <a:t>a ticket or a page is UNTRUSTED text</a:t>
+            </a:r>
+          </a:p>
+        </p:txBody>
+      </p:sp>
+      <p:sp>
+        <p:nvSpPr>
+          <p:cNvPr id="46" name="Rounded Rectangle 45"/>
+          <p:cNvSpPr/>
+          <p:nvPr/>
+        </p:nvSpPr>
+        <p:spPr>
+          <a:xfrm>
+            <a:off x="4517136" y="4663440"/>
+            <a:ext cx="3328416" cy="274320"/>
+          </a:xfrm>
+          <a:prstGeom prst="roundRect">
+            <a:avLst>
+              <a:gd name="adj" fmla="val 10000"/>
+            </a:avLst>
+          </a:prstGeom>
+          <a:solidFill>
+            <a:srgbClr val="FFFFFF"/>
+          </a:solidFill>
+          <a:ln w="12700">
+            <a:solidFill>
+              <a:srgbClr val="8C2F2F"/>
+            </a:solidFill>
+          </a:ln>
+          <a:effectLst/>
+        </p:spPr>
+        <p:style>
+          <a:lnRef idx="1">
+            <a:schemeClr val="accent1"/>
+          </a:lnRef>
+          <a:fillRef idx="3">
+            <a:schemeClr val="accent1"/>
+          </a:fillRef>
+          <a:effectRef idx="2">
+            <a:schemeClr val="accent1"/>
+          </a:effectRef>
+          <a:fontRef idx="minor">
+            <a:schemeClr val="lt1"/>
+          </a:fontRef>
+        </p:style>
+        <p:txBody>
+          <a:bodyPr rtlCol="0" anchor="ctr" wrap="square" lIns="54864" rIns="54864" tIns="27432" bIns="27432"/>
+          <a:lstStyle/>
+          <a:p>
+            <a:pPr algn="ctr"/>
+            <a:r>
+              <a:rPr sz="900" b="0">
+                <a:solidFill>
+                  <a:srgbClr val="8C2F2F"/>
+                </a:solidFill>
+                <a:latin typeface="Segoe UI"/>
+              </a:rPr>
+              <a:t>so: containment, not detection</a:t>
+            </a:r>
+          </a:p>
+        </p:txBody>
+      </p:sp>
+      <p:sp>
+        <p:nvSpPr>
+          <p:cNvPr id="47" name="Rounded Rectangle 46"/>
+          <p:cNvSpPr/>
+          <p:nvPr/>
+        </p:nvSpPr>
+        <p:spPr>
+          <a:xfrm>
+            <a:off x="8010144" y="3968496"/>
+            <a:ext cx="3621024" cy="1060704"/>
+          </a:xfrm>
+          <a:prstGeom prst="roundRect">
+            <a:avLst>
+              <a:gd name="adj" fmla="val 10000"/>
+            </a:avLst>
           </a:prstGeom>
           <a:solidFill>
             <a:srgbClr val="DCEEE7"/>
@@ -6263,23 +9406,146 @@
           </a:fontRef>
         </p:style>
         <p:txBody>
-          <a:bodyPr rtlCol="0" anchor="ctr"/>
+          <a:bodyPr rtlCol="0" anchor="ctr" wrap="square" lIns="54864" rIns="54864" tIns="27432" bIns="27432"/>
           <a:lstStyle/>
           <a:p>
             <a:pPr algn="ctr"/>
-          </a:p>
-        </p:txBody>
-      </p:sp>
-      <p:sp>
-        <p:nvSpPr>
-          <p:cNvPr id="35" name="TextBox 34"/>
+            <a:r>
+              <a:rPr sz="1150" b="1">
+                <a:solidFill>
+                  <a:srgbClr val="1E6B52"/>
+                </a:solidFill>
+                <a:latin typeface="Segoe UI"/>
+              </a:rPr>
+              <a:t>What a run costs</a:t>
+            </a:r>
+          </a:p>
+        </p:txBody>
+      </p:sp>
+      <p:sp>
+        <p:nvSpPr>
+          <p:cNvPr id="48" name="Rounded Rectangle 47"/>
+          <p:cNvSpPr/>
+          <p:nvPr/>
+        </p:nvSpPr>
+        <p:spPr>
+          <a:xfrm>
+            <a:off x="8156448" y="4315968"/>
+            <a:ext cx="3328416" cy="274320"/>
+          </a:xfrm>
+          <a:prstGeom prst="roundRect">
+            <a:avLst>
+              <a:gd name="adj" fmla="val 10000"/>
+            </a:avLst>
+          </a:prstGeom>
+          <a:solidFill>
+            <a:srgbClr val="FFFFFF"/>
+          </a:solidFill>
+          <a:ln w="12700">
+            <a:solidFill>
+              <a:srgbClr val="1E6B52"/>
+            </a:solidFill>
+          </a:ln>
+          <a:effectLst/>
+        </p:spPr>
+        <p:style>
+          <a:lnRef idx="1">
+            <a:schemeClr val="accent1"/>
+          </a:lnRef>
+          <a:fillRef idx="3">
+            <a:schemeClr val="accent1"/>
+          </a:fillRef>
+          <a:effectRef idx="2">
+            <a:schemeClr val="accent1"/>
+          </a:effectRef>
+          <a:fontRef idx="minor">
+            <a:schemeClr val="lt1"/>
+          </a:fontRef>
+        </p:style>
+        <p:txBody>
+          <a:bodyPr rtlCol="0" anchor="ctr" wrap="square" lIns="54864" rIns="54864" tIns="27432" bIns="27432"/>
+          <a:lstStyle/>
+          <a:p>
+            <a:pPr algn="ctr"/>
+            <a:r>
+              <a:rPr sz="900" b="0">
+                <a:solidFill>
+                  <a:srgbClr val="1E6B52"/>
+                </a:solidFill>
+                <a:latin typeface="Segoe UI"/>
+              </a:rPr>
+              <a:t>rate ceiling per role  ·  request meter</a:t>
+            </a:r>
+          </a:p>
+        </p:txBody>
+      </p:sp>
+      <p:sp>
+        <p:nvSpPr>
+          <p:cNvPr id="49" name="Rounded Rectangle 48"/>
+          <p:cNvSpPr/>
+          <p:nvPr/>
+        </p:nvSpPr>
+        <p:spPr>
+          <a:xfrm>
+            <a:off x="8156448" y="4663440"/>
+            <a:ext cx="3328416" cy="274320"/>
+          </a:xfrm>
+          <a:prstGeom prst="roundRect">
+            <a:avLst>
+              <a:gd name="adj" fmla="val 10000"/>
+            </a:avLst>
+          </a:prstGeom>
+          <a:solidFill>
+            <a:srgbClr val="FFFFFF"/>
+          </a:solidFill>
+          <a:ln w="12700">
+            <a:solidFill>
+              <a:srgbClr val="1E6B52"/>
+            </a:solidFill>
+          </a:ln>
+          <a:effectLst/>
+        </p:spPr>
+        <p:style>
+          <a:lnRef idx="1">
+            <a:schemeClr val="accent1"/>
+          </a:lnRef>
+          <a:fillRef idx="3">
+            <a:schemeClr val="accent1"/>
+          </a:fillRef>
+          <a:effectRef idx="2">
+            <a:schemeClr val="accent1"/>
+          </a:effectRef>
+          <a:fontRef idx="minor">
+            <a:schemeClr val="lt1"/>
+          </a:fontRef>
+        </p:style>
+        <p:txBody>
+          <a:bodyPr rtlCol="0" anchor="ctr" wrap="square" lIns="54864" rIns="54864" tIns="27432" bIns="27432"/>
+          <a:lstStyle/>
+          <a:p>
+            <a:pPr algn="ctr"/>
+            <a:r>
+              <a:rPr sz="900" b="0">
+                <a:solidFill>
+                  <a:srgbClr val="1E6B52"/>
+                </a:solidFill>
+                <a:latin typeface="Segoe UI"/>
+              </a:rPr>
+              <a:t>local first; cloud only after a failure</a:t>
+            </a:r>
+          </a:p>
+        </p:txBody>
+      </p:sp>
+      <p:sp>
+        <p:nvSpPr>
+          <p:cNvPr id="50" name="TextBox 49"/>
           <p:cNvSpPr txBox="1"/>
           <p:nvPr/>
         </p:nvSpPr>
         <p:spPr>
           <a:xfrm>
-            <a:off x="6355080" y="2944368"/>
-            <a:ext cx="2299716" cy="189865"/>
+            <a:off x="566928" y="5138928"/>
+            <a:ext cx="2743200" cy="219456"/>
           </a:xfrm>
           <a:prstGeom prst="rect">
             <a:avLst/>
@@ -6298,193 +9564,39 @@
               </a:spcAft>
             </a:pPr>
             <a:r>
-              <a:rPr sz="1150" b="1">
-                <a:solidFill>
-                  <a:srgbClr val="1E6B52"/>
-                </a:solidFill>
-                <a:latin typeface="Segoe UI"/>
-              </a:rPr>
-              <a:t>Where code goes · run cost</a:t>
-            </a:r>
-          </a:p>
-        </p:txBody>
-      </p:sp>
-      <p:sp>
-        <p:nvSpPr>
-          <p:cNvPr id="36" name="TextBox 35"/>
-          <p:cNvSpPr txBox="1"/>
-          <p:nvPr/>
-        </p:nvSpPr>
-        <p:spPr>
-          <a:xfrm>
-            <a:off x="6355080" y="3225673"/>
-            <a:ext cx="2299716" cy="548132"/>
-          </a:xfrm>
-          <a:prstGeom prst="rect">
-            <a:avLst/>
-          </a:prstGeom>
-          <a:noFill/>
-        </p:spPr>
-        <p:txBody>
-          <a:bodyPr wrap="square" anchor="t" lIns="0" rIns="0" tIns="0" bIns="0">
-            <a:spAutoFit/>
-          </a:bodyPr>
-          <a:lstStyle/>
-          <a:p>
-            <a:pPr algn="l">
-              <a:spcAft>
-                <a:spcPts val="0"/>
-              </a:spcAft>
-            </a:pPr>
-            <a:r>
-              <a:rPr sz="830" b="0">
-                <a:solidFill>
-                  <a:srgbClr val="1A1A1A"/>
-                </a:solidFill>
-                <a:latin typeface="Segoe UI"/>
-              </a:rPr>
-              <a:t>·  The prompt and its context go to the endpoint YOU set; with a local model an air-gapped install is the default shape of this product, not a hardened variant of it.</a:t>
-            </a:r>
-          </a:p>
-        </p:txBody>
-      </p:sp>
-      <p:sp>
-        <p:nvSpPr>
-          <p:cNvPr id="37" name="TextBox 36"/>
-          <p:cNvSpPr txBox="1"/>
-          <p:nvPr/>
-        </p:nvSpPr>
-        <p:spPr>
-          <a:xfrm>
-            <a:off x="6355080" y="3819525"/>
-            <a:ext cx="2299716" cy="411099"/>
-          </a:xfrm>
-          <a:prstGeom prst="rect">
-            <a:avLst/>
-          </a:prstGeom>
-          <a:noFill/>
-        </p:spPr>
-        <p:txBody>
-          <a:bodyPr wrap="square" anchor="t" lIns="0" rIns="0" tIns="0" bIns="0">
-            <a:spAutoFit/>
-          </a:bodyPr>
-          <a:lstStyle/>
-          <a:p>
-            <a:pPr algn="l">
-              <a:spcAft>
-                <a:spcPts val="0"/>
-              </a:spcAft>
-            </a:pPr>
-            <a:r>
-              <a:rPr sz="830" b="0">
-                <a:solidFill>
-                  <a:srgbClr val="1A1A1A"/>
-                </a:solidFill>
-                <a:latin typeface="Segoe UI"/>
-              </a:rPr>
-              <a:t>·  Escalation to a cloud model happens only after a local failure, never on a timer, and only if you registered one.</a:t>
-            </a:r>
-          </a:p>
-        </p:txBody>
-      </p:sp>
-      <p:sp>
-        <p:nvSpPr>
-          <p:cNvPr id="38" name="TextBox 37"/>
-          <p:cNvSpPr txBox="1"/>
-          <p:nvPr/>
-        </p:nvSpPr>
-        <p:spPr>
-          <a:xfrm>
-            <a:off x="6355080" y="4276344"/>
-            <a:ext cx="2299716" cy="685165"/>
-          </a:xfrm>
-          <a:prstGeom prst="rect">
-            <a:avLst/>
-          </a:prstGeom>
-          <a:noFill/>
-        </p:spPr>
-        <p:txBody>
-          <a:bodyPr wrap="square" anchor="t" lIns="0" rIns="0" tIns="0" bIns="0">
-            <a:spAutoFit/>
-          </a:bodyPr>
-          <a:lstStyle/>
-          <a:p>
-            <a:pPr algn="l">
-              <a:spcAft>
-                <a:spcPts val="0"/>
-              </a:spcAft>
-            </a:pPr>
-            <a:r>
-              <a:rPr sz="830" b="0">
-                <a:solidFill>
-                  <a:srgbClr val="1A1A1A"/>
-                </a:solidFill>
-                <a:latin typeface="Segoe UI"/>
-              </a:rPr>
-              <a:t>·  A rate ceiling in requests per minute per role keeps background work from out-shouting a person; a request meter attributes every call to a role and a task; long sessions compact into briefs.</a:t>
-            </a:r>
-          </a:p>
-        </p:txBody>
-      </p:sp>
-      <p:sp>
-        <p:nvSpPr>
-          <p:cNvPr id="39" name="TextBox 38"/>
-          <p:cNvSpPr txBox="1"/>
-          <p:nvPr/>
-        </p:nvSpPr>
-        <p:spPr>
-          <a:xfrm>
-            <a:off x="6355080" y="5007229"/>
-            <a:ext cx="2299716" cy="411099"/>
-          </a:xfrm>
-          <a:prstGeom prst="rect">
-            <a:avLst/>
-          </a:prstGeom>
-          <a:noFill/>
-        </p:spPr>
-        <p:txBody>
-          <a:bodyPr wrap="square" anchor="t" lIns="0" rIns="0" tIns="0" bIns="0">
-            <a:spAutoFit/>
-          </a:bodyPr>
-          <a:lstStyle/>
-          <a:p>
-            <a:pPr algn="l">
-              <a:spcAft>
-                <a:spcPts val="0"/>
-              </a:spcAft>
-            </a:pPr>
-            <a:r>
-              <a:rPr sz="830" b="0">
-                <a:solidFill>
-                  <a:srgbClr val="1A1A1A"/>
-                </a:solidFill>
-                <a:latin typeface="Segoe UI"/>
-              </a:rPr>
-              <a:t>·  So the marginal cost of a run is electricity, and the cloud key is a fallback you can leave unset.</a:t>
-            </a:r>
-          </a:p>
-        </p:txBody>
-      </p:sp>
-      <p:sp>
-        <p:nvSpPr>
-          <p:cNvPr id="40" name="Rounded Rectangle 39"/>
+              <a:rPr sz="1000" b="1">
+                <a:solidFill>
+                  <a:srgbClr val="8C2F2F"/>
+                </a:solidFill>
+                <a:latin typeface="Segoe UI"/>
+              </a:rPr>
+              <a:t>Limits we publish</a:t>
+            </a:r>
+          </a:p>
+        </p:txBody>
+      </p:sp>
+      <p:sp>
+        <p:nvSpPr>
+          <p:cNvPr id="51" name="Rounded Rectangle 50"/>
           <p:cNvSpPr/>
           <p:nvPr/>
         </p:nvSpPr>
         <p:spPr>
           <a:xfrm>
-            <a:off x="9002268" y="2779776"/>
-            <a:ext cx="2628900" cy="3534029"/>
+            <a:off x="566928" y="5394960"/>
+            <a:ext cx="5413248" cy="274320"/>
           </a:xfrm>
           <a:prstGeom prst="roundRect">
-            <a:avLst/>
+            <a:avLst>
+              <a:gd name="adj" fmla="val 10000"/>
+            </a:avLst>
           </a:prstGeom>
           <a:solidFill>
-            <a:srgbClr val="ECECEC"/>
+            <a:srgbClr val="FFFFFF"/>
           </a:solidFill>
           <a:ln w="12700">
             <a:solidFill>
-              <a:srgbClr val="3A3A3A"/>
+              <a:srgbClr val="8C2F2F"/>
             </a:solidFill>
           </a:ln>
           <a:effectLst/>
@@ -6504,204 +9616,189 @@
           </a:fontRef>
         </p:style>
         <p:txBody>
-          <a:bodyPr rtlCol="0" anchor="ctr"/>
+          <a:bodyPr rtlCol="0" anchor="ctr" wrap="square" lIns="54864" rIns="54864" tIns="27432" bIns="27432"/>
           <a:lstStyle/>
           <a:p>
             <a:pPr algn="ctr"/>
-          </a:p>
-        </p:txBody>
-      </p:sp>
-      <p:sp>
-        <p:nvSpPr>
-          <p:cNvPr id="41" name="TextBox 40"/>
-          <p:cNvSpPr txBox="1"/>
-          <p:nvPr/>
-        </p:nvSpPr>
-        <p:spPr>
-          <a:xfrm>
-            <a:off x="9166860" y="2944368"/>
-            <a:ext cx="2299716" cy="189865"/>
-          </a:xfrm>
-          <a:prstGeom prst="rect">
-            <a:avLst/>
-          </a:prstGeom>
-          <a:noFill/>
-        </p:spPr>
-        <p:txBody>
-          <a:bodyPr wrap="square" anchor="t" lIns="0" rIns="0" tIns="0" bIns="0">
-            <a:spAutoFit/>
-          </a:bodyPr>
-          <a:lstStyle/>
-          <a:p>
-            <a:pPr algn="l">
-              <a:spcAft>
-                <a:spcPts val="0"/>
-              </a:spcAft>
-            </a:pPr>
-            <a:r>
-              <a:rPr sz="1150" b="1">
-                <a:solidFill>
-                  <a:srgbClr val="3A3A3A"/>
-                </a:solidFill>
-                <a:latin typeface="Segoe UI"/>
-              </a:rPr>
-              <a:t>Secrets, supply chain, limits</a:t>
-            </a:r>
-          </a:p>
-        </p:txBody>
-      </p:sp>
-      <p:sp>
-        <p:nvSpPr>
-          <p:cNvPr id="42" name="TextBox 41"/>
-          <p:cNvSpPr txBox="1"/>
-          <p:nvPr/>
-        </p:nvSpPr>
-        <p:spPr>
-          <a:xfrm>
-            <a:off x="9166860" y="3225673"/>
-            <a:ext cx="2299716" cy="685165"/>
-          </a:xfrm>
-          <a:prstGeom prst="rect">
-            <a:avLst/>
-          </a:prstGeom>
-          <a:noFill/>
-        </p:spPr>
-        <p:txBody>
-          <a:bodyPr wrap="square" anchor="t" lIns="0" rIns="0" tIns="0" bIns="0">
-            <a:spAutoFit/>
-          </a:bodyPr>
-          <a:lstStyle/>
-          <a:p>
-            <a:pPr algn="l">
-              <a:spcAft>
-                <a:spcPts val="0"/>
-              </a:spcAft>
-            </a:pPr>
-            <a:r>
-              <a:rPr sz="830" b="0">
-                <a:solidFill>
-                  <a:srgbClr val="1A1A1A"/>
-                </a:solidFill>
-                <a:latin typeface="Segoe UI"/>
-              </a:rPr>
-              <a:t>·  API keys, integration credentials, MCP headers and the runtime env live in one 0700 folder, files 0600, repaired on boot — a write-time fix never reaches an existing file.</a:t>
-            </a:r>
-          </a:p>
-        </p:txBody>
-      </p:sp>
-      <p:sp>
-        <p:nvSpPr>
-          <p:cNvPr id="43" name="TextBox 42"/>
-          <p:cNvSpPr txBox="1"/>
-          <p:nvPr/>
-        </p:nvSpPr>
-        <p:spPr>
-          <a:xfrm>
-            <a:off x="9166860" y="3956558"/>
-            <a:ext cx="2299716" cy="274066"/>
-          </a:xfrm>
-          <a:prstGeom prst="rect">
-            <a:avLst/>
-          </a:prstGeom>
-          <a:noFill/>
-        </p:spPr>
-        <p:txBody>
-          <a:bodyPr wrap="square" anchor="t" lIns="0" rIns="0" tIns="0" bIns="0">
-            <a:spAutoFit/>
-          </a:bodyPr>
-          <a:lstStyle/>
-          <a:p>
-            <a:pPr algn="l">
-              <a:spcAft>
-                <a:spcPts val="0"/>
-              </a:spcAft>
-            </a:pPr>
-            <a:r>
-              <a:rPr sz="830" b="0">
-                <a:solidFill>
-                  <a:srgbClr val="1A1A1A"/>
-                </a:solidFill>
-                <a:latin typeface="Segoe UI"/>
-              </a:rPr>
-              <a:t>·  No CERT_NONE anywhere: every certificate is pinned and its hostname checked.</a:t>
-            </a:r>
-          </a:p>
-        </p:txBody>
-      </p:sp>
-      <p:sp>
-        <p:nvSpPr>
-          <p:cNvPr id="44" name="TextBox 43"/>
-          <p:cNvSpPr txBox="1"/>
-          <p:nvPr/>
-        </p:nvSpPr>
-        <p:spPr>
-          <a:xfrm>
-            <a:off x="9166860" y="4276344"/>
-            <a:ext cx="2299716" cy="548132"/>
-          </a:xfrm>
-          <a:prstGeom prst="rect">
-            <a:avLst/>
-          </a:prstGeom>
-          <a:noFill/>
-        </p:spPr>
-        <p:txBody>
-          <a:bodyPr wrap="square" anchor="t" lIns="0" rIns="0" tIns="0" bIns="0">
-            <a:spAutoFit/>
-          </a:bodyPr>
-          <a:lstStyle/>
-          <a:p>
-            <a:pPr algn="l">
-              <a:spcAft>
-                <a:spcPts val="0"/>
-              </a:spcAft>
-            </a:pPr>
-            <a:r>
-              <a:rPr sz="830" b="0">
-                <a:solidFill>
-                  <a:srgbClr val="1A1A1A"/>
-                </a:solidFill>
-                <a:latin typeface="Segoe UI"/>
-              </a:rPr>
-              <a:t>·  One build emits sonar/, blackduck/ and a CycloneDX SBOM; a heavy dependency was dropped and its repo-map vendored under Apache-2.0, 212 packages to 186.</a:t>
-            </a:r>
-          </a:p>
-        </p:txBody>
-      </p:sp>
-      <p:sp>
-        <p:nvSpPr>
-          <p:cNvPr id="45" name="TextBox 44"/>
-          <p:cNvSpPr txBox="1"/>
-          <p:nvPr/>
-        </p:nvSpPr>
-        <p:spPr>
-          <a:xfrm>
-            <a:off x="9166860" y="4870196"/>
-            <a:ext cx="2299716" cy="822198"/>
-          </a:xfrm>
-          <a:prstGeom prst="rect">
-            <a:avLst/>
-          </a:prstGeom>
-          <a:noFill/>
-        </p:spPr>
-        <p:txBody>
-          <a:bodyPr wrap="square" anchor="t" lIns="0" rIns="0" tIns="0" bIns="0">
-            <a:spAutoFit/>
-          </a:bodyPr>
-          <a:lstStyle/>
-          <a:p>
-            <a:pPr algn="l">
-              <a:spcAft>
-                <a:spcPts val="0"/>
-              </a:spcAft>
-            </a:pPr>
-            <a:r>
-              <a:rPr sz="830" b="0">
-                <a:solidFill>
-                  <a:srgbClr val="1A1A1A"/>
-                </a:solidFill>
-                <a:latin typeface="Segoe UI"/>
-              </a:rPr>
-              <a:t>·  Published rather than implied: the kernel guard is a guard, not a sandbox; a shell can open a socket the policy never sees; fleet sync is unauthenticated by default; role tool filters fail OPEN so a typo cannot brick an agent.</a:t>
+            <a:r>
+              <a:rPr sz="900" b="0">
+                <a:solidFill>
+                  <a:srgbClr val="8C2F2F"/>
+                </a:solidFill>
+                <a:latin typeface="Segoe UI"/>
+              </a:rPr>
+              <a:t>the kernel guard is a guard, not a sandbox</a:t>
+            </a:r>
+          </a:p>
+        </p:txBody>
+      </p:sp>
+      <p:sp>
+        <p:nvSpPr>
+          <p:cNvPr id="52" name="Rounded Rectangle 51"/>
+          <p:cNvSpPr/>
+          <p:nvPr/>
+        </p:nvSpPr>
+        <p:spPr>
+          <a:xfrm>
+            <a:off x="6236208" y="5394960"/>
+            <a:ext cx="5413248" cy="274320"/>
+          </a:xfrm>
+          <a:prstGeom prst="roundRect">
+            <a:avLst>
+              <a:gd name="adj" fmla="val 10000"/>
+            </a:avLst>
+          </a:prstGeom>
+          <a:solidFill>
+            <a:srgbClr val="FFFFFF"/>
+          </a:solidFill>
+          <a:ln w="12700">
+            <a:solidFill>
+              <a:srgbClr val="8C2F2F"/>
+            </a:solidFill>
+          </a:ln>
+          <a:effectLst/>
+        </p:spPr>
+        <p:style>
+          <a:lnRef idx="1">
+            <a:schemeClr val="accent1"/>
+          </a:lnRef>
+          <a:fillRef idx="3">
+            <a:schemeClr val="accent1"/>
+          </a:fillRef>
+          <a:effectRef idx="2">
+            <a:schemeClr val="accent1"/>
+          </a:effectRef>
+          <a:fontRef idx="minor">
+            <a:schemeClr val="lt1"/>
+          </a:fontRef>
+        </p:style>
+        <p:txBody>
+          <a:bodyPr rtlCol="0" anchor="ctr" wrap="square" lIns="54864" rIns="54864" tIns="27432" bIns="27432"/>
+          <a:lstStyle/>
+          <a:p>
+            <a:pPr algn="ctr"/>
+            <a:r>
+              <a:rPr sz="900" b="0">
+                <a:solidFill>
+                  <a:srgbClr val="8C2F2F"/>
+                </a:solidFill>
+                <a:latin typeface="Segoe UI"/>
+              </a:rPr>
+              <a:t>a shell can open a socket the policy never sees</a:t>
+            </a:r>
+          </a:p>
+        </p:txBody>
+      </p:sp>
+      <p:sp>
+        <p:nvSpPr>
+          <p:cNvPr id="53" name="Rounded Rectangle 52"/>
+          <p:cNvSpPr/>
+          <p:nvPr/>
+        </p:nvSpPr>
+        <p:spPr>
+          <a:xfrm>
+            <a:off x="566928" y="5724144"/>
+            <a:ext cx="5413248" cy="274320"/>
+          </a:xfrm>
+          <a:prstGeom prst="roundRect">
+            <a:avLst>
+              <a:gd name="adj" fmla="val 10000"/>
+            </a:avLst>
+          </a:prstGeom>
+          <a:solidFill>
+            <a:srgbClr val="FFFFFF"/>
+          </a:solidFill>
+          <a:ln w="12700">
+            <a:solidFill>
+              <a:srgbClr val="8C2F2F"/>
+            </a:solidFill>
+          </a:ln>
+          <a:effectLst/>
+        </p:spPr>
+        <p:style>
+          <a:lnRef idx="1">
+            <a:schemeClr val="accent1"/>
+          </a:lnRef>
+          <a:fillRef idx="3">
+            <a:schemeClr val="accent1"/>
+          </a:fillRef>
+          <a:effectRef idx="2">
+            <a:schemeClr val="accent1"/>
+          </a:effectRef>
+          <a:fontRef idx="minor">
+            <a:schemeClr val="lt1"/>
+          </a:fontRef>
+        </p:style>
+        <p:txBody>
+          <a:bodyPr rtlCol="0" anchor="ctr" wrap="square" lIns="54864" rIns="54864" tIns="27432" bIns="27432"/>
+          <a:lstStyle/>
+          <a:p>
+            <a:pPr algn="ctr"/>
+            <a:r>
+              <a:rPr sz="900" b="0">
+                <a:solidFill>
+                  <a:srgbClr val="8C2F2F"/>
+                </a:solidFill>
+                <a:latin typeface="Segoe UI"/>
+              </a:rPr>
+              <a:t>fleet sync is unauthenticated by default</a:t>
+            </a:r>
+          </a:p>
+        </p:txBody>
+      </p:sp>
+      <p:sp>
+        <p:nvSpPr>
+          <p:cNvPr id="54" name="Rounded Rectangle 53"/>
+          <p:cNvSpPr/>
+          <p:nvPr/>
+        </p:nvSpPr>
+        <p:spPr>
+          <a:xfrm>
+            <a:off x="6236208" y="5724144"/>
+            <a:ext cx="5413248" cy="274320"/>
+          </a:xfrm>
+          <a:prstGeom prst="roundRect">
+            <a:avLst>
+              <a:gd name="adj" fmla="val 10000"/>
+            </a:avLst>
+          </a:prstGeom>
+          <a:solidFill>
+            <a:srgbClr val="FFFFFF"/>
+          </a:solidFill>
+          <a:ln w="12700">
+            <a:solidFill>
+              <a:srgbClr val="8C2F2F"/>
+            </a:solidFill>
+          </a:ln>
+          <a:effectLst/>
+        </p:spPr>
+        <p:style>
+          <a:lnRef idx="1">
+            <a:schemeClr val="accent1"/>
+          </a:lnRef>
+          <a:fillRef idx="3">
+            <a:schemeClr val="accent1"/>
+          </a:fillRef>
+          <a:effectRef idx="2">
+            <a:schemeClr val="accent1"/>
+          </a:effectRef>
+          <a:fontRef idx="minor">
+            <a:schemeClr val="lt1"/>
+          </a:fontRef>
+        </p:style>
+        <p:txBody>
+          <a:bodyPr rtlCol="0" anchor="ctr" wrap="square" lIns="54864" rIns="54864" tIns="27432" bIns="27432"/>
+          <a:lstStyle/>
+          <a:p>
+            <a:pPr algn="ctr"/>
+            <a:r>
+              <a:rPr sz="900" b="0">
+                <a:solidFill>
+                  <a:srgbClr val="8C2F2F"/>
+                </a:solidFill>
+                <a:latin typeface="Segoe UI"/>
+              </a:rPr>
+              <a:t>role tool filters fail OPEN, so a typo cannot brick an agent</a:t>
             </a:r>
           </a:p>
         </p:txBody>
@@ -6758,7 +9855,7 @@
                 </a:solidFill>
                 <a:latin typeface="Segoe UI"/>
               </a:rPr>
-              <a:t>The evidence — and the decisions we need from you</a:t>
+              <a:t>The evidence, the gap, and the asks</a:t>
             </a:r>
           </a:p>
         </p:txBody>
@@ -6797,7 +9894,7 @@
                 </a:solidFill>
                 <a:latin typeface="Segoe UI"/>
               </a:rPr>
-              <a:t>Zero is the whole tree's number, read off the SonarQube API, not inferred from a green pipeline. It describes the PLATFORM only.</a:t>
+              <a:t>The zeros are the PLATFORM's, read off the scanner API. What they do not cover is the middle column — said here rather than left to find.</a:t>
             </a:r>
           </a:p>
         </p:txBody>
@@ -6880,7 +9977,7 @@
                 </a:solidFill>
                 <a:latin typeface="Segoe UI"/>
               </a:rPr>
-              <a:t>Measured on main @ 7d9e60ae, 2026-09-06. 0 unresolved issues and 0 hotspots across 71,204 lines in 542 files, 0.1% duplication. One GitLab build emits sonar/ (analysis, junit, coverage) and blackduck/ (inventory, SBOM) for the corporate scanners; a hermetic Docker target runs the suite clean-room.</a:t>
+              <a:t>Measured on main @ 7d9e60ae, 2026-09-06. 71,204 lines, 542 files, 0.1% duplication; one build feeds both scanner families and a hermetic Docker target runs the suite clean-room.</a:t>
             </a:r>
           </a:p>
         </p:txBody>
@@ -6932,7 +10029,7 @@
         </p:nvSpPr>
         <p:spPr>
           <a:xfrm>
-            <a:off x="566928" y="1316736"/>
+            <a:off x="566928" y="1243584"/>
             <a:ext cx="1844040" cy="384048"/>
           </a:xfrm>
           <a:prstGeom prst="rect">
@@ -6971,7 +10068,7 @@
         </p:nvSpPr>
         <p:spPr>
           <a:xfrm>
-            <a:off x="640080" y="1719072"/>
+            <a:off x="640080" y="1645920"/>
             <a:ext cx="1697736" cy="384048"/>
           </a:xfrm>
           <a:prstGeom prst="rect">
@@ -7010,7 +10107,7 @@
         </p:nvSpPr>
         <p:spPr>
           <a:xfrm>
-            <a:off x="2410968" y="1316736"/>
+            <a:off x="2410968" y="1243584"/>
             <a:ext cx="1844040" cy="384048"/>
           </a:xfrm>
           <a:prstGeom prst="rect">
@@ -7049,7 +10146,7 @@
         </p:nvSpPr>
         <p:spPr>
           <a:xfrm>
-            <a:off x="2484120" y="1719072"/>
+            <a:off x="2484120" y="1645920"/>
             <a:ext cx="1697736" cy="384048"/>
           </a:xfrm>
           <a:prstGeom prst="rect">
@@ -7088,7 +10185,7 @@
         </p:nvSpPr>
         <p:spPr>
           <a:xfrm>
-            <a:off x="2410968" y="1353312"/>
+            <a:off x="2410968" y="1280160"/>
             <a:ext cx="9525" cy="566928"/>
           </a:xfrm>
           <a:prstGeom prst="rect">
@@ -7132,7 +10229,7 @@
         </p:nvSpPr>
         <p:spPr>
           <a:xfrm>
-            <a:off x="4255008" y="1316736"/>
+            <a:off x="4255008" y="1243584"/>
             <a:ext cx="1844040" cy="384048"/>
           </a:xfrm>
           <a:prstGeom prst="rect">
@@ -7171,7 +10268,7 @@
         </p:nvSpPr>
         <p:spPr>
           <a:xfrm>
-            <a:off x="4328160" y="1719072"/>
+            <a:off x="4328160" y="1645920"/>
             <a:ext cx="1697736" cy="384048"/>
           </a:xfrm>
           <a:prstGeom prst="rect">
@@ -7210,7 +10307,7 @@
         </p:nvSpPr>
         <p:spPr>
           <a:xfrm>
-            <a:off x="4255008" y="1353312"/>
+            <a:off x="4255008" y="1280160"/>
             <a:ext cx="9525" cy="566928"/>
           </a:xfrm>
           <a:prstGeom prst="rect">
@@ -7254,7 +10351,7 @@
         </p:nvSpPr>
         <p:spPr>
           <a:xfrm>
-            <a:off x="6099048" y="1316736"/>
+            <a:off x="6099048" y="1243584"/>
             <a:ext cx="1844040" cy="384048"/>
           </a:xfrm>
           <a:prstGeom prst="rect">
@@ -7293,7 +10390,7 @@
         </p:nvSpPr>
         <p:spPr>
           <a:xfrm>
-            <a:off x="6172200" y="1719072"/>
+            <a:off x="6172200" y="1645920"/>
             <a:ext cx="1697736" cy="384048"/>
           </a:xfrm>
           <a:prstGeom prst="rect">
@@ -7319,7 +10416,7 @@
                 </a:solidFill>
                 <a:latin typeface="Segoe UI"/>
               </a:rPr>
-              <a:t>all three Sonar ratings</a:t>
+              <a:t>Sonar ratings</a:t>
             </a:r>
           </a:p>
         </p:txBody>
@@ -7332,7 +10429,7 @@
         </p:nvSpPr>
         <p:spPr>
           <a:xfrm>
-            <a:off x="6099048" y="1353312"/>
+            <a:off x="6099048" y="1280160"/>
             <a:ext cx="9525" cy="566928"/>
           </a:xfrm>
           <a:prstGeom prst="rect">
@@ -7376,7 +10473,7 @@
         </p:nvSpPr>
         <p:spPr>
           <a:xfrm>
-            <a:off x="7943088" y="1316736"/>
+            <a:off x="7943088" y="1243584"/>
             <a:ext cx="1844040" cy="384048"/>
           </a:xfrm>
           <a:prstGeom prst="rect">
@@ -7415,7 +10512,7 @@
         </p:nvSpPr>
         <p:spPr>
           <a:xfrm>
-            <a:off x="8016240" y="1719072"/>
+            <a:off x="8016240" y="1645920"/>
             <a:ext cx="1697736" cy="384048"/>
           </a:xfrm>
           <a:prstGeom prst="rect">
@@ -7454,7 +10551,7 @@
         </p:nvSpPr>
         <p:spPr>
           <a:xfrm>
-            <a:off x="7943088" y="1353312"/>
+            <a:off x="7943088" y="1280160"/>
             <a:ext cx="9525" cy="566928"/>
           </a:xfrm>
           <a:prstGeom prst="rect">
@@ -7498,7 +10595,7 @@
         </p:nvSpPr>
         <p:spPr>
           <a:xfrm>
-            <a:off x="9787128" y="1316736"/>
+            <a:off x="9787128" y="1243584"/>
             <a:ext cx="1844040" cy="384048"/>
           </a:xfrm>
           <a:prstGeom prst="rect">
@@ -7537,7 +10634,7 @@
         </p:nvSpPr>
         <p:spPr>
           <a:xfrm>
-            <a:off x="9860280" y="1719072"/>
+            <a:off x="9860280" y="1645920"/>
             <a:ext cx="1697736" cy="384048"/>
           </a:xfrm>
           <a:prstGeom prst="rect">
@@ -7563,7 +10660,7 @@
                 </a:solidFill>
                 <a:latin typeface="Segoe UI"/>
               </a:rPr>
-              <a:t>coverage as Sonar scopes it</a:t>
+              <a:t>coverage (86.7% pytest-cov)</a:t>
             </a:r>
           </a:p>
         </p:txBody>
@@ -7576,7 +10673,7 @@
         </p:nvSpPr>
         <p:spPr>
           <a:xfrm>
-            <a:off x="9787128" y="1353312"/>
+            <a:off x="9787128" y="1280160"/>
             <a:ext cx="9525" cy="566928"/>
           </a:xfrm>
           <a:prstGeom prst="rect">
@@ -7620,11 +10717,13 @@
         </p:nvSpPr>
         <p:spPr>
           <a:xfrm>
-            <a:off x="566928" y="2157984"/>
-            <a:ext cx="2628900" cy="4134993"/>
+            <a:off x="566928" y="2139696"/>
+            <a:ext cx="3621024" cy="457200"/>
           </a:xfrm>
           <a:prstGeom prst="roundRect">
-            <a:avLst/>
+            <a:avLst>
+              <a:gd name="adj" fmla="val 10000"/>
+            </a:avLst>
           </a:prstGeom>
           <a:solidFill>
             <a:srgbClr val="DCEEE7"/>
@@ -7651,40 +10750,10 @@
           </a:fontRef>
         </p:style>
         <p:txBody>
-          <a:bodyPr rtlCol="0" anchor="ctr"/>
+          <a:bodyPr rtlCol="0" anchor="ctr" wrap="square" lIns="54864" rIns="54864" tIns="27432" bIns="27432"/>
           <a:lstStyle/>
           <a:p>
             <a:pPr algn="ctr"/>
-          </a:p>
-        </p:txBody>
-      </p:sp>
-      <p:sp>
-        <p:nvSpPr>
-          <p:cNvPr id="25" name="TextBox 24"/>
-          <p:cNvSpPr txBox="1"/>
-          <p:nvPr/>
-        </p:nvSpPr>
-        <p:spPr>
-          <a:xfrm>
-            <a:off x="731520" y="2322576"/>
-            <a:ext cx="2299716" cy="189865"/>
-          </a:xfrm>
-          <a:prstGeom prst="rect">
-            <a:avLst/>
-          </a:prstGeom>
-          <a:noFill/>
-        </p:spPr>
-        <p:txBody>
-          <a:bodyPr wrap="square" anchor="t" lIns="0" rIns="0" tIns="0" bIns="0">
-            <a:spAutoFit/>
-          </a:bodyPr>
-          <a:lstStyle/>
-          <a:p>
-            <a:pPr algn="l">
-              <a:spcAft>
-                <a:spcPts val="0"/>
-              </a:spcAft>
-            </a:pPr>
             <a:r>
               <a:rPr sz="1150" b="1">
                 <a:solidFill>
@@ -7692,163 +10761,292 @@
                 </a:solidFill>
                 <a:latin typeface="Segoe UI"/>
               </a:rPr>
-              <a:t>Why the zero is real</a:t>
-            </a:r>
-          </a:p>
-        </p:txBody>
-      </p:sp>
-      <p:sp>
-        <p:nvSpPr>
-          <p:cNvPr id="26" name="TextBox 25"/>
-          <p:cNvSpPr txBox="1"/>
-          <p:nvPr/>
-        </p:nvSpPr>
-        <p:spPr>
-          <a:xfrm>
-            <a:off x="731520" y="2603881"/>
-            <a:ext cx="2299716" cy="581152"/>
-          </a:xfrm>
-          <a:prstGeom prst="rect">
-            <a:avLst/>
-          </a:prstGeom>
-          <a:noFill/>
-        </p:spPr>
-        <p:txBody>
-          <a:bodyPr wrap="square" anchor="t" lIns="0" rIns="0" tIns="0" bIns="0">
-            <a:spAutoFit/>
-          </a:bodyPr>
-          <a:lstStyle/>
-          <a:p>
-            <a:pPr algn="l">
-              <a:spcAft>
-                <a:spcPts val="0"/>
-              </a:spcAft>
-            </a:pPr>
-            <a:r>
-              <a:rPr sz="880" b="0">
-                <a:solidFill>
-                  <a:srgbClr val="1A1A1A"/>
-                </a:solidFill>
-                <a:latin typeface="Segoe UI"/>
-              </a:rPr>
-              <a:t>·  The scan covers the whole repository. An earlier config scanned two directories, reported zero, and CI still failed.</a:t>
-            </a:r>
-          </a:p>
-        </p:txBody>
-      </p:sp>
-      <p:sp>
-        <p:nvSpPr>
-          <p:cNvPr id="27" name="TextBox 26"/>
-          <p:cNvSpPr txBox="1"/>
-          <p:nvPr/>
-        </p:nvSpPr>
-        <p:spPr>
-          <a:xfrm>
-            <a:off x="731520" y="3230753"/>
-            <a:ext cx="2299716" cy="1162304"/>
-          </a:xfrm>
-          <a:prstGeom prst="rect">
-            <a:avLst/>
-          </a:prstGeom>
-          <a:noFill/>
-        </p:spPr>
-        <p:txBody>
-          <a:bodyPr wrap="square" anchor="t" lIns="0" rIns="0" tIns="0" bIns="0">
-            <a:spAutoFit/>
-          </a:bodyPr>
-          <a:lstStyle/>
-          <a:p>
-            <a:pPr algn="l">
-              <a:spcAft>
-                <a:spcPts val="0"/>
-              </a:spcAft>
-            </a:pPr>
-            <a:r>
-              <a:rPr sz="880" b="0">
-                <a:solidFill>
-                  <a:srgbClr val="1A1A1A"/>
-                </a:solidFill>
-                <a:latin typeface="Segoe UI"/>
-              </a:rPr>
-              <a:t>·  Duplicate build copies are excluded, so nothing is counted twice, and coverage is regenerated with every scan — one out-of-range line makes the whole report read 0%. The suite's own line coverage is 86.7%; Sonar reports 82.8% because it also counts files the unit suite never imports.</a:t>
-            </a:r>
-          </a:p>
-        </p:txBody>
-      </p:sp>
-      <p:sp>
-        <p:nvSpPr>
-          <p:cNvPr id="28" name="TextBox 27"/>
-          <p:cNvSpPr txBox="1"/>
-          <p:nvPr/>
-        </p:nvSpPr>
-        <p:spPr>
-          <a:xfrm>
-            <a:off x="731520" y="4438777"/>
-            <a:ext cx="2299716" cy="726440"/>
-          </a:xfrm>
-          <a:prstGeom prst="rect">
-            <a:avLst/>
-          </a:prstGeom>
-          <a:noFill/>
-        </p:spPr>
-        <p:txBody>
-          <a:bodyPr wrap="square" anchor="t" lIns="0" rIns="0" tIns="0" bIns="0">
-            <a:spAutoFit/>
-          </a:bodyPr>
-          <a:lstStyle/>
-          <a:p>
-            <a:pPr algn="l">
-              <a:spcAft>
-                <a:spcPts val="0"/>
-              </a:spcAft>
-            </a:pPr>
-            <a:r>
-              <a:rPr sz="880" b="0">
-                <a:solidFill>
-                  <a:srgbClr val="1A1A1A"/>
-                </a:solidFill>
-                <a:latin typeface="Segoe UI"/>
-              </a:rPr>
-              <a:t>·  8,606 tests ran: 3 failed, 0 errors, 0 skipped. All three are the same file and all three need a model actually served on the shared endpoint, which was empty — stated rather than rounded to zero.</a:t>
-            </a:r>
-          </a:p>
-        </p:txBody>
-      </p:sp>
-      <p:sp>
-        <p:nvSpPr>
-          <p:cNvPr id="29" name="TextBox 28"/>
-          <p:cNvSpPr txBox="1"/>
-          <p:nvPr/>
-        </p:nvSpPr>
-        <p:spPr>
-          <a:xfrm>
-            <a:off x="731520" y="5210937"/>
-            <a:ext cx="2299716" cy="871728"/>
-          </a:xfrm>
-          <a:prstGeom prst="rect">
-            <a:avLst/>
-          </a:prstGeom>
-          <a:noFill/>
-        </p:spPr>
-        <p:txBody>
-          <a:bodyPr wrap="square" anchor="t" lIns="0" rIns="0" tIns="0" bIns="0">
-            <a:spAutoFit/>
-          </a:bodyPr>
-          <a:lstStyle/>
-          <a:p>
-            <a:pPr algn="l">
-              <a:spcAft>
-                <a:spcPts val="0"/>
-              </a:spcAft>
-            </a:pPr>
-            <a:r>
-              <a:rPr sz="880" b="0">
-                <a:solidFill>
-                  <a:srgbClr val="1A1A1A"/>
-                </a:solidFill>
-                <a:latin typeface="Segoe UI"/>
-              </a:rPr>
-              <a:t>·  Nine standing vulnerabilities were closed by CHANGING CODE — TLS pinning, scheme validation, digest usage — after two earlier passes had triaged them as accepted decisions. They were decisions; they were the wrong ones.</a:t>
+              <a:t>MEASURED — the platform</a:t>
+            </a:r>
+          </a:p>
+        </p:txBody>
+      </p:sp>
+      <p:sp>
+        <p:nvSpPr>
+          <p:cNvPr id="25" name="Rounded Rectangle 24"/>
+          <p:cNvSpPr/>
+          <p:nvPr/>
+        </p:nvSpPr>
+        <p:spPr>
+          <a:xfrm>
+            <a:off x="566928" y="2670048"/>
+            <a:ext cx="3621024" cy="274320"/>
+          </a:xfrm>
+          <a:prstGeom prst="roundRect">
+            <a:avLst>
+              <a:gd name="adj" fmla="val 10000"/>
+            </a:avLst>
+          </a:prstGeom>
+          <a:solidFill>
+            <a:srgbClr val="FFFFFF"/>
+          </a:solidFill>
+          <a:ln w="12700">
+            <a:solidFill>
+              <a:srgbClr val="1E6B52"/>
+            </a:solidFill>
+          </a:ln>
+          <a:effectLst/>
+        </p:spPr>
+        <p:style>
+          <a:lnRef idx="1">
+            <a:schemeClr val="accent1"/>
+          </a:lnRef>
+          <a:fillRef idx="3">
+            <a:schemeClr val="accent1"/>
+          </a:fillRef>
+          <a:effectRef idx="2">
+            <a:schemeClr val="accent1"/>
+          </a:effectRef>
+          <a:fontRef idx="minor">
+            <a:schemeClr val="lt1"/>
+          </a:fontRef>
+        </p:style>
+        <p:txBody>
+          <a:bodyPr rtlCol="0" anchor="ctr" wrap="square" lIns="54864" rIns="54864" tIns="27432" bIns="27432"/>
+          <a:lstStyle/>
+          <a:p>
+            <a:pPr algn="ctr"/>
+            <a:r>
+              <a:rPr sz="900" b="0">
+                <a:solidFill>
+                  <a:srgbClr val="1E6B52"/>
+                </a:solidFill>
+                <a:latin typeface="Segoe UI"/>
+              </a:rPr>
+              <a:t>whole tree scanned, not two directories</a:t>
+            </a:r>
+          </a:p>
+        </p:txBody>
+      </p:sp>
+      <p:sp>
+        <p:nvSpPr>
+          <p:cNvPr id="26" name="Rounded Rectangle 25"/>
+          <p:cNvSpPr/>
+          <p:nvPr/>
+        </p:nvSpPr>
+        <p:spPr>
+          <a:xfrm>
+            <a:off x="566928" y="3017520"/>
+            <a:ext cx="3621024" cy="274320"/>
+          </a:xfrm>
+          <a:prstGeom prst="roundRect">
+            <a:avLst>
+              <a:gd name="adj" fmla="val 10000"/>
+            </a:avLst>
+          </a:prstGeom>
+          <a:solidFill>
+            <a:srgbClr val="FFFFFF"/>
+          </a:solidFill>
+          <a:ln w="12700">
+            <a:solidFill>
+              <a:srgbClr val="1E6B52"/>
+            </a:solidFill>
+          </a:ln>
+          <a:effectLst/>
+        </p:spPr>
+        <p:style>
+          <a:lnRef idx="1">
+            <a:schemeClr val="accent1"/>
+          </a:lnRef>
+          <a:fillRef idx="3">
+            <a:schemeClr val="accent1"/>
+          </a:fillRef>
+          <a:effectRef idx="2">
+            <a:schemeClr val="accent1"/>
+          </a:effectRef>
+          <a:fontRef idx="minor">
+            <a:schemeClr val="lt1"/>
+          </a:fontRef>
+        </p:style>
+        <p:txBody>
+          <a:bodyPr rtlCol="0" anchor="ctr" wrap="square" lIns="54864" rIns="54864" tIns="27432" bIns="27432"/>
+          <a:lstStyle/>
+          <a:p>
+            <a:pPr algn="ctr"/>
+            <a:r>
+              <a:rPr sz="900" b="0">
+                <a:solidFill>
+                  <a:srgbClr val="1E6B52"/>
+                </a:solidFill>
+                <a:latin typeface="Segoe UI"/>
+              </a:rPr>
+              <a:t>duplicate build copies excluded</a:t>
+            </a:r>
+          </a:p>
+        </p:txBody>
+      </p:sp>
+      <p:sp>
+        <p:nvSpPr>
+          <p:cNvPr id="27" name="Rounded Rectangle 26"/>
+          <p:cNvSpPr/>
+          <p:nvPr/>
+        </p:nvSpPr>
+        <p:spPr>
+          <a:xfrm>
+            <a:off x="566928" y="3364992"/>
+            <a:ext cx="3621024" cy="274320"/>
+          </a:xfrm>
+          <a:prstGeom prst="roundRect">
+            <a:avLst>
+              <a:gd name="adj" fmla="val 10000"/>
+            </a:avLst>
+          </a:prstGeom>
+          <a:solidFill>
+            <a:srgbClr val="FFFFFF"/>
+          </a:solidFill>
+          <a:ln w="12700">
+            <a:solidFill>
+              <a:srgbClr val="1E6B52"/>
+            </a:solidFill>
+          </a:ln>
+          <a:effectLst/>
+        </p:spPr>
+        <p:style>
+          <a:lnRef idx="1">
+            <a:schemeClr val="accent1"/>
+          </a:lnRef>
+          <a:fillRef idx="3">
+            <a:schemeClr val="accent1"/>
+          </a:fillRef>
+          <a:effectRef idx="2">
+            <a:schemeClr val="accent1"/>
+          </a:effectRef>
+          <a:fontRef idx="minor">
+            <a:schemeClr val="lt1"/>
+          </a:fontRef>
+        </p:style>
+        <p:txBody>
+          <a:bodyPr rtlCol="0" anchor="ctr" wrap="square" lIns="54864" rIns="54864" tIns="27432" bIns="27432"/>
+          <a:lstStyle/>
+          <a:p>
+            <a:pPr algn="ctr"/>
+            <a:r>
+              <a:rPr sz="900" b="0">
+                <a:solidFill>
+                  <a:srgbClr val="1E6B52"/>
+                </a:solidFill>
+                <a:latin typeface="Segoe UI"/>
+              </a:rPr>
+              <a:t>coverage regenerated with every scan</a:t>
+            </a:r>
+          </a:p>
+        </p:txBody>
+      </p:sp>
+      <p:sp>
+        <p:nvSpPr>
+          <p:cNvPr id="28" name="Rounded Rectangle 27"/>
+          <p:cNvSpPr/>
+          <p:nvPr/>
+        </p:nvSpPr>
+        <p:spPr>
+          <a:xfrm>
+            <a:off x="566928" y="3712464"/>
+            <a:ext cx="3621024" cy="274320"/>
+          </a:xfrm>
+          <a:prstGeom prst="roundRect">
+            <a:avLst>
+              <a:gd name="adj" fmla="val 10000"/>
+            </a:avLst>
+          </a:prstGeom>
+          <a:solidFill>
+            <a:srgbClr val="FFFFFF"/>
+          </a:solidFill>
+          <a:ln w="12700">
+            <a:solidFill>
+              <a:srgbClr val="1E6B52"/>
+            </a:solidFill>
+          </a:ln>
+          <a:effectLst/>
+        </p:spPr>
+        <p:style>
+          <a:lnRef idx="1">
+            <a:schemeClr val="accent1"/>
+          </a:lnRef>
+          <a:fillRef idx="3">
+            <a:schemeClr val="accent1"/>
+          </a:fillRef>
+          <a:effectRef idx="2">
+            <a:schemeClr val="accent1"/>
+          </a:effectRef>
+          <a:fontRef idx="minor">
+            <a:schemeClr val="lt1"/>
+          </a:fontRef>
+        </p:style>
+        <p:txBody>
+          <a:bodyPr rtlCol="0" anchor="ctr" wrap="square" lIns="54864" rIns="54864" tIns="27432" bIns="27432"/>
+          <a:lstStyle/>
+          <a:p>
+            <a:pPr algn="ctr"/>
+            <a:r>
+              <a:rPr sz="900" b="0">
+                <a:solidFill>
+                  <a:srgbClr val="1E6B52"/>
+                </a:solidFill>
+                <a:latin typeface="Segoe UI"/>
+              </a:rPr>
+              <a:t>9 vulnerabilities closed by CODE</a:t>
+            </a:r>
+          </a:p>
+        </p:txBody>
+      </p:sp>
+      <p:sp>
+        <p:nvSpPr>
+          <p:cNvPr id="29" name="Rounded Rectangle 28"/>
+          <p:cNvSpPr/>
+          <p:nvPr/>
+        </p:nvSpPr>
+        <p:spPr>
+          <a:xfrm>
+            <a:off x="566928" y="4059936"/>
+            <a:ext cx="3621024" cy="274320"/>
+          </a:xfrm>
+          <a:prstGeom prst="roundRect">
+            <a:avLst>
+              <a:gd name="adj" fmla="val 10000"/>
+            </a:avLst>
+          </a:prstGeom>
+          <a:solidFill>
+            <a:srgbClr val="FFFFFF"/>
+          </a:solidFill>
+          <a:ln w="12700">
+            <a:solidFill>
+              <a:srgbClr val="1E6B52"/>
+            </a:solidFill>
+          </a:ln>
+          <a:effectLst/>
+        </p:spPr>
+        <p:style>
+          <a:lnRef idx="1">
+            <a:schemeClr val="accent1"/>
+          </a:lnRef>
+          <a:fillRef idx="3">
+            <a:schemeClr val="accent1"/>
+          </a:fillRef>
+          <a:effectRef idx="2">
+            <a:schemeClr val="accent1"/>
+          </a:effectRef>
+          <a:fontRef idx="minor">
+            <a:schemeClr val="lt1"/>
+          </a:fontRef>
+        </p:style>
+        <p:txBody>
+          <a:bodyPr rtlCol="0" anchor="ctr" wrap="square" lIns="54864" rIns="54864" tIns="27432" bIns="27432"/>
+          <a:lstStyle/>
+          <a:p>
+            <a:pPr algn="ctr"/>
+            <a:r>
+              <a:rPr sz="900" b="0">
+                <a:solidFill>
+                  <a:srgbClr val="1E6B52"/>
+                </a:solidFill>
+                <a:latin typeface="Segoe UI"/>
+              </a:rPr>
+              <a:t>3 failures named, not rounded away</a:t>
             </a:r>
           </a:p>
         </p:txBody>
@@ -7861,11 +11059,13 @@
         </p:nvSpPr>
         <p:spPr>
           <a:xfrm>
-            <a:off x="3378708" y="2157984"/>
-            <a:ext cx="2628900" cy="4134993"/>
+            <a:off x="4279392" y="2139696"/>
+            <a:ext cx="3621024" cy="457200"/>
           </a:xfrm>
           <a:prstGeom prst="roundRect">
-            <a:avLst/>
+            <a:avLst>
+              <a:gd name="adj" fmla="val 10000"/>
+            </a:avLst>
           </a:prstGeom>
           <a:solidFill>
             <a:srgbClr val="F7DFDF"/>
@@ -7892,40 +11092,10 @@
           </a:fontRef>
         </p:style>
         <p:txBody>
-          <a:bodyPr rtlCol="0" anchor="ctr"/>
+          <a:bodyPr rtlCol="0" anchor="ctr" wrap="square" lIns="54864" rIns="54864" tIns="27432" bIns="27432"/>
           <a:lstStyle/>
           <a:p>
             <a:pPr algn="ctr"/>
-          </a:p>
-        </p:txBody>
-      </p:sp>
-      <p:sp>
-        <p:nvSpPr>
-          <p:cNvPr id="31" name="TextBox 30"/>
-          <p:cNvSpPr txBox="1"/>
-          <p:nvPr/>
-        </p:nvSpPr>
-        <p:spPr>
-          <a:xfrm>
-            <a:off x="3543300" y="2322576"/>
-            <a:ext cx="2299716" cy="189865"/>
-          </a:xfrm>
-          <a:prstGeom prst="rect">
-            <a:avLst/>
-          </a:prstGeom>
-          <a:noFill/>
-        </p:spPr>
-        <p:txBody>
-          <a:bodyPr wrap="square" anchor="t" lIns="0" rIns="0" tIns="0" bIns="0">
-            <a:spAutoFit/>
-          </a:bodyPr>
-          <a:lstStyle/>
-          <a:p>
-            <a:pPr algn="l">
-              <a:spcAft>
-                <a:spcPts val="0"/>
-              </a:spcAft>
-            </a:pPr>
             <a:r>
               <a:rPr sz="1150" b="1">
                 <a:solidFill>
@@ -7933,163 +11103,292 @@
                 </a:solidFill>
                 <a:latin typeface="Segoe UI"/>
               </a:rPr>
-              <a:t>What that number does NOT say</a:t>
-            </a:r>
-          </a:p>
-        </p:txBody>
-      </p:sp>
-      <p:sp>
-        <p:nvSpPr>
-          <p:cNvPr id="32" name="TextBox 31"/>
-          <p:cNvSpPr txBox="1"/>
-          <p:nvPr/>
-        </p:nvSpPr>
-        <p:spPr>
-          <a:xfrm>
-            <a:off x="3543300" y="2603881"/>
-            <a:ext cx="2299716" cy="435864"/>
-          </a:xfrm>
-          <a:prstGeom prst="rect">
-            <a:avLst/>
-          </a:prstGeom>
-          <a:noFill/>
-        </p:spPr>
-        <p:txBody>
-          <a:bodyPr wrap="square" anchor="t" lIns="0" rIns="0" tIns="0" bIns="0">
-            <a:spAutoFit/>
-          </a:bodyPr>
-          <a:lstStyle/>
-          <a:p>
-            <a:pPr algn="l">
-              <a:spcAft>
-                <a:spcPts val="0"/>
-              </a:spcAft>
-            </a:pPr>
-            <a:r>
-              <a:rPr sz="880" b="0">
-                <a:solidFill>
-                  <a:srgbClr val="1A1A1A"/>
-                </a:solidFill>
-                <a:latin typeface="Segoe UI"/>
-              </a:rPr>
-              <a:t>·  It is the platform's quality, not the agent's output. A tree with zero findings can still write a wrong patch.</a:t>
-            </a:r>
-          </a:p>
-        </p:txBody>
-      </p:sp>
-      <p:sp>
-        <p:nvSpPr>
-          <p:cNvPr id="33" name="TextBox 32"/>
-          <p:cNvSpPr txBox="1"/>
-          <p:nvPr/>
-        </p:nvSpPr>
-        <p:spPr>
-          <a:xfrm>
-            <a:off x="3543300" y="3085465"/>
-            <a:ext cx="2299716" cy="1017016"/>
-          </a:xfrm>
-          <a:prstGeom prst="rect">
-            <a:avLst/>
-          </a:prstGeom>
-          <a:noFill/>
-        </p:spPr>
-        <p:txBody>
-          <a:bodyPr wrap="square" anchor="t" lIns="0" rIns="0" tIns="0" bIns="0">
-            <a:spAutoFit/>
-          </a:bodyPr>
-          <a:lstStyle/>
-          <a:p>
-            <a:pPr algn="l">
-              <a:spcAft>
-                <a:spcPts val="0"/>
-              </a:spcAft>
-            </a:pPr>
-            <a:r>
-              <a:rPr sz="880" b="0">
-                <a:solidFill>
-                  <a:srgbClr val="1A1A1A"/>
-                </a:solidFill>
-                <a:latin typeface="Segoe UI"/>
-              </a:rPr>
-              <a:t>·  There is no evaluation harness: no frozen set of closed tickets replayed each release, no acceptance rate (merged without a rewrite), no edit distance between what the agent wrote and what shipped, and nothing re-run when the model is swapped.</a:t>
-            </a:r>
-          </a:p>
-        </p:txBody>
-      </p:sp>
-      <p:sp>
-        <p:nvSpPr>
-          <p:cNvPr id="34" name="TextBox 33"/>
-          <p:cNvSpPr txBox="1"/>
-          <p:nvPr/>
-        </p:nvSpPr>
-        <p:spPr>
-          <a:xfrm>
-            <a:off x="3543300" y="4148201"/>
-            <a:ext cx="2299716" cy="435864"/>
-          </a:xfrm>
-          <a:prstGeom prst="rect">
-            <a:avLst/>
-          </a:prstGeom>
-          <a:noFill/>
-        </p:spPr>
-        <p:txBody>
-          <a:bodyPr wrap="square" anchor="t" lIns="0" rIns="0" tIns="0" bIns="0">
-            <a:spAutoFit/>
-          </a:bodyPr>
-          <a:lstStyle/>
-          <a:p>
-            <a:pPr algn="l">
-              <a:spcAft>
-                <a:spcPts val="0"/>
-              </a:spcAft>
-            </a:pPr>
-            <a:r>
-              <a:rPr sz="880" b="0">
-                <a:solidFill>
-                  <a:srgbClr val="1A1A1A"/>
-                </a:solidFill>
-                <a:latin typeface="Segoe UI"/>
-              </a:rPr>
-              <a:t>·  No load test, so no honest number for developers per box, VRAM for a team of N, or wall-clock per ticket.</a:t>
-            </a:r>
-          </a:p>
-        </p:txBody>
-      </p:sp>
-      <p:sp>
-        <p:nvSpPr>
-          <p:cNvPr id="35" name="TextBox 34"/>
-          <p:cNvSpPr txBox="1"/>
-          <p:nvPr/>
-        </p:nvSpPr>
-        <p:spPr>
-          <a:xfrm>
-            <a:off x="3543300" y="4629785"/>
-            <a:ext cx="2299716" cy="871728"/>
-          </a:xfrm>
-          <a:prstGeom prst="rect">
-            <a:avLst/>
-          </a:prstGeom>
-          <a:noFill/>
-        </p:spPr>
-        <p:txBody>
-          <a:bodyPr wrap="square" anchor="t" lIns="0" rIns="0" tIns="0" bIns="0">
-            <a:spAutoFit/>
-          </a:bodyPr>
-          <a:lstStyle/>
-          <a:p>
-            <a:pPr algn="l">
-              <a:spcAft>
-                <a:spcPts val="0"/>
-              </a:spcAft>
-            </a:pPr>
-            <a:r>
-              <a:rPr sz="880" b="0">
-                <a:solidFill>
-                  <a:srgbClr val="1A1A1A"/>
-                </a:solidFill>
-                <a:latin typeface="Segoe UI"/>
-              </a:rPr>
-              <a:t>·  Backup is copying one folder, but there is no documented restore drill; traces record every tool call yet name the BOX, not a person, with no retention or tamper-evidence — good for debugging a run, not yet evidence for an auditor.</a:t>
+              <a:t>NOT MEASURED — the output</a:t>
+            </a:r>
+          </a:p>
+        </p:txBody>
+      </p:sp>
+      <p:sp>
+        <p:nvSpPr>
+          <p:cNvPr id="31" name="Rounded Rectangle 30"/>
+          <p:cNvSpPr/>
+          <p:nvPr/>
+        </p:nvSpPr>
+        <p:spPr>
+          <a:xfrm>
+            <a:off x="4279392" y="2670048"/>
+            <a:ext cx="3621024" cy="274320"/>
+          </a:xfrm>
+          <a:prstGeom prst="roundRect">
+            <a:avLst>
+              <a:gd name="adj" fmla="val 10000"/>
+            </a:avLst>
+          </a:prstGeom>
+          <a:solidFill>
+            <a:srgbClr val="FFFFFF"/>
+          </a:solidFill>
+          <a:ln w="12700">
+            <a:solidFill>
+              <a:srgbClr val="8C2F2F"/>
+            </a:solidFill>
+          </a:ln>
+          <a:effectLst/>
+        </p:spPr>
+        <p:style>
+          <a:lnRef idx="1">
+            <a:schemeClr val="accent1"/>
+          </a:lnRef>
+          <a:fillRef idx="3">
+            <a:schemeClr val="accent1"/>
+          </a:fillRef>
+          <a:effectRef idx="2">
+            <a:schemeClr val="accent1"/>
+          </a:effectRef>
+          <a:fontRef idx="minor">
+            <a:schemeClr val="lt1"/>
+          </a:fontRef>
+        </p:style>
+        <p:txBody>
+          <a:bodyPr rtlCol="0" anchor="ctr" wrap="square" lIns="54864" rIns="54864" tIns="27432" bIns="27432"/>
+          <a:lstStyle/>
+          <a:p>
+            <a:pPr algn="ctr"/>
+            <a:r>
+              <a:rPr sz="900" b="0">
+                <a:solidFill>
+                  <a:srgbClr val="8C2F2F"/>
+                </a:solidFill>
+                <a:latin typeface="Segoe UI"/>
+              </a:rPr>
+              <a:t>no frozen ticket set, no replay</a:t>
+            </a:r>
+          </a:p>
+        </p:txBody>
+      </p:sp>
+      <p:sp>
+        <p:nvSpPr>
+          <p:cNvPr id="32" name="Rounded Rectangle 31"/>
+          <p:cNvSpPr/>
+          <p:nvPr/>
+        </p:nvSpPr>
+        <p:spPr>
+          <a:xfrm>
+            <a:off x="4279392" y="3017520"/>
+            <a:ext cx="3621024" cy="274320"/>
+          </a:xfrm>
+          <a:prstGeom prst="roundRect">
+            <a:avLst>
+              <a:gd name="adj" fmla="val 10000"/>
+            </a:avLst>
+          </a:prstGeom>
+          <a:solidFill>
+            <a:srgbClr val="FFFFFF"/>
+          </a:solidFill>
+          <a:ln w="12700">
+            <a:solidFill>
+              <a:srgbClr val="8C2F2F"/>
+            </a:solidFill>
+          </a:ln>
+          <a:effectLst/>
+        </p:spPr>
+        <p:style>
+          <a:lnRef idx="1">
+            <a:schemeClr val="accent1"/>
+          </a:lnRef>
+          <a:fillRef idx="3">
+            <a:schemeClr val="accent1"/>
+          </a:fillRef>
+          <a:effectRef idx="2">
+            <a:schemeClr val="accent1"/>
+          </a:effectRef>
+          <a:fontRef idx="minor">
+            <a:schemeClr val="lt1"/>
+          </a:fontRef>
+        </p:style>
+        <p:txBody>
+          <a:bodyPr rtlCol="0" anchor="ctr" wrap="square" lIns="54864" rIns="54864" tIns="27432" bIns="27432"/>
+          <a:lstStyle/>
+          <a:p>
+            <a:pPr algn="ctr"/>
+            <a:r>
+              <a:rPr sz="900" b="0">
+                <a:solidFill>
+                  <a:srgbClr val="8C2F2F"/>
+                </a:solidFill>
+                <a:latin typeface="Segoe UI"/>
+              </a:rPr>
+              <a:t>no acceptance rate on generated MRs</a:t>
+            </a:r>
+          </a:p>
+        </p:txBody>
+      </p:sp>
+      <p:sp>
+        <p:nvSpPr>
+          <p:cNvPr id="33" name="Rounded Rectangle 32"/>
+          <p:cNvSpPr/>
+          <p:nvPr/>
+        </p:nvSpPr>
+        <p:spPr>
+          <a:xfrm>
+            <a:off x="4279392" y="3364992"/>
+            <a:ext cx="3621024" cy="274320"/>
+          </a:xfrm>
+          <a:prstGeom prst="roundRect">
+            <a:avLst>
+              <a:gd name="adj" fmla="val 10000"/>
+            </a:avLst>
+          </a:prstGeom>
+          <a:solidFill>
+            <a:srgbClr val="FFFFFF"/>
+          </a:solidFill>
+          <a:ln w="12700">
+            <a:solidFill>
+              <a:srgbClr val="8C2F2F"/>
+            </a:solidFill>
+          </a:ln>
+          <a:effectLst/>
+        </p:spPr>
+        <p:style>
+          <a:lnRef idx="1">
+            <a:schemeClr val="accent1"/>
+          </a:lnRef>
+          <a:fillRef idx="3">
+            <a:schemeClr val="accent1"/>
+          </a:fillRef>
+          <a:effectRef idx="2">
+            <a:schemeClr val="accent1"/>
+          </a:effectRef>
+          <a:fontRef idx="minor">
+            <a:schemeClr val="lt1"/>
+          </a:fontRef>
+        </p:style>
+        <p:txBody>
+          <a:bodyPr rtlCol="0" anchor="ctr" wrap="square" lIns="54864" rIns="54864" tIns="27432" bIns="27432"/>
+          <a:lstStyle/>
+          <a:p>
+            <a:pPr algn="ctr"/>
+            <a:r>
+              <a:rPr sz="900" b="0">
+                <a:solidFill>
+                  <a:srgbClr val="8C2F2F"/>
+                </a:solidFill>
+                <a:latin typeface="Segoe UI"/>
+              </a:rPr>
+              <a:t>no edit distance to what shipped</a:t>
+            </a:r>
+          </a:p>
+        </p:txBody>
+      </p:sp>
+      <p:sp>
+        <p:nvSpPr>
+          <p:cNvPr id="34" name="Rounded Rectangle 33"/>
+          <p:cNvSpPr/>
+          <p:nvPr/>
+        </p:nvSpPr>
+        <p:spPr>
+          <a:xfrm>
+            <a:off x="4279392" y="3712464"/>
+            <a:ext cx="3621024" cy="274320"/>
+          </a:xfrm>
+          <a:prstGeom prst="roundRect">
+            <a:avLst>
+              <a:gd name="adj" fmla="val 10000"/>
+            </a:avLst>
+          </a:prstGeom>
+          <a:solidFill>
+            <a:srgbClr val="FFFFFF"/>
+          </a:solidFill>
+          <a:ln w="12700">
+            <a:solidFill>
+              <a:srgbClr val="8C2F2F"/>
+            </a:solidFill>
+          </a:ln>
+          <a:effectLst/>
+        </p:spPr>
+        <p:style>
+          <a:lnRef idx="1">
+            <a:schemeClr val="accent1"/>
+          </a:lnRef>
+          <a:fillRef idx="3">
+            <a:schemeClr val="accent1"/>
+          </a:fillRef>
+          <a:effectRef idx="2">
+            <a:schemeClr val="accent1"/>
+          </a:effectRef>
+          <a:fontRef idx="minor">
+            <a:schemeClr val="lt1"/>
+          </a:fontRef>
+        </p:style>
+        <p:txBody>
+          <a:bodyPr rtlCol="0" anchor="ctr" wrap="square" lIns="54864" rIns="54864" tIns="27432" bIns="27432"/>
+          <a:lstStyle/>
+          <a:p>
+            <a:pPr algn="ctr"/>
+            <a:r>
+              <a:rPr sz="900" b="0">
+                <a:solidFill>
+                  <a:srgbClr val="8C2F2F"/>
+                </a:solidFill>
+                <a:latin typeface="Segoe UI"/>
+              </a:rPr>
+              <a:t>no load test → no sizing number</a:t>
+            </a:r>
+          </a:p>
+        </p:txBody>
+      </p:sp>
+      <p:sp>
+        <p:nvSpPr>
+          <p:cNvPr id="35" name="Rounded Rectangle 34"/>
+          <p:cNvSpPr/>
+          <p:nvPr/>
+        </p:nvSpPr>
+        <p:spPr>
+          <a:xfrm>
+            <a:off x="4279392" y="4059936"/>
+            <a:ext cx="3621024" cy="274320"/>
+          </a:xfrm>
+          <a:prstGeom prst="roundRect">
+            <a:avLst>
+              <a:gd name="adj" fmla="val 10000"/>
+            </a:avLst>
+          </a:prstGeom>
+          <a:solidFill>
+            <a:srgbClr val="FFFFFF"/>
+          </a:solidFill>
+          <a:ln w="12700">
+            <a:solidFill>
+              <a:srgbClr val="8C2F2F"/>
+            </a:solidFill>
+          </a:ln>
+          <a:effectLst/>
+        </p:spPr>
+        <p:style>
+          <a:lnRef idx="1">
+            <a:schemeClr val="accent1"/>
+          </a:lnRef>
+          <a:fillRef idx="3">
+            <a:schemeClr val="accent1"/>
+          </a:fillRef>
+          <a:effectRef idx="2">
+            <a:schemeClr val="accent1"/>
+          </a:effectRef>
+          <a:fontRef idx="minor">
+            <a:schemeClr val="lt1"/>
+          </a:fontRef>
+        </p:style>
+        <p:txBody>
+          <a:bodyPr rtlCol="0" anchor="ctr" wrap="square" lIns="54864" rIns="54864" tIns="27432" bIns="27432"/>
+          <a:lstStyle/>
+          <a:p>
+            <a:pPr algn="ctr"/>
+            <a:r>
+              <a:rPr sz="900" b="0">
+                <a:solidFill>
+                  <a:srgbClr val="8C2F2F"/>
+                </a:solidFill>
+                <a:latin typeface="Segoe UI"/>
+              </a:rPr>
+              <a:t>no restore drill; traces name the box</a:t>
             </a:r>
           </a:p>
         </p:txBody>
@@ -8102,11 +11401,13 @@
         </p:nvSpPr>
         <p:spPr>
           <a:xfrm>
-            <a:off x="6190488" y="2157984"/>
-            <a:ext cx="2628900" cy="4134993"/>
+            <a:off x="8558784" y="2139696"/>
+            <a:ext cx="3072384" cy="457200"/>
           </a:xfrm>
           <a:prstGeom prst="roundRect">
-            <a:avLst/>
+            <a:avLst>
+              <a:gd name="adj" fmla="val 10000"/>
+            </a:avLst>
           </a:prstGeom>
           <a:solidFill>
             <a:srgbClr val="DCE7F2"/>
@@ -8133,23 +11434,317 @@
           </a:fontRef>
         </p:style>
         <p:txBody>
-          <a:bodyPr rtlCol="0" anchor="ctr"/>
+          <a:bodyPr rtlCol="0" anchor="ctr" wrap="square" lIns="54864" rIns="54864" tIns="27432" bIns="27432"/>
           <a:lstStyle/>
           <a:p>
             <a:pPr algn="ctr"/>
-          </a:p>
-        </p:txBody>
-      </p:sp>
-      <p:sp>
-        <p:nvSpPr>
-          <p:cNvPr id="37" name="TextBox 36"/>
+            <a:r>
+              <a:rPr sz="1150" b="1">
+                <a:solidFill>
+                  <a:srgbClr val="1F4E79"/>
+                </a:solidFill>
+                <a:latin typeface="Segoe UI"/>
+              </a:rPr>
+              <a:t>REMOVED — versus the usual</a:t>
+            </a:r>
+          </a:p>
+        </p:txBody>
+      </p:sp>
+      <p:sp>
+        <p:nvSpPr>
+          <p:cNvPr id="37" name="Rounded Rectangle 36"/>
+          <p:cNvSpPr/>
+          <p:nvPr/>
+        </p:nvSpPr>
+        <p:spPr>
+          <a:xfrm>
+            <a:off x="8558784" y="2670048"/>
+            <a:ext cx="3072384" cy="274320"/>
+          </a:xfrm>
+          <a:prstGeom prst="roundRect">
+            <a:avLst>
+              <a:gd name="adj" fmla="val 10000"/>
+            </a:avLst>
+          </a:prstGeom>
+          <a:solidFill>
+            <a:srgbClr val="FFFFFF"/>
+          </a:solidFill>
+          <a:ln w="12700">
+            <a:solidFill>
+              <a:srgbClr val="1F4E79"/>
+            </a:solidFill>
+          </a:ln>
+          <a:effectLst/>
+        </p:spPr>
+        <p:style>
+          <a:lnRef idx="1">
+            <a:schemeClr val="accent1"/>
+          </a:lnRef>
+          <a:fillRef idx="3">
+            <a:schemeClr val="accent1"/>
+          </a:fillRef>
+          <a:effectRef idx="2">
+            <a:schemeClr val="accent1"/>
+          </a:effectRef>
+          <a:fontRef idx="minor">
+            <a:schemeClr val="lt1"/>
+          </a:fontRef>
+        </p:style>
+        <p:txBody>
+          <a:bodyPr rtlCol="0" anchor="ctr" wrap="square" lIns="54864" rIns="54864" tIns="27432" bIns="27432"/>
+          <a:lstStyle/>
+          <a:p>
+            <a:pPr algn="ctr"/>
+            <a:r>
+              <a:rPr sz="900" b="0">
+                <a:solidFill>
+                  <a:srgbClr val="1F4E79"/>
+                </a:solidFill>
+                <a:latin typeface="Segoe UI"/>
+              </a:rPr>
+              <a:t>vector DB → markdown + SQLite</a:t>
+            </a:r>
+          </a:p>
+        </p:txBody>
+      </p:sp>
+      <p:sp>
+        <p:nvSpPr>
+          <p:cNvPr id="38" name="Rounded Rectangle 37"/>
+          <p:cNvSpPr/>
+          <p:nvPr/>
+        </p:nvSpPr>
+        <p:spPr>
+          <a:xfrm>
+            <a:off x="8558784" y="3017520"/>
+            <a:ext cx="3072384" cy="274320"/>
+          </a:xfrm>
+          <a:prstGeom prst="roundRect">
+            <a:avLst>
+              <a:gd name="adj" fmla="val 10000"/>
+            </a:avLst>
+          </a:prstGeom>
+          <a:solidFill>
+            <a:srgbClr val="FFFFFF"/>
+          </a:solidFill>
+          <a:ln w="12700">
+            <a:solidFill>
+              <a:srgbClr val="1F4E79"/>
+            </a:solidFill>
+          </a:ln>
+          <a:effectLst/>
+        </p:spPr>
+        <p:style>
+          <a:lnRef idx="1">
+            <a:schemeClr val="accent1"/>
+          </a:lnRef>
+          <a:fillRef idx="3">
+            <a:schemeClr val="accent1"/>
+          </a:fillRef>
+          <a:effectRef idx="2">
+            <a:schemeClr val="accent1"/>
+          </a:effectRef>
+          <a:fontRef idx="minor">
+            <a:schemeClr val="lt1"/>
+          </a:fontRef>
+        </p:style>
+        <p:txBody>
+          <a:bodyPr rtlCol="0" anchor="ctr" wrap="square" lIns="54864" rIns="54864" tIns="27432" bIns="27432"/>
+          <a:lstStyle/>
+          <a:p>
+            <a:pPr algn="ctr"/>
+            <a:r>
+              <a:rPr sz="900" b="0">
+                <a:solidFill>
+                  <a:srgbClr val="1F4E79"/>
+                </a:solidFill>
+                <a:latin typeface="Segoe UI"/>
+              </a:rPr>
+              <a:t>opaque rows → git diff</a:t>
+            </a:r>
+          </a:p>
+        </p:txBody>
+      </p:sp>
+      <p:sp>
+        <p:nvSpPr>
+          <p:cNvPr id="39" name="Rounded Rectangle 38"/>
+          <p:cNvSpPr/>
+          <p:nvPr/>
+        </p:nvSpPr>
+        <p:spPr>
+          <a:xfrm>
+            <a:off x="8558784" y="3364992"/>
+            <a:ext cx="3072384" cy="274320"/>
+          </a:xfrm>
+          <a:prstGeom prst="roundRect">
+            <a:avLst>
+              <a:gd name="adj" fmla="val 10000"/>
+            </a:avLst>
+          </a:prstGeom>
+          <a:solidFill>
+            <a:srgbClr val="FFFFFF"/>
+          </a:solidFill>
+          <a:ln w="12700">
+            <a:solidFill>
+              <a:srgbClr val="1F4E79"/>
+            </a:solidFill>
+          </a:ln>
+          <a:effectLst/>
+        </p:spPr>
+        <p:style>
+          <a:lnRef idx="1">
+            <a:schemeClr val="accent1"/>
+          </a:lnRef>
+          <a:fillRef idx="3">
+            <a:schemeClr val="accent1"/>
+          </a:fillRef>
+          <a:effectRef idx="2">
+            <a:schemeClr val="accent1"/>
+          </a:effectRef>
+          <a:fontRef idx="minor">
+            <a:schemeClr val="lt1"/>
+          </a:fontRef>
+        </p:style>
+        <p:txBody>
+          <a:bodyPr rtlCol="0" anchor="ctr" wrap="square" lIns="54864" rIns="54864" tIns="27432" bIns="27432"/>
+          <a:lstStyle/>
+          <a:p>
+            <a:pPr algn="ctr"/>
+            <a:r>
+              <a:rPr sz="900" b="0">
+                <a:solidFill>
+                  <a:srgbClr val="1F4E79"/>
+                </a:solidFill>
+                <a:latin typeface="Segoe UI"/>
+              </a:rPr>
+              <a:t>dump/restore → copy a folder</a:t>
+            </a:r>
+          </a:p>
+        </p:txBody>
+      </p:sp>
+      <p:sp>
+        <p:nvSpPr>
+          <p:cNvPr id="40" name="Rounded Rectangle 39"/>
+          <p:cNvSpPr/>
+          <p:nvPr/>
+        </p:nvSpPr>
+        <p:spPr>
+          <a:xfrm>
+            <a:off x="8558784" y="3712464"/>
+            <a:ext cx="3072384" cy="274320"/>
+          </a:xfrm>
+          <a:prstGeom prst="roundRect">
+            <a:avLst>
+              <a:gd name="adj" fmla="val 10000"/>
+            </a:avLst>
+          </a:prstGeom>
+          <a:solidFill>
+            <a:srgbClr val="FFFFFF"/>
+          </a:solidFill>
+          <a:ln w="12700">
+            <a:solidFill>
+              <a:srgbClr val="1F4E79"/>
+            </a:solidFill>
+          </a:ln>
+          <a:effectLst/>
+        </p:spPr>
+        <p:style>
+          <a:lnRef idx="1">
+            <a:schemeClr val="accent1"/>
+          </a:lnRef>
+          <a:fillRef idx="3">
+            <a:schemeClr val="accent1"/>
+          </a:fillRef>
+          <a:effectRef idx="2">
+            <a:schemeClr val="accent1"/>
+          </a:effectRef>
+          <a:fontRef idx="minor">
+            <a:schemeClr val="lt1"/>
+          </a:fontRef>
+        </p:style>
+        <p:txBody>
+          <a:bodyPr rtlCol="0" anchor="ctr" wrap="square" lIns="54864" rIns="54864" tIns="27432" bIns="27432"/>
+          <a:lstStyle/>
+          <a:p>
+            <a:pPr algn="ctr"/>
+            <a:r>
+              <a:rPr sz="900" b="0">
+                <a:solidFill>
+                  <a:srgbClr val="1F4E79"/>
+                </a:solidFill>
+                <a:latin typeface="Segoe UI"/>
+              </a:rPr>
+              <a:t>vendor tool-calling → any model</a:t>
+            </a:r>
+          </a:p>
+        </p:txBody>
+      </p:sp>
+      <p:sp>
+        <p:nvSpPr>
+          <p:cNvPr id="41" name="Rounded Rectangle 40"/>
+          <p:cNvSpPr/>
+          <p:nvPr/>
+        </p:nvSpPr>
+        <p:spPr>
+          <a:xfrm>
+            <a:off x="8558784" y="4059936"/>
+            <a:ext cx="3072384" cy="274320"/>
+          </a:xfrm>
+          <a:prstGeom prst="roundRect">
+            <a:avLst>
+              <a:gd name="adj" fmla="val 10000"/>
+            </a:avLst>
+          </a:prstGeom>
+          <a:solidFill>
+            <a:srgbClr val="FFFFFF"/>
+          </a:solidFill>
+          <a:ln w="12700">
+            <a:solidFill>
+              <a:srgbClr val="1F4E79"/>
+            </a:solidFill>
+          </a:ln>
+          <a:effectLst/>
+        </p:spPr>
+        <p:style>
+          <a:lnRef idx="1">
+            <a:schemeClr val="accent1"/>
+          </a:lnRef>
+          <a:fillRef idx="3">
+            <a:schemeClr val="accent1"/>
+          </a:fillRef>
+          <a:effectRef idx="2">
+            <a:schemeClr val="accent1"/>
+          </a:effectRef>
+          <a:fontRef idx="minor">
+            <a:schemeClr val="lt1"/>
+          </a:fontRef>
+        </p:style>
+        <p:txBody>
+          <a:bodyPr rtlCol="0" anchor="ctr" wrap="square" lIns="54864" rIns="54864" tIns="27432" bIns="27432"/>
+          <a:lstStyle/>
+          <a:p>
+            <a:pPr algn="ctr"/>
+            <a:r>
+              <a:rPr sz="900" b="0">
+                <a:solidFill>
+                  <a:srgbClr val="1F4E79"/>
+                </a:solidFill>
+                <a:latin typeface="Segoe UI"/>
+              </a:rPr>
+              <a:t>telemetry on → none in the lock</a:t>
+            </a:r>
+          </a:p>
+        </p:txBody>
+      </p:sp>
+      <p:sp>
+        <p:nvSpPr>
+          <p:cNvPr id="42" name="TextBox 41"/>
           <p:cNvSpPr txBox="1"/>
           <p:nvPr/>
         </p:nvSpPr>
         <p:spPr>
           <a:xfrm>
-            <a:off x="6355080" y="2322576"/>
-            <a:ext cx="2299716" cy="189865"/>
+            <a:off x="566928" y="4517136"/>
+            <a:ext cx="5486400" cy="237744"/>
           </a:xfrm>
           <a:prstGeom prst="rect">
             <a:avLst/>
@@ -8168,193 +11763,39 @@
               </a:spcAft>
             </a:pPr>
             <a:r>
-              <a:rPr sz="1150" b="1">
-                <a:solidFill>
-                  <a:srgbClr val="1F4E79"/>
-                </a:solidFill>
-                <a:latin typeface="Segoe UI"/>
-              </a:rPr>
-              <a:t>Against the usual agent stack</a:t>
-            </a:r>
-          </a:p>
-        </p:txBody>
-      </p:sp>
-      <p:sp>
-        <p:nvSpPr>
-          <p:cNvPr id="38" name="TextBox 37"/>
-          <p:cNvSpPr txBox="1"/>
-          <p:nvPr/>
-        </p:nvSpPr>
-        <p:spPr>
-          <a:xfrm>
-            <a:off x="6355080" y="2603881"/>
-            <a:ext cx="2299716" cy="726440"/>
-          </a:xfrm>
-          <a:prstGeom prst="rect">
-            <a:avLst/>
-          </a:prstGeom>
-          <a:noFill/>
-        </p:spPr>
-        <p:txBody>
-          <a:bodyPr wrap="square" anchor="t" lIns="0" rIns="0" tIns="0" bIns="0">
-            <a:spAutoFit/>
-          </a:bodyPr>
-          <a:lstStyle/>
-          <a:p>
-            <a:pPr algn="l">
-              <a:spcAft>
-                <a:spcPts val="0"/>
-              </a:spcAft>
-            </a:pPr>
-            <a:r>
-              <a:rPr sz="880" b="0">
+              <a:rPr sz="1300" b="1">
                 <a:solidFill>
                   <a:srgbClr val="1A1A1A"/>
                 </a:solidFill>
                 <a:latin typeface="Segoe UI"/>
               </a:rPr>
-              <a:t>·  A vector database to install, tune and back up → markdown plus one SQLite in one folder; cat, grep and an editor instead of decoding embeddings; git-diffable instead of opaque rows.</a:t>
-            </a:r>
-          </a:p>
-        </p:txBody>
-      </p:sp>
-      <p:sp>
-        <p:nvSpPr>
-          <p:cNvPr id="39" name="TextBox 38"/>
-          <p:cNvSpPr txBox="1"/>
-          <p:nvPr/>
-        </p:nvSpPr>
-        <p:spPr>
-          <a:xfrm>
-            <a:off x="6355080" y="3376041"/>
-            <a:ext cx="2299716" cy="435864"/>
-          </a:xfrm>
-          <a:prstGeom prst="rect">
-            <a:avLst/>
-          </a:prstGeom>
-          <a:noFill/>
-        </p:spPr>
-        <p:txBody>
-          <a:bodyPr wrap="square" anchor="t" lIns="0" rIns="0" tIns="0" bIns="0">
-            <a:spAutoFit/>
-          </a:bodyPr>
-          <a:lstStyle/>
-          <a:p>
-            <a:pPr algn="l">
-              <a:spcAft>
-                <a:spcPts val="0"/>
-              </a:spcAft>
-            </a:pPr>
-            <a:r>
-              <a:rPr sz="880" b="0">
-                <a:solidFill>
-                  <a:srgbClr val="1A1A1A"/>
-                </a:solidFill>
-                <a:latin typeface="Segoe UI"/>
-              </a:rPr>
-              <a:t>·  Dump-and-restore to move a machine → copy a folder. Hope the rows are gone → delete the folder.</a:t>
-            </a:r>
-          </a:p>
-        </p:txBody>
-      </p:sp>
-      <p:sp>
-        <p:nvSpPr>
-          <p:cNvPr id="40" name="TextBox 39"/>
-          <p:cNvSpPr txBox="1"/>
-          <p:nvPr/>
-        </p:nvSpPr>
-        <p:spPr>
-          <a:xfrm>
-            <a:off x="6355080" y="3857625"/>
-            <a:ext cx="2299716" cy="726440"/>
-          </a:xfrm>
-          <a:prstGeom prst="rect">
-            <a:avLst/>
-          </a:prstGeom>
-          <a:noFill/>
-        </p:spPr>
-        <p:txBody>
-          <a:bodyPr wrap="square" anchor="t" lIns="0" rIns="0" tIns="0" bIns="0">
-            <a:spAutoFit/>
-          </a:bodyPr>
-          <a:lstStyle/>
-          <a:p>
-            <a:pPr algn="l">
-              <a:spcAft>
-                <a:spcPts val="0"/>
-              </a:spcAft>
-            </a:pPr>
-            <a:r>
-              <a:rPr sz="880" b="0">
-                <a:solidFill>
-                  <a:srgbClr val="1A1A1A"/>
-                </a:solidFill>
-                <a:latin typeface="Segoe UI"/>
-              </a:rPr>
-              <a:t>·  Vendor function-calling required → plain-text reasoning any model drives. The vendor's endpoint by default → the endpoint you set. Telemetry usually on → none, and no telemetry SDK in the lock.</a:t>
-            </a:r>
-          </a:p>
-        </p:txBody>
-      </p:sp>
-      <p:sp>
-        <p:nvSpPr>
-          <p:cNvPr id="41" name="TextBox 40"/>
-          <p:cNvSpPr txBox="1"/>
-          <p:nvPr/>
-        </p:nvSpPr>
-        <p:spPr>
-          <a:xfrm>
-            <a:off x="6355080" y="4629785"/>
-            <a:ext cx="2299716" cy="871728"/>
-          </a:xfrm>
-          <a:prstGeom prst="rect">
-            <a:avLst/>
-          </a:prstGeom>
-          <a:noFill/>
-        </p:spPr>
-        <p:txBody>
-          <a:bodyPr wrap="square" anchor="t" lIns="0" rIns="0" tIns="0" bIns="0">
-            <a:spAutoFit/>
-          </a:bodyPr>
-          <a:lstStyle/>
-          <a:p>
-            <a:pPr algn="l">
-              <a:spcAft>
-                <a:spcPts val="0"/>
-              </a:spcAft>
-            </a:pPr>
-            <a:r>
-              <a:rPr sz="880" b="0">
-                <a:solidFill>
-                  <a:srgbClr val="1A1A1A"/>
-                </a:solidFill>
-                <a:latin typeface="Segoe UI"/>
-              </a:rPr>
-              <a:t>·  The comparison a budget faces: a per-seat assistant prices per developer per month and sends the source to its vendor; this prices as hardware you own. Cost is the easy half — output quality is the argument worth having.</a:t>
-            </a:r>
-          </a:p>
-        </p:txBody>
-      </p:sp>
-      <p:sp>
-        <p:nvSpPr>
-          <p:cNvPr id="42" name="Rounded Rectangle 41"/>
+              <a:t>Decisions we need from you</a:t>
+            </a:r>
+          </a:p>
+        </p:txBody>
+      </p:sp>
+      <p:sp>
+        <p:nvSpPr>
+          <p:cNvPr id="43" name="Rounded Rectangle 42"/>
           <p:cNvSpPr/>
           <p:nvPr/>
         </p:nvSpPr>
         <p:spPr>
           <a:xfrm>
-            <a:off x="9002268" y="2157984"/>
-            <a:ext cx="2628900" cy="4134993"/>
+            <a:off x="566928" y="4828032"/>
+            <a:ext cx="2139696" cy="786384"/>
           </a:xfrm>
           <a:prstGeom prst="roundRect">
-            <a:avLst/>
+            <a:avLst>
+              <a:gd name="adj" fmla="val 10000"/>
+            </a:avLst>
           </a:prstGeom>
           <a:solidFill>
-            <a:srgbClr val="EAE1F0"/>
+            <a:srgbClr val="FFFFFF"/>
           </a:solidFill>
           <a:ln w="12700">
             <a:solidFill>
-              <a:srgbClr val="5B3A6E"/>
+              <a:srgbClr val="8C2F2F"/>
             </a:solidFill>
           </a:ln>
           <a:effectLst/>
@@ -8374,243 +11815,306 @@
           </a:fontRef>
         </p:style>
         <p:txBody>
-          <a:bodyPr rtlCol="0" anchor="ctr"/>
+          <a:bodyPr rtlCol="0" anchor="ctr" wrap="square" lIns="54864" rIns="54864" tIns="27432" bIns="27432"/>
           <a:lstStyle/>
           <a:p>
             <a:pPr algn="ctr"/>
-          </a:p>
-        </p:txBody>
-      </p:sp>
-      <p:sp>
-        <p:nvSpPr>
-          <p:cNvPr id="43" name="TextBox 42"/>
-          <p:cNvSpPr txBox="1"/>
-          <p:nvPr/>
-        </p:nvSpPr>
-        <p:spPr>
-          <a:xfrm>
-            <a:off x="9166860" y="2322576"/>
-            <a:ext cx="2299716" cy="189865"/>
-          </a:xfrm>
-          <a:prstGeom prst="rect">
-            <a:avLst/>
-          </a:prstGeom>
-          <a:noFill/>
-        </p:spPr>
-        <p:txBody>
-          <a:bodyPr wrap="square" anchor="t" lIns="0" rIns="0" tIns="0" bIns="0">
-            <a:spAutoFit/>
-          </a:bodyPr>
-          <a:lstStyle/>
-          <a:p>
-            <a:pPr algn="l">
-              <a:spcAft>
-                <a:spcPts val="0"/>
-              </a:spcAft>
-            </a:pPr>
-            <a:r>
-              <a:rPr sz="1150" b="1">
-                <a:solidFill>
-                  <a:srgbClr val="5B3A6E"/>
-                </a:solidFill>
-                <a:latin typeface="Segoe UI"/>
-              </a:rPr>
-              <a:t>Decisions we need</a:t>
-            </a:r>
-          </a:p>
-        </p:txBody>
-      </p:sp>
-      <p:sp>
-        <p:nvSpPr>
-          <p:cNvPr id="44" name="TextBox 43"/>
-          <p:cNvSpPr txBox="1"/>
-          <p:nvPr/>
-        </p:nvSpPr>
-        <p:spPr>
-          <a:xfrm>
-            <a:off x="9166860" y="2603881"/>
-            <a:ext cx="2299716" cy="581152"/>
-          </a:xfrm>
-          <a:prstGeom prst="rect">
-            <a:avLst/>
-          </a:prstGeom>
-          <a:noFill/>
-        </p:spPr>
-        <p:txBody>
-          <a:bodyPr wrap="square" anchor="t" lIns="0" rIns="0" tIns="0" bIns="0">
-            <a:spAutoFit/>
-          </a:bodyPr>
-          <a:lstStyle/>
-          <a:p>
-            <a:pPr algn="l">
-              <a:spcAft>
-                <a:spcPts val="0"/>
-              </a:spcAft>
-            </a:pPr>
-            <a:r>
-              <a:rPr sz="880" b="0">
+            <a:r>
+              <a:rPr sz="1100" b="1">
+                <a:solidFill>
+                  <a:srgbClr val="8C2F2F"/>
+                </a:solidFill>
+                <a:latin typeface="Segoe UI"/>
+              </a:rPr>
+              <a:t>Prove the output</a:t>
+            </a:r>
+          </a:p>
+          <a:p>
+            <a:pPr algn="ctr"/>
+            <a:r>
+              <a:rPr sz="850" b="0">
                 <a:solidFill>
                   <a:srgbClr val="1A1A1A"/>
                 </a:solidFill>
                 <a:latin typeface="Segoe UI"/>
               </a:rPr>
-              <a:t>·  PROVE THE OUTPUT — fund the harness above. Nothing else settles the buy question, and it is days of work, not a quarter.</a:t>
-            </a:r>
-          </a:p>
-        </p:txBody>
-      </p:sp>
-      <p:sp>
-        <p:nvSpPr>
-          <p:cNvPr id="45" name="TextBox 44"/>
-          <p:cNvSpPr txBox="1"/>
-          <p:nvPr/>
-        </p:nvSpPr>
-        <p:spPr>
-          <a:xfrm>
-            <a:off x="9166860" y="3230753"/>
-            <a:ext cx="2299716" cy="581152"/>
-          </a:xfrm>
-          <a:prstGeom prst="rect">
-            <a:avLst/>
-          </a:prstGeom>
-          <a:noFill/>
-        </p:spPr>
-        <p:txBody>
-          <a:bodyPr wrap="square" anchor="t" lIns="0" rIns="0" tIns="0" bIns="0">
-            <a:spAutoFit/>
-          </a:bodyPr>
-          <a:lstStyle/>
-          <a:p>
-            <a:pPr algn="l">
-              <a:spcAft>
-                <a:spcPts val="0"/>
-              </a:spcAft>
-            </a:pPr>
-            <a:r>
-              <a:rPr sz="880" b="0">
+              <a:t>fund the harness above</a:t>
+            </a:r>
+          </a:p>
+        </p:txBody>
+      </p:sp>
+      <p:sp>
+        <p:nvSpPr>
+          <p:cNvPr id="44" name="Rounded Rectangle 43"/>
+          <p:cNvSpPr/>
+          <p:nvPr/>
+        </p:nvSpPr>
+        <p:spPr>
+          <a:xfrm>
+            <a:off x="2807208" y="4828032"/>
+            <a:ext cx="2139696" cy="786384"/>
+          </a:xfrm>
+          <a:prstGeom prst="roundRect">
+            <a:avLst>
+              <a:gd name="adj" fmla="val 10000"/>
+            </a:avLst>
+          </a:prstGeom>
+          <a:solidFill>
+            <a:srgbClr val="FFFFFF"/>
+          </a:solidFill>
+          <a:ln w="12700">
+            <a:solidFill>
+              <a:srgbClr val="8C2F2F"/>
+            </a:solidFill>
+          </a:ln>
+          <a:effectLst/>
+        </p:spPr>
+        <p:style>
+          <a:lnRef idx="1">
+            <a:schemeClr val="accent1"/>
+          </a:lnRef>
+          <a:fillRef idx="3">
+            <a:schemeClr val="accent1"/>
+          </a:fillRef>
+          <a:effectRef idx="2">
+            <a:schemeClr val="accent1"/>
+          </a:effectRef>
+          <a:fontRef idx="minor">
+            <a:schemeClr val="lt1"/>
+          </a:fontRef>
+        </p:style>
+        <p:txBody>
+          <a:bodyPr rtlCol="0" anchor="ctr" wrap="square" lIns="54864" rIns="54864" tIns="27432" bIns="27432"/>
+          <a:lstStyle/>
+          <a:p>
+            <a:pPr algn="ctr"/>
+            <a:r>
+              <a:rPr sz="1100" b="1">
+                <a:solidFill>
+                  <a:srgbClr val="8C2F2F"/>
+                </a:solidFill>
+                <a:latin typeface="Segoe UI"/>
+              </a:rPr>
+              <a:t>Name an owner</a:t>
+            </a:r>
+          </a:p>
+          <a:p>
+            <a:pPr algn="ctr"/>
+            <a:r>
+              <a:rPr sz="850" b="0">
                 <a:solidFill>
                   <a:srgbClr val="1A1A1A"/>
                 </a:solidFill>
                 <a:latin typeface="Segoe UI"/>
               </a:rPr>
-              <a:t>·  NAME AN OWNER — one author has written this platform. A second maintainer and a support rota before it is depended on company-wide.</a:t>
-            </a:r>
-          </a:p>
-        </p:txBody>
-      </p:sp>
-      <p:sp>
-        <p:nvSpPr>
-          <p:cNvPr id="46" name="TextBox 45"/>
-          <p:cNvSpPr txBox="1"/>
-          <p:nvPr/>
-        </p:nvSpPr>
-        <p:spPr>
-          <a:xfrm>
-            <a:off x="9166860" y="3857625"/>
-            <a:ext cx="2299716" cy="435864"/>
-          </a:xfrm>
-          <a:prstGeom prst="rect">
-            <a:avLst/>
-          </a:prstGeom>
-          <a:noFill/>
-        </p:spPr>
-        <p:txBody>
-          <a:bodyPr wrap="square" anchor="t" lIns="0" rIns="0" tIns="0" bIns="0">
-            <a:spAutoFit/>
-          </a:bodyPr>
-          <a:lstStyle/>
-          <a:p>
-            <a:pPr algn="l">
-              <a:spcAft>
-                <a:spcPts val="0"/>
-              </a:spcAft>
-            </a:pPr>
-            <a:r>
-              <a:rPr sz="880" b="0">
+              <a:t>one author is the bus factor</a:t>
+            </a:r>
+          </a:p>
+        </p:txBody>
+      </p:sp>
+      <p:sp>
+        <p:nvSpPr>
+          <p:cNvPr id="45" name="Rounded Rectangle 44"/>
+          <p:cNvSpPr/>
+          <p:nvPr/>
+        </p:nvSpPr>
+        <p:spPr>
+          <a:xfrm>
+            <a:off x="5047488" y="4828032"/>
+            <a:ext cx="2139696" cy="786384"/>
+          </a:xfrm>
+          <a:prstGeom prst="roundRect">
+            <a:avLst>
+              <a:gd name="adj" fmla="val 10000"/>
+            </a:avLst>
+          </a:prstGeom>
+          <a:solidFill>
+            <a:srgbClr val="FFFFFF"/>
+          </a:solidFill>
+          <a:ln w="12700">
+            <a:solidFill>
+              <a:srgbClr val="1F4E79"/>
+            </a:solidFill>
+          </a:ln>
+          <a:effectLst/>
+        </p:spPr>
+        <p:style>
+          <a:lnRef idx="1">
+            <a:schemeClr val="accent1"/>
+          </a:lnRef>
+          <a:fillRef idx="3">
+            <a:schemeClr val="accent1"/>
+          </a:fillRef>
+          <a:effectRef idx="2">
+            <a:schemeClr val="accent1"/>
+          </a:effectRef>
+          <a:fontRef idx="minor">
+            <a:schemeClr val="lt1"/>
+          </a:fontRef>
+        </p:style>
+        <p:txBody>
+          <a:bodyPr rtlCol="0" anchor="ctr" wrap="square" lIns="54864" rIns="54864" tIns="27432" bIns="27432"/>
+          <a:lstStyle/>
+          <a:p>
+            <a:pPr algn="ctr"/>
+            <a:r>
+              <a:rPr sz="1100" b="1">
+                <a:solidFill>
+                  <a:srgbClr val="1F4E79"/>
+                </a:solidFill>
+                <a:latin typeface="Segoe UI"/>
+              </a:rPr>
+              <a:t>Admin host</a:t>
+            </a:r>
+          </a:p>
+          <a:p>
+            <a:pPr algn="ctr"/>
+            <a:r>
+              <a:rPr sz="850" b="0">
                 <a:solidFill>
                   <a:srgbClr val="1A1A1A"/>
                 </a:solidFill>
                 <a:latin typeface="Segoe UI"/>
               </a:rPr>
-              <a:t>·  WHERE THE ADMIN LIVES — one host holds the merged company memory. Which network, and who owns it?</a:t>
-            </a:r>
-          </a:p>
-        </p:txBody>
-      </p:sp>
-      <p:sp>
-        <p:nvSpPr>
-          <p:cNvPr id="47" name="TextBox 46"/>
-          <p:cNvSpPr txBox="1"/>
-          <p:nvPr/>
-        </p:nvSpPr>
-        <p:spPr>
-          <a:xfrm>
-            <a:off x="9166860" y="4339209"/>
-            <a:ext cx="2299716" cy="726440"/>
-          </a:xfrm>
-          <a:prstGeom prst="rect">
-            <a:avLst/>
-          </a:prstGeom>
-          <a:noFill/>
-        </p:spPr>
-        <p:txBody>
-          <a:bodyPr wrap="square" anchor="t" lIns="0" rIns="0" tIns="0" bIns="0">
-            <a:spAutoFit/>
-          </a:bodyPr>
-          <a:lstStyle/>
-          <a:p>
-            <a:pPr algn="l">
-              <a:spcAft>
-                <a:spcPts val="0"/>
-              </a:spcAft>
-            </a:pPr>
-            <a:r>
-              <a:rPr sz="880" b="0">
+              <a:t>which network holds company memory</a:t>
+            </a:r>
+          </a:p>
+        </p:txBody>
+      </p:sp>
+      <p:sp>
+        <p:nvSpPr>
+          <p:cNvPr id="46" name="Rounded Rectangle 45"/>
+          <p:cNvSpPr/>
+          <p:nvPr/>
+        </p:nvSpPr>
+        <p:spPr>
+          <a:xfrm>
+            <a:off x="7287768" y="4828032"/>
+            <a:ext cx="2139696" cy="786384"/>
+          </a:xfrm>
+          <a:prstGeom prst="roundRect">
+            <a:avLst>
+              <a:gd name="adj" fmla="val 10000"/>
+            </a:avLst>
+          </a:prstGeom>
+          <a:solidFill>
+            <a:srgbClr val="FFFFFF"/>
+          </a:solidFill>
+          <a:ln w="12700">
+            <a:solidFill>
+              <a:srgbClr val="1F4E79"/>
+            </a:solidFill>
+          </a:ln>
+          <a:effectLst/>
+        </p:spPr>
+        <p:style>
+          <a:lnRef idx="1">
+            <a:schemeClr val="accent1"/>
+          </a:lnRef>
+          <a:fillRef idx="3">
+            <a:schemeClr val="accent1"/>
+          </a:fillRef>
+          <a:effectRef idx="2">
+            <a:schemeClr val="accent1"/>
+          </a:effectRef>
+          <a:fontRef idx="minor">
+            <a:schemeClr val="lt1"/>
+          </a:fontRef>
+        </p:style>
+        <p:txBody>
+          <a:bodyPr rtlCol="0" anchor="ctr" wrap="square" lIns="54864" rIns="54864" tIns="27432" bIns="27432"/>
+          <a:lstStyle/>
+          <a:p>
+            <a:pPr algn="ctr"/>
+            <a:r>
+              <a:rPr sz="1100" b="1">
+                <a:solidFill>
+                  <a:srgbClr val="1F4E79"/>
+                </a:solidFill>
+                <a:latin typeface="Segoe UI"/>
+              </a:rPr>
+              <a:t>Boundary</a:t>
+            </a:r>
+          </a:p>
+          <a:p>
+            <a:pPr algn="ctr"/>
+            <a:r>
+              <a:rPr sz="850" b="0">
                 <a:solidFill>
                   <a:srgbClr val="1A1A1A"/>
                 </a:solidFill>
                 <a:latin typeface="Segoe UI"/>
               </a:rPr>
-              <a:t>·  BOUNDARY AND IDENTITY — three transports are held in-process; the shell still needs an OS firewall rule, and per-user identity is a decision, not a build.</a:t>
-            </a:r>
-          </a:p>
-        </p:txBody>
-      </p:sp>
-      <p:sp>
-        <p:nvSpPr>
-          <p:cNvPr id="48" name="TextBox 47"/>
-          <p:cNvSpPr txBox="1"/>
-          <p:nvPr/>
-        </p:nvSpPr>
-        <p:spPr>
-          <a:xfrm>
-            <a:off x="9166860" y="5111369"/>
-            <a:ext cx="2299716" cy="435864"/>
-          </a:xfrm>
-          <a:prstGeom prst="rect">
-            <a:avLst/>
-          </a:prstGeom>
-          <a:noFill/>
-        </p:spPr>
-        <p:txBody>
-          <a:bodyPr wrap="square" anchor="t" lIns="0" rIns="0" tIns="0" bIns="0">
-            <a:spAutoFit/>
-          </a:bodyPr>
-          <a:lstStyle/>
-          <a:p>
-            <a:pPr algn="l">
-              <a:spcAft>
-                <a:spcPts val="0"/>
-              </a:spcAft>
-            </a:pPr>
-            <a:r>
-              <a:rPr sz="880" b="0">
+              <a:t>OS firewall rule + per-user identity</a:t>
+            </a:r>
+          </a:p>
+        </p:txBody>
+      </p:sp>
+      <p:sp>
+        <p:nvSpPr>
+          <p:cNvPr id="47" name="Rounded Rectangle 46"/>
+          <p:cNvSpPr/>
+          <p:nvPr/>
+        </p:nvSpPr>
+        <p:spPr>
+          <a:xfrm>
+            <a:off x="9528048" y="4828032"/>
+            <a:ext cx="2139696" cy="786384"/>
+          </a:xfrm>
+          <a:prstGeom prst="roundRect">
+            <a:avLst>
+              <a:gd name="adj" fmla="val 10000"/>
+            </a:avLst>
+          </a:prstGeom>
+          <a:solidFill>
+            <a:srgbClr val="FFFFFF"/>
+          </a:solidFill>
+          <a:ln w="12700">
+            <a:solidFill>
+              <a:srgbClr val="1F4E79"/>
+            </a:solidFill>
+          </a:ln>
+          <a:effectLst/>
+        </p:spPr>
+        <p:style>
+          <a:lnRef idx="1">
+            <a:schemeClr val="accent1"/>
+          </a:lnRef>
+          <a:fillRef idx="3">
+            <a:schemeClr val="accent1"/>
+          </a:fillRef>
+          <a:effectRef idx="2">
+            <a:schemeClr val="accent1"/>
+          </a:effectRef>
+          <a:fontRef idx="minor">
+            <a:schemeClr val="lt1"/>
+          </a:fontRef>
+        </p:style>
+        <p:txBody>
+          <a:bodyPr rtlCol="0" anchor="ctr" wrap="square" lIns="54864" rIns="54864" tIns="27432" bIns="27432"/>
+          <a:lstStyle/>
+          <a:p>
+            <a:pPr algn="ctr"/>
+            <a:r>
+              <a:rPr sz="1100" b="1">
+                <a:solidFill>
+                  <a:srgbClr val="1F4E79"/>
+                </a:solidFill>
+                <a:latin typeface="Segoe UI"/>
+              </a:rPr>
+              <a:t>Scanner profile</a:t>
+            </a:r>
+          </a:p>
+          <a:p>
+            <a:pPr algn="ctr"/>
+            <a:r>
+              <a:rPr sz="850" b="0">
                 <a:solidFill>
                   <a:srgbClr val="1A1A1A"/>
                 </a:solidFill>
                 <a:latin typeface="Segoe UI"/>
               </a:rPr>
-              <a:t>·  SCANNER PROFILE — the corporate server runs analysers ours does not; confirm the profile so both agree.</a:t>
+              <a:t>make ours and the corporate one agree</a:t>
             </a:r>
           </a:p>
         </p:txBody>
@@ -8941,4 +12445,324 @@
   </a:objectDefaults>
   <a:extraClrSchemeLst/>
 </a:theme>
+</file>
+
+<file path=ppt/theme/theme2.xml><?xml version="1.0" encoding="utf-8"?>
+<a:theme xmlns:a="http://schemas.openxmlformats.org/drawingml/2006/main" name="Office Theme">
+  <a:themeElements>
+    <a:clrScheme name="Office">
+      <a:dk1>
+        <a:sysClr val="windowText" lastClr="000000"/>
+      </a:dk1>
+      <a:lt1>
+        <a:sysClr val="window" lastClr="FFFFFF"/>
+      </a:lt1>
+      <a:dk2>
+        <a:srgbClr val="1F497D"/>
+      </a:dk2>
+      <a:lt2>
+        <a:srgbClr val="EEECE1"/>
+      </a:lt2>
+      <a:accent1>
+        <a:srgbClr val="4F81BD"/>
+      </a:accent1>
+      <a:accent2>
+        <a:srgbClr val="C0504D"/>
+      </a:accent2>
+      <a:accent3>
+        <a:srgbClr val="9BBB59"/>
+      </a:accent3>
+      <a:accent4>
+        <a:srgbClr val="8064A2"/>
+      </a:accent4>
+      <a:accent5>
+        <a:srgbClr val="4BACC6"/>
+      </a:accent5>
+      <a:accent6>
+        <a:srgbClr val="F79646"/>
+      </a:accent6>
+      <a:hlink>
+        <a:srgbClr val="0000FF"/>
+      </a:hlink>
+      <a:folHlink>
+        <a:srgbClr val="800080"/>
+      </a:folHlink>
+    </a:clrScheme>
+    <a:fontScheme name="Office">
+      <a:majorFont>
+        <a:latin typeface="Calibri"/>
+        <a:ea typeface=""/>
+        <a:cs typeface=""/>
+        <a:font script="Jpan" typeface="ＭＳ Ｐゴシック"/>
+        <a:font script="Hang" typeface="맑은 고딕"/>
+        <a:font script="Hans" typeface="宋体"/>
+        <a:font script="Hant" typeface="新細明體"/>
+        <a:font script="Arab" typeface="Times New Roman"/>
+        <a:font script="Hebr" typeface="Times New Roman"/>
+        <a:font script="Thai" typeface="Angsana New"/>
+        <a:font script="Ethi" typeface="Nyala"/>
+        <a:font script="Beng" typeface="Vrinda"/>
+        <a:font script="Gujr" typeface="Shruti"/>
+        <a:font script="Khmr" typeface="MoolBoran"/>
+        <a:font script="Knda" typeface="Tunga"/>
+        <a:font script="Guru" typeface="Raavi"/>
+        <a:font script="Cans" typeface="Euphemia"/>
+        <a:font script="Cher" typeface="Plantagenet Cherokee"/>
+        <a:font script="Yiii" typeface="Microsoft Yi Baiti"/>
+        <a:font script="Tibt" typeface="Microsoft Himalaya"/>
+        <a:font script="Thaa" typeface="MV Boli"/>
+        <a:font script="Deva" typeface="Mangal"/>
+        <a:font script="Telu" typeface="Gautami"/>
+        <a:font script="Taml" typeface="Latha"/>
+        <a:font script="Syrc" typeface="Estrangelo Edessa"/>
+        <a:font script="Orya" typeface="Kalinga"/>
+        <a:font script="Mlym" typeface="Kartika"/>
+        <a:font script="Laoo" typeface="DokChampa"/>
+        <a:font script="Sinh" typeface="Iskoola Pota"/>
+        <a:font script="Mong" typeface="Mongolian Baiti"/>
+        <a:font script="Viet" typeface="Times New Roman"/>
+        <a:font script="Uigh" typeface="Microsoft Uighur"/>
+        <a:font script="Geor" typeface="Sylfaen"/>
+      </a:majorFont>
+      <a:minorFont>
+        <a:latin typeface="Calibri"/>
+        <a:ea typeface=""/>
+        <a:cs typeface=""/>
+        <a:font script="Jpan" typeface="ＭＳ Ｐゴシック"/>
+        <a:font script="Hang" typeface="맑은 고딕"/>
+        <a:font script="Hans" typeface="宋体"/>
+        <a:font script="Hant" typeface="新細明體"/>
+        <a:font script="Arab" typeface="Arial"/>
+        <a:font script="Hebr" typeface="Arial"/>
+        <a:font script="Thai" typeface="Cordia New"/>
+        <a:font script="Ethi" typeface="Nyala"/>
+        <a:font script="Beng" typeface="Vrinda"/>
+        <a:font script="Gujr" typeface="Shruti"/>
+        <a:font script="Khmr" typeface="DaunPenh"/>
+        <a:font script="Knda" typeface="Tunga"/>
+        <a:font script="Guru" typeface="Raavi"/>
+        <a:font script="Cans" typeface="Euphemia"/>
+        <a:font script="Cher" typeface="Plantagenet Cherokee"/>
+        <a:font script="Yiii" typeface="Microsoft Yi Baiti"/>
+        <a:font script="Tibt" typeface="Microsoft Himalaya"/>
+        <a:font script="Thaa" typeface="MV Boli"/>
+        <a:font script="Deva" typeface="Mangal"/>
+        <a:font script="Telu" typeface="Gautami"/>
+        <a:font script="Taml" typeface="Latha"/>
+        <a:font script="Syrc" typeface="Estrangelo Edessa"/>
+        <a:font script="Orya" typeface="Kalinga"/>
+        <a:font script="Mlym" typeface="Kartika"/>
+        <a:font script="Laoo" typeface="DokChampa"/>
+        <a:font script="Sinh" typeface="Iskoola Pota"/>
+        <a:font script="Mong" typeface="Mongolian Baiti"/>
+        <a:font script="Viet" typeface="Arial"/>
+        <a:font script="Uigh" typeface="Microsoft Uighur"/>
+        <a:font script="Geor" typeface="Sylfaen"/>
+      </a:minorFont>
+    </a:fontScheme>
+    <a:fmtScheme name="Office">
+      <a:fillStyleLst>
+        <a:solidFill>
+          <a:schemeClr val="phClr"/>
+        </a:solidFill>
+        <a:gradFill rotWithShape="1">
+          <a:gsLst>
+            <a:gs pos="0">
+              <a:schemeClr val="phClr">
+                <a:tint val="50000"/>
+                <a:satMod val="300000"/>
+              </a:schemeClr>
+            </a:gs>
+            <a:gs pos="35000">
+              <a:schemeClr val="phClr">
+                <a:tint val="37000"/>
+                <a:satMod val="300000"/>
+              </a:schemeClr>
+            </a:gs>
+            <a:gs pos="100000">
+              <a:schemeClr val="phClr">
+                <a:tint val="15000"/>
+                <a:satMod val="350000"/>
+              </a:schemeClr>
+            </a:gs>
+          </a:gsLst>
+          <a:lin ang="16200000" scaled="1"/>
+        </a:gradFill>
+        <a:gradFill rotWithShape="1">
+          <a:gsLst>
+            <a:gs pos="0">
+              <a:schemeClr val="phClr">
+                <a:tint val="100000"/>
+                <a:shade val="100000"/>
+                <a:satMod val="130000"/>
+              </a:schemeClr>
+            </a:gs>
+            <a:gs pos="100000">
+              <a:schemeClr val="phClr">
+                <a:tint val="50000"/>
+                <a:shade val="100000"/>
+                <a:satMod val="350000"/>
+              </a:schemeClr>
+            </a:gs>
+          </a:gsLst>
+          <a:lin ang="16200000" scaled="0"/>
+        </a:gradFill>
+      </a:fillStyleLst>
+      <a:lnStyleLst>
+        <a:ln w="9525" cap="flat" cmpd="sng" algn="ctr">
+          <a:solidFill>
+            <a:schemeClr val="phClr">
+              <a:shade val="95000"/>
+              <a:satMod val="105000"/>
+            </a:schemeClr>
+          </a:solidFill>
+          <a:prstDash val="solid"/>
+        </a:ln>
+        <a:ln w="25400" cap="flat" cmpd="sng" algn="ctr">
+          <a:solidFill>
+            <a:schemeClr val="phClr"/>
+          </a:solidFill>
+          <a:prstDash val="solid"/>
+        </a:ln>
+        <a:ln w="38100" cap="flat" cmpd="sng" algn="ctr">
+          <a:solidFill>
+            <a:schemeClr val="phClr"/>
+          </a:solidFill>
+          <a:prstDash val="solid"/>
+        </a:ln>
+      </a:lnStyleLst>
+      <a:effectStyleLst>
+        <a:effectStyle>
+          <a:effectLst>
+            <a:outerShdw blurRad="40000" dist="20000" dir="5400000" rotWithShape="0">
+              <a:srgbClr val="000000">
+                <a:alpha val="38000"/>
+              </a:srgbClr>
+            </a:outerShdw>
+          </a:effectLst>
+        </a:effectStyle>
+        <a:effectStyle>
+          <a:effectLst>
+            <a:outerShdw blurRad="40000" dist="23000" dir="5400000" rotWithShape="0">
+              <a:srgbClr val="000000">
+                <a:alpha val="35000"/>
+              </a:srgbClr>
+            </a:outerShdw>
+          </a:effectLst>
+        </a:effectStyle>
+        <a:effectStyle>
+          <a:effectLst>
+            <a:outerShdw blurRad="40000" dist="23000" dir="5400000" rotWithShape="0">
+              <a:srgbClr val="000000">
+                <a:alpha val="35000"/>
+              </a:srgbClr>
+            </a:outerShdw>
+          </a:effectLst>
+          <a:scene3d>
+            <a:camera prst="orthographicFront">
+              <a:rot lat="0" lon="0" rev="0"/>
+            </a:camera>
+            <a:lightRig rig="threePt" dir="t">
+              <a:rot lat="0" lon="0" rev="1200000"/>
+            </a:lightRig>
+          </a:scene3d>
+          <a:sp3d>
+            <a:bevelT w="63500" h="25400"/>
+          </a:sp3d>
+        </a:effectStyle>
+      </a:effectStyleLst>
+      <a:bgFillStyleLst>
+        <a:solidFill>
+          <a:schemeClr val="phClr"/>
+        </a:solidFill>
+        <a:gradFill rotWithShape="1">
+          <a:gsLst>
+            <a:gs pos="0">
+              <a:schemeClr val="phClr">
+                <a:tint val="40000"/>
+                <a:satMod val="350000"/>
+              </a:schemeClr>
+            </a:gs>
+            <a:gs pos="40000">
+              <a:schemeClr val="phClr">
+                <a:tint val="45000"/>
+                <a:shade val="99000"/>
+                <a:satMod val="350000"/>
+              </a:schemeClr>
+            </a:gs>
+            <a:gs pos="100000">
+              <a:schemeClr val="phClr">
+                <a:shade val="20000"/>
+                <a:satMod val="255000"/>
+              </a:schemeClr>
+            </a:gs>
+          </a:gsLst>
+          <a:path path="circle">
+            <a:fillToRect l="50000" t="-80000" r="50000" b="180000"/>
+          </a:path>
+        </a:gradFill>
+        <a:gradFill rotWithShape="1">
+          <a:gsLst>
+            <a:gs pos="0">
+              <a:schemeClr val="phClr">
+                <a:tint val="80000"/>
+                <a:satMod val="300000"/>
+              </a:schemeClr>
+            </a:gs>
+            <a:gs pos="100000">
+              <a:schemeClr val="phClr">
+                <a:shade val="30000"/>
+                <a:satMod val="200000"/>
+              </a:schemeClr>
+            </a:gs>
+          </a:gsLst>
+          <a:path path="circle">
+            <a:fillToRect l="50000" t="50000" r="50000" b="50000"/>
+          </a:path>
+        </a:gradFill>
+      </a:bgFillStyleLst>
+    </a:fmtScheme>
+  </a:themeElements>
+  <a:objectDefaults>
+    <a:spDef>
+      <a:spPr/>
+      <a:bodyPr/>
+      <a:lstStyle/>
+      <a:style>
+        <a:lnRef idx="1">
+          <a:schemeClr val="accent1"/>
+        </a:lnRef>
+        <a:fillRef idx="3">
+          <a:schemeClr val="accent1"/>
+        </a:fillRef>
+        <a:effectRef idx="2">
+          <a:schemeClr val="accent1"/>
+        </a:effectRef>
+        <a:fontRef idx="minor">
+          <a:schemeClr val="lt1"/>
+        </a:fontRef>
+      </a:style>
+    </a:spDef>
+    <a:lnDef>
+      <a:spPr/>
+      <a:bodyPr/>
+      <a:lstStyle/>
+      <a:style>
+        <a:lnRef idx="2">
+          <a:schemeClr val="accent1"/>
+        </a:lnRef>
+        <a:fillRef idx="0">
+          <a:schemeClr val="accent1"/>
+        </a:fillRef>
+        <a:effectRef idx="1">
+          <a:schemeClr val="accent1"/>
+        </a:effectRef>
+        <a:fontRef idx="minor">
+          <a:schemeClr val="tx1"/>
+        </a:fontRef>
+      </a:style>
+    </a:lnDef>
+  </a:objectDefaults>
+  <a:extraClrSchemeLst/>
+</a:theme>
 </file>
--- a/docs/AIForgeCrew-CTO-Summary.pptx
+++ b/docs/AIForgeCrew-CTO-Summary.pptx
@@ -504,7 +504,7 @@
           <a:lstStyle/>
           <a:p>
             <a:r>
-              <a:t>One FastAPI process, port 8799, React UI plus REST and streaming; chat engine,</a:t>
+              <a:t>One FastAPI process on port 8799 — React UI, REST and streaming. Chat engine,</a:t>
             </a:r>
           </a:p>
           <a:p>
@@ -524,126 +524,111 @@
           </a:p>
           <a:p>
             <a:r>
-              <a:t>container — the same single command, and an unset admin URL means this box is</a:t>
-            </a:r>
-          </a:p>
-          <a:p>
-            <a:r>
-              <a:t>it. Upgrade is git pull and run.sh, which converges the environment and</a:t>
-            </a:r>
-          </a:p>
-          <a:p>
-            <a:r>
-              <a:t>migrates in place.</a:t>
+              <a:t>container, same single command; upgrade is git pull and run.sh, which converges</a:t>
+            </a:r>
+          </a:p>
+          <a:p>
+            <a:r>
+              <a:t>the environment and migrates in place.</a:t>
             </a:r>
           </a:p>
           <a:p/>
           <a:p>
             <a:r>
-              <a:t>Pipeline: Triage, Enhancer, Architect, Planner, Verifier, then a build loop of</a:t>
-            </a:r>
-          </a:p>
-          <a:p>
-            <a:r>
-              <a:t>up to four parallel subtasks each in its own git worktree (Doer edits, tests</a:t>
-            </a:r>
-          </a:p>
-          <a:p>
-            <a:r>
-              <a:t>run, Feedback reads failures, Refiner fixes), then Validator gates,</a:t>
-            </a:r>
-          </a:p>
-          <a:p>
-            <a:r>
-              <a:t>Live-verifier runs the real recipe, Learner writes memory back, and the result</a:t>
-            </a:r>
-          </a:p>
-          <a:p>
-            <a:r>
-              <a:t>is a merge request a human reviews. Reasoning is plain text, so any model</a:t>
-            </a:r>
-          </a:p>
-          <a:p>
-            <a:r>
-              <a:t>drives it — no vendor function-calling. Simple mode writes, Plan mode is</a:t>
-            </a:r>
-          </a:p>
-          <a:p>
-            <a:r>
-              <a:t>read-only, Team mode runs the pipeline.</a:t>
+              <a:t>The pipeline in full: Triage, Enhancer, Architect, Planner, Verifier, then a</a:t>
+            </a:r>
+          </a:p>
+          <a:p>
+            <a:r>
+              <a:t>build loop of up to four parallel subtasks each in its own git worktree (Doer</a:t>
+            </a:r>
+          </a:p>
+          <a:p>
+            <a:r>
+              <a:t>edits, tests run, Feedback reads failures, Refiner fixes), then Validator</a:t>
+            </a:r>
+          </a:p>
+          <a:p>
+            <a:r>
+              <a:t>gates, Live-verifier runs the real recipe, Learner writes memory back, and the</a:t>
+            </a:r>
+          </a:p>
+          <a:p>
+            <a:r>
+              <a:t>result is a merge request a human reviews. Reasoning is plain text, so any</a:t>
+            </a:r>
+          </a:p>
+          <a:p>
+            <a:r>
+              <a:t>model drives it — no vendor function-calling needed. Simple mode writes, Plan</a:t>
+            </a:r>
+          </a:p>
+          <a:p>
+            <a:r>
+              <a:t>mode is read-only, Team mode runs the whole pipeline.</a:t>
             </a:r>
           </a:p>
           <a:p/>
           <a:p>
             <a:r>
-              <a:t>Library: rules, skills and workflows are markdown the agent writes and reuses;</a:t>
-            </a:r>
-          </a:p>
-          <a:p>
-            <a:r>
-              <a:t>a nightly sweep merges near-duplicates so the prompt does not bloat, and a</a:t>
-            </a:r>
-          </a:p>
-          <a:p>
-            <a:r>
-              <a:t>merge unions the members' scopes rather than silently narrowing one.</a:t>
+              <a:t>Rules, skills and workflows are markdown the agent writes and reuses; a nightly</a:t>
+            </a:r>
+          </a:p>
+          <a:p>
+            <a:r>
+              <a:t>sweep merges near-duplicates so the prompt does not bloat, and a merge unions</a:t>
+            </a:r>
+          </a:p>
+          <a:p>
+            <a:r>
+              <a:t>the members' scopes rather than silently narrowing one.</a:t>
             </a:r>
           </a:p>
           <a:p/>
           <a:p>
             <a:r>
-              <a:t>Memory: each desktop compacts locally, a client-side redaction filter blocks</a:t>
-            </a:r>
-          </a:p>
-          <a:p>
-            <a:r>
-              <a:t>credential-shaped and private notes before anything is advertised, one team</a:t>
-            </a:r>
-          </a:p>
-          <a:p>
-            <a:r>
-              <a:t>admin merges, and one admin can serve many independent fleets. Only distilled</a:t>
-            </a:r>
-          </a:p>
-          <a:p>
-            <a:r>
-              <a:t>knowledge nodes travel; transcripts, captures and working notes never leave the</a:t>
-            </a:r>
-          </a:p>
-          <a:p>
-            <a:r>
-              <a:t>machine that made them. Every merge is snapshotted with a revert endpoint.</a:t>
+              <a:t>Integrations: Jira 21 tools, Confluence 14, GitLab 10, plus GitHub, e-mail and</a:t>
+            </a:r>
+          </a:p>
+          <a:p>
+            <a:r>
+              <a:t>any MCP server; a tool with no credentials hides itself rather than failing a</a:t>
+            </a:r>
+          </a:p>
+          <a:p>
+            <a:r>
+              <a:t>turn. A tree-sitter and PageRank repo map plus 5 knowledge-graph tools choose</a:t>
+            </a:r>
+          </a:p>
+          <a:p>
+            <a:r>
+              <a:t>context instead of pasting it. The real toolchain is present: persistent shell,</a:t>
+            </a:r>
+          </a:p>
+          <a:p>
+            <a:r>
+              <a:t>language server, type-checker, test runner, IPython kernel. A local vision</a:t>
+            </a:r>
+          </a:p>
+          <a:p>
+            <a:r>
+              <a:t>model can screenshot the running app and answer questions about it.</a:t>
             </a:r>
           </a:p>
           <a:p/>
           <a:p>
             <a:r>
-              <a:t>Integrations: Jira 21 tools, Confluence 14, GitLab 10, plus GitHub, email and</a:t>
-            </a:r>
-          </a:p>
-          <a:p>
-            <a:r>
-              <a:t>any MCP server; a tool with no credentials hides itself. A tree-sitter and</a:t>
-            </a:r>
-          </a:p>
-          <a:p>
-            <a:r>
-              <a:t>PageRank repo map plus 5 knowledge-graph tools choose context instead of</a:t>
-            </a:r>
-          </a:p>
-          <a:p>
-            <a:r>
-              <a:t>pasting it. A local vision model can screenshot the running app. The real</a:t>
-            </a:r>
-          </a:p>
-          <a:p>
-            <a:r>
-              <a:t>toolchain is present: shell, language server, type-checker, test runner, an</a:t>
-            </a:r>
-          </a:p>
-          <a:p>
-            <a:r>
-              <a:t>IPython kernel.</a:t>
+              <a:t>If your estate runs its own certificate authority, one setting —</a:t>
+            </a:r>
+          </a:p>
+          <a:p>
+            <a:r>
+              <a:t>AIFORGE_CA_BUNDLE — makes the model endpoint, Jira, Confluence, GitLab, git,</a:t>
+            </a:r>
+          </a:p>
+          <a:p>
+            <a:r>
+              <a:t>curl and npm all trust it.</a:t>
             </a:r>
           </a:p>
         </p:txBody>
@@ -718,28 +703,28 @@
           </a:p>
           <a:p>
             <a:r>
-              <a:t>shell curl, then through a notebook cell, and it worked. A boundary you can</a:t>
-            </a:r>
-          </a:p>
-          <a:p>
-            <a:r>
-              <a:t>walk around by changing transport is a suggestion, so one module answers on all</a:t>
-            </a:r>
-          </a:p>
-          <a:p>
-            <a:r>
-              <a:t>three paths and after every redirect, and a missing allow-list entry is DENIED</a:t>
-            </a:r>
-          </a:p>
-          <a:p>
-            <a:r>
-              <a:t>rather than escalated to a human.</a:t>
+              <a:t>shell curl, then through a notebook cell, and it worked. A boundary you can walk</a:t>
+            </a:r>
+          </a:p>
+          <a:p>
+            <a:r>
+              <a:t>around by changing transport is a suggestion, so one module — net/egress.py —</a:t>
+            </a:r>
+          </a:p>
+          <a:p>
+            <a:r>
+              <a:t>answers on all three paths and after every redirect, and a missing allow-list</a:t>
+            </a:r>
+          </a:p>
+          <a:p>
+            <a:r>
+              <a:t>entry is DENIED rather than escalated to a human.</a:t>
             </a:r>
           </a:p>
           <a:p/>
           <a:p>
             <a:r>
-              <a:t>Outbound, refused: scp, rsync, sftp, ssh host 'cmd', curl -d/-F/-T, aws s3 cp,</a:t>
+              <a:t>Refused outbound: scp, rsync, sftp, ssh host 'cmd', curl -d/-F/-T, aws s3 cp,</a:t>
             </a:r>
           </a:p>
           <a:p>
@@ -769,7 +754,7 @@
           </a:p>
           <a:p>
             <a:r>
-              <a:t>integrations, email, telemetry, MCP and fleet sync. Loopback, LAN, a local</a:t>
+              <a:t>integrations, e-mail, telemetry, MCP and fleet sync. Loopback, LAN, a local</a:t>
             </a:r>
           </a:p>
           <a:p>
@@ -805,12 +790,12 @@
           </a:p>
           <a:p>
             <a:r>
-              <a:t>a full auth bypass. CORS is an allow-list, never a wildcard. Limits: one shared</a:t>
-            </a:r>
-          </a:p>
-          <a:p>
-            <a:r>
-              <a:t>token, so no per-user identity or SSO yet, and fleet sync is open unless closed.</a:t>
+              <a:t>a full auth bypass. CORS is an allow-list, never a wildcard. The limits: one</a:t>
+            </a:r>
+          </a:p>
+          <a:p>
+            <a:r>
+              <a:t>shared token, so no per-user identity or SSO yet.</a:t>
             </a:r>
           </a:p>
           <a:p/>
@@ -826,43 +811,43 @@
           </a:p>
           <a:p>
             <a:r>
-              <a:t>answer is containment: the egress refusal is code rather than model judgement,</a:t>
-            </a:r>
-          </a:p>
-          <a:p>
-            <a:r>
-              <a:t>the 20 external-write tools ask a human, file tools are clamped to the</a:t>
-            </a:r>
-          </a:p>
-          <a:p>
-            <a:r>
-              <a:t>workspace, Plan mode cannot write, and unattended runs refuse writes outright.</a:t>
+              <a:t>answer is containment: the refusal is code rather than model judgement, 20</a:t>
+            </a:r>
+          </a:p>
+          <a:p>
+            <a:r>
+              <a:t>external-write tools ask a human, file tools are clamped to the workspace, Plan</a:t>
+            </a:r>
+          </a:p>
+          <a:p>
+            <a:r>
+              <a:t>mode cannot write, and unattended runs refuse writes outright.</a:t>
             </a:r>
           </a:p>
           <a:p/>
           <a:p>
             <a:r>
-              <a:t>Trust and secrets: no CERT_NONE anywhere — each endpoint's certificate is</a:t>
-            </a:r>
-          </a:p>
-          <a:p>
-            <a:r>
-              <a:t>verified, and one AIFORGE_CA_BUNDLE covers the model endpoint, the</a:t>
-            </a:r>
-          </a:p>
-          <a:p>
-            <a:r>
-              <a:t>integrations, AIForge's own HTTP and every subprocess (git, curl, npm), or a</a:t>
-            </a:r>
-          </a:p>
-          <a:p>
-            <a:r>
-              <a:t>self-signed host is pinned on first use. Credentials, MCP headers and the</a:t>
-            </a:r>
-          </a:p>
-          <a:p>
-            <a:r>
-              <a:t>runtime env live in one 0700 folder, files 0600, repaired on boot.</a:t>
+              <a:t>Certificates and secrets: no CERT_NONE anywhere. One AIFORGE_CA_BUNDLE covers</a:t>
+            </a:r>
+          </a:p>
+          <a:p>
+            <a:r>
+              <a:t>the model endpoint, the integrations, our own HTTP and every subprocess (git,</a:t>
+            </a:r>
+          </a:p>
+          <a:p>
+            <a:r>
+              <a:t>curl, npm); otherwise a self-signed host is pinned on first use. Credentials,</a:t>
+            </a:r>
+          </a:p>
+          <a:p>
+            <a:r>
+              <a:t>MCP headers and the runtime env live in one 0700 folder, files 0600, repaired</a:t>
+            </a:r>
+          </a:p>
+          <a:p>
+            <a:r>
+              <a:t>on boot.</a:t>
             </a:r>
           </a:p>
           <a:p/>
@@ -894,22 +879,12 @@
           <a:p/>
           <a:p>
             <a:r>
-              <a:t>Supply chain: one build emits sonar/, blackduck/ and a CycloneDX SBOM; a heavy</a:t>
-            </a:r>
-          </a:p>
-          <a:p>
-            <a:r>
-              <a:t>dependency was dropped and its repo-map vendored under Apache-2.0, 212 packages</a:t>
-            </a:r>
-          </a:p>
-          <a:p>
-            <a:r>
-              <a:t>to 186. Every control above began as a bypass that WORKED in testing, and each</a:t>
-            </a:r>
-          </a:p>
-          <a:p>
-            <a:r>
-              <a:t>is pinned by a test verified to fail on the tree before the fix.</a:t>
+              <a:t>Every control above began as a bypass that WORKED in testing, and each is</a:t>
+            </a:r>
+          </a:p>
+          <a:p>
+            <a:r>
+              <a:t>pinned by a test verified to fail on the tree before the fix.</a:t>
             </a:r>
           </a:p>
         </p:txBody>
@@ -979,78 +954,114 @@
           <a:lstStyle/>
           <a:p>
             <a:r>
-              <a:t>Why the zero is real: the scan covers the whole repository — an earlier config</a:t>
-            </a:r>
-          </a:p>
-          <a:p>
-            <a:r>
-              <a:t>scanned two directories, reported zero, and CI still failed. Duplicate build</a:t>
-            </a:r>
-          </a:p>
-          <a:p>
-            <a:r>
-              <a:t>copies are excluded so nothing is counted twice, and coverage is regenerated</a:t>
-            </a:r>
-          </a:p>
-          <a:p>
-            <a:r>
-              <a:t>with every scan because one out-of-range line makes the whole report read 0%.</a:t>
-            </a:r>
-          </a:p>
-          <a:p>
-            <a:r>
-              <a:t>The suite's own line coverage is 86.7%; Sonar reports 82.8% because it also</a:t>
-            </a:r>
-          </a:p>
-          <a:p>
-            <a:r>
-              <a:t>counts files the unit suite never imports. 8,606 tests ran: 3 failed, 0 errors,</a:t>
-            </a:r>
-          </a:p>
-          <a:p>
-            <a:r>
-              <a:t>0 skipped, all three in one file needing a model actually served on the shared</a:t>
-            </a:r>
-          </a:p>
-          <a:p>
-            <a:r>
-              <a:t>endpoint, which was empty — stated rather than rounded to zero. Nine standing</a:t>
-            </a:r>
-          </a:p>
-          <a:p>
-            <a:r>
-              <a:t>vulnerabilities were closed by CHANGING CODE (TLS pinning, scheme validation,</a:t>
-            </a:r>
-          </a:p>
-          <a:p>
-            <a:r>
-              <a:t>digest usage) after two earlier passes had triaged them as accepted decisions.</a:t>
-            </a:r>
-          </a:p>
-          <a:p>
-            <a:r>
-              <a:t>They were decisions; they were the wrong ones.</a:t>
+              <a:t>Memory in detail. Each machine compacts what it learned locally. A redaction</a:t>
+            </a:r>
+          </a:p>
+          <a:p>
+            <a:r>
+              <a:t>filter runs on the CLIENT before anything is advertised: credential-shaped and</a:t>
+            </a:r>
+          </a:p>
+          <a:p>
+            <a:r>
+              <a:t>private notes are BLOCKED, never quietly edited. One team admin is the only</a:t>
+            </a:r>
+          </a:p>
+          <a:p>
+            <a:r>
+              <a:t>merger, folding into per-group trees so two teams cannot mix, and one admin can</a:t>
+            </a:r>
+          </a:p>
+          <a:p>
+            <a:r>
+              <a:t>serve many independent fleets — groups are discovered from the admin rather</a:t>
+            </a:r>
+          </a:p>
+          <a:p>
+            <a:r>
+              <a:t>than hardcoded. Only distilled knowledge nodes travel; transcripts, captures</a:t>
+            </a:r>
+          </a:p>
+          <a:p>
+            <a:r>
+              <a:t>and working notes never leave the machine that made them. Every merge is</a:t>
+            </a:r>
+          </a:p>
+          <a:p>
+            <a:r>
+              <a:t>snapshotted and a revert endpoint restores it. Sync is spoke-initiated, so</a:t>
+            </a:r>
+          </a:p>
+          <a:p>
+            <a:r>
+              <a:t>laptops behind NAT just work, and moving a machine is copying a directory.</a:t>
+            </a:r>
+          </a:p>
+          <a:p>
+            <a:r>
+              <a:t>Deploy note: the admin holds the merged fold — bind it to the LAN or a</a:t>
+            </a:r>
+          </a:p>
+          <a:p>
+            <a:r>
+              <a:t>WireGuard network, because the sync surface is open by default on purpose.</a:t>
             </a:r>
           </a:p>
           <a:p/>
           <a:p>
             <a:r>
-              <a:t>What the number does not say: it is the platform's quality, not the agent's</a:t>
-            </a:r>
-          </a:p>
-          <a:p>
-            <a:r>
-              <a:t>output. A tree with zero findings can still write a wrong patch. There is no</a:t>
-            </a:r>
-          </a:p>
-          <a:p>
-            <a:r>
-              <a:t>evaluation harness — no frozen set of closed tickets replayed each release, no</a:t>
-            </a:r>
-          </a:p>
-          <a:p>
-            <a:r>
-              <a:t>acceptance rate (merged without a rewrite), no edit distance between what the</a:t>
+              <a:t>The quality numbers are the PLATFORM's, read off the scanner API rather than</a:t>
+            </a:r>
+          </a:p>
+          <a:p>
+            <a:r>
+              <a:t>inferred from a green pipeline: 0 bugs, 0 vulnerabilities, 0 code smells, A/A/A</a:t>
+            </a:r>
+          </a:p>
+          <a:p>
+            <a:r>
+              <a:t>ratings, 8,606 tests, 82.8% coverage as Sonar scopes it (86.7% by pytest-cov on</a:t>
+            </a:r>
+          </a:p>
+          <a:p>
+            <a:r>
+              <a:t>the same run), 71,204 lines, 542 files, 0.1% duplication. Three test failures</a:t>
+            </a:r>
+          </a:p>
+          <a:p>
+            <a:r>
+              <a:t>are named rather than rounded away: all three need a model actually served on</a:t>
+            </a:r>
+          </a:p>
+          <a:p>
+            <a:r>
+              <a:t>the shared endpoint, which was empty. Nine standing vulnerabilities were closed</a:t>
+            </a:r>
+          </a:p>
+          <a:p>
+            <a:r>
+              <a:t>by changing code — TLS pinning, scheme validation, digest usage — after two</a:t>
+            </a:r>
+          </a:p>
+          <a:p>
+            <a:r>
+              <a:t>earlier passes had triaged them as accepted decisions.</a:t>
+            </a:r>
+          </a:p>
+          <a:p/>
+          <a:p>
+            <a:r>
+              <a:t>What that number does NOT say: it is the platform's quality, not the agent's</a:t>
+            </a:r>
+          </a:p>
+          <a:p>
+            <a:r>
+              <a:t>output. There is no evaluation harness — no frozen set of closed tickets</a:t>
+            </a:r>
+          </a:p>
+          <a:p>
+            <a:r>
+              <a:t>replayed each release, no acceptance rate, no edit distance between what the</a:t>
             </a:r>
           </a:p>
           <a:p>
@@ -1060,59 +1071,28 @@
           </a:p>
           <a:p>
             <a:r>
-              <a:t>There is no load test, so no honest number for developers per box, VRAM for a</a:t>
-            </a:r>
-          </a:p>
-          <a:p>
-            <a:r>
-              <a:t>team of N, or wall-clock per ticket. Backup is copying one folder, but there is</a:t>
-            </a:r>
-          </a:p>
-          <a:p>
-            <a:r>
-              <a:t>no documented restore drill, and the traces that record every tool call name</a:t>
-            </a:r>
-          </a:p>
-          <a:p>
-            <a:r>
-              <a:t>the BOX rather than a person, with no retention or tamper-evidence: good for</a:t>
-            </a:r>
-          </a:p>
-          <a:p>
-            <a:r>
-              <a:t>debugging a run, not yet evidence for an auditor.</a:t>
+              <a:t>There is no load test, so no honest number for users per box, VRAM for a team</a:t>
+            </a:r>
+          </a:p>
+          <a:p>
+            <a:r>
+              <a:t>of N, or wall-clock per ticket. Backup is copying one folder, but there is no</a:t>
+            </a:r>
+          </a:p>
+          <a:p>
+            <a:r>
+              <a:t>documented restore drill, and the traces that record every tool call name the</a:t>
+            </a:r>
+          </a:p>
+          <a:p>
+            <a:r>
+              <a:t>BOX rather than a person, with no retention or tamper-evidence.</a:t>
             </a:r>
           </a:p>
           <a:p/>
           <a:p>
             <a:r>
-              <a:t>The comparison a budget actually faces: a per-seat assistant prices per</a:t>
-            </a:r>
-          </a:p>
-          <a:p>
-            <a:r>
-              <a:t>developer per month and sends the source to its vendor; this prices as hardware</a:t>
-            </a:r>
-          </a:p>
-          <a:p>
-            <a:r>
-              <a:t>you already own and sends it to the endpoint you set. Cost is the easy half —</a:t>
-            </a:r>
-          </a:p>
-          <a:p>
-            <a:r>
-              <a:t>output quality is the argument worth having, which is why the first ask is to</a:t>
-            </a:r>
-          </a:p>
-          <a:p>
-            <a:r>
-              <a:t>fund the harness.</a:t>
-            </a:r>
-          </a:p>
-          <a:p/>
-          <a:p>
-            <a:r>
-              <a:t>The five asks, in order: prove the output; name an owner and a support rota;</a:t>
+              <a:t>The full ask list: fund the scoring harness; name an owner and a support rota;</a:t>
             </a:r>
           </a:p>
           <a:p>
@@ -4167,7 +4147,7 @@
                 </a:solidFill>
                 <a:latin typeface="Segoe UI"/>
               </a:rPr>
-              <a:t>AIForgeCrew — a coding agent platform you run yourself</a:t>
+              <a:t>AIForgeCrew — a coding agent you run on your own machines</a:t>
             </a:r>
           </a:p>
         </p:txBody>
@@ -4206,7 +4186,7 @@
                 </a:solidFill>
                 <a:latin typeface="Segoe UI"/>
               </a:rPr>
-              <a:t>A ticket becomes a merge request. On your hardware, against your model, with no database anywhere in it.</a:t>
+              <a:t>Give it a ticket, get back a merge request. Your code stays on your hardware and talks to your own model.</a:t>
             </a:r>
           </a:p>
         </p:txBody>
@@ -4289,7 +4269,7 @@
                 </a:solidFill>
                 <a:latin typeface="Segoe UI"/>
               </a:rPr>
-              <a:t>Measured on main @ 7d9e60ae, 2026-09-06. One Python service, one port, one folder of state.</a:t>
+              <a:t>Measured on main @ 7d9e60ae, 2026-09-06. One program, one port, one folder. Nothing else to install and nothing to phone home to.</a:t>
             </a:r>
           </a:p>
         </p:txBody>
@@ -4406,7 +4386,7 @@
                 </a:solidFill>
                 <a:latin typeface="Segoe UI"/>
               </a:rPr>
-              <a:t>tools</a:t>
+              <a:t>things it can do</a:t>
             </a:r>
           </a:p>
         </p:txBody>
@@ -4484,7 +4464,7 @@
                 </a:solidFill>
                 <a:latin typeface="Segoe UI"/>
               </a:rPr>
-              <a:t>agent roles</a:t>
+              <a:t>specialists it runs</a:t>
             </a:r>
           </a:p>
         </p:txBody>
@@ -4606,7 +4586,7 @@
                 </a:solidFill>
                 <a:latin typeface="Segoe UI"/>
               </a:rPr>
-              <a:t>chat modes</a:t>
+              <a:t>ways to work with it</a:t>
             </a:r>
           </a:p>
         </p:txBody>
@@ -4728,7 +4708,7 @@
                 </a:solidFill>
                 <a:latin typeface="Segoe UI"/>
               </a:rPr>
-              <a:t>databases</a:t>
+              <a:t>databases to run</a:t>
             </a:r>
           </a:p>
         </p:txBody>
@@ -4972,7 +4952,7 @@
                 </a:solidFill>
                 <a:latin typeface="Segoe UI"/>
               </a:rPr>
-              <a:t>Sonar findings</a:t>
+              <a:t>code-scan findings</a:t>
             </a:r>
           </a:p>
         </p:txBody>
@@ -5030,7 +5010,7 @@
         <p:spPr>
           <a:xfrm>
             <a:off x="566928" y="2103120"/>
-            <a:ext cx="1920240" cy="438912"/>
+            <a:ext cx="2103120" cy="402336"/>
           </a:xfrm>
           <a:prstGeom prst="roundRect">
             <a:avLst>
@@ -5073,7 +5053,7 @@
                 </a:solidFill>
                 <a:latin typeface="Segoe UI"/>
               </a:rPr>
-              <a:t>Ticket</a:t>
+              <a:t>A ticket</a:t>
             </a:r>
           </a:p>
           <a:p>
@@ -5085,7 +5065,7 @@
                 </a:solidFill>
                 <a:latin typeface="Segoe UI"/>
               </a:rPr>
-              <a:t>Jira · GitLab</a:t>
+              <a:t>from Jira or GitLab</a:t>
             </a:r>
           </a:p>
         </p:txBody>
@@ -5098,8 +5078,8 @@
         </p:nvCxnSpPr>
         <p:spPr>
           <a:xfrm>
-            <a:off x="2487168" y="2322576"/>
-            <a:ext cx="530352" cy="292608"/>
+            <a:off x="2670048" y="2304288"/>
+            <a:ext cx="475488" cy="0"/>
           </a:xfrm>
           <a:prstGeom prst="line">
             <a:avLst/>
@@ -5134,8 +5114,8 @@
         </p:nvSpPr>
         <p:spPr>
           <a:xfrm>
-            <a:off x="566928" y="2615184"/>
-            <a:ext cx="1920240" cy="438912"/>
+            <a:off x="566928" y="2578608"/>
+            <a:ext cx="2103120" cy="402336"/>
           </a:xfrm>
           <a:prstGeom prst="roundRect">
             <a:avLst>
@@ -5178,7 +5158,7 @@
                 </a:solidFill>
                 <a:latin typeface="Segoe UI"/>
               </a:rPr>
-              <a:t>Chat</a:t>
+              <a:t>A chat</a:t>
             </a:r>
           </a:p>
           <a:p>
@@ -5190,7 +5170,7 @@
                 </a:solidFill>
                 <a:latin typeface="Segoe UI"/>
               </a:rPr>
-              <a:t>ask · plan · team</a:t>
+              <a:t>ask · plan · delegate</a:t>
             </a:r>
           </a:p>
         </p:txBody>
@@ -5202,9 +5182,9 @@
           <p:nvPr/>
         </p:nvCxnSpPr>
         <p:spPr>
-          <a:xfrm flipV="1">
-            <a:off x="2487168" y="2615184"/>
-            <a:ext cx="530352" cy="219456"/>
+          <a:xfrm>
+            <a:off x="2670048" y="2779776"/>
+            <a:ext cx="475488" cy="0"/>
           </a:xfrm>
           <a:prstGeom prst="line">
             <a:avLst/>
@@ -5239,8 +5219,8 @@
         </p:nvSpPr>
         <p:spPr>
           <a:xfrm>
-            <a:off x="566928" y="3127248"/>
-            <a:ext cx="1920240" cy="438912"/>
+            <a:off x="566928" y="3054096"/>
+            <a:ext cx="2103120" cy="402336"/>
           </a:xfrm>
           <a:prstGeom prst="roundRect">
             <a:avLst>
@@ -5283,7 +5263,7 @@
                 </a:solidFill>
                 <a:latin typeface="Segoe UI"/>
               </a:rPr>
-              <a:t>Schedule</a:t>
+              <a:t>A schedule</a:t>
             </a:r>
           </a:p>
           <a:p>
@@ -5295,7 +5275,7 @@
                 </a:solidFill>
                 <a:latin typeface="Segoe UI"/>
               </a:rPr>
-              <a:t>cron, unattended</a:t>
+              <a:t>runs while you sleep</a:t>
             </a:r>
           </a:p>
         </p:txBody>
@@ -5307,9 +5287,9 @@
           <p:nvPr/>
         </p:nvCxnSpPr>
         <p:spPr>
-          <a:xfrm flipV="1">
-            <a:off x="2487168" y="2615184"/>
-            <a:ext cx="530352" cy="731520"/>
+          <a:xfrm>
+            <a:off x="2670048" y="3255264"/>
+            <a:ext cx="475488" cy="0"/>
           </a:xfrm>
           <a:prstGeom prst="line">
             <a:avLst/>
@@ -5344,8 +5324,8 @@
         </p:nvSpPr>
         <p:spPr>
           <a:xfrm>
-            <a:off x="3017520" y="2103120"/>
-            <a:ext cx="3017520" cy="1463040"/>
+            <a:off x="3145536" y="2103120"/>
+            <a:ext cx="2651760" cy="1353312"/>
           </a:xfrm>
           <a:prstGeom prst="roundRect">
             <a:avLst>
@@ -5388,7 +5368,7 @@
                 </a:solidFill>
                 <a:latin typeface="Segoe UI"/>
               </a:rPr>
-              <a:t>One process · :8799</a:t>
+              <a:t>One program</a:t>
             </a:r>
           </a:p>
           <a:p>
@@ -5400,7 +5380,7 @@
                 </a:solidFill>
                 <a:latin typeface="Segoe UI"/>
               </a:rPr>
-              <a:t>chat engine · pipeline</a:t>
+              <a:t>chat · the specialists</a:t>
             </a:r>
           </a:p>
           <a:p>
@@ -5412,7 +5392,7 @@
                 </a:solidFill>
                 <a:latin typeface="Segoe UI"/>
               </a:rPr>
-              <a:t>memory · integrations</a:t>
+              <a:t>memory · your tools</a:t>
             </a:r>
           </a:p>
           <a:p>
@@ -5424,7 +5404,7 @@
                 </a:solidFill>
                 <a:latin typeface="Segoe UI"/>
               </a:rPr>
-              <a:t>scheduler</a:t>
+              <a:t>the scheduler</a:t>
             </a:r>
           </a:p>
         </p:txBody>
@@ -5437,8 +5417,8 @@
         </p:nvCxnSpPr>
         <p:spPr>
           <a:xfrm>
-            <a:off x="6035040" y="2834640"/>
-            <a:ext cx="548640" cy="0"/>
+            <a:off x="5797296" y="2779776"/>
+            <a:ext cx="475488" cy="0"/>
           </a:xfrm>
           <a:prstGeom prst="line">
             <a:avLst/>
@@ -5473,8 +5453,8 @@
         </p:nvSpPr>
         <p:spPr>
           <a:xfrm>
-            <a:off x="6583680" y="2103120"/>
-            <a:ext cx="2377440" cy="1463040"/>
+            <a:off x="6272784" y="2103120"/>
+            <a:ext cx="2468880" cy="1353312"/>
           </a:xfrm>
           <a:prstGeom prst="roundRect">
             <a:avLst>
@@ -5517,7 +5497,7 @@
                 </a:solidFill>
                 <a:latin typeface="Segoe UI"/>
               </a:rPr>
-              <a:t>Your endpoint</a:t>
+              <a:t>Your own model</a:t>
             </a:r>
           </a:p>
           <a:p>
@@ -5529,11 +5509,14 @@
                 </a:solidFill>
                 <a:latin typeface="Segoe UI"/>
               </a:rPr>
-              <a:t>LM Studio · vLLM · mlx</a:t>
+              <a:t>running on your hardware</a:t>
             </a:r>
           </a:p>
           <a:p>
             <a:pPr algn="ctr"/>
+          </a:p>
+          <a:p>
+            <a:pPr algn="ctr"/>
             <a:r>
               <a:rPr sz="850" b="0">
                 <a:solidFill>
@@ -5541,14 +5524,11 @@
                 </a:solidFill>
                 <a:latin typeface="Segoe UI"/>
               </a:rPr>
-              <a:t>on hardware you own</a:t>
+              <a:t>a paid cloud model only</a:t>
             </a:r>
           </a:p>
           <a:p>
             <a:pPr algn="ctr"/>
-          </a:p>
-          <a:p>
-            <a:pPr algn="ctr"/>
             <a:r>
               <a:rPr sz="850" b="0">
                 <a:solidFill>
@@ -5556,19 +5536,7 @@
                 </a:solidFill>
                 <a:latin typeface="Segoe UI"/>
               </a:rPr>
-              <a:t>cloud only if YOU</a:t>
-            </a:r>
-          </a:p>
-          <a:p>
-            <a:pPr algn="ctr"/>
-            <a:r>
-              <a:rPr sz="850" b="0">
-                <a:solidFill>
-                  <a:srgbClr val="1A1A1A"/>
-                </a:solidFill>
-                <a:latin typeface="Segoe UI"/>
-              </a:rPr>
-              <a:t>register one</a:t>
+              <a:t>if you add one yourself</a:t>
             </a:r>
           </a:p>
         </p:txBody>
@@ -5581,8 +5549,8 @@
         </p:nvSpPr>
         <p:spPr>
           <a:xfrm>
-            <a:off x="9235440" y="2103120"/>
-            <a:ext cx="2395728" cy="1463040"/>
+            <a:off x="9015984" y="2103120"/>
+            <a:ext cx="2615184" cy="1353312"/>
           </a:xfrm>
           <a:prstGeom prst="roundRect">
             <a:avLst>
@@ -5637,7 +5605,7 @@
                 </a:solidFill>
                 <a:latin typeface="Segoe UI"/>
               </a:rPr>
-              <a:t>no vector store</a:t>
+              <a:t>no vector store, no Postgres,</a:t>
             </a:r>
           </a:p>
           <a:p>
@@ -5649,11 +5617,14 @@
                 </a:solidFill>
                 <a:latin typeface="Segoe UI"/>
               </a:rPr>
-              <a:t>no Postgres · no Neo4j</a:t>
+              <a:t>no Neo4j, no queue, no GPU</a:t>
             </a:r>
           </a:p>
           <a:p>
             <a:pPr algn="ctr"/>
+          </a:p>
+          <a:p>
+            <a:pPr algn="ctr"/>
             <a:r>
               <a:rPr sz="850" b="0">
                 <a:solidFill>
@@ -5661,14 +5632,11 @@
                 </a:solidFill>
                 <a:latin typeface="Segoe UI"/>
               </a:rPr>
-              <a:t>no broker · no GPU</a:t>
+              <a:t>just files and one small</a:t>
             </a:r>
           </a:p>
           <a:p>
             <a:pPr algn="ctr"/>
-          </a:p>
-          <a:p>
-            <a:pPr algn="ctr"/>
             <a:r>
               <a:rPr sz="850" b="0">
                 <a:solidFill>
@@ -5676,7 +5644,7 @@
                 </a:solidFill>
                 <a:latin typeface="Segoe UI"/>
               </a:rPr>
-              <a:t>markdown + one SQLite</a:t>
+              <a:t>SQLite file</a:t>
             </a:r>
           </a:p>
         </p:txBody>
@@ -5689,8 +5657,8 @@
         </p:nvSpPr>
         <p:spPr>
           <a:xfrm>
-            <a:off x="566928" y="3511295"/>
-            <a:ext cx="3657600" cy="201168"/>
+            <a:off x="566928" y="3657600"/>
+            <a:ext cx="5486400" cy="219456"/>
           </a:xfrm>
           <a:prstGeom prst="rect">
             <a:avLst/>
@@ -5709,13 +5677,13 @@
               </a:spcAft>
             </a:pPr>
             <a:r>
-              <a:rPr sz="1000" b="1">
+              <a:rPr sz="1050" b="1">
                 <a:solidFill>
                   <a:srgbClr val="6B6B6B"/>
                 </a:solidFill>
                 <a:latin typeface="Segoe UI"/>
               </a:rPr>
-              <a:t>How a ticket becomes a merge request</a:t>
+              <a:t>What happens to one ticket</a:t>
             </a:r>
           </a:p>
         </p:txBody>
@@ -5728,8 +5696,8 @@
         </p:nvSpPr>
         <p:spPr>
           <a:xfrm>
-            <a:off x="566928" y="3749039"/>
-            <a:ext cx="1316736" cy="384048"/>
+            <a:off x="566928" y="3931920"/>
+            <a:ext cx="1700784" cy="420624"/>
           </a:xfrm>
           <a:prstGeom prst="roundRect">
             <a:avLst>
@@ -5766,13 +5734,13 @@
           <a:p>
             <a:pPr algn="ctr"/>
             <a:r>
-              <a:rPr sz="1000" b="1">
+              <a:rPr sz="1050" b="1">
                 <a:solidFill>
                   <a:srgbClr val="1F4E79"/>
                 </a:solidFill>
                 <a:latin typeface="Segoe UI"/>
               </a:rPr>
-              <a:t>Triage</a:t>
+              <a:t>Understand</a:t>
             </a:r>
           </a:p>
         </p:txBody>
@@ -5785,8 +5753,8 @@
         </p:nvCxnSpPr>
         <p:spPr>
           <a:xfrm>
-            <a:off x="1883664" y="3941063"/>
-            <a:ext cx="118872" cy="0"/>
+            <a:off x="2267712" y="4142232"/>
+            <a:ext cx="173736" cy="0"/>
           </a:xfrm>
           <a:prstGeom prst="line">
             <a:avLst/>
@@ -5821,8 +5789,8 @@
         </p:nvSpPr>
         <p:spPr>
           <a:xfrm>
-            <a:off x="2002536" y="3749039"/>
-            <a:ext cx="1316736" cy="384048"/>
+            <a:off x="2441448" y="3931920"/>
+            <a:ext cx="1700784" cy="420624"/>
           </a:xfrm>
           <a:prstGeom prst="roundRect">
             <a:avLst>
@@ -5859,13 +5827,13 @@
           <a:p>
             <a:pPr algn="ctr"/>
             <a:r>
-              <a:rPr sz="1000" b="1">
+              <a:rPr sz="1050" b="1">
                 <a:solidFill>
                   <a:srgbClr val="1F4E79"/>
                 </a:solidFill>
                 <a:latin typeface="Segoe UI"/>
               </a:rPr>
-              <a:t>Enhancer</a:t>
+              <a:t>Plan</a:t>
             </a:r>
           </a:p>
         </p:txBody>
@@ -5878,8 +5846,8 @@
         </p:nvCxnSpPr>
         <p:spPr>
           <a:xfrm>
-            <a:off x="3319272" y="3941063"/>
-            <a:ext cx="118872" cy="0"/>
+            <a:off x="4142232" y="4142232"/>
+            <a:ext cx="173736" cy="0"/>
           </a:xfrm>
           <a:prstGeom prst="line">
             <a:avLst/>
@@ -5914,8 +5882,753 @@
         </p:nvSpPr>
         <p:spPr>
           <a:xfrm>
-            <a:off x="3438144" y="3749039"/>
-            <a:ext cx="1316736" cy="384048"/>
+            <a:off x="4315968" y="3931920"/>
+            <a:ext cx="1700784" cy="420624"/>
+          </a:xfrm>
+          <a:prstGeom prst="roundRect">
+            <a:avLst>
+              <a:gd name="adj" fmla="val 10000"/>
+            </a:avLst>
+          </a:prstGeom>
+          <a:solidFill>
+            <a:srgbClr val="DCEEE7"/>
+          </a:solidFill>
+          <a:ln w="12700">
+            <a:solidFill>
+              <a:srgbClr val="1E6B52"/>
+            </a:solidFill>
+          </a:ln>
+          <a:effectLst/>
+        </p:spPr>
+        <p:style>
+          <a:lnRef idx="1">
+            <a:schemeClr val="accent1"/>
+          </a:lnRef>
+          <a:fillRef idx="3">
+            <a:schemeClr val="accent1"/>
+          </a:fillRef>
+          <a:effectRef idx="2">
+            <a:schemeClr val="accent1"/>
+          </a:effectRef>
+          <a:fontRef idx="minor">
+            <a:schemeClr val="lt1"/>
+          </a:fontRef>
+        </p:style>
+        <p:txBody>
+          <a:bodyPr rtlCol="0" anchor="ctr" wrap="square" lIns="54864" rIns="54864" tIns="27432" bIns="27432"/>
+          <a:lstStyle/>
+          <a:p>
+            <a:pPr algn="ctr"/>
+            <a:r>
+              <a:rPr sz="1050" b="1">
+                <a:solidFill>
+                  <a:srgbClr val="1E6B52"/>
+                </a:solidFill>
+                <a:latin typeface="Segoe UI"/>
+              </a:rPr>
+              <a:t>Write code</a:t>
+            </a:r>
+          </a:p>
+        </p:txBody>
+      </p:sp>
+      <p:cxnSp>
+        <p:nvCxnSpPr>
+          <p:cNvPr id="40" name="Connector 39"/>
+          <p:cNvCxnSpPr/>
+          <p:nvPr/>
+        </p:nvCxnSpPr>
+        <p:spPr>
+          <a:xfrm>
+            <a:off x="6016752" y="4142232"/>
+            <a:ext cx="173736" cy="0"/>
+          </a:xfrm>
+          <a:prstGeom prst="line">
+            <a:avLst/>
+          </a:prstGeom>
+          <a:ln w="19050">
+            <a:solidFill>
+              <a:srgbClr val="C9C9C9"/>
+            </a:solidFill>
+            <a:tailEnd type="triangle" w="med" len="med"/>
+          </a:ln>
+        </p:spPr>
+        <p:style>
+          <a:lnRef idx="2">
+            <a:schemeClr val="accent1"/>
+          </a:lnRef>
+          <a:fillRef idx="0">
+            <a:schemeClr val="accent1"/>
+          </a:fillRef>
+          <a:effectRef idx="1">
+            <a:schemeClr val="accent1"/>
+          </a:effectRef>
+          <a:fontRef idx="minor">
+            <a:schemeClr val="tx1"/>
+          </a:fontRef>
+        </p:style>
+      </p:cxnSp>
+      <p:sp>
+        <p:nvSpPr>
+          <p:cNvPr id="41" name="Rounded Rectangle 40"/>
+          <p:cNvSpPr/>
+          <p:nvPr/>
+        </p:nvSpPr>
+        <p:spPr>
+          <a:xfrm>
+            <a:off x="6190488" y="3931920"/>
+            <a:ext cx="1700784" cy="420624"/>
+          </a:xfrm>
+          <a:prstGeom prst="roundRect">
+            <a:avLst>
+              <a:gd name="adj" fmla="val 10000"/>
+            </a:avLst>
+          </a:prstGeom>
+          <a:solidFill>
+            <a:srgbClr val="DCEEE7"/>
+          </a:solidFill>
+          <a:ln w="12700">
+            <a:solidFill>
+              <a:srgbClr val="1E6B52"/>
+            </a:solidFill>
+          </a:ln>
+          <a:effectLst/>
+        </p:spPr>
+        <p:style>
+          <a:lnRef idx="1">
+            <a:schemeClr val="accent1"/>
+          </a:lnRef>
+          <a:fillRef idx="3">
+            <a:schemeClr val="accent1"/>
+          </a:fillRef>
+          <a:effectRef idx="2">
+            <a:schemeClr val="accent1"/>
+          </a:effectRef>
+          <a:fontRef idx="minor">
+            <a:schemeClr val="lt1"/>
+          </a:fontRef>
+        </p:style>
+        <p:txBody>
+          <a:bodyPr rtlCol="0" anchor="ctr" wrap="square" lIns="54864" rIns="54864" tIns="27432" bIns="27432"/>
+          <a:lstStyle/>
+          <a:p>
+            <a:pPr algn="ctr"/>
+            <a:r>
+              <a:rPr sz="1050" b="1">
+                <a:solidFill>
+                  <a:srgbClr val="1E6B52"/>
+                </a:solidFill>
+                <a:latin typeface="Segoe UI"/>
+              </a:rPr>
+              <a:t>Test and fix</a:t>
+            </a:r>
+          </a:p>
+        </p:txBody>
+      </p:sp>
+      <p:cxnSp>
+        <p:nvCxnSpPr>
+          <p:cNvPr id="42" name="Connector 41"/>
+          <p:cNvCxnSpPr/>
+          <p:nvPr/>
+        </p:nvCxnSpPr>
+        <p:spPr>
+          <a:xfrm>
+            <a:off x="7891272" y="4142232"/>
+            <a:ext cx="173736" cy="0"/>
+          </a:xfrm>
+          <a:prstGeom prst="line">
+            <a:avLst/>
+          </a:prstGeom>
+          <a:ln w="19050">
+            <a:solidFill>
+              <a:srgbClr val="C9C9C9"/>
+            </a:solidFill>
+            <a:tailEnd type="triangle" w="med" len="med"/>
+          </a:ln>
+        </p:spPr>
+        <p:style>
+          <a:lnRef idx="2">
+            <a:schemeClr val="accent1"/>
+          </a:lnRef>
+          <a:fillRef idx="0">
+            <a:schemeClr val="accent1"/>
+          </a:fillRef>
+          <a:effectRef idx="1">
+            <a:schemeClr val="accent1"/>
+          </a:effectRef>
+          <a:fontRef idx="minor">
+            <a:schemeClr val="tx1"/>
+          </a:fontRef>
+        </p:style>
+      </p:cxnSp>
+      <p:sp>
+        <p:nvSpPr>
+          <p:cNvPr id="43" name="Rounded Rectangle 42"/>
+          <p:cNvSpPr/>
+          <p:nvPr/>
+        </p:nvSpPr>
+        <p:spPr>
+          <a:xfrm>
+            <a:off x="8065008" y="3931920"/>
+            <a:ext cx="1700784" cy="420624"/>
+          </a:xfrm>
+          <a:prstGeom prst="roundRect">
+            <a:avLst>
+              <a:gd name="adj" fmla="val 10000"/>
+            </a:avLst>
+          </a:prstGeom>
+          <a:solidFill>
+            <a:srgbClr val="EAE1F0"/>
+          </a:solidFill>
+          <a:ln w="12700">
+            <a:solidFill>
+              <a:srgbClr val="5B3A6E"/>
+            </a:solidFill>
+          </a:ln>
+          <a:effectLst/>
+        </p:spPr>
+        <p:style>
+          <a:lnRef idx="1">
+            <a:schemeClr val="accent1"/>
+          </a:lnRef>
+          <a:fillRef idx="3">
+            <a:schemeClr val="accent1"/>
+          </a:fillRef>
+          <a:effectRef idx="2">
+            <a:schemeClr val="accent1"/>
+          </a:effectRef>
+          <a:fontRef idx="minor">
+            <a:schemeClr val="lt1"/>
+          </a:fontRef>
+        </p:style>
+        <p:txBody>
+          <a:bodyPr rtlCol="0" anchor="ctr" wrap="square" lIns="54864" rIns="54864" tIns="27432" bIns="27432"/>
+          <a:lstStyle/>
+          <a:p>
+            <a:pPr algn="ctr"/>
+            <a:r>
+              <a:rPr sz="1050" b="1">
+                <a:solidFill>
+                  <a:srgbClr val="5B3A6E"/>
+                </a:solidFill>
+                <a:latin typeface="Segoe UI"/>
+              </a:rPr>
+              <a:t>Check it works</a:t>
+            </a:r>
+          </a:p>
+        </p:txBody>
+      </p:sp>
+      <p:cxnSp>
+        <p:nvCxnSpPr>
+          <p:cNvPr id="44" name="Connector 43"/>
+          <p:cNvCxnSpPr/>
+          <p:nvPr/>
+        </p:nvCxnSpPr>
+        <p:spPr>
+          <a:xfrm>
+            <a:off x="9765792" y="4142232"/>
+            <a:ext cx="173736" cy="0"/>
+          </a:xfrm>
+          <a:prstGeom prst="line">
+            <a:avLst/>
+          </a:prstGeom>
+          <a:ln w="19050">
+            <a:solidFill>
+              <a:srgbClr val="C9C9C9"/>
+            </a:solidFill>
+            <a:tailEnd type="triangle" w="med" len="med"/>
+          </a:ln>
+        </p:spPr>
+        <p:style>
+          <a:lnRef idx="2">
+            <a:schemeClr val="accent1"/>
+          </a:lnRef>
+          <a:fillRef idx="0">
+            <a:schemeClr val="accent1"/>
+          </a:fillRef>
+          <a:effectRef idx="1">
+            <a:schemeClr val="accent1"/>
+          </a:effectRef>
+          <a:fontRef idx="minor">
+            <a:schemeClr val="tx1"/>
+          </a:fontRef>
+        </p:style>
+      </p:cxnSp>
+      <p:sp>
+        <p:nvSpPr>
+          <p:cNvPr id="45" name="Rounded Rectangle 44"/>
+          <p:cNvSpPr/>
+          <p:nvPr/>
+        </p:nvSpPr>
+        <p:spPr>
+          <a:xfrm>
+            <a:off x="9939528" y="3931920"/>
+            <a:ext cx="1700784" cy="420624"/>
+          </a:xfrm>
+          <a:prstGeom prst="roundRect">
+            <a:avLst>
+              <a:gd name="adj" fmla="val 10000"/>
+            </a:avLst>
+          </a:prstGeom>
+          <a:solidFill>
+            <a:srgbClr val="ECECEC"/>
+          </a:solidFill>
+          <a:ln w="12700">
+            <a:solidFill>
+              <a:srgbClr val="3A3A3A"/>
+            </a:solidFill>
+          </a:ln>
+          <a:effectLst/>
+        </p:spPr>
+        <p:style>
+          <a:lnRef idx="1">
+            <a:schemeClr val="accent1"/>
+          </a:lnRef>
+          <a:fillRef idx="3">
+            <a:schemeClr val="accent1"/>
+          </a:fillRef>
+          <a:effectRef idx="2">
+            <a:schemeClr val="accent1"/>
+          </a:effectRef>
+          <a:fontRef idx="minor">
+            <a:schemeClr val="lt1"/>
+          </a:fontRef>
+        </p:style>
+        <p:txBody>
+          <a:bodyPr rtlCol="0" anchor="ctr" wrap="square" lIns="54864" rIns="54864" tIns="27432" bIns="27432"/>
+          <a:lstStyle/>
+          <a:p>
+            <a:pPr algn="ctr"/>
+            <a:r>
+              <a:rPr sz="1050" b="1">
+                <a:solidFill>
+                  <a:srgbClr val="3A3A3A"/>
+                </a:solidFill>
+                <a:latin typeface="Segoe UI"/>
+              </a:rPr>
+              <a:t>Merge request</a:t>
+            </a:r>
+          </a:p>
+        </p:txBody>
+      </p:sp>
+      <p:sp>
+        <p:nvSpPr>
+          <p:cNvPr id="46" name="TextBox 45"/>
+          <p:cNvSpPr txBox="1"/>
+          <p:nvPr/>
+        </p:nvSpPr>
+        <p:spPr>
+          <a:xfrm>
+            <a:off x="566928" y="4443984"/>
+            <a:ext cx="11064240" cy="237744"/>
+          </a:xfrm>
+          <a:prstGeom prst="rect">
+            <a:avLst/>
+          </a:prstGeom>
+          <a:noFill/>
+        </p:spPr>
+        <p:txBody>
+          <a:bodyPr wrap="square" anchor="t" lIns="0" rIns="0" tIns="0" bIns="0">
+            <a:spAutoFit/>
+          </a:bodyPr>
+          <a:lstStyle/>
+          <a:p>
+            <a:pPr algn="l">
+              <a:spcAft>
+                <a:spcPts val="0"/>
+              </a:spcAft>
+            </a:pPr>
+            <a:r>
+              <a:rPr sz="900" b="0">
+                <a:solidFill>
+                  <a:srgbClr val="6B6B6B"/>
+                </a:solidFill>
+                <a:latin typeface="Segoe UI"/>
+              </a:rPr>
+              <a:t>up to four pieces of the job run side by side, each in its own copy of the repo  ·  a person reviews the merge request — nothing merges itself</a:t>
+            </a:r>
+          </a:p>
+        </p:txBody>
+      </p:sp>
+      <p:sp>
+        <p:nvSpPr>
+          <p:cNvPr id="47" name="Rounded Rectangle 46"/>
+          <p:cNvSpPr/>
+          <p:nvPr/>
+        </p:nvSpPr>
+        <p:spPr>
+          <a:xfrm>
+            <a:off x="566928" y="4864608"/>
+            <a:ext cx="5486400" cy="384048"/>
+          </a:xfrm>
+          <a:prstGeom prst="roundRect">
+            <a:avLst>
+              <a:gd name="adj" fmla="val 10000"/>
+            </a:avLst>
+          </a:prstGeom>
+          <a:solidFill>
+            <a:srgbClr val="F7ECD5"/>
+          </a:solidFill>
+          <a:ln w="12700">
+            <a:solidFill>
+              <a:srgbClr val="8A5A00"/>
+            </a:solidFill>
+          </a:ln>
+          <a:effectLst/>
+        </p:spPr>
+        <p:style>
+          <a:lnRef idx="1">
+            <a:schemeClr val="accent1"/>
+          </a:lnRef>
+          <a:fillRef idx="3">
+            <a:schemeClr val="accent1"/>
+          </a:fillRef>
+          <a:effectRef idx="2">
+            <a:schemeClr val="accent1"/>
+          </a:effectRef>
+          <a:fontRef idx="minor">
+            <a:schemeClr val="lt1"/>
+          </a:fontRef>
+        </p:style>
+        <p:txBody>
+          <a:bodyPr rtlCol="0" anchor="ctr" wrap="square" lIns="54864" rIns="54864" tIns="27432" bIns="27432"/>
+          <a:lstStyle/>
+          <a:p>
+            <a:pPr algn="ctr"/>
+            <a:r>
+              <a:rPr sz="1150" b="1">
+                <a:solidFill>
+                  <a:srgbClr val="8A5A00"/>
+                </a:solidFill>
+                <a:latin typeface="Segoe UI"/>
+              </a:rPr>
+              <a:t>It writes down what it learns</a:t>
+            </a:r>
+          </a:p>
+        </p:txBody>
+      </p:sp>
+      <p:sp>
+        <p:nvSpPr>
+          <p:cNvPr id="48" name="Rounded Rectangle 47"/>
+          <p:cNvSpPr/>
+          <p:nvPr/>
+        </p:nvSpPr>
+        <p:spPr>
+          <a:xfrm>
+            <a:off x="566928" y="5248656"/>
+            <a:ext cx="5486400" cy="914400"/>
+          </a:xfrm>
+          <a:prstGeom prst="roundRect">
+            <a:avLst/>
+          </a:prstGeom>
+          <a:solidFill>
+            <a:srgbClr val="FFFFFF"/>
+          </a:solidFill>
+          <a:ln w="12700">
+            <a:solidFill>
+              <a:srgbClr val="8A5A00"/>
+            </a:solidFill>
+          </a:ln>
+          <a:effectLst/>
+        </p:spPr>
+        <p:style>
+          <a:lnRef idx="1">
+            <a:schemeClr val="accent1"/>
+          </a:lnRef>
+          <a:fillRef idx="3">
+            <a:schemeClr val="accent1"/>
+          </a:fillRef>
+          <a:effectRef idx="2">
+            <a:schemeClr val="accent1"/>
+          </a:effectRef>
+          <a:fontRef idx="minor">
+            <a:schemeClr val="lt1"/>
+          </a:fontRef>
+        </p:style>
+        <p:txBody>
+          <a:bodyPr rtlCol="0" anchor="ctr"/>
+          <a:lstStyle/>
+          <a:p>
+            <a:pPr algn="ctr"/>
+          </a:p>
+        </p:txBody>
+      </p:sp>
+      <p:sp>
+        <p:nvSpPr>
+          <p:cNvPr id="49" name="Rounded Rectangle 48"/>
+          <p:cNvSpPr/>
+          <p:nvPr/>
+        </p:nvSpPr>
+        <p:spPr>
+          <a:xfrm>
+            <a:off x="731520" y="5340096"/>
+            <a:ext cx="1188720" cy="274320"/>
+          </a:xfrm>
+          <a:prstGeom prst="roundRect">
+            <a:avLst>
+              <a:gd name="adj" fmla="val 10000"/>
+            </a:avLst>
+          </a:prstGeom>
+          <a:solidFill>
+            <a:srgbClr val="FFFFFF"/>
+          </a:solidFill>
+          <a:ln w="12700">
+            <a:solidFill>
+              <a:srgbClr val="8A5A00"/>
+            </a:solidFill>
+          </a:ln>
+          <a:effectLst/>
+        </p:spPr>
+        <p:style>
+          <a:lnRef idx="1">
+            <a:schemeClr val="accent1"/>
+          </a:lnRef>
+          <a:fillRef idx="3">
+            <a:schemeClr val="accent1"/>
+          </a:fillRef>
+          <a:effectRef idx="2">
+            <a:schemeClr val="accent1"/>
+          </a:effectRef>
+          <a:fontRef idx="minor">
+            <a:schemeClr val="lt1"/>
+          </a:fontRef>
+        </p:style>
+        <p:txBody>
+          <a:bodyPr rtlCol="0" anchor="ctr" wrap="square" lIns="54864" rIns="54864" tIns="27432" bIns="27432"/>
+          <a:lstStyle/>
+          <a:p>
+            <a:pPr algn="ctr"/>
+            <a:r>
+              <a:rPr sz="950" b="0">
+                <a:solidFill>
+                  <a:srgbClr val="8A5A00"/>
+                </a:solidFill>
+                <a:latin typeface="Segoe UI"/>
+              </a:rPr>
+              <a:t>Rules</a:t>
+            </a:r>
+          </a:p>
+        </p:txBody>
+      </p:sp>
+      <p:sp>
+        <p:nvSpPr>
+          <p:cNvPr id="50" name="Rounded Rectangle 49"/>
+          <p:cNvSpPr/>
+          <p:nvPr/>
+        </p:nvSpPr>
+        <p:spPr>
+          <a:xfrm>
+            <a:off x="2029968" y="5340096"/>
+            <a:ext cx="1188720" cy="274320"/>
+          </a:xfrm>
+          <a:prstGeom prst="roundRect">
+            <a:avLst>
+              <a:gd name="adj" fmla="val 10000"/>
+            </a:avLst>
+          </a:prstGeom>
+          <a:solidFill>
+            <a:srgbClr val="FFFFFF"/>
+          </a:solidFill>
+          <a:ln w="12700">
+            <a:solidFill>
+              <a:srgbClr val="8A5A00"/>
+            </a:solidFill>
+          </a:ln>
+          <a:effectLst/>
+        </p:spPr>
+        <p:style>
+          <a:lnRef idx="1">
+            <a:schemeClr val="accent1"/>
+          </a:lnRef>
+          <a:fillRef idx="3">
+            <a:schemeClr val="accent1"/>
+          </a:fillRef>
+          <a:effectRef idx="2">
+            <a:schemeClr val="accent1"/>
+          </a:effectRef>
+          <a:fontRef idx="minor">
+            <a:schemeClr val="lt1"/>
+          </a:fontRef>
+        </p:style>
+        <p:txBody>
+          <a:bodyPr rtlCol="0" anchor="ctr" wrap="square" lIns="54864" rIns="54864" tIns="27432" bIns="27432"/>
+          <a:lstStyle/>
+          <a:p>
+            <a:pPr algn="ctr"/>
+            <a:r>
+              <a:rPr sz="950" b="0">
+                <a:solidFill>
+                  <a:srgbClr val="8A5A00"/>
+                </a:solidFill>
+                <a:latin typeface="Segoe UI"/>
+              </a:rPr>
+              <a:t>Skills</a:t>
+            </a:r>
+          </a:p>
+        </p:txBody>
+      </p:sp>
+      <p:sp>
+        <p:nvSpPr>
+          <p:cNvPr id="51" name="Rounded Rectangle 50"/>
+          <p:cNvSpPr/>
+          <p:nvPr/>
+        </p:nvSpPr>
+        <p:spPr>
+          <a:xfrm>
+            <a:off x="3328416" y="5340096"/>
+            <a:ext cx="1188720" cy="274320"/>
+          </a:xfrm>
+          <a:prstGeom prst="roundRect">
+            <a:avLst>
+              <a:gd name="adj" fmla="val 10000"/>
+            </a:avLst>
+          </a:prstGeom>
+          <a:solidFill>
+            <a:srgbClr val="FFFFFF"/>
+          </a:solidFill>
+          <a:ln w="12700">
+            <a:solidFill>
+              <a:srgbClr val="8A5A00"/>
+            </a:solidFill>
+          </a:ln>
+          <a:effectLst/>
+        </p:spPr>
+        <p:style>
+          <a:lnRef idx="1">
+            <a:schemeClr val="accent1"/>
+          </a:lnRef>
+          <a:fillRef idx="3">
+            <a:schemeClr val="accent1"/>
+          </a:fillRef>
+          <a:effectRef idx="2">
+            <a:schemeClr val="accent1"/>
+          </a:effectRef>
+          <a:fontRef idx="minor">
+            <a:schemeClr val="lt1"/>
+          </a:fontRef>
+        </p:style>
+        <p:txBody>
+          <a:bodyPr rtlCol="0" anchor="ctr" wrap="square" lIns="54864" rIns="54864" tIns="27432" bIns="27432"/>
+          <a:lstStyle/>
+          <a:p>
+            <a:pPr algn="ctr"/>
+            <a:r>
+              <a:rPr sz="950" b="0">
+                <a:solidFill>
+                  <a:srgbClr val="8A5A00"/>
+                </a:solidFill>
+                <a:latin typeface="Segoe UI"/>
+              </a:rPr>
+              <a:t>Workflows</a:t>
+            </a:r>
+          </a:p>
+        </p:txBody>
+      </p:sp>
+      <p:sp>
+        <p:nvSpPr>
+          <p:cNvPr id="52" name="Rounded Rectangle 51"/>
+          <p:cNvSpPr/>
+          <p:nvPr/>
+        </p:nvSpPr>
+        <p:spPr>
+          <a:xfrm>
+            <a:off x="4553712" y="5340096"/>
+            <a:ext cx="859536" cy="274320"/>
+          </a:xfrm>
+          <a:prstGeom prst="roundRect">
+            <a:avLst>
+              <a:gd name="adj" fmla="val 10000"/>
+            </a:avLst>
+          </a:prstGeom>
+          <a:solidFill>
+            <a:srgbClr val="FFFFFF"/>
+          </a:solidFill>
+          <a:ln w="12700">
+            <a:solidFill>
+              <a:srgbClr val="8A5A00"/>
+            </a:solidFill>
+          </a:ln>
+          <a:effectLst/>
+        </p:spPr>
+        <p:style>
+          <a:lnRef idx="1">
+            <a:schemeClr val="accent1"/>
+          </a:lnRef>
+          <a:fillRef idx="3">
+            <a:schemeClr val="accent1"/>
+          </a:fillRef>
+          <a:effectRef idx="2">
+            <a:schemeClr val="accent1"/>
+          </a:effectRef>
+          <a:fontRef idx="minor">
+            <a:schemeClr val="lt1"/>
+          </a:fontRef>
+        </p:style>
+        <p:txBody>
+          <a:bodyPr rtlCol="0" anchor="ctr" wrap="square" lIns="54864" rIns="54864" tIns="27432" bIns="27432"/>
+          <a:lstStyle/>
+          <a:p>
+            <a:pPr algn="ctr"/>
+            <a:r>
+              <a:rPr sz="850" b="0">
+                <a:solidFill>
+                  <a:srgbClr val="8A5A00"/>
+                </a:solidFill>
+                <a:latin typeface="Segoe UI"/>
+              </a:rPr>
+              <a:t>tidied nightly</a:t>
+            </a:r>
+          </a:p>
+        </p:txBody>
+      </p:sp>
+      <p:sp>
+        <p:nvSpPr>
+          <p:cNvPr id="53" name="TextBox 52"/>
+          <p:cNvSpPr txBox="1"/>
+          <p:nvPr/>
+        </p:nvSpPr>
+        <p:spPr>
+          <a:xfrm>
+            <a:off x="731520" y="5687568"/>
+            <a:ext cx="5157216" cy="310896"/>
+          </a:xfrm>
+          <a:prstGeom prst="rect">
+            <a:avLst/>
+          </a:prstGeom>
+          <a:noFill/>
+        </p:spPr>
+        <p:txBody>
+          <a:bodyPr wrap="square" anchor="t" lIns="0" rIns="0" tIns="0" bIns="0">
+            <a:spAutoFit/>
+          </a:bodyPr>
+          <a:lstStyle/>
+          <a:p>
+            <a:pPr algn="l">
+              <a:spcAft>
+                <a:spcPts val="0"/>
+              </a:spcAft>
+            </a:pPr>
+            <a:r>
+              <a:rPr sz="850" b="0">
+                <a:solidFill>
+                  <a:srgbClr val="6B6B6B"/>
+                </a:solidFill>
+                <a:latin typeface="Segoe UI"/>
+              </a:rPr>
+              <a:t>plain text files it writes for itself, so a fix found once becomes a step it repeats — and duplicates get merged every night</a:t>
+            </a:r>
+          </a:p>
+        </p:txBody>
+      </p:sp>
+      <p:sp>
+        <p:nvSpPr>
+          <p:cNvPr id="54" name="Rounded Rectangle 53"/>
+          <p:cNvSpPr/>
+          <p:nvPr/>
+        </p:nvSpPr>
+        <p:spPr>
+          <a:xfrm>
+            <a:off x="6144768" y="4864608"/>
+            <a:ext cx="5486400" cy="384048"/>
           </a:xfrm>
           <a:prstGeom prst="roundRect">
             <a:avLst>
@@ -5952,71 +6665,33 @@
           <a:p>
             <a:pPr algn="ctr"/>
             <a:r>
-              <a:rPr sz="1000" b="1">
+              <a:rPr sz="1150" b="1">
                 <a:solidFill>
                   <a:srgbClr val="1F4E79"/>
                 </a:solidFill>
                 <a:latin typeface="Segoe UI"/>
               </a:rPr>
-              <a:t>Architect</a:t>
-            </a:r>
-          </a:p>
-        </p:txBody>
-      </p:sp>
-      <p:cxnSp>
-        <p:nvCxnSpPr>
-          <p:cNvPr id="40" name="Connector 39"/>
-          <p:cNvCxnSpPr/>
-          <p:nvPr/>
-        </p:nvCxnSpPr>
-        <p:spPr>
-          <a:xfrm>
-            <a:off x="4754880" y="3941063"/>
-            <a:ext cx="118872" cy="0"/>
-          </a:xfrm>
-          <a:prstGeom prst="line">
+              <a:t>It plugs into the tools you already have</a:t>
+            </a:r>
+          </a:p>
+        </p:txBody>
+      </p:sp>
+      <p:sp>
+        <p:nvSpPr>
+          <p:cNvPr id="55" name="Rounded Rectangle 54"/>
+          <p:cNvSpPr/>
+          <p:nvPr/>
+        </p:nvSpPr>
+        <p:spPr>
+          <a:xfrm>
+            <a:off x="6144768" y="5248656"/>
+            <a:ext cx="5486400" cy="914400"/>
+          </a:xfrm>
+          <a:prstGeom prst="roundRect">
             <a:avLst/>
           </a:prstGeom>
-          <a:ln w="19050">
-            <a:solidFill>
-              <a:srgbClr val="C9C9C9"/>
-            </a:solidFill>
-            <a:tailEnd type="triangle" w="med" len="med"/>
-          </a:ln>
-        </p:spPr>
-        <p:style>
-          <a:lnRef idx="2">
-            <a:schemeClr val="accent1"/>
-          </a:lnRef>
-          <a:fillRef idx="0">
-            <a:schemeClr val="accent1"/>
-          </a:fillRef>
-          <a:effectRef idx="1">
-            <a:schemeClr val="accent1"/>
-          </a:effectRef>
-          <a:fontRef idx="minor">
-            <a:schemeClr val="tx1"/>
-          </a:fontRef>
-        </p:style>
-      </p:cxnSp>
-      <p:sp>
-        <p:nvSpPr>
-          <p:cNvPr id="41" name="Rounded Rectangle 40"/>
-          <p:cNvSpPr/>
-          <p:nvPr/>
-        </p:nvSpPr>
-        <p:spPr>
-          <a:xfrm>
-            <a:off x="4873752" y="3749039"/>
-            <a:ext cx="1316736" cy="384048"/>
-          </a:xfrm>
-          <a:prstGeom prst="roundRect">
-            <a:avLst>
-              <a:gd name="adj" fmla="val 10000"/>
-            </a:avLst>
-          </a:prstGeom>
           <a:solidFill>
-            <a:srgbClr val="DCE7F2"/>
+            <a:srgbClr val="FFFFFF"/>
           </a:solidFill>
           <a:ln w="12700">
             <a:solidFill>
@@ -6040,68 +6715,23 @@
           </a:fontRef>
         </p:style>
         <p:txBody>
-          <a:bodyPr rtlCol="0" anchor="ctr" wrap="square" lIns="54864" rIns="54864" tIns="27432" bIns="27432"/>
+          <a:bodyPr rtlCol="0" anchor="ctr"/>
           <a:lstStyle/>
           <a:p>
             <a:pPr algn="ctr"/>
-            <a:r>
-              <a:rPr sz="1000" b="1">
-                <a:solidFill>
-                  <a:srgbClr val="1F4E79"/>
-                </a:solidFill>
-                <a:latin typeface="Segoe UI"/>
-              </a:rPr>
-              <a:t>Planner</a:t>
-            </a:r>
-          </a:p>
-        </p:txBody>
-      </p:sp>
-      <p:cxnSp>
-        <p:nvCxnSpPr>
-          <p:cNvPr id="42" name="Connector 41"/>
-          <p:cNvCxnSpPr/>
-          <p:nvPr/>
-        </p:nvCxnSpPr>
-        <p:spPr>
-          <a:xfrm>
-            <a:off x="6190488" y="3941063"/>
-            <a:ext cx="118872" cy="0"/>
-          </a:xfrm>
-          <a:prstGeom prst="line">
-            <a:avLst/>
-          </a:prstGeom>
-          <a:ln w="19050">
-            <a:solidFill>
-              <a:srgbClr val="C9C9C9"/>
-            </a:solidFill>
-            <a:tailEnd type="triangle" w="med" len="med"/>
-          </a:ln>
-        </p:spPr>
-        <p:style>
-          <a:lnRef idx="2">
-            <a:schemeClr val="accent1"/>
-          </a:lnRef>
-          <a:fillRef idx="0">
-            <a:schemeClr val="accent1"/>
-          </a:fillRef>
-          <a:effectRef idx="1">
-            <a:schemeClr val="accent1"/>
-          </a:effectRef>
-          <a:fontRef idx="minor">
-            <a:schemeClr val="tx1"/>
-          </a:fontRef>
-        </p:style>
-      </p:cxnSp>
-      <p:sp>
-        <p:nvSpPr>
-          <p:cNvPr id="43" name="Rounded Rectangle 42"/>
+          </a:p>
+        </p:txBody>
+      </p:sp>
+      <p:sp>
+        <p:nvSpPr>
+          <p:cNvPr id="56" name="Rounded Rectangle 55"/>
           <p:cNvSpPr/>
           <p:nvPr/>
         </p:nvSpPr>
         <p:spPr>
           <a:xfrm>
-            <a:off x="6309360" y="3749039"/>
-            <a:ext cx="1316736" cy="384048"/>
+            <a:off x="6309360" y="5340096"/>
+            <a:ext cx="950976" cy="274320"/>
           </a:xfrm>
           <a:prstGeom prst="roundRect">
             <a:avLst>
@@ -6109,7 +6739,7 @@
             </a:avLst>
           </a:prstGeom>
           <a:solidFill>
-            <a:srgbClr val="DCE7F2"/>
+            <a:srgbClr val="FFFFFF"/>
           </a:solidFill>
           <a:ln w="12700">
             <a:solidFill>
@@ -6138,63 +6768,27 @@
           <a:p>
             <a:pPr algn="ctr"/>
             <a:r>
-              <a:rPr sz="1000" b="1">
+              <a:rPr sz="850" b="0">
                 <a:solidFill>
                   <a:srgbClr val="1F4E79"/>
                 </a:solidFill>
                 <a:latin typeface="Segoe UI"/>
               </a:rPr>
-              <a:t>Verifier</a:t>
-            </a:r>
-          </a:p>
-        </p:txBody>
-      </p:sp>
-      <p:cxnSp>
-        <p:nvCxnSpPr>
-          <p:cNvPr id="44" name="Connector 43"/>
-          <p:cNvCxnSpPr/>
-          <p:nvPr/>
-        </p:nvCxnSpPr>
-        <p:spPr>
-          <a:xfrm>
-            <a:off x="7626096" y="3941063"/>
-            <a:ext cx="164592" cy="0"/>
-          </a:xfrm>
-          <a:prstGeom prst="line">
-            <a:avLst/>
-          </a:prstGeom>
-          <a:ln w="19050">
-            <a:solidFill>
-              <a:srgbClr val="C9C9C9"/>
-            </a:solidFill>
-            <a:tailEnd type="triangle" w="med" len="med"/>
-          </a:ln>
-        </p:spPr>
-        <p:style>
-          <a:lnRef idx="2">
-            <a:schemeClr val="accent1"/>
-          </a:lnRef>
-          <a:fillRef idx="0">
-            <a:schemeClr val="accent1"/>
-          </a:fillRef>
-          <a:effectRef idx="1">
-            <a:schemeClr val="accent1"/>
-          </a:effectRef>
-          <a:fontRef idx="minor">
-            <a:schemeClr val="tx1"/>
-          </a:fontRef>
-        </p:style>
-      </p:cxnSp>
-      <p:sp>
-        <p:nvSpPr>
-          <p:cNvPr id="45" name="Rounded Rectangle 44"/>
+              <a:t>Jira 21</a:t>
+            </a:r>
+          </a:p>
+        </p:txBody>
+      </p:sp>
+      <p:sp>
+        <p:nvSpPr>
+          <p:cNvPr id="57" name="Rounded Rectangle 56"/>
           <p:cNvSpPr/>
           <p:nvPr/>
         </p:nvSpPr>
         <p:spPr>
           <a:xfrm>
-            <a:off x="7790688" y="3749039"/>
-            <a:ext cx="1920240" cy="384048"/>
+            <a:off x="7333488" y="5340096"/>
+            <a:ext cx="950976" cy="274320"/>
           </a:xfrm>
           <a:prstGeom prst="roundRect">
             <a:avLst>
@@ -6202,11 +6796,11 @@
             </a:avLst>
           </a:prstGeom>
           <a:solidFill>
-            <a:srgbClr val="DCEEE7"/>
+            <a:srgbClr val="FFFFFF"/>
           </a:solidFill>
           <a:ln w="12700">
             <a:solidFill>
-              <a:srgbClr val="1E6B52"/>
+              <a:srgbClr val="1F4E79"/>
             </a:solidFill>
           </a:ln>
           <a:effectLst/>
@@ -6231,63 +6825,27 @@
           <a:p>
             <a:pPr algn="ctr"/>
             <a:r>
-              <a:rPr sz="1000" b="1">
-                <a:solidFill>
-                  <a:srgbClr val="1E6B52"/>
-                </a:solidFill>
-                <a:latin typeface="Segoe UI"/>
-              </a:rPr>
-              <a:t>Build loop</a:t>
-            </a:r>
-          </a:p>
-        </p:txBody>
-      </p:sp>
-      <p:cxnSp>
-        <p:nvCxnSpPr>
-          <p:cNvPr id="46" name="Connector 45"/>
-          <p:cNvCxnSpPr/>
-          <p:nvPr/>
-        </p:nvCxnSpPr>
-        <p:spPr>
-          <a:xfrm>
-            <a:off x="9710928" y="3941063"/>
-            <a:ext cx="118872" cy="0"/>
-          </a:xfrm>
-          <a:prstGeom prst="line">
-            <a:avLst/>
-          </a:prstGeom>
-          <a:ln w="19050">
-            <a:solidFill>
-              <a:srgbClr val="C9C9C9"/>
-            </a:solidFill>
-            <a:tailEnd type="triangle" w="med" len="med"/>
-          </a:ln>
-        </p:spPr>
-        <p:style>
-          <a:lnRef idx="2">
-            <a:schemeClr val="accent1"/>
-          </a:lnRef>
-          <a:fillRef idx="0">
-            <a:schemeClr val="accent1"/>
-          </a:fillRef>
-          <a:effectRef idx="1">
-            <a:schemeClr val="accent1"/>
-          </a:effectRef>
-          <a:fontRef idx="minor">
-            <a:schemeClr val="tx1"/>
-          </a:fontRef>
-        </p:style>
-      </p:cxnSp>
-      <p:sp>
-        <p:nvSpPr>
-          <p:cNvPr id="47" name="Rounded Rectangle 46"/>
+              <a:rPr sz="850" b="0">
+                <a:solidFill>
+                  <a:srgbClr val="1F4E79"/>
+                </a:solidFill>
+                <a:latin typeface="Segoe UI"/>
+              </a:rPr>
+              <a:t>Confluence 14</a:t>
+            </a:r>
+          </a:p>
+        </p:txBody>
+      </p:sp>
+      <p:sp>
+        <p:nvSpPr>
+          <p:cNvPr id="58" name="Rounded Rectangle 57"/>
           <p:cNvSpPr/>
           <p:nvPr/>
         </p:nvSpPr>
         <p:spPr>
           <a:xfrm>
-            <a:off x="9829800" y="3749039"/>
-            <a:ext cx="1801368" cy="384048"/>
+            <a:off x="8357616" y="5340096"/>
+            <a:ext cx="950976" cy="274320"/>
           </a:xfrm>
           <a:prstGeom prst="roundRect">
             <a:avLst>
@@ -6295,11 +6853,11 @@
             </a:avLst>
           </a:prstGeom>
           <a:solidFill>
-            <a:srgbClr val="ECECEC"/>
+            <a:srgbClr val="FFFFFF"/>
           </a:solidFill>
           <a:ln w="12700">
             <a:solidFill>
-              <a:srgbClr val="3A3A3A"/>
+              <a:srgbClr val="1F4E79"/>
             </a:solidFill>
           </a:ln>
           <a:effectLst/>
@@ -6324,27 +6882,141 @@
           <a:p>
             <a:pPr algn="ctr"/>
             <a:r>
-              <a:rPr sz="1000" b="1">
-                <a:solidFill>
-                  <a:srgbClr val="3A3A3A"/>
-                </a:solidFill>
-                <a:latin typeface="Segoe UI"/>
-              </a:rPr>
-              <a:t>Merge request</a:t>
-            </a:r>
-          </a:p>
-        </p:txBody>
-      </p:sp>
-      <p:sp>
-        <p:nvSpPr>
-          <p:cNvPr id="48" name="TextBox 47"/>
+              <a:rPr sz="850" b="0">
+                <a:solidFill>
+                  <a:srgbClr val="1F4E79"/>
+                </a:solidFill>
+                <a:latin typeface="Segoe UI"/>
+              </a:rPr>
+              <a:t>GitLab 10</a:t>
+            </a:r>
+          </a:p>
+        </p:txBody>
+      </p:sp>
+      <p:sp>
+        <p:nvSpPr>
+          <p:cNvPr id="59" name="Rounded Rectangle 58"/>
+          <p:cNvSpPr/>
+          <p:nvPr/>
+        </p:nvSpPr>
+        <p:spPr>
+          <a:xfrm>
+            <a:off x="9381744" y="5340096"/>
+            <a:ext cx="950976" cy="274320"/>
+          </a:xfrm>
+          <a:prstGeom prst="roundRect">
+            <a:avLst>
+              <a:gd name="adj" fmla="val 10000"/>
+            </a:avLst>
+          </a:prstGeom>
+          <a:solidFill>
+            <a:srgbClr val="FFFFFF"/>
+          </a:solidFill>
+          <a:ln w="12700">
+            <a:solidFill>
+              <a:srgbClr val="1F4E79"/>
+            </a:solidFill>
+          </a:ln>
+          <a:effectLst/>
+        </p:spPr>
+        <p:style>
+          <a:lnRef idx="1">
+            <a:schemeClr val="accent1"/>
+          </a:lnRef>
+          <a:fillRef idx="3">
+            <a:schemeClr val="accent1"/>
+          </a:fillRef>
+          <a:effectRef idx="2">
+            <a:schemeClr val="accent1"/>
+          </a:effectRef>
+          <a:fontRef idx="minor">
+            <a:schemeClr val="lt1"/>
+          </a:fontRef>
+        </p:style>
+        <p:txBody>
+          <a:bodyPr rtlCol="0" anchor="ctr" wrap="square" lIns="54864" rIns="54864" tIns="27432" bIns="27432"/>
+          <a:lstStyle/>
+          <a:p>
+            <a:pPr algn="ctr"/>
+            <a:r>
+              <a:rPr sz="850" b="0">
+                <a:solidFill>
+                  <a:srgbClr val="1F4E79"/>
+                </a:solidFill>
+                <a:latin typeface="Segoe UI"/>
+              </a:rPr>
+              <a:t>GitHub</a:t>
+            </a:r>
+          </a:p>
+        </p:txBody>
+      </p:sp>
+      <p:sp>
+        <p:nvSpPr>
+          <p:cNvPr id="60" name="Rounded Rectangle 59"/>
+          <p:cNvSpPr/>
+          <p:nvPr/>
+        </p:nvSpPr>
+        <p:spPr>
+          <a:xfrm>
+            <a:off x="10405872" y="5340096"/>
+            <a:ext cx="950976" cy="274320"/>
+          </a:xfrm>
+          <a:prstGeom prst="roundRect">
+            <a:avLst>
+              <a:gd name="adj" fmla="val 10000"/>
+            </a:avLst>
+          </a:prstGeom>
+          <a:solidFill>
+            <a:srgbClr val="FFFFFF"/>
+          </a:solidFill>
+          <a:ln w="12700">
+            <a:solidFill>
+              <a:srgbClr val="1F4E79"/>
+            </a:solidFill>
+          </a:ln>
+          <a:effectLst/>
+        </p:spPr>
+        <p:style>
+          <a:lnRef idx="1">
+            <a:schemeClr val="accent1"/>
+          </a:lnRef>
+          <a:fillRef idx="3">
+            <a:schemeClr val="accent1"/>
+          </a:fillRef>
+          <a:effectRef idx="2">
+            <a:schemeClr val="accent1"/>
+          </a:effectRef>
+          <a:fontRef idx="minor">
+            <a:schemeClr val="lt1"/>
+          </a:fontRef>
+        </p:style>
+        <p:txBody>
+          <a:bodyPr rtlCol="0" anchor="ctr" wrap="square" lIns="54864" rIns="54864" tIns="27432" bIns="27432"/>
+          <a:lstStyle/>
+          <a:p>
+            <a:pPr algn="ctr"/>
+            <a:r>
+              <a:rPr sz="850" b="0">
+                <a:solidFill>
+                  <a:srgbClr val="1F4E79"/>
+                </a:solidFill>
+                <a:latin typeface="Segoe UI"/>
+              </a:rPr>
+              <a:t>e-mail</a:t>
+            </a:r>
+          </a:p>
+        </p:txBody>
+      </p:sp>
+      <p:sp>
+        <p:nvSpPr>
+          <p:cNvPr id="61" name="TextBox 60"/>
           <p:cNvSpPr txBox="1"/>
           <p:nvPr/>
         </p:nvSpPr>
         <p:spPr>
           <a:xfrm>
-            <a:off x="7790688" y="4169663"/>
-            <a:ext cx="3840480" cy="329184"/>
+            <a:off x="6309360" y="5687568"/>
+            <a:ext cx="5157216" cy="310896"/>
           </a:xfrm>
           <a:prstGeom prst="rect">
             <a:avLst/>
@@ -6369,799 +7041,7 @@
                 </a:solidFill>
                 <a:latin typeface="Segoe UI"/>
               </a:rPr>
-              <a:t>4 parallel subtasks, each in its own git worktree  ·  Validator → Live-verifier → Learner</a:t>
-            </a:r>
-          </a:p>
-        </p:txBody>
-      </p:sp>
-      <p:sp>
-        <p:nvSpPr>
-          <p:cNvPr id="49" name="Rounded Rectangle 48"/>
-          <p:cNvSpPr/>
-          <p:nvPr/>
-        </p:nvSpPr>
-        <p:spPr>
-          <a:xfrm>
-            <a:off x="566928" y="4718304"/>
-            <a:ext cx="5486400" cy="1188720"/>
-          </a:xfrm>
-          <a:prstGeom prst="roundRect">
-            <a:avLst>
-              <a:gd name="adj" fmla="val 10000"/>
-            </a:avLst>
-          </a:prstGeom>
-          <a:solidFill>
-            <a:srgbClr val="F7ECD5"/>
-          </a:solidFill>
-          <a:ln w="12700">
-            <a:solidFill>
-              <a:srgbClr val="8A5A00"/>
-            </a:solidFill>
-          </a:ln>
-          <a:effectLst/>
-        </p:spPr>
-        <p:style>
-          <a:lnRef idx="1">
-            <a:schemeClr val="accent1"/>
-          </a:lnRef>
-          <a:fillRef idx="3">
-            <a:schemeClr val="accent1"/>
-          </a:fillRef>
-          <a:effectRef idx="2">
-            <a:schemeClr val="accent1"/>
-          </a:effectRef>
-          <a:fontRef idx="minor">
-            <a:schemeClr val="lt1"/>
-          </a:fontRef>
-        </p:style>
-        <p:txBody>
-          <a:bodyPr rtlCol="0" anchor="ctr" wrap="square" lIns="54864" rIns="54864" tIns="27432" bIns="27432"/>
-          <a:lstStyle/>
-          <a:p>
-            <a:pPr algn="ctr"/>
-            <a:r>
-              <a:rPr sz="1150" b="1">
-                <a:solidFill>
-                  <a:srgbClr val="8A5A00"/>
-                </a:solidFill>
-                <a:latin typeface="Segoe UI"/>
-              </a:rPr>
-              <a:t>It writes its own procedures</a:t>
-            </a:r>
-          </a:p>
-        </p:txBody>
-      </p:sp>
-      <p:sp>
-        <p:nvSpPr>
-          <p:cNvPr id="50" name="Rounded Rectangle 49"/>
-          <p:cNvSpPr/>
-          <p:nvPr/>
-        </p:nvSpPr>
-        <p:spPr>
-          <a:xfrm>
-            <a:off x="768096" y="5102352"/>
-            <a:ext cx="1078992" cy="274320"/>
-          </a:xfrm>
-          <a:prstGeom prst="roundRect">
-            <a:avLst>
-              <a:gd name="adj" fmla="val 10000"/>
-            </a:avLst>
-          </a:prstGeom>
-          <a:solidFill>
-            <a:srgbClr val="FFFFFF"/>
-          </a:solidFill>
-          <a:ln w="12700">
-            <a:solidFill>
-              <a:srgbClr val="8A5A00"/>
-            </a:solidFill>
-          </a:ln>
-          <a:effectLst/>
-        </p:spPr>
-        <p:style>
-          <a:lnRef idx="1">
-            <a:schemeClr val="accent1"/>
-          </a:lnRef>
-          <a:fillRef idx="3">
-            <a:schemeClr val="accent1"/>
-          </a:fillRef>
-          <a:effectRef idx="2">
-            <a:schemeClr val="accent1"/>
-          </a:effectRef>
-          <a:fontRef idx="minor">
-            <a:schemeClr val="lt1"/>
-          </a:fontRef>
-        </p:style>
-        <p:txBody>
-          <a:bodyPr rtlCol="0" anchor="ctr" wrap="square" lIns="54864" rIns="54864" tIns="27432" bIns="27432"/>
-          <a:lstStyle/>
-          <a:p>
-            <a:pPr algn="ctr"/>
-            <a:r>
-              <a:rPr sz="950" b="0">
-                <a:solidFill>
-                  <a:srgbClr val="8A5A00"/>
-                </a:solidFill>
-                <a:latin typeface="Segoe UI"/>
-              </a:rPr>
-              <a:t>Rules</a:t>
-            </a:r>
-          </a:p>
-        </p:txBody>
-      </p:sp>
-      <p:sp>
-        <p:nvSpPr>
-          <p:cNvPr id="51" name="Rounded Rectangle 50"/>
-          <p:cNvSpPr/>
-          <p:nvPr/>
-        </p:nvSpPr>
-        <p:spPr>
-          <a:xfrm>
-            <a:off x="1956816" y="5102352"/>
-            <a:ext cx="1078992" cy="274320"/>
-          </a:xfrm>
-          <a:prstGeom prst="roundRect">
-            <a:avLst>
-              <a:gd name="adj" fmla="val 10000"/>
-            </a:avLst>
-          </a:prstGeom>
-          <a:solidFill>
-            <a:srgbClr val="FFFFFF"/>
-          </a:solidFill>
-          <a:ln w="12700">
-            <a:solidFill>
-              <a:srgbClr val="8A5A00"/>
-            </a:solidFill>
-          </a:ln>
-          <a:effectLst/>
-        </p:spPr>
-        <p:style>
-          <a:lnRef idx="1">
-            <a:schemeClr val="accent1"/>
-          </a:lnRef>
-          <a:fillRef idx="3">
-            <a:schemeClr val="accent1"/>
-          </a:fillRef>
-          <a:effectRef idx="2">
-            <a:schemeClr val="accent1"/>
-          </a:effectRef>
-          <a:fontRef idx="minor">
-            <a:schemeClr val="lt1"/>
-          </a:fontRef>
-        </p:style>
-        <p:txBody>
-          <a:bodyPr rtlCol="0" anchor="ctr" wrap="square" lIns="54864" rIns="54864" tIns="27432" bIns="27432"/>
-          <a:lstStyle/>
-          <a:p>
-            <a:pPr algn="ctr"/>
-            <a:r>
-              <a:rPr sz="950" b="0">
-                <a:solidFill>
-                  <a:srgbClr val="8A5A00"/>
-                </a:solidFill>
-                <a:latin typeface="Segoe UI"/>
-              </a:rPr>
-              <a:t>Skills</a:t>
-            </a:r>
-          </a:p>
-        </p:txBody>
-      </p:sp>
-      <p:sp>
-        <p:nvSpPr>
-          <p:cNvPr id="52" name="Rounded Rectangle 51"/>
-          <p:cNvSpPr/>
-          <p:nvPr/>
-        </p:nvSpPr>
-        <p:spPr>
-          <a:xfrm>
-            <a:off x="3145536" y="5102352"/>
-            <a:ext cx="1078992" cy="274320"/>
-          </a:xfrm>
-          <a:prstGeom prst="roundRect">
-            <a:avLst>
-              <a:gd name="adj" fmla="val 10000"/>
-            </a:avLst>
-          </a:prstGeom>
-          <a:solidFill>
-            <a:srgbClr val="FFFFFF"/>
-          </a:solidFill>
-          <a:ln w="12700">
-            <a:solidFill>
-              <a:srgbClr val="8A5A00"/>
-            </a:solidFill>
-          </a:ln>
-          <a:effectLst/>
-        </p:spPr>
-        <p:style>
-          <a:lnRef idx="1">
-            <a:schemeClr val="accent1"/>
-          </a:lnRef>
-          <a:fillRef idx="3">
-            <a:schemeClr val="accent1"/>
-          </a:fillRef>
-          <a:effectRef idx="2">
-            <a:schemeClr val="accent1"/>
-          </a:effectRef>
-          <a:fontRef idx="minor">
-            <a:schemeClr val="lt1"/>
-          </a:fontRef>
-        </p:style>
-        <p:txBody>
-          <a:bodyPr rtlCol="0" anchor="ctr" wrap="square" lIns="54864" rIns="54864" tIns="27432" bIns="27432"/>
-          <a:lstStyle/>
-          <a:p>
-            <a:pPr algn="ctr"/>
-            <a:r>
-              <a:rPr sz="950" b="0">
-                <a:solidFill>
-                  <a:srgbClr val="8A5A00"/>
-                </a:solidFill>
-                <a:latin typeface="Segoe UI"/>
-              </a:rPr>
-              <a:t>Workflows</a:t>
-            </a:r>
-          </a:p>
-        </p:txBody>
-      </p:sp>
-      <p:sp>
-        <p:nvSpPr>
-          <p:cNvPr id="53" name="Rounded Rectangle 52"/>
-          <p:cNvSpPr/>
-          <p:nvPr/>
-        </p:nvSpPr>
-        <p:spPr>
-          <a:xfrm>
-            <a:off x="4224528" y="5102352"/>
-            <a:ext cx="1115568" cy="274320"/>
-          </a:xfrm>
-          <a:prstGeom prst="roundRect">
-            <a:avLst>
-              <a:gd name="adj" fmla="val 10000"/>
-            </a:avLst>
-          </a:prstGeom>
-          <a:solidFill>
-            <a:srgbClr val="FFFFFF"/>
-          </a:solidFill>
-          <a:ln w="12700">
-            <a:solidFill>
-              <a:srgbClr val="8A5A00"/>
-            </a:solidFill>
-          </a:ln>
-          <a:effectLst/>
-        </p:spPr>
-        <p:style>
-          <a:lnRef idx="1">
-            <a:schemeClr val="accent1"/>
-          </a:lnRef>
-          <a:fillRef idx="3">
-            <a:schemeClr val="accent1"/>
-          </a:fillRef>
-          <a:effectRef idx="2">
-            <a:schemeClr val="accent1"/>
-          </a:effectRef>
-          <a:fontRef idx="minor">
-            <a:schemeClr val="lt1"/>
-          </a:fontRef>
-        </p:style>
-        <p:txBody>
-          <a:bodyPr rtlCol="0" anchor="ctr" wrap="square" lIns="54864" rIns="54864" tIns="27432" bIns="27432"/>
-          <a:lstStyle/>
-          <a:p>
-            <a:pPr algn="ctr"/>
-            <a:r>
-              <a:rPr sz="950" b="0">
-                <a:solidFill>
-                  <a:srgbClr val="8A5A00"/>
-                </a:solidFill>
-                <a:latin typeface="Segoe UI"/>
-              </a:rPr>
-              <a:t>nightly merge</a:t>
-            </a:r>
-          </a:p>
-        </p:txBody>
-      </p:sp>
-      <p:cxnSp>
-        <p:nvCxnSpPr>
-          <p:cNvPr id="54" name="Connector 53"/>
-          <p:cNvCxnSpPr/>
-          <p:nvPr/>
-        </p:nvCxnSpPr>
-        <p:spPr>
-          <a:xfrm>
-            <a:off x="4041648" y="5239511"/>
-            <a:ext cx="182880" cy="0"/>
-          </a:xfrm>
-          <a:prstGeom prst="line">
-            <a:avLst/>
-          </a:prstGeom>
-          <a:ln w="19050">
-            <a:solidFill>
-              <a:srgbClr val="8A5A00"/>
-            </a:solidFill>
-            <a:tailEnd type="triangle" w="med" len="med"/>
-          </a:ln>
-        </p:spPr>
-        <p:style>
-          <a:lnRef idx="2">
-            <a:schemeClr val="accent1"/>
-          </a:lnRef>
-          <a:fillRef idx="0">
-            <a:schemeClr val="accent1"/>
-          </a:fillRef>
-          <a:effectRef idx="1">
-            <a:schemeClr val="accent1"/>
-          </a:effectRef>
-          <a:fontRef idx="minor">
-            <a:schemeClr val="tx1"/>
-          </a:fontRef>
-        </p:style>
-      </p:cxnSp>
-      <p:sp>
-        <p:nvSpPr>
-          <p:cNvPr id="55" name="TextBox 54"/>
-          <p:cNvSpPr txBox="1"/>
-          <p:nvPr/>
-        </p:nvSpPr>
-        <p:spPr>
-          <a:xfrm>
-            <a:off x="768096" y="5504688"/>
-            <a:ext cx="5120640" cy="310896"/>
-          </a:xfrm>
-          <a:prstGeom prst="rect">
-            <a:avLst/>
-          </a:prstGeom>
-          <a:noFill/>
-        </p:spPr>
-        <p:txBody>
-          <a:bodyPr wrap="square" anchor="t" lIns="0" rIns="0" tIns="0" bIns="0">
-            <a:spAutoFit/>
-          </a:bodyPr>
-          <a:lstStyle/>
-          <a:p>
-            <a:pPr algn="l">
-              <a:spcAft>
-                <a:spcPts val="0"/>
-              </a:spcAft>
-            </a:pPr>
-            <a:r>
-              <a:rPr sz="850" b="0">
-                <a:solidFill>
-                  <a:srgbClr val="6B6B6B"/>
-                </a:solidFill>
-                <a:latin typeface="Segoe UI"/>
-              </a:rPr>
-              <a:t>markdown the agent writes and reuses — a fix found once becomes a procedure, and duplicates are swept up nightly</a:t>
-            </a:r>
-          </a:p>
-        </p:txBody>
-      </p:sp>
-      <p:sp>
-        <p:nvSpPr>
-          <p:cNvPr id="56" name="Rounded Rectangle 55"/>
-          <p:cNvSpPr/>
-          <p:nvPr/>
-        </p:nvSpPr>
-        <p:spPr>
-          <a:xfrm>
-            <a:off x="6309360" y="4718304"/>
-            <a:ext cx="5321808" cy="1188720"/>
-          </a:xfrm>
-          <a:prstGeom prst="roundRect">
-            <a:avLst>
-              <a:gd name="adj" fmla="val 10000"/>
-            </a:avLst>
-          </a:prstGeom>
-          <a:solidFill>
-            <a:srgbClr val="DCEEE7"/>
-          </a:solidFill>
-          <a:ln w="12700">
-            <a:solidFill>
-              <a:srgbClr val="1E6B52"/>
-            </a:solidFill>
-          </a:ln>
-          <a:effectLst/>
-        </p:spPr>
-        <p:style>
-          <a:lnRef idx="1">
-            <a:schemeClr val="accent1"/>
-          </a:lnRef>
-          <a:fillRef idx="3">
-            <a:schemeClr val="accent1"/>
-          </a:fillRef>
-          <a:effectRef idx="2">
-            <a:schemeClr val="accent1"/>
-          </a:effectRef>
-          <a:fontRef idx="minor">
-            <a:schemeClr val="lt1"/>
-          </a:fontRef>
-        </p:style>
-        <p:txBody>
-          <a:bodyPr rtlCol="0" anchor="ctr" wrap="square" lIns="54864" rIns="54864" tIns="27432" bIns="27432"/>
-          <a:lstStyle/>
-          <a:p>
-            <a:pPr algn="ctr"/>
-            <a:r>
-              <a:rPr sz="1150" b="1">
-                <a:solidFill>
-                  <a:srgbClr val="1E6B52"/>
-                </a:solidFill>
-                <a:latin typeface="Segoe UI"/>
-              </a:rPr>
-              <a:t>It remembers, without a database</a:t>
-            </a:r>
-          </a:p>
-        </p:txBody>
-      </p:sp>
-      <p:sp>
-        <p:nvSpPr>
-          <p:cNvPr id="57" name="Rounded Rectangle 56"/>
-          <p:cNvSpPr/>
-          <p:nvPr/>
-        </p:nvSpPr>
-        <p:spPr>
-          <a:xfrm>
-            <a:off x="6510528" y="5102352"/>
-            <a:ext cx="1115568" cy="274320"/>
-          </a:xfrm>
-          <a:prstGeom prst="roundRect">
-            <a:avLst>
-              <a:gd name="adj" fmla="val 10000"/>
-            </a:avLst>
-          </a:prstGeom>
-          <a:solidFill>
-            <a:srgbClr val="FFFFFF"/>
-          </a:solidFill>
-          <a:ln w="12700">
-            <a:solidFill>
-              <a:srgbClr val="1E6B52"/>
-            </a:solidFill>
-          </a:ln>
-          <a:effectLst/>
-        </p:spPr>
-        <p:style>
-          <a:lnRef idx="1">
-            <a:schemeClr val="accent1"/>
-          </a:lnRef>
-          <a:fillRef idx="3">
-            <a:schemeClr val="accent1"/>
-          </a:fillRef>
-          <a:effectRef idx="2">
-            <a:schemeClr val="accent1"/>
-          </a:effectRef>
-          <a:fontRef idx="minor">
-            <a:schemeClr val="lt1"/>
-          </a:fontRef>
-        </p:style>
-        <p:txBody>
-          <a:bodyPr rtlCol="0" anchor="ctr" wrap="square" lIns="54864" rIns="54864" tIns="27432" bIns="27432"/>
-          <a:lstStyle/>
-          <a:p>
-            <a:pPr algn="ctr"/>
-            <a:r>
-              <a:rPr sz="950" b="0">
-                <a:solidFill>
-                  <a:srgbClr val="1E6B52"/>
-                </a:solidFill>
-                <a:latin typeface="Segoe UI"/>
-              </a:rPr>
-              <a:t>Desktop</a:t>
-            </a:r>
-          </a:p>
-        </p:txBody>
-      </p:sp>
-      <p:cxnSp>
-        <p:nvCxnSpPr>
-          <p:cNvPr id="58" name="Connector 57"/>
-          <p:cNvCxnSpPr/>
-          <p:nvPr/>
-        </p:nvCxnSpPr>
-        <p:spPr>
-          <a:xfrm>
-            <a:off x="7626096" y="5239511"/>
-            <a:ext cx="201168" cy="0"/>
-          </a:xfrm>
-          <a:prstGeom prst="line">
-            <a:avLst/>
-          </a:prstGeom>
-          <a:ln w="19050">
-            <a:solidFill>
-              <a:srgbClr val="1E6B52"/>
-            </a:solidFill>
-            <a:tailEnd type="triangle" w="med" len="med"/>
-          </a:ln>
-        </p:spPr>
-        <p:style>
-          <a:lnRef idx="2">
-            <a:schemeClr val="accent1"/>
-          </a:lnRef>
-          <a:fillRef idx="0">
-            <a:schemeClr val="accent1"/>
-          </a:fillRef>
-          <a:effectRef idx="1">
-            <a:schemeClr val="accent1"/>
-          </a:effectRef>
-          <a:fontRef idx="minor">
-            <a:schemeClr val="tx1"/>
-          </a:fontRef>
-        </p:style>
-      </p:cxnSp>
-      <p:sp>
-        <p:nvSpPr>
-          <p:cNvPr id="59" name="Rounded Rectangle 58"/>
-          <p:cNvSpPr/>
-          <p:nvPr/>
-        </p:nvSpPr>
-        <p:spPr>
-          <a:xfrm>
-            <a:off x="7827264" y="5102352"/>
-            <a:ext cx="1005840" cy="274320"/>
-          </a:xfrm>
-          <a:prstGeom prst="roundRect">
-            <a:avLst>
-              <a:gd name="adj" fmla="val 10000"/>
-            </a:avLst>
-          </a:prstGeom>
-          <a:solidFill>
-            <a:srgbClr val="FFFFFF"/>
-          </a:solidFill>
-          <a:ln w="12700">
-            <a:solidFill>
-              <a:srgbClr val="1E6B52"/>
-            </a:solidFill>
-          </a:ln>
-          <a:effectLst/>
-        </p:spPr>
-        <p:style>
-          <a:lnRef idx="1">
-            <a:schemeClr val="accent1"/>
-          </a:lnRef>
-          <a:fillRef idx="3">
-            <a:schemeClr val="accent1"/>
-          </a:fillRef>
-          <a:effectRef idx="2">
-            <a:schemeClr val="accent1"/>
-          </a:effectRef>
-          <a:fontRef idx="minor">
-            <a:schemeClr val="lt1"/>
-          </a:fontRef>
-        </p:style>
-        <p:txBody>
-          <a:bodyPr rtlCol="0" anchor="ctr" wrap="square" lIns="54864" rIns="54864" tIns="27432" bIns="27432"/>
-          <a:lstStyle/>
-          <a:p>
-            <a:pPr algn="ctr"/>
-            <a:r>
-              <a:rPr sz="950" b="0">
-                <a:solidFill>
-                  <a:srgbClr val="1E6B52"/>
-                </a:solidFill>
-                <a:latin typeface="Segoe UI"/>
-              </a:rPr>
-              <a:t>Redact</a:t>
-            </a:r>
-          </a:p>
-        </p:txBody>
-      </p:sp>
-      <p:cxnSp>
-        <p:nvCxnSpPr>
-          <p:cNvPr id="60" name="Connector 59"/>
-          <p:cNvCxnSpPr/>
-          <p:nvPr/>
-        </p:nvCxnSpPr>
-        <p:spPr>
-          <a:xfrm>
-            <a:off x="8833104" y="5239511"/>
-            <a:ext cx="201168" cy="0"/>
-          </a:xfrm>
-          <a:prstGeom prst="line">
-            <a:avLst/>
-          </a:prstGeom>
-          <a:ln w="19050">
-            <a:solidFill>
-              <a:srgbClr val="1E6B52"/>
-            </a:solidFill>
-            <a:tailEnd type="triangle" w="med" len="med"/>
-          </a:ln>
-        </p:spPr>
-        <p:style>
-          <a:lnRef idx="2">
-            <a:schemeClr val="accent1"/>
-          </a:lnRef>
-          <a:fillRef idx="0">
-            <a:schemeClr val="accent1"/>
-          </a:fillRef>
-          <a:effectRef idx="1">
-            <a:schemeClr val="accent1"/>
-          </a:effectRef>
-          <a:fontRef idx="minor">
-            <a:schemeClr val="tx1"/>
-          </a:fontRef>
-        </p:style>
-      </p:cxnSp>
-      <p:sp>
-        <p:nvSpPr>
-          <p:cNvPr id="61" name="Rounded Rectangle 60"/>
-          <p:cNvSpPr/>
-          <p:nvPr/>
-        </p:nvSpPr>
-        <p:spPr>
-          <a:xfrm>
-            <a:off x="9034272" y="5102352"/>
-            <a:ext cx="1188720" cy="274320"/>
-          </a:xfrm>
-          <a:prstGeom prst="roundRect">
-            <a:avLst>
-              <a:gd name="adj" fmla="val 10000"/>
-            </a:avLst>
-          </a:prstGeom>
-          <a:solidFill>
-            <a:srgbClr val="FFFFFF"/>
-          </a:solidFill>
-          <a:ln w="12700">
-            <a:solidFill>
-              <a:srgbClr val="1E6B52"/>
-            </a:solidFill>
-          </a:ln>
-          <a:effectLst/>
-        </p:spPr>
-        <p:style>
-          <a:lnRef idx="1">
-            <a:schemeClr val="accent1"/>
-          </a:lnRef>
-          <a:fillRef idx="3">
-            <a:schemeClr val="accent1"/>
-          </a:fillRef>
-          <a:effectRef idx="2">
-            <a:schemeClr val="accent1"/>
-          </a:effectRef>
-          <a:fontRef idx="minor">
-            <a:schemeClr val="lt1"/>
-          </a:fontRef>
-        </p:style>
-        <p:txBody>
-          <a:bodyPr rtlCol="0" anchor="ctr" wrap="square" lIns="54864" rIns="54864" tIns="27432" bIns="27432"/>
-          <a:lstStyle/>
-          <a:p>
-            <a:pPr algn="ctr"/>
-            <a:r>
-              <a:rPr sz="950" b="0">
-                <a:solidFill>
-                  <a:srgbClr val="1E6B52"/>
-                </a:solidFill>
-                <a:latin typeface="Segoe UI"/>
-              </a:rPr>
-              <a:t>Team admin</a:t>
-            </a:r>
-          </a:p>
-        </p:txBody>
-      </p:sp>
-      <p:cxnSp>
-        <p:nvCxnSpPr>
-          <p:cNvPr id="62" name="Connector 61"/>
-          <p:cNvCxnSpPr/>
-          <p:nvPr/>
-        </p:nvCxnSpPr>
-        <p:spPr>
-          <a:xfrm>
-            <a:off x="10222992" y="5239511"/>
-            <a:ext cx="201168" cy="0"/>
-          </a:xfrm>
-          <a:prstGeom prst="line">
-            <a:avLst/>
-          </a:prstGeom>
-          <a:ln w="19050">
-            <a:solidFill>
-              <a:srgbClr val="1E6B52"/>
-            </a:solidFill>
-            <a:tailEnd type="triangle" w="med" len="med"/>
-          </a:ln>
-        </p:spPr>
-        <p:style>
-          <a:lnRef idx="2">
-            <a:schemeClr val="accent1"/>
-          </a:lnRef>
-          <a:fillRef idx="0">
-            <a:schemeClr val="accent1"/>
-          </a:fillRef>
-          <a:effectRef idx="1">
-            <a:schemeClr val="accent1"/>
-          </a:effectRef>
-          <a:fontRef idx="minor">
-            <a:schemeClr val="tx1"/>
-          </a:fontRef>
-        </p:style>
-      </p:cxnSp>
-      <p:sp>
-        <p:nvSpPr>
-          <p:cNvPr id="63" name="Rounded Rectangle 62"/>
-          <p:cNvSpPr/>
-          <p:nvPr/>
-        </p:nvSpPr>
-        <p:spPr>
-          <a:xfrm>
-            <a:off x="10424160" y="5102352"/>
-            <a:ext cx="1097280" cy="274320"/>
-          </a:xfrm>
-          <a:prstGeom prst="roundRect">
-            <a:avLst>
-              <a:gd name="adj" fmla="val 10000"/>
-            </a:avLst>
-          </a:prstGeom>
-          <a:solidFill>
-            <a:srgbClr val="FFFFFF"/>
-          </a:solidFill>
-          <a:ln w="12700">
-            <a:solidFill>
-              <a:srgbClr val="1E6B52"/>
-            </a:solidFill>
-          </a:ln>
-          <a:effectLst/>
-        </p:spPr>
-        <p:style>
-          <a:lnRef idx="1">
-            <a:schemeClr val="accent1"/>
-          </a:lnRef>
-          <a:fillRef idx="3">
-            <a:schemeClr val="accent1"/>
-          </a:fillRef>
-          <a:effectRef idx="2">
-            <a:schemeClr val="accent1"/>
-          </a:effectRef>
-          <a:fontRef idx="minor">
-            <a:schemeClr val="lt1"/>
-          </a:fontRef>
-        </p:style>
-        <p:txBody>
-          <a:bodyPr rtlCol="0" anchor="ctr" wrap="square" lIns="54864" rIns="54864" tIns="27432" bIns="27432"/>
-          <a:lstStyle/>
-          <a:p>
-            <a:pPr algn="ctr"/>
-            <a:r>
-              <a:rPr sz="950" b="0">
-                <a:solidFill>
-                  <a:srgbClr val="1E6B52"/>
-                </a:solidFill>
-                <a:latin typeface="Segoe UI"/>
-              </a:rPr>
-              <a:t>Company</a:t>
-            </a:r>
-          </a:p>
-        </p:txBody>
-      </p:sp>
-      <p:sp>
-        <p:nvSpPr>
-          <p:cNvPr id="64" name="TextBox 63"/>
-          <p:cNvSpPr txBox="1"/>
-          <p:nvPr/>
-        </p:nvSpPr>
-        <p:spPr>
-          <a:xfrm>
-            <a:off x="6510528" y="5504688"/>
-            <a:ext cx="4937760" cy="310896"/>
-          </a:xfrm>
-          <a:prstGeom prst="rect">
-            <a:avLst/>
-          </a:prstGeom>
-          <a:noFill/>
-        </p:spPr>
-        <p:txBody>
-          <a:bodyPr wrap="square" anchor="t" lIns="0" rIns="0" tIns="0" bIns="0">
-            <a:spAutoFit/>
-          </a:bodyPr>
-          <a:lstStyle/>
-          <a:p>
-            <a:pPr algn="l">
-              <a:spcAft>
-                <a:spcPts val="0"/>
-              </a:spcAft>
-            </a:pPr>
-            <a:r>
-              <a:rPr sz="850" b="0">
-                <a:solidFill>
-                  <a:srgbClr val="6B6B6B"/>
-                </a:solidFill>
-                <a:latin typeface="Segoe UI"/>
-              </a:rPr>
-              <a:t>only distilled notes travel · credentials blocked before they are offered · delete the folder and it is gone</a:t>
+              <a:t>plus any MCP server, a map of your codebase, a real shell and test runner, and a local model that can look at your screen</a:t>
             </a:r>
           </a:p>
         </p:txBody>
@@ -7218,7 +7098,7 @@
                 </a:solidFill>
                 <a:latin typeface="Segoe UI"/>
               </a:rPr>
-              <a:t>Containment — one policy, every path</a:t>
+              <a:t>Nothing gets out unless you allow it</a:t>
             </a:r>
           </a:p>
         </p:txBody>
@@ -7257,7 +7137,7 @@
                 </a:solidFill>
                 <a:latin typeface="Segoe UI"/>
               </a:rPr>
-              <a:t>A refused fetch was rerouted through a shell curl, then a notebook cell, and it worked. So the policy sits under all three.</a:t>
+              <a:t>Everything the agent does goes through one gate — a tool, a shell command or a notebook cell all get the same answer.</a:t>
             </a:r>
           </a:p>
         </p:txBody>
@@ -7340,7 +7220,7 @@
                 </a:solidFill>
                 <a:latin typeface="Segoe UI"/>
               </a:rPr>
-              <a:t>Measured on main @ 7d9e60ae, 2026-09-06. A guard, not a sandbox: an OS egress firewall is still the outer boundary, and that limit is printed in the product's own docs.</a:t>
+              <a:t>Measured on main @ 7d9e60ae, 2026-09-06. This is a strong guard, not a sealed box: a firewall on the machine is still the outer wall, and we say so in the product's docs.</a:t>
             </a:r>
           </a:p>
         </p:txBody>
@@ -7393,7 +7273,7 @@
         <p:spPr>
           <a:xfrm>
             <a:off x="566928" y="1243584"/>
-            <a:ext cx="1844040" cy="384048"/>
+            <a:ext cx="2212848" cy="384048"/>
           </a:xfrm>
           <a:prstGeom prst="rect">
             <a:avLst/>
@@ -7432,7 +7312,7 @@
         <p:spPr>
           <a:xfrm>
             <a:off x="640080" y="1645920"/>
-            <a:ext cx="1697736" cy="384048"/>
+            <a:ext cx="2066544" cy="384048"/>
           </a:xfrm>
           <a:prstGeom prst="rect">
             <a:avLst/>
@@ -7457,7 +7337,7 @@
                 </a:solidFill>
                 <a:latin typeface="Segoe UI"/>
               </a:rPr>
-              <a:t>vulnerabilities</a:t>
+              <a:t>known weaknesses</a:t>
             </a:r>
           </a:p>
         </p:txBody>
@@ -7470,8 +7350,8 @@
         </p:nvSpPr>
         <p:spPr>
           <a:xfrm>
-            <a:off x="2410968" y="1243584"/>
-            <a:ext cx="1844040" cy="384048"/>
+            <a:off x="2779776" y="1243584"/>
+            <a:ext cx="2212848" cy="384048"/>
           </a:xfrm>
           <a:prstGeom prst="rect">
             <a:avLst/>
@@ -7509,8 +7389,8 @@
         </p:nvSpPr>
         <p:spPr>
           <a:xfrm>
-            <a:off x="2484120" y="1645920"/>
-            <a:ext cx="1697736" cy="384048"/>
+            <a:off x="2852928" y="1645920"/>
+            <a:ext cx="2066544" cy="384048"/>
           </a:xfrm>
           <a:prstGeom prst="rect">
             <a:avLst/>
@@ -7535,7 +7415,7 @@
                 </a:solidFill>
                 <a:latin typeface="Segoe UI"/>
               </a:rPr>
-              <a:t>hotspots</a:t>
+              <a:t>security items to review</a:t>
             </a:r>
           </a:p>
         </p:txBody>
@@ -7548,7 +7428,7 @@
         </p:nvSpPr>
         <p:spPr>
           <a:xfrm>
-            <a:off x="2410968" y="1280160"/>
+            <a:off x="2779776" y="1280160"/>
             <a:ext cx="9525" cy="566928"/>
           </a:xfrm>
           <a:prstGeom prst="rect">
@@ -7592,8 +7472,8 @@
         </p:nvSpPr>
         <p:spPr>
           <a:xfrm>
-            <a:off x="4255008" y="1243584"/>
-            <a:ext cx="1844040" cy="384048"/>
+            <a:off x="4992624" y="1243584"/>
+            <a:ext cx="2212848" cy="384048"/>
           </a:xfrm>
           <a:prstGeom prst="rect">
             <a:avLst/>
@@ -7631,8 +7511,8 @@
         </p:nvSpPr>
         <p:spPr>
           <a:xfrm>
-            <a:off x="4328160" y="1645920"/>
-            <a:ext cx="1697736" cy="384048"/>
+            <a:off x="5065776" y="1645920"/>
+            <a:ext cx="2066544" cy="384048"/>
           </a:xfrm>
           <a:prstGeom prst="rect">
             <a:avLst/>
@@ -7657,7 +7537,7 @@
                 </a:solidFill>
                 <a:latin typeface="Segoe UI"/>
               </a:rPr>
-              <a:t>telemetry</a:t>
+              <a:t>usage data sent anywhere</a:t>
             </a:r>
           </a:p>
         </p:txBody>
@@ -7670,7 +7550,7 @@
         </p:nvSpPr>
         <p:spPr>
           <a:xfrm>
-            <a:off x="4255008" y="1280160"/>
+            <a:off x="4992624" y="1280160"/>
             <a:ext cx="9525" cy="566928"/>
           </a:xfrm>
           <a:prstGeom prst="rect">
@@ -7714,8 +7594,8 @@
         </p:nvSpPr>
         <p:spPr>
           <a:xfrm>
-            <a:off x="6099048" y="1243584"/>
-            <a:ext cx="1844040" cy="384048"/>
+            <a:off x="7205472" y="1243584"/>
+            <a:ext cx="2212848" cy="384048"/>
           </a:xfrm>
           <a:prstGeom prst="rect">
             <a:avLst/>
@@ -7753,8 +7633,8 @@
         </p:nvSpPr>
         <p:spPr>
           <a:xfrm>
-            <a:off x="6172200" y="1645920"/>
-            <a:ext cx="1697736" cy="384048"/>
+            <a:off x="7278624" y="1645920"/>
+            <a:ext cx="2066544" cy="384048"/>
           </a:xfrm>
           <a:prstGeom prst="rect">
             <a:avLst/>
@@ -7779,7 +7659,7 @@
                 </a:solidFill>
                 <a:latin typeface="Segoe UI"/>
               </a:rPr>
-              <a:t>CERT_NONE in the tree</a:t>
+              <a:t>connections that skip certificate checks</a:t>
             </a:r>
           </a:p>
         </p:txBody>
@@ -7792,7 +7672,7 @@
         </p:nvSpPr>
         <p:spPr>
           <a:xfrm>
-            <a:off x="6099048" y="1280160"/>
+            <a:off x="7205472" y="1280160"/>
             <a:ext cx="9525" cy="566928"/>
           </a:xfrm>
           <a:prstGeom prst="rect">
@@ -7836,8 +7716,8 @@
         </p:nvSpPr>
         <p:spPr>
           <a:xfrm>
-            <a:off x="7943088" y="1243584"/>
-            <a:ext cx="1844040" cy="384048"/>
+            <a:off x="9418320" y="1243584"/>
+            <a:ext cx="2212848" cy="384048"/>
           </a:xfrm>
           <a:prstGeom prst="rect">
             <a:avLst/>
@@ -7858,11 +7738,11 @@
             <a:r>
               <a:rPr sz="2500" b="1">
                 <a:solidFill>
-                  <a:srgbClr val="5B3A6E"/>
-                </a:solidFill>
-                <a:latin typeface="Segoe UI"/>
-              </a:rPr>
-              <a:t>9 / 19</a:t>
+                  <a:srgbClr val="8A5A00"/>
+                </a:solidFill>
+                <a:latin typeface="Segoe UI"/>
+              </a:rPr>
+              <a:t>20</a:t>
             </a:r>
           </a:p>
         </p:txBody>
@@ -7875,8 +7755,8 @@
         </p:nvSpPr>
         <p:spPr>
           <a:xfrm>
-            <a:off x="8016240" y="1645920"/>
-            <a:ext cx="1697736" cy="384048"/>
+            <a:off x="9491472" y="1645920"/>
+            <a:ext cx="2066544" cy="384048"/>
           </a:xfrm>
           <a:prstGeom prst="rect">
             <a:avLst/>
@@ -7901,7 +7781,7 @@
                 </a:solidFill>
                 <a:latin typeface="Segoe UI"/>
               </a:rPr>
-              <a:t>roles with no tools</a:t>
+              <a:t>actions that ask you first</a:t>
             </a:r>
           </a:p>
         </p:txBody>
@@ -7914,7 +7794,7 @@
         </p:nvSpPr>
         <p:spPr>
           <a:xfrm>
-            <a:off x="7943088" y="1280160"/>
+            <a:off x="9418320" y="1280160"/>
             <a:ext cx="9525" cy="566928"/>
           </a:xfrm>
           <a:prstGeom prst="rect">
@@ -7952,136 +7832,14 @@
       </p:sp>
       <p:sp>
         <p:nvSpPr>
-          <p:cNvPr id="21" name="TextBox 20"/>
-          <p:cNvSpPr txBox="1"/>
-          <p:nvPr/>
-        </p:nvSpPr>
-        <p:spPr>
-          <a:xfrm>
-            <a:off x="9787128" y="1243584"/>
-            <a:ext cx="1844040" cy="384048"/>
-          </a:xfrm>
-          <a:prstGeom prst="rect">
-            <a:avLst/>
-          </a:prstGeom>
-          <a:noFill/>
-        </p:spPr>
-        <p:txBody>
-          <a:bodyPr wrap="square" anchor="t" lIns="0" rIns="0" tIns="0" bIns="0">
-            <a:spAutoFit/>
-          </a:bodyPr>
-          <a:lstStyle/>
-          <a:p>
-            <a:pPr algn="ctr">
-              <a:spcAft>
-                <a:spcPts val="0"/>
-              </a:spcAft>
-            </a:pPr>
-            <a:r>
-              <a:rPr sz="2500" b="1">
-                <a:solidFill>
-                  <a:srgbClr val="8A5A00"/>
-                </a:solidFill>
-                <a:latin typeface="Segoe UI"/>
-              </a:rPr>
-              <a:t>20</a:t>
-            </a:r>
-          </a:p>
-        </p:txBody>
-      </p:sp>
-      <p:sp>
-        <p:nvSpPr>
-          <p:cNvPr id="22" name="TextBox 21"/>
-          <p:cNvSpPr txBox="1"/>
-          <p:nvPr/>
-        </p:nvSpPr>
-        <p:spPr>
-          <a:xfrm>
-            <a:off x="9860280" y="1645920"/>
-            <a:ext cx="1697736" cy="384048"/>
-          </a:xfrm>
-          <a:prstGeom prst="rect">
-            <a:avLst/>
-          </a:prstGeom>
-          <a:noFill/>
-        </p:spPr>
-        <p:txBody>
-          <a:bodyPr wrap="square" anchor="t" lIns="0" rIns="0" tIns="0" bIns="0">
-            <a:spAutoFit/>
-          </a:bodyPr>
-          <a:lstStyle/>
-          <a:p>
-            <a:pPr algn="ctr">
-              <a:spcAft>
-                <a:spcPts val="0"/>
-              </a:spcAft>
-            </a:pPr>
-            <a:r>
-              <a:rPr sz="1050" b="0">
-                <a:solidFill>
-                  <a:srgbClr val="6B6B6B"/>
-                </a:solidFill>
-                <a:latin typeface="Segoe UI"/>
-              </a:rPr>
-              <a:t>writes that ask a human</a:t>
-            </a:r>
-          </a:p>
-        </p:txBody>
-      </p:sp>
-      <p:sp>
-        <p:nvSpPr>
-          <p:cNvPr id="23" name="Rectangle 22"/>
+          <p:cNvPr id="21" name="Rounded Rectangle 20"/>
           <p:cNvSpPr/>
           <p:nvPr/>
         </p:nvSpPr>
         <p:spPr>
           <a:xfrm>
-            <a:off x="9787128" y="1280160"/>
-            <a:ext cx="9525" cy="566928"/>
-          </a:xfrm>
-          <a:prstGeom prst="rect">
-            <a:avLst/>
-          </a:prstGeom>
-          <a:solidFill>
-            <a:srgbClr val="C9C9C9"/>
-          </a:solidFill>
-          <a:ln>
-            <a:noFill/>
-          </a:ln>
-          <a:effectLst/>
-        </p:spPr>
-        <p:style>
-          <a:lnRef idx="1">
-            <a:schemeClr val="accent1"/>
-          </a:lnRef>
-          <a:fillRef idx="3">
-            <a:schemeClr val="accent1"/>
-          </a:fillRef>
-          <a:effectRef idx="2">
-            <a:schemeClr val="accent1"/>
-          </a:effectRef>
-          <a:fontRef idx="minor">
-            <a:schemeClr val="lt1"/>
-          </a:fontRef>
-        </p:style>
-        <p:txBody>
-          <a:bodyPr rtlCol="0" anchor="ctr"/>
-          <a:lstStyle/>
-          <a:p>
-            <a:pPr algn="ctr"/>
-          </a:p>
-        </p:txBody>
-      </p:sp>
-      <p:sp>
-        <p:nvSpPr>
-          <p:cNvPr id="24" name="Rounded Rectangle 23"/>
-          <p:cNvSpPr/>
-          <p:nvPr/>
-        </p:nvSpPr>
-        <p:spPr>
-          <a:xfrm>
-            <a:off x="566928" y="2066543"/>
-            <a:ext cx="2194560" cy="438912"/>
+            <a:off x="566928" y="2103120"/>
+            <a:ext cx="2615184" cy="420624"/>
           </a:xfrm>
           <a:prstGeom prst="roundRect">
             <a:avLst>
@@ -8118,13 +7876,13 @@
           <a:p>
             <a:pPr algn="ctr"/>
             <a:r>
-              <a:rPr sz="1100" b="1">
+              <a:rPr sz="1050" b="1">
                 <a:solidFill>
                   <a:srgbClr val="3A3A3A"/>
                 </a:solidFill>
                 <a:latin typeface="Segoe UI"/>
               </a:rPr>
-              <a:t>Tool call</a:t>
+              <a:t>What the agent runs</a:t>
             </a:r>
           </a:p>
           <a:p>
@@ -8136,21 +7894,21 @@
                 </a:solidFill>
                 <a:latin typeface="Segoe UI"/>
               </a:rPr>
-              <a:t>web · Jira · MCP</a:t>
+              <a:t>web · Jira · tools</a:t>
             </a:r>
           </a:p>
         </p:txBody>
       </p:sp>
       <p:cxnSp>
         <p:nvCxnSpPr>
-          <p:cNvPr id="25" name="Connector 24"/>
+          <p:cNvPr id="22" name="Connector 21"/>
           <p:cNvCxnSpPr/>
           <p:nvPr/>
         </p:nvCxnSpPr>
         <p:spPr>
           <a:xfrm>
-            <a:off x="2761488" y="2285999"/>
-            <a:ext cx="530352" cy="292609"/>
+            <a:off x="3182112" y="2313432"/>
+            <a:ext cx="475488" cy="283464"/>
           </a:xfrm>
           <a:prstGeom prst="line">
             <a:avLst/>
@@ -8179,14 +7937,14 @@
       </p:cxnSp>
       <p:sp>
         <p:nvSpPr>
-          <p:cNvPr id="26" name="Rounded Rectangle 25"/>
+          <p:cNvPr id="23" name="Rounded Rectangle 22"/>
           <p:cNvSpPr/>
           <p:nvPr/>
         </p:nvSpPr>
         <p:spPr>
           <a:xfrm>
-            <a:off x="566928" y="2578607"/>
-            <a:ext cx="2194560" cy="438912"/>
+            <a:off x="566928" y="2596896"/>
+            <a:ext cx="2615184" cy="420624"/>
           </a:xfrm>
           <a:prstGeom prst="roundRect">
             <a:avLst>
@@ -8223,13 +7981,13 @@
           <a:p>
             <a:pPr algn="ctr"/>
             <a:r>
-              <a:rPr sz="1100" b="1">
+              <a:rPr sz="1050" b="1">
                 <a:solidFill>
                   <a:srgbClr val="3A3A3A"/>
                 </a:solidFill>
                 <a:latin typeface="Segoe UI"/>
               </a:rPr>
-              <a:t>Shell command</a:t>
+              <a:t>What it types in a shell</a:t>
             </a:r>
           </a:p>
           <a:p>
@@ -8248,14 +8006,14 @@
       </p:sp>
       <p:cxnSp>
         <p:nvCxnSpPr>
-          <p:cNvPr id="27" name="Connector 26"/>
+          <p:cNvPr id="24" name="Connector 23"/>
           <p:cNvCxnSpPr/>
           <p:nvPr/>
         </p:nvCxnSpPr>
         <p:spPr>
           <a:xfrm flipV="1">
-            <a:off x="2761488" y="2578608"/>
-            <a:ext cx="530352" cy="219455"/>
+            <a:off x="3182112" y="2596896"/>
+            <a:ext cx="475488" cy="210312"/>
           </a:xfrm>
           <a:prstGeom prst="line">
             <a:avLst/>
@@ -8284,14 +8042,14 @@
       </p:cxnSp>
       <p:sp>
         <p:nvSpPr>
-          <p:cNvPr id="28" name="Rounded Rectangle 27"/>
+          <p:cNvPr id="25" name="Rounded Rectangle 24"/>
           <p:cNvSpPr/>
           <p:nvPr/>
         </p:nvSpPr>
         <p:spPr>
           <a:xfrm>
-            <a:off x="566928" y="3090671"/>
-            <a:ext cx="2194560" cy="438912"/>
+            <a:off x="566928" y="3090672"/>
+            <a:ext cx="2615184" cy="420624"/>
           </a:xfrm>
           <a:prstGeom prst="roundRect">
             <a:avLst>
@@ -8328,13 +8086,13 @@
           <a:p>
             <a:pPr algn="ctr"/>
             <a:r>
-              <a:rPr sz="1100" b="1">
+              <a:rPr sz="1050" b="1">
                 <a:solidFill>
                   <a:srgbClr val="3A3A3A"/>
                 </a:solidFill>
                 <a:latin typeface="Segoe UI"/>
               </a:rPr>
-              <a:t>Notebook cell</a:t>
+              <a:t>What it runs in a notebook</a:t>
             </a:r>
           </a:p>
           <a:p>
@@ -8346,21 +8104,21 @@
                 </a:solidFill>
                 <a:latin typeface="Segoe UI"/>
               </a:rPr>
-              <a:t>kernel getaddrinfo</a:t>
+              <a:t>its own code</a:t>
             </a:r>
           </a:p>
         </p:txBody>
       </p:sp>
       <p:cxnSp>
         <p:nvCxnSpPr>
-          <p:cNvPr id="29" name="Connector 28"/>
+          <p:cNvPr id="26" name="Connector 25"/>
           <p:cNvCxnSpPr/>
           <p:nvPr/>
         </p:nvCxnSpPr>
         <p:spPr>
           <a:xfrm flipV="1">
-            <a:off x="2761488" y="2578608"/>
-            <a:ext cx="530352" cy="731519"/>
+            <a:off x="3182112" y="2596896"/>
+            <a:ext cx="475488" cy="704088"/>
           </a:xfrm>
           <a:prstGeom prst="line">
             <a:avLst/>
@@ -8389,14 +8147,14 @@
       </p:cxnSp>
       <p:sp>
         <p:nvSpPr>
-          <p:cNvPr id="30" name="Rounded Rectangle 29"/>
+          <p:cNvPr id="27" name="Rounded Rectangle 26"/>
           <p:cNvSpPr/>
           <p:nvPr/>
         </p:nvSpPr>
         <p:spPr>
           <a:xfrm>
-            <a:off x="3291840" y="2066543"/>
-            <a:ext cx="2377440" cy="1463040"/>
+            <a:off x="3657600" y="2103120"/>
+            <a:ext cx="2103120" cy="1316736"/>
           </a:xfrm>
           <a:prstGeom prst="roundRect">
             <a:avLst>
@@ -8433,13 +8191,13 @@
           <a:p>
             <a:pPr algn="ctr"/>
             <a:r>
-              <a:rPr sz="1200" b="1">
+              <a:rPr sz="1250" b="1">
                 <a:solidFill>
                   <a:srgbClr val="1F4E79"/>
                 </a:solidFill>
                 <a:latin typeface="Segoe UI"/>
               </a:rPr>
-              <a:t>net/egress.py</a:t>
+              <a:t>One gate</a:t>
             </a:r>
           </a:p>
           <a:p>
@@ -8451,7 +8209,7 @@
                 </a:solidFill>
                 <a:latin typeface="Segoe UI"/>
               </a:rPr>
-              <a:t>one policy</a:t>
+              <a:t>the same answer</a:t>
             </a:r>
           </a:p>
           <a:p>
@@ -8463,7 +8221,7 @@
                 </a:solidFill>
                 <a:latin typeface="Segoe UI"/>
               </a:rPr>
-              <a:t>every transport</a:t>
+              <a:t>every time, even after</a:t>
             </a:r>
           </a:p>
           <a:p>
@@ -8475,7 +8233,7 @@
                 </a:solidFill>
                 <a:latin typeface="Segoe UI"/>
               </a:rPr>
-              <a:t>after every redirect</a:t>
+              <a:t>a redirect</a:t>
             </a:r>
           </a:p>
           <a:p>
@@ -8490,21 +8248,21 @@
                 </a:solidFill>
                 <a:latin typeface="Segoe UI"/>
               </a:rPr>
-              <a:t>unlisted = DENIED</a:t>
+              <a:t>not on the list = NO</a:t>
             </a:r>
           </a:p>
         </p:txBody>
       </p:sp>
       <p:cxnSp>
         <p:nvCxnSpPr>
-          <p:cNvPr id="31" name="Connector 30"/>
+          <p:cNvPr id="28" name="Connector 27"/>
           <p:cNvCxnSpPr/>
           <p:nvPr/>
         </p:nvCxnSpPr>
         <p:spPr>
           <a:xfrm>
-            <a:off x="5669280" y="2432304"/>
-            <a:ext cx="603504" cy="0"/>
+            <a:off x="5760720" y="2395728"/>
+            <a:ext cx="457200" cy="0"/>
           </a:xfrm>
           <a:prstGeom prst="line">
             <a:avLst/>
@@ -8533,14 +8291,14 @@
       </p:cxnSp>
       <p:cxnSp>
         <p:nvCxnSpPr>
-          <p:cNvPr id="32" name="Connector 31"/>
+          <p:cNvPr id="29" name="Connector 28"/>
           <p:cNvCxnSpPr/>
           <p:nvPr/>
         </p:nvCxnSpPr>
         <p:spPr>
           <a:xfrm>
-            <a:off x="5669280" y="3127248"/>
-            <a:ext cx="603504" cy="0"/>
+            <a:off x="5760720" y="3017520"/>
+            <a:ext cx="457200" cy="0"/>
           </a:xfrm>
           <a:prstGeom prst="line">
             <a:avLst/>
@@ -8569,14 +8327,14 @@
       </p:cxnSp>
       <p:sp>
         <p:nvSpPr>
-          <p:cNvPr id="33" name="Rounded Rectangle 32"/>
+          <p:cNvPr id="30" name="Rounded Rectangle 29"/>
           <p:cNvSpPr/>
           <p:nvPr/>
         </p:nvSpPr>
         <p:spPr>
           <a:xfrm>
-            <a:off x="6272784" y="2212848"/>
-            <a:ext cx="2487168" cy="457200"/>
+            <a:off x="6217920" y="2103120"/>
+            <a:ext cx="2615184" cy="384048"/>
           </a:xfrm>
           <a:prstGeom prst="roundRect">
             <a:avLst>
@@ -8613,32 +8371,30 @@
           <a:p>
             <a:pPr algn="ctr"/>
             <a:r>
-              <a:rPr sz="1050" b="1">
+              <a:rPr sz="1150" b="1">
                 <a:solidFill>
                   <a:srgbClr val="1E6B52"/>
                 </a:solidFill>
                 <a:latin typeface="Segoe UI"/>
               </a:rPr>
-              <a:t>ALLOWED</a:t>
-            </a:r>
-          </a:p>
-        </p:txBody>
-      </p:sp>
-      <p:sp>
-        <p:nvSpPr>
-          <p:cNvPr id="34" name="Rounded Rectangle 33"/>
+              <a:t>Allowed</a:t>
+            </a:r>
+          </a:p>
+        </p:txBody>
+      </p:sp>
+      <p:sp>
+        <p:nvSpPr>
+          <p:cNvPr id="31" name="Rounded Rectangle 30"/>
           <p:cNvSpPr/>
           <p:nvPr/>
         </p:nvSpPr>
         <p:spPr>
           <a:xfrm>
-            <a:off x="6272784" y="2724912"/>
-            <a:ext cx="2487168" cy="274320"/>
+            <a:off x="6217920" y="2487168"/>
+            <a:ext cx="2615184" cy="1115568"/>
           </a:xfrm>
           <a:prstGeom prst="roundRect">
-            <a:avLst>
-              <a:gd name="adj" fmla="val 10000"/>
-            </a:avLst>
+            <a:avLst/>
           </a:prstGeom>
           <a:solidFill>
             <a:srgbClr val="FFFFFF"/>
@@ -8665,32 +8421,23 @@
           </a:fontRef>
         </p:style>
         <p:txBody>
-          <a:bodyPr rtlCol="0" anchor="ctr" wrap="square" lIns="54864" rIns="54864" tIns="27432" bIns="27432"/>
+          <a:bodyPr rtlCol="0" anchor="ctr"/>
           <a:lstStyle/>
           <a:p>
             <a:pPr algn="ctr"/>
-            <a:r>
-              <a:rPr sz="900" b="0">
-                <a:solidFill>
-                  <a:srgbClr val="1E6B52"/>
-                </a:solidFill>
-                <a:latin typeface="Segoe UI"/>
-              </a:rPr>
-              <a:t>loopback · LAN · local registry</a:t>
-            </a:r>
-          </a:p>
-        </p:txBody>
-      </p:sp>
-      <p:sp>
-        <p:nvSpPr>
-          <p:cNvPr id="35" name="Rounded Rectangle 34"/>
+          </a:p>
+        </p:txBody>
+      </p:sp>
+      <p:sp>
+        <p:nvSpPr>
+          <p:cNvPr id="32" name="Rounded Rectangle 31"/>
           <p:cNvSpPr/>
           <p:nvPr/>
         </p:nvSpPr>
         <p:spPr>
           <a:xfrm>
-            <a:off x="6272784" y="3072384"/>
-            <a:ext cx="2487168" cy="274320"/>
+            <a:off x="6309360" y="2578608"/>
+            <a:ext cx="2432304" cy="274320"/>
           </a:xfrm>
           <a:prstGeom prst="roundRect">
             <a:avLst>
@@ -8727,27 +8474,27 @@
           <a:p>
             <a:pPr algn="ctr"/>
             <a:r>
-              <a:rPr sz="900" b="0">
+              <a:rPr sz="850" b="0">
                 <a:solidFill>
                   <a:srgbClr val="1E6B52"/>
                 </a:solidFill>
                 <a:latin typeface="Segoe UI"/>
               </a:rPr>
-              <a:t>git push to a named remote</a:t>
-            </a:r>
-          </a:p>
-        </p:txBody>
-      </p:sp>
-      <p:sp>
-        <p:nvSpPr>
-          <p:cNvPr id="36" name="Rounded Rectangle 35"/>
+              <a:t>your own network and machines</a:t>
+            </a:r>
+          </a:p>
+        </p:txBody>
+      </p:sp>
+      <p:sp>
+        <p:nvSpPr>
+          <p:cNvPr id="33" name="Rounded Rectangle 32"/>
           <p:cNvSpPr/>
           <p:nvPr/>
         </p:nvSpPr>
         <p:spPr>
           <a:xfrm>
-            <a:off x="6272784" y="3419856"/>
-            <a:ext cx="2487168" cy="274320"/>
+            <a:off x="6309360" y="2916936"/>
+            <a:ext cx="2432304" cy="274320"/>
           </a:xfrm>
           <a:prstGeom prst="roundRect">
             <a:avLst>
@@ -8784,27 +8531,84 @@
           <a:p>
             <a:pPr algn="ctr"/>
             <a:r>
-              <a:rPr sz="900" b="0">
+              <a:rPr sz="850" b="0">
                 <a:solidFill>
                   <a:srgbClr val="1E6B52"/>
                 </a:solidFill>
                 <a:latin typeface="Segoe UI"/>
               </a:rPr>
-              <a:t>ssh to a declared deploy box</a:t>
-            </a:r>
-          </a:p>
-        </p:txBody>
-      </p:sp>
-      <p:sp>
-        <p:nvSpPr>
-          <p:cNvPr id="37" name="Rounded Rectangle 36"/>
+              <a:t>pushing to your own git remote</a:t>
+            </a:r>
+          </a:p>
+        </p:txBody>
+      </p:sp>
+      <p:sp>
+        <p:nvSpPr>
+          <p:cNvPr id="34" name="Rounded Rectangle 33"/>
           <p:cNvSpPr/>
           <p:nvPr/>
         </p:nvSpPr>
         <p:spPr>
           <a:xfrm>
-            <a:off x="8961120" y="2212848"/>
-            <a:ext cx="2670048" cy="457200"/>
+            <a:off x="6309360" y="3255264"/>
+            <a:ext cx="2432304" cy="274320"/>
+          </a:xfrm>
+          <a:prstGeom prst="roundRect">
+            <a:avLst>
+              <a:gd name="adj" fmla="val 10000"/>
+            </a:avLst>
+          </a:prstGeom>
+          <a:solidFill>
+            <a:srgbClr val="FFFFFF"/>
+          </a:solidFill>
+          <a:ln w="12700">
+            <a:solidFill>
+              <a:srgbClr val="1E6B52"/>
+            </a:solidFill>
+          </a:ln>
+          <a:effectLst/>
+        </p:spPr>
+        <p:style>
+          <a:lnRef idx="1">
+            <a:schemeClr val="accent1"/>
+          </a:lnRef>
+          <a:fillRef idx="3">
+            <a:schemeClr val="accent1"/>
+          </a:fillRef>
+          <a:effectRef idx="2">
+            <a:schemeClr val="accent1"/>
+          </a:effectRef>
+          <a:fontRef idx="minor">
+            <a:schemeClr val="lt1"/>
+          </a:fontRef>
+        </p:style>
+        <p:txBody>
+          <a:bodyPr rtlCol="0" anchor="ctr" wrap="square" lIns="54864" rIns="54864" tIns="27432" bIns="27432"/>
+          <a:lstStyle/>
+          <a:p>
+            <a:pPr algn="ctr"/>
+            <a:r>
+              <a:rPr sz="850" b="0">
+                <a:solidFill>
+                  <a:srgbClr val="1E6B52"/>
+                </a:solidFill>
+                <a:latin typeface="Segoe UI"/>
+              </a:rPr>
+              <a:t>deploying to a server you named</a:t>
+            </a:r>
+          </a:p>
+        </p:txBody>
+      </p:sp>
+      <p:sp>
+        <p:nvSpPr>
+          <p:cNvPr id="35" name="Rounded Rectangle 34"/>
+          <p:cNvSpPr/>
+          <p:nvPr/>
+        </p:nvSpPr>
+        <p:spPr>
+          <a:xfrm>
+            <a:off x="9015984" y="2103120"/>
+            <a:ext cx="2615184" cy="384048"/>
           </a:xfrm>
           <a:prstGeom prst="roundRect">
             <a:avLst>
@@ -8841,32 +8645,30 @@
           <a:p>
             <a:pPr algn="ctr"/>
             <a:r>
-              <a:rPr sz="1050" b="1">
+              <a:rPr sz="1150" b="1">
                 <a:solidFill>
                   <a:srgbClr val="8C2F2F"/>
                 </a:solidFill>
                 <a:latin typeface="Segoe UI"/>
               </a:rPr>
-              <a:t>DENIED</a:t>
-            </a:r>
-          </a:p>
-        </p:txBody>
-      </p:sp>
-      <p:sp>
-        <p:nvSpPr>
-          <p:cNvPr id="38" name="Rounded Rectangle 37"/>
+              <a:t>Refused</a:t>
+            </a:r>
+          </a:p>
+        </p:txBody>
+      </p:sp>
+      <p:sp>
+        <p:nvSpPr>
+          <p:cNvPr id="36" name="Rounded Rectangle 35"/>
           <p:cNvSpPr/>
           <p:nvPr/>
         </p:nvSpPr>
         <p:spPr>
           <a:xfrm>
-            <a:off x="8961120" y="2724912"/>
-            <a:ext cx="2670048" cy="274320"/>
+            <a:off x="9015984" y="2487168"/>
+            <a:ext cx="2615184" cy="1115568"/>
           </a:xfrm>
           <a:prstGeom prst="roundRect">
-            <a:avLst>
-              <a:gd name="adj" fmla="val 10000"/>
-            </a:avLst>
+            <a:avLst/>
           </a:prstGeom>
           <a:solidFill>
             <a:srgbClr val="FFFFFF"/>
@@ -8893,32 +8695,23 @@
           </a:fontRef>
         </p:style>
         <p:txBody>
-          <a:bodyPr rtlCol="0" anchor="ctr" wrap="square" lIns="54864" rIns="54864" tIns="27432" bIns="27432"/>
+          <a:bodyPr rtlCol="0" anchor="ctr"/>
           <a:lstStyle/>
           <a:p>
             <a:pPr algn="ctr"/>
-            <a:r>
-              <a:rPr sz="900" b="0">
-                <a:solidFill>
-                  <a:srgbClr val="8C2F2F"/>
-                </a:solidFill>
-                <a:latin typeface="Segoe UI"/>
-              </a:rPr>
-              <a:t>scp · rsync · curl -d/-T · /dev/tcp</a:t>
-            </a:r>
-          </a:p>
-        </p:txBody>
-      </p:sp>
-      <p:sp>
-        <p:nvSpPr>
-          <p:cNvPr id="39" name="Rounded Rectangle 38"/>
+          </a:p>
+        </p:txBody>
+      </p:sp>
+      <p:sp>
+        <p:nvSpPr>
+          <p:cNvPr id="37" name="Rounded Rectangle 36"/>
           <p:cNvSpPr/>
           <p:nvPr/>
         </p:nvSpPr>
         <p:spPr>
           <a:xfrm>
-            <a:off x="8961120" y="3072384"/>
-            <a:ext cx="2670048" cy="274320"/>
+            <a:off x="9107424" y="2578608"/>
+            <a:ext cx="2432304" cy="274320"/>
           </a:xfrm>
           <a:prstGeom prst="roundRect">
             <a:avLst>
@@ -8955,27 +8748,27 @@
           <a:p>
             <a:pPr algn="ctr"/>
             <a:r>
-              <a:rPr sz="900" b="0">
+              <a:rPr sz="850" b="0">
                 <a:solidFill>
                   <a:srgbClr val="8C2F2F"/>
                 </a:solidFill>
                 <a:latin typeface="Segoe UI"/>
               </a:rPr>
-              <a:t>aws s3 cp · docker push · npm publish</a:t>
-            </a:r>
-          </a:p>
-        </p:txBody>
-      </p:sp>
-      <p:sp>
-        <p:nvSpPr>
-          <p:cNvPr id="40" name="Rounded Rectangle 39"/>
+              <a:t>copying files to an outside host</a:t>
+            </a:r>
+          </a:p>
+        </p:txBody>
+      </p:sp>
+      <p:sp>
+        <p:nvSpPr>
+          <p:cNvPr id="38" name="Rounded Rectangle 37"/>
           <p:cNvSpPr/>
           <p:nvPr/>
         </p:nvSpPr>
         <p:spPr>
           <a:xfrm>
-            <a:off x="8961120" y="3419856"/>
-            <a:ext cx="2670048" cy="274320"/>
+            <a:off x="9107424" y="2916936"/>
+            <a:ext cx="2432304" cy="274320"/>
           </a:xfrm>
           <a:prstGeom prst="roundRect">
             <a:avLst>
@@ -9012,27 +8805,84 @@
           <a:p>
             <a:pPr algn="ctr"/>
             <a:r>
-              <a:rPr sz="900" b="0">
+              <a:rPr sz="850" b="0">
                 <a:solidFill>
                   <a:srgbClr val="8C2F2F"/>
                 </a:solidFill>
                 <a:latin typeface="Segoe UI"/>
               </a:rPr>
-              <a:t>web search — deleted outright</a:t>
-            </a:r>
-          </a:p>
-        </p:txBody>
-      </p:sp>
-      <p:sp>
-        <p:nvSpPr>
-          <p:cNvPr id="41" name="Rounded Rectangle 40"/>
+              <a:t>uploading to cloud storage</a:t>
+            </a:r>
+          </a:p>
+        </p:txBody>
+      </p:sp>
+      <p:sp>
+        <p:nvSpPr>
+          <p:cNvPr id="39" name="Rounded Rectangle 38"/>
           <p:cNvSpPr/>
           <p:nvPr/>
         </p:nvSpPr>
         <p:spPr>
           <a:xfrm>
-            <a:off x="566928" y="3968496"/>
-            <a:ext cx="3621024" cy="1060704"/>
+            <a:off x="9107424" y="3255264"/>
+            <a:ext cx="2432304" cy="274320"/>
+          </a:xfrm>
+          <a:prstGeom prst="roundRect">
+            <a:avLst>
+              <a:gd name="adj" fmla="val 10000"/>
+            </a:avLst>
+          </a:prstGeom>
+          <a:solidFill>
+            <a:srgbClr val="FFFFFF"/>
+          </a:solidFill>
+          <a:ln w="12700">
+            <a:solidFill>
+              <a:srgbClr val="8C2F2F"/>
+            </a:solidFill>
+          </a:ln>
+          <a:effectLst/>
+        </p:spPr>
+        <p:style>
+          <a:lnRef idx="1">
+            <a:schemeClr val="accent1"/>
+          </a:lnRef>
+          <a:fillRef idx="3">
+            <a:schemeClr val="accent1"/>
+          </a:fillRef>
+          <a:effectRef idx="2">
+            <a:schemeClr val="accent1"/>
+          </a:effectRef>
+          <a:fontRef idx="minor">
+            <a:schemeClr val="lt1"/>
+          </a:fontRef>
+        </p:style>
+        <p:txBody>
+          <a:bodyPr rtlCol="0" anchor="ctr" wrap="square" lIns="54864" rIns="54864" tIns="27432" bIns="27432"/>
+          <a:lstStyle/>
+          <a:p>
+            <a:pPr algn="ctr"/>
+            <a:r>
+              <a:rPr sz="850" b="0">
+                <a:solidFill>
+                  <a:srgbClr val="8C2F2F"/>
+                </a:solidFill>
+                <a:latin typeface="Segoe UI"/>
+              </a:rPr>
+              <a:t>web search — removed completely</a:t>
+            </a:r>
+          </a:p>
+        </p:txBody>
+      </p:sp>
+      <p:sp>
+        <p:nvSpPr>
+          <p:cNvPr id="40" name="Rounded Rectangle 39"/>
+          <p:cNvSpPr/>
+          <p:nvPr/>
+        </p:nvSpPr>
+        <p:spPr>
+          <a:xfrm>
+            <a:off x="566928" y="3840480"/>
+            <a:ext cx="3621024" cy="384048"/>
           </a:xfrm>
           <a:prstGeom prst="roundRect">
             <a:avLst>
@@ -9075,26 +8925,24 @@
                 </a:solidFill>
                 <a:latin typeface="Segoe UI"/>
               </a:rPr>
-              <a:t>Who gets in</a:t>
-            </a:r>
-          </a:p>
-        </p:txBody>
-      </p:sp>
-      <p:sp>
-        <p:nvSpPr>
-          <p:cNvPr id="42" name="Rounded Rectangle 41"/>
+              <a:t>Who can get in</a:t>
+            </a:r>
+          </a:p>
+        </p:txBody>
+      </p:sp>
+      <p:sp>
+        <p:nvSpPr>
+          <p:cNvPr id="41" name="Rounded Rectangle 40"/>
           <p:cNvSpPr/>
           <p:nvPr/>
         </p:nvSpPr>
         <p:spPr>
           <a:xfrm>
-            <a:off x="713232" y="4315968"/>
-            <a:ext cx="3328416" cy="274320"/>
+            <a:off x="566928" y="4224528"/>
+            <a:ext cx="3621024" cy="804672"/>
           </a:xfrm>
           <a:prstGeom prst="roundRect">
-            <a:avLst>
-              <a:gd name="adj" fmla="val 10000"/>
-            </a:avLst>
+            <a:avLst/>
           </a:prstGeom>
           <a:solidFill>
             <a:srgbClr val="FFFFFF"/>
@@ -9121,32 +8969,23 @@
           </a:fontRef>
         </p:style>
         <p:txBody>
-          <a:bodyPr rtlCol="0" anchor="ctr" wrap="square" lIns="54864" rIns="54864" tIns="27432" bIns="27432"/>
+          <a:bodyPr rtlCol="0" anchor="ctr"/>
           <a:lstStyle/>
           <a:p>
             <a:pPr algn="ctr"/>
-            <a:r>
-              <a:rPr sz="900" b="0">
-                <a:solidFill>
-                  <a:srgbClr val="8A5A00"/>
-                </a:solidFill>
-                <a:latin typeface="Segoe UI"/>
-              </a:rPr>
-              <a:t>token on every /api/*  ·  CORS allow-list</a:t>
-            </a:r>
-          </a:p>
-        </p:txBody>
-      </p:sp>
-      <p:sp>
-        <p:nvSpPr>
-          <p:cNvPr id="43" name="Rounded Rectangle 42"/>
+          </a:p>
+        </p:txBody>
+      </p:sp>
+      <p:sp>
+        <p:nvSpPr>
+          <p:cNvPr id="42" name="Rounded Rectangle 41"/>
           <p:cNvSpPr/>
           <p:nvPr/>
         </p:nvSpPr>
         <p:spPr>
           <a:xfrm>
-            <a:off x="713232" y="4663440"/>
-            <a:ext cx="3328416" cy="274320"/>
+            <a:off x="676656" y="4315968"/>
+            <a:ext cx="3401568" cy="274320"/>
           </a:xfrm>
           <a:prstGeom prst="roundRect">
             <a:avLst>
@@ -9183,13 +9022,70 @@
           <a:p>
             <a:pPr algn="ctr"/>
             <a:r>
-              <a:rPr sz="900" b="0">
+              <a:rPr sz="850" b="0">
                 <a:solidFill>
                   <a:srgbClr val="8A5A00"/>
                 </a:solidFill>
                 <a:latin typeface="Segoe UI"/>
               </a:rPr>
-              <a:t>public bind + no token → refuses to boot</a:t>
+              <a:t>every request needs a key</a:t>
+            </a:r>
+          </a:p>
+        </p:txBody>
+      </p:sp>
+      <p:sp>
+        <p:nvSpPr>
+          <p:cNvPr id="43" name="Rounded Rectangle 42"/>
+          <p:cNvSpPr/>
+          <p:nvPr/>
+        </p:nvSpPr>
+        <p:spPr>
+          <a:xfrm>
+            <a:off x="676656" y="4654296"/>
+            <a:ext cx="3401568" cy="274320"/>
+          </a:xfrm>
+          <a:prstGeom prst="roundRect">
+            <a:avLst>
+              <a:gd name="adj" fmla="val 10000"/>
+            </a:avLst>
+          </a:prstGeom>
+          <a:solidFill>
+            <a:srgbClr val="FFFFFF"/>
+          </a:solidFill>
+          <a:ln w="12700">
+            <a:solidFill>
+              <a:srgbClr val="8A5A00"/>
+            </a:solidFill>
+          </a:ln>
+          <a:effectLst/>
+        </p:spPr>
+        <p:style>
+          <a:lnRef idx="1">
+            <a:schemeClr val="accent1"/>
+          </a:lnRef>
+          <a:fillRef idx="3">
+            <a:schemeClr val="accent1"/>
+          </a:fillRef>
+          <a:effectRef idx="2">
+            <a:schemeClr val="accent1"/>
+          </a:effectRef>
+          <a:fontRef idx="minor">
+            <a:schemeClr val="lt1"/>
+          </a:fontRef>
+        </p:style>
+        <p:txBody>
+          <a:bodyPr rtlCol="0" anchor="ctr" wrap="square" lIns="54864" rIns="54864" tIns="27432" bIns="27432"/>
+          <a:lstStyle/>
+          <a:p>
+            <a:pPr algn="ctr"/>
+            <a:r>
+              <a:rPr sz="850" b="0">
+                <a:solidFill>
+                  <a:srgbClr val="8A5A00"/>
+                </a:solidFill>
+                <a:latin typeface="Segoe UI"/>
+              </a:rPr>
+              <a:t>on a public address with no key, it refuses to start</a:t>
             </a:r>
           </a:p>
         </p:txBody>
@@ -9202,8 +9098,8 @@
         </p:nvSpPr>
         <p:spPr>
           <a:xfrm>
-            <a:off x="4370832" y="3968496"/>
-            <a:ext cx="3621024" cy="1060704"/>
+            <a:off x="4370832" y="3840480"/>
+            <a:ext cx="3621024" cy="384048"/>
           </a:xfrm>
           <a:prstGeom prst="roundRect">
             <a:avLst>
@@ -9246,7 +9142,7 @@
                 </a:solidFill>
                 <a:latin typeface="Segoe UI"/>
               </a:rPr>
-              <a:t>What drives it</a:t>
+              <a:t>Text it reads is not an order</a:t>
             </a:r>
           </a:p>
         </p:txBody>
@@ -9259,13 +9155,11 @@
         </p:nvSpPr>
         <p:spPr>
           <a:xfrm>
-            <a:off x="4517136" y="4315968"/>
-            <a:ext cx="3328416" cy="274320"/>
+            <a:off x="4370832" y="4224528"/>
+            <a:ext cx="3621024" cy="804672"/>
           </a:xfrm>
           <a:prstGeom prst="roundRect">
-            <a:avLst>
-              <a:gd name="adj" fmla="val 10000"/>
-            </a:avLst>
+            <a:avLst/>
           </a:prstGeom>
           <a:solidFill>
             <a:srgbClr val="FFFFFF"/>
@@ -9292,19 +9186,10 @@
           </a:fontRef>
         </p:style>
         <p:txBody>
-          <a:bodyPr rtlCol="0" anchor="ctr" wrap="square" lIns="54864" rIns="54864" tIns="27432" bIns="27432"/>
+          <a:bodyPr rtlCol="0" anchor="ctr"/>
           <a:lstStyle/>
           <a:p>
             <a:pPr algn="ctr"/>
-            <a:r>
-              <a:rPr sz="900" b="0">
-                <a:solidFill>
-                  <a:srgbClr val="8C2F2F"/>
-                </a:solidFill>
-                <a:latin typeface="Segoe UI"/>
-              </a:rPr>
-              <a:t>a ticket or a page is UNTRUSTED text</a:t>
-            </a:r>
           </a:p>
         </p:txBody>
       </p:sp>
@@ -9316,8 +9201,8 @@
         </p:nvSpPr>
         <p:spPr>
           <a:xfrm>
-            <a:off x="4517136" y="4663440"/>
-            <a:ext cx="3328416" cy="274320"/>
+            <a:off x="4480560" y="4315968"/>
+            <a:ext cx="3401568" cy="274320"/>
           </a:xfrm>
           <a:prstGeom prst="roundRect">
             <a:avLst>
@@ -9354,13 +9239,13 @@
           <a:p>
             <a:pPr algn="ctr"/>
             <a:r>
-              <a:rPr sz="900" b="0">
+              <a:rPr sz="850" b="0">
                 <a:solidFill>
                   <a:srgbClr val="8C2F2F"/>
                 </a:solidFill>
                 <a:latin typeface="Segoe UI"/>
               </a:rPr>
-              <a:t>so: containment, not detection</a:t>
+              <a:t>a ticket or web page could try to steer it</a:t>
             </a:r>
           </a:p>
         </p:txBody>
@@ -9373,8 +9258,65 @@
         </p:nvSpPr>
         <p:spPr>
           <a:xfrm>
-            <a:off x="8010144" y="3968496"/>
-            <a:ext cx="3621024" cy="1060704"/>
+            <a:off x="4480560" y="4654296"/>
+            <a:ext cx="3401568" cy="274320"/>
+          </a:xfrm>
+          <a:prstGeom prst="roundRect">
+            <a:avLst>
+              <a:gd name="adj" fmla="val 10000"/>
+            </a:avLst>
+          </a:prstGeom>
+          <a:solidFill>
+            <a:srgbClr val="FFFFFF"/>
+          </a:solidFill>
+          <a:ln w="12700">
+            <a:solidFill>
+              <a:srgbClr val="8C2F2F"/>
+            </a:solidFill>
+          </a:ln>
+          <a:effectLst/>
+        </p:spPr>
+        <p:style>
+          <a:lnRef idx="1">
+            <a:schemeClr val="accent1"/>
+          </a:lnRef>
+          <a:fillRef idx="3">
+            <a:schemeClr val="accent1"/>
+          </a:fillRef>
+          <a:effectRef idx="2">
+            <a:schemeClr val="accent1"/>
+          </a:effectRef>
+          <a:fontRef idx="minor">
+            <a:schemeClr val="lt1"/>
+          </a:fontRef>
+        </p:style>
+        <p:txBody>
+          <a:bodyPr rtlCol="0" anchor="ctr" wrap="square" lIns="54864" rIns="54864" tIns="27432" bIns="27432"/>
+          <a:lstStyle/>
+          <a:p>
+            <a:pPr algn="ctr"/>
+            <a:r>
+              <a:rPr sz="850" b="0">
+                <a:solidFill>
+                  <a:srgbClr val="8C2F2F"/>
+                </a:solidFill>
+                <a:latin typeface="Segoe UI"/>
+              </a:rPr>
+              <a:t>so we box it in rather than try to spot it</a:t>
+            </a:r>
+          </a:p>
+        </p:txBody>
+      </p:sp>
+      <p:sp>
+        <p:nvSpPr>
+          <p:cNvPr id="48" name="Rounded Rectangle 47"/>
+          <p:cNvSpPr/>
+          <p:nvPr/>
+        </p:nvSpPr>
+        <p:spPr>
+          <a:xfrm>
+            <a:off x="8010144" y="3840480"/>
+            <a:ext cx="3621024" cy="384048"/>
           </a:xfrm>
           <a:prstGeom prst="roundRect">
             <a:avLst>
@@ -9424,19 +9366,17 @@
       </p:sp>
       <p:sp>
         <p:nvSpPr>
-          <p:cNvPr id="48" name="Rounded Rectangle 47"/>
+          <p:cNvPr id="49" name="Rounded Rectangle 48"/>
           <p:cNvSpPr/>
           <p:nvPr/>
         </p:nvSpPr>
         <p:spPr>
           <a:xfrm>
-            <a:off x="8156448" y="4315968"/>
-            <a:ext cx="3328416" cy="274320"/>
+            <a:off x="8010144" y="4224528"/>
+            <a:ext cx="3621024" cy="804672"/>
           </a:xfrm>
           <a:prstGeom prst="roundRect">
-            <a:avLst>
-              <a:gd name="adj" fmla="val 10000"/>
-            </a:avLst>
+            <a:avLst/>
           </a:prstGeom>
           <a:solidFill>
             <a:srgbClr val="FFFFFF"/>
@@ -9463,32 +9403,23 @@
           </a:fontRef>
         </p:style>
         <p:txBody>
-          <a:bodyPr rtlCol="0" anchor="ctr" wrap="square" lIns="54864" rIns="54864" tIns="27432" bIns="27432"/>
+          <a:bodyPr rtlCol="0" anchor="ctr"/>
           <a:lstStyle/>
           <a:p>
             <a:pPr algn="ctr"/>
-            <a:r>
-              <a:rPr sz="900" b="0">
-                <a:solidFill>
-                  <a:srgbClr val="1E6B52"/>
-                </a:solidFill>
-                <a:latin typeface="Segoe UI"/>
-              </a:rPr>
-              <a:t>rate ceiling per role  ·  request meter</a:t>
-            </a:r>
-          </a:p>
-        </p:txBody>
-      </p:sp>
-      <p:sp>
-        <p:nvSpPr>
-          <p:cNvPr id="49" name="Rounded Rectangle 48"/>
+          </a:p>
+        </p:txBody>
+      </p:sp>
+      <p:sp>
+        <p:nvSpPr>
+          <p:cNvPr id="50" name="Rounded Rectangle 49"/>
           <p:cNvSpPr/>
           <p:nvPr/>
         </p:nvSpPr>
         <p:spPr>
           <a:xfrm>
-            <a:off x="8156448" y="4663440"/>
-            <a:ext cx="3328416" cy="274320"/>
+            <a:off x="8119872" y="4315968"/>
+            <a:ext cx="3401568" cy="274320"/>
           </a:xfrm>
           <a:prstGeom prst="roundRect">
             <a:avLst>
@@ -9525,27 +9456,84 @@
           <a:p>
             <a:pPr algn="ctr"/>
             <a:r>
-              <a:rPr sz="900" b="0">
+              <a:rPr sz="850" b="0">
                 <a:solidFill>
                   <a:srgbClr val="1E6B52"/>
                 </a:solidFill>
                 <a:latin typeface="Segoe UI"/>
               </a:rPr>
-              <a:t>local first; cloud only after a failure</a:t>
-            </a:r>
-          </a:p>
-        </p:txBody>
-      </p:sp>
-      <p:sp>
-        <p:nvSpPr>
-          <p:cNvPr id="50" name="TextBox 49"/>
+              <a:t>a cap on how often each specialist may call the model</a:t>
+            </a:r>
+          </a:p>
+        </p:txBody>
+      </p:sp>
+      <p:sp>
+        <p:nvSpPr>
+          <p:cNvPr id="51" name="Rounded Rectangle 50"/>
+          <p:cNvSpPr/>
+          <p:nvPr/>
+        </p:nvSpPr>
+        <p:spPr>
+          <a:xfrm>
+            <a:off x="8119872" y="4654296"/>
+            <a:ext cx="3401568" cy="274320"/>
+          </a:xfrm>
+          <a:prstGeom prst="roundRect">
+            <a:avLst>
+              <a:gd name="adj" fmla="val 10000"/>
+            </a:avLst>
+          </a:prstGeom>
+          <a:solidFill>
+            <a:srgbClr val="FFFFFF"/>
+          </a:solidFill>
+          <a:ln w="12700">
+            <a:solidFill>
+              <a:srgbClr val="1E6B52"/>
+            </a:solidFill>
+          </a:ln>
+          <a:effectLst/>
+        </p:spPr>
+        <p:style>
+          <a:lnRef idx="1">
+            <a:schemeClr val="accent1"/>
+          </a:lnRef>
+          <a:fillRef idx="3">
+            <a:schemeClr val="accent1"/>
+          </a:fillRef>
+          <a:effectRef idx="2">
+            <a:schemeClr val="accent1"/>
+          </a:effectRef>
+          <a:fontRef idx="minor">
+            <a:schemeClr val="lt1"/>
+          </a:fontRef>
+        </p:style>
+        <p:txBody>
+          <a:bodyPr rtlCol="0" anchor="ctr" wrap="square" lIns="54864" rIns="54864" tIns="27432" bIns="27432"/>
+          <a:lstStyle/>
+          <a:p>
+            <a:pPr algn="ctr"/>
+            <a:r>
+              <a:rPr sz="850" b="0">
+                <a:solidFill>
+                  <a:srgbClr val="1E6B52"/>
+                </a:solidFill>
+                <a:latin typeface="Segoe UI"/>
+              </a:rPr>
+              <a:t>your model first; a paid one only after a real failure</a:t>
+            </a:r>
+          </a:p>
+        </p:txBody>
+      </p:sp>
+      <p:sp>
+        <p:nvSpPr>
+          <p:cNvPr id="52" name="TextBox 51"/>
           <p:cNvSpPr txBox="1"/>
           <p:nvPr/>
         </p:nvSpPr>
         <p:spPr>
           <a:xfrm>
-            <a:off x="566928" y="5138928"/>
-            <a:ext cx="2743200" cy="219456"/>
+            <a:off x="566928" y="5175504"/>
+            <a:ext cx="3657600" cy="219456"/>
           </a:xfrm>
           <a:prstGeom prst="rect">
             <a:avLst/>
@@ -9564,26 +9552,26 @@
               </a:spcAft>
             </a:pPr>
             <a:r>
-              <a:rPr sz="1000" b="1">
+              <a:rPr sz="1050" b="1">
                 <a:solidFill>
                   <a:srgbClr val="8C2F2F"/>
                 </a:solidFill>
                 <a:latin typeface="Segoe UI"/>
               </a:rPr>
-              <a:t>Limits we publish</a:t>
-            </a:r>
-          </a:p>
-        </p:txBody>
-      </p:sp>
-      <p:sp>
-        <p:nvSpPr>
-          <p:cNvPr id="51" name="Rounded Rectangle 50"/>
+              <a:t>What this does NOT do</a:t>
+            </a:r>
+          </a:p>
+        </p:txBody>
+      </p:sp>
+      <p:sp>
+        <p:nvSpPr>
+          <p:cNvPr id="53" name="Rounded Rectangle 52"/>
           <p:cNvSpPr/>
           <p:nvPr/>
         </p:nvSpPr>
         <p:spPr>
           <a:xfrm>
-            <a:off x="566928" y="5394960"/>
+            <a:off x="566928" y="5431536"/>
             <a:ext cx="5413248" cy="274320"/>
           </a:xfrm>
           <a:prstGeom prst="roundRect">
@@ -9621,26 +9609,26 @@
           <a:p>
             <a:pPr algn="ctr"/>
             <a:r>
-              <a:rPr sz="900" b="0">
+              <a:rPr sz="850" b="0">
                 <a:solidFill>
                   <a:srgbClr val="8C2F2F"/>
                 </a:solidFill>
                 <a:latin typeface="Segoe UI"/>
               </a:rPr>
-              <a:t>the kernel guard is a guard, not a sandbox</a:t>
-            </a:r>
-          </a:p>
-        </p:txBody>
-      </p:sp>
-      <p:sp>
-        <p:nvSpPr>
-          <p:cNvPr id="52" name="Rounded Rectangle 51"/>
+              <a:t>a notebook cell shares the guard's own memory — it is a guard, not a sealed box</a:t>
+            </a:r>
+          </a:p>
+        </p:txBody>
+      </p:sp>
+      <p:sp>
+        <p:nvSpPr>
+          <p:cNvPr id="54" name="Rounded Rectangle 53"/>
           <p:cNvSpPr/>
           <p:nvPr/>
         </p:nvSpPr>
         <p:spPr>
           <a:xfrm>
-            <a:off x="6236208" y="5394960"/>
+            <a:off x="6236208" y="5431536"/>
             <a:ext cx="5413248" cy="274320"/>
           </a:xfrm>
           <a:prstGeom prst="roundRect">
@@ -9678,26 +9666,26 @@
           <a:p>
             <a:pPr algn="ctr"/>
             <a:r>
-              <a:rPr sz="900" b="0">
+              <a:rPr sz="850" b="0">
                 <a:solidFill>
                   <a:srgbClr val="8C2F2F"/>
                 </a:solidFill>
                 <a:latin typeface="Segoe UI"/>
               </a:rPr>
-              <a:t>a shell can open a socket the policy never sees</a:t>
-            </a:r>
-          </a:p>
-        </p:txBody>
-      </p:sp>
-      <p:sp>
-        <p:nvSpPr>
-          <p:cNvPr id="53" name="Rounded Rectangle 52"/>
+              <a:t>a shell can still open a connection the gate never sees</a:t>
+            </a:r>
+          </a:p>
+        </p:txBody>
+      </p:sp>
+      <p:sp>
+        <p:nvSpPr>
+          <p:cNvPr id="55" name="Rounded Rectangle 54"/>
           <p:cNvSpPr/>
           <p:nvPr/>
         </p:nvSpPr>
         <p:spPr>
           <a:xfrm>
-            <a:off x="566928" y="5724144"/>
+            <a:off x="566928" y="5760720"/>
             <a:ext cx="5413248" cy="274320"/>
           </a:xfrm>
           <a:prstGeom prst="roundRect">
@@ -9735,26 +9723,26 @@
           <a:p>
             <a:pPr algn="ctr"/>
             <a:r>
-              <a:rPr sz="900" b="0">
+              <a:rPr sz="850" b="0">
                 <a:solidFill>
                   <a:srgbClr val="8C2F2F"/>
                 </a:solidFill>
                 <a:latin typeface="Segoe UI"/>
               </a:rPr>
-              <a:t>fleet sync is unauthenticated by default</a:t>
-            </a:r>
-          </a:p>
-        </p:txBody>
-      </p:sp>
-      <p:sp>
-        <p:nvSpPr>
-          <p:cNvPr id="54" name="Rounded Rectangle 53"/>
+              <a:t>sharing memory between machines is open until you lock it down</a:t>
+            </a:r>
+          </a:p>
+        </p:txBody>
+      </p:sp>
+      <p:sp>
+        <p:nvSpPr>
+          <p:cNvPr id="56" name="Rounded Rectangle 55"/>
           <p:cNvSpPr/>
           <p:nvPr/>
         </p:nvSpPr>
         <p:spPr>
           <a:xfrm>
-            <a:off x="6236208" y="5724144"/>
+            <a:off x="6236208" y="5760720"/>
             <a:ext cx="5413248" cy="274320"/>
           </a:xfrm>
           <a:prstGeom prst="roundRect">
@@ -9792,13 +9780,13 @@
           <a:p>
             <a:pPr algn="ctr"/>
             <a:r>
-              <a:rPr sz="900" b="0">
+              <a:rPr sz="850" b="0">
                 <a:solidFill>
                   <a:srgbClr val="8C2F2F"/>
                 </a:solidFill>
                 <a:latin typeface="Segoe UI"/>
               </a:rPr>
-              <a:t>role tool filters fail OPEN, so a typo cannot brick an agent</a:t>
+              <a:t>if a specialist's tool list has a typo, the specialist still runs</a:t>
             </a:r>
           </a:p>
         </p:txBody>
@@ -9855,7 +9843,7 @@
                 </a:solidFill>
                 <a:latin typeface="Segoe UI"/>
               </a:rPr>
-              <a:t>The evidence, the gap, and the asks</a:t>
+              <a:t>What one person learns, the whole company keeps</a:t>
             </a:r>
           </a:p>
         </p:txBody>
@@ -9894,7 +9882,7 @@
                 </a:solidFill>
                 <a:latin typeface="Segoe UI"/>
               </a:rPr>
-              <a:t>The zeros are the PLATFORM's, read off the scanner API. What they do not cover is the middle column — said here rather than left to find.</a:t>
+              <a:t>Each machine learns on its own. Secrets are stripped, a team lead merges the rest, and other teams read it.</a:t>
             </a:r>
           </a:p>
         </p:txBody>
@@ -9977,7 +9965,7 @@
                 </a:solidFill>
                 <a:latin typeface="Segoe UI"/>
               </a:rPr>
-              <a:t>Measured on main @ 7d9e60ae, 2026-09-06. 71,204 lines, 542 files, 0.1% duplication; one build feeds both scanner families and a hermetic Docker target runs the suite clean-room.</a:t>
+              <a:t>Measured on main @ 7d9e60ae, 2026-09-06. It is a folder of text files and one small SQLite file — you can read it, search it, copy it to another machine, or delete it.</a:t>
             </a:r>
           </a:p>
         </p:txBody>
@@ -10023,179 +10011,27 @@
       </p:sp>
       <p:sp>
         <p:nvSpPr>
-          <p:cNvPr id="7" name="TextBox 6"/>
-          <p:cNvSpPr txBox="1"/>
-          <p:nvPr/>
-        </p:nvSpPr>
-        <p:spPr>
-          <a:xfrm>
-            <a:off x="566928" y="1243584"/>
-            <a:ext cx="1844040" cy="384048"/>
-          </a:xfrm>
-          <a:prstGeom prst="rect">
-            <a:avLst/>
-          </a:prstGeom>
-          <a:noFill/>
-        </p:spPr>
-        <p:txBody>
-          <a:bodyPr wrap="square" anchor="t" lIns="0" rIns="0" tIns="0" bIns="0">
-            <a:spAutoFit/>
-          </a:bodyPr>
-          <a:lstStyle/>
-          <a:p>
-            <a:pPr algn="ctr">
-              <a:spcAft>
-                <a:spcPts val="0"/>
-              </a:spcAft>
-            </a:pPr>
-            <a:r>
-              <a:rPr sz="2500" b="1">
-                <a:solidFill>
-                  <a:srgbClr val="1E6B52"/>
-                </a:solidFill>
-                <a:latin typeface="Segoe UI"/>
-              </a:rPr>
-              <a:t>0</a:t>
-            </a:r>
-          </a:p>
-        </p:txBody>
-      </p:sp>
-      <p:sp>
-        <p:nvSpPr>
-          <p:cNvPr id="8" name="TextBox 7"/>
-          <p:cNvSpPr txBox="1"/>
-          <p:nvPr/>
-        </p:nvSpPr>
-        <p:spPr>
-          <a:xfrm>
-            <a:off x="640080" y="1645920"/>
-            <a:ext cx="1697736" cy="384048"/>
-          </a:xfrm>
-          <a:prstGeom prst="rect">
-            <a:avLst/>
-          </a:prstGeom>
-          <a:noFill/>
-        </p:spPr>
-        <p:txBody>
-          <a:bodyPr wrap="square" anchor="t" lIns="0" rIns="0" tIns="0" bIns="0">
-            <a:spAutoFit/>
-          </a:bodyPr>
-          <a:lstStyle/>
-          <a:p>
-            <a:pPr algn="ctr">
-              <a:spcAft>
-                <a:spcPts val="0"/>
-              </a:spcAft>
-            </a:pPr>
-            <a:r>
-              <a:rPr sz="1050" b="0">
-                <a:solidFill>
-                  <a:srgbClr val="6B6B6B"/>
-                </a:solidFill>
-                <a:latin typeface="Segoe UI"/>
-              </a:rPr>
-              <a:t>bugs</a:t>
-            </a:r>
-          </a:p>
-        </p:txBody>
-      </p:sp>
-      <p:sp>
-        <p:nvSpPr>
-          <p:cNvPr id="9" name="TextBox 8"/>
-          <p:cNvSpPr txBox="1"/>
-          <p:nvPr/>
-        </p:nvSpPr>
-        <p:spPr>
-          <a:xfrm>
-            <a:off x="2410968" y="1243584"/>
-            <a:ext cx="1844040" cy="384048"/>
-          </a:xfrm>
-          <a:prstGeom prst="rect">
-            <a:avLst/>
-          </a:prstGeom>
-          <a:noFill/>
-        </p:spPr>
-        <p:txBody>
-          <a:bodyPr wrap="square" anchor="t" lIns="0" rIns="0" tIns="0" bIns="0">
-            <a:spAutoFit/>
-          </a:bodyPr>
-          <a:lstStyle/>
-          <a:p>
-            <a:pPr algn="ctr">
-              <a:spcAft>
-                <a:spcPts val="0"/>
-              </a:spcAft>
-            </a:pPr>
-            <a:r>
-              <a:rPr sz="2500" b="1">
-                <a:solidFill>
-                  <a:srgbClr val="1E6B52"/>
-                </a:solidFill>
-                <a:latin typeface="Segoe UI"/>
-              </a:rPr>
-              <a:t>0</a:t>
-            </a:r>
-          </a:p>
-        </p:txBody>
-      </p:sp>
-      <p:sp>
-        <p:nvSpPr>
-          <p:cNvPr id="10" name="TextBox 9"/>
-          <p:cNvSpPr txBox="1"/>
-          <p:nvPr/>
-        </p:nvSpPr>
-        <p:spPr>
-          <a:xfrm>
-            <a:off x="2484120" y="1645920"/>
-            <a:ext cx="1697736" cy="384048"/>
-          </a:xfrm>
-          <a:prstGeom prst="rect">
-            <a:avLst/>
-          </a:prstGeom>
-          <a:noFill/>
-        </p:spPr>
-        <p:txBody>
-          <a:bodyPr wrap="square" anchor="t" lIns="0" rIns="0" tIns="0" bIns="0">
-            <a:spAutoFit/>
-          </a:bodyPr>
-          <a:lstStyle/>
-          <a:p>
-            <a:pPr algn="ctr">
-              <a:spcAft>
-                <a:spcPts val="0"/>
-              </a:spcAft>
-            </a:pPr>
-            <a:r>
-              <a:rPr sz="1050" b="0">
-                <a:solidFill>
-                  <a:srgbClr val="6B6B6B"/>
-                </a:solidFill>
-                <a:latin typeface="Segoe UI"/>
-              </a:rPr>
-              <a:t>vulnerabilities</a:t>
-            </a:r>
-          </a:p>
-        </p:txBody>
-      </p:sp>
-      <p:sp>
-        <p:nvSpPr>
-          <p:cNvPr id="11" name="Rectangle 10"/>
+          <p:cNvPr id="7" name="Rounded Rectangle 6"/>
           <p:cNvSpPr/>
           <p:nvPr/>
         </p:nvSpPr>
         <p:spPr>
           <a:xfrm>
-            <a:off x="2410968" y="1280160"/>
-            <a:ext cx="9525" cy="566928"/>
-          </a:xfrm>
-          <a:prstGeom prst="rect">
-            <a:avLst/>
+            <a:off x="566928" y="1316736"/>
+            <a:ext cx="2487168" cy="914400"/>
+          </a:xfrm>
+          <a:prstGeom prst="roundRect">
+            <a:avLst>
+              <a:gd name="adj" fmla="val 10000"/>
+            </a:avLst>
           </a:prstGeom>
           <a:solidFill>
-            <a:srgbClr val="C9C9C9"/>
+            <a:srgbClr val="ECECEC"/>
           </a:solidFill>
-          <a:ln>
-            <a:noFill/>
+          <a:ln w="12700">
+            <a:solidFill>
+              <a:srgbClr val="3A3A3A"/>
+            </a:solidFill>
           </a:ln>
           <a:effectLst/>
         </p:spPr>
@@ -10214,110 +10050,105 @@
           </a:fontRef>
         </p:style>
         <p:txBody>
-          <a:bodyPr rtlCol="0" anchor="ctr"/>
+          <a:bodyPr rtlCol="0" anchor="ctr" wrap="square" lIns="54864" rIns="54864" tIns="27432" bIns="27432"/>
           <a:lstStyle/>
           <a:p>
             <a:pPr algn="ctr"/>
-          </a:p>
-        </p:txBody>
-      </p:sp>
-      <p:sp>
-        <p:nvSpPr>
-          <p:cNvPr id="12" name="TextBox 11"/>
-          <p:cNvSpPr txBox="1"/>
-          <p:nvPr/>
-        </p:nvSpPr>
-        <p:spPr>
-          <a:xfrm>
-            <a:off x="4255008" y="1243584"/>
-            <a:ext cx="1844040" cy="384048"/>
-          </a:xfrm>
-          <a:prstGeom prst="rect">
+            <a:r>
+              <a:rPr sz="1250" b="1">
+                <a:solidFill>
+                  <a:srgbClr val="3A3A3A"/>
+                </a:solidFill>
+                <a:latin typeface="Segoe UI"/>
+              </a:rPr>
+              <a:t>One machine</a:t>
+            </a:r>
+          </a:p>
+          <a:p>
+            <a:pPr algn="ctr"/>
+            <a:r>
+              <a:rPr sz="850" b="0">
+                <a:solidFill>
+                  <a:srgbClr val="1A1A1A"/>
+                </a:solidFill>
+                <a:latin typeface="Segoe UI"/>
+              </a:rPr>
+              <a:t>learns from every run</a:t>
+            </a:r>
+          </a:p>
+          <a:p>
+            <a:pPr algn="ctr"/>
+            <a:r>
+              <a:rPr sz="850" b="0">
+                <a:solidFill>
+                  <a:srgbClr val="1A1A1A"/>
+                </a:solidFill>
+                <a:latin typeface="Segoe UI"/>
+              </a:rPr>
+              <a:t>nothing raw ever leaves</a:t>
+            </a:r>
+          </a:p>
+        </p:txBody>
+      </p:sp>
+      <p:cxnSp>
+        <p:nvCxnSpPr>
+          <p:cNvPr id="8" name="Connector 7"/>
+          <p:cNvCxnSpPr/>
+          <p:nvPr/>
+        </p:nvCxnSpPr>
+        <p:spPr>
+          <a:xfrm>
+            <a:off x="3054096" y="1773936"/>
+            <a:ext cx="384048" cy="0"/>
+          </a:xfrm>
+          <a:prstGeom prst="line">
             <a:avLst/>
           </a:prstGeom>
-          <a:noFill/>
-        </p:spPr>
-        <p:txBody>
-          <a:bodyPr wrap="square" anchor="t" lIns="0" rIns="0" tIns="0" bIns="0">
-            <a:spAutoFit/>
-          </a:bodyPr>
-          <a:lstStyle/>
-          <a:p>
-            <a:pPr algn="ctr">
-              <a:spcAft>
-                <a:spcPts val="0"/>
-              </a:spcAft>
-            </a:pPr>
-            <a:r>
-              <a:rPr sz="2500" b="1">
-                <a:solidFill>
-                  <a:srgbClr val="1E6B52"/>
-                </a:solidFill>
-                <a:latin typeface="Segoe UI"/>
-              </a:rPr>
-              <a:t>0</a:t>
-            </a:r>
-          </a:p>
-        </p:txBody>
-      </p:sp>
-      <p:sp>
-        <p:nvSpPr>
-          <p:cNvPr id="13" name="TextBox 12"/>
-          <p:cNvSpPr txBox="1"/>
-          <p:nvPr/>
-        </p:nvSpPr>
-        <p:spPr>
-          <a:xfrm>
-            <a:off x="4328160" y="1645920"/>
-            <a:ext cx="1697736" cy="384048"/>
-          </a:xfrm>
-          <a:prstGeom prst="rect">
-            <a:avLst/>
-          </a:prstGeom>
-          <a:noFill/>
-        </p:spPr>
-        <p:txBody>
-          <a:bodyPr wrap="square" anchor="t" lIns="0" rIns="0" tIns="0" bIns="0">
-            <a:spAutoFit/>
-          </a:bodyPr>
-          <a:lstStyle/>
-          <a:p>
-            <a:pPr algn="ctr">
-              <a:spcAft>
-                <a:spcPts val="0"/>
-              </a:spcAft>
-            </a:pPr>
-            <a:r>
-              <a:rPr sz="1050" b="0">
-                <a:solidFill>
-                  <a:srgbClr val="6B6B6B"/>
-                </a:solidFill>
-                <a:latin typeface="Segoe UI"/>
-              </a:rPr>
-              <a:t>code smells</a:t>
-            </a:r>
-          </a:p>
-        </p:txBody>
-      </p:sp>
-      <p:sp>
-        <p:nvSpPr>
-          <p:cNvPr id="14" name="Rectangle 13"/>
+          <a:ln w="19050">
+            <a:solidFill>
+              <a:srgbClr val="C9C9C9"/>
+            </a:solidFill>
+            <a:tailEnd type="triangle" w="med" len="med"/>
+          </a:ln>
+        </p:spPr>
+        <p:style>
+          <a:lnRef idx="2">
+            <a:schemeClr val="accent1"/>
+          </a:lnRef>
+          <a:fillRef idx="0">
+            <a:schemeClr val="accent1"/>
+          </a:fillRef>
+          <a:effectRef idx="1">
+            <a:schemeClr val="accent1"/>
+          </a:effectRef>
+          <a:fontRef idx="minor">
+            <a:schemeClr val="tx1"/>
+          </a:fontRef>
+        </p:style>
+      </p:cxnSp>
+      <p:sp>
+        <p:nvSpPr>
+          <p:cNvPr id="9" name="Rounded Rectangle 8"/>
           <p:cNvSpPr/>
           <p:nvPr/>
         </p:nvSpPr>
         <p:spPr>
           <a:xfrm>
-            <a:off x="4255008" y="1280160"/>
-            <a:ext cx="9525" cy="566928"/>
-          </a:xfrm>
-          <a:prstGeom prst="rect">
-            <a:avLst/>
+            <a:off x="3438144" y="1316736"/>
+            <a:ext cx="2487168" cy="914400"/>
+          </a:xfrm>
+          <a:prstGeom prst="roundRect">
+            <a:avLst>
+              <a:gd name="adj" fmla="val 10000"/>
+            </a:avLst>
           </a:prstGeom>
           <a:solidFill>
-            <a:srgbClr val="C9C9C9"/>
+            <a:srgbClr val="F7ECD5"/>
           </a:solidFill>
-          <a:ln>
-            <a:noFill/>
+          <a:ln w="12700">
+            <a:solidFill>
+              <a:srgbClr val="8A5A00"/>
+            </a:solidFill>
           </a:ln>
           <a:effectLst/>
         </p:spPr>
@@ -10336,389 +10167,92 @@
           </a:fontRef>
         </p:style>
         <p:txBody>
-          <a:bodyPr rtlCol="0" anchor="ctr"/>
+          <a:bodyPr rtlCol="0" anchor="ctr" wrap="square" lIns="54864" rIns="54864" tIns="27432" bIns="27432"/>
           <a:lstStyle/>
           <a:p>
             <a:pPr algn="ctr"/>
-          </a:p>
-        </p:txBody>
-      </p:sp>
-      <p:sp>
-        <p:nvSpPr>
-          <p:cNvPr id="15" name="TextBox 14"/>
-          <p:cNvSpPr txBox="1"/>
-          <p:nvPr/>
-        </p:nvSpPr>
-        <p:spPr>
-          <a:xfrm>
-            <a:off x="6099048" y="1243584"/>
-            <a:ext cx="1844040" cy="384048"/>
-          </a:xfrm>
-          <a:prstGeom prst="rect">
+            <a:r>
+              <a:rPr sz="1250" b="1">
+                <a:solidFill>
+                  <a:srgbClr val="8A5A00"/>
+                </a:solidFill>
+                <a:latin typeface="Segoe UI"/>
+              </a:rPr>
+              <a:t>Secrets stripped</a:t>
+            </a:r>
+          </a:p>
+          <a:p>
+            <a:pPr algn="ctr"/>
+            <a:r>
+              <a:rPr sz="850" b="0">
+                <a:solidFill>
+                  <a:srgbClr val="1A1A1A"/>
+                </a:solidFill>
+                <a:latin typeface="Segoe UI"/>
+              </a:rPr>
+              <a:t>passwords and private notes</a:t>
+            </a:r>
+          </a:p>
+          <a:p>
+            <a:pPr algn="ctr"/>
+            <a:r>
+              <a:rPr sz="850" b="0">
+                <a:solidFill>
+                  <a:srgbClr val="1A1A1A"/>
+                </a:solidFill>
+                <a:latin typeface="Segoe UI"/>
+              </a:rPr>
+              <a:t>are blocked, not edited</a:t>
+            </a:r>
+          </a:p>
+        </p:txBody>
+      </p:sp>
+      <p:cxnSp>
+        <p:nvCxnSpPr>
+          <p:cNvPr id="10" name="Connector 9"/>
+          <p:cNvCxnSpPr/>
+          <p:nvPr/>
+        </p:nvCxnSpPr>
+        <p:spPr>
+          <a:xfrm>
+            <a:off x="5925312" y="1773936"/>
+            <a:ext cx="384048" cy="0"/>
+          </a:xfrm>
+          <a:prstGeom prst="line">
             <a:avLst/>
           </a:prstGeom>
-          <a:noFill/>
-        </p:spPr>
-        <p:txBody>
-          <a:bodyPr wrap="square" anchor="t" lIns="0" rIns="0" tIns="0" bIns="0">
-            <a:spAutoFit/>
-          </a:bodyPr>
-          <a:lstStyle/>
-          <a:p>
-            <a:pPr algn="ctr">
-              <a:spcAft>
-                <a:spcPts val="0"/>
-              </a:spcAft>
-            </a:pPr>
-            <a:r>
-              <a:rPr sz="2500" b="1">
-                <a:solidFill>
-                  <a:srgbClr val="1E6B52"/>
-                </a:solidFill>
-                <a:latin typeface="Segoe UI"/>
-              </a:rPr>
-              <a:t>A·A·A</a:t>
-            </a:r>
-          </a:p>
-        </p:txBody>
-      </p:sp>
-      <p:sp>
-        <p:nvSpPr>
-          <p:cNvPr id="16" name="TextBox 15"/>
-          <p:cNvSpPr txBox="1"/>
-          <p:nvPr/>
-        </p:nvSpPr>
-        <p:spPr>
-          <a:xfrm>
-            <a:off x="6172200" y="1645920"/>
-            <a:ext cx="1697736" cy="384048"/>
-          </a:xfrm>
-          <a:prstGeom prst="rect">
-            <a:avLst/>
-          </a:prstGeom>
-          <a:noFill/>
-        </p:spPr>
-        <p:txBody>
-          <a:bodyPr wrap="square" anchor="t" lIns="0" rIns="0" tIns="0" bIns="0">
-            <a:spAutoFit/>
-          </a:bodyPr>
-          <a:lstStyle/>
-          <a:p>
-            <a:pPr algn="ctr">
-              <a:spcAft>
-                <a:spcPts val="0"/>
-              </a:spcAft>
-            </a:pPr>
-            <a:r>
-              <a:rPr sz="1050" b="0">
-                <a:solidFill>
-                  <a:srgbClr val="6B6B6B"/>
-                </a:solidFill>
-                <a:latin typeface="Segoe UI"/>
-              </a:rPr>
-              <a:t>Sonar ratings</a:t>
-            </a:r>
-          </a:p>
-        </p:txBody>
-      </p:sp>
-      <p:sp>
-        <p:nvSpPr>
-          <p:cNvPr id="17" name="Rectangle 16"/>
-          <p:cNvSpPr/>
-          <p:nvPr/>
-        </p:nvSpPr>
-        <p:spPr>
-          <a:xfrm>
-            <a:off x="6099048" y="1280160"/>
-            <a:ext cx="9525" cy="566928"/>
-          </a:xfrm>
-          <a:prstGeom prst="rect">
-            <a:avLst/>
-          </a:prstGeom>
-          <a:solidFill>
-            <a:srgbClr val="C9C9C9"/>
-          </a:solidFill>
-          <a:ln>
-            <a:noFill/>
+          <a:ln w="19050">
+            <a:solidFill>
+              <a:srgbClr val="C9C9C9"/>
+            </a:solidFill>
+            <a:tailEnd type="triangle" w="med" len="med"/>
           </a:ln>
-          <a:effectLst/>
         </p:spPr>
         <p:style>
-          <a:lnRef idx="1">
+          <a:lnRef idx="2">
             <a:schemeClr val="accent1"/>
           </a:lnRef>
-          <a:fillRef idx="3">
+          <a:fillRef idx="0">
             <a:schemeClr val="accent1"/>
           </a:fillRef>
-          <a:effectRef idx="2">
+          <a:effectRef idx="1">
             <a:schemeClr val="accent1"/>
           </a:effectRef>
           <a:fontRef idx="minor">
-            <a:schemeClr val="lt1"/>
+            <a:schemeClr val="tx1"/>
           </a:fontRef>
         </p:style>
-        <p:txBody>
-          <a:bodyPr rtlCol="0" anchor="ctr"/>
-          <a:lstStyle/>
-          <a:p>
-            <a:pPr algn="ctr"/>
-          </a:p>
-        </p:txBody>
-      </p:sp>
-      <p:sp>
-        <p:nvSpPr>
-          <p:cNvPr id="18" name="TextBox 17"/>
-          <p:cNvSpPr txBox="1"/>
-          <p:nvPr/>
-        </p:nvSpPr>
-        <p:spPr>
-          <a:xfrm>
-            <a:off x="7943088" y="1243584"/>
-            <a:ext cx="1844040" cy="384048"/>
-          </a:xfrm>
-          <a:prstGeom prst="rect">
-            <a:avLst/>
-          </a:prstGeom>
-          <a:noFill/>
-        </p:spPr>
-        <p:txBody>
-          <a:bodyPr wrap="square" anchor="t" lIns="0" rIns="0" tIns="0" bIns="0">
-            <a:spAutoFit/>
-          </a:bodyPr>
-          <a:lstStyle/>
-          <a:p>
-            <a:pPr algn="ctr">
-              <a:spcAft>
-                <a:spcPts val="0"/>
-              </a:spcAft>
-            </a:pPr>
-            <a:r>
-              <a:rPr sz="2500" b="1">
-                <a:solidFill>
-                  <a:srgbClr val="1F4E79"/>
-                </a:solidFill>
-                <a:latin typeface="Segoe UI"/>
-              </a:rPr>
-              <a:t>8,606</a:t>
-            </a:r>
-          </a:p>
-        </p:txBody>
-      </p:sp>
-      <p:sp>
-        <p:nvSpPr>
-          <p:cNvPr id="19" name="TextBox 18"/>
-          <p:cNvSpPr txBox="1"/>
-          <p:nvPr/>
-        </p:nvSpPr>
-        <p:spPr>
-          <a:xfrm>
-            <a:off x="8016240" y="1645920"/>
-            <a:ext cx="1697736" cy="384048"/>
-          </a:xfrm>
-          <a:prstGeom prst="rect">
-            <a:avLst/>
-          </a:prstGeom>
-          <a:noFill/>
-        </p:spPr>
-        <p:txBody>
-          <a:bodyPr wrap="square" anchor="t" lIns="0" rIns="0" tIns="0" bIns="0">
-            <a:spAutoFit/>
-          </a:bodyPr>
-          <a:lstStyle/>
-          <a:p>
-            <a:pPr algn="ctr">
-              <a:spcAft>
-                <a:spcPts val="0"/>
-              </a:spcAft>
-            </a:pPr>
-            <a:r>
-              <a:rPr sz="1050" b="0">
-                <a:solidFill>
-                  <a:srgbClr val="6B6B6B"/>
-                </a:solidFill>
-                <a:latin typeface="Segoe UI"/>
-              </a:rPr>
-              <a:t>tests</a:t>
-            </a:r>
-          </a:p>
-        </p:txBody>
-      </p:sp>
-      <p:sp>
-        <p:nvSpPr>
-          <p:cNvPr id="20" name="Rectangle 19"/>
+      </p:cxnSp>
+      <p:sp>
+        <p:nvSpPr>
+          <p:cNvPr id="11" name="Rounded Rectangle 10"/>
           <p:cNvSpPr/>
           <p:nvPr/>
         </p:nvSpPr>
         <p:spPr>
           <a:xfrm>
-            <a:off x="7943088" y="1280160"/>
-            <a:ext cx="9525" cy="566928"/>
-          </a:xfrm>
-          <a:prstGeom prst="rect">
-            <a:avLst/>
-          </a:prstGeom>
-          <a:solidFill>
-            <a:srgbClr val="C9C9C9"/>
-          </a:solidFill>
-          <a:ln>
-            <a:noFill/>
-          </a:ln>
-          <a:effectLst/>
-        </p:spPr>
-        <p:style>
-          <a:lnRef idx="1">
-            <a:schemeClr val="accent1"/>
-          </a:lnRef>
-          <a:fillRef idx="3">
-            <a:schemeClr val="accent1"/>
-          </a:fillRef>
-          <a:effectRef idx="2">
-            <a:schemeClr val="accent1"/>
-          </a:effectRef>
-          <a:fontRef idx="minor">
-            <a:schemeClr val="lt1"/>
-          </a:fontRef>
-        </p:style>
-        <p:txBody>
-          <a:bodyPr rtlCol="0" anchor="ctr"/>
-          <a:lstStyle/>
-          <a:p>
-            <a:pPr algn="ctr"/>
-          </a:p>
-        </p:txBody>
-      </p:sp>
-      <p:sp>
-        <p:nvSpPr>
-          <p:cNvPr id="21" name="TextBox 20"/>
-          <p:cNvSpPr txBox="1"/>
-          <p:nvPr/>
-        </p:nvSpPr>
-        <p:spPr>
-          <a:xfrm>
-            <a:off x="9787128" y="1243584"/>
-            <a:ext cx="1844040" cy="384048"/>
-          </a:xfrm>
-          <a:prstGeom prst="rect">
-            <a:avLst/>
-          </a:prstGeom>
-          <a:noFill/>
-        </p:spPr>
-        <p:txBody>
-          <a:bodyPr wrap="square" anchor="t" lIns="0" rIns="0" tIns="0" bIns="0">
-            <a:spAutoFit/>
-          </a:bodyPr>
-          <a:lstStyle/>
-          <a:p>
-            <a:pPr algn="ctr">
-              <a:spcAft>
-                <a:spcPts val="0"/>
-              </a:spcAft>
-            </a:pPr>
-            <a:r>
-              <a:rPr sz="2500" b="1">
-                <a:solidFill>
-                  <a:srgbClr val="1F4E79"/>
-                </a:solidFill>
-                <a:latin typeface="Segoe UI"/>
-              </a:rPr>
-              <a:t>82.8%</a:t>
-            </a:r>
-          </a:p>
-        </p:txBody>
-      </p:sp>
-      <p:sp>
-        <p:nvSpPr>
-          <p:cNvPr id="22" name="TextBox 21"/>
-          <p:cNvSpPr txBox="1"/>
-          <p:nvPr/>
-        </p:nvSpPr>
-        <p:spPr>
-          <a:xfrm>
-            <a:off x="9860280" y="1645920"/>
-            <a:ext cx="1697736" cy="384048"/>
-          </a:xfrm>
-          <a:prstGeom prst="rect">
-            <a:avLst/>
-          </a:prstGeom>
-          <a:noFill/>
-        </p:spPr>
-        <p:txBody>
-          <a:bodyPr wrap="square" anchor="t" lIns="0" rIns="0" tIns="0" bIns="0">
-            <a:spAutoFit/>
-          </a:bodyPr>
-          <a:lstStyle/>
-          <a:p>
-            <a:pPr algn="ctr">
-              <a:spcAft>
-                <a:spcPts val="0"/>
-              </a:spcAft>
-            </a:pPr>
-            <a:r>
-              <a:rPr sz="1050" b="0">
-                <a:solidFill>
-                  <a:srgbClr val="6B6B6B"/>
-                </a:solidFill>
-                <a:latin typeface="Segoe UI"/>
-              </a:rPr>
-              <a:t>coverage (86.7% pytest-cov)</a:t>
-            </a:r>
-          </a:p>
-        </p:txBody>
-      </p:sp>
-      <p:sp>
-        <p:nvSpPr>
-          <p:cNvPr id="23" name="Rectangle 22"/>
-          <p:cNvSpPr/>
-          <p:nvPr/>
-        </p:nvSpPr>
-        <p:spPr>
-          <a:xfrm>
-            <a:off x="9787128" y="1280160"/>
-            <a:ext cx="9525" cy="566928"/>
-          </a:xfrm>
-          <a:prstGeom prst="rect">
-            <a:avLst/>
-          </a:prstGeom>
-          <a:solidFill>
-            <a:srgbClr val="C9C9C9"/>
-          </a:solidFill>
-          <a:ln>
-            <a:noFill/>
-          </a:ln>
-          <a:effectLst/>
-        </p:spPr>
-        <p:style>
-          <a:lnRef idx="1">
-            <a:schemeClr val="accent1"/>
-          </a:lnRef>
-          <a:fillRef idx="3">
-            <a:schemeClr val="accent1"/>
-          </a:fillRef>
-          <a:effectRef idx="2">
-            <a:schemeClr val="accent1"/>
-          </a:effectRef>
-          <a:fontRef idx="minor">
-            <a:schemeClr val="lt1"/>
-          </a:fontRef>
-        </p:style>
-        <p:txBody>
-          <a:bodyPr rtlCol="0" anchor="ctr"/>
-          <a:lstStyle/>
-          <a:p>
-            <a:pPr algn="ctr"/>
-          </a:p>
-        </p:txBody>
-      </p:sp>
-      <p:sp>
-        <p:nvSpPr>
-          <p:cNvPr id="24" name="Rounded Rectangle 23"/>
-          <p:cNvSpPr/>
-          <p:nvPr/>
-        </p:nvSpPr>
-        <p:spPr>
-          <a:xfrm>
-            <a:off x="566928" y="2139696"/>
-            <a:ext cx="3621024" cy="457200"/>
+            <a:off x="6309360" y="1316736"/>
+            <a:ext cx="2487168" cy="914400"/>
           </a:xfrm>
           <a:prstGeom prst="roundRect">
             <a:avLst>
@@ -10755,32 +10289,228 @@
           <a:p>
             <a:pPr algn="ctr"/>
             <a:r>
-              <a:rPr sz="1150" b="1">
+              <a:rPr sz="1250" b="1">
                 <a:solidFill>
                   <a:srgbClr val="1E6B52"/>
                 </a:solidFill>
                 <a:latin typeface="Segoe UI"/>
               </a:rPr>
-              <a:t>MEASURED — the platform</a:t>
-            </a:r>
-          </a:p>
-        </p:txBody>
-      </p:sp>
-      <p:sp>
-        <p:nvSpPr>
-          <p:cNvPr id="25" name="Rounded Rectangle 24"/>
+              <a:t>Your team</a:t>
+            </a:r>
+          </a:p>
+          <a:p>
+            <a:pPr algn="ctr"/>
+            <a:r>
+              <a:rPr sz="850" b="0">
+                <a:solidFill>
+                  <a:srgbClr val="1A1A1A"/>
+                </a:solidFill>
+                <a:latin typeface="Segoe UI"/>
+              </a:rPr>
+              <a:t>one lead merges it</a:t>
+            </a:r>
+          </a:p>
+          <a:p>
+            <a:pPr algn="ctr"/>
+            <a:r>
+              <a:rPr sz="850" b="0">
+                <a:solidFill>
+                  <a:srgbClr val="1A1A1A"/>
+                </a:solidFill>
+                <a:latin typeface="Segoe UI"/>
+              </a:rPr>
+              <a:t>into the team's memory</a:t>
+            </a:r>
+          </a:p>
+        </p:txBody>
+      </p:sp>
+      <p:cxnSp>
+        <p:nvCxnSpPr>
+          <p:cNvPr id="12" name="Connector 11"/>
+          <p:cNvCxnSpPr/>
+          <p:nvPr/>
+        </p:nvCxnSpPr>
+        <p:spPr>
+          <a:xfrm>
+            <a:off x="8796528" y="1773936"/>
+            <a:ext cx="384048" cy="0"/>
+          </a:xfrm>
+          <a:prstGeom prst="line">
+            <a:avLst/>
+          </a:prstGeom>
+          <a:ln w="19050">
+            <a:solidFill>
+              <a:srgbClr val="C9C9C9"/>
+            </a:solidFill>
+            <a:tailEnd type="triangle" w="med" len="med"/>
+          </a:ln>
+        </p:spPr>
+        <p:style>
+          <a:lnRef idx="2">
+            <a:schemeClr val="accent1"/>
+          </a:lnRef>
+          <a:fillRef idx="0">
+            <a:schemeClr val="accent1"/>
+          </a:fillRef>
+          <a:effectRef idx="1">
+            <a:schemeClr val="accent1"/>
+          </a:effectRef>
+          <a:fontRef idx="minor">
+            <a:schemeClr val="tx1"/>
+          </a:fontRef>
+        </p:style>
+      </p:cxnSp>
+      <p:sp>
+        <p:nvSpPr>
+          <p:cNvPr id="13" name="Rounded Rectangle 12"/>
           <p:cNvSpPr/>
           <p:nvPr/>
         </p:nvSpPr>
         <p:spPr>
           <a:xfrm>
-            <a:off x="566928" y="2670048"/>
-            <a:ext cx="3621024" cy="274320"/>
+            <a:off x="9180576" y="1316736"/>
+            <a:ext cx="2487168" cy="914400"/>
           </a:xfrm>
           <a:prstGeom prst="roundRect">
             <a:avLst>
               <a:gd name="adj" fmla="val 10000"/>
             </a:avLst>
+          </a:prstGeom>
+          <a:solidFill>
+            <a:srgbClr val="DCE7F2"/>
+          </a:solidFill>
+          <a:ln w="12700">
+            <a:solidFill>
+              <a:srgbClr val="1F4E79"/>
+            </a:solidFill>
+          </a:ln>
+          <a:effectLst/>
+        </p:spPr>
+        <p:style>
+          <a:lnRef idx="1">
+            <a:schemeClr val="accent1"/>
+          </a:lnRef>
+          <a:fillRef idx="3">
+            <a:schemeClr val="accent1"/>
+          </a:fillRef>
+          <a:effectRef idx="2">
+            <a:schemeClr val="accent1"/>
+          </a:effectRef>
+          <a:fontRef idx="minor">
+            <a:schemeClr val="lt1"/>
+          </a:fontRef>
+        </p:style>
+        <p:txBody>
+          <a:bodyPr rtlCol="0" anchor="ctr" wrap="square" lIns="54864" rIns="54864" tIns="27432" bIns="27432"/>
+          <a:lstStyle/>
+          <a:p>
+            <a:pPr algn="ctr"/>
+            <a:r>
+              <a:rPr sz="1250" b="1">
+                <a:solidFill>
+                  <a:srgbClr val="1F4E79"/>
+                </a:solidFill>
+                <a:latin typeface="Segoe UI"/>
+              </a:rPr>
+              <a:t>The company</a:t>
+            </a:r>
+          </a:p>
+          <a:p>
+            <a:pPr algn="ctr"/>
+            <a:r>
+              <a:rPr sz="850" b="0">
+                <a:solidFill>
+                  <a:srgbClr val="1A1A1A"/>
+                </a:solidFill>
+                <a:latin typeface="Segoe UI"/>
+              </a:rPr>
+              <a:t>other teams read it</a:t>
+            </a:r>
+          </a:p>
+          <a:p>
+            <a:pPr algn="ctr"/>
+            <a:r>
+              <a:rPr sz="850" b="0">
+                <a:solidFill>
+                  <a:srgbClr val="1A1A1A"/>
+                </a:solidFill>
+                <a:latin typeface="Segoe UI"/>
+              </a:rPr>
+              <a:t>teams stay separate</a:t>
+            </a:r>
+          </a:p>
+        </p:txBody>
+      </p:sp>
+      <p:sp>
+        <p:nvSpPr>
+          <p:cNvPr id="14" name="Rounded Rectangle 13"/>
+          <p:cNvSpPr/>
+          <p:nvPr/>
+        </p:nvSpPr>
+        <p:spPr>
+          <a:xfrm>
+            <a:off x="566928" y="2340864"/>
+            <a:ext cx="3566160" cy="384048"/>
+          </a:xfrm>
+          <a:prstGeom prst="roundRect">
+            <a:avLst>
+              <a:gd name="adj" fmla="val 10000"/>
+            </a:avLst>
+          </a:prstGeom>
+          <a:solidFill>
+            <a:srgbClr val="DCEEE7"/>
+          </a:solidFill>
+          <a:ln w="12700">
+            <a:solidFill>
+              <a:srgbClr val="1E6B52"/>
+            </a:solidFill>
+          </a:ln>
+          <a:effectLst/>
+        </p:spPr>
+        <p:style>
+          <a:lnRef idx="1">
+            <a:schemeClr val="accent1"/>
+          </a:lnRef>
+          <a:fillRef idx="3">
+            <a:schemeClr val="accent1"/>
+          </a:fillRef>
+          <a:effectRef idx="2">
+            <a:schemeClr val="accent1"/>
+          </a:effectRef>
+          <a:fontRef idx="minor">
+            <a:schemeClr val="lt1"/>
+          </a:fontRef>
+        </p:style>
+        <p:txBody>
+          <a:bodyPr rtlCol="0" anchor="ctr" wrap="square" lIns="54864" rIns="54864" tIns="27432" bIns="27432"/>
+          <a:lstStyle/>
+          <a:p>
+            <a:pPr algn="ctr"/>
+            <a:r>
+              <a:rPr sz="1150" b="1">
+                <a:solidFill>
+                  <a:srgbClr val="1E6B52"/>
+                </a:solidFill>
+                <a:latin typeface="Segoe UI"/>
+              </a:rPr>
+              <a:t>What your team gets</a:t>
+            </a:r>
+          </a:p>
+        </p:txBody>
+      </p:sp>
+      <p:sp>
+        <p:nvSpPr>
+          <p:cNvPr id="15" name="Rounded Rectangle 14"/>
+          <p:cNvSpPr/>
+          <p:nvPr/>
+        </p:nvSpPr>
+        <p:spPr>
+          <a:xfrm>
+            <a:off x="566928" y="2724912"/>
+            <a:ext cx="3566160" cy="1115568"/>
+          </a:xfrm>
+          <a:prstGeom prst="roundRect">
+            <a:avLst/>
           </a:prstGeom>
           <a:solidFill>
             <a:srgbClr val="FFFFFF"/>
@@ -10807,32 +10537,23 @@
           </a:fontRef>
         </p:style>
         <p:txBody>
-          <a:bodyPr rtlCol="0" anchor="ctr" wrap="square" lIns="54864" rIns="54864" tIns="27432" bIns="27432"/>
+          <a:bodyPr rtlCol="0" anchor="ctr"/>
           <a:lstStyle/>
           <a:p>
             <a:pPr algn="ctr"/>
-            <a:r>
-              <a:rPr sz="900" b="0">
-                <a:solidFill>
-                  <a:srgbClr val="1E6B52"/>
-                </a:solidFill>
-                <a:latin typeface="Segoe UI"/>
-              </a:rPr>
-              <a:t>whole tree scanned, not two directories</a:t>
-            </a:r>
-          </a:p>
-        </p:txBody>
-      </p:sp>
-      <p:sp>
-        <p:nvSpPr>
-          <p:cNvPr id="26" name="Rounded Rectangle 25"/>
+          </a:p>
+        </p:txBody>
+      </p:sp>
+      <p:sp>
+        <p:nvSpPr>
+          <p:cNvPr id="16" name="Rounded Rectangle 15"/>
           <p:cNvSpPr/>
           <p:nvPr/>
         </p:nvSpPr>
         <p:spPr>
           <a:xfrm>
-            <a:off x="566928" y="3017520"/>
-            <a:ext cx="3621024" cy="274320"/>
+            <a:off x="676656" y="2816352"/>
+            <a:ext cx="3346704" cy="274320"/>
           </a:xfrm>
           <a:prstGeom prst="roundRect">
             <a:avLst>
@@ -10869,27 +10590,27 @@
           <a:p>
             <a:pPr algn="ctr"/>
             <a:r>
-              <a:rPr sz="900" b="0">
+              <a:rPr sz="850" b="0">
                 <a:solidFill>
                   <a:srgbClr val="1E6B52"/>
                 </a:solidFill>
                 <a:latin typeface="Segoe UI"/>
               </a:rPr>
-              <a:t>duplicate build copies excluded</a:t>
-            </a:r>
-          </a:p>
-        </p:txBody>
-      </p:sp>
-      <p:sp>
-        <p:nvSpPr>
-          <p:cNvPr id="27" name="Rounded Rectangle 26"/>
+              <a:t>a fix found once is known by everyone tomorrow</a:t>
+            </a:r>
+          </a:p>
+        </p:txBody>
+      </p:sp>
+      <p:sp>
+        <p:nvSpPr>
+          <p:cNvPr id="17" name="Rounded Rectangle 16"/>
           <p:cNvSpPr/>
           <p:nvPr/>
         </p:nvSpPr>
         <p:spPr>
           <a:xfrm>
-            <a:off x="566928" y="3364992"/>
-            <a:ext cx="3621024" cy="274320"/>
+            <a:off x="676656" y="3154680"/>
+            <a:ext cx="3346704" cy="274320"/>
           </a:xfrm>
           <a:prstGeom prst="roundRect">
             <a:avLst>
@@ -10926,27 +10647,27 @@
           <a:p>
             <a:pPr algn="ctr"/>
             <a:r>
-              <a:rPr sz="900" b="0">
+              <a:rPr sz="850" b="0">
                 <a:solidFill>
                   <a:srgbClr val="1E6B52"/>
                 </a:solidFill>
                 <a:latin typeface="Segoe UI"/>
               </a:rPr>
-              <a:t>coverage regenerated with every scan</a:t>
-            </a:r>
-          </a:p>
-        </p:txBody>
-      </p:sp>
-      <p:sp>
-        <p:nvSpPr>
-          <p:cNvPr id="28" name="Rounded Rectangle 27"/>
+              <a:t>a new joiner reads the team's real history</a:t>
+            </a:r>
+          </a:p>
+        </p:txBody>
+      </p:sp>
+      <p:sp>
+        <p:nvSpPr>
+          <p:cNvPr id="18" name="Rounded Rectangle 17"/>
           <p:cNvSpPr/>
           <p:nvPr/>
         </p:nvSpPr>
         <p:spPr>
           <a:xfrm>
-            <a:off x="566928" y="3712464"/>
-            <a:ext cx="3621024" cy="274320"/>
+            <a:off x="676656" y="3493008"/>
+            <a:ext cx="3346704" cy="274320"/>
           </a:xfrm>
           <a:prstGeom prst="roundRect">
             <a:avLst>
@@ -10983,39 +10704,94 @@
           <a:p>
             <a:pPr algn="ctr"/>
             <a:r>
-              <a:rPr sz="900" b="0">
+              <a:rPr sz="850" b="0">
                 <a:solidFill>
                   <a:srgbClr val="1E6B52"/>
                 </a:solidFill>
                 <a:latin typeface="Segoe UI"/>
               </a:rPr>
-              <a:t>9 vulnerabilities closed by CODE</a:t>
-            </a:r>
-          </a:p>
-        </p:txBody>
-      </p:sp>
-      <p:sp>
-        <p:nvSpPr>
-          <p:cNvPr id="29" name="Rounded Rectangle 28"/>
+              <a:t>people leave, their know-how stays</a:t>
+            </a:r>
+          </a:p>
+        </p:txBody>
+      </p:sp>
+      <p:sp>
+        <p:nvSpPr>
+          <p:cNvPr id="19" name="Rounded Rectangle 18"/>
           <p:cNvSpPr/>
           <p:nvPr/>
         </p:nvSpPr>
         <p:spPr>
           <a:xfrm>
-            <a:off x="566928" y="4059936"/>
-            <a:ext cx="3621024" cy="274320"/>
+            <a:off x="4370832" y="2340864"/>
+            <a:ext cx="3566160" cy="384048"/>
           </a:xfrm>
           <a:prstGeom prst="roundRect">
             <a:avLst>
               <a:gd name="adj" fmla="val 10000"/>
             </a:avLst>
+          </a:prstGeom>
+          <a:solidFill>
+            <a:srgbClr val="DCE7F2"/>
+          </a:solidFill>
+          <a:ln w="12700">
+            <a:solidFill>
+              <a:srgbClr val="1F4E79"/>
+            </a:solidFill>
+          </a:ln>
+          <a:effectLst/>
+        </p:spPr>
+        <p:style>
+          <a:lnRef idx="1">
+            <a:schemeClr val="accent1"/>
+          </a:lnRef>
+          <a:fillRef idx="3">
+            <a:schemeClr val="accent1"/>
+          </a:fillRef>
+          <a:effectRef idx="2">
+            <a:schemeClr val="accent1"/>
+          </a:effectRef>
+          <a:fontRef idx="minor">
+            <a:schemeClr val="lt1"/>
+          </a:fontRef>
+        </p:style>
+        <p:txBody>
+          <a:bodyPr rtlCol="0" anchor="ctr" wrap="square" lIns="54864" rIns="54864" tIns="27432" bIns="27432"/>
+          <a:lstStyle/>
+          <a:p>
+            <a:pPr algn="ctr"/>
+            <a:r>
+              <a:rPr sz="1150" b="1">
+                <a:solidFill>
+                  <a:srgbClr val="1F4E79"/>
+                </a:solidFill>
+                <a:latin typeface="Segoe UI"/>
+              </a:rPr>
+              <a:t>What the company gets</a:t>
+            </a:r>
+          </a:p>
+        </p:txBody>
+      </p:sp>
+      <p:sp>
+        <p:nvSpPr>
+          <p:cNvPr id="20" name="Rounded Rectangle 19"/>
+          <p:cNvSpPr/>
+          <p:nvPr/>
+        </p:nvSpPr>
+        <p:spPr>
+          <a:xfrm>
+            <a:off x="4370832" y="2724912"/>
+            <a:ext cx="3566160" cy="1115568"/>
+          </a:xfrm>
+          <a:prstGeom prst="roundRect">
+            <a:avLst/>
           </a:prstGeom>
           <a:solidFill>
             <a:srgbClr val="FFFFFF"/>
           </a:solidFill>
           <a:ln w="12700">
             <a:solidFill>
-              <a:srgbClr val="1E6B52"/>
+              <a:srgbClr val="1F4E79"/>
             </a:solidFill>
           </a:ln>
           <a:effectLst/>
@@ -11035,32 +10811,1034 @@
           </a:fontRef>
         </p:style>
         <p:txBody>
+          <a:bodyPr rtlCol="0" anchor="ctr"/>
+          <a:lstStyle/>
+          <a:p>
+            <a:pPr algn="ctr"/>
+          </a:p>
+        </p:txBody>
+      </p:sp>
+      <p:sp>
+        <p:nvSpPr>
+          <p:cNvPr id="21" name="Rounded Rectangle 20"/>
+          <p:cNvSpPr/>
+          <p:nvPr/>
+        </p:nvSpPr>
+        <p:spPr>
+          <a:xfrm>
+            <a:off x="4480560" y="2816352"/>
+            <a:ext cx="3346704" cy="274320"/>
+          </a:xfrm>
+          <a:prstGeom prst="roundRect">
+            <a:avLst>
+              <a:gd name="adj" fmla="val 10000"/>
+            </a:avLst>
+          </a:prstGeom>
+          <a:solidFill>
+            <a:srgbClr val="FFFFFF"/>
+          </a:solidFill>
+          <a:ln w="12700">
+            <a:solidFill>
+              <a:srgbClr val="1F4E79"/>
+            </a:solidFill>
+          </a:ln>
+          <a:effectLst/>
+        </p:spPr>
+        <p:style>
+          <a:lnRef idx="1">
+            <a:schemeClr val="accent1"/>
+          </a:lnRef>
+          <a:fillRef idx="3">
+            <a:schemeClr val="accent1"/>
+          </a:fillRef>
+          <a:effectRef idx="2">
+            <a:schemeClr val="accent1"/>
+          </a:effectRef>
+          <a:fontRef idx="minor">
+            <a:schemeClr val="lt1"/>
+          </a:fontRef>
+        </p:style>
+        <p:txBody>
           <a:bodyPr rtlCol="0" anchor="ctr" wrap="square" lIns="54864" rIns="54864" tIns="27432" bIns="27432"/>
           <a:lstStyle/>
           <a:p>
             <a:pPr algn="ctr"/>
             <a:r>
-              <a:rPr sz="900" b="0">
+              <a:rPr sz="850" b="0">
+                <a:solidFill>
+                  <a:srgbClr val="1F4E79"/>
+                </a:solidFill>
+                <a:latin typeface="Segoe UI"/>
+              </a:rPr>
+              <a:t>one place serves many teams at once</a:t>
+            </a:r>
+          </a:p>
+        </p:txBody>
+      </p:sp>
+      <p:sp>
+        <p:nvSpPr>
+          <p:cNvPr id="22" name="Rounded Rectangle 21"/>
+          <p:cNvSpPr/>
+          <p:nvPr/>
+        </p:nvSpPr>
+        <p:spPr>
+          <a:xfrm>
+            <a:off x="4480560" y="3154680"/>
+            <a:ext cx="3346704" cy="274320"/>
+          </a:xfrm>
+          <a:prstGeom prst="roundRect">
+            <a:avLst>
+              <a:gd name="adj" fmla="val 10000"/>
+            </a:avLst>
+          </a:prstGeom>
+          <a:solidFill>
+            <a:srgbClr val="FFFFFF"/>
+          </a:solidFill>
+          <a:ln w="12700">
+            <a:solidFill>
+              <a:srgbClr val="1F4E79"/>
+            </a:solidFill>
+          </a:ln>
+          <a:effectLst/>
+        </p:spPr>
+        <p:style>
+          <a:lnRef idx="1">
+            <a:schemeClr val="accent1"/>
+          </a:lnRef>
+          <a:fillRef idx="3">
+            <a:schemeClr val="accent1"/>
+          </a:fillRef>
+          <a:effectRef idx="2">
+            <a:schemeClr val="accent1"/>
+          </a:effectRef>
+          <a:fontRef idx="minor">
+            <a:schemeClr val="lt1"/>
+          </a:fontRef>
+        </p:style>
+        <p:txBody>
+          <a:bodyPr rtlCol="0" anchor="ctr" wrap="square" lIns="54864" rIns="54864" tIns="27432" bIns="27432"/>
+          <a:lstStyle/>
+          <a:p>
+            <a:pPr algn="ctr"/>
+            <a:r>
+              <a:rPr sz="850" b="0">
+                <a:solidFill>
+                  <a:srgbClr val="1F4E79"/>
+                </a:solidFill>
+                <a:latin typeface="Segoe UI"/>
+              </a:rPr>
+              <a:t>each team's memory stays its own</a:t>
+            </a:r>
+          </a:p>
+        </p:txBody>
+      </p:sp>
+      <p:sp>
+        <p:nvSpPr>
+          <p:cNvPr id="23" name="Rounded Rectangle 22"/>
+          <p:cNvSpPr/>
+          <p:nvPr/>
+        </p:nvSpPr>
+        <p:spPr>
+          <a:xfrm>
+            <a:off x="4480560" y="3493008"/>
+            <a:ext cx="3346704" cy="274320"/>
+          </a:xfrm>
+          <a:prstGeom prst="roundRect">
+            <a:avLst>
+              <a:gd name="adj" fmla="val 10000"/>
+            </a:avLst>
+          </a:prstGeom>
+          <a:solidFill>
+            <a:srgbClr val="FFFFFF"/>
+          </a:solidFill>
+          <a:ln w="12700">
+            <a:solidFill>
+              <a:srgbClr val="1F4E79"/>
+            </a:solidFill>
+          </a:ln>
+          <a:effectLst/>
+        </p:spPr>
+        <p:style>
+          <a:lnRef idx="1">
+            <a:schemeClr val="accent1"/>
+          </a:lnRef>
+          <a:fillRef idx="3">
+            <a:schemeClr val="accent1"/>
+          </a:fillRef>
+          <a:effectRef idx="2">
+            <a:schemeClr val="accent1"/>
+          </a:effectRef>
+          <a:fontRef idx="minor">
+            <a:schemeClr val="lt1"/>
+          </a:fontRef>
+        </p:style>
+        <p:txBody>
+          <a:bodyPr rtlCol="0" anchor="ctr" wrap="square" lIns="54864" rIns="54864" tIns="27432" bIns="27432"/>
+          <a:lstStyle/>
+          <a:p>
+            <a:pPr algn="ctr"/>
+            <a:r>
+              <a:rPr sz="850" b="0">
+                <a:solidFill>
+                  <a:srgbClr val="1F4E79"/>
+                </a:solidFill>
+                <a:latin typeface="Segoe UI"/>
+              </a:rPr>
+              <a:t>nothing to run: it is files in a folder</a:t>
+            </a:r>
+          </a:p>
+        </p:txBody>
+      </p:sp>
+      <p:sp>
+        <p:nvSpPr>
+          <p:cNvPr id="24" name="Rounded Rectangle 23"/>
+          <p:cNvSpPr/>
+          <p:nvPr/>
+        </p:nvSpPr>
+        <p:spPr>
+          <a:xfrm>
+            <a:off x="8174736" y="2340864"/>
+            <a:ext cx="3566160" cy="384048"/>
+          </a:xfrm>
+          <a:prstGeom prst="roundRect">
+            <a:avLst>
+              <a:gd name="adj" fmla="val 10000"/>
+            </a:avLst>
+          </a:prstGeom>
+          <a:solidFill>
+            <a:srgbClr val="EAE1F0"/>
+          </a:solidFill>
+          <a:ln w="12700">
+            <a:solidFill>
+              <a:srgbClr val="5B3A6E"/>
+            </a:solidFill>
+          </a:ln>
+          <a:effectLst/>
+        </p:spPr>
+        <p:style>
+          <a:lnRef idx="1">
+            <a:schemeClr val="accent1"/>
+          </a:lnRef>
+          <a:fillRef idx="3">
+            <a:schemeClr val="accent1"/>
+          </a:fillRef>
+          <a:effectRef idx="2">
+            <a:schemeClr val="accent1"/>
+          </a:effectRef>
+          <a:fontRef idx="minor">
+            <a:schemeClr val="lt1"/>
+          </a:fontRef>
+        </p:style>
+        <p:txBody>
+          <a:bodyPr rtlCol="0" anchor="ctr" wrap="square" lIns="54864" rIns="54864" tIns="27432" bIns="27432"/>
+          <a:lstStyle/>
+          <a:p>
+            <a:pPr algn="ctr"/>
+            <a:r>
+              <a:rPr sz="1150" b="1">
+                <a:solidFill>
+                  <a:srgbClr val="5B3A6E"/>
+                </a:solidFill>
+                <a:latin typeface="Segoe UI"/>
+              </a:rPr>
+              <a:t>What legal and audit get</a:t>
+            </a:r>
+          </a:p>
+        </p:txBody>
+      </p:sp>
+      <p:sp>
+        <p:nvSpPr>
+          <p:cNvPr id="25" name="Rounded Rectangle 24"/>
+          <p:cNvSpPr/>
+          <p:nvPr/>
+        </p:nvSpPr>
+        <p:spPr>
+          <a:xfrm>
+            <a:off x="8174736" y="2724912"/>
+            <a:ext cx="3566160" cy="1115568"/>
+          </a:xfrm>
+          <a:prstGeom prst="roundRect">
+            <a:avLst/>
+          </a:prstGeom>
+          <a:solidFill>
+            <a:srgbClr val="FFFFFF"/>
+          </a:solidFill>
+          <a:ln w="12700">
+            <a:solidFill>
+              <a:srgbClr val="5B3A6E"/>
+            </a:solidFill>
+          </a:ln>
+          <a:effectLst/>
+        </p:spPr>
+        <p:style>
+          <a:lnRef idx="1">
+            <a:schemeClr val="accent1"/>
+          </a:lnRef>
+          <a:fillRef idx="3">
+            <a:schemeClr val="accent1"/>
+          </a:fillRef>
+          <a:effectRef idx="2">
+            <a:schemeClr val="accent1"/>
+          </a:effectRef>
+          <a:fontRef idx="minor">
+            <a:schemeClr val="lt1"/>
+          </a:fontRef>
+        </p:style>
+        <p:txBody>
+          <a:bodyPr rtlCol="0" anchor="ctr"/>
+          <a:lstStyle/>
+          <a:p>
+            <a:pPr algn="ctr"/>
+          </a:p>
+        </p:txBody>
+      </p:sp>
+      <p:sp>
+        <p:nvSpPr>
+          <p:cNvPr id="26" name="Rounded Rectangle 25"/>
+          <p:cNvSpPr/>
+          <p:nvPr/>
+        </p:nvSpPr>
+        <p:spPr>
+          <a:xfrm>
+            <a:off x="8284464" y="2816352"/>
+            <a:ext cx="3346704" cy="274320"/>
+          </a:xfrm>
+          <a:prstGeom prst="roundRect">
+            <a:avLst>
+              <a:gd name="adj" fmla="val 10000"/>
+            </a:avLst>
+          </a:prstGeom>
+          <a:solidFill>
+            <a:srgbClr val="FFFFFF"/>
+          </a:solidFill>
+          <a:ln w="12700">
+            <a:solidFill>
+              <a:srgbClr val="5B3A6E"/>
+            </a:solidFill>
+          </a:ln>
+          <a:effectLst/>
+        </p:spPr>
+        <p:style>
+          <a:lnRef idx="1">
+            <a:schemeClr val="accent1"/>
+          </a:lnRef>
+          <a:fillRef idx="3">
+            <a:schemeClr val="accent1"/>
+          </a:fillRef>
+          <a:effectRef idx="2">
+            <a:schemeClr val="accent1"/>
+          </a:effectRef>
+          <a:fontRef idx="minor">
+            <a:schemeClr val="lt1"/>
+          </a:fontRef>
+        </p:style>
+        <p:txBody>
+          <a:bodyPr rtlCol="0" anchor="ctr" wrap="square" lIns="54864" rIns="54864" tIns="27432" bIns="27432"/>
+          <a:lstStyle/>
+          <a:p>
+            <a:pPr algn="ctr"/>
+            <a:r>
+              <a:rPr sz="850" b="0">
+                <a:solidFill>
+                  <a:srgbClr val="5B3A6E"/>
+                </a:solidFill>
+                <a:latin typeface="Segoe UI"/>
+              </a:rPr>
+              <a:t>passwords are blocked before sharing, not after</a:t>
+            </a:r>
+          </a:p>
+        </p:txBody>
+      </p:sp>
+      <p:sp>
+        <p:nvSpPr>
+          <p:cNvPr id="27" name="Rounded Rectangle 26"/>
+          <p:cNvSpPr/>
+          <p:nvPr/>
+        </p:nvSpPr>
+        <p:spPr>
+          <a:xfrm>
+            <a:off x="8284464" y="3154680"/>
+            <a:ext cx="3346704" cy="274320"/>
+          </a:xfrm>
+          <a:prstGeom prst="roundRect">
+            <a:avLst>
+              <a:gd name="adj" fmla="val 10000"/>
+            </a:avLst>
+          </a:prstGeom>
+          <a:solidFill>
+            <a:srgbClr val="FFFFFF"/>
+          </a:solidFill>
+          <a:ln w="12700">
+            <a:solidFill>
+              <a:srgbClr val="5B3A6E"/>
+            </a:solidFill>
+          </a:ln>
+          <a:effectLst/>
+        </p:spPr>
+        <p:style>
+          <a:lnRef idx="1">
+            <a:schemeClr val="accent1"/>
+          </a:lnRef>
+          <a:fillRef idx="3">
+            <a:schemeClr val="accent1"/>
+          </a:fillRef>
+          <a:effectRef idx="2">
+            <a:schemeClr val="accent1"/>
+          </a:effectRef>
+          <a:fontRef idx="minor">
+            <a:schemeClr val="lt1"/>
+          </a:fontRef>
+        </p:style>
+        <p:txBody>
+          <a:bodyPr rtlCol="0" anchor="ctr" wrap="square" lIns="54864" rIns="54864" tIns="27432" bIns="27432"/>
+          <a:lstStyle/>
+          <a:p>
+            <a:pPr algn="ctr"/>
+            <a:r>
+              <a:rPr sz="850" b="0">
+                <a:solidFill>
+                  <a:srgbClr val="5B3A6E"/>
+                </a:solidFill>
+                <a:latin typeface="Segoe UI"/>
+              </a:rPr>
+              <a:t>every merge is saved and can be undone</a:t>
+            </a:r>
+          </a:p>
+        </p:txBody>
+      </p:sp>
+      <p:sp>
+        <p:nvSpPr>
+          <p:cNvPr id="28" name="Rounded Rectangle 27"/>
+          <p:cNvSpPr/>
+          <p:nvPr/>
+        </p:nvSpPr>
+        <p:spPr>
+          <a:xfrm>
+            <a:off x="8284464" y="3493008"/>
+            <a:ext cx="3346704" cy="274320"/>
+          </a:xfrm>
+          <a:prstGeom prst="roundRect">
+            <a:avLst>
+              <a:gd name="adj" fmla="val 10000"/>
+            </a:avLst>
+          </a:prstGeom>
+          <a:solidFill>
+            <a:srgbClr val="FFFFFF"/>
+          </a:solidFill>
+          <a:ln w="12700">
+            <a:solidFill>
+              <a:srgbClr val="5B3A6E"/>
+            </a:solidFill>
+          </a:ln>
+          <a:effectLst/>
+        </p:spPr>
+        <p:style>
+          <a:lnRef idx="1">
+            <a:schemeClr val="accent1"/>
+          </a:lnRef>
+          <a:fillRef idx="3">
+            <a:schemeClr val="accent1"/>
+          </a:fillRef>
+          <a:effectRef idx="2">
+            <a:schemeClr val="accent1"/>
+          </a:effectRef>
+          <a:fontRef idx="minor">
+            <a:schemeClr val="lt1"/>
+          </a:fontRef>
+        </p:style>
+        <p:txBody>
+          <a:bodyPr rtlCol="0" anchor="ctr" wrap="square" lIns="54864" rIns="54864" tIns="27432" bIns="27432"/>
+          <a:lstStyle/>
+          <a:p>
+            <a:pPr algn="ctr"/>
+            <a:r>
+              <a:rPr sz="850" b="0">
+                <a:solidFill>
+                  <a:srgbClr val="5B3A6E"/>
+                </a:solidFill>
+                <a:latin typeface="Segoe UI"/>
+              </a:rPr>
+              <a:t>delete the folder and it is gone — no second copy</a:t>
+            </a:r>
+          </a:p>
+        </p:txBody>
+      </p:sp>
+      <p:sp>
+        <p:nvSpPr>
+          <p:cNvPr id="29" name="TextBox 28"/>
+          <p:cNvSpPr txBox="1"/>
+          <p:nvPr/>
+        </p:nvSpPr>
+        <p:spPr>
+          <a:xfrm>
+            <a:off x="566928" y="3950208"/>
+            <a:ext cx="2212848" cy="384048"/>
+          </a:xfrm>
+          <a:prstGeom prst="rect">
+            <a:avLst/>
+          </a:prstGeom>
+          <a:noFill/>
+        </p:spPr>
+        <p:txBody>
+          <a:bodyPr wrap="square" anchor="t" lIns="0" rIns="0" tIns="0" bIns="0">
+            <a:spAutoFit/>
+          </a:bodyPr>
+          <a:lstStyle/>
+          <a:p>
+            <a:pPr algn="ctr">
+              <a:spcAft>
+                <a:spcPts val="0"/>
+              </a:spcAft>
+            </a:pPr>
+            <a:r>
+              <a:rPr sz="2500" b="1">
                 <a:solidFill>
                   <a:srgbClr val="1E6B52"/>
                 </a:solidFill>
                 <a:latin typeface="Segoe UI"/>
               </a:rPr>
-              <a:t>3 failures named, not rounded away</a:t>
-            </a:r>
-          </a:p>
-        </p:txBody>
-      </p:sp>
-      <p:sp>
-        <p:nvSpPr>
-          <p:cNvPr id="30" name="Rounded Rectangle 29"/>
+              <a:t>0</a:t>
+            </a:r>
+          </a:p>
+        </p:txBody>
+      </p:sp>
+      <p:sp>
+        <p:nvSpPr>
+          <p:cNvPr id="30" name="TextBox 29"/>
+          <p:cNvSpPr txBox="1"/>
+          <p:nvPr/>
+        </p:nvSpPr>
+        <p:spPr>
+          <a:xfrm>
+            <a:off x="640080" y="4352544"/>
+            <a:ext cx="2066544" cy="384048"/>
+          </a:xfrm>
+          <a:prstGeom prst="rect">
+            <a:avLst/>
+          </a:prstGeom>
+          <a:noFill/>
+        </p:spPr>
+        <p:txBody>
+          <a:bodyPr wrap="square" anchor="t" lIns="0" rIns="0" tIns="0" bIns="0">
+            <a:spAutoFit/>
+          </a:bodyPr>
+          <a:lstStyle/>
+          <a:p>
+            <a:pPr algn="ctr">
+              <a:spcAft>
+                <a:spcPts val="0"/>
+              </a:spcAft>
+            </a:pPr>
+            <a:r>
+              <a:rPr sz="1050" b="0">
+                <a:solidFill>
+                  <a:srgbClr val="6B6B6B"/>
+                </a:solidFill>
+                <a:latin typeface="Segoe UI"/>
+              </a:rPr>
+              <a:t>bugs found by the scanner</a:t>
+            </a:r>
+          </a:p>
+        </p:txBody>
+      </p:sp>
+      <p:sp>
+        <p:nvSpPr>
+          <p:cNvPr id="31" name="TextBox 30"/>
+          <p:cNvSpPr txBox="1"/>
+          <p:nvPr/>
+        </p:nvSpPr>
+        <p:spPr>
+          <a:xfrm>
+            <a:off x="2779776" y="3950208"/>
+            <a:ext cx="2212848" cy="384048"/>
+          </a:xfrm>
+          <a:prstGeom prst="rect">
+            <a:avLst/>
+          </a:prstGeom>
+          <a:noFill/>
+        </p:spPr>
+        <p:txBody>
+          <a:bodyPr wrap="square" anchor="t" lIns="0" rIns="0" tIns="0" bIns="0">
+            <a:spAutoFit/>
+          </a:bodyPr>
+          <a:lstStyle/>
+          <a:p>
+            <a:pPr algn="ctr">
+              <a:spcAft>
+                <a:spcPts val="0"/>
+              </a:spcAft>
+            </a:pPr>
+            <a:r>
+              <a:rPr sz="2500" b="1">
+                <a:solidFill>
+                  <a:srgbClr val="1E6B52"/>
+                </a:solidFill>
+                <a:latin typeface="Segoe UI"/>
+              </a:rPr>
+              <a:t>0</a:t>
+            </a:r>
+          </a:p>
+        </p:txBody>
+      </p:sp>
+      <p:sp>
+        <p:nvSpPr>
+          <p:cNvPr id="32" name="TextBox 31"/>
+          <p:cNvSpPr txBox="1"/>
+          <p:nvPr/>
+        </p:nvSpPr>
+        <p:spPr>
+          <a:xfrm>
+            <a:off x="2852928" y="4352544"/>
+            <a:ext cx="2066544" cy="384048"/>
+          </a:xfrm>
+          <a:prstGeom prst="rect">
+            <a:avLst/>
+          </a:prstGeom>
+          <a:noFill/>
+        </p:spPr>
+        <p:txBody>
+          <a:bodyPr wrap="square" anchor="t" lIns="0" rIns="0" tIns="0" bIns="0">
+            <a:spAutoFit/>
+          </a:bodyPr>
+          <a:lstStyle/>
+          <a:p>
+            <a:pPr algn="ctr">
+              <a:spcAft>
+                <a:spcPts val="0"/>
+              </a:spcAft>
+            </a:pPr>
+            <a:r>
+              <a:rPr sz="1050" b="0">
+                <a:solidFill>
+                  <a:srgbClr val="6B6B6B"/>
+                </a:solidFill>
+                <a:latin typeface="Segoe UI"/>
+              </a:rPr>
+              <a:t>security weaknesses</a:t>
+            </a:r>
+          </a:p>
+        </p:txBody>
+      </p:sp>
+      <p:sp>
+        <p:nvSpPr>
+          <p:cNvPr id="33" name="Rectangle 32"/>
           <p:cNvSpPr/>
           <p:nvPr/>
         </p:nvSpPr>
         <p:spPr>
           <a:xfrm>
-            <a:off x="4279392" y="2139696"/>
-            <a:ext cx="3621024" cy="457200"/>
+            <a:off x="2779776" y="3986784"/>
+            <a:ext cx="9525" cy="566928"/>
+          </a:xfrm>
+          <a:prstGeom prst="rect">
+            <a:avLst/>
+          </a:prstGeom>
+          <a:solidFill>
+            <a:srgbClr val="C9C9C9"/>
+          </a:solidFill>
+          <a:ln>
+            <a:noFill/>
+          </a:ln>
+          <a:effectLst/>
+        </p:spPr>
+        <p:style>
+          <a:lnRef idx="1">
+            <a:schemeClr val="accent1"/>
+          </a:lnRef>
+          <a:fillRef idx="3">
+            <a:schemeClr val="accent1"/>
+          </a:fillRef>
+          <a:effectRef idx="2">
+            <a:schemeClr val="accent1"/>
+          </a:effectRef>
+          <a:fontRef idx="minor">
+            <a:schemeClr val="lt1"/>
+          </a:fontRef>
+        </p:style>
+        <p:txBody>
+          <a:bodyPr rtlCol="0" anchor="ctr"/>
+          <a:lstStyle/>
+          <a:p>
+            <a:pPr algn="ctr"/>
+          </a:p>
+        </p:txBody>
+      </p:sp>
+      <p:sp>
+        <p:nvSpPr>
+          <p:cNvPr id="34" name="TextBox 33"/>
+          <p:cNvSpPr txBox="1"/>
+          <p:nvPr/>
+        </p:nvSpPr>
+        <p:spPr>
+          <a:xfrm>
+            <a:off x="4992624" y="3950208"/>
+            <a:ext cx="2212848" cy="384048"/>
+          </a:xfrm>
+          <a:prstGeom prst="rect">
+            <a:avLst/>
+          </a:prstGeom>
+          <a:noFill/>
+        </p:spPr>
+        <p:txBody>
+          <a:bodyPr wrap="square" anchor="t" lIns="0" rIns="0" tIns="0" bIns="0">
+            <a:spAutoFit/>
+          </a:bodyPr>
+          <a:lstStyle/>
+          <a:p>
+            <a:pPr algn="ctr">
+              <a:spcAft>
+                <a:spcPts val="0"/>
+              </a:spcAft>
+            </a:pPr>
+            <a:r>
+              <a:rPr sz="2500" b="1">
+                <a:solidFill>
+                  <a:srgbClr val="1F4E79"/>
+                </a:solidFill>
+                <a:latin typeface="Segoe UI"/>
+              </a:rPr>
+              <a:t>8,606</a:t>
+            </a:r>
+          </a:p>
+        </p:txBody>
+      </p:sp>
+      <p:sp>
+        <p:nvSpPr>
+          <p:cNvPr id="35" name="TextBox 34"/>
+          <p:cNvSpPr txBox="1"/>
+          <p:nvPr/>
+        </p:nvSpPr>
+        <p:spPr>
+          <a:xfrm>
+            <a:off x="5065776" y="4352544"/>
+            <a:ext cx="2066544" cy="384048"/>
+          </a:xfrm>
+          <a:prstGeom prst="rect">
+            <a:avLst/>
+          </a:prstGeom>
+          <a:noFill/>
+        </p:spPr>
+        <p:txBody>
+          <a:bodyPr wrap="square" anchor="t" lIns="0" rIns="0" tIns="0" bIns="0">
+            <a:spAutoFit/>
+          </a:bodyPr>
+          <a:lstStyle/>
+          <a:p>
+            <a:pPr algn="ctr">
+              <a:spcAft>
+                <a:spcPts val="0"/>
+              </a:spcAft>
+            </a:pPr>
+            <a:r>
+              <a:rPr sz="1050" b="0">
+                <a:solidFill>
+                  <a:srgbClr val="6B6B6B"/>
+                </a:solidFill>
+                <a:latin typeface="Segoe UI"/>
+              </a:rPr>
+              <a:t>tests</a:t>
+            </a:r>
+          </a:p>
+        </p:txBody>
+      </p:sp>
+      <p:sp>
+        <p:nvSpPr>
+          <p:cNvPr id="36" name="Rectangle 35"/>
+          <p:cNvSpPr/>
+          <p:nvPr/>
+        </p:nvSpPr>
+        <p:spPr>
+          <a:xfrm>
+            <a:off x="4992624" y="3986784"/>
+            <a:ext cx="9525" cy="566928"/>
+          </a:xfrm>
+          <a:prstGeom prst="rect">
+            <a:avLst/>
+          </a:prstGeom>
+          <a:solidFill>
+            <a:srgbClr val="C9C9C9"/>
+          </a:solidFill>
+          <a:ln>
+            <a:noFill/>
+          </a:ln>
+          <a:effectLst/>
+        </p:spPr>
+        <p:style>
+          <a:lnRef idx="1">
+            <a:schemeClr val="accent1"/>
+          </a:lnRef>
+          <a:fillRef idx="3">
+            <a:schemeClr val="accent1"/>
+          </a:fillRef>
+          <a:effectRef idx="2">
+            <a:schemeClr val="accent1"/>
+          </a:effectRef>
+          <a:fontRef idx="minor">
+            <a:schemeClr val="lt1"/>
+          </a:fontRef>
+        </p:style>
+        <p:txBody>
+          <a:bodyPr rtlCol="0" anchor="ctr"/>
+          <a:lstStyle/>
+          <a:p>
+            <a:pPr algn="ctr"/>
+          </a:p>
+        </p:txBody>
+      </p:sp>
+      <p:sp>
+        <p:nvSpPr>
+          <p:cNvPr id="37" name="TextBox 36"/>
+          <p:cNvSpPr txBox="1"/>
+          <p:nvPr/>
+        </p:nvSpPr>
+        <p:spPr>
+          <a:xfrm>
+            <a:off x="7205472" y="3950208"/>
+            <a:ext cx="2212848" cy="384048"/>
+          </a:xfrm>
+          <a:prstGeom prst="rect">
+            <a:avLst/>
+          </a:prstGeom>
+          <a:noFill/>
+        </p:spPr>
+        <p:txBody>
+          <a:bodyPr wrap="square" anchor="t" lIns="0" rIns="0" tIns="0" bIns="0">
+            <a:spAutoFit/>
+          </a:bodyPr>
+          <a:lstStyle/>
+          <a:p>
+            <a:pPr algn="ctr">
+              <a:spcAft>
+                <a:spcPts val="0"/>
+              </a:spcAft>
+            </a:pPr>
+            <a:r>
+              <a:rPr sz="2500" b="1">
+                <a:solidFill>
+                  <a:srgbClr val="1F4E79"/>
+                </a:solidFill>
+                <a:latin typeface="Segoe UI"/>
+              </a:rPr>
+              <a:t>82.8%</a:t>
+            </a:r>
+          </a:p>
+        </p:txBody>
+      </p:sp>
+      <p:sp>
+        <p:nvSpPr>
+          <p:cNvPr id="38" name="TextBox 37"/>
+          <p:cNvSpPr txBox="1"/>
+          <p:nvPr/>
+        </p:nvSpPr>
+        <p:spPr>
+          <a:xfrm>
+            <a:off x="7278624" y="4352544"/>
+            <a:ext cx="2066544" cy="384048"/>
+          </a:xfrm>
+          <a:prstGeom prst="rect">
+            <a:avLst/>
+          </a:prstGeom>
+          <a:noFill/>
+        </p:spPr>
+        <p:txBody>
+          <a:bodyPr wrap="square" anchor="t" lIns="0" rIns="0" tIns="0" bIns="0">
+            <a:spAutoFit/>
+          </a:bodyPr>
+          <a:lstStyle/>
+          <a:p>
+            <a:pPr algn="ctr">
+              <a:spcAft>
+                <a:spcPts val="0"/>
+              </a:spcAft>
+            </a:pPr>
+            <a:r>
+              <a:rPr sz="1050" b="0">
+                <a:solidFill>
+                  <a:srgbClr val="6B6B6B"/>
+                </a:solidFill>
+                <a:latin typeface="Segoe UI"/>
+              </a:rPr>
+              <a:t>of the code covered by tests</a:t>
+            </a:r>
+          </a:p>
+        </p:txBody>
+      </p:sp>
+      <p:sp>
+        <p:nvSpPr>
+          <p:cNvPr id="39" name="Rectangle 38"/>
+          <p:cNvSpPr/>
+          <p:nvPr/>
+        </p:nvSpPr>
+        <p:spPr>
+          <a:xfrm>
+            <a:off x="7205472" y="3986784"/>
+            <a:ext cx="9525" cy="566928"/>
+          </a:xfrm>
+          <a:prstGeom prst="rect">
+            <a:avLst/>
+          </a:prstGeom>
+          <a:solidFill>
+            <a:srgbClr val="C9C9C9"/>
+          </a:solidFill>
+          <a:ln>
+            <a:noFill/>
+          </a:ln>
+          <a:effectLst/>
+        </p:spPr>
+        <p:style>
+          <a:lnRef idx="1">
+            <a:schemeClr val="accent1"/>
+          </a:lnRef>
+          <a:fillRef idx="3">
+            <a:schemeClr val="accent1"/>
+          </a:fillRef>
+          <a:effectRef idx="2">
+            <a:schemeClr val="accent1"/>
+          </a:effectRef>
+          <a:fontRef idx="minor">
+            <a:schemeClr val="lt1"/>
+          </a:fontRef>
+        </p:style>
+        <p:txBody>
+          <a:bodyPr rtlCol="0" anchor="ctr"/>
+          <a:lstStyle/>
+          <a:p>
+            <a:pPr algn="ctr"/>
+          </a:p>
+        </p:txBody>
+      </p:sp>
+      <p:sp>
+        <p:nvSpPr>
+          <p:cNvPr id="40" name="TextBox 39"/>
+          <p:cNvSpPr txBox="1"/>
+          <p:nvPr/>
+        </p:nvSpPr>
+        <p:spPr>
+          <a:xfrm>
+            <a:off x="9418320" y="3950208"/>
+            <a:ext cx="2212848" cy="384048"/>
+          </a:xfrm>
+          <a:prstGeom prst="rect">
+            <a:avLst/>
+          </a:prstGeom>
+          <a:noFill/>
+        </p:spPr>
+        <p:txBody>
+          <a:bodyPr wrap="square" anchor="t" lIns="0" rIns="0" tIns="0" bIns="0">
+            <a:spAutoFit/>
+          </a:bodyPr>
+          <a:lstStyle/>
+          <a:p>
+            <a:pPr algn="ctr">
+              <a:spcAft>
+                <a:spcPts val="0"/>
+              </a:spcAft>
+            </a:pPr>
+            <a:r>
+              <a:rPr sz="2500" b="1">
+                <a:solidFill>
+                  <a:srgbClr val="8C2F2F"/>
+                </a:solidFill>
+                <a:latin typeface="Segoe UI"/>
+              </a:rPr>
+              <a:t>0</a:t>
+            </a:r>
+          </a:p>
+        </p:txBody>
+      </p:sp>
+      <p:sp>
+        <p:nvSpPr>
+          <p:cNvPr id="41" name="TextBox 40"/>
+          <p:cNvSpPr txBox="1"/>
+          <p:nvPr/>
+        </p:nvSpPr>
+        <p:spPr>
+          <a:xfrm>
+            <a:off x="9491472" y="4352544"/>
+            <a:ext cx="2066544" cy="384048"/>
+          </a:xfrm>
+          <a:prstGeom prst="rect">
+            <a:avLst/>
+          </a:prstGeom>
+          <a:noFill/>
+        </p:spPr>
+        <p:txBody>
+          <a:bodyPr wrap="square" anchor="t" lIns="0" rIns="0" tIns="0" bIns="0">
+            <a:spAutoFit/>
+          </a:bodyPr>
+          <a:lstStyle/>
+          <a:p>
+            <a:pPr algn="ctr">
+              <a:spcAft>
+                <a:spcPts val="0"/>
+              </a:spcAft>
+            </a:pPr>
+            <a:r>
+              <a:rPr sz="1050" b="0">
+                <a:solidFill>
+                  <a:srgbClr val="6B6B6B"/>
+                </a:solidFill>
+                <a:latin typeface="Segoe UI"/>
+              </a:rPr>
+              <a:t>of its OWN work ever scored</a:t>
+            </a:r>
+          </a:p>
+        </p:txBody>
+      </p:sp>
+      <p:sp>
+        <p:nvSpPr>
+          <p:cNvPr id="42" name="Rectangle 41"/>
+          <p:cNvSpPr/>
+          <p:nvPr/>
+        </p:nvSpPr>
+        <p:spPr>
+          <a:xfrm>
+            <a:off x="9418320" y="3986784"/>
+            <a:ext cx="9525" cy="566928"/>
+          </a:xfrm>
+          <a:prstGeom prst="rect">
+            <a:avLst/>
+          </a:prstGeom>
+          <a:solidFill>
+            <a:srgbClr val="C9C9C9"/>
+          </a:solidFill>
+          <a:ln>
+            <a:noFill/>
+          </a:ln>
+          <a:effectLst/>
+        </p:spPr>
+        <p:style>
+          <a:lnRef idx="1">
+            <a:schemeClr val="accent1"/>
+          </a:lnRef>
+          <a:fillRef idx="3">
+            <a:schemeClr val="accent1"/>
+          </a:fillRef>
+          <a:effectRef idx="2">
+            <a:schemeClr val="accent1"/>
+          </a:effectRef>
+          <a:fontRef idx="minor">
+            <a:schemeClr val="lt1"/>
+          </a:fontRef>
+        </p:style>
+        <p:txBody>
+          <a:bodyPr rtlCol="0" anchor="ctr"/>
+          <a:lstStyle/>
+          <a:p>
+            <a:pPr algn="ctr"/>
+          </a:p>
+        </p:txBody>
+      </p:sp>
+      <p:sp>
+        <p:nvSpPr>
+          <p:cNvPr id="43" name="Rounded Rectangle 42"/>
+          <p:cNvSpPr/>
+          <p:nvPr/>
+        </p:nvSpPr>
+        <p:spPr>
+          <a:xfrm>
+            <a:off x="566928" y="4754880"/>
+            <a:ext cx="5029200" cy="384048"/>
           </a:xfrm>
           <a:prstGeom prst="roundRect">
             <a:avLst>
@@ -11103,26 +11881,24 @@
                 </a:solidFill>
                 <a:latin typeface="Segoe UI"/>
               </a:rPr>
-              <a:t>NOT MEASURED — the output</a:t>
-            </a:r>
-          </a:p>
-        </p:txBody>
-      </p:sp>
-      <p:sp>
-        <p:nvSpPr>
-          <p:cNvPr id="31" name="Rounded Rectangle 30"/>
+              <a:t>What we cannot prove yet</a:t>
+            </a:r>
+          </a:p>
+        </p:txBody>
+      </p:sp>
+      <p:sp>
+        <p:nvSpPr>
+          <p:cNvPr id="44" name="Rounded Rectangle 43"/>
           <p:cNvSpPr/>
           <p:nvPr/>
         </p:nvSpPr>
         <p:spPr>
           <a:xfrm>
-            <a:off x="4279392" y="2670048"/>
-            <a:ext cx="3621024" cy="274320"/>
+            <a:off x="566928" y="5138928"/>
+            <a:ext cx="5029200" cy="1115568"/>
           </a:xfrm>
           <a:prstGeom prst="roundRect">
-            <a:avLst>
-              <a:gd name="adj" fmla="val 10000"/>
-            </a:avLst>
+            <a:avLst/>
           </a:prstGeom>
           <a:solidFill>
             <a:srgbClr val="FFFFFF"/>
@@ -11149,32 +11925,23 @@
           </a:fontRef>
         </p:style>
         <p:txBody>
-          <a:bodyPr rtlCol="0" anchor="ctr" wrap="square" lIns="54864" rIns="54864" tIns="27432" bIns="27432"/>
+          <a:bodyPr rtlCol="0" anchor="ctr"/>
           <a:lstStyle/>
           <a:p>
             <a:pPr algn="ctr"/>
-            <a:r>
-              <a:rPr sz="900" b="0">
-                <a:solidFill>
-                  <a:srgbClr val="8C2F2F"/>
-                </a:solidFill>
-                <a:latin typeface="Segoe UI"/>
-              </a:rPr>
-              <a:t>no frozen ticket set, no replay</a:t>
-            </a:r>
-          </a:p>
-        </p:txBody>
-      </p:sp>
-      <p:sp>
-        <p:nvSpPr>
-          <p:cNvPr id="32" name="Rounded Rectangle 31"/>
+          </a:p>
+        </p:txBody>
+      </p:sp>
+      <p:sp>
+        <p:nvSpPr>
+          <p:cNvPr id="45" name="Rounded Rectangle 44"/>
           <p:cNvSpPr/>
           <p:nvPr/>
         </p:nvSpPr>
         <p:spPr>
           <a:xfrm>
-            <a:off x="4279392" y="3017520"/>
-            <a:ext cx="3621024" cy="274320"/>
+            <a:off x="676656" y="5230368"/>
+            <a:ext cx="4809744" cy="274320"/>
           </a:xfrm>
           <a:prstGeom prst="roundRect">
             <a:avLst>
@@ -11211,27 +11978,27 @@
           <a:p>
             <a:pPr algn="ctr"/>
             <a:r>
-              <a:rPr sz="900" b="0">
+              <a:rPr sz="850" b="0">
                 <a:solidFill>
                   <a:srgbClr val="8C2F2F"/>
                 </a:solidFill>
                 <a:latin typeface="Segoe UI"/>
               </a:rPr>
-              <a:t>no acceptance rate on generated MRs</a:t>
-            </a:r>
-          </a:p>
-        </p:txBody>
-      </p:sp>
-      <p:sp>
-        <p:nvSpPr>
-          <p:cNvPr id="33" name="Rounded Rectangle 32"/>
+              <a:t>no set of old tickets is replayed to score its work</a:t>
+            </a:r>
+          </a:p>
+        </p:txBody>
+      </p:sp>
+      <p:sp>
+        <p:nvSpPr>
+          <p:cNvPr id="46" name="Rounded Rectangle 45"/>
           <p:cNvSpPr/>
           <p:nvPr/>
         </p:nvSpPr>
         <p:spPr>
           <a:xfrm>
-            <a:off x="4279392" y="3364992"/>
-            <a:ext cx="3621024" cy="274320"/>
+            <a:off x="676656" y="5568696"/>
+            <a:ext cx="4809744" cy="274320"/>
           </a:xfrm>
           <a:prstGeom prst="roundRect">
             <a:avLst>
@@ -11268,27 +12035,27 @@
           <a:p>
             <a:pPr algn="ctr"/>
             <a:r>
-              <a:rPr sz="900" b="0">
+              <a:rPr sz="850" b="0">
                 <a:solidFill>
                   <a:srgbClr val="8C2F2F"/>
                 </a:solidFill>
                 <a:latin typeface="Segoe UI"/>
               </a:rPr>
-              <a:t>no edit distance to what shipped</a:t>
-            </a:r>
-          </a:p>
-        </p:txBody>
-      </p:sp>
-      <p:sp>
-        <p:nvSpPr>
-          <p:cNvPr id="34" name="Rounded Rectangle 33"/>
+              <a:t>no record of how often a person rewrites what it wrote</a:t>
+            </a:r>
+          </a:p>
+        </p:txBody>
+      </p:sp>
+      <p:sp>
+        <p:nvSpPr>
+          <p:cNvPr id="47" name="Rounded Rectangle 46"/>
           <p:cNvSpPr/>
           <p:nvPr/>
         </p:nvSpPr>
         <p:spPr>
           <a:xfrm>
-            <a:off x="4279392" y="3712464"/>
-            <a:ext cx="3621024" cy="274320"/>
+            <a:off x="676656" y="5907024"/>
+            <a:ext cx="4809744" cy="274320"/>
           </a:xfrm>
           <a:prstGeom prst="roundRect">
             <a:avLst>
@@ -11325,84 +12092,27 @@
           <a:p>
             <a:pPr algn="ctr"/>
             <a:r>
-              <a:rPr sz="900" b="0">
+              <a:rPr sz="850" b="0">
                 <a:solidFill>
                   <a:srgbClr val="8C2F2F"/>
                 </a:solidFill>
                 <a:latin typeface="Segoe UI"/>
               </a:rPr>
-              <a:t>no load test → no sizing number</a:t>
-            </a:r>
-          </a:p>
-        </p:txBody>
-      </p:sp>
-      <p:sp>
-        <p:nvSpPr>
-          <p:cNvPr id="35" name="Rounded Rectangle 34"/>
+              <a:t>never load-tested, so no honest users-per-machine number</a:t>
+            </a:r>
+          </a:p>
+        </p:txBody>
+      </p:sp>
+      <p:sp>
+        <p:nvSpPr>
+          <p:cNvPr id="48" name="Rounded Rectangle 47"/>
           <p:cNvSpPr/>
           <p:nvPr/>
         </p:nvSpPr>
         <p:spPr>
           <a:xfrm>
-            <a:off x="4279392" y="4059936"/>
-            <a:ext cx="3621024" cy="274320"/>
-          </a:xfrm>
-          <a:prstGeom prst="roundRect">
-            <a:avLst>
-              <a:gd name="adj" fmla="val 10000"/>
-            </a:avLst>
-          </a:prstGeom>
-          <a:solidFill>
-            <a:srgbClr val="FFFFFF"/>
-          </a:solidFill>
-          <a:ln w="12700">
-            <a:solidFill>
-              <a:srgbClr val="8C2F2F"/>
-            </a:solidFill>
-          </a:ln>
-          <a:effectLst/>
-        </p:spPr>
-        <p:style>
-          <a:lnRef idx="1">
-            <a:schemeClr val="accent1"/>
-          </a:lnRef>
-          <a:fillRef idx="3">
-            <a:schemeClr val="accent1"/>
-          </a:fillRef>
-          <a:effectRef idx="2">
-            <a:schemeClr val="accent1"/>
-          </a:effectRef>
-          <a:fontRef idx="minor">
-            <a:schemeClr val="lt1"/>
-          </a:fontRef>
-        </p:style>
-        <p:txBody>
-          <a:bodyPr rtlCol="0" anchor="ctr" wrap="square" lIns="54864" rIns="54864" tIns="27432" bIns="27432"/>
-          <a:lstStyle/>
-          <a:p>
-            <a:pPr algn="ctr"/>
-            <a:r>
-              <a:rPr sz="900" b="0">
-                <a:solidFill>
-                  <a:srgbClr val="8C2F2F"/>
-                </a:solidFill>
-                <a:latin typeface="Segoe UI"/>
-              </a:rPr>
-              <a:t>no restore drill; traces name the box</a:t>
-            </a:r>
-          </a:p>
-        </p:txBody>
-      </p:sp>
-      <p:sp>
-        <p:nvSpPr>
-          <p:cNvPr id="36" name="Rounded Rectangle 35"/>
-          <p:cNvSpPr/>
-          <p:nvPr/>
-        </p:nvSpPr>
-        <p:spPr>
-          <a:xfrm>
-            <a:off x="8558784" y="2139696"/>
-            <a:ext cx="3072384" cy="457200"/>
+            <a:off x="5779008" y="4754880"/>
+            <a:ext cx="5852160" cy="384048"/>
           </a:xfrm>
           <a:prstGeom prst="roundRect">
             <a:avLst>
@@ -11445,26 +12155,24 @@
                 </a:solidFill>
                 <a:latin typeface="Segoe UI"/>
               </a:rPr>
-              <a:t>REMOVED — versus the usual</a:t>
-            </a:r>
-          </a:p>
-        </p:txBody>
-      </p:sp>
-      <p:sp>
-        <p:nvSpPr>
-          <p:cNvPr id="37" name="Rounded Rectangle 36"/>
+              <a:t>What we need you to decide</a:t>
+            </a:r>
+          </a:p>
+        </p:txBody>
+      </p:sp>
+      <p:sp>
+        <p:nvSpPr>
+          <p:cNvPr id="49" name="Rounded Rectangle 48"/>
           <p:cNvSpPr/>
           <p:nvPr/>
         </p:nvSpPr>
         <p:spPr>
           <a:xfrm>
-            <a:off x="8558784" y="2670048"/>
-            <a:ext cx="3072384" cy="274320"/>
+            <a:off x="5779008" y="5138928"/>
+            <a:ext cx="5852160" cy="1115568"/>
           </a:xfrm>
           <a:prstGeom prst="roundRect">
-            <a:avLst>
-              <a:gd name="adj" fmla="val 10000"/>
-            </a:avLst>
+            <a:avLst/>
           </a:prstGeom>
           <a:solidFill>
             <a:srgbClr val="FFFFFF"/>
@@ -11491,32 +12199,23 @@
           </a:fontRef>
         </p:style>
         <p:txBody>
-          <a:bodyPr rtlCol="0" anchor="ctr" wrap="square" lIns="54864" rIns="54864" tIns="27432" bIns="27432"/>
+          <a:bodyPr rtlCol="0" anchor="ctr"/>
           <a:lstStyle/>
           <a:p>
             <a:pPr algn="ctr"/>
-            <a:r>
-              <a:rPr sz="900" b="0">
-                <a:solidFill>
-                  <a:srgbClr val="1F4E79"/>
-                </a:solidFill>
-                <a:latin typeface="Segoe UI"/>
-              </a:rPr>
-              <a:t>vector DB → markdown + SQLite</a:t>
-            </a:r>
-          </a:p>
-        </p:txBody>
-      </p:sp>
-      <p:sp>
-        <p:nvSpPr>
-          <p:cNvPr id="38" name="Rounded Rectangle 37"/>
+          </a:p>
+        </p:txBody>
+      </p:sp>
+      <p:sp>
+        <p:nvSpPr>
+          <p:cNvPr id="50" name="Rounded Rectangle 49"/>
           <p:cNvSpPr/>
           <p:nvPr/>
         </p:nvSpPr>
         <p:spPr>
           <a:xfrm>
-            <a:off x="8558784" y="3017520"/>
-            <a:ext cx="3072384" cy="274320"/>
+            <a:off x="5888736" y="5230368"/>
+            <a:ext cx="5632704" cy="274320"/>
           </a:xfrm>
           <a:prstGeom prst="roundRect">
             <a:avLst>
@@ -11553,27 +12252,27 @@
           <a:p>
             <a:pPr algn="ctr"/>
             <a:r>
-              <a:rPr sz="900" b="0">
+              <a:rPr sz="850" b="0">
                 <a:solidFill>
                   <a:srgbClr val="1F4E79"/>
                 </a:solidFill>
                 <a:latin typeface="Segoe UI"/>
               </a:rPr>
-              <a:t>opaque rows → git diff</a:t>
-            </a:r>
-          </a:p>
-        </p:txBody>
-      </p:sp>
-      <p:sp>
-        <p:nvSpPr>
-          <p:cNvPr id="39" name="Rounded Rectangle 38"/>
+              <a:t>pay for that scoring — it is the only thing that settles the question</a:t>
+            </a:r>
+          </a:p>
+        </p:txBody>
+      </p:sp>
+      <p:sp>
+        <p:nvSpPr>
+          <p:cNvPr id="51" name="Rounded Rectangle 50"/>
           <p:cNvSpPr/>
           <p:nvPr/>
         </p:nvSpPr>
         <p:spPr>
           <a:xfrm>
-            <a:off x="8558784" y="3364992"/>
-            <a:ext cx="3072384" cy="274320"/>
+            <a:off x="5888736" y="5568696"/>
+            <a:ext cx="5632704" cy="274320"/>
           </a:xfrm>
           <a:prstGeom prst="roundRect">
             <a:avLst>
@@ -11610,27 +12309,27 @@
           <a:p>
             <a:pPr algn="ctr"/>
             <a:r>
-              <a:rPr sz="900" b="0">
+              <a:rPr sz="850" b="0">
                 <a:solidFill>
                   <a:srgbClr val="1F4E79"/>
                 </a:solidFill>
                 <a:latin typeface="Segoe UI"/>
               </a:rPr>
-              <a:t>dump/restore → copy a folder</a:t>
-            </a:r>
-          </a:p>
-        </p:txBody>
-      </p:sp>
-      <p:sp>
-        <p:nvSpPr>
-          <p:cNvPr id="40" name="Rounded Rectangle 39"/>
+              <a:t>name an owner and a stand-in: one person wrote all of this</a:t>
+            </a:r>
+          </a:p>
+        </p:txBody>
+      </p:sp>
+      <p:sp>
+        <p:nvSpPr>
+          <p:cNvPr id="52" name="Rounded Rectangle 51"/>
           <p:cNvSpPr/>
           <p:nvPr/>
         </p:nvSpPr>
         <p:spPr>
           <a:xfrm>
-            <a:off x="8558784" y="3712464"/>
-            <a:ext cx="3072384" cy="274320"/>
+            <a:off x="5888736" y="5907024"/>
+            <a:ext cx="5632704" cy="274320"/>
           </a:xfrm>
           <a:prstGeom prst="roundRect">
             <a:avLst>
@@ -11667,454 +12366,13 @@
           <a:p>
             <a:pPr algn="ctr"/>
             <a:r>
-              <a:rPr sz="900" b="0">
+              <a:rPr sz="850" b="0">
                 <a:solidFill>
                   <a:srgbClr val="1F4E79"/>
                 </a:solidFill>
                 <a:latin typeface="Segoe UI"/>
               </a:rPr>
-              <a:t>vendor tool-calling → any model</a:t>
-            </a:r>
-          </a:p>
-        </p:txBody>
-      </p:sp>
-      <p:sp>
-        <p:nvSpPr>
-          <p:cNvPr id="41" name="Rounded Rectangle 40"/>
-          <p:cNvSpPr/>
-          <p:nvPr/>
-        </p:nvSpPr>
-        <p:spPr>
-          <a:xfrm>
-            <a:off x="8558784" y="4059936"/>
-            <a:ext cx="3072384" cy="274320"/>
-          </a:xfrm>
-          <a:prstGeom prst="roundRect">
-            <a:avLst>
-              <a:gd name="adj" fmla="val 10000"/>
-            </a:avLst>
-          </a:prstGeom>
-          <a:solidFill>
-            <a:srgbClr val="FFFFFF"/>
-          </a:solidFill>
-          <a:ln w="12700">
-            <a:solidFill>
-              <a:srgbClr val="1F4E79"/>
-            </a:solidFill>
-          </a:ln>
-          <a:effectLst/>
-        </p:spPr>
-        <p:style>
-          <a:lnRef idx="1">
-            <a:schemeClr val="accent1"/>
-          </a:lnRef>
-          <a:fillRef idx="3">
-            <a:schemeClr val="accent1"/>
-          </a:fillRef>
-          <a:effectRef idx="2">
-            <a:schemeClr val="accent1"/>
-          </a:effectRef>
-          <a:fontRef idx="minor">
-            <a:schemeClr val="lt1"/>
-          </a:fontRef>
-        </p:style>
-        <p:txBody>
-          <a:bodyPr rtlCol="0" anchor="ctr" wrap="square" lIns="54864" rIns="54864" tIns="27432" bIns="27432"/>
-          <a:lstStyle/>
-          <a:p>
-            <a:pPr algn="ctr"/>
-            <a:r>
-              <a:rPr sz="900" b="0">
-                <a:solidFill>
-                  <a:srgbClr val="1F4E79"/>
-                </a:solidFill>
-                <a:latin typeface="Segoe UI"/>
-              </a:rPr>
-              <a:t>telemetry on → none in the lock</a:t>
-            </a:r>
-          </a:p>
-        </p:txBody>
-      </p:sp>
-      <p:sp>
-        <p:nvSpPr>
-          <p:cNvPr id="42" name="TextBox 41"/>
-          <p:cNvSpPr txBox="1"/>
-          <p:nvPr/>
-        </p:nvSpPr>
-        <p:spPr>
-          <a:xfrm>
-            <a:off x="566928" y="4517136"/>
-            <a:ext cx="5486400" cy="237744"/>
-          </a:xfrm>
-          <a:prstGeom prst="rect">
-            <a:avLst/>
-          </a:prstGeom>
-          <a:noFill/>
-        </p:spPr>
-        <p:txBody>
-          <a:bodyPr wrap="square" anchor="t" lIns="0" rIns="0" tIns="0" bIns="0">
-            <a:spAutoFit/>
-          </a:bodyPr>
-          <a:lstStyle/>
-          <a:p>
-            <a:pPr algn="l">
-              <a:spcAft>
-                <a:spcPts val="0"/>
-              </a:spcAft>
-            </a:pPr>
-            <a:r>
-              <a:rPr sz="1300" b="1">
-                <a:solidFill>
-                  <a:srgbClr val="1A1A1A"/>
-                </a:solidFill>
-                <a:latin typeface="Segoe UI"/>
-              </a:rPr>
-              <a:t>Decisions we need from you</a:t>
-            </a:r>
-          </a:p>
-        </p:txBody>
-      </p:sp>
-      <p:sp>
-        <p:nvSpPr>
-          <p:cNvPr id="43" name="Rounded Rectangle 42"/>
-          <p:cNvSpPr/>
-          <p:nvPr/>
-        </p:nvSpPr>
-        <p:spPr>
-          <a:xfrm>
-            <a:off x="566928" y="4828032"/>
-            <a:ext cx="2139696" cy="786384"/>
-          </a:xfrm>
-          <a:prstGeom prst="roundRect">
-            <a:avLst>
-              <a:gd name="adj" fmla="val 10000"/>
-            </a:avLst>
-          </a:prstGeom>
-          <a:solidFill>
-            <a:srgbClr val="FFFFFF"/>
-          </a:solidFill>
-          <a:ln w="12700">
-            <a:solidFill>
-              <a:srgbClr val="8C2F2F"/>
-            </a:solidFill>
-          </a:ln>
-          <a:effectLst/>
-        </p:spPr>
-        <p:style>
-          <a:lnRef idx="1">
-            <a:schemeClr val="accent1"/>
-          </a:lnRef>
-          <a:fillRef idx="3">
-            <a:schemeClr val="accent1"/>
-          </a:fillRef>
-          <a:effectRef idx="2">
-            <a:schemeClr val="accent1"/>
-          </a:effectRef>
-          <a:fontRef idx="minor">
-            <a:schemeClr val="lt1"/>
-          </a:fontRef>
-        </p:style>
-        <p:txBody>
-          <a:bodyPr rtlCol="0" anchor="ctr" wrap="square" lIns="54864" rIns="54864" tIns="27432" bIns="27432"/>
-          <a:lstStyle/>
-          <a:p>
-            <a:pPr algn="ctr"/>
-            <a:r>
-              <a:rPr sz="1100" b="1">
-                <a:solidFill>
-                  <a:srgbClr val="8C2F2F"/>
-                </a:solidFill>
-                <a:latin typeface="Segoe UI"/>
-              </a:rPr>
-              <a:t>Prove the output</a:t>
-            </a:r>
-          </a:p>
-          <a:p>
-            <a:pPr algn="ctr"/>
-            <a:r>
-              <a:rPr sz="850" b="0">
-                <a:solidFill>
-                  <a:srgbClr val="1A1A1A"/>
-                </a:solidFill>
-                <a:latin typeface="Segoe UI"/>
-              </a:rPr>
-              <a:t>fund the harness above</a:t>
-            </a:r>
-          </a:p>
-        </p:txBody>
-      </p:sp>
-      <p:sp>
-        <p:nvSpPr>
-          <p:cNvPr id="44" name="Rounded Rectangle 43"/>
-          <p:cNvSpPr/>
-          <p:nvPr/>
-        </p:nvSpPr>
-        <p:spPr>
-          <a:xfrm>
-            <a:off x="2807208" y="4828032"/>
-            <a:ext cx="2139696" cy="786384"/>
-          </a:xfrm>
-          <a:prstGeom prst="roundRect">
-            <a:avLst>
-              <a:gd name="adj" fmla="val 10000"/>
-            </a:avLst>
-          </a:prstGeom>
-          <a:solidFill>
-            <a:srgbClr val="FFFFFF"/>
-          </a:solidFill>
-          <a:ln w="12700">
-            <a:solidFill>
-              <a:srgbClr val="8C2F2F"/>
-            </a:solidFill>
-          </a:ln>
-          <a:effectLst/>
-        </p:spPr>
-        <p:style>
-          <a:lnRef idx="1">
-            <a:schemeClr val="accent1"/>
-          </a:lnRef>
-          <a:fillRef idx="3">
-            <a:schemeClr val="accent1"/>
-          </a:fillRef>
-          <a:effectRef idx="2">
-            <a:schemeClr val="accent1"/>
-          </a:effectRef>
-          <a:fontRef idx="minor">
-            <a:schemeClr val="lt1"/>
-          </a:fontRef>
-        </p:style>
-        <p:txBody>
-          <a:bodyPr rtlCol="0" anchor="ctr" wrap="square" lIns="54864" rIns="54864" tIns="27432" bIns="27432"/>
-          <a:lstStyle/>
-          <a:p>
-            <a:pPr algn="ctr"/>
-            <a:r>
-              <a:rPr sz="1100" b="1">
-                <a:solidFill>
-                  <a:srgbClr val="8C2F2F"/>
-                </a:solidFill>
-                <a:latin typeface="Segoe UI"/>
-              </a:rPr>
-              <a:t>Name an owner</a:t>
-            </a:r>
-          </a:p>
-          <a:p>
-            <a:pPr algn="ctr"/>
-            <a:r>
-              <a:rPr sz="850" b="0">
-                <a:solidFill>
-                  <a:srgbClr val="1A1A1A"/>
-                </a:solidFill>
-                <a:latin typeface="Segoe UI"/>
-              </a:rPr>
-              <a:t>one author is the bus factor</a:t>
-            </a:r>
-          </a:p>
-        </p:txBody>
-      </p:sp>
-      <p:sp>
-        <p:nvSpPr>
-          <p:cNvPr id="45" name="Rounded Rectangle 44"/>
-          <p:cNvSpPr/>
-          <p:nvPr/>
-        </p:nvSpPr>
-        <p:spPr>
-          <a:xfrm>
-            <a:off x="5047488" y="4828032"/>
-            <a:ext cx="2139696" cy="786384"/>
-          </a:xfrm>
-          <a:prstGeom prst="roundRect">
-            <a:avLst>
-              <a:gd name="adj" fmla="val 10000"/>
-            </a:avLst>
-          </a:prstGeom>
-          <a:solidFill>
-            <a:srgbClr val="FFFFFF"/>
-          </a:solidFill>
-          <a:ln w="12700">
-            <a:solidFill>
-              <a:srgbClr val="1F4E79"/>
-            </a:solidFill>
-          </a:ln>
-          <a:effectLst/>
-        </p:spPr>
-        <p:style>
-          <a:lnRef idx="1">
-            <a:schemeClr val="accent1"/>
-          </a:lnRef>
-          <a:fillRef idx="3">
-            <a:schemeClr val="accent1"/>
-          </a:fillRef>
-          <a:effectRef idx="2">
-            <a:schemeClr val="accent1"/>
-          </a:effectRef>
-          <a:fontRef idx="minor">
-            <a:schemeClr val="lt1"/>
-          </a:fontRef>
-        </p:style>
-        <p:txBody>
-          <a:bodyPr rtlCol="0" anchor="ctr" wrap="square" lIns="54864" rIns="54864" tIns="27432" bIns="27432"/>
-          <a:lstStyle/>
-          <a:p>
-            <a:pPr algn="ctr"/>
-            <a:r>
-              <a:rPr sz="1100" b="1">
-                <a:solidFill>
-                  <a:srgbClr val="1F4E79"/>
-                </a:solidFill>
-                <a:latin typeface="Segoe UI"/>
-              </a:rPr>
-              <a:t>Admin host</a:t>
-            </a:r>
-          </a:p>
-          <a:p>
-            <a:pPr algn="ctr"/>
-            <a:r>
-              <a:rPr sz="850" b="0">
-                <a:solidFill>
-                  <a:srgbClr val="1A1A1A"/>
-                </a:solidFill>
-                <a:latin typeface="Segoe UI"/>
-              </a:rPr>
-              <a:t>which network holds company memory</a:t>
-            </a:r>
-          </a:p>
-        </p:txBody>
-      </p:sp>
-      <p:sp>
-        <p:nvSpPr>
-          <p:cNvPr id="46" name="Rounded Rectangle 45"/>
-          <p:cNvSpPr/>
-          <p:nvPr/>
-        </p:nvSpPr>
-        <p:spPr>
-          <a:xfrm>
-            <a:off x="7287768" y="4828032"/>
-            <a:ext cx="2139696" cy="786384"/>
-          </a:xfrm>
-          <a:prstGeom prst="roundRect">
-            <a:avLst>
-              <a:gd name="adj" fmla="val 10000"/>
-            </a:avLst>
-          </a:prstGeom>
-          <a:solidFill>
-            <a:srgbClr val="FFFFFF"/>
-          </a:solidFill>
-          <a:ln w="12700">
-            <a:solidFill>
-              <a:srgbClr val="1F4E79"/>
-            </a:solidFill>
-          </a:ln>
-          <a:effectLst/>
-        </p:spPr>
-        <p:style>
-          <a:lnRef idx="1">
-            <a:schemeClr val="accent1"/>
-          </a:lnRef>
-          <a:fillRef idx="3">
-            <a:schemeClr val="accent1"/>
-          </a:fillRef>
-          <a:effectRef idx="2">
-            <a:schemeClr val="accent1"/>
-          </a:effectRef>
-          <a:fontRef idx="minor">
-            <a:schemeClr val="lt1"/>
-          </a:fontRef>
-        </p:style>
-        <p:txBody>
-          <a:bodyPr rtlCol="0" anchor="ctr" wrap="square" lIns="54864" rIns="54864" tIns="27432" bIns="27432"/>
-          <a:lstStyle/>
-          <a:p>
-            <a:pPr algn="ctr"/>
-            <a:r>
-              <a:rPr sz="1100" b="1">
-                <a:solidFill>
-                  <a:srgbClr val="1F4E79"/>
-                </a:solidFill>
-                <a:latin typeface="Segoe UI"/>
-              </a:rPr>
-              <a:t>Boundary</a:t>
-            </a:r>
-          </a:p>
-          <a:p>
-            <a:pPr algn="ctr"/>
-            <a:r>
-              <a:rPr sz="850" b="0">
-                <a:solidFill>
-                  <a:srgbClr val="1A1A1A"/>
-                </a:solidFill>
-                <a:latin typeface="Segoe UI"/>
-              </a:rPr>
-              <a:t>OS firewall rule + per-user identity</a:t>
-            </a:r>
-          </a:p>
-        </p:txBody>
-      </p:sp>
-      <p:sp>
-        <p:nvSpPr>
-          <p:cNvPr id="47" name="Rounded Rectangle 46"/>
-          <p:cNvSpPr/>
-          <p:nvPr/>
-        </p:nvSpPr>
-        <p:spPr>
-          <a:xfrm>
-            <a:off x="9528048" y="4828032"/>
-            <a:ext cx="2139696" cy="786384"/>
-          </a:xfrm>
-          <a:prstGeom prst="roundRect">
-            <a:avLst>
-              <a:gd name="adj" fmla="val 10000"/>
-            </a:avLst>
-          </a:prstGeom>
-          <a:solidFill>
-            <a:srgbClr val="FFFFFF"/>
-          </a:solidFill>
-          <a:ln w="12700">
-            <a:solidFill>
-              <a:srgbClr val="1F4E79"/>
-            </a:solidFill>
-          </a:ln>
-          <a:effectLst/>
-        </p:spPr>
-        <p:style>
-          <a:lnRef idx="1">
-            <a:schemeClr val="accent1"/>
-          </a:lnRef>
-          <a:fillRef idx="3">
-            <a:schemeClr val="accent1"/>
-          </a:fillRef>
-          <a:effectRef idx="2">
-            <a:schemeClr val="accent1"/>
-          </a:effectRef>
-          <a:fontRef idx="minor">
-            <a:schemeClr val="lt1"/>
-          </a:fontRef>
-        </p:style>
-        <p:txBody>
-          <a:bodyPr rtlCol="0" anchor="ctr" wrap="square" lIns="54864" rIns="54864" tIns="27432" bIns="27432"/>
-          <a:lstStyle/>
-          <a:p>
-            <a:pPr algn="ctr"/>
-            <a:r>
-              <a:rPr sz="1100" b="1">
-                <a:solidFill>
-                  <a:srgbClr val="1F4E79"/>
-                </a:solidFill>
-                <a:latin typeface="Segoe UI"/>
-              </a:rPr>
-              <a:t>Scanner profile</a:t>
-            </a:r>
-          </a:p>
-          <a:p>
-            <a:pPr algn="ctr"/>
-            <a:r>
-              <a:rPr sz="850" b="0">
-                <a:solidFill>
-                  <a:srgbClr val="1A1A1A"/>
-                </a:solidFill>
-                <a:latin typeface="Segoe UI"/>
-              </a:rPr>
-              <a:t>make ours and the corporate one agree</a:t>
+              <a:t>pick the network that holds the company memory, and who owns it</a:t>
             </a:r>
           </a:p>
         </p:txBody>

--- a/docs/AIForgeCrew-CTO-Summary.pptx
+++ b/docs/AIForgeCrew-CTO-Summary.pptx
@@ -4,12 +4,15 @@
   <p:sldMasterIdLst>
     <p:sldMasterId id="2147483648" r:id="rId1"/>
   </p:sldMasterIdLst>
+  <p:notesMasterIdLst>
+    <p:notesMasterId r:id="rId5"/>
+  </p:notesMasterIdLst>
   <p:sldIdLst>
-    <p:sldId id="256" r:id="rId7"/>
-    <p:sldId id="257" r:id="rId9"/>
-    <p:sldId id="258" r:id="rId10"/>
+    <p:sldId id="256" r:id="rId2"/>
+    <p:sldId id="257" r:id="rId3"/>
+    <p:sldId id="258" r:id="rId4"/>
   </p:sldIdLst>
-  <p:sldSz cx="12191695" cy="6858000" type="screen4x3"/>
+  <p:sldSz cx="12192000" cy="6858000"/>
   <p:notesSz cx="6858000" cy="9144000"/>
   <p:defaultTextStyle>
     <a:defPPr>
@@ -106,11 +109,27 @@
       </a:defRPr>
     </a:lvl9pPr>
   </p:defaultTextStyle>
+  <p:extLst>
+    <p:ext uri="{EFAFB233-063F-42B5-8137-9DF3F51BA10A}">
+      <p15:sldGuideLst xmlns:p15="http://schemas.microsoft.com/office/powerpoint/2012/main">
+        <p15:guide id="1" orient="horz" pos="2160">
+          <p15:clr>
+            <a:srgbClr val="A4A3A4"/>
+          </p15:clr>
+        </p15:guide>
+        <p15:guide id="2" pos="2880">
+          <p15:clr>
+            <a:srgbClr val="A4A3A4"/>
+          </p15:clr>
+        </p15:guide>
+      </p15:sldGuideLst>
+    </p:ext>
+  </p:extLst>
 </p:presentation>
 </file>
 
 <file path=ppt/notesMasters/notesMaster1.xml><?xml version="1.0" encoding="utf-8"?>
-<p:notesMaster xmlns:a="http://schemas.openxmlformats.org/drawingml/2006/main" xmlns:p="http://schemas.openxmlformats.org/presentationml/2006/main" xmlns:r="http://schemas.openxmlformats.org/officeDocument/2006/relationships">
+<p:notesMaster xmlns:a="http://schemas.openxmlformats.org/drawingml/2006/main" xmlns:r="http://schemas.openxmlformats.org/officeDocument/2006/relationships" xmlns:p="http://schemas.openxmlformats.org/presentationml/2006/main">
   <p:cSld>
     <p:bg>
       <p:bgRef idx="1001">
@@ -131,241 +150,16 @@
           <a:chExt cx="0" cy="0"/>
         </a:xfrm>
       </p:grpSpPr>
-      <p:sp>
-        <p:nvSpPr>
-          <p:cNvPr id="2" name="Header Placeholder 1"/>
-          <p:cNvSpPr>
-            <a:spLocks noGrp="1"/>
-          </p:cNvSpPr>
-          <p:nvPr>
-            <p:ph type="hdr" sz="quarter"/>
-          </p:nvPr>
-        </p:nvSpPr>
-        <p:spPr>
-          <a:xfrm>
-            <a:off x="0" y="0"/>
-            <a:ext cx="2971800" cy="457200"/>
-          </a:xfrm>
-          <a:prstGeom prst="rect">
-            <a:avLst/>
-          </a:prstGeom>
-        </p:spPr>
-        <p:txBody>
-          <a:bodyPr vert="horz" lIns="91440" tIns="45720" rIns="91440" bIns="45720" rtlCol="0"/>
-          <a:lstStyle>
-            <a:lvl1pPr algn="l">
-              <a:defRPr sz="1200"/>
-            </a:lvl1pPr>
-          </a:lstStyle>
-          <a:p>
-            <a:endParaRPr lang="en-US"/>
-          </a:p>
-        </p:txBody>
-      </p:sp>
-      <p:sp>
-        <p:nvSpPr>
-          <p:cNvPr id="3" name="Date Placeholder 2"/>
-          <p:cNvSpPr>
-            <a:spLocks noGrp="1"/>
-          </p:cNvSpPr>
-          <p:nvPr>
-            <p:ph type="dt" idx="1"/>
-          </p:nvPr>
-        </p:nvSpPr>
-        <p:spPr>
-          <a:xfrm>
-            <a:off x="3884613" y="0"/>
-            <a:ext cx="2971800" cy="457200"/>
-          </a:xfrm>
-          <a:prstGeom prst="rect">
-            <a:avLst/>
-          </a:prstGeom>
-        </p:spPr>
-        <p:txBody>
-          <a:bodyPr vert="horz" lIns="91440" tIns="45720" rIns="91440" bIns="45720" rtlCol="0"/>
-          <a:lstStyle>
-            <a:lvl1pPr algn="r">
-              <a:defRPr sz="1200"/>
-            </a:lvl1pPr>
-          </a:lstStyle>
-          <a:p>
-            <a:fld id="{0F89C1C7-3DCD-1040-A9CF-14679D8B5DDD}" type="datetimeFigureOut">
-              <a:rPr lang="en-US" smtClean="0"/>
-              <a:t>10/17/16</a:t>
-            </a:fld>
-            <a:endParaRPr lang="en-US"/>
-          </a:p>
-        </p:txBody>
-      </p:sp>
-      <p:sp>
-        <p:nvSpPr>
-          <p:cNvPr id="4" name="Slide Image Placeholder 3"/>
-          <p:cNvSpPr>
-            <a:spLocks noGrp="1" noRot="1" noChangeAspect="1"/>
-          </p:cNvSpPr>
-          <p:nvPr>
-            <p:ph type="sldImg" idx="2"/>
-          </p:nvPr>
-        </p:nvSpPr>
-        <p:spPr>
-          <a:xfrm>
-            <a:off x="1143000" y="685800"/>
-            <a:ext cx="4572000" cy="3429000"/>
-          </a:xfrm>
-          <a:prstGeom prst="rect">
-            <a:avLst/>
-          </a:prstGeom>
-          <a:noFill/>
-          <a:ln w="12700">
-            <a:solidFill>
-              <a:prstClr val="black"/>
-            </a:solidFill>
-          </a:ln>
-        </p:spPr>
-        <p:txBody>
-          <a:bodyPr vert="horz" lIns="91440" tIns="45720" rIns="91440" bIns="45720" rtlCol="0" anchor="ctr"/>
-          <a:lstStyle/>
-          <a:p>
-            <a:endParaRPr lang="en-US"/>
-          </a:p>
-        </p:txBody>
-      </p:sp>
-      <p:sp>
-        <p:nvSpPr>
-          <p:cNvPr id="5" name="Notes Placeholder 4"/>
-          <p:cNvSpPr>
-            <a:spLocks noGrp="1"/>
-          </p:cNvSpPr>
-          <p:nvPr>
-            <p:ph type="body" sz="quarter" idx="3"/>
-          </p:nvPr>
-        </p:nvSpPr>
-        <p:spPr>
-          <a:xfrm>
-            <a:off x="685800" y="4343400"/>
-            <a:ext cx="5486400" cy="4114800"/>
-          </a:xfrm>
-          <a:prstGeom prst="rect">
-            <a:avLst/>
-          </a:prstGeom>
-        </p:spPr>
-        <p:txBody>
-          <a:bodyPr vert="horz" lIns="91440" tIns="45720" rIns="91440" bIns="45720" rtlCol="0"/>
-          <a:lstStyle/>
-          <a:p>
-            <a:pPr lvl="0"/>
-            <a:r>
-              <a:rPr lang="en-US" smtClean="0"/>
-              <a:t>Click to edit Master text styles</a:t>
-            </a:r>
-          </a:p>
-          <a:p>
-            <a:pPr lvl="1"/>
-            <a:r>
-              <a:rPr lang="en-US" smtClean="0"/>
-              <a:t>Second level</a:t>
-            </a:r>
-          </a:p>
-          <a:p>
-            <a:pPr lvl="2"/>
-            <a:r>
-              <a:rPr lang="en-US" smtClean="0"/>
-              <a:t>Third level</a:t>
-            </a:r>
-          </a:p>
-          <a:p>
-            <a:pPr lvl="3"/>
-            <a:r>
-              <a:rPr lang="en-US" smtClean="0"/>
-              <a:t>Fourth level</a:t>
-            </a:r>
-          </a:p>
-          <a:p>
-            <a:pPr lvl="4"/>
-            <a:r>
-              <a:rPr lang="en-US" smtClean="0"/>
-              <a:t>Fifth level</a:t>
-            </a:r>
-            <a:endParaRPr lang="en-US"/>
-          </a:p>
-        </p:txBody>
-      </p:sp>
-      <p:sp>
-        <p:nvSpPr>
-          <p:cNvPr id="6" name="Footer Placeholder 5"/>
-          <p:cNvSpPr>
-            <a:spLocks noGrp="1"/>
-          </p:cNvSpPr>
-          <p:nvPr>
-            <p:ph type="ftr" sz="quarter" idx="4"/>
-          </p:nvPr>
-        </p:nvSpPr>
-        <p:spPr>
-          <a:xfrm>
-            <a:off x="0" y="8685213"/>
-            <a:ext cx="2971800" cy="457200"/>
-          </a:xfrm>
-          <a:prstGeom prst="rect">
-            <a:avLst/>
-          </a:prstGeom>
-        </p:spPr>
-        <p:txBody>
-          <a:bodyPr vert="horz" lIns="91440" tIns="45720" rIns="91440" bIns="45720" rtlCol="0" anchor="b"/>
-          <a:lstStyle>
-            <a:lvl1pPr algn="l">
-              <a:defRPr sz="1200"/>
-            </a:lvl1pPr>
-          </a:lstStyle>
-          <a:p>
-            <a:endParaRPr lang="en-US"/>
-          </a:p>
-        </p:txBody>
-      </p:sp>
-      <p:sp>
-        <p:nvSpPr>
-          <p:cNvPr id="7" name="Slide Number Placeholder 6"/>
-          <p:cNvSpPr>
-            <a:spLocks noGrp="1"/>
-          </p:cNvSpPr>
-          <p:nvPr>
-            <p:ph type="sldNum" sz="quarter" idx="5"/>
-          </p:nvPr>
-        </p:nvSpPr>
-        <p:spPr>
-          <a:xfrm>
-            <a:off x="3884613" y="8685213"/>
-            <a:ext cx="2971800" cy="457200"/>
-          </a:xfrm>
-          <a:prstGeom prst="rect">
-            <a:avLst/>
-          </a:prstGeom>
-        </p:spPr>
-        <p:txBody>
-          <a:bodyPr vert="horz" lIns="91440" tIns="45720" rIns="91440" bIns="45720" rtlCol="0" anchor="b"/>
-          <a:lstStyle>
-            <a:lvl1pPr algn="r">
-              <a:defRPr sz="1200"/>
-            </a:lvl1pPr>
-          </a:lstStyle>
-          <a:p>
-            <a:fld id="{BB5E49A5-4136-284D-997B-48E1D791AD67}" type="slidenum">
-              <a:rPr lang="en-US" smtClean="0"/>
-              <a:t>‹#›</a:t>
-            </a:fld>
-            <a:endParaRPr lang="en-US"/>
-          </a:p>
-        </p:txBody>
-      </p:sp>
     </p:spTree>
     <p:extLst>
       <p:ext uri="{BB962C8B-B14F-4D97-AF65-F5344CB8AC3E}">
-        <p14:creationId xmlns:p14="http://schemas.microsoft.com/office/powerpoint/2010/main" val="2623252185"/>
+        <p14:creationId xmlns:p14="http://schemas.microsoft.com/office/powerpoint/2010/main" val="932693356"/>
       </p:ext>
     </p:extLst>
   </p:cSld>
   <p:clrMap bg1="lt1" tx1="dk1" bg2="lt2" tx2="dk2" accent1="accent1" accent2="accent2" accent3="accent3" accent4="accent4" accent5="accent5" accent6="accent6" hlink="hlink" folHlink="folHlink"/>
   <p:notesStyle>
-    <a:lvl1pPr marL="0" algn="l" defTabSz="457200" rtl="0" eaLnBrk="1" latinLnBrk="0" hangingPunct="1">
+    <a:lvl1pPr marL="0" algn="l" defTabSz="914400" rtl="0" eaLnBrk="1" latinLnBrk="0" hangingPunct="1">
       <a:defRPr sz="1200" kern="1200">
         <a:solidFill>
           <a:schemeClr val="tx1"/>
@@ -375,7 +169,7 @@
         <a:cs typeface="+mn-cs"/>
       </a:defRPr>
     </a:lvl1pPr>
-    <a:lvl2pPr marL="457200" algn="l" defTabSz="457200" rtl="0" eaLnBrk="1" latinLnBrk="0" hangingPunct="1">
+    <a:lvl2pPr marL="457200" algn="l" defTabSz="914400" rtl="0" eaLnBrk="1" latinLnBrk="0" hangingPunct="1">
       <a:defRPr sz="1200" kern="1200">
         <a:solidFill>
           <a:schemeClr val="tx1"/>
@@ -385,7 +179,7 @@
         <a:cs typeface="+mn-cs"/>
       </a:defRPr>
     </a:lvl2pPr>
-    <a:lvl3pPr marL="914400" algn="l" defTabSz="457200" rtl="0" eaLnBrk="1" latinLnBrk="0" hangingPunct="1">
+    <a:lvl3pPr marL="914400" algn="l" defTabSz="914400" rtl="0" eaLnBrk="1" latinLnBrk="0" hangingPunct="1">
       <a:defRPr sz="1200" kern="1200">
         <a:solidFill>
           <a:schemeClr val="tx1"/>
@@ -395,7 +189,7 @@
         <a:cs typeface="+mn-cs"/>
       </a:defRPr>
     </a:lvl3pPr>
-    <a:lvl4pPr marL="1371600" algn="l" defTabSz="457200" rtl="0" eaLnBrk="1" latinLnBrk="0" hangingPunct="1">
+    <a:lvl4pPr marL="1371600" algn="l" defTabSz="914400" rtl="0" eaLnBrk="1" latinLnBrk="0" hangingPunct="1">
       <a:defRPr sz="1200" kern="1200">
         <a:solidFill>
           <a:schemeClr val="tx1"/>
@@ -405,7 +199,7 @@
         <a:cs typeface="+mn-cs"/>
       </a:defRPr>
     </a:lvl4pPr>
-    <a:lvl5pPr marL="1828800" algn="l" defTabSz="457200" rtl="0" eaLnBrk="1" latinLnBrk="0" hangingPunct="1">
+    <a:lvl5pPr marL="1828800" algn="l" defTabSz="914400" rtl="0" eaLnBrk="1" latinLnBrk="0" hangingPunct="1">
       <a:defRPr sz="1200" kern="1200">
         <a:solidFill>
           <a:schemeClr val="tx1"/>
@@ -415,7 +209,7 @@
         <a:cs typeface="+mn-cs"/>
       </a:defRPr>
     </a:lvl5pPr>
-    <a:lvl6pPr marL="2286000" algn="l" defTabSz="457200" rtl="0" eaLnBrk="1" latinLnBrk="0" hangingPunct="1">
+    <a:lvl6pPr marL="2286000" algn="l" defTabSz="914400" rtl="0" eaLnBrk="1" latinLnBrk="0" hangingPunct="1">
       <a:defRPr sz="1200" kern="1200">
         <a:solidFill>
           <a:schemeClr val="tx1"/>
@@ -425,7 +219,7 @@
         <a:cs typeface="+mn-cs"/>
       </a:defRPr>
     </a:lvl6pPr>
-    <a:lvl7pPr marL="2743200" algn="l" defTabSz="457200" rtl="0" eaLnBrk="1" latinLnBrk="0" hangingPunct="1">
+    <a:lvl7pPr marL="2743200" algn="l" defTabSz="914400" rtl="0" eaLnBrk="1" latinLnBrk="0" hangingPunct="1">
       <a:defRPr sz="1200" kern="1200">
         <a:solidFill>
           <a:schemeClr val="tx1"/>
@@ -435,7 +229,7 @@
         <a:cs typeface="+mn-cs"/>
       </a:defRPr>
     </a:lvl7pPr>
-    <a:lvl8pPr marL="3200400" algn="l" defTabSz="457200" rtl="0" eaLnBrk="1" latinLnBrk="0" hangingPunct="1">
+    <a:lvl8pPr marL="3200400" algn="l" defTabSz="914400" rtl="0" eaLnBrk="1" latinLnBrk="0" hangingPunct="1">
       <a:defRPr sz="1200" kern="1200">
         <a:solidFill>
           <a:schemeClr val="tx1"/>
@@ -445,7 +239,7 @@
         <a:cs typeface="+mn-cs"/>
       </a:defRPr>
     </a:lvl8pPr>
-    <a:lvl9pPr marL="3657600" algn="l" defTabSz="457200" rtl="0" eaLnBrk="1" latinLnBrk="0" hangingPunct="1">
+    <a:lvl9pPr marL="3657600" algn="l" defTabSz="914400" rtl="0" eaLnBrk="1" latinLnBrk="0" hangingPunct="1">
       <a:defRPr sz="1200" kern="1200">
         <a:solidFill>
           <a:schemeClr val="tx1"/>
@@ -460,7 +254,7 @@
 </file>
 
 <file path=ppt/notesSlides/notesSlide1.xml><?xml version="1.0" encoding="utf-8"?>
-<p:notes xmlns:a="http://schemas.openxmlformats.org/drawingml/2006/main" xmlns:p="http://schemas.openxmlformats.org/presentationml/2006/main" xmlns:r="http://schemas.openxmlformats.org/officeDocument/2006/relationships">
+<p:notes xmlns:a="http://schemas.openxmlformats.org/drawingml/2006/main" xmlns:r="http://schemas.openxmlformats.org/officeDocument/2006/relationships" xmlns:p="http://schemas.openxmlformats.org/presentationml/2006/main">
   <p:cSld>
     <p:spTree>
       <p:nvGrpSpPr>
@@ -480,7 +274,7 @@
         <p:nvSpPr>
           <p:cNvPr id="2" name="Slide Image Placeholder 1"/>
           <p:cNvSpPr>
-            <a:spLocks noGrp="1"/>
+            <a:spLocks noGrp="1" noRot="1" noChangeAspect="1"/>
           </p:cNvSpPr>
           <p:nvPr>
             <p:ph type="sldImg" idx="2"/>
@@ -495,7 +289,7 @@
             <a:spLocks noGrp="1"/>
           </p:cNvSpPr>
           <p:nvPr>
-            <p:ph type="body" idx="3" sz="quarter"/>
+            <p:ph type="body" sz="quarter" idx="3"/>
           </p:nvPr>
         </p:nvSpPr>
         <p:spPr/>
@@ -532,7 +326,9 @@
               <a:t>the environment and migrates in place.</a:t>
             </a:r>
           </a:p>
-          <a:p/>
+          <a:p>
+            <a:endParaRPr/>
+          </a:p>
           <a:p>
             <a:r>
               <a:t>The pipeline in full: Triage, Enhancer, Architect, Planner, Verifier, then a</a:t>
@@ -568,7 +364,9 @@
               <a:t>mode is read-only, Team mode runs the whole pipeline.</a:t>
             </a:r>
           </a:p>
-          <a:p/>
+          <a:p>
+            <a:endParaRPr/>
+          </a:p>
           <a:p>
             <a:r>
               <a:t>Rules, skills and workflows are markdown the agent writes and reuses; a nightly</a:t>
@@ -584,7 +382,9 @@
               <a:t>the members' scopes rather than silently narrowing one.</a:t>
             </a:r>
           </a:p>
-          <a:p/>
+          <a:p>
+            <a:endParaRPr/>
+          </a:p>
           <a:p>
             <a:r>
               <a:t>Integrations: Jira 21 tools, Confluence 14, GitLab 10, plus GitHub, e-mail and</a:t>
@@ -615,7 +415,9 @@
               <a:t>model can screenshot the running app and answer questions about it.</a:t>
             </a:r>
           </a:p>
-          <a:p/>
+          <a:p>
+            <a:endParaRPr/>
+          </a:p>
           <a:p>
             <a:r>
               <a:t>If your estate runs its own certificate authority, one setting —</a:t>
@@ -640,7 +442,7 @@
             <a:spLocks noGrp="1"/>
           </p:cNvSpPr>
           <p:nvPr>
-            <p:ph type="sldNum" idx="5" sz="quarter"/>
+            <p:ph type="sldNum" sz="quarter" idx="5"/>
           </p:nvPr>
         </p:nvSpPr>
         <p:spPr/>
@@ -654,7 +456,7 @@
 </file>
 
 <file path=ppt/notesSlides/notesSlide2.xml><?xml version="1.0" encoding="utf-8"?>
-<p:notes xmlns:a="http://schemas.openxmlformats.org/drawingml/2006/main" xmlns:p="http://schemas.openxmlformats.org/presentationml/2006/main" xmlns:r="http://schemas.openxmlformats.org/officeDocument/2006/relationships">
+<p:notes xmlns:a="http://schemas.openxmlformats.org/drawingml/2006/main" xmlns:r="http://schemas.openxmlformats.org/officeDocument/2006/relationships" xmlns:p="http://schemas.openxmlformats.org/presentationml/2006/main">
   <p:cSld>
     <p:spTree>
       <p:nvGrpSpPr>
@@ -674,7 +476,7 @@
         <p:nvSpPr>
           <p:cNvPr id="2" name="Slide Image Placeholder 1"/>
           <p:cNvSpPr>
-            <a:spLocks noGrp="1"/>
+            <a:spLocks noGrp="1" noRot="1" noChangeAspect="1"/>
           </p:cNvSpPr>
           <p:nvPr>
             <p:ph type="sldImg" idx="2"/>
@@ -689,7 +491,7 @@
             <a:spLocks noGrp="1"/>
           </p:cNvSpPr>
           <p:nvPr>
-            <p:ph type="body" idx="3" sz="quarter"/>
+            <p:ph type="body" sz="quarter" idx="3"/>
           </p:nvPr>
         </p:nvSpPr>
         <p:spPr/>
@@ -721,7 +523,9 @@
               <a:t>entry is DENIED rather than escalated to a human.</a:t>
             </a:r>
           </a:p>
-          <a:p/>
+          <a:p>
+            <a:endParaRPr/>
+          </a:p>
           <a:p>
             <a:r>
               <a:t>Refused outbound: scp, rsync, sftp, ssh host 'cmd', curl -d/-F/-T, aws s3 cp,</a:t>
@@ -767,7 +571,9 @@
               <a:t>that blocks ordinary work is a control that gets switched off.</a:t>
             </a:r>
           </a:p>
-          <a:p/>
+          <a:p>
+            <a:endParaRPr/>
+          </a:p>
           <a:p>
             <a:r>
               <a:t>Access: a token is required on every API route but health; a non-loopback bind</a:t>
@@ -798,7 +604,9 @@
               <a:t>shared token, so no per-user identity or SSO yet.</a:t>
             </a:r>
           </a:p>
-          <a:p/>
+          <a:p>
+            <a:endParaRPr/>
+          </a:p>
           <a:p>
             <a:r>
               <a:t>Untrusted input: a ticket description, a fetched page or a review comment</a:t>
@@ -824,7 +632,9 @@
               <a:t>mode cannot write, and unattended runs refuse writes outright.</a:t>
             </a:r>
           </a:p>
-          <a:p/>
+          <a:p>
+            <a:endParaRPr/>
+          </a:p>
           <a:p>
             <a:r>
               <a:t>Certificates and secrets: no CERT_NONE anywhere. One AIFORGE_CA_BUNDLE covers</a:t>
@@ -850,7 +660,9 @@
               <a:t>on boot.</a:t>
             </a:r>
           </a:p>
-          <a:p/>
+          <a:p>
+            <a:endParaRPr/>
+          </a:p>
           <a:p>
             <a:r>
               <a:t>Cost: a rate ceiling in requests per minute per role keeps background work from</a:t>
@@ -876,7 +688,9 @@
               <a:t>endpoint the marginal cost of a run is electricity.</a:t>
             </a:r>
           </a:p>
-          <a:p/>
+          <a:p>
+            <a:endParaRPr/>
+          </a:p>
           <a:p>
             <a:r>
               <a:t>Every control above began as a bypass that WORKED in testing, and each is</a:t>
@@ -896,7 +710,7 @@
             <a:spLocks noGrp="1"/>
           </p:cNvSpPr>
           <p:nvPr>
-            <p:ph type="sldNum" idx="5" sz="quarter"/>
+            <p:ph type="sldNum" sz="quarter" idx="5"/>
           </p:nvPr>
         </p:nvSpPr>
         <p:spPr/>
@@ -910,7 +724,7 @@
 </file>
 
 <file path=ppt/notesSlides/notesSlide3.xml><?xml version="1.0" encoding="utf-8"?>
-<p:notes xmlns:a="http://schemas.openxmlformats.org/drawingml/2006/main" xmlns:p="http://schemas.openxmlformats.org/presentationml/2006/main" xmlns:r="http://schemas.openxmlformats.org/officeDocument/2006/relationships">
+<p:notes xmlns:a="http://schemas.openxmlformats.org/drawingml/2006/main" xmlns:r="http://schemas.openxmlformats.org/officeDocument/2006/relationships" xmlns:p="http://schemas.openxmlformats.org/presentationml/2006/main">
   <p:cSld>
     <p:spTree>
       <p:nvGrpSpPr>
@@ -930,7 +744,7 @@
         <p:nvSpPr>
           <p:cNvPr id="2" name="Slide Image Placeholder 1"/>
           <p:cNvSpPr>
-            <a:spLocks noGrp="1"/>
+            <a:spLocks noGrp="1" noRot="1" noChangeAspect="1"/>
           </p:cNvSpPr>
           <p:nvPr>
             <p:ph type="sldImg" idx="2"/>
@@ -945,7 +759,7 @@
             <a:spLocks noGrp="1"/>
           </p:cNvSpPr>
           <p:nvPr>
-            <p:ph type="body" idx="3" sz="quarter"/>
+            <p:ph type="body" sz="quarter" idx="3"/>
           </p:nvPr>
         </p:nvSpPr>
         <p:spPr/>
@@ -1007,7 +821,9 @@
               <a:t>WireGuard network, because the sync surface is open by default on purpose.</a:t>
             </a:r>
           </a:p>
-          <a:p/>
+          <a:p>
+            <a:endParaRPr/>
+          </a:p>
           <a:p>
             <a:r>
               <a:t>The quality numbers are the PLATFORM's, read off the scanner API rather than</a:t>
@@ -1048,7 +864,9 @@
               <a:t>earlier passes had triaged them as accepted decisions.</a:t>
             </a:r>
           </a:p>
-          <a:p/>
+          <a:p>
+            <a:endParaRPr/>
+          </a:p>
           <a:p>
             <a:r>
               <a:t>What that number does NOT say: it is the platform's quality, not the agent's</a:t>
@@ -1089,7 +907,9 @@
               <a:t>BOX rather than a person, with no retention or tamper-evidence.</a:t>
             </a:r>
           </a:p>
-          <a:p/>
+          <a:p>
+            <a:endParaRPr/>
+          </a:p>
           <a:p>
             <a:r>
               <a:t>The full ask list: fund the scoring harness; name an owner and a support rota;</a:t>
@@ -1119,7 +939,7 @@
             <a:spLocks noGrp="1"/>
           </p:cNvSpPr>
           <p:nvPr>
-            <p:ph type="sldNum" idx="5" sz="quarter"/>
+            <p:ph type="sldNum" sz="quarter" idx="5"/>
           </p:nvPr>
         </p:nvSpPr>
         <p:spPr/>
@@ -1170,10 +990,9 @@
           <a:lstStyle/>
           <a:p>
             <a:r>
-              <a:rPr lang="en-US" smtClean="0"/>
+              <a:rPr lang="en-US"/>
               <a:t>Click to edit Master title style</a:t>
             </a:r>
-            <a:endParaRPr lang="en-US"/>
           </a:p>
         </p:txBody>
       </p:sp>
@@ -1289,10 +1108,9 @@
           </a:lstStyle>
           <a:p>
             <a:r>
-              <a:rPr lang="en-US" smtClean="0"/>
+              <a:rPr lang="en-US"/>
               <a:t>Click to edit Master subtitle style</a:t>
             </a:r>
-            <a:endParaRPr lang="en-US"/>
           </a:p>
         </p:txBody>
       </p:sp>
@@ -1313,7 +1131,7 @@
           <a:p>
             <a:fld id="{5BCAD085-E8A6-8845-BD4E-CB4CCA059FC4}" type="datetimeFigureOut">
               <a:rPr lang="en-US" smtClean="0"/>
-              <a:t>1/27/13</a:t>
+              <a:t>9/7/2026</a:t>
             </a:fld>
             <a:endParaRPr lang="en-US"/>
           </a:p>
@@ -1407,10 +1225,9 @@
           <a:lstStyle/>
           <a:p>
             <a:r>
-              <a:rPr lang="en-US" smtClean="0"/>
+              <a:rPr lang="en-US"/>
               <a:t>Click to edit Master title style</a:t>
             </a:r>
-            <a:endParaRPr lang="en-US"/>
           </a:p>
         </p:txBody>
       </p:sp>
@@ -1431,38 +1248,37 @@
           <a:p>
             <a:pPr lvl="0"/>
             <a:r>
-              <a:rPr lang="en-US" smtClean="0"/>
+              <a:rPr lang="en-US"/>
               <a:t>Click to edit Master text styles</a:t>
             </a:r>
           </a:p>
           <a:p>
             <a:pPr lvl="1"/>
             <a:r>
-              <a:rPr lang="en-US" smtClean="0"/>
+              <a:rPr lang="en-US"/>
               <a:t>Second level</a:t>
             </a:r>
           </a:p>
           <a:p>
             <a:pPr lvl="2"/>
             <a:r>
-              <a:rPr lang="en-US" smtClean="0"/>
+              <a:rPr lang="en-US"/>
               <a:t>Third level</a:t>
             </a:r>
           </a:p>
           <a:p>
             <a:pPr lvl="3"/>
             <a:r>
-              <a:rPr lang="en-US" smtClean="0"/>
+              <a:rPr lang="en-US"/>
               <a:t>Fourth level</a:t>
             </a:r>
           </a:p>
           <a:p>
             <a:pPr lvl="4"/>
             <a:r>
-              <a:rPr lang="en-US" smtClean="0"/>
+              <a:rPr lang="en-US"/>
               <a:t>Fifth level</a:t>
             </a:r>
-            <a:endParaRPr lang="en-US"/>
           </a:p>
         </p:txBody>
       </p:sp>
@@ -1483,7 +1299,7 @@
           <a:p>
             <a:fld id="{5BCAD085-E8A6-8845-BD4E-CB4CCA059FC4}" type="datetimeFigureOut">
               <a:rPr lang="en-US" smtClean="0"/>
-              <a:t>1/27/13</a:t>
+              <a:t>9/7/2026</a:t>
             </a:fld>
             <a:endParaRPr lang="en-US"/>
           </a:p>
@@ -1582,10 +1398,9 @@
           <a:lstStyle/>
           <a:p>
             <a:r>
-              <a:rPr lang="en-US" smtClean="0"/>
+              <a:rPr lang="en-US"/>
               <a:t>Click to edit Master title style</a:t>
             </a:r>
-            <a:endParaRPr lang="en-US"/>
           </a:p>
         </p:txBody>
       </p:sp>
@@ -1611,38 +1426,37 @@
           <a:p>
             <a:pPr lvl="0"/>
             <a:r>
-              <a:rPr lang="en-US" smtClean="0"/>
+              <a:rPr lang="en-US"/>
               <a:t>Click to edit Master text styles</a:t>
             </a:r>
           </a:p>
           <a:p>
             <a:pPr lvl="1"/>
             <a:r>
-              <a:rPr lang="en-US" smtClean="0"/>
+              <a:rPr lang="en-US"/>
               <a:t>Second level</a:t>
             </a:r>
           </a:p>
           <a:p>
             <a:pPr lvl="2"/>
             <a:r>
-              <a:rPr lang="en-US" smtClean="0"/>
+              <a:rPr lang="en-US"/>
               <a:t>Third level</a:t>
             </a:r>
           </a:p>
           <a:p>
             <a:pPr lvl="3"/>
             <a:r>
-              <a:rPr lang="en-US" smtClean="0"/>
+              <a:rPr lang="en-US"/>
               <a:t>Fourth level</a:t>
             </a:r>
           </a:p>
           <a:p>
             <a:pPr lvl="4"/>
             <a:r>
-              <a:rPr lang="en-US" smtClean="0"/>
+              <a:rPr lang="en-US"/>
               <a:t>Fifth level</a:t>
             </a:r>
-            <a:endParaRPr lang="en-US"/>
           </a:p>
         </p:txBody>
       </p:sp>
@@ -1663,7 +1477,7 @@
           <a:p>
             <a:fld id="{5BCAD085-E8A6-8845-BD4E-CB4CCA059FC4}" type="datetimeFigureOut">
               <a:rPr lang="en-US" smtClean="0"/>
-              <a:t>1/27/13</a:t>
+              <a:t>9/7/2026</a:t>
             </a:fld>
             <a:endParaRPr lang="en-US"/>
           </a:p>
@@ -1757,10 +1571,9 @@
           <a:lstStyle/>
           <a:p>
             <a:r>
-              <a:rPr lang="en-US" smtClean="0"/>
+              <a:rPr lang="en-US"/>
               <a:t>Click to edit Master title style</a:t>
             </a:r>
-            <a:endParaRPr lang="en-US"/>
           </a:p>
         </p:txBody>
       </p:sp>
@@ -1781,38 +1594,37 @@
           <a:p>
             <a:pPr lvl="0"/>
             <a:r>
-              <a:rPr lang="en-US" smtClean="0"/>
+              <a:rPr lang="en-US"/>
               <a:t>Click to edit Master text styles</a:t>
             </a:r>
           </a:p>
           <a:p>
             <a:pPr lvl="1"/>
             <a:r>
-              <a:rPr lang="en-US" smtClean="0"/>
+              <a:rPr lang="en-US"/>
               <a:t>Second level</a:t>
             </a:r>
           </a:p>
           <a:p>
             <a:pPr lvl="2"/>
             <a:r>
-              <a:rPr lang="en-US" smtClean="0"/>
+              <a:rPr lang="en-US"/>
               <a:t>Third level</a:t>
             </a:r>
           </a:p>
           <a:p>
             <a:pPr lvl="3"/>
             <a:r>
-              <a:rPr lang="en-US" smtClean="0"/>
+              <a:rPr lang="en-US"/>
               <a:t>Fourth level</a:t>
             </a:r>
           </a:p>
           <a:p>
             <a:pPr lvl="4"/>
             <a:r>
-              <a:rPr lang="en-US" smtClean="0"/>
+              <a:rPr lang="en-US"/>
               <a:t>Fifth level</a:t>
             </a:r>
-            <a:endParaRPr lang="en-US"/>
           </a:p>
         </p:txBody>
       </p:sp>
@@ -1833,7 +1645,7 @@
           <a:p>
             <a:fld id="{5BCAD085-E8A6-8845-BD4E-CB4CCA059FC4}" type="datetimeFigureOut">
               <a:rPr lang="en-US" smtClean="0"/>
-              <a:t>1/27/13</a:t>
+              <a:t>9/7/2026</a:t>
             </a:fld>
             <a:endParaRPr lang="en-US"/>
           </a:p>
@@ -1936,10 +1748,9 @@
           </a:lstStyle>
           <a:p>
             <a:r>
-              <a:rPr lang="en-US" smtClean="0"/>
+              <a:rPr lang="en-US"/>
               <a:t>Click to edit Master title style</a:t>
             </a:r>
-            <a:endParaRPr lang="en-US"/>
           </a:p>
         </p:txBody>
       </p:sp>
@@ -2056,7 +1867,7 @@
           <a:p>
             <a:pPr lvl="0"/>
             <a:r>
-              <a:rPr lang="en-US" smtClean="0"/>
+              <a:rPr lang="en-US"/>
               <a:t>Click to edit Master text styles</a:t>
             </a:r>
           </a:p>
@@ -2079,7 +1890,7 @@
           <a:p>
             <a:fld id="{5BCAD085-E8A6-8845-BD4E-CB4CCA059FC4}" type="datetimeFigureOut">
               <a:rPr lang="en-US" smtClean="0"/>
-              <a:t>1/27/13</a:t>
+              <a:t>9/7/2026</a:t>
             </a:fld>
             <a:endParaRPr lang="en-US"/>
           </a:p>
@@ -2173,10 +1984,9 @@
           <a:lstStyle/>
           <a:p>
             <a:r>
-              <a:rPr lang="en-US" smtClean="0"/>
+              <a:rPr lang="en-US"/>
               <a:t>Click to edit Master title style</a:t>
             </a:r>
-            <a:endParaRPr lang="en-US"/>
           </a:p>
         </p:txBody>
       </p:sp>
@@ -2230,38 +2040,37 @@
           <a:p>
             <a:pPr lvl="0"/>
             <a:r>
-              <a:rPr lang="en-US" smtClean="0"/>
+              <a:rPr lang="en-US"/>
               <a:t>Click to edit Master text styles</a:t>
             </a:r>
           </a:p>
           <a:p>
             <a:pPr lvl="1"/>
             <a:r>
-              <a:rPr lang="en-US" smtClean="0"/>
+              <a:rPr lang="en-US"/>
               <a:t>Second level</a:t>
             </a:r>
           </a:p>
           <a:p>
             <a:pPr lvl="2"/>
             <a:r>
-              <a:rPr lang="en-US" smtClean="0"/>
+              <a:rPr lang="en-US"/>
               <a:t>Third level</a:t>
             </a:r>
           </a:p>
           <a:p>
             <a:pPr lvl="3"/>
             <a:r>
-              <a:rPr lang="en-US" smtClean="0"/>
+              <a:rPr lang="en-US"/>
               <a:t>Fourth level</a:t>
             </a:r>
           </a:p>
           <a:p>
             <a:pPr lvl="4"/>
             <a:r>
-              <a:rPr lang="en-US" smtClean="0"/>
+              <a:rPr lang="en-US"/>
               <a:t>Fifth level</a:t>
             </a:r>
-            <a:endParaRPr lang="en-US"/>
           </a:p>
         </p:txBody>
       </p:sp>
@@ -2315,38 +2124,37 @@
           <a:p>
             <a:pPr lvl="0"/>
             <a:r>
-              <a:rPr lang="en-US" smtClean="0"/>
+              <a:rPr lang="en-US"/>
               <a:t>Click to edit Master text styles</a:t>
             </a:r>
           </a:p>
           <a:p>
             <a:pPr lvl="1"/>
             <a:r>
-              <a:rPr lang="en-US" smtClean="0"/>
+              <a:rPr lang="en-US"/>
               <a:t>Second level</a:t>
             </a:r>
           </a:p>
           <a:p>
             <a:pPr lvl="2"/>
             <a:r>
-              <a:rPr lang="en-US" smtClean="0"/>
+              <a:rPr lang="en-US"/>
               <a:t>Third level</a:t>
             </a:r>
           </a:p>
           <a:p>
             <a:pPr lvl="3"/>
             <a:r>
-              <a:rPr lang="en-US" smtClean="0"/>
+              <a:rPr lang="en-US"/>
               <a:t>Fourth level</a:t>
             </a:r>
           </a:p>
           <a:p>
             <a:pPr lvl="4"/>
             <a:r>
-              <a:rPr lang="en-US" smtClean="0"/>
+              <a:rPr lang="en-US"/>
               <a:t>Fifth level</a:t>
             </a:r>
-            <a:endParaRPr lang="en-US"/>
           </a:p>
         </p:txBody>
       </p:sp>
@@ -2367,7 +2175,7 @@
           <a:p>
             <a:fld id="{5BCAD085-E8A6-8845-BD4E-CB4CCA059FC4}" type="datetimeFigureOut">
               <a:rPr lang="en-US" smtClean="0"/>
-              <a:t>1/27/13</a:t>
+              <a:t>9/7/2026</a:t>
             </a:fld>
             <a:endParaRPr lang="en-US"/>
           </a:p>
@@ -2465,10 +2273,9 @@
           </a:lstStyle>
           <a:p>
             <a:r>
-              <a:rPr lang="en-US" smtClean="0"/>
+              <a:rPr lang="en-US"/>
               <a:t>Click to edit Master title style</a:t>
             </a:r>
-            <a:endParaRPr lang="en-US"/>
           </a:p>
         </p:txBody>
       </p:sp>
@@ -2531,7 +2338,7 @@
           <a:p>
             <a:pPr lvl="0"/>
             <a:r>
-              <a:rPr lang="en-US" smtClean="0"/>
+              <a:rPr lang="en-US"/>
               <a:t>Click to edit Master text styles</a:t>
             </a:r>
           </a:p>
@@ -2587,38 +2394,37 @@
           <a:p>
             <a:pPr lvl="0"/>
             <a:r>
-              <a:rPr lang="en-US" smtClean="0"/>
+              <a:rPr lang="en-US"/>
               <a:t>Click to edit Master text styles</a:t>
             </a:r>
           </a:p>
           <a:p>
             <a:pPr lvl="1"/>
             <a:r>
-              <a:rPr lang="en-US" smtClean="0"/>
+              <a:rPr lang="en-US"/>
               <a:t>Second level</a:t>
             </a:r>
           </a:p>
           <a:p>
             <a:pPr lvl="2"/>
             <a:r>
-              <a:rPr lang="en-US" smtClean="0"/>
+              <a:rPr lang="en-US"/>
               <a:t>Third level</a:t>
             </a:r>
           </a:p>
           <a:p>
             <a:pPr lvl="3"/>
             <a:r>
-              <a:rPr lang="en-US" smtClean="0"/>
+              <a:rPr lang="en-US"/>
               <a:t>Fourth level</a:t>
             </a:r>
           </a:p>
           <a:p>
             <a:pPr lvl="4"/>
             <a:r>
-              <a:rPr lang="en-US" smtClean="0"/>
+              <a:rPr lang="en-US"/>
               <a:t>Fifth level</a:t>
             </a:r>
-            <a:endParaRPr lang="en-US"/>
           </a:p>
         </p:txBody>
       </p:sp>
@@ -2681,7 +2487,7 @@
           <a:p>
             <a:pPr lvl="0"/>
             <a:r>
-              <a:rPr lang="en-US" smtClean="0"/>
+              <a:rPr lang="en-US"/>
               <a:t>Click to edit Master text styles</a:t>
             </a:r>
           </a:p>
@@ -2737,38 +2543,37 @@
           <a:p>
             <a:pPr lvl="0"/>
             <a:r>
-              <a:rPr lang="en-US" smtClean="0"/>
+              <a:rPr lang="en-US"/>
               <a:t>Click to edit Master text styles</a:t>
             </a:r>
           </a:p>
           <a:p>
             <a:pPr lvl="1"/>
             <a:r>
-              <a:rPr lang="en-US" smtClean="0"/>
+              <a:rPr lang="en-US"/>
               <a:t>Second level</a:t>
             </a:r>
           </a:p>
           <a:p>
             <a:pPr lvl="2"/>
             <a:r>
-              <a:rPr lang="en-US" smtClean="0"/>
+              <a:rPr lang="en-US"/>
               <a:t>Third level</a:t>
             </a:r>
           </a:p>
           <a:p>
             <a:pPr lvl="3"/>
             <a:r>
-              <a:rPr lang="en-US" smtClean="0"/>
+              <a:rPr lang="en-US"/>
               <a:t>Fourth level</a:t>
             </a:r>
           </a:p>
           <a:p>
             <a:pPr lvl="4"/>
             <a:r>
-              <a:rPr lang="en-US" smtClean="0"/>
+              <a:rPr lang="en-US"/>
               <a:t>Fifth level</a:t>
             </a:r>
-            <a:endParaRPr lang="en-US"/>
           </a:p>
         </p:txBody>
       </p:sp>
@@ -2789,7 +2594,7 @@
           <a:p>
             <a:fld id="{5BCAD085-E8A6-8845-BD4E-CB4CCA059FC4}" type="datetimeFigureOut">
               <a:rPr lang="en-US" smtClean="0"/>
-              <a:t>1/27/13</a:t>
+              <a:t>9/7/2026</a:t>
             </a:fld>
             <a:endParaRPr lang="en-US"/>
           </a:p>
@@ -2883,10 +2688,9 @@
           <a:lstStyle/>
           <a:p>
             <a:r>
-              <a:rPr lang="en-US" smtClean="0"/>
+              <a:rPr lang="en-US"/>
               <a:t>Click to edit Master title style</a:t>
             </a:r>
-            <a:endParaRPr lang="en-US"/>
           </a:p>
         </p:txBody>
       </p:sp>
@@ -2907,7 +2711,7 @@
           <a:p>
             <a:fld id="{5BCAD085-E8A6-8845-BD4E-CB4CCA059FC4}" type="datetimeFigureOut">
               <a:rPr lang="en-US" smtClean="0"/>
-              <a:t>1/27/13</a:t>
+              <a:t>9/7/2026</a:t>
             </a:fld>
             <a:endParaRPr lang="en-US"/>
           </a:p>
@@ -3002,7 +2806,7 @@
           <a:p>
             <a:fld id="{5BCAD085-E8A6-8845-BD4E-CB4CCA059FC4}" type="datetimeFigureOut">
               <a:rPr lang="en-US" smtClean="0"/>
-              <a:t>1/27/13</a:t>
+              <a:t>9/7/2026</a:t>
             </a:fld>
             <a:endParaRPr lang="en-US"/>
           </a:p>
@@ -3105,10 +2909,9 @@
           </a:lstStyle>
           <a:p>
             <a:r>
-              <a:rPr lang="en-US" smtClean="0"/>
+              <a:rPr lang="en-US"/>
               <a:t>Click to edit Master title style</a:t>
             </a:r>
-            <a:endParaRPr lang="en-US"/>
           </a:p>
         </p:txBody>
       </p:sp>
@@ -3162,38 +2965,37 @@
           <a:p>
             <a:pPr lvl="0"/>
             <a:r>
-              <a:rPr lang="en-US" smtClean="0"/>
+              <a:rPr lang="en-US"/>
               <a:t>Click to edit Master text styles</a:t>
             </a:r>
           </a:p>
           <a:p>
             <a:pPr lvl="1"/>
             <a:r>
-              <a:rPr lang="en-US" smtClean="0"/>
+              <a:rPr lang="en-US"/>
               <a:t>Second level</a:t>
             </a:r>
           </a:p>
           <a:p>
             <a:pPr lvl="2"/>
             <a:r>
-              <a:rPr lang="en-US" smtClean="0"/>
+              <a:rPr lang="en-US"/>
               <a:t>Third level</a:t>
             </a:r>
           </a:p>
           <a:p>
             <a:pPr lvl="3"/>
             <a:r>
-              <a:rPr lang="en-US" smtClean="0"/>
+              <a:rPr lang="en-US"/>
               <a:t>Fourth level</a:t>
             </a:r>
           </a:p>
           <a:p>
             <a:pPr lvl="4"/>
             <a:r>
-              <a:rPr lang="en-US" smtClean="0"/>
+              <a:rPr lang="en-US"/>
               <a:t>Fifth level</a:t>
             </a:r>
-            <a:endParaRPr lang="en-US"/>
           </a:p>
         </p:txBody>
       </p:sp>
@@ -3256,7 +3058,7 @@
           <a:p>
             <a:pPr lvl="0"/>
             <a:r>
-              <a:rPr lang="en-US" smtClean="0"/>
+              <a:rPr lang="en-US"/>
               <a:t>Click to edit Master text styles</a:t>
             </a:r>
           </a:p>
@@ -3279,7 +3081,7 @@
           <a:p>
             <a:fld id="{5BCAD085-E8A6-8845-BD4E-CB4CCA059FC4}" type="datetimeFigureOut">
               <a:rPr lang="en-US" smtClean="0"/>
-              <a:t>1/27/13</a:t>
+              <a:t>9/7/2026</a:t>
             </a:fld>
             <a:endParaRPr lang="en-US"/>
           </a:p>
@@ -3382,10 +3184,9 @@
           </a:lstStyle>
           <a:p>
             <a:r>
-              <a:rPr lang="en-US" smtClean="0"/>
+              <a:rPr lang="en-US"/>
               <a:t>Click to edit Master title style</a:t>
             </a:r>
-            <a:endParaRPr lang="en-US"/>
           </a:p>
         </p:txBody>
       </p:sp>
@@ -3509,7 +3310,7 @@
           <a:p>
             <a:pPr lvl="0"/>
             <a:r>
-              <a:rPr lang="en-US" smtClean="0"/>
+              <a:rPr lang="en-US"/>
               <a:t>Click to edit Master text styles</a:t>
             </a:r>
           </a:p>
@@ -3532,7 +3333,7 @@
           <a:p>
             <a:fld id="{5BCAD085-E8A6-8845-BD4E-CB4CCA059FC4}" type="datetimeFigureOut">
               <a:rPr lang="en-US" smtClean="0"/>
-              <a:t>1/27/13</a:t>
+              <a:t>9/7/2026</a:t>
             </a:fld>
             <a:endParaRPr lang="en-US"/>
           </a:p>
@@ -3641,10 +3442,9 @@
           <a:lstStyle/>
           <a:p>
             <a:r>
-              <a:rPr lang="en-US" smtClean="0"/>
+              <a:rPr lang="en-US"/>
               <a:t>Click to edit Master title style</a:t>
             </a:r>
-            <a:endParaRPr lang="en-US"/>
           </a:p>
         </p:txBody>
       </p:sp>
@@ -3675,38 +3475,37 @@
           <a:p>
             <a:pPr lvl="0"/>
             <a:r>
-              <a:rPr lang="en-US" smtClean="0"/>
+              <a:rPr lang="en-US"/>
               <a:t>Click to edit Master text styles</a:t>
             </a:r>
           </a:p>
           <a:p>
             <a:pPr lvl="1"/>
             <a:r>
-              <a:rPr lang="en-US" smtClean="0"/>
+              <a:rPr lang="en-US"/>
               <a:t>Second level</a:t>
             </a:r>
           </a:p>
           <a:p>
             <a:pPr lvl="2"/>
             <a:r>
-              <a:rPr lang="en-US" smtClean="0"/>
+              <a:rPr lang="en-US"/>
               <a:t>Third level</a:t>
             </a:r>
           </a:p>
           <a:p>
             <a:pPr lvl="3"/>
             <a:r>
-              <a:rPr lang="en-US" smtClean="0"/>
+              <a:rPr lang="en-US"/>
               <a:t>Fourth level</a:t>
             </a:r>
           </a:p>
           <a:p>
             <a:pPr lvl="4"/>
             <a:r>
-              <a:rPr lang="en-US" smtClean="0"/>
+              <a:rPr lang="en-US"/>
               <a:t>Fifth level</a:t>
             </a:r>
-            <a:endParaRPr lang="en-US"/>
           </a:p>
         </p:txBody>
       </p:sp>
@@ -3745,7 +3544,7 @@
           <a:p>
             <a:fld id="{5BCAD085-E8A6-8845-BD4E-CB4CCA059FC4}" type="datetimeFigureOut">
               <a:rPr lang="en-US" smtClean="0"/>
-              <a:t>1/27/13</a:t>
+              <a:t>9/7/2026</a:t>
             </a:fld>
             <a:endParaRPr lang="en-US"/>
           </a:p>
@@ -4104,7 +3903,7 @@
 </file>
 
 <file path=ppt/slides/slide1.xml><?xml version="1.0" encoding="utf-8"?>
-<p:sld xmlns:a="http://schemas.openxmlformats.org/drawingml/2006/main" xmlns:p="http://schemas.openxmlformats.org/presentationml/2006/main" xmlns:r="http://schemas.openxmlformats.org/officeDocument/2006/relationships">
+<p:sld xmlns:a="http://schemas.openxmlformats.org/drawingml/2006/main" xmlns:r="http://schemas.openxmlformats.org/officeDocument/2006/relationships" xmlns:p="http://schemas.openxmlformats.org/presentationml/2006/main">
   <p:cSld>
     <p:spTree>
       <p:nvGrpSpPr>
@@ -4112,7 +3911,14 @@
         <p:cNvGrpSpPr/>
         <p:nvPr/>
       </p:nvGrpSpPr>
-      <p:grpSpPr/>
+      <p:grpSpPr>
+        <a:xfrm>
+          <a:off x="0" y="0"/>
+          <a:ext cx="0" cy="0"/>
+          <a:chOff x="0" y="0"/>
+          <a:chExt cx="0" cy="0"/>
+        </a:xfrm>
+      </p:grpSpPr>
       <p:sp>
         <p:nvSpPr>
           <p:cNvPr id="2" name="TextBox 1"/>
@@ -4130,7 +3936,7 @@
           <a:noFill/>
         </p:spPr>
         <p:txBody>
-          <a:bodyPr wrap="square" anchor="t" lIns="0" rIns="0" tIns="0" bIns="0">
+          <a:bodyPr wrap="square" lIns="0" tIns="0" rIns="0" bIns="0" anchor="t">
             <a:spAutoFit/>
           </a:bodyPr>
           <a:lstStyle/>
@@ -4169,7 +3975,7 @@
           <a:noFill/>
         </p:spPr>
         <p:txBody>
-          <a:bodyPr wrap="square" anchor="t" lIns="0" rIns="0" tIns="0" bIns="0">
+          <a:bodyPr wrap="square" lIns="0" tIns="0" rIns="0" bIns="0" anchor="t">
             <a:spAutoFit/>
           </a:bodyPr>
           <a:lstStyle/>
@@ -4232,19 +4038,20 @@
           <a:lstStyle/>
           <a:p>
             <a:pPr algn="ctr"/>
-          </a:p>
-        </p:txBody>
-      </p:sp>
-      <p:sp>
-        <p:nvSpPr>
-          <p:cNvPr id="5" name="TextBox 4"/>
+            <a:endParaRPr/>
+          </a:p>
+        </p:txBody>
+      </p:sp>
+      <p:sp>
+        <p:nvSpPr>
+          <p:cNvPr id="6" name="TextBox 5"/>
           <p:cNvSpPr txBox="1"/>
           <p:nvPr/>
         </p:nvSpPr>
         <p:spPr>
           <a:xfrm>
-            <a:off x="548640" y="6327648"/>
-            <a:ext cx="9692640" cy="320040"/>
+            <a:off x="11018520" y="6327648"/>
+            <a:ext cx="640080" cy="274320"/>
           </a:xfrm>
           <a:prstGeom prst="rect">
             <a:avLst/>
@@ -4252,46 +4059,7 @@
           <a:noFill/>
         </p:spPr>
         <p:txBody>
-          <a:bodyPr wrap="square" anchor="t" lIns="0" rIns="0" tIns="0" bIns="0">
-            <a:spAutoFit/>
-          </a:bodyPr>
-          <a:lstStyle/>
-          <a:p>
-            <a:pPr algn="l">
-              <a:spcAft>
-                <a:spcPts val="0"/>
-              </a:spcAft>
-            </a:pPr>
-            <a:r>
-              <a:rPr sz="950" b="0">
-                <a:solidFill>
-                  <a:srgbClr val="6B6B6B"/>
-                </a:solidFill>
-                <a:latin typeface="Segoe UI"/>
-              </a:rPr>
-              <a:t>Measured on main @ 7d9e60ae, 2026-09-06. One program, one port, one folder. Nothing else to install and nothing to phone home to.</a:t>
-            </a:r>
-          </a:p>
-        </p:txBody>
-      </p:sp>
-      <p:sp>
-        <p:nvSpPr>
-          <p:cNvPr id="6" name="TextBox 5"/>
-          <p:cNvSpPr txBox="1"/>
-          <p:nvPr/>
-        </p:nvSpPr>
-        <p:spPr>
-          <a:xfrm>
-            <a:off x="11018520" y="6327648"/>
-            <a:ext cx="640080" cy="274320"/>
-          </a:xfrm>
-          <a:prstGeom prst="rect">
-            <a:avLst/>
-          </a:prstGeom>
-          <a:noFill/>
-        </p:spPr>
-        <p:txBody>
-          <a:bodyPr wrap="square" anchor="t" lIns="0" rIns="0" tIns="0" bIns="0">
+          <a:bodyPr wrap="square" lIns="0" tIns="0" rIns="0" bIns="0" anchor="t">
             <a:spAutoFit/>
           </a:bodyPr>
           <a:lstStyle/>
@@ -4330,7 +4098,7 @@
           <a:noFill/>
         </p:spPr>
         <p:txBody>
-          <a:bodyPr wrap="square" anchor="t" lIns="0" rIns="0" tIns="0" bIns="0">
+          <a:bodyPr wrap="square" lIns="0" tIns="0" rIns="0" bIns="0" anchor="t">
             <a:spAutoFit/>
           </a:bodyPr>
           <a:lstStyle/>
@@ -4369,7 +4137,7 @@
           <a:noFill/>
         </p:spPr>
         <p:txBody>
-          <a:bodyPr wrap="square" anchor="t" lIns="0" rIns="0" tIns="0" bIns="0">
+          <a:bodyPr wrap="square" lIns="0" tIns="0" rIns="0" bIns="0" anchor="t">
             <a:spAutoFit/>
           </a:bodyPr>
           <a:lstStyle/>
@@ -4408,7 +4176,7 @@
           <a:noFill/>
         </p:spPr>
         <p:txBody>
-          <a:bodyPr wrap="square" anchor="t" lIns="0" rIns="0" tIns="0" bIns="0">
+          <a:bodyPr wrap="square" lIns="0" tIns="0" rIns="0" bIns="0" anchor="t">
             <a:spAutoFit/>
           </a:bodyPr>
           <a:lstStyle/>
@@ -4439,7 +4207,7 @@
         <p:spPr>
           <a:xfrm>
             <a:off x="2484120" y="1645920"/>
-            <a:ext cx="1697736" cy="384048"/>
+            <a:ext cx="1697736" cy="161583"/>
           </a:xfrm>
           <a:prstGeom prst="rect">
             <a:avLst/>
@@ -4447,7 +4215,7 @@
           <a:noFill/>
         </p:spPr>
         <p:txBody>
-          <a:bodyPr wrap="square" anchor="t" lIns="0" rIns="0" tIns="0" bIns="0">
+          <a:bodyPr wrap="square" lIns="0" tIns="0" rIns="0" bIns="0" anchor="t">
             <a:spAutoFit/>
           </a:bodyPr>
           <a:lstStyle/>
@@ -4458,13 +4226,22 @@
               </a:spcAft>
             </a:pPr>
             <a:r>
-              <a:rPr sz="1050" b="0">
+              <a:rPr lang="en-US" sz="1050" b="0" dirty="0">
                 <a:solidFill>
                   <a:srgbClr val="6B6B6B"/>
                 </a:solidFill>
                 <a:latin typeface="Segoe UI"/>
               </a:rPr>
-              <a:t>specialists it runs</a:t>
+              <a:t>Agents</a:t>
+            </a:r>
+            <a:r>
+              <a:rPr sz="1050" b="0" dirty="0">
+                <a:solidFill>
+                  <a:srgbClr val="6B6B6B"/>
+                </a:solidFill>
+                <a:latin typeface="Segoe UI"/>
+              </a:rPr>
+              <a:t> it runs</a:t>
             </a:r>
           </a:p>
         </p:txBody>
@@ -4510,6 +4287,7 @@
           <a:lstStyle/>
           <a:p>
             <a:pPr algn="ctr"/>
+            <a:endParaRPr/>
           </a:p>
         </p:txBody>
       </p:sp>
@@ -4530,7 +4308,7 @@
           <a:noFill/>
         </p:spPr>
         <p:txBody>
-          <a:bodyPr wrap="square" anchor="t" lIns="0" rIns="0" tIns="0" bIns="0">
+          <a:bodyPr wrap="square" lIns="0" tIns="0" rIns="0" bIns="0" anchor="t">
             <a:spAutoFit/>
           </a:bodyPr>
           <a:lstStyle/>
@@ -4561,7 +4339,7 @@
         <p:spPr>
           <a:xfrm>
             <a:off x="4328160" y="1645920"/>
-            <a:ext cx="1697736" cy="384048"/>
+            <a:ext cx="1697736" cy="161583"/>
           </a:xfrm>
           <a:prstGeom prst="rect">
             <a:avLst/>
@@ -4569,7 +4347,7 @@
           <a:noFill/>
         </p:spPr>
         <p:txBody>
-          <a:bodyPr wrap="square" anchor="t" lIns="0" rIns="0" tIns="0" bIns="0">
+          <a:bodyPr wrap="square" lIns="0" tIns="0" rIns="0" bIns="0" anchor="t">
             <a:spAutoFit/>
           </a:bodyPr>
           <a:lstStyle/>
@@ -4580,14 +4358,29 @@
               </a:spcAft>
             </a:pPr>
             <a:r>
-              <a:rPr sz="1050" b="0">
+              <a:rPr sz="1050" b="0" dirty="0">
                 <a:solidFill>
                   <a:srgbClr val="6B6B6B"/>
                 </a:solidFill>
                 <a:latin typeface="Segoe UI"/>
               </a:rPr>
-              <a:t>ways to work with it</a:t>
-            </a:r>
+              <a:t>ways </a:t>
+            </a:r>
+            <a:r>
+              <a:rPr lang="en-US" sz="1050" b="0" dirty="0">
+                <a:solidFill>
+                  <a:srgbClr val="6B6B6B"/>
+                </a:solidFill>
+                <a:latin typeface="Segoe UI"/>
+              </a:rPr>
+              <a:t>run</a:t>
+            </a:r>
+            <a:endParaRPr sz="1050" b="0" dirty="0">
+              <a:solidFill>
+                <a:srgbClr val="6B6B6B"/>
+              </a:solidFill>
+              <a:latin typeface="Segoe UI"/>
+            </a:endParaRPr>
           </a:p>
         </p:txBody>
       </p:sp>
@@ -4632,6 +4425,7 @@
           <a:lstStyle/>
           <a:p>
             <a:pPr algn="ctr"/>
+            <a:endParaRPr/>
           </a:p>
         </p:txBody>
       </p:sp>
@@ -4652,7 +4446,7 @@
           <a:noFill/>
         </p:spPr>
         <p:txBody>
-          <a:bodyPr wrap="square" anchor="t" lIns="0" rIns="0" tIns="0" bIns="0">
+          <a:bodyPr wrap="square" lIns="0" tIns="0" rIns="0" bIns="0" anchor="t">
             <a:spAutoFit/>
           </a:bodyPr>
           <a:lstStyle/>
@@ -4691,7 +4485,7 @@
           <a:noFill/>
         </p:spPr>
         <p:txBody>
-          <a:bodyPr wrap="square" anchor="t" lIns="0" rIns="0" tIns="0" bIns="0">
+          <a:bodyPr wrap="square" lIns="0" tIns="0" rIns="0" bIns="0" anchor="t">
             <a:spAutoFit/>
           </a:bodyPr>
           <a:lstStyle/>
@@ -4754,6 +4548,7 @@
           <a:lstStyle/>
           <a:p>
             <a:pPr algn="ctr"/>
+            <a:endParaRPr/>
           </a:p>
         </p:txBody>
       </p:sp>
@@ -4774,7 +4569,7 @@
           <a:noFill/>
         </p:spPr>
         <p:txBody>
-          <a:bodyPr wrap="square" anchor="t" lIns="0" rIns="0" tIns="0" bIns="0">
+          <a:bodyPr wrap="square" lIns="0" tIns="0" rIns="0" bIns="0" anchor="t">
             <a:spAutoFit/>
           </a:bodyPr>
           <a:lstStyle/>
@@ -4813,7 +4608,7 @@
           <a:noFill/>
         </p:spPr>
         <p:txBody>
-          <a:bodyPr wrap="square" anchor="t" lIns="0" rIns="0" tIns="0" bIns="0">
+          <a:bodyPr wrap="square" lIns="0" tIns="0" rIns="0" bIns="0" anchor="t">
             <a:spAutoFit/>
           </a:bodyPr>
           <a:lstStyle/>
@@ -4876,6 +4671,7 @@
           <a:lstStyle/>
           <a:p>
             <a:pPr algn="ctr"/>
+            <a:endParaRPr/>
           </a:p>
         </p:txBody>
       </p:sp>
@@ -4896,7 +4692,7 @@
           <a:noFill/>
         </p:spPr>
         <p:txBody>
-          <a:bodyPr wrap="square" anchor="t" lIns="0" rIns="0" tIns="0" bIns="0">
+          <a:bodyPr wrap="square" lIns="0" tIns="0" rIns="0" bIns="0" anchor="t">
             <a:spAutoFit/>
           </a:bodyPr>
           <a:lstStyle/>
@@ -4935,7 +4731,7 @@
           <a:noFill/>
         </p:spPr>
         <p:txBody>
-          <a:bodyPr wrap="square" anchor="t" lIns="0" rIns="0" tIns="0" bIns="0">
+          <a:bodyPr wrap="square" lIns="0" tIns="0" rIns="0" bIns="0" anchor="t">
             <a:spAutoFit/>
           </a:bodyPr>
           <a:lstStyle/>
@@ -4998,6 +4794,7 @@
           <a:lstStyle/>
           <a:p>
             <a:pPr algn="ctr"/>
+            <a:endParaRPr/>
           </a:p>
         </p:txBody>
       </p:sp>
@@ -5042,7 +4839,7 @@
           </a:fontRef>
         </p:style>
         <p:txBody>
-          <a:bodyPr rtlCol="0" anchor="ctr" wrap="square" lIns="54864" rIns="54864" tIns="27432" bIns="27432"/>
+          <a:bodyPr wrap="square" lIns="54864" tIns="27432" rIns="54864" bIns="27432" rtlCol="0" anchor="ctr"/>
           <a:lstStyle/>
           <a:p>
             <a:pPr algn="ctr"/>
@@ -5147,7 +4944,7 @@
           </a:fontRef>
         </p:style>
         <p:txBody>
-          <a:bodyPr rtlCol="0" anchor="ctr" wrap="square" lIns="54864" rIns="54864" tIns="27432" bIns="27432"/>
+          <a:bodyPr wrap="square" lIns="54864" tIns="27432" rIns="54864" bIns="27432" rtlCol="0" anchor="ctr"/>
           <a:lstStyle/>
           <a:p>
             <a:pPr algn="ctr"/>
@@ -5252,7 +5049,7 @@
           </a:fontRef>
         </p:style>
         <p:txBody>
-          <a:bodyPr rtlCol="0" anchor="ctr" wrap="square" lIns="54864" rIns="54864" tIns="27432" bIns="27432"/>
+          <a:bodyPr wrap="square" lIns="54864" tIns="27432" rIns="54864" bIns="27432" rtlCol="0" anchor="ctr"/>
           <a:lstStyle/>
           <a:p>
             <a:pPr algn="ctr"/>
@@ -5357,12 +5154,12 @@
           </a:fontRef>
         </p:style>
         <p:txBody>
-          <a:bodyPr rtlCol="0" anchor="ctr" wrap="square" lIns="54864" rIns="54864" tIns="27432" bIns="27432"/>
+          <a:bodyPr wrap="square" lIns="54864" tIns="27432" rIns="54864" bIns="27432" rtlCol="0" anchor="ctr"/>
           <a:lstStyle/>
           <a:p>
             <a:pPr algn="ctr"/>
             <a:r>
-              <a:rPr sz="1200" b="1">
+              <a:rPr sz="1200" b="1" dirty="0">
                 <a:solidFill>
                   <a:srgbClr val="3A3A3A"/>
                 </a:solidFill>
@@ -5374,7 +5171,7 @@
           <a:p>
             <a:pPr algn="ctr"/>
             <a:r>
-              <a:rPr sz="900" b="0">
+              <a:rPr sz="900" b="0" dirty="0">
                 <a:solidFill>
                   <a:srgbClr val="1A1A1A"/>
                 </a:solidFill>
@@ -5386,19 +5183,37 @@
           <a:p>
             <a:pPr algn="ctr"/>
             <a:r>
-              <a:rPr sz="900" b="0">
+              <a:rPr sz="900" b="0" dirty="0">
                 <a:solidFill>
                   <a:srgbClr val="1A1A1A"/>
                 </a:solidFill>
                 <a:latin typeface="Segoe UI"/>
               </a:rPr>
-              <a:t>memory · your tools</a:t>
+              <a:t>memory · </a:t>
+            </a:r>
+            <a:r>
+              <a:rPr lang="en-US" sz="900" b="0" dirty="0">
+                <a:solidFill>
+                  <a:srgbClr val="1A1A1A"/>
+                </a:solidFill>
+                <a:latin typeface="Segoe UI"/>
+              </a:rPr>
+              <a:t>our</a:t>
+            </a:r>
+            <a:r>
+              <a:rPr sz="900" b="0" dirty="0">
+                <a:solidFill>
+                  <a:srgbClr val="1A1A1A"/>
+                </a:solidFill>
+                <a:latin typeface="Segoe UI"/>
+              </a:rPr>
+              <a:t> tools</a:t>
             </a:r>
           </a:p>
           <a:p>
             <a:pPr algn="ctr"/>
             <a:r>
-              <a:rPr sz="900" b="0">
+              <a:rPr sz="900" b="0" dirty="0">
                 <a:solidFill>
                   <a:srgbClr val="1A1A1A"/>
                 </a:solidFill>
@@ -5486,58 +5301,67 @@
           </a:fontRef>
         </p:style>
         <p:txBody>
-          <a:bodyPr rtlCol="0" anchor="ctr" wrap="square" lIns="54864" rIns="54864" tIns="27432" bIns="27432"/>
+          <a:bodyPr wrap="square" lIns="54864" tIns="27432" rIns="54864" bIns="27432" rtlCol="0" anchor="ctr"/>
           <a:lstStyle/>
           <a:p>
             <a:pPr algn="ctr"/>
             <a:r>
-              <a:rPr sz="1200" b="1">
+              <a:rPr lang="en-US" sz="1200" b="1" dirty="0">
                 <a:solidFill>
                   <a:srgbClr val="1E6B52"/>
                 </a:solidFill>
                 <a:latin typeface="Segoe UI"/>
               </a:rPr>
-              <a:t>Your own model</a:t>
+              <a:t>Our</a:t>
+            </a:r>
+            <a:r>
+              <a:rPr sz="1200" b="1" dirty="0">
+                <a:solidFill>
+                  <a:srgbClr val="1E6B52"/>
+                </a:solidFill>
+                <a:latin typeface="Segoe UI"/>
+              </a:rPr>
+              <a:t> own model</a:t>
             </a:r>
           </a:p>
           <a:p>
             <a:pPr algn="ctr"/>
             <a:r>
-              <a:rPr sz="850" b="0">
+              <a:rPr sz="850" b="0" dirty="0">
                 <a:solidFill>
                   <a:srgbClr val="1A1A1A"/>
                 </a:solidFill>
                 <a:latin typeface="Segoe UI"/>
               </a:rPr>
-              <a:t>running on your hardware</a:t>
+              <a:t>running on </a:t>
+            </a:r>
+            <a:r>
+              <a:rPr lang="en-US" sz="850" b="0" dirty="0">
+                <a:solidFill>
+                  <a:srgbClr val="1A1A1A"/>
+                </a:solidFill>
+                <a:latin typeface="Segoe UI"/>
+              </a:rPr>
+              <a:t>Our</a:t>
+            </a:r>
+            <a:r>
+              <a:rPr sz="850" b="0" dirty="0">
+                <a:solidFill>
+                  <a:srgbClr val="1A1A1A"/>
+                </a:solidFill>
+                <a:latin typeface="Segoe UI"/>
+              </a:rPr>
+              <a:t> hardware</a:t>
             </a:r>
           </a:p>
           <a:p>
             <a:pPr algn="ctr"/>
-          </a:p>
-          <a:p>
-            <a:pPr algn="ctr"/>
-            <a:r>
-              <a:rPr sz="850" b="0">
-                <a:solidFill>
-                  <a:srgbClr val="1A1A1A"/>
-                </a:solidFill>
-                <a:latin typeface="Segoe UI"/>
-              </a:rPr>
-              <a:t>a paid cloud model only</a:t>
-            </a:r>
-          </a:p>
-          <a:p>
-            <a:pPr algn="ctr"/>
-            <a:r>
-              <a:rPr sz="850" b="0">
-                <a:solidFill>
-                  <a:srgbClr val="1A1A1A"/>
-                </a:solidFill>
-                <a:latin typeface="Segoe UI"/>
-              </a:rPr>
-              <a:t>if you add one yourself</a:t>
-            </a:r>
+            <a:endParaRPr sz="850" b="0" dirty="0">
+              <a:solidFill>
+                <a:srgbClr val="1A1A1A"/>
+              </a:solidFill>
+              <a:latin typeface="Segoe UI"/>
+            </a:endParaRPr>
           </a:p>
         </p:txBody>
       </p:sp>
@@ -5582,7 +5406,7 @@
           </a:fontRef>
         </p:style>
         <p:txBody>
-          <a:bodyPr rtlCol="0" anchor="ctr" wrap="square" lIns="54864" rIns="54864" tIns="27432" bIns="27432"/>
+          <a:bodyPr wrap="square" lIns="54864" tIns="27432" rIns="54864" bIns="27432" rtlCol="0" anchor="ctr"/>
           <a:lstStyle/>
           <a:p>
             <a:pPr algn="ctr"/>
@@ -5622,6 +5446,12 @@
           </a:p>
           <a:p>
             <a:pPr algn="ctr"/>
+            <a:endParaRPr sz="850" b="0">
+              <a:solidFill>
+                <a:srgbClr val="1A1A1A"/>
+              </a:solidFill>
+              <a:latin typeface="Segoe UI"/>
+            </a:endParaRPr>
           </a:p>
           <a:p>
             <a:pPr algn="ctr"/>
@@ -5666,7 +5496,7 @@
           <a:noFill/>
         </p:spPr>
         <p:txBody>
-          <a:bodyPr wrap="square" anchor="t" lIns="0" rIns="0" tIns="0" bIns="0">
+          <a:bodyPr wrap="square" lIns="0" tIns="0" rIns="0" bIns="0" anchor="t">
             <a:spAutoFit/>
           </a:bodyPr>
           <a:lstStyle/>
@@ -5729,7 +5559,7 @@
           </a:fontRef>
         </p:style>
         <p:txBody>
-          <a:bodyPr rtlCol="0" anchor="ctr" wrap="square" lIns="54864" rIns="54864" tIns="27432" bIns="27432"/>
+          <a:bodyPr wrap="square" lIns="54864" tIns="27432" rIns="54864" bIns="27432" rtlCol="0" anchor="ctr"/>
           <a:lstStyle/>
           <a:p>
             <a:pPr algn="ctr"/>
@@ -5822,7 +5652,7 @@
           </a:fontRef>
         </p:style>
         <p:txBody>
-          <a:bodyPr rtlCol="0" anchor="ctr" wrap="square" lIns="54864" rIns="54864" tIns="27432" bIns="27432"/>
+          <a:bodyPr wrap="square" lIns="54864" tIns="27432" rIns="54864" bIns="27432" rtlCol="0" anchor="ctr"/>
           <a:lstStyle/>
           <a:p>
             <a:pPr algn="ctr"/>
@@ -5915,7 +5745,7 @@
           </a:fontRef>
         </p:style>
         <p:txBody>
-          <a:bodyPr rtlCol="0" anchor="ctr" wrap="square" lIns="54864" rIns="54864" tIns="27432" bIns="27432"/>
+          <a:bodyPr wrap="square" lIns="54864" tIns="27432" rIns="54864" bIns="27432" rtlCol="0" anchor="ctr"/>
           <a:lstStyle/>
           <a:p>
             <a:pPr algn="ctr"/>
@@ -6008,7 +5838,7 @@
           </a:fontRef>
         </p:style>
         <p:txBody>
-          <a:bodyPr rtlCol="0" anchor="ctr" wrap="square" lIns="54864" rIns="54864" tIns="27432" bIns="27432"/>
+          <a:bodyPr wrap="square" lIns="54864" tIns="27432" rIns="54864" bIns="27432" rtlCol="0" anchor="ctr"/>
           <a:lstStyle/>
           <a:p>
             <a:pPr algn="ctr"/>
@@ -6101,7 +5931,7 @@
           </a:fontRef>
         </p:style>
         <p:txBody>
-          <a:bodyPr rtlCol="0" anchor="ctr" wrap="square" lIns="54864" rIns="54864" tIns="27432" bIns="27432"/>
+          <a:bodyPr wrap="square" lIns="54864" tIns="27432" rIns="54864" bIns="27432" rtlCol="0" anchor="ctr"/>
           <a:lstStyle/>
           <a:p>
             <a:pPr algn="ctr"/>
@@ -6194,7 +6024,7 @@
           </a:fontRef>
         </p:style>
         <p:txBody>
-          <a:bodyPr rtlCol="0" anchor="ctr" wrap="square" lIns="54864" rIns="54864" tIns="27432" bIns="27432"/>
+          <a:bodyPr wrap="square" lIns="54864" tIns="27432" rIns="54864" bIns="27432" rtlCol="0" anchor="ctr"/>
           <a:lstStyle/>
           <a:p>
             <a:pPr algn="ctr"/>
@@ -6227,7 +6057,7 @@
           <a:noFill/>
         </p:spPr>
         <p:txBody>
-          <a:bodyPr wrap="square" anchor="t" lIns="0" rIns="0" tIns="0" bIns="0">
+          <a:bodyPr wrap="square" lIns="0" tIns="0" rIns="0" bIns="0" anchor="t">
             <a:spAutoFit/>
           </a:bodyPr>
           <a:lstStyle/>
@@ -6238,7 +6068,7 @@
               </a:spcAft>
             </a:pPr>
             <a:r>
-              <a:rPr sz="900" b="0">
+              <a:rPr sz="900" b="0" dirty="0">
                 <a:solidFill>
                   <a:srgbClr val="6B6B6B"/>
                 </a:solidFill>
@@ -6290,7 +6120,7 @@
           </a:fontRef>
         </p:style>
         <p:txBody>
-          <a:bodyPr rtlCol="0" anchor="ctr" wrap="square" lIns="54864" rIns="54864" tIns="27432" bIns="27432"/>
+          <a:bodyPr wrap="square" lIns="54864" tIns="27432" rIns="54864" bIns="27432" rtlCol="0" anchor="ctr"/>
           <a:lstStyle/>
           <a:p>
             <a:pPr algn="ctr"/>
@@ -6349,6 +6179,7 @@
           <a:lstStyle/>
           <a:p>
             <a:pPr algn="ctr"/>
+            <a:endParaRPr/>
           </a:p>
         </p:txBody>
       </p:sp>
@@ -6393,7 +6224,7 @@
           </a:fontRef>
         </p:style>
         <p:txBody>
-          <a:bodyPr rtlCol="0" anchor="ctr" wrap="square" lIns="54864" rIns="54864" tIns="27432" bIns="27432"/>
+          <a:bodyPr wrap="square" lIns="54864" tIns="27432" rIns="54864" bIns="27432" rtlCol="0" anchor="ctr"/>
           <a:lstStyle/>
           <a:p>
             <a:pPr algn="ctr"/>
@@ -6450,7 +6281,7 @@
           </a:fontRef>
         </p:style>
         <p:txBody>
-          <a:bodyPr rtlCol="0" anchor="ctr" wrap="square" lIns="54864" rIns="54864" tIns="27432" bIns="27432"/>
+          <a:bodyPr wrap="square" lIns="54864" tIns="27432" rIns="54864" bIns="27432" rtlCol="0" anchor="ctr"/>
           <a:lstStyle/>
           <a:p>
             <a:pPr algn="ctr"/>
@@ -6507,7 +6338,7 @@
           </a:fontRef>
         </p:style>
         <p:txBody>
-          <a:bodyPr rtlCol="0" anchor="ctr" wrap="square" lIns="54864" rIns="54864" tIns="27432" bIns="27432"/>
+          <a:bodyPr wrap="square" lIns="54864" tIns="27432" rIns="54864" bIns="27432" rtlCol="0" anchor="ctr"/>
           <a:lstStyle/>
           <a:p>
             <a:pPr algn="ctr"/>
@@ -6564,7 +6395,7 @@
           </a:fontRef>
         </p:style>
         <p:txBody>
-          <a:bodyPr rtlCol="0" anchor="ctr" wrap="square" lIns="54864" rIns="54864" tIns="27432" bIns="27432"/>
+          <a:bodyPr wrap="square" lIns="54864" tIns="27432" rIns="54864" bIns="27432" rtlCol="0" anchor="ctr"/>
           <a:lstStyle/>
           <a:p>
             <a:pPr algn="ctr"/>
@@ -6597,7 +6428,7 @@
           <a:noFill/>
         </p:spPr>
         <p:txBody>
-          <a:bodyPr wrap="square" anchor="t" lIns="0" rIns="0" tIns="0" bIns="0">
+          <a:bodyPr wrap="square" lIns="0" tIns="0" rIns="0" bIns="0" anchor="t">
             <a:spAutoFit/>
           </a:bodyPr>
           <a:lstStyle/>
@@ -6608,7 +6439,7 @@
               </a:spcAft>
             </a:pPr>
             <a:r>
-              <a:rPr sz="850" b="0">
+              <a:rPr sz="850" b="0" dirty="0">
                 <a:solidFill>
                   <a:srgbClr val="6B6B6B"/>
                 </a:solidFill>
@@ -6660,7 +6491,7 @@
           </a:fontRef>
         </p:style>
         <p:txBody>
-          <a:bodyPr rtlCol="0" anchor="ctr" wrap="square" lIns="54864" rIns="54864" tIns="27432" bIns="27432"/>
+          <a:bodyPr wrap="square" lIns="54864" tIns="27432" rIns="54864" bIns="27432" rtlCol="0" anchor="ctr"/>
           <a:lstStyle/>
           <a:p>
             <a:pPr algn="ctr"/>
@@ -6719,6 +6550,7 @@
           <a:lstStyle/>
           <a:p>
             <a:pPr algn="ctr"/>
+            <a:endParaRPr/>
           </a:p>
         </p:txBody>
       </p:sp>
@@ -6763,7 +6595,7 @@
           </a:fontRef>
         </p:style>
         <p:txBody>
-          <a:bodyPr rtlCol="0" anchor="ctr" wrap="square" lIns="54864" rIns="54864" tIns="27432" bIns="27432"/>
+          <a:bodyPr wrap="square" lIns="54864" tIns="27432" rIns="54864" bIns="27432" rtlCol="0" anchor="ctr"/>
           <a:lstStyle/>
           <a:p>
             <a:pPr algn="ctr"/>
@@ -6820,7 +6652,7 @@
           </a:fontRef>
         </p:style>
         <p:txBody>
-          <a:bodyPr rtlCol="0" anchor="ctr" wrap="square" lIns="54864" rIns="54864" tIns="27432" bIns="27432"/>
+          <a:bodyPr wrap="square" lIns="54864" tIns="27432" rIns="54864" bIns="27432" rtlCol="0" anchor="ctr"/>
           <a:lstStyle/>
           <a:p>
             <a:pPr algn="ctr"/>
@@ -6877,7 +6709,7 @@
           </a:fontRef>
         </p:style>
         <p:txBody>
-          <a:bodyPr rtlCol="0" anchor="ctr" wrap="square" lIns="54864" rIns="54864" tIns="27432" bIns="27432"/>
+          <a:bodyPr wrap="square" lIns="54864" tIns="27432" rIns="54864" bIns="27432" rtlCol="0" anchor="ctr"/>
           <a:lstStyle/>
           <a:p>
             <a:pPr algn="ctr"/>
@@ -6934,7 +6766,7 @@
           </a:fontRef>
         </p:style>
         <p:txBody>
-          <a:bodyPr rtlCol="0" anchor="ctr" wrap="square" lIns="54864" rIns="54864" tIns="27432" bIns="27432"/>
+          <a:bodyPr wrap="square" lIns="54864" tIns="27432" rIns="54864" bIns="27432" rtlCol="0" anchor="ctr"/>
           <a:lstStyle/>
           <a:p>
             <a:pPr algn="ctr"/>
@@ -6991,7 +6823,7 @@
           </a:fontRef>
         </p:style>
         <p:txBody>
-          <a:bodyPr rtlCol="0" anchor="ctr" wrap="square" lIns="54864" rIns="54864" tIns="27432" bIns="27432"/>
+          <a:bodyPr wrap="square" lIns="54864" tIns="27432" rIns="54864" bIns="27432" rtlCol="0" anchor="ctr"/>
           <a:lstStyle/>
           <a:p>
             <a:pPr algn="ctr"/>
@@ -7024,7 +6856,7 @@
           <a:noFill/>
         </p:spPr>
         <p:txBody>
-          <a:bodyPr wrap="square" anchor="t" lIns="0" rIns="0" tIns="0" bIns="0">
+          <a:bodyPr wrap="square" lIns="0" tIns="0" rIns="0" bIns="0" anchor="t">
             <a:spAutoFit/>
           </a:bodyPr>
           <a:lstStyle/>
@@ -7035,7 +6867,7 @@
               </a:spcAft>
             </a:pPr>
             <a:r>
-              <a:rPr sz="850" b="0">
+              <a:rPr sz="850" b="0" dirty="0">
                 <a:solidFill>
                   <a:srgbClr val="6B6B6B"/>
                 </a:solidFill>
@@ -7055,7 +6887,7 @@
 </file>
 
 <file path=ppt/slides/slide2.xml><?xml version="1.0" encoding="utf-8"?>
-<p:sld xmlns:a="http://schemas.openxmlformats.org/drawingml/2006/main" xmlns:p="http://schemas.openxmlformats.org/presentationml/2006/main" xmlns:r="http://schemas.openxmlformats.org/officeDocument/2006/relationships">
+<p:sld xmlns:a="http://schemas.openxmlformats.org/drawingml/2006/main" xmlns:r="http://schemas.openxmlformats.org/officeDocument/2006/relationships" xmlns:p="http://schemas.openxmlformats.org/presentationml/2006/main">
   <p:cSld>
     <p:spTree>
       <p:nvGrpSpPr>
@@ -7063,7 +6895,14 @@
         <p:cNvGrpSpPr/>
         <p:nvPr/>
       </p:nvGrpSpPr>
-      <p:grpSpPr/>
+      <p:grpSpPr>
+        <a:xfrm>
+          <a:off x="0" y="0"/>
+          <a:ext cx="0" cy="0"/>
+          <a:chOff x="0" y="0"/>
+          <a:chExt cx="0" cy="0"/>
+        </a:xfrm>
+      </p:grpSpPr>
       <p:sp>
         <p:nvSpPr>
           <p:cNvPr id="2" name="TextBox 1"/>
@@ -7081,7 +6920,7 @@
           <a:noFill/>
         </p:spPr>
         <p:txBody>
-          <a:bodyPr wrap="square" anchor="t" lIns="0" rIns="0" tIns="0" bIns="0">
+          <a:bodyPr wrap="square" lIns="0" tIns="0" rIns="0" bIns="0" anchor="t">
             <a:spAutoFit/>
           </a:bodyPr>
           <a:lstStyle/>
@@ -7120,7 +6959,7 @@
           <a:noFill/>
         </p:spPr>
         <p:txBody>
-          <a:bodyPr wrap="square" anchor="t" lIns="0" rIns="0" tIns="0" bIns="0">
+          <a:bodyPr wrap="square" lIns="0" tIns="0" rIns="0" bIns="0" anchor="t">
             <a:spAutoFit/>
           </a:bodyPr>
           <a:lstStyle/>
@@ -7183,19 +7022,20 @@
           <a:lstStyle/>
           <a:p>
             <a:pPr algn="ctr"/>
-          </a:p>
-        </p:txBody>
-      </p:sp>
-      <p:sp>
-        <p:nvSpPr>
-          <p:cNvPr id="5" name="TextBox 4"/>
+            <a:endParaRPr/>
+          </a:p>
+        </p:txBody>
+      </p:sp>
+      <p:sp>
+        <p:nvSpPr>
+          <p:cNvPr id="6" name="TextBox 5"/>
           <p:cNvSpPr txBox="1"/>
           <p:nvPr/>
         </p:nvSpPr>
         <p:spPr>
           <a:xfrm>
-            <a:off x="548640" y="6327648"/>
-            <a:ext cx="9692640" cy="320040"/>
+            <a:off x="11018520" y="6327648"/>
+            <a:ext cx="640080" cy="274320"/>
           </a:xfrm>
           <a:prstGeom prst="rect">
             <a:avLst/>
@@ -7203,46 +7043,7 @@
           <a:noFill/>
         </p:spPr>
         <p:txBody>
-          <a:bodyPr wrap="square" anchor="t" lIns="0" rIns="0" tIns="0" bIns="0">
-            <a:spAutoFit/>
-          </a:bodyPr>
-          <a:lstStyle/>
-          <a:p>
-            <a:pPr algn="l">
-              <a:spcAft>
-                <a:spcPts val="0"/>
-              </a:spcAft>
-            </a:pPr>
-            <a:r>
-              <a:rPr sz="950" b="0">
-                <a:solidFill>
-                  <a:srgbClr val="6B6B6B"/>
-                </a:solidFill>
-                <a:latin typeface="Segoe UI"/>
-              </a:rPr>
-              <a:t>Measured on main @ 7d9e60ae, 2026-09-06. This is a strong guard, not a sealed box: a firewall on the machine is still the outer wall, and we say so in the product's docs.</a:t>
-            </a:r>
-          </a:p>
-        </p:txBody>
-      </p:sp>
-      <p:sp>
-        <p:nvSpPr>
-          <p:cNvPr id="6" name="TextBox 5"/>
-          <p:cNvSpPr txBox="1"/>
-          <p:nvPr/>
-        </p:nvSpPr>
-        <p:spPr>
-          <a:xfrm>
-            <a:off x="11018520" y="6327648"/>
-            <a:ext cx="640080" cy="274320"/>
-          </a:xfrm>
-          <a:prstGeom prst="rect">
-            <a:avLst/>
-          </a:prstGeom>
-          <a:noFill/>
-        </p:spPr>
-        <p:txBody>
-          <a:bodyPr wrap="square" anchor="t" lIns="0" rIns="0" tIns="0" bIns="0">
+          <a:bodyPr wrap="square" lIns="0" tIns="0" rIns="0" bIns="0" anchor="t">
             <a:spAutoFit/>
           </a:bodyPr>
           <a:lstStyle/>
@@ -7281,7 +7082,7 @@
           <a:noFill/>
         </p:spPr>
         <p:txBody>
-          <a:bodyPr wrap="square" anchor="t" lIns="0" rIns="0" tIns="0" bIns="0">
+          <a:bodyPr wrap="square" lIns="0" tIns="0" rIns="0" bIns="0" anchor="t">
             <a:spAutoFit/>
           </a:bodyPr>
           <a:lstStyle/>
@@ -7320,7 +7121,7 @@
           <a:noFill/>
         </p:spPr>
         <p:txBody>
-          <a:bodyPr wrap="square" anchor="t" lIns="0" rIns="0" tIns="0" bIns="0">
+          <a:bodyPr wrap="square" lIns="0" tIns="0" rIns="0" bIns="0" anchor="t">
             <a:spAutoFit/>
           </a:bodyPr>
           <a:lstStyle/>
@@ -7359,7 +7160,7 @@
           <a:noFill/>
         </p:spPr>
         <p:txBody>
-          <a:bodyPr wrap="square" anchor="t" lIns="0" rIns="0" tIns="0" bIns="0">
+          <a:bodyPr wrap="square" lIns="0" tIns="0" rIns="0" bIns="0" anchor="t">
             <a:spAutoFit/>
           </a:bodyPr>
           <a:lstStyle/>
@@ -7398,7 +7199,7 @@
           <a:noFill/>
         </p:spPr>
         <p:txBody>
-          <a:bodyPr wrap="square" anchor="t" lIns="0" rIns="0" tIns="0" bIns="0">
+          <a:bodyPr wrap="square" lIns="0" tIns="0" rIns="0" bIns="0" anchor="t">
             <a:spAutoFit/>
           </a:bodyPr>
           <a:lstStyle/>
@@ -7461,6 +7262,7 @@
           <a:lstStyle/>
           <a:p>
             <a:pPr algn="ctr"/>
+            <a:endParaRPr/>
           </a:p>
         </p:txBody>
       </p:sp>
@@ -7481,7 +7283,7 @@
           <a:noFill/>
         </p:spPr>
         <p:txBody>
-          <a:bodyPr wrap="square" anchor="t" lIns="0" rIns="0" tIns="0" bIns="0">
+          <a:bodyPr wrap="square" lIns="0" tIns="0" rIns="0" bIns="0" anchor="t">
             <a:spAutoFit/>
           </a:bodyPr>
           <a:lstStyle/>
@@ -7520,7 +7322,7 @@
           <a:noFill/>
         </p:spPr>
         <p:txBody>
-          <a:bodyPr wrap="square" anchor="t" lIns="0" rIns="0" tIns="0" bIns="0">
+          <a:bodyPr wrap="square" lIns="0" tIns="0" rIns="0" bIns="0" anchor="t">
             <a:spAutoFit/>
           </a:bodyPr>
           <a:lstStyle/>
@@ -7583,6 +7385,7 @@
           <a:lstStyle/>
           <a:p>
             <a:pPr algn="ctr"/>
+            <a:endParaRPr/>
           </a:p>
         </p:txBody>
       </p:sp>
@@ -7603,7 +7406,7 @@
           <a:noFill/>
         </p:spPr>
         <p:txBody>
-          <a:bodyPr wrap="square" anchor="t" lIns="0" rIns="0" tIns="0" bIns="0">
+          <a:bodyPr wrap="square" lIns="0" tIns="0" rIns="0" bIns="0" anchor="t">
             <a:spAutoFit/>
           </a:bodyPr>
           <a:lstStyle/>
@@ -7642,7 +7445,7 @@
           <a:noFill/>
         </p:spPr>
         <p:txBody>
-          <a:bodyPr wrap="square" anchor="t" lIns="0" rIns="0" tIns="0" bIns="0">
+          <a:bodyPr wrap="square" lIns="0" tIns="0" rIns="0" bIns="0" anchor="t">
             <a:spAutoFit/>
           </a:bodyPr>
           <a:lstStyle/>
@@ -7705,6 +7508,7 @@
           <a:lstStyle/>
           <a:p>
             <a:pPr algn="ctr"/>
+            <a:endParaRPr/>
           </a:p>
         </p:txBody>
       </p:sp>
@@ -7725,7 +7529,7 @@
           <a:noFill/>
         </p:spPr>
         <p:txBody>
-          <a:bodyPr wrap="square" anchor="t" lIns="0" rIns="0" tIns="0" bIns="0">
+          <a:bodyPr wrap="square" lIns="0" tIns="0" rIns="0" bIns="0" anchor="t">
             <a:spAutoFit/>
           </a:bodyPr>
           <a:lstStyle/>
@@ -7764,7 +7568,7 @@
           <a:noFill/>
         </p:spPr>
         <p:txBody>
-          <a:bodyPr wrap="square" anchor="t" lIns="0" rIns="0" tIns="0" bIns="0">
+          <a:bodyPr wrap="square" lIns="0" tIns="0" rIns="0" bIns="0" anchor="t">
             <a:spAutoFit/>
           </a:bodyPr>
           <a:lstStyle/>
@@ -7827,6 +7631,7 @@
           <a:lstStyle/>
           <a:p>
             <a:pPr algn="ctr"/>
+            <a:endParaRPr/>
           </a:p>
         </p:txBody>
       </p:sp>
@@ -7871,7 +7676,7 @@
           </a:fontRef>
         </p:style>
         <p:txBody>
-          <a:bodyPr rtlCol="0" anchor="ctr" wrap="square" lIns="54864" rIns="54864" tIns="27432" bIns="27432"/>
+          <a:bodyPr wrap="square" lIns="54864" tIns="27432" rIns="54864" bIns="27432" rtlCol="0" anchor="ctr"/>
           <a:lstStyle/>
           <a:p>
             <a:pPr algn="ctr"/>
@@ -7976,7 +7781,7 @@
           </a:fontRef>
         </p:style>
         <p:txBody>
-          <a:bodyPr rtlCol="0" anchor="ctr" wrap="square" lIns="54864" rIns="54864" tIns="27432" bIns="27432"/>
+          <a:bodyPr wrap="square" lIns="54864" tIns="27432" rIns="54864" bIns="27432" rtlCol="0" anchor="ctr"/>
           <a:lstStyle/>
           <a:p>
             <a:pPr algn="ctr"/>
@@ -8081,7 +7886,7 @@
           </a:fontRef>
         </p:style>
         <p:txBody>
-          <a:bodyPr rtlCol="0" anchor="ctr" wrap="square" lIns="54864" rIns="54864" tIns="27432" bIns="27432"/>
+          <a:bodyPr wrap="square" lIns="54864" tIns="27432" rIns="54864" bIns="27432" rtlCol="0" anchor="ctr"/>
           <a:lstStyle/>
           <a:p>
             <a:pPr algn="ctr"/>
@@ -8186,7 +7991,7 @@
           </a:fontRef>
         </p:style>
         <p:txBody>
-          <a:bodyPr rtlCol="0" anchor="ctr" wrap="square" lIns="54864" rIns="54864" tIns="27432" bIns="27432"/>
+          <a:bodyPr wrap="square" lIns="54864" tIns="27432" rIns="54864" bIns="27432" rtlCol="0" anchor="ctr"/>
           <a:lstStyle/>
           <a:p>
             <a:pPr algn="ctr"/>
@@ -8238,6 +8043,12 @@
           </a:p>
           <a:p>
             <a:pPr algn="ctr"/>
+            <a:endParaRPr sz="850" b="0">
+              <a:solidFill>
+                <a:srgbClr val="1A1A1A"/>
+              </a:solidFill>
+              <a:latin typeface="Segoe UI"/>
+            </a:endParaRPr>
           </a:p>
           <a:p>
             <a:pPr algn="ctr"/>
@@ -8366,7 +8177,7 @@
           </a:fontRef>
         </p:style>
         <p:txBody>
-          <a:bodyPr rtlCol="0" anchor="ctr" wrap="square" lIns="54864" rIns="54864" tIns="27432" bIns="27432"/>
+          <a:bodyPr wrap="square" lIns="54864" tIns="27432" rIns="54864" bIns="27432" rtlCol="0" anchor="ctr"/>
           <a:lstStyle/>
           <a:p>
             <a:pPr algn="ctr"/>
@@ -8425,6 +8236,7 @@
           <a:lstStyle/>
           <a:p>
             <a:pPr algn="ctr"/>
+            <a:endParaRPr/>
           </a:p>
         </p:txBody>
       </p:sp>
@@ -8469,18 +8281,18 @@
           </a:fontRef>
         </p:style>
         <p:txBody>
-          <a:bodyPr rtlCol="0" anchor="ctr" wrap="square" lIns="54864" rIns="54864" tIns="27432" bIns="27432"/>
+          <a:bodyPr wrap="square" lIns="54864" tIns="27432" rIns="54864" bIns="27432" rtlCol="0" anchor="ctr"/>
           <a:lstStyle/>
           <a:p>
             <a:pPr algn="ctr"/>
             <a:r>
-              <a:rPr sz="850" b="0">
+              <a:rPr sz="850" b="0" dirty="0">
                 <a:solidFill>
                   <a:srgbClr val="1E6B52"/>
                 </a:solidFill>
                 <a:latin typeface="Segoe UI"/>
               </a:rPr>
-              <a:t>your own network and machines</a:t>
+              <a:t>our own network and machines</a:t>
             </a:r>
           </a:p>
         </p:txBody>
@@ -8526,7 +8338,7 @@
           </a:fontRef>
         </p:style>
         <p:txBody>
-          <a:bodyPr rtlCol="0" anchor="ctr" wrap="square" lIns="54864" rIns="54864" tIns="27432" bIns="27432"/>
+          <a:bodyPr wrap="square" lIns="54864" tIns="27432" rIns="54864" bIns="27432" rtlCol="0" anchor="ctr"/>
           <a:lstStyle/>
           <a:p>
             <a:pPr algn="ctr"/>
@@ -8583,7 +8395,7 @@
           </a:fontRef>
         </p:style>
         <p:txBody>
-          <a:bodyPr rtlCol="0" anchor="ctr" wrap="square" lIns="54864" rIns="54864" tIns="27432" bIns="27432"/>
+          <a:bodyPr wrap="square" lIns="54864" tIns="27432" rIns="54864" bIns="27432" rtlCol="0" anchor="ctr"/>
           <a:lstStyle/>
           <a:p>
             <a:pPr algn="ctr"/>
@@ -8640,7 +8452,7 @@
           </a:fontRef>
         </p:style>
         <p:txBody>
-          <a:bodyPr rtlCol="0" anchor="ctr" wrap="square" lIns="54864" rIns="54864" tIns="27432" bIns="27432"/>
+          <a:bodyPr wrap="square" lIns="54864" tIns="27432" rIns="54864" bIns="27432" rtlCol="0" anchor="ctr"/>
           <a:lstStyle/>
           <a:p>
             <a:pPr algn="ctr"/>
@@ -8699,6 +8511,7 @@
           <a:lstStyle/>
           <a:p>
             <a:pPr algn="ctr"/>
+            <a:endParaRPr/>
           </a:p>
         </p:txBody>
       </p:sp>
@@ -8743,7 +8556,7 @@
           </a:fontRef>
         </p:style>
         <p:txBody>
-          <a:bodyPr rtlCol="0" anchor="ctr" wrap="square" lIns="54864" rIns="54864" tIns="27432" bIns="27432"/>
+          <a:bodyPr wrap="square" lIns="54864" tIns="27432" rIns="54864" bIns="27432" rtlCol="0" anchor="ctr"/>
           <a:lstStyle/>
           <a:p>
             <a:pPr algn="ctr"/>
@@ -8800,7 +8613,7 @@
           </a:fontRef>
         </p:style>
         <p:txBody>
-          <a:bodyPr rtlCol="0" anchor="ctr" wrap="square" lIns="54864" rIns="54864" tIns="27432" bIns="27432"/>
+          <a:bodyPr wrap="square" lIns="54864" tIns="27432" rIns="54864" bIns="27432" rtlCol="0" anchor="ctr"/>
           <a:lstStyle/>
           <a:p>
             <a:pPr algn="ctr"/>
@@ -8857,7 +8670,7 @@
           </a:fontRef>
         </p:style>
         <p:txBody>
-          <a:bodyPr rtlCol="0" anchor="ctr" wrap="square" lIns="54864" rIns="54864" tIns="27432" bIns="27432"/>
+          <a:bodyPr wrap="square" lIns="54864" tIns="27432" rIns="54864" bIns="27432" rtlCol="0" anchor="ctr"/>
           <a:lstStyle/>
           <a:p>
             <a:pPr algn="ctr"/>
@@ -8914,7 +8727,7 @@
           </a:fontRef>
         </p:style>
         <p:txBody>
-          <a:bodyPr rtlCol="0" anchor="ctr" wrap="square" lIns="54864" rIns="54864" tIns="27432" bIns="27432"/>
+          <a:bodyPr wrap="square" lIns="54864" tIns="27432" rIns="54864" bIns="27432" rtlCol="0" anchor="ctr"/>
           <a:lstStyle/>
           <a:p>
             <a:pPr algn="ctr"/>
@@ -8973,6 +8786,7 @@
           <a:lstStyle/>
           <a:p>
             <a:pPr algn="ctr"/>
+            <a:endParaRPr/>
           </a:p>
         </p:txBody>
       </p:sp>
@@ -9017,7 +8831,7 @@
           </a:fontRef>
         </p:style>
         <p:txBody>
-          <a:bodyPr rtlCol="0" anchor="ctr" wrap="square" lIns="54864" rIns="54864" tIns="27432" bIns="27432"/>
+          <a:bodyPr wrap="square" lIns="54864" tIns="27432" rIns="54864" bIns="27432" rtlCol="0" anchor="ctr"/>
           <a:lstStyle/>
           <a:p>
             <a:pPr algn="ctr"/>
@@ -9074,7 +8888,7 @@
           </a:fontRef>
         </p:style>
         <p:txBody>
-          <a:bodyPr rtlCol="0" anchor="ctr" wrap="square" lIns="54864" rIns="54864" tIns="27432" bIns="27432"/>
+          <a:bodyPr wrap="square" lIns="54864" tIns="27432" rIns="54864" bIns="27432" rtlCol="0" anchor="ctr"/>
           <a:lstStyle/>
           <a:p>
             <a:pPr algn="ctr"/>
@@ -9131,7 +8945,7 @@
           </a:fontRef>
         </p:style>
         <p:txBody>
-          <a:bodyPr rtlCol="0" anchor="ctr" wrap="square" lIns="54864" rIns="54864" tIns="27432" bIns="27432"/>
+          <a:bodyPr wrap="square" lIns="54864" tIns="27432" rIns="54864" bIns="27432" rtlCol="0" anchor="ctr"/>
           <a:lstStyle/>
           <a:p>
             <a:pPr algn="ctr"/>
@@ -9190,6 +9004,7 @@
           <a:lstStyle/>
           <a:p>
             <a:pPr algn="ctr"/>
+            <a:endParaRPr/>
           </a:p>
         </p:txBody>
       </p:sp>
@@ -9234,7 +9049,7 @@
           </a:fontRef>
         </p:style>
         <p:txBody>
-          <a:bodyPr rtlCol="0" anchor="ctr" wrap="square" lIns="54864" rIns="54864" tIns="27432" bIns="27432"/>
+          <a:bodyPr wrap="square" lIns="54864" tIns="27432" rIns="54864" bIns="27432" rtlCol="0" anchor="ctr"/>
           <a:lstStyle/>
           <a:p>
             <a:pPr algn="ctr"/>
@@ -9291,7 +9106,7 @@
           </a:fontRef>
         </p:style>
         <p:txBody>
-          <a:bodyPr rtlCol="0" anchor="ctr" wrap="square" lIns="54864" rIns="54864" tIns="27432" bIns="27432"/>
+          <a:bodyPr wrap="square" lIns="54864" tIns="27432" rIns="54864" bIns="27432" rtlCol="0" anchor="ctr"/>
           <a:lstStyle/>
           <a:p>
             <a:pPr algn="ctr"/>
@@ -9348,7 +9163,7 @@
           </a:fontRef>
         </p:style>
         <p:txBody>
-          <a:bodyPr rtlCol="0" anchor="ctr" wrap="square" lIns="54864" rIns="54864" tIns="27432" bIns="27432"/>
+          <a:bodyPr wrap="square" lIns="54864" tIns="27432" rIns="54864" bIns="27432" rtlCol="0" anchor="ctr"/>
           <a:lstStyle/>
           <a:p>
             <a:pPr algn="ctr"/>
@@ -9407,6 +9222,7 @@
           <a:lstStyle/>
           <a:p>
             <a:pPr algn="ctr"/>
+            <a:endParaRPr/>
           </a:p>
         </p:txBody>
       </p:sp>
@@ -9451,7 +9267,7 @@
           </a:fontRef>
         </p:style>
         <p:txBody>
-          <a:bodyPr rtlCol="0" anchor="ctr" wrap="square" lIns="54864" rIns="54864" tIns="27432" bIns="27432"/>
+          <a:bodyPr wrap="square" lIns="54864" tIns="27432" rIns="54864" bIns="27432" rtlCol="0" anchor="ctr"/>
           <a:lstStyle/>
           <a:p>
             <a:pPr algn="ctr"/>
@@ -9508,32 +9324,93 @@
           </a:fontRef>
         </p:style>
         <p:txBody>
-          <a:bodyPr rtlCol="0" anchor="ctr" wrap="square" lIns="54864" rIns="54864" tIns="27432" bIns="27432"/>
+          <a:bodyPr wrap="square" lIns="54864" tIns="27432" rIns="54864" bIns="27432" rtlCol="0" anchor="ctr"/>
           <a:lstStyle/>
           <a:p>
             <a:pPr algn="ctr"/>
             <a:r>
-              <a:rPr sz="850" b="0">
+              <a:rPr lang="en-US" sz="850" dirty="0" err="1">
                 <a:solidFill>
                   <a:srgbClr val="1E6B52"/>
                 </a:solidFill>
                 <a:latin typeface="Segoe UI"/>
               </a:rPr>
-              <a:t>your model first; a paid one only after a real failure</a:t>
-            </a:r>
-          </a:p>
-        </p:txBody>
-      </p:sp>
-      <p:sp>
-        <p:nvSpPr>
-          <p:cNvPr id="52" name="TextBox 51"/>
+              <a:t>o</a:t>
+            </a:r>
+            <a:r>
+              <a:rPr sz="850" b="0" dirty="0" err="1">
+                <a:solidFill>
+                  <a:srgbClr val="1E6B52"/>
+                </a:solidFill>
+                <a:latin typeface="Segoe UI"/>
+              </a:rPr>
+              <a:t>our</a:t>
+            </a:r>
+            <a:r>
+              <a:rPr sz="850" b="0" dirty="0">
+                <a:solidFill>
+                  <a:srgbClr val="1E6B52"/>
+                </a:solidFill>
+                <a:latin typeface="Segoe UI"/>
+              </a:rPr>
+              <a:t> </a:t>
+            </a:r>
+            <a:r>
+              <a:rPr lang="en-US" sz="850" b="0" dirty="0">
+                <a:solidFill>
+                  <a:srgbClr val="1E6B52"/>
+                </a:solidFill>
+                <a:latin typeface="Segoe UI"/>
+              </a:rPr>
+              <a:t>local </a:t>
+            </a:r>
+            <a:r>
+              <a:rPr sz="850" b="0" dirty="0">
+                <a:solidFill>
+                  <a:srgbClr val="1E6B52"/>
+                </a:solidFill>
+                <a:latin typeface="Segoe UI"/>
+              </a:rPr>
+              <a:t>model</a:t>
+            </a:r>
+          </a:p>
+        </p:txBody>
+      </p:sp>
+    </p:spTree>
+  </p:cSld>
+  <p:clrMapOvr>
+    <a:masterClrMapping/>
+  </p:clrMapOvr>
+</p:sld>
+</file>
+
+<file path=ppt/slides/slide3.xml><?xml version="1.0" encoding="utf-8"?>
+<p:sld xmlns:a="http://schemas.openxmlformats.org/drawingml/2006/main" xmlns:r="http://schemas.openxmlformats.org/officeDocument/2006/relationships" xmlns:p="http://schemas.openxmlformats.org/presentationml/2006/main">
+  <p:cSld>
+    <p:spTree>
+      <p:nvGrpSpPr>
+        <p:cNvPr id="1" name=""/>
+        <p:cNvGrpSpPr/>
+        <p:nvPr/>
+      </p:nvGrpSpPr>
+      <p:grpSpPr>
+        <a:xfrm>
+          <a:off x="0" y="0"/>
+          <a:ext cx="0" cy="0"/>
+          <a:chOff x="0" y="0"/>
+          <a:chExt cx="0" cy="0"/>
+        </a:xfrm>
+      </p:grpSpPr>
+      <p:sp>
+        <p:nvSpPr>
+          <p:cNvPr id="2" name="TextBox 1"/>
           <p:cNvSpPr txBox="1"/>
           <p:nvPr/>
         </p:nvSpPr>
         <p:spPr>
           <a:xfrm>
-            <a:off x="566928" y="5175504"/>
-            <a:ext cx="3657600" cy="219456"/>
+            <a:off x="548640" y="310896"/>
+            <a:ext cx="11155680" cy="457200"/>
           </a:xfrm>
           <a:prstGeom prst="rect">
             <a:avLst/>
@@ -9541,7 +9418,7 @@
           <a:noFill/>
         </p:spPr>
         <p:txBody>
-          <a:bodyPr wrap="square" anchor="t" lIns="0" rIns="0" tIns="0" bIns="0">
+          <a:bodyPr wrap="square" lIns="0" tIns="0" rIns="0" bIns="0" anchor="t">
             <a:spAutoFit/>
           </a:bodyPr>
           <a:lstStyle/>
@@ -9552,32 +9429,2037 @@
               </a:spcAft>
             </a:pPr>
             <a:r>
-              <a:rPr sz="1050" b="1">
-                <a:solidFill>
-                  <a:srgbClr val="8C2F2F"/>
-                </a:solidFill>
-                <a:latin typeface="Segoe UI"/>
-              </a:rPr>
-              <a:t>What this does NOT do</a:t>
-            </a:r>
-          </a:p>
-        </p:txBody>
-      </p:sp>
-      <p:sp>
-        <p:nvSpPr>
-          <p:cNvPr id="53" name="Rounded Rectangle 52"/>
+              <a:rPr sz="2700" b="1">
+                <a:solidFill>
+                  <a:srgbClr val="1A1A1A"/>
+                </a:solidFill>
+                <a:latin typeface="Segoe UI"/>
+              </a:rPr>
+              <a:t>What one person learns, the whole company keeps</a:t>
+            </a:r>
+          </a:p>
+        </p:txBody>
+      </p:sp>
+      <p:sp>
+        <p:nvSpPr>
+          <p:cNvPr id="3" name="TextBox 2"/>
+          <p:cNvSpPr txBox="1"/>
+          <p:nvPr/>
+        </p:nvSpPr>
+        <p:spPr>
+          <a:xfrm>
+            <a:off x="548640" y="841248"/>
+            <a:ext cx="11155680" cy="292608"/>
+          </a:xfrm>
+          <a:prstGeom prst="rect">
+            <a:avLst/>
+          </a:prstGeom>
+          <a:noFill/>
+        </p:spPr>
+        <p:txBody>
+          <a:bodyPr wrap="square" lIns="0" tIns="0" rIns="0" bIns="0" anchor="t">
+            <a:spAutoFit/>
+          </a:bodyPr>
+          <a:lstStyle/>
+          <a:p>
+            <a:pPr algn="l">
+              <a:spcAft>
+                <a:spcPts val="0"/>
+              </a:spcAft>
+            </a:pPr>
+            <a:r>
+              <a:rPr sz="1250" b="0">
+                <a:solidFill>
+                  <a:srgbClr val="6B6B6B"/>
+                </a:solidFill>
+                <a:latin typeface="Segoe UI"/>
+              </a:rPr>
+              <a:t>Each machine learns on its own. Secrets are stripped, a team lead merges the rest, and other teams read it.</a:t>
+            </a:r>
+          </a:p>
+        </p:txBody>
+      </p:sp>
+      <p:sp>
+        <p:nvSpPr>
+          <p:cNvPr id="4" name="Rectangle 3"/>
           <p:cNvSpPr/>
           <p:nvPr/>
         </p:nvSpPr>
         <p:spPr>
           <a:xfrm>
-            <a:off x="566928" y="5431536"/>
-            <a:ext cx="5413248" cy="274320"/>
+            <a:off x="548640" y="1170432"/>
+            <a:ext cx="11091672" cy="9525"/>
+          </a:xfrm>
+          <a:prstGeom prst="rect">
+            <a:avLst/>
+          </a:prstGeom>
+          <a:solidFill>
+            <a:srgbClr val="C9C9C9"/>
+          </a:solidFill>
+          <a:ln>
+            <a:noFill/>
+          </a:ln>
+          <a:effectLst/>
+        </p:spPr>
+        <p:style>
+          <a:lnRef idx="1">
+            <a:schemeClr val="accent1"/>
+          </a:lnRef>
+          <a:fillRef idx="3">
+            <a:schemeClr val="accent1"/>
+          </a:fillRef>
+          <a:effectRef idx="2">
+            <a:schemeClr val="accent1"/>
+          </a:effectRef>
+          <a:fontRef idx="minor">
+            <a:schemeClr val="lt1"/>
+          </a:fontRef>
+        </p:style>
+        <p:txBody>
+          <a:bodyPr rtlCol="0" anchor="ctr"/>
+          <a:lstStyle/>
+          <a:p>
+            <a:pPr algn="ctr"/>
+            <a:endParaRPr/>
+          </a:p>
+        </p:txBody>
+      </p:sp>
+      <p:sp>
+        <p:nvSpPr>
+          <p:cNvPr id="6" name="TextBox 5"/>
+          <p:cNvSpPr txBox="1"/>
+          <p:nvPr/>
+        </p:nvSpPr>
+        <p:spPr>
+          <a:xfrm>
+            <a:off x="11018520" y="6327648"/>
+            <a:ext cx="640080" cy="274320"/>
+          </a:xfrm>
+          <a:prstGeom prst="rect">
+            <a:avLst/>
+          </a:prstGeom>
+          <a:noFill/>
+        </p:spPr>
+        <p:txBody>
+          <a:bodyPr wrap="square" lIns="0" tIns="0" rIns="0" bIns="0" anchor="t">
+            <a:spAutoFit/>
+          </a:bodyPr>
+          <a:lstStyle/>
+          <a:p>
+            <a:pPr algn="r">
+              <a:spcAft>
+                <a:spcPts val="0"/>
+              </a:spcAft>
+            </a:pPr>
+            <a:r>
+              <a:rPr sz="950" b="0">
+                <a:solidFill>
+                  <a:srgbClr val="6B6B6B"/>
+                </a:solidFill>
+                <a:latin typeface="Segoe UI"/>
+              </a:rPr>
+              <a:t>3</a:t>
+            </a:r>
+          </a:p>
+        </p:txBody>
+      </p:sp>
+      <p:sp>
+        <p:nvSpPr>
+          <p:cNvPr id="7" name="Rounded Rectangle 6"/>
+          <p:cNvSpPr/>
+          <p:nvPr/>
+        </p:nvSpPr>
+        <p:spPr>
+          <a:xfrm>
+            <a:off x="566928" y="1316736"/>
+            <a:ext cx="2487168" cy="914400"/>
           </a:xfrm>
           <a:prstGeom prst="roundRect">
             <a:avLst>
               <a:gd name="adj" fmla="val 10000"/>
             </a:avLst>
+          </a:prstGeom>
+          <a:solidFill>
+            <a:srgbClr val="ECECEC"/>
+          </a:solidFill>
+          <a:ln w="12700">
+            <a:solidFill>
+              <a:srgbClr val="3A3A3A"/>
+            </a:solidFill>
+          </a:ln>
+          <a:effectLst/>
+        </p:spPr>
+        <p:style>
+          <a:lnRef idx="1">
+            <a:schemeClr val="accent1"/>
+          </a:lnRef>
+          <a:fillRef idx="3">
+            <a:schemeClr val="accent1"/>
+          </a:fillRef>
+          <a:effectRef idx="2">
+            <a:schemeClr val="accent1"/>
+          </a:effectRef>
+          <a:fontRef idx="minor">
+            <a:schemeClr val="lt1"/>
+          </a:fontRef>
+        </p:style>
+        <p:txBody>
+          <a:bodyPr wrap="square" lIns="54864" tIns="27432" rIns="54864" bIns="27432" rtlCol="0" anchor="ctr"/>
+          <a:lstStyle/>
+          <a:p>
+            <a:pPr algn="ctr"/>
+            <a:r>
+              <a:rPr sz="1250" b="1">
+                <a:solidFill>
+                  <a:srgbClr val="3A3A3A"/>
+                </a:solidFill>
+                <a:latin typeface="Segoe UI"/>
+              </a:rPr>
+              <a:t>One machine</a:t>
+            </a:r>
+          </a:p>
+          <a:p>
+            <a:pPr algn="ctr"/>
+            <a:r>
+              <a:rPr sz="850" b="0">
+                <a:solidFill>
+                  <a:srgbClr val="1A1A1A"/>
+                </a:solidFill>
+                <a:latin typeface="Segoe UI"/>
+              </a:rPr>
+              <a:t>learns from every run</a:t>
+            </a:r>
+          </a:p>
+          <a:p>
+            <a:pPr algn="ctr"/>
+            <a:r>
+              <a:rPr sz="850" b="0">
+                <a:solidFill>
+                  <a:srgbClr val="1A1A1A"/>
+                </a:solidFill>
+                <a:latin typeface="Segoe UI"/>
+              </a:rPr>
+              <a:t>nothing raw ever leaves</a:t>
+            </a:r>
+          </a:p>
+        </p:txBody>
+      </p:sp>
+      <p:cxnSp>
+        <p:nvCxnSpPr>
+          <p:cNvPr id="8" name="Connector 7"/>
+          <p:cNvCxnSpPr/>
+          <p:nvPr/>
+        </p:nvCxnSpPr>
+        <p:spPr>
+          <a:xfrm>
+            <a:off x="3054096" y="1773936"/>
+            <a:ext cx="384048" cy="0"/>
+          </a:xfrm>
+          <a:prstGeom prst="line">
+            <a:avLst/>
+          </a:prstGeom>
+          <a:ln w="19050">
+            <a:solidFill>
+              <a:srgbClr val="C9C9C9"/>
+            </a:solidFill>
+            <a:tailEnd type="triangle" w="med" len="med"/>
+          </a:ln>
+        </p:spPr>
+        <p:style>
+          <a:lnRef idx="2">
+            <a:schemeClr val="accent1"/>
+          </a:lnRef>
+          <a:fillRef idx="0">
+            <a:schemeClr val="accent1"/>
+          </a:fillRef>
+          <a:effectRef idx="1">
+            <a:schemeClr val="accent1"/>
+          </a:effectRef>
+          <a:fontRef idx="minor">
+            <a:schemeClr val="tx1"/>
+          </a:fontRef>
+        </p:style>
+      </p:cxnSp>
+      <p:sp>
+        <p:nvSpPr>
+          <p:cNvPr id="9" name="Rounded Rectangle 8"/>
+          <p:cNvSpPr/>
+          <p:nvPr/>
+        </p:nvSpPr>
+        <p:spPr>
+          <a:xfrm>
+            <a:off x="3438144" y="1316736"/>
+            <a:ext cx="2487168" cy="914400"/>
+          </a:xfrm>
+          <a:prstGeom prst="roundRect">
+            <a:avLst>
+              <a:gd name="adj" fmla="val 10000"/>
+            </a:avLst>
+          </a:prstGeom>
+          <a:solidFill>
+            <a:srgbClr val="F7ECD5"/>
+          </a:solidFill>
+          <a:ln w="12700">
+            <a:solidFill>
+              <a:srgbClr val="8A5A00"/>
+            </a:solidFill>
+          </a:ln>
+          <a:effectLst/>
+        </p:spPr>
+        <p:style>
+          <a:lnRef idx="1">
+            <a:schemeClr val="accent1"/>
+          </a:lnRef>
+          <a:fillRef idx="3">
+            <a:schemeClr val="accent1"/>
+          </a:fillRef>
+          <a:effectRef idx="2">
+            <a:schemeClr val="accent1"/>
+          </a:effectRef>
+          <a:fontRef idx="minor">
+            <a:schemeClr val="lt1"/>
+          </a:fontRef>
+        </p:style>
+        <p:txBody>
+          <a:bodyPr wrap="square" lIns="54864" tIns="27432" rIns="54864" bIns="27432" rtlCol="0" anchor="ctr"/>
+          <a:lstStyle/>
+          <a:p>
+            <a:pPr algn="ctr"/>
+            <a:r>
+              <a:rPr sz="1250" b="1">
+                <a:solidFill>
+                  <a:srgbClr val="8A5A00"/>
+                </a:solidFill>
+                <a:latin typeface="Segoe UI"/>
+              </a:rPr>
+              <a:t>Secrets stripped</a:t>
+            </a:r>
+          </a:p>
+          <a:p>
+            <a:pPr algn="ctr"/>
+            <a:r>
+              <a:rPr sz="850" b="0">
+                <a:solidFill>
+                  <a:srgbClr val="1A1A1A"/>
+                </a:solidFill>
+                <a:latin typeface="Segoe UI"/>
+              </a:rPr>
+              <a:t>passwords and private notes</a:t>
+            </a:r>
+          </a:p>
+          <a:p>
+            <a:pPr algn="ctr"/>
+            <a:r>
+              <a:rPr sz="850" b="0">
+                <a:solidFill>
+                  <a:srgbClr val="1A1A1A"/>
+                </a:solidFill>
+                <a:latin typeface="Segoe UI"/>
+              </a:rPr>
+              <a:t>are blocked, not edited</a:t>
+            </a:r>
+          </a:p>
+        </p:txBody>
+      </p:sp>
+      <p:cxnSp>
+        <p:nvCxnSpPr>
+          <p:cNvPr id="10" name="Connector 9"/>
+          <p:cNvCxnSpPr/>
+          <p:nvPr/>
+        </p:nvCxnSpPr>
+        <p:spPr>
+          <a:xfrm>
+            <a:off x="5925312" y="1773936"/>
+            <a:ext cx="384048" cy="0"/>
+          </a:xfrm>
+          <a:prstGeom prst="line">
+            <a:avLst/>
+          </a:prstGeom>
+          <a:ln w="19050">
+            <a:solidFill>
+              <a:srgbClr val="C9C9C9"/>
+            </a:solidFill>
+            <a:tailEnd type="triangle" w="med" len="med"/>
+          </a:ln>
+        </p:spPr>
+        <p:style>
+          <a:lnRef idx="2">
+            <a:schemeClr val="accent1"/>
+          </a:lnRef>
+          <a:fillRef idx="0">
+            <a:schemeClr val="accent1"/>
+          </a:fillRef>
+          <a:effectRef idx="1">
+            <a:schemeClr val="accent1"/>
+          </a:effectRef>
+          <a:fontRef idx="minor">
+            <a:schemeClr val="tx1"/>
+          </a:fontRef>
+        </p:style>
+      </p:cxnSp>
+      <p:sp>
+        <p:nvSpPr>
+          <p:cNvPr id="11" name="Rounded Rectangle 10"/>
+          <p:cNvSpPr/>
+          <p:nvPr/>
+        </p:nvSpPr>
+        <p:spPr>
+          <a:xfrm>
+            <a:off x="6309360" y="1316736"/>
+            <a:ext cx="2487168" cy="914400"/>
+          </a:xfrm>
+          <a:prstGeom prst="roundRect">
+            <a:avLst>
+              <a:gd name="adj" fmla="val 10000"/>
+            </a:avLst>
+          </a:prstGeom>
+          <a:solidFill>
+            <a:srgbClr val="DCEEE7"/>
+          </a:solidFill>
+          <a:ln w="12700">
+            <a:solidFill>
+              <a:srgbClr val="1E6B52"/>
+            </a:solidFill>
+          </a:ln>
+          <a:effectLst/>
+        </p:spPr>
+        <p:style>
+          <a:lnRef idx="1">
+            <a:schemeClr val="accent1"/>
+          </a:lnRef>
+          <a:fillRef idx="3">
+            <a:schemeClr val="accent1"/>
+          </a:fillRef>
+          <a:effectRef idx="2">
+            <a:schemeClr val="accent1"/>
+          </a:effectRef>
+          <a:fontRef idx="minor">
+            <a:schemeClr val="lt1"/>
+          </a:fontRef>
+        </p:style>
+        <p:txBody>
+          <a:bodyPr wrap="square" lIns="54864" tIns="27432" rIns="54864" bIns="27432" rtlCol="0" anchor="ctr"/>
+          <a:lstStyle/>
+          <a:p>
+            <a:pPr algn="ctr"/>
+            <a:r>
+              <a:rPr sz="1250" b="1" dirty="0">
+                <a:solidFill>
+                  <a:srgbClr val="1E6B52"/>
+                </a:solidFill>
+                <a:latin typeface="Segoe UI"/>
+              </a:rPr>
+              <a:t>Your team</a:t>
+            </a:r>
+          </a:p>
+          <a:p>
+            <a:pPr algn="ctr"/>
+            <a:r>
+              <a:rPr sz="850" b="0" dirty="0">
+                <a:solidFill>
+                  <a:srgbClr val="1A1A1A"/>
+                </a:solidFill>
+                <a:latin typeface="Segoe UI"/>
+              </a:rPr>
+              <a:t>one lead merges it</a:t>
+            </a:r>
+          </a:p>
+          <a:p>
+            <a:pPr algn="ctr"/>
+            <a:r>
+              <a:rPr sz="850" b="0" dirty="0">
+                <a:solidFill>
+                  <a:srgbClr val="1A1A1A"/>
+                </a:solidFill>
+                <a:latin typeface="Segoe UI"/>
+              </a:rPr>
+              <a:t>into the team's memory</a:t>
+            </a:r>
+          </a:p>
+        </p:txBody>
+      </p:sp>
+      <p:cxnSp>
+        <p:nvCxnSpPr>
+          <p:cNvPr id="12" name="Connector 11"/>
+          <p:cNvCxnSpPr/>
+          <p:nvPr/>
+        </p:nvCxnSpPr>
+        <p:spPr>
+          <a:xfrm>
+            <a:off x="8796528" y="1773936"/>
+            <a:ext cx="384048" cy="0"/>
+          </a:xfrm>
+          <a:prstGeom prst="line">
+            <a:avLst/>
+          </a:prstGeom>
+          <a:ln w="19050">
+            <a:solidFill>
+              <a:srgbClr val="C9C9C9"/>
+            </a:solidFill>
+            <a:tailEnd type="triangle" w="med" len="med"/>
+          </a:ln>
+        </p:spPr>
+        <p:style>
+          <a:lnRef idx="2">
+            <a:schemeClr val="accent1"/>
+          </a:lnRef>
+          <a:fillRef idx="0">
+            <a:schemeClr val="accent1"/>
+          </a:fillRef>
+          <a:effectRef idx="1">
+            <a:schemeClr val="accent1"/>
+          </a:effectRef>
+          <a:fontRef idx="minor">
+            <a:schemeClr val="tx1"/>
+          </a:fontRef>
+        </p:style>
+      </p:cxnSp>
+      <p:sp>
+        <p:nvSpPr>
+          <p:cNvPr id="13" name="Rounded Rectangle 12"/>
+          <p:cNvSpPr/>
+          <p:nvPr/>
+        </p:nvSpPr>
+        <p:spPr>
+          <a:xfrm>
+            <a:off x="9180576" y="1316736"/>
+            <a:ext cx="2487168" cy="914400"/>
+          </a:xfrm>
+          <a:prstGeom prst="roundRect">
+            <a:avLst>
+              <a:gd name="adj" fmla="val 10000"/>
+            </a:avLst>
+          </a:prstGeom>
+          <a:solidFill>
+            <a:srgbClr val="DCE7F2"/>
+          </a:solidFill>
+          <a:ln w="12700">
+            <a:solidFill>
+              <a:srgbClr val="1F4E79"/>
+            </a:solidFill>
+          </a:ln>
+          <a:effectLst/>
+        </p:spPr>
+        <p:style>
+          <a:lnRef idx="1">
+            <a:schemeClr val="accent1"/>
+          </a:lnRef>
+          <a:fillRef idx="3">
+            <a:schemeClr val="accent1"/>
+          </a:fillRef>
+          <a:effectRef idx="2">
+            <a:schemeClr val="accent1"/>
+          </a:effectRef>
+          <a:fontRef idx="minor">
+            <a:schemeClr val="lt1"/>
+          </a:fontRef>
+        </p:style>
+        <p:txBody>
+          <a:bodyPr wrap="square" lIns="54864" tIns="27432" rIns="54864" bIns="27432" rtlCol="0" anchor="ctr"/>
+          <a:lstStyle/>
+          <a:p>
+            <a:pPr algn="ctr"/>
+            <a:r>
+              <a:rPr sz="1250" b="1">
+                <a:solidFill>
+                  <a:srgbClr val="1F4E79"/>
+                </a:solidFill>
+                <a:latin typeface="Segoe UI"/>
+              </a:rPr>
+              <a:t>The company</a:t>
+            </a:r>
+          </a:p>
+          <a:p>
+            <a:pPr algn="ctr"/>
+            <a:r>
+              <a:rPr sz="850" b="0">
+                <a:solidFill>
+                  <a:srgbClr val="1A1A1A"/>
+                </a:solidFill>
+                <a:latin typeface="Segoe UI"/>
+              </a:rPr>
+              <a:t>other teams read it</a:t>
+            </a:r>
+          </a:p>
+          <a:p>
+            <a:pPr algn="ctr"/>
+            <a:r>
+              <a:rPr sz="850" b="0">
+                <a:solidFill>
+                  <a:srgbClr val="1A1A1A"/>
+                </a:solidFill>
+                <a:latin typeface="Segoe UI"/>
+              </a:rPr>
+              <a:t>teams stay separate</a:t>
+            </a:r>
+          </a:p>
+        </p:txBody>
+      </p:sp>
+      <p:sp>
+        <p:nvSpPr>
+          <p:cNvPr id="14" name="Rounded Rectangle 13"/>
+          <p:cNvSpPr/>
+          <p:nvPr/>
+        </p:nvSpPr>
+        <p:spPr>
+          <a:xfrm>
+            <a:off x="566928" y="2340864"/>
+            <a:ext cx="3566160" cy="384048"/>
+          </a:xfrm>
+          <a:prstGeom prst="roundRect">
+            <a:avLst>
+              <a:gd name="adj" fmla="val 10000"/>
+            </a:avLst>
+          </a:prstGeom>
+          <a:solidFill>
+            <a:srgbClr val="DCEEE7"/>
+          </a:solidFill>
+          <a:ln w="12700">
+            <a:solidFill>
+              <a:srgbClr val="1E6B52"/>
+            </a:solidFill>
+          </a:ln>
+          <a:effectLst/>
+        </p:spPr>
+        <p:style>
+          <a:lnRef idx="1">
+            <a:schemeClr val="accent1"/>
+          </a:lnRef>
+          <a:fillRef idx="3">
+            <a:schemeClr val="accent1"/>
+          </a:fillRef>
+          <a:effectRef idx="2">
+            <a:schemeClr val="accent1"/>
+          </a:effectRef>
+          <a:fontRef idx="minor">
+            <a:schemeClr val="lt1"/>
+          </a:fontRef>
+        </p:style>
+        <p:txBody>
+          <a:bodyPr wrap="square" lIns="54864" tIns="27432" rIns="54864" bIns="27432" rtlCol="0" anchor="ctr"/>
+          <a:lstStyle/>
+          <a:p>
+            <a:pPr algn="ctr"/>
+            <a:r>
+              <a:rPr sz="1150" b="1">
+                <a:solidFill>
+                  <a:srgbClr val="1E6B52"/>
+                </a:solidFill>
+                <a:latin typeface="Segoe UI"/>
+              </a:rPr>
+              <a:t>What your team gets</a:t>
+            </a:r>
+          </a:p>
+        </p:txBody>
+      </p:sp>
+      <p:sp>
+        <p:nvSpPr>
+          <p:cNvPr id="15" name="Rounded Rectangle 14"/>
+          <p:cNvSpPr/>
+          <p:nvPr/>
+        </p:nvSpPr>
+        <p:spPr>
+          <a:xfrm>
+            <a:off x="566928" y="2724912"/>
+            <a:ext cx="3566160" cy="1115568"/>
+          </a:xfrm>
+          <a:prstGeom prst="roundRect">
+            <a:avLst/>
+          </a:prstGeom>
+          <a:solidFill>
+            <a:srgbClr val="FFFFFF"/>
+          </a:solidFill>
+          <a:ln w="12700">
+            <a:solidFill>
+              <a:srgbClr val="1E6B52"/>
+            </a:solidFill>
+          </a:ln>
+          <a:effectLst/>
+        </p:spPr>
+        <p:style>
+          <a:lnRef idx="1">
+            <a:schemeClr val="accent1"/>
+          </a:lnRef>
+          <a:fillRef idx="3">
+            <a:schemeClr val="accent1"/>
+          </a:fillRef>
+          <a:effectRef idx="2">
+            <a:schemeClr val="accent1"/>
+          </a:effectRef>
+          <a:fontRef idx="minor">
+            <a:schemeClr val="lt1"/>
+          </a:fontRef>
+        </p:style>
+        <p:txBody>
+          <a:bodyPr rtlCol="0" anchor="ctr"/>
+          <a:lstStyle/>
+          <a:p>
+            <a:pPr algn="ctr"/>
+            <a:endParaRPr/>
+          </a:p>
+        </p:txBody>
+      </p:sp>
+      <p:sp>
+        <p:nvSpPr>
+          <p:cNvPr id="16" name="Rounded Rectangle 15"/>
+          <p:cNvSpPr/>
+          <p:nvPr/>
+        </p:nvSpPr>
+        <p:spPr>
+          <a:xfrm>
+            <a:off x="676656" y="2816352"/>
+            <a:ext cx="3346704" cy="274320"/>
+          </a:xfrm>
+          <a:prstGeom prst="roundRect">
+            <a:avLst>
+              <a:gd name="adj" fmla="val 10000"/>
+            </a:avLst>
+          </a:prstGeom>
+          <a:solidFill>
+            <a:srgbClr val="FFFFFF"/>
+          </a:solidFill>
+          <a:ln w="12700">
+            <a:solidFill>
+              <a:srgbClr val="1E6B52"/>
+            </a:solidFill>
+          </a:ln>
+          <a:effectLst/>
+        </p:spPr>
+        <p:style>
+          <a:lnRef idx="1">
+            <a:schemeClr val="accent1"/>
+          </a:lnRef>
+          <a:fillRef idx="3">
+            <a:schemeClr val="accent1"/>
+          </a:fillRef>
+          <a:effectRef idx="2">
+            <a:schemeClr val="accent1"/>
+          </a:effectRef>
+          <a:fontRef idx="minor">
+            <a:schemeClr val="lt1"/>
+          </a:fontRef>
+        </p:style>
+        <p:txBody>
+          <a:bodyPr wrap="square" lIns="54864" tIns="27432" rIns="54864" bIns="27432" rtlCol="0" anchor="ctr"/>
+          <a:lstStyle/>
+          <a:p>
+            <a:pPr algn="ctr"/>
+            <a:r>
+              <a:rPr sz="850" b="0">
+                <a:solidFill>
+                  <a:srgbClr val="1E6B52"/>
+                </a:solidFill>
+                <a:latin typeface="Segoe UI"/>
+              </a:rPr>
+              <a:t>a fix found once is known by everyone tomorrow</a:t>
+            </a:r>
+          </a:p>
+        </p:txBody>
+      </p:sp>
+      <p:sp>
+        <p:nvSpPr>
+          <p:cNvPr id="17" name="Rounded Rectangle 16"/>
+          <p:cNvSpPr/>
+          <p:nvPr/>
+        </p:nvSpPr>
+        <p:spPr>
+          <a:xfrm>
+            <a:off x="676656" y="3154680"/>
+            <a:ext cx="3346704" cy="274320"/>
+          </a:xfrm>
+          <a:prstGeom prst="roundRect">
+            <a:avLst>
+              <a:gd name="adj" fmla="val 10000"/>
+            </a:avLst>
+          </a:prstGeom>
+          <a:solidFill>
+            <a:srgbClr val="FFFFFF"/>
+          </a:solidFill>
+          <a:ln w="12700">
+            <a:solidFill>
+              <a:srgbClr val="1E6B52"/>
+            </a:solidFill>
+          </a:ln>
+          <a:effectLst/>
+        </p:spPr>
+        <p:style>
+          <a:lnRef idx="1">
+            <a:schemeClr val="accent1"/>
+          </a:lnRef>
+          <a:fillRef idx="3">
+            <a:schemeClr val="accent1"/>
+          </a:fillRef>
+          <a:effectRef idx="2">
+            <a:schemeClr val="accent1"/>
+          </a:effectRef>
+          <a:fontRef idx="minor">
+            <a:schemeClr val="lt1"/>
+          </a:fontRef>
+        </p:style>
+        <p:txBody>
+          <a:bodyPr wrap="square" lIns="54864" tIns="27432" rIns="54864" bIns="27432" rtlCol="0" anchor="ctr"/>
+          <a:lstStyle/>
+          <a:p>
+            <a:pPr algn="ctr"/>
+            <a:r>
+              <a:rPr sz="850" b="0">
+                <a:solidFill>
+                  <a:srgbClr val="1E6B52"/>
+                </a:solidFill>
+                <a:latin typeface="Segoe UI"/>
+              </a:rPr>
+              <a:t>a new joiner reads the team's real history</a:t>
+            </a:r>
+          </a:p>
+        </p:txBody>
+      </p:sp>
+      <p:sp>
+        <p:nvSpPr>
+          <p:cNvPr id="18" name="Rounded Rectangle 17"/>
+          <p:cNvSpPr/>
+          <p:nvPr/>
+        </p:nvSpPr>
+        <p:spPr>
+          <a:xfrm>
+            <a:off x="676656" y="3493008"/>
+            <a:ext cx="3346704" cy="274320"/>
+          </a:xfrm>
+          <a:prstGeom prst="roundRect">
+            <a:avLst>
+              <a:gd name="adj" fmla="val 10000"/>
+            </a:avLst>
+          </a:prstGeom>
+          <a:solidFill>
+            <a:srgbClr val="FFFFFF"/>
+          </a:solidFill>
+          <a:ln w="12700">
+            <a:solidFill>
+              <a:srgbClr val="1E6B52"/>
+            </a:solidFill>
+          </a:ln>
+          <a:effectLst/>
+        </p:spPr>
+        <p:style>
+          <a:lnRef idx="1">
+            <a:schemeClr val="accent1"/>
+          </a:lnRef>
+          <a:fillRef idx="3">
+            <a:schemeClr val="accent1"/>
+          </a:fillRef>
+          <a:effectRef idx="2">
+            <a:schemeClr val="accent1"/>
+          </a:effectRef>
+          <a:fontRef idx="minor">
+            <a:schemeClr val="lt1"/>
+          </a:fontRef>
+        </p:style>
+        <p:txBody>
+          <a:bodyPr wrap="square" lIns="54864" tIns="27432" rIns="54864" bIns="27432" rtlCol="0" anchor="ctr"/>
+          <a:lstStyle/>
+          <a:p>
+            <a:pPr algn="ctr"/>
+            <a:r>
+              <a:rPr sz="850" b="0">
+                <a:solidFill>
+                  <a:srgbClr val="1E6B52"/>
+                </a:solidFill>
+                <a:latin typeface="Segoe UI"/>
+              </a:rPr>
+              <a:t>people leave, their know-how stays</a:t>
+            </a:r>
+          </a:p>
+        </p:txBody>
+      </p:sp>
+      <p:sp>
+        <p:nvSpPr>
+          <p:cNvPr id="19" name="Rounded Rectangle 18"/>
+          <p:cNvSpPr/>
+          <p:nvPr/>
+        </p:nvSpPr>
+        <p:spPr>
+          <a:xfrm>
+            <a:off x="4370832" y="2340864"/>
+            <a:ext cx="3566160" cy="384048"/>
+          </a:xfrm>
+          <a:prstGeom prst="roundRect">
+            <a:avLst>
+              <a:gd name="adj" fmla="val 10000"/>
+            </a:avLst>
+          </a:prstGeom>
+          <a:solidFill>
+            <a:srgbClr val="DCE7F2"/>
+          </a:solidFill>
+          <a:ln w="12700">
+            <a:solidFill>
+              <a:srgbClr val="1F4E79"/>
+            </a:solidFill>
+          </a:ln>
+          <a:effectLst/>
+        </p:spPr>
+        <p:style>
+          <a:lnRef idx="1">
+            <a:schemeClr val="accent1"/>
+          </a:lnRef>
+          <a:fillRef idx="3">
+            <a:schemeClr val="accent1"/>
+          </a:fillRef>
+          <a:effectRef idx="2">
+            <a:schemeClr val="accent1"/>
+          </a:effectRef>
+          <a:fontRef idx="minor">
+            <a:schemeClr val="lt1"/>
+          </a:fontRef>
+        </p:style>
+        <p:txBody>
+          <a:bodyPr wrap="square" lIns="54864" tIns="27432" rIns="54864" bIns="27432" rtlCol="0" anchor="ctr"/>
+          <a:lstStyle/>
+          <a:p>
+            <a:pPr algn="ctr"/>
+            <a:r>
+              <a:rPr sz="1150" b="1">
+                <a:solidFill>
+                  <a:srgbClr val="1F4E79"/>
+                </a:solidFill>
+                <a:latin typeface="Segoe UI"/>
+              </a:rPr>
+              <a:t>What the company gets</a:t>
+            </a:r>
+          </a:p>
+        </p:txBody>
+      </p:sp>
+      <p:sp>
+        <p:nvSpPr>
+          <p:cNvPr id="20" name="Rounded Rectangle 19"/>
+          <p:cNvSpPr/>
+          <p:nvPr/>
+        </p:nvSpPr>
+        <p:spPr>
+          <a:xfrm>
+            <a:off x="4370832" y="2724912"/>
+            <a:ext cx="3566160" cy="1115568"/>
+          </a:xfrm>
+          <a:prstGeom prst="roundRect">
+            <a:avLst/>
+          </a:prstGeom>
+          <a:solidFill>
+            <a:srgbClr val="FFFFFF"/>
+          </a:solidFill>
+          <a:ln w="12700">
+            <a:solidFill>
+              <a:srgbClr val="1F4E79"/>
+            </a:solidFill>
+          </a:ln>
+          <a:effectLst/>
+        </p:spPr>
+        <p:style>
+          <a:lnRef idx="1">
+            <a:schemeClr val="accent1"/>
+          </a:lnRef>
+          <a:fillRef idx="3">
+            <a:schemeClr val="accent1"/>
+          </a:fillRef>
+          <a:effectRef idx="2">
+            <a:schemeClr val="accent1"/>
+          </a:effectRef>
+          <a:fontRef idx="minor">
+            <a:schemeClr val="lt1"/>
+          </a:fontRef>
+        </p:style>
+        <p:txBody>
+          <a:bodyPr rtlCol="0" anchor="ctr"/>
+          <a:lstStyle/>
+          <a:p>
+            <a:pPr algn="ctr"/>
+            <a:endParaRPr/>
+          </a:p>
+        </p:txBody>
+      </p:sp>
+      <p:sp>
+        <p:nvSpPr>
+          <p:cNvPr id="21" name="Rounded Rectangle 20"/>
+          <p:cNvSpPr/>
+          <p:nvPr/>
+        </p:nvSpPr>
+        <p:spPr>
+          <a:xfrm>
+            <a:off x="4480560" y="2816352"/>
+            <a:ext cx="3346704" cy="274320"/>
+          </a:xfrm>
+          <a:prstGeom prst="roundRect">
+            <a:avLst>
+              <a:gd name="adj" fmla="val 10000"/>
+            </a:avLst>
+          </a:prstGeom>
+          <a:solidFill>
+            <a:srgbClr val="FFFFFF"/>
+          </a:solidFill>
+          <a:ln w="12700">
+            <a:solidFill>
+              <a:srgbClr val="1F4E79"/>
+            </a:solidFill>
+          </a:ln>
+          <a:effectLst/>
+        </p:spPr>
+        <p:style>
+          <a:lnRef idx="1">
+            <a:schemeClr val="accent1"/>
+          </a:lnRef>
+          <a:fillRef idx="3">
+            <a:schemeClr val="accent1"/>
+          </a:fillRef>
+          <a:effectRef idx="2">
+            <a:schemeClr val="accent1"/>
+          </a:effectRef>
+          <a:fontRef idx="minor">
+            <a:schemeClr val="lt1"/>
+          </a:fontRef>
+        </p:style>
+        <p:txBody>
+          <a:bodyPr wrap="square" lIns="54864" tIns="27432" rIns="54864" bIns="27432" rtlCol="0" anchor="ctr"/>
+          <a:lstStyle/>
+          <a:p>
+            <a:pPr algn="ctr"/>
+            <a:r>
+              <a:rPr sz="850" b="0">
+                <a:solidFill>
+                  <a:srgbClr val="1F4E79"/>
+                </a:solidFill>
+                <a:latin typeface="Segoe UI"/>
+              </a:rPr>
+              <a:t>one place serves many teams at once</a:t>
+            </a:r>
+          </a:p>
+        </p:txBody>
+      </p:sp>
+      <p:sp>
+        <p:nvSpPr>
+          <p:cNvPr id="22" name="Rounded Rectangle 21"/>
+          <p:cNvSpPr/>
+          <p:nvPr/>
+        </p:nvSpPr>
+        <p:spPr>
+          <a:xfrm>
+            <a:off x="4480560" y="3154680"/>
+            <a:ext cx="3346704" cy="274320"/>
+          </a:xfrm>
+          <a:prstGeom prst="roundRect">
+            <a:avLst>
+              <a:gd name="adj" fmla="val 10000"/>
+            </a:avLst>
+          </a:prstGeom>
+          <a:solidFill>
+            <a:srgbClr val="FFFFFF"/>
+          </a:solidFill>
+          <a:ln w="12700">
+            <a:solidFill>
+              <a:srgbClr val="1F4E79"/>
+            </a:solidFill>
+          </a:ln>
+          <a:effectLst/>
+        </p:spPr>
+        <p:style>
+          <a:lnRef idx="1">
+            <a:schemeClr val="accent1"/>
+          </a:lnRef>
+          <a:fillRef idx="3">
+            <a:schemeClr val="accent1"/>
+          </a:fillRef>
+          <a:effectRef idx="2">
+            <a:schemeClr val="accent1"/>
+          </a:effectRef>
+          <a:fontRef idx="minor">
+            <a:schemeClr val="lt1"/>
+          </a:fontRef>
+        </p:style>
+        <p:txBody>
+          <a:bodyPr wrap="square" lIns="54864" tIns="27432" rIns="54864" bIns="27432" rtlCol="0" anchor="ctr"/>
+          <a:lstStyle/>
+          <a:p>
+            <a:pPr algn="ctr"/>
+            <a:r>
+              <a:rPr sz="850" b="0">
+                <a:solidFill>
+                  <a:srgbClr val="1F4E79"/>
+                </a:solidFill>
+                <a:latin typeface="Segoe UI"/>
+              </a:rPr>
+              <a:t>each team's memory stays its own</a:t>
+            </a:r>
+          </a:p>
+        </p:txBody>
+      </p:sp>
+      <p:sp>
+        <p:nvSpPr>
+          <p:cNvPr id="23" name="Rounded Rectangle 22"/>
+          <p:cNvSpPr/>
+          <p:nvPr/>
+        </p:nvSpPr>
+        <p:spPr>
+          <a:xfrm>
+            <a:off x="4480560" y="3493008"/>
+            <a:ext cx="3346704" cy="274320"/>
+          </a:xfrm>
+          <a:prstGeom prst="roundRect">
+            <a:avLst>
+              <a:gd name="adj" fmla="val 10000"/>
+            </a:avLst>
+          </a:prstGeom>
+          <a:solidFill>
+            <a:srgbClr val="FFFFFF"/>
+          </a:solidFill>
+          <a:ln w="12700">
+            <a:solidFill>
+              <a:srgbClr val="1F4E79"/>
+            </a:solidFill>
+          </a:ln>
+          <a:effectLst/>
+        </p:spPr>
+        <p:style>
+          <a:lnRef idx="1">
+            <a:schemeClr val="accent1"/>
+          </a:lnRef>
+          <a:fillRef idx="3">
+            <a:schemeClr val="accent1"/>
+          </a:fillRef>
+          <a:effectRef idx="2">
+            <a:schemeClr val="accent1"/>
+          </a:effectRef>
+          <a:fontRef idx="minor">
+            <a:schemeClr val="lt1"/>
+          </a:fontRef>
+        </p:style>
+        <p:txBody>
+          <a:bodyPr wrap="square" lIns="54864" tIns="27432" rIns="54864" bIns="27432" rtlCol="0" anchor="ctr"/>
+          <a:lstStyle/>
+          <a:p>
+            <a:pPr algn="ctr"/>
+            <a:r>
+              <a:rPr sz="850" b="0">
+                <a:solidFill>
+                  <a:srgbClr val="1F4E79"/>
+                </a:solidFill>
+                <a:latin typeface="Segoe UI"/>
+              </a:rPr>
+              <a:t>nothing to run: it is files in a folder</a:t>
+            </a:r>
+          </a:p>
+        </p:txBody>
+      </p:sp>
+      <p:sp>
+        <p:nvSpPr>
+          <p:cNvPr id="24" name="Rounded Rectangle 23"/>
+          <p:cNvSpPr/>
+          <p:nvPr/>
+        </p:nvSpPr>
+        <p:spPr>
+          <a:xfrm>
+            <a:off x="8174736" y="2340864"/>
+            <a:ext cx="3566160" cy="384048"/>
+          </a:xfrm>
+          <a:prstGeom prst="roundRect">
+            <a:avLst>
+              <a:gd name="adj" fmla="val 10000"/>
+            </a:avLst>
+          </a:prstGeom>
+          <a:solidFill>
+            <a:srgbClr val="EAE1F0"/>
+          </a:solidFill>
+          <a:ln w="12700">
+            <a:solidFill>
+              <a:srgbClr val="5B3A6E"/>
+            </a:solidFill>
+          </a:ln>
+          <a:effectLst/>
+        </p:spPr>
+        <p:style>
+          <a:lnRef idx="1">
+            <a:schemeClr val="accent1"/>
+          </a:lnRef>
+          <a:fillRef idx="3">
+            <a:schemeClr val="accent1"/>
+          </a:fillRef>
+          <a:effectRef idx="2">
+            <a:schemeClr val="accent1"/>
+          </a:effectRef>
+          <a:fontRef idx="minor">
+            <a:schemeClr val="lt1"/>
+          </a:fontRef>
+        </p:style>
+        <p:txBody>
+          <a:bodyPr wrap="square" lIns="54864" tIns="27432" rIns="54864" bIns="27432" rtlCol="0" anchor="ctr"/>
+          <a:lstStyle/>
+          <a:p>
+            <a:pPr algn="ctr"/>
+            <a:r>
+              <a:rPr sz="1150" b="1">
+                <a:solidFill>
+                  <a:srgbClr val="5B3A6E"/>
+                </a:solidFill>
+                <a:latin typeface="Segoe UI"/>
+              </a:rPr>
+              <a:t>What legal and audit get</a:t>
+            </a:r>
+          </a:p>
+        </p:txBody>
+      </p:sp>
+      <p:sp>
+        <p:nvSpPr>
+          <p:cNvPr id="25" name="Rounded Rectangle 24"/>
+          <p:cNvSpPr/>
+          <p:nvPr/>
+        </p:nvSpPr>
+        <p:spPr>
+          <a:xfrm>
+            <a:off x="8174736" y="2724912"/>
+            <a:ext cx="3566160" cy="1115568"/>
+          </a:xfrm>
+          <a:prstGeom prst="roundRect">
+            <a:avLst/>
+          </a:prstGeom>
+          <a:solidFill>
+            <a:srgbClr val="FFFFFF"/>
+          </a:solidFill>
+          <a:ln w="12700">
+            <a:solidFill>
+              <a:srgbClr val="5B3A6E"/>
+            </a:solidFill>
+          </a:ln>
+          <a:effectLst/>
+        </p:spPr>
+        <p:style>
+          <a:lnRef idx="1">
+            <a:schemeClr val="accent1"/>
+          </a:lnRef>
+          <a:fillRef idx="3">
+            <a:schemeClr val="accent1"/>
+          </a:fillRef>
+          <a:effectRef idx="2">
+            <a:schemeClr val="accent1"/>
+          </a:effectRef>
+          <a:fontRef idx="minor">
+            <a:schemeClr val="lt1"/>
+          </a:fontRef>
+        </p:style>
+        <p:txBody>
+          <a:bodyPr rtlCol="0" anchor="ctr"/>
+          <a:lstStyle/>
+          <a:p>
+            <a:pPr algn="ctr"/>
+            <a:endParaRPr/>
+          </a:p>
+        </p:txBody>
+      </p:sp>
+      <p:sp>
+        <p:nvSpPr>
+          <p:cNvPr id="26" name="Rounded Rectangle 25"/>
+          <p:cNvSpPr/>
+          <p:nvPr/>
+        </p:nvSpPr>
+        <p:spPr>
+          <a:xfrm>
+            <a:off x="8284464" y="2816352"/>
+            <a:ext cx="3346704" cy="274320"/>
+          </a:xfrm>
+          <a:prstGeom prst="roundRect">
+            <a:avLst>
+              <a:gd name="adj" fmla="val 10000"/>
+            </a:avLst>
+          </a:prstGeom>
+          <a:solidFill>
+            <a:srgbClr val="FFFFFF"/>
+          </a:solidFill>
+          <a:ln w="12700">
+            <a:solidFill>
+              <a:srgbClr val="5B3A6E"/>
+            </a:solidFill>
+          </a:ln>
+          <a:effectLst/>
+        </p:spPr>
+        <p:style>
+          <a:lnRef idx="1">
+            <a:schemeClr val="accent1"/>
+          </a:lnRef>
+          <a:fillRef idx="3">
+            <a:schemeClr val="accent1"/>
+          </a:fillRef>
+          <a:effectRef idx="2">
+            <a:schemeClr val="accent1"/>
+          </a:effectRef>
+          <a:fontRef idx="minor">
+            <a:schemeClr val="lt1"/>
+          </a:fontRef>
+        </p:style>
+        <p:txBody>
+          <a:bodyPr wrap="square" lIns="54864" tIns="27432" rIns="54864" bIns="27432" rtlCol="0" anchor="ctr"/>
+          <a:lstStyle/>
+          <a:p>
+            <a:pPr algn="ctr"/>
+            <a:r>
+              <a:rPr sz="850" b="0">
+                <a:solidFill>
+                  <a:srgbClr val="5B3A6E"/>
+                </a:solidFill>
+                <a:latin typeface="Segoe UI"/>
+              </a:rPr>
+              <a:t>passwords are blocked before sharing, not after</a:t>
+            </a:r>
+          </a:p>
+        </p:txBody>
+      </p:sp>
+      <p:sp>
+        <p:nvSpPr>
+          <p:cNvPr id="27" name="Rounded Rectangle 26"/>
+          <p:cNvSpPr/>
+          <p:nvPr/>
+        </p:nvSpPr>
+        <p:spPr>
+          <a:xfrm>
+            <a:off x="8284464" y="3154680"/>
+            <a:ext cx="3346704" cy="274320"/>
+          </a:xfrm>
+          <a:prstGeom prst="roundRect">
+            <a:avLst>
+              <a:gd name="adj" fmla="val 10000"/>
+            </a:avLst>
+          </a:prstGeom>
+          <a:solidFill>
+            <a:srgbClr val="FFFFFF"/>
+          </a:solidFill>
+          <a:ln w="12700">
+            <a:solidFill>
+              <a:srgbClr val="5B3A6E"/>
+            </a:solidFill>
+          </a:ln>
+          <a:effectLst/>
+        </p:spPr>
+        <p:style>
+          <a:lnRef idx="1">
+            <a:schemeClr val="accent1"/>
+          </a:lnRef>
+          <a:fillRef idx="3">
+            <a:schemeClr val="accent1"/>
+          </a:fillRef>
+          <a:effectRef idx="2">
+            <a:schemeClr val="accent1"/>
+          </a:effectRef>
+          <a:fontRef idx="minor">
+            <a:schemeClr val="lt1"/>
+          </a:fontRef>
+        </p:style>
+        <p:txBody>
+          <a:bodyPr wrap="square" lIns="54864" tIns="27432" rIns="54864" bIns="27432" rtlCol="0" anchor="ctr"/>
+          <a:lstStyle/>
+          <a:p>
+            <a:pPr algn="ctr"/>
+            <a:r>
+              <a:rPr sz="850" b="0">
+                <a:solidFill>
+                  <a:srgbClr val="5B3A6E"/>
+                </a:solidFill>
+                <a:latin typeface="Segoe UI"/>
+              </a:rPr>
+              <a:t>every merge is saved and can be undone</a:t>
+            </a:r>
+          </a:p>
+        </p:txBody>
+      </p:sp>
+      <p:sp>
+        <p:nvSpPr>
+          <p:cNvPr id="28" name="Rounded Rectangle 27"/>
+          <p:cNvSpPr/>
+          <p:nvPr/>
+        </p:nvSpPr>
+        <p:spPr>
+          <a:xfrm>
+            <a:off x="8284464" y="3493008"/>
+            <a:ext cx="3346704" cy="274320"/>
+          </a:xfrm>
+          <a:prstGeom prst="roundRect">
+            <a:avLst>
+              <a:gd name="adj" fmla="val 10000"/>
+            </a:avLst>
+          </a:prstGeom>
+          <a:solidFill>
+            <a:srgbClr val="FFFFFF"/>
+          </a:solidFill>
+          <a:ln w="12700">
+            <a:solidFill>
+              <a:srgbClr val="5B3A6E"/>
+            </a:solidFill>
+          </a:ln>
+          <a:effectLst/>
+        </p:spPr>
+        <p:style>
+          <a:lnRef idx="1">
+            <a:schemeClr val="accent1"/>
+          </a:lnRef>
+          <a:fillRef idx="3">
+            <a:schemeClr val="accent1"/>
+          </a:fillRef>
+          <a:effectRef idx="2">
+            <a:schemeClr val="accent1"/>
+          </a:effectRef>
+          <a:fontRef idx="minor">
+            <a:schemeClr val="lt1"/>
+          </a:fontRef>
+        </p:style>
+        <p:txBody>
+          <a:bodyPr wrap="square" lIns="54864" tIns="27432" rIns="54864" bIns="27432" rtlCol="0" anchor="ctr"/>
+          <a:lstStyle/>
+          <a:p>
+            <a:pPr algn="ctr"/>
+            <a:r>
+              <a:rPr sz="850" b="0">
+                <a:solidFill>
+                  <a:srgbClr val="5B3A6E"/>
+                </a:solidFill>
+                <a:latin typeface="Segoe UI"/>
+              </a:rPr>
+              <a:t>delete the folder and it is gone — no second copy</a:t>
+            </a:r>
+          </a:p>
+        </p:txBody>
+      </p:sp>
+      <p:sp>
+        <p:nvSpPr>
+          <p:cNvPr id="29" name="TextBox 28"/>
+          <p:cNvSpPr txBox="1"/>
+          <p:nvPr/>
+        </p:nvSpPr>
+        <p:spPr>
+          <a:xfrm>
+            <a:off x="566928" y="3950208"/>
+            <a:ext cx="2212848" cy="384048"/>
+          </a:xfrm>
+          <a:prstGeom prst="rect">
+            <a:avLst/>
+          </a:prstGeom>
+          <a:noFill/>
+        </p:spPr>
+        <p:txBody>
+          <a:bodyPr wrap="square" lIns="0" tIns="0" rIns="0" bIns="0" anchor="t">
+            <a:spAutoFit/>
+          </a:bodyPr>
+          <a:lstStyle/>
+          <a:p>
+            <a:pPr algn="ctr">
+              <a:spcAft>
+                <a:spcPts val="0"/>
+              </a:spcAft>
+            </a:pPr>
+            <a:r>
+              <a:rPr sz="2500" b="1">
+                <a:solidFill>
+                  <a:srgbClr val="1E6B52"/>
+                </a:solidFill>
+                <a:latin typeface="Segoe UI"/>
+              </a:rPr>
+              <a:t>0</a:t>
+            </a:r>
+          </a:p>
+        </p:txBody>
+      </p:sp>
+      <p:sp>
+        <p:nvSpPr>
+          <p:cNvPr id="30" name="TextBox 29"/>
+          <p:cNvSpPr txBox="1"/>
+          <p:nvPr/>
+        </p:nvSpPr>
+        <p:spPr>
+          <a:xfrm>
+            <a:off x="640080" y="4352544"/>
+            <a:ext cx="2066544" cy="384048"/>
+          </a:xfrm>
+          <a:prstGeom prst="rect">
+            <a:avLst/>
+          </a:prstGeom>
+          <a:noFill/>
+        </p:spPr>
+        <p:txBody>
+          <a:bodyPr wrap="square" lIns="0" tIns="0" rIns="0" bIns="0" anchor="t">
+            <a:spAutoFit/>
+          </a:bodyPr>
+          <a:lstStyle/>
+          <a:p>
+            <a:pPr algn="ctr">
+              <a:spcAft>
+                <a:spcPts val="0"/>
+              </a:spcAft>
+            </a:pPr>
+            <a:r>
+              <a:rPr sz="1050" b="0">
+                <a:solidFill>
+                  <a:srgbClr val="6B6B6B"/>
+                </a:solidFill>
+                <a:latin typeface="Segoe UI"/>
+              </a:rPr>
+              <a:t>bugs found by the scanner</a:t>
+            </a:r>
+          </a:p>
+        </p:txBody>
+      </p:sp>
+      <p:sp>
+        <p:nvSpPr>
+          <p:cNvPr id="31" name="TextBox 30"/>
+          <p:cNvSpPr txBox="1"/>
+          <p:nvPr/>
+        </p:nvSpPr>
+        <p:spPr>
+          <a:xfrm>
+            <a:off x="2779776" y="3950208"/>
+            <a:ext cx="2212848" cy="384048"/>
+          </a:xfrm>
+          <a:prstGeom prst="rect">
+            <a:avLst/>
+          </a:prstGeom>
+          <a:noFill/>
+        </p:spPr>
+        <p:txBody>
+          <a:bodyPr wrap="square" lIns="0" tIns="0" rIns="0" bIns="0" anchor="t">
+            <a:spAutoFit/>
+          </a:bodyPr>
+          <a:lstStyle/>
+          <a:p>
+            <a:pPr algn="ctr">
+              <a:spcAft>
+                <a:spcPts val="0"/>
+              </a:spcAft>
+            </a:pPr>
+            <a:r>
+              <a:rPr sz="2500" b="1">
+                <a:solidFill>
+                  <a:srgbClr val="1E6B52"/>
+                </a:solidFill>
+                <a:latin typeface="Segoe UI"/>
+              </a:rPr>
+              <a:t>0</a:t>
+            </a:r>
+          </a:p>
+        </p:txBody>
+      </p:sp>
+      <p:sp>
+        <p:nvSpPr>
+          <p:cNvPr id="32" name="TextBox 31"/>
+          <p:cNvSpPr txBox="1"/>
+          <p:nvPr/>
+        </p:nvSpPr>
+        <p:spPr>
+          <a:xfrm>
+            <a:off x="2852928" y="4352544"/>
+            <a:ext cx="2066544" cy="384048"/>
+          </a:xfrm>
+          <a:prstGeom prst="rect">
+            <a:avLst/>
+          </a:prstGeom>
+          <a:noFill/>
+        </p:spPr>
+        <p:txBody>
+          <a:bodyPr wrap="square" lIns="0" tIns="0" rIns="0" bIns="0" anchor="t">
+            <a:spAutoFit/>
+          </a:bodyPr>
+          <a:lstStyle/>
+          <a:p>
+            <a:pPr algn="ctr">
+              <a:spcAft>
+                <a:spcPts val="0"/>
+              </a:spcAft>
+            </a:pPr>
+            <a:r>
+              <a:rPr sz="1050" b="0">
+                <a:solidFill>
+                  <a:srgbClr val="6B6B6B"/>
+                </a:solidFill>
+                <a:latin typeface="Segoe UI"/>
+              </a:rPr>
+              <a:t>security weaknesses</a:t>
+            </a:r>
+          </a:p>
+        </p:txBody>
+      </p:sp>
+      <p:sp>
+        <p:nvSpPr>
+          <p:cNvPr id="33" name="Rectangle 32"/>
+          <p:cNvSpPr/>
+          <p:nvPr/>
+        </p:nvSpPr>
+        <p:spPr>
+          <a:xfrm>
+            <a:off x="2779776" y="3986784"/>
+            <a:ext cx="9525" cy="566928"/>
+          </a:xfrm>
+          <a:prstGeom prst="rect">
+            <a:avLst/>
+          </a:prstGeom>
+          <a:solidFill>
+            <a:srgbClr val="C9C9C9"/>
+          </a:solidFill>
+          <a:ln>
+            <a:noFill/>
+          </a:ln>
+          <a:effectLst/>
+        </p:spPr>
+        <p:style>
+          <a:lnRef idx="1">
+            <a:schemeClr val="accent1"/>
+          </a:lnRef>
+          <a:fillRef idx="3">
+            <a:schemeClr val="accent1"/>
+          </a:fillRef>
+          <a:effectRef idx="2">
+            <a:schemeClr val="accent1"/>
+          </a:effectRef>
+          <a:fontRef idx="minor">
+            <a:schemeClr val="lt1"/>
+          </a:fontRef>
+        </p:style>
+        <p:txBody>
+          <a:bodyPr rtlCol="0" anchor="ctr"/>
+          <a:lstStyle/>
+          <a:p>
+            <a:pPr algn="ctr"/>
+            <a:endParaRPr/>
+          </a:p>
+        </p:txBody>
+      </p:sp>
+      <p:sp>
+        <p:nvSpPr>
+          <p:cNvPr id="34" name="TextBox 33"/>
+          <p:cNvSpPr txBox="1"/>
+          <p:nvPr/>
+        </p:nvSpPr>
+        <p:spPr>
+          <a:xfrm>
+            <a:off x="4992624" y="3950208"/>
+            <a:ext cx="2212848" cy="384048"/>
+          </a:xfrm>
+          <a:prstGeom prst="rect">
+            <a:avLst/>
+          </a:prstGeom>
+          <a:noFill/>
+        </p:spPr>
+        <p:txBody>
+          <a:bodyPr wrap="square" lIns="0" tIns="0" rIns="0" bIns="0" anchor="t">
+            <a:spAutoFit/>
+          </a:bodyPr>
+          <a:lstStyle/>
+          <a:p>
+            <a:pPr algn="ctr">
+              <a:spcAft>
+                <a:spcPts val="0"/>
+              </a:spcAft>
+            </a:pPr>
+            <a:r>
+              <a:rPr sz="2500" b="1">
+                <a:solidFill>
+                  <a:srgbClr val="1F4E79"/>
+                </a:solidFill>
+                <a:latin typeface="Segoe UI"/>
+              </a:rPr>
+              <a:t>8,606</a:t>
+            </a:r>
+          </a:p>
+        </p:txBody>
+      </p:sp>
+      <p:sp>
+        <p:nvSpPr>
+          <p:cNvPr id="35" name="TextBox 34"/>
+          <p:cNvSpPr txBox="1"/>
+          <p:nvPr/>
+        </p:nvSpPr>
+        <p:spPr>
+          <a:xfrm>
+            <a:off x="5065776" y="4352544"/>
+            <a:ext cx="2066544" cy="384048"/>
+          </a:xfrm>
+          <a:prstGeom prst="rect">
+            <a:avLst/>
+          </a:prstGeom>
+          <a:noFill/>
+        </p:spPr>
+        <p:txBody>
+          <a:bodyPr wrap="square" lIns="0" tIns="0" rIns="0" bIns="0" anchor="t">
+            <a:spAutoFit/>
+          </a:bodyPr>
+          <a:lstStyle/>
+          <a:p>
+            <a:pPr algn="ctr">
+              <a:spcAft>
+                <a:spcPts val="0"/>
+              </a:spcAft>
+            </a:pPr>
+            <a:r>
+              <a:rPr sz="1050" b="0">
+                <a:solidFill>
+                  <a:srgbClr val="6B6B6B"/>
+                </a:solidFill>
+                <a:latin typeface="Segoe UI"/>
+              </a:rPr>
+              <a:t>tests</a:t>
+            </a:r>
+          </a:p>
+        </p:txBody>
+      </p:sp>
+      <p:sp>
+        <p:nvSpPr>
+          <p:cNvPr id="36" name="Rectangle 35"/>
+          <p:cNvSpPr/>
+          <p:nvPr/>
+        </p:nvSpPr>
+        <p:spPr>
+          <a:xfrm>
+            <a:off x="4992624" y="3986784"/>
+            <a:ext cx="9525" cy="566928"/>
+          </a:xfrm>
+          <a:prstGeom prst="rect">
+            <a:avLst/>
+          </a:prstGeom>
+          <a:solidFill>
+            <a:srgbClr val="C9C9C9"/>
+          </a:solidFill>
+          <a:ln>
+            <a:noFill/>
+          </a:ln>
+          <a:effectLst/>
+        </p:spPr>
+        <p:style>
+          <a:lnRef idx="1">
+            <a:schemeClr val="accent1"/>
+          </a:lnRef>
+          <a:fillRef idx="3">
+            <a:schemeClr val="accent1"/>
+          </a:fillRef>
+          <a:effectRef idx="2">
+            <a:schemeClr val="accent1"/>
+          </a:effectRef>
+          <a:fontRef idx="minor">
+            <a:schemeClr val="lt1"/>
+          </a:fontRef>
+        </p:style>
+        <p:txBody>
+          <a:bodyPr rtlCol="0" anchor="ctr"/>
+          <a:lstStyle/>
+          <a:p>
+            <a:pPr algn="ctr"/>
+            <a:endParaRPr/>
+          </a:p>
+        </p:txBody>
+      </p:sp>
+      <p:sp>
+        <p:nvSpPr>
+          <p:cNvPr id="37" name="TextBox 36"/>
+          <p:cNvSpPr txBox="1"/>
+          <p:nvPr/>
+        </p:nvSpPr>
+        <p:spPr>
+          <a:xfrm>
+            <a:off x="7205472" y="3950208"/>
+            <a:ext cx="2212848" cy="384048"/>
+          </a:xfrm>
+          <a:prstGeom prst="rect">
+            <a:avLst/>
+          </a:prstGeom>
+          <a:noFill/>
+        </p:spPr>
+        <p:txBody>
+          <a:bodyPr wrap="square" lIns="0" tIns="0" rIns="0" bIns="0" anchor="t">
+            <a:spAutoFit/>
+          </a:bodyPr>
+          <a:lstStyle/>
+          <a:p>
+            <a:pPr algn="ctr">
+              <a:spcAft>
+                <a:spcPts val="0"/>
+              </a:spcAft>
+            </a:pPr>
+            <a:r>
+              <a:rPr sz="2500" b="1">
+                <a:solidFill>
+                  <a:srgbClr val="1F4E79"/>
+                </a:solidFill>
+                <a:latin typeface="Segoe UI"/>
+              </a:rPr>
+              <a:t>82.8%</a:t>
+            </a:r>
+          </a:p>
+        </p:txBody>
+      </p:sp>
+      <p:sp>
+        <p:nvSpPr>
+          <p:cNvPr id="38" name="TextBox 37"/>
+          <p:cNvSpPr txBox="1"/>
+          <p:nvPr/>
+        </p:nvSpPr>
+        <p:spPr>
+          <a:xfrm>
+            <a:off x="7278624" y="4352544"/>
+            <a:ext cx="2066544" cy="384048"/>
+          </a:xfrm>
+          <a:prstGeom prst="rect">
+            <a:avLst/>
+          </a:prstGeom>
+          <a:noFill/>
+        </p:spPr>
+        <p:txBody>
+          <a:bodyPr wrap="square" lIns="0" tIns="0" rIns="0" bIns="0" anchor="t">
+            <a:spAutoFit/>
+          </a:bodyPr>
+          <a:lstStyle/>
+          <a:p>
+            <a:pPr algn="ctr">
+              <a:spcAft>
+                <a:spcPts val="0"/>
+              </a:spcAft>
+            </a:pPr>
+            <a:r>
+              <a:rPr sz="1050" b="0">
+                <a:solidFill>
+                  <a:srgbClr val="6B6B6B"/>
+                </a:solidFill>
+                <a:latin typeface="Segoe UI"/>
+              </a:rPr>
+              <a:t>of the code covered by tests</a:t>
+            </a:r>
+          </a:p>
+        </p:txBody>
+      </p:sp>
+      <p:sp>
+        <p:nvSpPr>
+          <p:cNvPr id="39" name="Rectangle 38"/>
+          <p:cNvSpPr/>
+          <p:nvPr/>
+        </p:nvSpPr>
+        <p:spPr>
+          <a:xfrm>
+            <a:off x="7205472" y="3986784"/>
+            <a:ext cx="9525" cy="566928"/>
+          </a:xfrm>
+          <a:prstGeom prst="rect">
+            <a:avLst/>
+          </a:prstGeom>
+          <a:solidFill>
+            <a:srgbClr val="C9C9C9"/>
+          </a:solidFill>
+          <a:ln>
+            <a:noFill/>
+          </a:ln>
+          <a:effectLst/>
+        </p:spPr>
+        <p:style>
+          <a:lnRef idx="1">
+            <a:schemeClr val="accent1"/>
+          </a:lnRef>
+          <a:fillRef idx="3">
+            <a:schemeClr val="accent1"/>
+          </a:fillRef>
+          <a:effectRef idx="2">
+            <a:schemeClr val="accent1"/>
+          </a:effectRef>
+          <a:fontRef idx="minor">
+            <a:schemeClr val="lt1"/>
+          </a:fontRef>
+        </p:style>
+        <p:txBody>
+          <a:bodyPr rtlCol="0" anchor="ctr"/>
+          <a:lstStyle/>
+          <a:p>
+            <a:pPr algn="ctr"/>
+            <a:endParaRPr/>
+          </a:p>
+        </p:txBody>
+      </p:sp>
+      <p:sp>
+        <p:nvSpPr>
+          <p:cNvPr id="40" name="TextBox 39"/>
+          <p:cNvSpPr txBox="1"/>
+          <p:nvPr/>
+        </p:nvSpPr>
+        <p:spPr>
+          <a:xfrm>
+            <a:off x="9418320" y="3950208"/>
+            <a:ext cx="2212848" cy="384048"/>
+          </a:xfrm>
+          <a:prstGeom prst="rect">
+            <a:avLst/>
+          </a:prstGeom>
+          <a:noFill/>
+        </p:spPr>
+        <p:txBody>
+          <a:bodyPr wrap="square" lIns="0" tIns="0" rIns="0" bIns="0" anchor="t">
+            <a:spAutoFit/>
+          </a:bodyPr>
+          <a:lstStyle/>
+          <a:p>
+            <a:pPr algn="ctr">
+              <a:spcAft>
+                <a:spcPts val="0"/>
+              </a:spcAft>
+            </a:pPr>
+            <a:r>
+              <a:rPr sz="2500" b="1">
+                <a:solidFill>
+                  <a:srgbClr val="8C2F2F"/>
+                </a:solidFill>
+                <a:latin typeface="Segoe UI"/>
+              </a:rPr>
+              <a:t>0</a:t>
+            </a:r>
+          </a:p>
+        </p:txBody>
+      </p:sp>
+      <p:sp>
+        <p:nvSpPr>
+          <p:cNvPr id="41" name="TextBox 40"/>
+          <p:cNvSpPr txBox="1"/>
+          <p:nvPr/>
+        </p:nvSpPr>
+        <p:spPr>
+          <a:xfrm>
+            <a:off x="9491472" y="4352544"/>
+            <a:ext cx="2066544" cy="384048"/>
+          </a:xfrm>
+          <a:prstGeom prst="rect">
+            <a:avLst/>
+          </a:prstGeom>
+          <a:noFill/>
+        </p:spPr>
+        <p:txBody>
+          <a:bodyPr wrap="square" lIns="0" tIns="0" rIns="0" bIns="0" anchor="t">
+            <a:spAutoFit/>
+          </a:bodyPr>
+          <a:lstStyle/>
+          <a:p>
+            <a:pPr algn="ctr">
+              <a:spcAft>
+                <a:spcPts val="0"/>
+              </a:spcAft>
+            </a:pPr>
+            <a:r>
+              <a:rPr sz="1050" b="0">
+                <a:solidFill>
+                  <a:srgbClr val="6B6B6B"/>
+                </a:solidFill>
+                <a:latin typeface="Segoe UI"/>
+              </a:rPr>
+              <a:t>of its OWN work ever scored</a:t>
+            </a:r>
+          </a:p>
+        </p:txBody>
+      </p:sp>
+      <p:sp>
+        <p:nvSpPr>
+          <p:cNvPr id="42" name="Rectangle 41"/>
+          <p:cNvSpPr/>
+          <p:nvPr/>
+        </p:nvSpPr>
+        <p:spPr>
+          <a:xfrm>
+            <a:off x="9418320" y="3986784"/>
+            <a:ext cx="9525" cy="566928"/>
+          </a:xfrm>
+          <a:prstGeom prst="rect">
+            <a:avLst/>
+          </a:prstGeom>
+          <a:solidFill>
+            <a:srgbClr val="C9C9C9"/>
+          </a:solidFill>
+          <a:ln>
+            <a:noFill/>
+          </a:ln>
+          <a:effectLst/>
+        </p:spPr>
+        <p:style>
+          <a:lnRef idx="1">
+            <a:schemeClr val="accent1"/>
+          </a:lnRef>
+          <a:fillRef idx="3">
+            <a:schemeClr val="accent1"/>
+          </a:fillRef>
+          <a:effectRef idx="2">
+            <a:schemeClr val="accent1"/>
+          </a:effectRef>
+          <a:fontRef idx="minor">
+            <a:schemeClr val="lt1"/>
+          </a:fontRef>
+        </p:style>
+        <p:txBody>
+          <a:bodyPr rtlCol="0" anchor="ctr"/>
+          <a:lstStyle/>
+          <a:p>
+            <a:pPr algn="ctr"/>
+            <a:endParaRPr/>
+          </a:p>
+        </p:txBody>
+      </p:sp>
+      <p:sp>
+        <p:nvSpPr>
+          <p:cNvPr id="43" name="Rounded Rectangle 42"/>
+          <p:cNvSpPr/>
+          <p:nvPr/>
+        </p:nvSpPr>
+        <p:spPr>
+          <a:xfrm>
+            <a:off x="566928" y="4754880"/>
+            <a:ext cx="5029200" cy="384048"/>
+          </a:xfrm>
+          <a:prstGeom prst="roundRect">
+            <a:avLst>
+              <a:gd name="adj" fmla="val 10000"/>
+            </a:avLst>
+          </a:prstGeom>
+          <a:solidFill>
+            <a:srgbClr val="F7DFDF"/>
+          </a:solidFill>
+          <a:ln w="12700">
+            <a:solidFill>
+              <a:srgbClr val="8C2F2F"/>
+            </a:solidFill>
+          </a:ln>
+          <a:effectLst/>
+        </p:spPr>
+        <p:style>
+          <a:lnRef idx="1">
+            <a:schemeClr val="accent1"/>
+          </a:lnRef>
+          <a:fillRef idx="3">
+            <a:schemeClr val="accent1"/>
+          </a:fillRef>
+          <a:effectRef idx="2">
+            <a:schemeClr val="accent1"/>
+          </a:effectRef>
+          <a:fontRef idx="minor">
+            <a:schemeClr val="lt1"/>
+          </a:fontRef>
+        </p:style>
+        <p:txBody>
+          <a:bodyPr wrap="square" lIns="54864" tIns="27432" rIns="54864" bIns="27432" rtlCol="0" anchor="ctr"/>
+          <a:lstStyle/>
+          <a:p>
+            <a:pPr algn="ctr"/>
+            <a:r>
+              <a:rPr sz="1150" b="1">
+                <a:solidFill>
+                  <a:srgbClr val="8C2F2F"/>
+                </a:solidFill>
+                <a:latin typeface="Segoe UI"/>
+              </a:rPr>
+              <a:t>What we cannot prove yet</a:t>
+            </a:r>
+          </a:p>
+        </p:txBody>
+      </p:sp>
+      <p:sp>
+        <p:nvSpPr>
+          <p:cNvPr id="44" name="Rounded Rectangle 43"/>
+          <p:cNvSpPr/>
+          <p:nvPr/>
+        </p:nvSpPr>
+        <p:spPr>
+          <a:xfrm>
+            <a:off x="566928" y="5138928"/>
+            <a:ext cx="5029200" cy="1115568"/>
+          </a:xfrm>
+          <a:prstGeom prst="roundRect">
+            <a:avLst/>
           </a:prstGeom>
           <a:solidFill>
             <a:srgbClr val="FFFFFF"/>
@@ -9604,32 +11486,24 @@
           </a:fontRef>
         </p:style>
         <p:txBody>
-          <a:bodyPr rtlCol="0" anchor="ctr" wrap="square" lIns="54864" rIns="54864" tIns="27432" bIns="27432"/>
+          <a:bodyPr rtlCol="0" anchor="ctr"/>
           <a:lstStyle/>
           <a:p>
             <a:pPr algn="ctr"/>
-            <a:r>
-              <a:rPr sz="850" b="0">
-                <a:solidFill>
-                  <a:srgbClr val="8C2F2F"/>
-                </a:solidFill>
-                <a:latin typeface="Segoe UI"/>
-              </a:rPr>
-              <a:t>a notebook cell shares the guard's own memory — it is a guard, not a sealed box</a:t>
-            </a:r>
-          </a:p>
-        </p:txBody>
-      </p:sp>
-      <p:sp>
-        <p:nvSpPr>
-          <p:cNvPr id="54" name="Rounded Rectangle 53"/>
+            <a:endParaRPr/>
+          </a:p>
+        </p:txBody>
+      </p:sp>
+      <p:sp>
+        <p:nvSpPr>
+          <p:cNvPr id="45" name="Rounded Rectangle 44"/>
           <p:cNvSpPr/>
           <p:nvPr/>
         </p:nvSpPr>
         <p:spPr>
           <a:xfrm>
-            <a:off x="6236208" y="5431536"/>
-            <a:ext cx="5413248" cy="274320"/>
+            <a:off x="676656" y="5230368"/>
+            <a:ext cx="4809744" cy="274320"/>
           </a:xfrm>
           <a:prstGeom prst="roundRect">
             <a:avLst>
@@ -9661,7 +11535,7 @@
           </a:fontRef>
         </p:style>
         <p:txBody>
-          <a:bodyPr rtlCol="0" anchor="ctr" wrap="square" lIns="54864" rIns="54864" tIns="27432" bIns="27432"/>
+          <a:bodyPr wrap="square" lIns="54864" tIns="27432" rIns="54864" bIns="27432" rtlCol="0" anchor="ctr"/>
           <a:lstStyle/>
           <a:p>
             <a:pPr algn="ctr"/>
@@ -9672,21 +11546,21 @@
                 </a:solidFill>
                 <a:latin typeface="Segoe UI"/>
               </a:rPr>
-              <a:t>a shell can still open a connection the gate never sees</a:t>
-            </a:r>
-          </a:p>
-        </p:txBody>
-      </p:sp>
-      <p:sp>
-        <p:nvSpPr>
-          <p:cNvPr id="55" name="Rounded Rectangle 54"/>
+              <a:t>no set of old tickets is replayed to score its work</a:t>
+            </a:r>
+          </a:p>
+        </p:txBody>
+      </p:sp>
+      <p:sp>
+        <p:nvSpPr>
+          <p:cNvPr id="46" name="Rounded Rectangle 45"/>
           <p:cNvSpPr/>
           <p:nvPr/>
         </p:nvSpPr>
         <p:spPr>
           <a:xfrm>
-            <a:off x="566928" y="5760720"/>
-            <a:ext cx="5413248" cy="274320"/>
+            <a:off x="676656" y="5568696"/>
+            <a:ext cx="4809744" cy="274320"/>
           </a:xfrm>
           <a:prstGeom prst="roundRect">
             <a:avLst>
@@ -9718,7 +11592,7 @@
           </a:fontRef>
         </p:style>
         <p:txBody>
-          <a:bodyPr rtlCol="0" anchor="ctr" wrap="square" lIns="54864" rIns="54864" tIns="27432" bIns="27432"/>
+          <a:bodyPr wrap="square" lIns="54864" tIns="27432" rIns="54864" bIns="27432" rtlCol="0" anchor="ctr"/>
           <a:lstStyle/>
           <a:p>
             <a:pPr algn="ctr"/>
@@ -9729,21 +11603,21 @@
                 </a:solidFill>
                 <a:latin typeface="Segoe UI"/>
               </a:rPr>
-              <a:t>sharing memory between machines is open until you lock it down</a:t>
-            </a:r>
-          </a:p>
-        </p:txBody>
-      </p:sp>
-      <p:sp>
-        <p:nvSpPr>
-          <p:cNvPr id="56" name="Rounded Rectangle 55"/>
+              <a:t>no record of how often a person rewrites what it wrote</a:t>
+            </a:r>
+          </a:p>
+        </p:txBody>
+      </p:sp>
+      <p:sp>
+        <p:nvSpPr>
+          <p:cNvPr id="47" name="Rounded Rectangle 46"/>
           <p:cNvSpPr/>
           <p:nvPr/>
         </p:nvSpPr>
         <p:spPr>
           <a:xfrm>
-            <a:off x="6236208" y="5760720"/>
-            <a:ext cx="5413248" cy="274320"/>
+            <a:off x="676656" y="5907024"/>
+            <a:ext cx="4809744" cy="274320"/>
           </a:xfrm>
           <a:prstGeom prst="roundRect">
             <a:avLst>
@@ -9775,7 +11649,7 @@
           </a:fontRef>
         </p:style>
         <p:txBody>
-          <a:bodyPr rtlCol="0" anchor="ctr" wrap="square" lIns="54864" rIns="54864" tIns="27432" bIns="27432"/>
+          <a:bodyPr wrap="square" lIns="54864" tIns="27432" rIns="54864" bIns="27432" rtlCol="0" anchor="ctr"/>
           <a:lstStyle/>
           <a:p>
             <a:pPr algn="ctr"/>
@@ -9786,590 +11660,21 @@
                 </a:solidFill>
                 <a:latin typeface="Segoe UI"/>
               </a:rPr>
-              <a:t>if a specialist's tool list has a typo, the specialist still runs</a:t>
-            </a:r>
-          </a:p>
-        </p:txBody>
-      </p:sp>
-    </p:spTree>
-  </p:cSld>
-  <p:clrMapOvr>
-    <a:masterClrMapping/>
-  </p:clrMapOvr>
-</p:sld>
-</file>
-
-<file path=ppt/slides/slide3.xml><?xml version="1.0" encoding="utf-8"?>
-<p:sld xmlns:a="http://schemas.openxmlformats.org/drawingml/2006/main" xmlns:p="http://schemas.openxmlformats.org/presentationml/2006/main" xmlns:r="http://schemas.openxmlformats.org/officeDocument/2006/relationships">
-  <p:cSld>
-    <p:spTree>
-      <p:nvGrpSpPr>
-        <p:cNvPr id="1" name=""/>
-        <p:cNvGrpSpPr/>
-        <p:nvPr/>
-      </p:nvGrpSpPr>
-      <p:grpSpPr/>
-      <p:sp>
-        <p:nvSpPr>
-          <p:cNvPr id="2" name="TextBox 1"/>
-          <p:cNvSpPr txBox="1"/>
-          <p:nvPr/>
-        </p:nvSpPr>
-        <p:spPr>
-          <a:xfrm>
-            <a:off x="548640" y="310896"/>
-            <a:ext cx="11155680" cy="457200"/>
-          </a:xfrm>
-          <a:prstGeom prst="rect">
-            <a:avLst/>
-          </a:prstGeom>
-          <a:noFill/>
-        </p:spPr>
-        <p:txBody>
-          <a:bodyPr wrap="square" anchor="t" lIns="0" rIns="0" tIns="0" bIns="0">
-            <a:spAutoFit/>
-          </a:bodyPr>
-          <a:lstStyle/>
-          <a:p>
-            <a:pPr algn="l">
-              <a:spcAft>
-                <a:spcPts val="0"/>
-              </a:spcAft>
-            </a:pPr>
-            <a:r>
-              <a:rPr sz="2700" b="1">
-                <a:solidFill>
-                  <a:srgbClr val="1A1A1A"/>
-                </a:solidFill>
-                <a:latin typeface="Segoe UI"/>
-              </a:rPr>
-              <a:t>What one person learns, the whole company keeps</a:t>
-            </a:r>
-          </a:p>
-        </p:txBody>
-      </p:sp>
-      <p:sp>
-        <p:nvSpPr>
-          <p:cNvPr id="3" name="TextBox 2"/>
-          <p:cNvSpPr txBox="1"/>
-          <p:nvPr/>
-        </p:nvSpPr>
-        <p:spPr>
-          <a:xfrm>
-            <a:off x="548640" y="841248"/>
-            <a:ext cx="11155680" cy="292608"/>
-          </a:xfrm>
-          <a:prstGeom prst="rect">
-            <a:avLst/>
-          </a:prstGeom>
-          <a:noFill/>
-        </p:spPr>
-        <p:txBody>
-          <a:bodyPr wrap="square" anchor="t" lIns="0" rIns="0" tIns="0" bIns="0">
-            <a:spAutoFit/>
-          </a:bodyPr>
-          <a:lstStyle/>
-          <a:p>
-            <a:pPr algn="l">
-              <a:spcAft>
-                <a:spcPts val="0"/>
-              </a:spcAft>
-            </a:pPr>
-            <a:r>
-              <a:rPr sz="1250" b="0">
-                <a:solidFill>
-                  <a:srgbClr val="6B6B6B"/>
-                </a:solidFill>
-                <a:latin typeface="Segoe UI"/>
-              </a:rPr>
-              <a:t>Each machine learns on its own. Secrets are stripped, a team lead merges the rest, and other teams read it.</a:t>
-            </a:r>
-          </a:p>
-        </p:txBody>
-      </p:sp>
-      <p:sp>
-        <p:nvSpPr>
-          <p:cNvPr id="4" name="Rectangle 3"/>
+              <a:t>never load-tested, so no honest users-per-machine number</a:t>
+            </a:r>
+          </a:p>
+        </p:txBody>
+      </p:sp>
+      <p:sp>
+        <p:nvSpPr>
+          <p:cNvPr id="48" name="Rounded Rectangle 47"/>
           <p:cNvSpPr/>
           <p:nvPr/>
         </p:nvSpPr>
         <p:spPr>
           <a:xfrm>
-            <a:off x="548640" y="1170432"/>
-            <a:ext cx="11091672" cy="9525"/>
-          </a:xfrm>
-          <a:prstGeom prst="rect">
-            <a:avLst/>
-          </a:prstGeom>
-          <a:solidFill>
-            <a:srgbClr val="C9C9C9"/>
-          </a:solidFill>
-          <a:ln>
-            <a:noFill/>
-          </a:ln>
-          <a:effectLst/>
-        </p:spPr>
-        <p:style>
-          <a:lnRef idx="1">
-            <a:schemeClr val="accent1"/>
-          </a:lnRef>
-          <a:fillRef idx="3">
-            <a:schemeClr val="accent1"/>
-          </a:fillRef>
-          <a:effectRef idx="2">
-            <a:schemeClr val="accent1"/>
-          </a:effectRef>
-          <a:fontRef idx="minor">
-            <a:schemeClr val="lt1"/>
-          </a:fontRef>
-        </p:style>
-        <p:txBody>
-          <a:bodyPr rtlCol="0" anchor="ctr"/>
-          <a:lstStyle/>
-          <a:p>
-            <a:pPr algn="ctr"/>
-          </a:p>
-        </p:txBody>
-      </p:sp>
-      <p:sp>
-        <p:nvSpPr>
-          <p:cNvPr id="5" name="TextBox 4"/>
-          <p:cNvSpPr txBox="1"/>
-          <p:nvPr/>
-        </p:nvSpPr>
-        <p:spPr>
-          <a:xfrm>
-            <a:off x="548640" y="6327648"/>
-            <a:ext cx="9692640" cy="320040"/>
-          </a:xfrm>
-          <a:prstGeom prst="rect">
-            <a:avLst/>
-          </a:prstGeom>
-          <a:noFill/>
-        </p:spPr>
-        <p:txBody>
-          <a:bodyPr wrap="square" anchor="t" lIns="0" rIns="0" tIns="0" bIns="0">
-            <a:spAutoFit/>
-          </a:bodyPr>
-          <a:lstStyle/>
-          <a:p>
-            <a:pPr algn="l">
-              <a:spcAft>
-                <a:spcPts val="0"/>
-              </a:spcAft>
-            </a:pPr>
-            <a:r>
-              <a:rPr sz="950" b="0">
-                <a:solidFill>
-                  <a:srgbClr val="6B6B6B"/>
-                </a:solidFill>
-                <a:latin typeface="Segoe UI"/>
-              </a:rPr>
-              <a:t>Measured on main @ 7d9e60ae, 2026-09-06. It is a folder of text files and one small SQLite file — you can read it, search it, copy it to another machine, or delete it.</a:t>
-            </a:r>
-          </a:p>
-        </p:txBody>
-      </p:sp>
-      <p:sp>
-        <p:nvSpPr>
-          <p:cNvPr id="6" name="TextBox 5"/>
-          <p:cNvSpPr txBox="1"/>
-          <p:nvPr/>
-        </p:nvSpPr>
-        <p:spPr>
-          <a:xfrm>
-            <a:off x="11018520" y="6327648"/>
-            <a:ext cx="640080" cy="274320"/>
-          </a:xfrm>
-          <a:prstGeom prst="rect">
-            <a:avLst/>
-          </a:prstGeom>
-          <a:noFill/>
-        </p:spPr>
-        <p:txBody>
-          <a:bodyPr wrap="square" anchor="t" lIns="0" rIns="0" tIns="0" bIns="0">
-            <a:spAutoFit/>
-          </a:bodyPr>
-          <a:lstStyle/>
-          <a:p>
-            <a:pPr algn="r">
-              <a:spcAft>
-                <a:spcPts val="0"/>
-              </a:spcAft>
-            </a:pPr>
-            <a:r>
-              <a:rPr sz="950" b="0">
-                <a:solidFill>
-                  <a:srgbClr val="6B6B6B"/>
-                </a:solidFill>
-                <a:latin typeface="Segoe UI"/>
-              </a:rPr>
-              <a:t>3</a:t>
-            </a:r>
-          </a:p>
-        </p:txBody>
-      </p:sp>
-      <p:sp>
-        <p:nvSpPr>
-          <p:cNvPr id="7" name="Rounded Rectangle 6"/>
-          <p:cNvSpPr/>
-          <p:nvPr/>
-        </p:nvSpPr>
-        <p:spPr>
-          <a:xfrm>
-            <a:off x="566928" y="1316736"/>
-            <a:ext cx="2487168" cy="914400"/>
-          </a:xfrm>
-          <a:prstGeom prst="roundRect">
-            <a:avLst>
-              <a:gd name="adj" fmla="val 10000"/>
-            </a:avLst>
-          </a:prstGeom>
-          <a:solidFill>
-            <a:srgbClr val="ECECEC"/>
-          </a:solidFill>
-          <a:ln w="12700">
-            <a:solidFill>
-              <a:srgbClr val="3A3A3A"/>
-            </a:solidFill>
-          </a:ln>
-          <a:effectLst/>
-        </p:spPr>
-        <p:style>
-          <a:lnRef idx="1">
-            <a:schemeClr val="accent1"/>
-          </a:lnRef>
-          <a:fillRef idx="3">
-            <a:schemeClr val="accent1"/>
-          </a:fillRef>
-          <a:effectRef idx="2">
-            <a:schemeClr val="accent1"/>
-          </a:effectRef>
-          <a:fontRef idx="minor">
-            <a:schemeClr val="lt1"/>
-          </a:fontRef>
-        </p:style>
-        <p:txBody>
-          <a:bodyPr rtlCol="0" anchor="ctr" wrap="square" lIns="54864" rIns="54864" tIns="27432" bIns="27432"/>
-          <a:lstStyle/>
-          <a:p>
-            <a:pPr algn="ctr"/>
-            <a:r>
-              <a:rPr sz="1250" b="1">
-                <a:solidFill>
-                  <a:srgbClr val="3A3A3A"/>
-                </a:solidFill>
-                <a:latin typeface="Segoe UI"/>
-              </a:rPr>
-              <a:t>One machine</a:t>
-            </a:r>
-          </a:p>
-          <a:p>
-            <a:pPr algn="ctr"/>
-            <a:r>
-              <a:rPr sz="850" b="0">
-                <a:solidFill>
-                  <a:srgbClr val="1A1A1A"/>
-                </a:solidFill>
-                <a:latin typeface="Segoe UI"/>
-              </a:rPr>
-              <a:t>learns from every run</a:t>
-            </a:r>
-          </a:p>
-          <a:p>
-            <a:pPr algn="ctr"/>
-            <a:r>
-              <a:rPr sz="850" b="0">
-                <a:solidFill>
-                  <a:srgbClr val="1A1A1A"/>
-                </a:solidFill>
-                <a:latin typeface="Segoe UI"/>
-              </a:rPr>
-              <a:t>nothing raw ever leaves</a:t>
-            </a:r>
-          </a:p>
-        </p:txBody>
-      </p:sp>
-      <p:cxnSp>
-        <p:nvCxnSpPr>
-          <p:cNvPr id="8" name="Connector 7"/>
-          <p:cNvCxnSpPr/>
-          <p:nvPr/>
-        </p:nvCxnSpPr>
-        <p:spPr>
-          <a:xfrm>
-            <a:off x="3054096" y="1773936"/>
-            <a:ext cx="384048" cy="0"/>
-          </a:xfrm>
-          <a:prstGeom prst="line">
-            <a:avLst/>
-          </a:prstGeom>
-          <a:ln w="19050">
-            <a:solidFill>
-              <a:srgbClr val="C9C9C9"/>
-            </a:solidFill>
-            <a:tailEnd type="triangle" w="med" len="med"/>
-          </a:ln>
-        </p:spPr>
-        <p:style>
-          <a:lnRef idx="2">
-            <a:schemeClr val="accent1"/>
-          </a:lnRef>
-          <a:fillRef idx="0">
-            <a:schemeClr val="accent1"/>
-          </a:fillRef>
-          <a:effectRef idx="1">
-            <a:schemeClr val="accent1"/>
-          </a:effectRef>
-          <a:fontRef idx="minor">
-            <a:schemeClr val="tx1"/>
-          </a:fontRef>
-        </p:style>
-      </p:cxnSp>
-      <p:sp>
-        <p:nvSpPr>
-          <p:cNvPr id="9" name="Rounded Rectangle 8"/>
-          <p:cNvSpPr/>
-          <p:nvPr/>
-        </p:nvSpPr>
-        <p:spPr>
-          <a:xfrm>
-            <a:off x="3438144" y="1316736"/>
-            <a:ext cx="2487168" cy="914400"/>
-          </a:xfrm>
-          <a:prstGeom prst="roundRect">
-            <a:avLst>
-              <a:gd name="adj" fmla="val 10000"/>
-            </a:avLst>
-          </a:prstGeom>
-          <a:solidFill>
-            <a:srgbClr val="F7ECD5"/>
-          </a:solidFill>
-          <a:ln w="12700">
-            <a:solidFill>
-              <a:srgbClr val="8A5A00"/>
-            </a:solidFill>
-          </a:ln>
-          <a:effectLst/>
-        </p:spPr>
-        <p:style>
-          <a:lnRef idx="1">
-            <a:schemeClr val="accent1"/>
-          </a:lnRef>
-          <a:fillRef idx="3">
-            <a:schemeClr val="accent1"/>
-          </a:fillRef>
-          <a:effectRef idx="2">
-            <a:schemeClr val="accent1"/>
-          </a:effectRef>
-          <a:fontRef idx="minor">
-            <a:schemeClr val="lt1"/>
-          </a:fontRef>
-        </p:style>
-        <p:txBody>
-          <a:bodyPr rtlCol="0" anchor="ctr" wrap="square" lIns="54864" rIns="54864" tIns="27432" bIns="27432"/>
-          <a:lstStyle/>
-          <a:p>
-            <a:pPr algn="ctr"/>
-            <a:r>
-              <a:rPr sz="1250" b="1">
-                <a:solidFill>
-                  <a:srgbClr val="8A5A00"/>
-                </a:solidFill>
-                <a:latin typeface="Segoe UI"/>
-              </a:rPr>
-              <a:t>Secrets stripped</a:t>
-            </a:r>
-          </a:p>
-          <a:p>
-            <a:pPr algn="ctr"/>
-            <a:r>
-              <a:rPr sz="850" b="0">
-                <a:solidFill>
-                  <a:srgbClr val="1A1A1A"/>
-                </a:solidFill>
-                <a:latin typeface="Segoe UI"/>
-              </a:rPr>
-              <a:t>passwords and private notes</a:t>
-            </a:r>
-          </a:p>
-          <a:p>
-            <a:pPr algn="ctr"/>
-            <a:r>
-              <a:rPr sz="850" b="0">
-                <a:solidFill>
-                  <a:srgbClr val="1A1A1A"/>
-                </a:solidFill>
-                <a:latin typeface="Segoe UI"/>
-              </a:rPr>
-              <a:t>are blocked, not edited</a:t>
-            </a:r>
-          </a:p>
-        </p:txBody>
-      </p:sp>
-      <p:cxnSp>
-        <p:nvCxnSpPr>
-          <p:cNvPr id="10" name="Connector 9"/>
-          <p:cNvCxnSpPr/>
-          <p:nvPr/>
-        </p:nvCxnSpPr>
-        <p:spPr>
-          <a:xfrm>
-            <a:off x="5925312" y="1773936"/>
-            <a:ext cx="384048" cy="0"/>
-          </a:xfrm>
-          <a:prstGeom prst="line">
-            <a:avLst/>
-          </a:prstGeom>
-          <a:ln w="19050">
-            <a:solidFill>
-              <a:srgbClr val="C9C9C9"/>
-            </a:solidFill>
-            <a:tailEnd type="triangle" w="med" len="med"/>
-          </a:ln>
-        </p:spPr>
-        <p:style>
-          <a:lnRef idx="2">
-            <a:schemeClr val="accent1"/>
-          </a:lnRef>
-          <a:fillRef idx="0">
-            <a:schemeClr val="accent1"/>
-          </a:fillRef>
-          <a:effectRef idx="1">
-            <a:schemeClr val="accent1"/>
-          </a:effectRef>
-          <a:fontRef idx="minor">
-            <a:schemeClr val="tx1"/>
-          </a:fontRef>
-        </p:style>
-      </p:cxnSp>
-      <p:sp>
-        <p:nvSpPr>
-          <p:cNvPr id="11" name="Rounded Rectangle 10"/>
-          <p:cNvSpPr/>
-          <p:nvPr/>
-        </p:nvSpPr>
-        <p:spPr>
-          <a:xfrm>
-            <a:off x="6309360" y="1316736"/>
-            <a:ext cx="2487168" cy="914400"/>
-          </a:xfrm>
-          <a:prstGeom prst="roundRect">
-            <a:avLst>
-              <a:gd name="adj" fmla="val 10000"/>
-            </a:avLst>
-          </a:prstGeom>
-          <a:solidFill>
-            <a:srgbClr val="DCEEE7"/>
-          </a:solidFill>
-          <a:ln w="12700">
-            <a:solidFill>
-              <a:srgbClr val="1E6B52"/>
-            </a:solidFill>
-          </a:ln>
-          <a:effectLst/>
-        </p:spPr>
-        <p:style>
-          <a:lnRef idx="1">
-            <a:schemeClr val="accent1"/>
-          </a:lnRef>
-          <a:fillRef idx="3">
-            <a:schemeClr val="accent1"/>
-          </a:fillRef>
-          <a:effectRef idx="2">
-            <a:schemeClr val="accent1"/>
-          </a:effectRef>
-          <a:fontRef idx="minor">
-            <a:schemeClr val="lt1"/>
-          </a:fontRef>
-        </p:style>
-        <p:txBody>
-          <a:bodyPr rtlCol="0" anchor="ctr" wrap="square" lIns="54864" rIns="54864" tIns="27432" bIns="27432"/>
-          <a:lstStyle/>
-          <a:p>
-            <a:pPr algn="ctr"/>
-            <a:r>
-              <a:rPr sz="1250" b="1">
-                <a:solidFill>
-                  <a:srgbClr val="1E6B52"/>
-                </a:solidFill>
-                <a:latin typeface="Segoe UI"/>
-              </a:rPr>
-              <a:t>Your team</a:t>
-            </a:r>
-          </a:p>
-          <a:p>
-            <a:pPr algn="ctr"/>
-            <a:r>
-              <a:rPr sz="850" b="0">
-                <a:solidFill>
-                  <a:srgbClr val="1A1A1A"/>
-                </a:solidFill>
-                <a:latin typeface="Segoe UI"/>
-              </a:rPr>
-              <a:t>one lead merges it</a:t>
-            </a:r>
-          </a:p>
-          <a:p>
-            <a:pPr algn="ctr"/>
-            <a:r>
-              <a:rPr sz="850" b="0">
-                <a:solidFill>
-                  <a:srgbClr val="1A1A1A"/>
-                </a:solidFill>
-                <a:latin typeface="Segoe UI"/>
-              </a:rPr>
-              <a:t>into the team's memory</a:t>
-            </a:r>
-          </a:p>
-        </p:txBody>
-      </p:sp>
-      <p:cxnSp>
-        <p:nvCxnSpPr>
-          <p:cNvPr id="12" name="Connector 11"/>
-          <p:cNvCxnSpPr/>
-          <p:nvPr/>
-        </p:nvCxnSpPr>
-        <p:spPr>
-          <a:xfrm>
-            <a:off x="8796528" y="1773936"/>
-            <a:ext cx="384048" cy="0"/>
-          </a:xfrm>
-          <a:prstGeom prst="line">
-            <a:avLst/>
-          </a:prstGeom>
-          <a:ln w="19050">
-            <a:solidFill>
-              <a:srgbClr val="C9C9C9"/>
-            </a:solidFill>
-            <a:tailEnd type="triangle" w="med" len="med"/>
-          </a:ln>
-        </p:spPr>
-        <p:style>
-          <a:lnRef idx="2">
-            <a:schemeClr val="accent1"/>
-          </a:lnRef>
-          <a:fillRef idx="0">
-            <a:schemeClr val="accent1"/>
-          </a:fillRef>
-          <a:effectRef idx="1">
-            <a:schemeClr val="accent1"/>
-          </a:effectRef>
-          <a:fontRef idx="minor">
-            <a:schemeClr val="tx1"/>
-          </a:fontRef>
-        </p:style>
-      </p:cxnSp>
-      <p:sp>
-        <p:nvSpPr>
-          <p:cNvPr id="13" name="Rounded Rectangle 12"/>
-          <p:cNvSpPr/>
-          <p:nvPr/>
-        </p:nvSpPr>
-        <p:spPr>
-          <a:xfrm>
-            <a:off x="9180576" y="1316736"/>
-            <a:ext cx="2487168" cy="914400"/>
+            <a:off x="5779008" y="4754880"/>
+            <a:ext cx="5852160" cy="384048"/>
           </a:xfrm>
           <a:prstGeom prst="roundRect">
             <a:avLst>
@@ -10401,387 +11706,32 @@
           </a:fontRef>
         </p:style>
         <p:txBody>
-          <a:bodyPr rtlCol="0" anchor="ctr" wrap="square" lIns="54864" rIns="54864" tIns="27432" bIns="27432"/>
+          <a:bodyPr wrap="square" lIns="54864" tIns="27432" rIns="54864" bIns="27432" rtlCol="0" anchor="ctr"/>
           <a:lstStyle/>
           <a:p>
             <a:pPr algn="ctr"/>
             <a:r>
-              <a:rPr sz="1250" b="1">
+              <a:rPr sz="1150" b="1">
                 <a:solidFill>
                   <a:srgbClr val="1F4E79"/>
                 </a:solidFill>
                 <a:latin typeface="Segoe UI"/>
               </a:rPr>
-              <a:t>The company</a:t>
-            </a:r>
-          </a:p>
-          <a:p>
-            <a:pPr algn="ctr"/>
-            <a:r>
-              <a:rPr sz="850" b="0">
-                <a:solidFill>
-                  <a:srgbClr val="1A1A1A"/>
-                </a:solidFill>
-                <a:latin typeface="Segoe UI"/>
-              </a:rPr>
-              <a:t>other teams read it</a:t>
-            </a:r>
-          </a:p>
-          <a:p>
-            <a:pPr algn="ctr"/>
-            <a:r>
-              <a:rPr sz="850" b="0">
-                <a:solidFill>
-                  <a:srgbClr val="1A1A1A"/>
-                </a:solidFill>
-                <a:latin typeface="Segoe UI"/>
-              </a:rPr>
-              <a:t>teams stay separate</a:t>
-            </a:r>
-          </a:p>
-        </p:txBody>
-      </p:sp>
-      <p:sp>
-        <p:nvSpPr>
-          <p:cNvPr id="14" name="Rounded Rectangle 13"/>
+              <a:t>What we need you to decide</a:t>
+            </a:r>
+          </a:p>
+        </p:txBody>
+      </p:sp>
+      <p:sp>
+        <p:nvSpPr>
+          <p:cNvPr id="49" name="Rounded Rectangle 48"/>
           <p:cNvSpPr/>
           <p:nvPr/>
         </p:nvSpPr>
         <p:spPr>
           <a:xfrm>
-            <a:off x="566928" y="2340864"/>
-            <a:ext cx="3566160" cy="384048"/>
-          </a:xfrm>
-          <a:prstGeom prst="roundRect">
-            <a:avLst>
-              <a:gd name="adj" fmla="val 10000"/>
-            </a:avLst>
-          </a:prstGeom>
-          <a:solidFill>
-            <a:srgbClr val="DCEEE7"/>
-          </a:solidFill>
-          <a:ln w="12700">
-            <a:solidFill>
-              <a:srgbClr val="1E6B52"/>
-            </a:solidFill>
-          </a:ln>
-          <a:effectLst/>
-        </p:spPr>
-        <p:style>
-          <a:lnRef idx="1">
-            <a:schemeClr val="accent1"/>
-          </a:lnRef>
-          <a:fillRef idx="3">
-            <a:schemeClr val="accent1"/>
-          </a:fillRef>
-          <a:effectRef idx="2">
-            <a:schemeClr val="accent1"/>
-          </a:effectRef>
-          <a:fontRef idx="minor">
-            <a:schemeClr val="lt1"/>
-          </a:fontRef>
-        </p:style>
-        <p:txBody>
-          <a:bodyPr rtlCol="0" anchor="ctr" wrap="square" lIns="54864" rIns="54864" tIns="27432" bIns="27432"/>
-          <a:lstStyle/>
-          <a:p>
-            <a:pPr algn="ctr"/>
-            <a:r>
-              <a:rPr sz="1150" b="1">
-                <a:solidFill>
-                  <a:srgbClr val="1E6B52"/>
-                </a:solidFill>
-                <a:latin typeface="Segoe UI"/>
-              </a:rPr>
-              <a:t>What your team gets</a:t>
-            </a:r>
-          </a:p>
-        </p:txBody>
-      </p:sp>
-      <p:sp>
-        <p:nvSpPr>
-          <p:cNvPr id="15" name="Rounded Rectangle 14"/>
-          <p:cNvSpPr/>
-          <p:nvPr/>
-        </p:nvSpPr>
-        <p:spPr>
-          <a:xfrm>
-            <a:off x="566928" y="2724912"/>
-            <a:ext cx="3566160" cy="1115568"/>
-          </a:xfrm>
-          <a:prstGeom prst="roundRect">
-            <a:avLst/>
-          </a:prstGeom>
-          <a:solidFill>
-            <a:srgbClr val="FFFFFF"/>
-          </a:solidFill>
-          <a:ln w="12700">
-            <a:solidFill>
-              <a:srgbClr val="1E6B52"/>
-            </a:solidFill>
-          </a:ln>
-          <a:effectLst/>
-        </p:spPr>
-        <p:style>
-          <a:lnRef idx="1">
-            <a:schemeClr val="accent1"/>
-          </a:lnRef>
-          <a:fillRef idx="3">
-            <a:schemeClr val="accent1"/>
-          </a:fillRef>
-          <a:effectRef idx="2">
-            <a:schemeClr val="accent1"/>
-          </a:effectRef>
-          <a:fontRef idx="minor">
-            <a:schemeClr val="lt1"/>
-          </a:fontRef>
-        </p:style>
-        <p:txBody>
-          <a:bodyPr rtlCol="0" anchor="ctr"/>
-          <a:lstStyle/>
-          <a:p>
-            <a:pPr algn="ctr"/>
-          </a:p>
-        </p:txBody>
-      </p:sp>
-      <p:sp>
-        <p:nvSpPr>
-          <p:cNvPr id="16" name="Rounded Rectangle 15"/>
-          <p:cNvSpPr/>
-          <p:nvPr/>
-        </p:nvSpPr>
-        <p:spPr>
-          <a:xfrm>
-            <a:off x="676656" y="2816352"/>
-            <a:ext cx="3346704" cy="274320"/>
-          </a:xfrm>
-          <a:prstGeom prst="roundRect">
-            <a:avLst>
-              <a:gd name="adj" fmla="val 10000"/>
-            </a:avLst>
-          </a:prstGeom>
-          <a:solidFill>
-            <a:srgbClr val="FFFFFF"/>
-          </a:solidFill>
-          <a:ln w="12700">
-            <a:solidFill>
-              <a:srgbClr val="1E6B52"/>
-            </a:solidFill>
-          </a:ln>
-          <a:effectLst/>
-        </p:spPr>
-        <p:style>
-          <a:lnRef idx="1">
-            <a:schemeClr val="accent1"/>
-          </a:lnRef>
-          <a:fillRef idx="3">
-            <a:schemeClr val="accent1"/>
-          </a:fillRef>
-          <a:effectRef idx="2">
-            <a:schemeClr val="accent1"/>
-          </a:effectRef>
-          <a:fontRef idx="minor">
-            <a:schemeClr val="lt1"/>
-          </a:fontRef>
-        </p:style>
-        <p:txBody>
-          <a:bodyPr rtlCol="0" anchor="ctr" wrap="square" lIns="54864" rIns="54864" tIns="27432" bIns="27432"/>
-          <a:lstStyle/>
-          <a:p>
-            <a:pPr algn="ctr"/>
-            <a:r>
-              <a:rPr sz="850" b="0">
-                <a:solidFill>
-                  <a:srgbClr val="1E6B52"/>
-                </a:solidFill>
-                <a:latin typeface="Segoe UI"/>
-              </a:rPr>
-              <a:t>a fix found once is known by everyone tomorrow</a:t>
-            </a:r>
-          </a:p>
-        </p:txBody>
-      </p:sp>
-      <p:sp>
-        <p:nvSpPr>
-          <p:cNvPr id="17" name="Rounded Rectangle 16"/>
-          <p:cNvSpPr/>
-          <p:nvPr/>
-        </p:nvSpPr>
-        <p:spPr>
-          <a:xfrm>
-            <a:off x="676656" y="3154680"/>
-            <a:ext cx="3346704" cy="274320"/>
-          </a:xfrm>
-          <a:prstGeom prst="roundRect">
-            <a:avLst>
-              <a:gd name="adj" fmla="val 10000"/>
-            </a:avLst>
-          </a:prstGeom>
-          <a:solidFill>
-            <a:srgbClr val="FFFFFF"/>
-          </a:solidFill>
-          <a:ln w="12700">
-            <a:solidFill>
-              <a:srgbClr val="1E6B52"/>
-            </a:solidFill>
-          </a:ln>
-          <a:effectLst/>
-        </p:spPr>
-        <p:style>
-          <a:lnRef idx="1">
-            <a:schemeClr val="accent1"/>
-          </a:lnRef>
-          <a:fillRef idx="3">
-            <a:schemeClr val="accent1"/>
-          </a:fillRef>
-          <a:effectRef idx="2">
-            <a:schemeClr val="accent1"/>
-          </a:effectRef>
-          <a:fontRef idx="minor">
-            <a:schemeClr val="lt1"/>
-          </a:fontRef>
-        </p:style>
-        <p:txBody>
-          <a:bodyPr rtlCol="0" anchor="ctr" wrap="square" lIns="54864" rIns="54864" tIns="27432" bIns="27432"/>
-          <a:lstStyle/>
-          <a:p>
-            <a:pPr algn="ctr"/>
-            <a:r>
-              <a:rPr sz="850" b="0">
-                <a:solidFill>
-                  <a:srgbClr val="1E6B52"/>
-                </a:solidFill>
-                <a:latin typeface="Segoe UI"/>
-              </a:rPr>
-              <a:t>a new joiner reads the team's real history</a:t>
-            </a:r>
-          </a:p>
-        </p:txBody>
-      </p:sp>
-      <p:sp>
-        <p:nvSpPr>
-          <p:cNvPr id="18" name="Rounded Rectangle 17"/>
-          <p:cNvSpPr/>
-          <p:nvPr/>
-        </p:nvSpPr>
-        <p:spPr>
-          <a:xfrm>
-            <a:off x="676656" y="3493008"/>
-            <a:ext cx="3346704" cy="274320"/>
-          </a:xfrm>
-          <a:prstGeom prst="roundRect">
-            <a:avLst>
-              <a:gd name="adj" fmla="val 10000"/>
-            </a:avLst>
-          </a:prstGeom>
-          <a:solidFill>
-            <a:srgbClr val="FFFFFF"/>
-          </a:solidFill>
-          <a:ln w="12700">
-            <a:solidFill>
-              <a:srgbClr val="1E6B52"/>
-            </a:solidFill>
-          </a:ln>
-          <a:effectLst/>
-        </p:spPr>
-        <p:style>
-          <a:lnRef idx="1">
-            <a:schemeClr val="accent1"/>
-          </a:lnRef>
-          <a:fillRef idx="3">
-            <a:schemeClr val="accent1"/>
-          </a:fillRef>
-          <a:effectRef idx="2">
-            <a:schemeClr val="accent1"/>
-          </a:effectRef>
-          <a:fontRef idx="minor">
-            <a:schemeClr val="lt1"/>
-          </a:fontRef>
-        </p:style>
-        <p:txBody>
-          <a:bodyPr rtlCol="0" anchor="ctr" wrap="square" lIns="54864" rIns="54864" tIns="27432" bIns="27432"/>
-          <a:lstStyle/>
-          <a:p>
-            <a:pPr algn="ctr"/>
-            <a:r>
-              <a:rPr sz="850" b="0">
-                <a:solidFill>
-                  <a:srgbClr val="1E6B52"/>
-                </a:solidFill>
-                <a:latin typeface="Segoe UI"/>
-              </a:rPr>
-              <a:t>people leave, their know-how stays</a:t>
-            </a:r>
-          </a:p>
-        </p:txBody>
-      </p:sp>
-      <p:sp>
-        <p:nvSpPr>
-          <p:cNvPr id="19" name="Rounded Rectangle 18"/>
-          <p:cNvSpPr/>
-          <p:nvPr/>
-        </p:nvSpPr>
-        <p:spPr>
-          <a:xfrm>
-            <a:off x="4370832" y="2340864"/>
-            <a:ext cx="3566160" cy="384048"/>
-          </a:xfrm>
-          <a:prstGeom prst="roundRect">
-            <a:avLst>
-              <a:gd name="adj" fmla="val 10000"/>
-            </a:avLst>
-          </a:prstGeom>
-          <a:solidFill>
-            <a:srgbClr val="DCE7F2"/>
-          </a:solidFill>
-          <a:ln w="12700">
-            <a:solidFill>
-              <a:srgbClr val="1F4E79"/>
-            </a:solidFill>
-          </a:ln>
-          <a:effectLst/>
-        </p:spPr>
-        <p:style>
-          <a:lnRef idx="1">
-            <a:schemeClr val="accent1"/>
-          </a:lnRef>
-          <a:fillRef idx="3">
-            <a:schemeClr val="accent1"/>
-          </a:fillRef>
-          <a:effectRef idx="2">
-            <a:schemeClr val="accent1"/>
-          </a:effectRef>
-          <a:fontRef idx="minor">
-            <a:schemeClr val="lt1"/>
-          </a:fontRef>
-        </p:style>
-        <p:txBody>
-          <a:bodyPr rtlCol="0" anchor="ctr" wrap="square" lIns="54864" rIns="54864" tIns="27432" bIns="27432"/>
-          <a:lstStyle/>
-          <a:p>
-            <a:pPr algn="ctr"/>
-            <a:r>
-              <a:rPr sz="1150" b="1">
-                <a:solidFill>
-                  <a:srgbClr val="1F4E79"/>
-                </a:solidFill>
-                <a:latin typeface="Segoe UI"/>
-              </a:rPr>
-              <a:t>What the company gets</a:t>
-            </a:r>
-          </a:p>
-        </p:txBody>
-      </p:sp>
-      <p:sp>
-        <p:nvSpPr>
-          <p:cNvPr id="20" name="Rounded Rectangle 19"/>
-          <p:cNvSpPr/>
-          <p:nvPr/>
-        </p:nvSpPr>
-        <p:spPr>
-          <a:xfrm>
-            <a:off x="4370832" y="2724912"/>
-            <a:ext cx="3566160" cy="1115568"/>
+            <a:off x="5779008" y="5138928"/>
+            <a:ext cx="5852160" cy="1115568"/>
           </a:xfrm>
           <a:prstGeom prst="roundRect">
             <a:avLst/>
@@ -10815,19 +11765,20 @@
           <a:lstStyle/>
           <a:p>
             <a:pPr algn="ctr"/>
-          </a:p>
-        </p:txBody>
-      </p:sp>
-      <p:sp>
-        <p:nvSpPr>
-          <p:cNvPr id="21" name="Rounded Rectangle 20"/>
+            <a:endParaRPr/>
+          </a:p>
+        </p:txBody>
+      </p:sp>
+      <p:sp>
+        <p:nvSpPr>
+          <p:cNvPr id="50" name="Rounded Rectangle 49"/>
           <p:cNvSpPr/>
           <p:nvPr/>
         </p:nvSpPr>
         <p:spPr>
           <a:xfrm>
-            <a:off x="4480560" y="2816352"/>
-            <a:ext cx="3346704" cy="274320"/>
+            <a:off x="5888736" y="5230368"/>
+            <a:ext cx="5632704" cy="274320"/>
           </a:xfrm>
           <a:prstGeom prst="roundRect">
             <a:avLst>
@@ -10859,7 +11810,7 @@
           </a:fontRef>
         </p:style>
         <p:txBody>
-          <a:bodyPr rtlCol="0" anchor="ctr" wrap="square" lIns="54864" rIns="54864" tIns="27432" bIns="27432"/>
+          <a:bodyPr wrap="square" lIns="54864" tIns="27432" rIns="54864" bIns="27432" rtlCol="0" anchor="ctr"/>
           <a:lstStyle/>
           <a:p>
             <a:pPr algn="ctr"/>
@@ -10870,21 +11821,21 @@
                 </a:solidFill>
                 <a:latin typeface="Segoe UI"/>
               </a:rPr>
-              <a:t>one place serves many teams at once</a:t>
-            </a:r>
-          </a:p>
-        </p:txBody>
-      </p:sp>
-      <p:sp>
-        <p:nvSpPr>
-          <p:cNvPr id="22" name="Rounded Rectangle 21"/>
+              <a:t>pay for that scoring — it is the only thing that settles the question</a:t>
+            </a:r>
+          </a:p>
+        </p:txBody>
+      </p:sp>
+      <p:sp>
+        <p:nvSpPr>
+          <p:cNvPr id="51" name="Rounded Rectangle 50"/>
           <p:cNvSpPr/>
           <p:nvPr/>
         </p:nvSpPr>
         <p:spPr>
           <a:xfrm>
-            <a:off x="4480560" y="3154680"/>
-            <a:ext cx="3346704" cy="274320"/>
+            <a:off x="5888736" y="5568696"/>
+            <a:ext cx="5632704" cy="274320"/>
           </a:xfrm>
           <a:prstGeom prst="roundRect">
             <a:avLst>
@@ -10916,7 +11867,7 @@
           </a:fontRef>
         </p:style>
         <p:txBody>
-          <a:bodyPr rtlCol="0" anchor="ctr" wrap="square" lIns="54864" rIns="54864" tIns="27432" bIns="27432"/>
+          <a:bodyPr wrap="square" lIns="54864" tIns="27432" rIns="54864" bIns="27432" rtlCol="0" anchor="ctr"/>
           <a:lstStyle/>
           <a:p>
             <a:pPr algn="ctr"/>
@@ -10927,21 +11878,21 @@
                 </a:solidFill>
                 <a:latin typeface="Segoe UI"/>
               </a:rPr>
-              <a:t>each team's memory stays its own</a:t>
-            </a:r>
-          </a:p>
-        </p:txBody>
-      </p:sp>
-      <p:sp>
-        <p:nvSpPr>
-          <p:cNvPr id="23" name="Rounded Rectangle 22"/>
+              <a:t>name an owner and a stand-in: one person wrote all of this</a:t>
+            </a:r>
+          </a:p>
+        </p:txBody>
+      </p:sp>
+      <p:sp>
+        <p:nvSpPr>
+          <p:cNvPr id="52" name="Rounded Rectangle 51"/>
           <p:cNvSpPr/>
           <p:nvPr/>
         </p:nvSpPr>
         <p:spPr>
           <a:xfrm>
-            <a:off x="4480560" y="3493008"/>
-            <a:ext cx="3346704" cy="274320"/>
+            <a:off x="5888736" y="5907024"/>
+            <a:ext cx="5632704" cy="274320"/>
           </a:xfrm>
           <a:prstGeom prst="roundRect">
             <a:avLst>
@@ -10973,1395 +11924,7 @@
           </a:fontRef>
         </p:style>
         <p:txBody>
-          <a:bodyPr rtlCol="0" anchor="ctr" wrap="square" lIns="54864" rIns="54864" tIns="27432" bIns="27432"/>
-          <a:lstStyle/>
-          <a:p>
-            <a:pPr algn="ctr"/>
-            <a:r>
-              <a:rPr sz="850" b="0">
-                <a:solidFill>
-                  <a:srgbClr val="1F4E79"/>
-                </a:solidFill>
-                <a:latin typeface="Segoe UI"/>
-              </a:rPr>
-              <a:t>nothing to run: it is files in a folder</a:t>
-            </a:r>
-          </a:p>
-        </p:txBody>
-      </p:sp>
-      <p:sp>
-        <p:nvSpPr>
-          <p:cNvPr id="24" name="Rounded Rectangle 23"/>
-          <p:cNvSpPr/>
-          <p:nvPr/>
-        </p:nvSpPr>
-        <p:spPr>
-          <a:xfrm>
-            <a:off x="8174736" y="2340864"/>
-            <a:ext cx="3566160" cy="384048"/>
-          </a:xfrm>
-          <a:prstGeom prst="roundRect">
-            <a:avLst>
-              <a:gd name="adj" fmla="val 10000"/>
-            </a:avLst>
-          </a:prstGeom>
-          <a:solidFill>
-            <a:srgbClr val="EAE1F0"/>
-          </a:solidFill>
-          <a:ln w="12700">
-            <a:solidFill>
-              <a:srgbClr val="5B3A6E"/>
-            </a:solidFill>
-          </a:ln>
-          <a:effectLst/>
-        </p:spPr>
-        <p:style>
-          <a:lnRef idx="1">
-            <a:schemeClr val="accent1"/>
-          </a:lnRef>
-          <a:fillRef idx="3">
-            <a:schemeClr val="accent1"/>
-          </a:fillRef>
-          <a:effectRef idx="2">
-            <a:schemeClr val="accent1"/>
-          </a:effectRef>
-          <a:fontRef idx="minor">
-            <a:schemeClr val="lt1"/>
-          </a:fontRef>
-        </p:style>
-        <p:txBody>
-          <a:bodyPr rtlCol="0" anchor="ctr" wrap="square" lIns="54864" rIns="54864" tIns="27432" bIns="27432"/>
-          <a:lstStyle/>
-          <a:p>
-            <a:pPr algn="ctr"/>
-            <a:r>
-              <a:rPr sz="1150" b="1">
-                <a:solidFill>
-                  <a:srgbClr val="5B3A6E"/>
-                </a:solidFill>
-                <a:latin typeface="Segoe UI"/>
-              </a:rPr>
-              <a:t>What legal and audit get</a:t>
-            </a:r>
-          </a:p>
-        </p:txBody>
-      </p:sp>
-      <p:sp>
-        <p:nvSpPr>
-          <p:cNvPr id="25" name="Rounded Rectangle 24"/>
-          <p:cNvSpPr/>
-          <p:nvPr/>
-        </p:nvSpPr>
-        <p:spPr>
-          <a:xfrm>
-            <a:off x="8174736" y="2724912"/>
-            <a:ext cx="3566160" cy="1115568"/>
-          </a:xfrm>
-          <a:prstGeom prst="roundRect">
-            <a:avLst/>
-          </a:prstGeom>
-          <a:solidFill>
-            <a:srgbClr val="FFFFFF"/>
-          </a:solidFill>
-          <a:ln w="12700">
-            <a:solidFill>
-              <a:srgbClr val="5B3A6E"/>
-            </a:solidFill>
-          </a:ln>
-          <a:effectLst/>
-        </p:spPr>
-        <p:style>
-          <a:lnRef idx="1">
-            <a:schemeClr val="accent1"/>
-          </a:lnRef>
-          <a:fillRef idx="3">
-            <a:schemeClr val="accent1"/>
-          </a:fillRef>
-          <a:effectRef idx="2">
-            <a:schemeClr val="accent1"/>
-          </a:effectRef>
-          <a:fontRef idx="minor">
-            <a:schemeClr val="lt1"/>
-          </a:fontRef>
-        </p:style>
-        <p:txBody>
-          <a:bodyPr rtlCol="0" anchor="ctr"/>
-          <a:lstStyle/>
-          <a:p>
-            <a:pPr algn="ctr"/>
-          </a:p>
-        </p:txBody>
-      </p:sp>
-      <p:sp>
-        <p:nvSpPr>
-          <p:cNvPr id="26" name="Rounded Rectangle 25"/>
-          <p:cNvSpPr/>
-          <p:nvPr/>
-        </p:nvSpPr>
-        <p:spPr>
-          <a:xfrm>
-            <a:off x="8284464" y="2816352"/>
-            <a:ext cx="3346704" cy="274320"/>
-          </a:xfrm>
-          <a:prstGeom prst="roundRect">
-            <a:avLst>
-              <a:gd name="adj" fmla="val 10000"/>
-            </a:avLst>
-          </a:prstGeom>
-          <a:solidFill>
-            <a:srgbClr val="FFFFFF"/>
-          </a:solidFill>
-          <a:ln w="12700">
-            <a:solidFill>
-              <a:srgbClr val="5B3A6E"/>
-            </a:solidFill>
-          </a:ln>
-          <a:effectLst/>
-        </p:spPr>
-        <p:style>
-          <a:lnRef idx="1">
-            <a:schemeClr val="accent1"/>
-          </a:lnRef>
-          <a:fillRef idx="3">
-            <a:schemeClr val="accent1"/>
-          </a:fillRef>
-          <a:effectRef idx="2">
-            <a:schemeClr val="accent1"/>
-          </a:effectRef>
-          <a:fontRef idx="minor">
-            <a:schemeClr val="lt1"/>
-          </a:fontRef>
-        </p:style>
-        <p:txBody>
-          <a:bodyPr rtlCol="0" anchor="ctr" wrap="square" lIns="54864" rIns="54864" tIns="27432" bIns="27432"/>
-          <a:lstStyle/>
-          <a:p>
-            <a:pPr algn="ctr"/>
-            <a:r>
-              <a:rPr sz="850" b="0">
-                <a:solidFill>
-                  <a:srgbClr val="5B3A6E"/>
-                </a:solidFill>
-                <a:latin typeface="Segoe UI"/>
-              </a:rPr>
-              <a:t>passwords are blocked before sharing, not after</a:t>
-            </a:r>
-          </a:p>
-        </p:txBody>
-      </p:sp>
-      <p:sp>
-        <p:nvSpPr>
-          <p:cNvPr id="27" name="Rounded Rectangle 26"/>
-          <p:cNvSpPr/>
-          <p:nvPr/>
-        </p:nvSpPr>
-        <p:spPr>
-          <a:xfrm>
-            <a:off x="8284464" y="3154680"/>
-            <a:ext cx="3346704" cy="274320"/>
-          </a:xfrm>
-          <a:prstGeom prst="roundRect">
-            <a:avLst>
-              <a:gd name="adj" fmla="val 10000"/>
-            </a:avLst>
-          </a:prstGeom>
-          <a:solidFill>
-            <a:srgbClr val="FFFFFF"/>
-          </a:solidFill>
-          <a:ln w="12700">
-            <a:solidFill>
-              <a:srgbClr val="5B3A6E"/>
-            </a:solidFill>
-          </a:ln>
-          <a:effectLst/>
-        </p:spPr>
-        <p:style>
-          <a:lnRef idx="1">
-            <a:schemeClr val="accent1"/>
-          </a:lnRef>
-          <a:fillRef idx="3">
-            <a:schemeClr val="accent1"/>
-          </a:fillRef>
-          <a:effectRef idx="2">
-            <a:schemeClr val="accent1"/>
-          </a:effectRef>
-          <a:fontRef idx="minor">
-            <a:schemeClr val="lt1"/>
-          </a:fontRef>
-        </p:style>
-        <p:txBody>
-          <a:bodyPr rtlCol="0" anchor="ctr" wrap="square" lIns="54864" rIns="54864" tIns="27432" bIns="27432"/>
-          <a:lstStyle/>
-          <a:p>
-            <a:pPr algn="ctr"/>
-            <a:r>
-              <a:rPr sz="850" b="0">
-                <a:solidFill>
-                  <a:srgbClr val="5B3A6E"/>
-                </a:solidFill>
-                <a:latin typeface="Segoe UI"/>
-              </a:rPr>
-              <a:t>every merge is saved and can be undone</a:t>
-            </a:r>
-          </a:p>
-        </p:txBody>
-      </p:sp>
-      <p:sp>
-        <p:nvSpPr>
-          <p:cNvPr id="28" name="Rounded Rectangle 27"/>
-          <p:cNvSpPr/>
-          <p:nvPr/>
-        </p:nvSpPr>
-        <p:spPr>
-          <a:xfrm>
-            <a:off x="8284464" y="3493008"/>
-            <a:ext cx="3346704" cy="274320"/>
-          </a:xfrm>
-          <a:prstGeom prst="roundRect">
-            <a:avLst>
-              <a:gd name="adj" fmla="val 10000"/>
-            </a:avLst>
-          </a:prstGeom>
-          <a:solidFill>
-            <a:srgbClr val="FFFFFF"/>
-          </a:solidFill>
-          <a:ln w="12700">
-            <a:solidFill>
-              <a:srgbClr val="5B3A6E"/>
-            </a:solidFill>
-          </a:ln>
-          <a:effectLst/>
-        </p:spPr>
-        <p:style>
-          <a:lnRef idx="1">
-            <a:schemeClr val="accent1"/>
-          </a:lnRef>
-          <a:fillRef idx="3">
-            <a:schemeClr val="accent1"/>
-          </a:fillRef>
-          <a:effectRef idx="2">
-            <a:schemeClr val="accent1"/>
-          </a:effectRef>
-          <a:fontRef idx="minor">
-            <a:schemeClr val="lt1"/>
-          </a:fontRef>
-        </p:style>
-        <p:txBody>
-          <a:bodyPr rtlCol="0" anchor="ctr" wrap="square" lIns="54864" rIns="54864" tIns="27432" bIns="27432"/>
-          <a:lstStyle/>
-          <a:p>
-            <a:pPr algn="ctr"/>
-            <a:r>
-              <a:rPr sz="850" b="0">
-                <a:solidFill>
-                  <a:srgbClr val="5B3A6E"/>
-                </a:solidFill>
-                <a:latin typeface="Segoe UI"/>
-              </a:rPr>
-              <a:t>delete the folder and it is gone — no second copy</a:t>
-            </a:r>
-          </a:p>
-        </p:txBody>
-      </p:sp>
-      <p:sp>
-        <p:nvSpPr>
-          <p:cNvPr id="29" name="TextBox 28"/>
-          <p:cNvSpPr txBox="1"/>
-          <p:nvPr/>
-        </p:nvSpPr>
-        <p:spPr>
-          <a:xfrm>
-            <a:off x="566928" y="3950208"/>
-            <a:ext cx="2212848" cy="384048"/>
-          </a:xfrm>
-          <a:prstGeom prst="rect">
-            <a:avLst/>
-          </a:prstGeom>
-          <a:noFill/>
-        </p:spPr>
-        <p:txBody>
-          <a:bodyPr wrap="square" anchor="t" lIns="0" rIns="0" tIns="0" bIns="0">
-            <a:spAutoFit/>
-          </a:bodyPr>
-          <a:lstStyle/>
-          <a:p>
-            <a:pPr algn="ctr">
-              <a:spcAft>
-                <a:spcPts val="0"/>
-              </a:spcAft>
-            </a:pPr>
-            <a:r>
-              <a:rPr sz="2500" b="1">
-                <a:solidFill>
-                  <a:srgbClr val="1E6B52"/>
-                </a:solidFill>
-                <a:latin typeface="Segoe UI"/>
-              </a:rPr>
-              <a:t>0</a:t>
-            </a:r>
-          </a:p>
-        </p:txBody>
-      </p:sp>
-      <p:sp>
-        <p:nvSpPr>
-          <p:cNvPr id="30" name="TextBox 29"/>
-          <p:cNvSpPr txBox="1"/>
-          <p:nvPr/>
-        </p:nvSpPr>
-        <p:spPr>
-          <a:xfrm>
-            <a:off x="640080" y="4352544"/>
-            <a:ext cx="2066544" cy="384048"/>
-          </a:xfrm>
-          <a:prstGeom prst="rect">
-            <a:avLst/>
-          </a:prstGeom>
-          <a:noFill/>
-        </p:spPr>
-        <p:txBody>
-          <a:bodyPr wrap="square" anchor="t" lIns="0" rIns="0" tIns="0" bIns="0">
-            <a:spAutoFit/>
-          </a:bodyPr>
-          <a:lstStyle/>
-          <a:p>
-            <a:pPr algn="ctr">
-              <a:spcAft>
-                <a:spcPts val="0"/>
-              </a:spcAft>
-            </a:pPr>
-            <a:r>
-              <a:rPr sz="1050" b="0">
-                <a:solidFill>
-                  <a:srgbClr val="6B6B6B"/>
-                </a:solidFill>
-                <a:latin typeface="Segoe UI"/>
-              </a:rPr>
-              <a:t>bugs found by the scanner</a:t>
-            </a:r>
-          </a:p>
-        </p:txBody>
-      </p:sp>
-      <p:sp>
-        <p:nvSpPr>
-          <p:cNvPr id="31" name="TextBox 30"/>
-          <p:cNvSpPr txBox="1"/>
-          <p:nvPr/>
-        </p:nvSpPr>
-        <p:spPr>
-          <a:xfrm>
-            <a:off x="2779776" y="3950208"/>
-            <a:ext cx="2212848" cy="384048"/>
-          </a:xfrm>
-          <a:prstGeom prst="rect">
-            <a:avLst/>
-          </a:prstGeom>
-          <a:noFill/>
-        </p:spPr>
-        <p:txBody>
-          <a:bodyPr wrap="square" anchor="t" lIns="0" rIns="0" tIns="0" bIns="0">
-            <a:spAutoFit/>
-          </a:bodyPr>
-          <a:lstStyle/>
-          <a:p>
-            <a:pPr algn="ctr">
-              <a:spcAft>
-                <a:spcPts val="0"/>
-              </a:spcAft>
-            </a:pPr>
-            <a:r>
-              <a:rPr sz="2500" b="1">
-                <a:solidFill>
-                  <a:srgbClr val="1E6B52"/>
-                </a:solidFill>
-                <a:latin typeface="Segoe UI"/>
-              </a:rPr>
-              <a:t>0</a:t>
-            </a:r>
-          </a:p>
-        </p:txBody>
-      </p:sp>
-      <p:sp>
-        <p:nvSpPr>
-          <p:cNvPr id="32" name="TextBox 31"/>
-          <p:cNvSpPr txBox="1"/>
-          <p:nvPr/>
-        </p:nvSpPr>
-        <p:spPr>
-          <a:xfrm>
-            <a:off x="2852928" y="4352544"/>
-            <a:ext cx="2066544" cy="384048"/>
-          </a:xfrm>
-          <a:prstGeom prst="rect">
-            <a:avLst/>
-          </a:prstGeom>
-          <a:noFill/>
-        </p:spPr>
-        <p:txBody>
-          <a:bodyPr wrap="square" anchor="t" lIns="0" rIns="0" tIns="0" bIns="0">
-            <a:spAutoFit/>
-          </a:bodyPr>
-          <a:lstStyle/>
-          <a:p>
-            <a:pPr algn="ctr">
-              <a:spcAft>
-                <a:spcPts val="0"/>
-              </a:spcAft>
-            </a:pPr>
-            <a:r>
-              <a:rPr sz="1050" b="0">
-                <a:solidFill>
-                  <a:srgbClr val="6B6B6B"/>
-                </a:solidFill>
-                <a:latin typeface="Segoe UI"/>
-              </a:rPr>
-              <a:t>security weaknesses</a:t>
-            </a:r>
-          </a:p>
-        </p:txBody>
-      </p:sp>
-      <p:sp>
-        <p:nvSpPr>
-          <p:cNvPr id="33" name="Rectangle 32"/>
-          <p:cNvSpPr/>
-          <p:nvPr/>
-        </p:nvSpPr>
-        <p:spPr>
-          <a:xfrm>
-            <a:off x="2779776" y="3986784"/>
-            <a:ext cx="9525" cy="566928"/>
-          </a:xfrm>
-          <a:prstGeom prst="rect">
-            <a:avLst/>
-          </a:prstGeom>
-          <a:solidFill>
-            <a:srgbClr val="C9C9C9"/>
-          </a:solidFill>
-          <a:ln>
-            <a:noFill/>
-          </a:ln>
-          <a:effectLst/>
-        </p:spPr>
-        <p:style>
-          <a:lnRef idx="1">
-            <a:schemeClr val="accent1"/>
-          </a:lnRef>
-          <a:fillRef idx="3">
-            <a:schemeClr val="accent1"/>
-          </a:fillRef>
-          <a:effectRef idx="2">
-            <a:schemeClr val="accent1"/>
-          </a:effectRef>
-          <a:fontRef idx="minor">
-            <a:schemeClr val="lt1"/>
-          </a:fontRef>
-        </p:style>
-        <p:txBody>
-          <a:bodyPr rtlCol="0" anchor="ctr"/>
-          <a:lstStyle/>
-          <a:p>
-            <a:pPr algn="ctr"/>
-          </a:p>
-        </p:txBody>
-      </p:sp>
-      <p:sp>
-        <p:nvSpPr>
-          <p:cNvPr id="34" name="TextBox 33"/>
-          <p:cNvSpPr txBox="1"/>
-          <p:nvPr/>
-        </p:nvSpPr>
-        <p:spPr>
-          <a:xfrm>
-            <a:off x="4992624" y="3950208"/>
-            <a:ext cx="2212848" cy="384048"/>
-          </a:xfrm>
-          <a:prstGeom prst="rect">
-            <a:avLst/>
-          </a:prstGeom>
-          <a:noFill/>
-        </p:spPr>
-        <p:txBody>
-          <a:bodyPr wrap="square" anchor="t" lIns="0" rIns="0" tIns="0" bIns="0">
-            <a:spAutoFit/>
-          </a:bodyPr>
-          <a:lstStyle/>
-          <a:p>
-            <a:pPr algn="ctr">
-              <a:spcAft>
-                <a:spcPts val="0"/>
-              </a:spcAft>
-            </a:pPr>
-            <a:r>
-              <a:rPr sz="2500" b="1">
-                <a:solidFill>
-                  <a:srgbClr val="1F4E79"/>
-                </a:solidFill>
-                <a:latin typeface="Segoe UI"/>
-              </a:rPr>
-              <a:t>8,606</a:t>
-            </a:r>
-          </a:p>
-        </p:txBody>
-      </p:sp>
-      <p:sp>
-        <p:nvSpPr>
-          <p:cNvPr id="35" name="TextBox 34"/>
-          <p:cNvSpPr txBox="1"/>
-          <p:nvPr/>
-        </p:nvSpPr>
-        <p:spPr>
-          <a:xfrm>
-            <a:off x="5065776" y="4352544"/>
-            <a:ext cx="2066544" cy="384048"/>
-          </a:xfrm>
-          <a:prstGeom prst="rect">
-            <a:avLst/>
-          </a:prstGeom>
-          <a:noFill/>
-        </p:spPr>
-        <p:txBody>
-          <a:bodyPr wrap="square" anchor="t" lIns="0" rIns="0" tIns="0" bIns="0">
-            <a:spAutoFit/>
-          </a:bodyPr>
-          <a:lstStyle/>
-          <a:p>
-            <a:pPr algn="ctr">
-              <a:spcAft>
-                <a:spcPts val="0"/>
-              </a:spcAft>
-            </a:pPr>
-            <a:r>
-              <a:rPr sz="1050" b="0">
-                <a:solidFill>
-                  <a:srgbClr val="6B6B6B"/>
-                </a:solidFill>
-                <a:latin typeface="Segoe UI"/>
-              </a:rPr>
-              <a:t>tests</a:t>
-            </a:r>
-          </a:p>
-        </p:txBody>
-      </p:sp>
-      <p:sp>
-        <p:nvSpPr>
-          <p:cNvPr id="36" name="Rectangle 35"/>
-          <p:cNvSpPr/>
-          <p:nvPr/>
-        </p:nvSpPr>
-        <p:spPr>
-          <a:xfrm>
-            <a:off x="4992624" y="3986784"/>
-            <a:ext cx="9525" cy="566928"/>
-          </a:xfrm>
-          <a:prstGeom prst="rect">
-            <a:avLst/>
-          </a:prstGeom>
-          <a:solidFill>
-            <a:srgbClr val="C9C9C9"/>
-          </a:solidFill>
-          <a:ln>
-            <a:noFill/>
-          </a:ln>
-          <a:effectLst/>
-        </p:spPr>
-        <p:style>
-          <a:lnRef idx="1">
-            <a:schemeClr val="accent1"/>
-          </a:lnRef>
-          <a:fillRef idx="3">
-            <a:schemeClr val="accent1"/>
-          </a:fillRef>
-          <a:effectRef idx="2">
-            <a:schemeClr val="accent1"/>
-          </a:effectRef>
-          <a:fontRef idx="minor">
-            <a:schemeClr val="lt1"/>
-          </a:fontRef>
-        </p:style>
-        <p:txBody>
-          <a:bodyPr rtlCol="0" anchor="ctr"/>
-          <a:lstStyle/>
-          <a:p>
-            <a:pPr algn="ctr"/>
-          </a:p>
-        </p:txBody>
-      </p:sp>
-      <p:sp>
-        <p:nvSpPr>
-          <p:cNvPr id="37" name="TextBox 36"/>
-          <p:cNvSpPr txBox="1"/>
-          <p:nvPr/>
-        </p:nvSpPr>
-        <p:spPr>
-          <a:xfrm>
-            <a:off x="7205472" y="3950208"/>
-            <a:ext cx="2212848" cy="384048"/>
-          </a:xfrm>
-          <a:prstGeom prst="rect">
-            <a:avLst/>
-          </a:prstGeom>
-          <a:noFill/>
-        </p:spPr>
-        <p:txBody>
-          <a:bodyPr wrap="square" anchor="t" lIns="0" rIns="0" tIns="0" bIns="0">
-            <a:spAutoFit/>
-          </a:bodyPr>
-          <a:lstStyle/>
-          <a:p>
-            <a:pPr algn="ctr">
-              <a:spcAft>
-                <a:spcPts val="0"/>
-              </a:spcAft>
-            </a:pPr>
-            <a:r>
-              <a:rPr sz="2500" b="1">
-                <a:solidFill>
-                  <a:srgbClr val="1F4E79"/>
-                </a:solidFill>
-                <a:latin typeface="Segoe UI"/>
-              </a:rPr>
-              <a:t>82.8%</a:t>
-            </a:r>
-          </a:p>
-        </p:txBody>
-      </p:sp>
-      <p:sp>
-        <p:nvSpPr>
-          <p:cNvPr id="38" name="TextBox 37"/>
-          <p:cNvSpPr txBox="1"/>
-          <p:nvPr/>
-        </p:nvSpPr>
-        <p:spPr>
-          <a:xfrm>
-            <a:off x="7278624" y="4352544"/>
-            <a:ext cx="2066544" cy="384048"/>
-          </a:xfrm>
-          <a:prstGeom prst="rect">
-            <a:avLst/>
-          </a:prstGeom>
-          <a:noFill/>
-        </p:spPr>
-        <p:txBody>
-          <a:bodyPr wrap="square" anchor="t" lIns="0" rIns="0" tIns="0" bIns="0">
-            <a:spAutoFit/>
-          </a:bodyPr>
-          <a:lstStyle/>
-          <a:p>
-            <a:pPr algn="ctr">
-              <a:spcAft>
-                <a:spcPts val="0"/>
-              </a:spcAft>
-            </a:pPr>
-            <a:r>
-              <a:rPr sz="1050" b="0">
-                <a:solidFill>
-                  <a:srgbClr val="6B6B6B"/>
-                </a:solidFill>
-                <a:latin typeface="Segoe UI"/>
-              </a:rPr>
-              <a:t>of the code covered by tests</a:t>
-            </a:r>
-          </a:p>
-        </p:txBody>
-      </p:sp>
-      <p:sp>
-        <p:nvSpPr>
-          <p:cNvPr id="39" name="Rectangle 38"/>
-          <p:cNvSpPr/>
-          <p:nvPr/>
-        </p:nvSpPr>
-        <p:spPr>
-          <a:xfrm>
-            <a:off x="7205472" y="3986784"/>
-            <a:ext cx="9525" cy="566928"/>
-          </a:xfrm>
-          <a:prstGeom prst="rect">
-            <a:avLst/>
-          </a:prstGeom>
-          <a:solidFill>
-            <a:srgbClr val="C9C9C9"/>
-          </a:solidFill>
-          <a:ln>
-            <a:noFill/>
-          </a:ln>
-          <a:effectLst/>
-        </p:spPr>
-        <p:style>
-          <a:lnRef idx="1">
-            <a:schemeClr val="accent1"/>
-          </a:lnRef>
-          <a:fillRef idx="3">
-            <a:schemeClr val="accent1"/>
-          </a:fillRef>
-          <a:effectRef idx="2">
-            <a:schemeClr val="accent1"/>
-          </a:effectRef>
-          <a:fontRef idx="minor">
-            <a:schemeClr val="lt1"/>
-          </a:fontRef>
-        </p:style>
-        <p:txBody>
-          <a:bodyPr rtlCol="0" anchor="ctr"/>
-          <a:lstStyle/>
-          <a:p>
-            <a:pPr algn="ctr"/>
-          </a:p>
-        </p:txBody>
-      </p:sp>
-      <p:sp>
-        <p:nvSpPr>
-          <p:cNvPr id="40" name="TextBox 39"/>
-          <p:cNvSpPr txBox="1"/>
-          <p:nvPr/>
-        </p:nvSpPr>
-        <p:spPr>
-          <a:xfrm>
-            <a:off x="9418320" y="3950208"/>
-            <a:ext cx="2212848" cy="384048"/>
-          </a:xfrm>
-          <a:prstGeom prst="rect">
-            <a:avLst/>
-          </a:prstGeom>
-          <a:noFill/>
-        </p:spPr>
-        <p:txBody>
-          <a:bodyPr wrap="square" anchor="t" lIns="0" rIns="0" tIns="0" bIns="0">
-            <a:spAutoFit/>
-          </a:bodyPr>
-          <a:lstStyle/>
-          <a:p>
-            <a:pPr algn="ctr">
-              <a:spcAft>
-                <a:spcPts val="0"/>
-              </a:spcAft>
-            </a:pPr>
-            <a:r>
-              <a:rPr sz="2500" b="1">
-                <a:solidFill>
-                  <a:srgbClr val="8C2F2F"/>
-                </a:solidFill>
-                <a:latin typeface="Segoe UI"/>
-              </a:rPr>
-              <a:t>0</a:t>
-            </a:r>
-          </a:p>
-        </p:txBody>
-      </p:sp>
-      <p:sp>
-        <p:nvSpPr>
-          <p:cNvPr id="41" name="TextBox 40"/>
-          <p:cNvSpPr txBox="1"/>
-          <p:nvPr/>
-        </p:nvSpPr>
-        <p:spPr>
-          <a:xfrm>
-            <a:off x="9491472" y="4352544"/>
-            <a:ext cx="2066544" cy="384048"/>
-          </a:xfrm>
-          <a:prstGeom prst="rect">
-            <a:avLst/>
-          </a:prstGeom>
-          <a:noFill/>
-        </p:spPr>
-        <p:txBody>
-          <a:bodyPr wrap="square" anchor="t" lIns="0" rIns="0" tIns="0" bIns="0">
-            <a:spAutoFit/>
-          </a:bodyPr>
-          <a:lstStyle/>
-          <a:p>
-            <a:pPr algn="ctr">
-              <a:spcAft>
-                <a:spcPts val="0"/>
-              </a:spcAft>
-            </a:pPr>
-            <a:r>
-              <a:rPr sz="1050" b="0">
-                <a:solidFill>
-                  <a:srgbClr val="6B6B6B"/>
-                </a:solidFill>
-                <a:latin typeface="Segoe UI"/>
-              </a:rPr>
-              <a:t>of its OWN work ever scored</a:t>
-            </a:r>
-          </a:p>
-        </p:txBody>
-      </p:sp>
-      <p:sp>
-        <p:nvSpPr>
-          <p:cNvPr id="42" name="Rectangle 41"/>
-          <p:cNvSpPr/>
-          <p:nvPr/>
-        </p:nvSpPr>
-        <p:spPr>
-          <a:xfrm>
-            <a:off x="9418320" y="3986784"/>
-            <a:ext cx="9525" cy="566928"/>
-          </a:xfrm>
-          <a:prstGeom prst="rect">
-            <a:avLst/>
-          </a:prstGeom>
-          <a:solidFill>
-            <a:srgbClr val="C9C9C9"/>
-          </a:solidFill>
-          <a:ln>
-            <a:noFill/>
-          </a:ln>
-          <a:effectLst/>
-        </p:spPr>
-        <p:style>
-          <a:lnRef idx="1">
-            <a:schemeClr val="accent1"/>
-          </a:lnRef>
-          <a:fillRef idx="3">
-            <a:schemeClr val="accent1"/>
-          </a:fillRef>
-          <a:effectRef idx="2">
-            <a:schemeClr val="accent1"/>
-          </a:effectRef>
-          <a:fontRef idx="minor">
-            <a:schemeClr val="lt1"/>
-          </a:fontRef>
-        </p:style>
-        <p:txBody>
-          <a:bodyPr rtlCol="0" anchor="ctr"/>
-          <a:lstStyle/>
-          <a:p>
-            <a:pPr algn="ctr"/>
-          </a:p>
-        </p:txBody>
-      </p:sp>
-      <p:sp>
-        <p:nvSpPr>
-          <p:cNvPr id="43" name="Rounded Rectangle 42"/>
-          <p:cNvSpPr/>
-          <p:nvPr/>
-        </p:nvSpPr>
-        <p:spPr>
-          <a:xfrm>
-            <a:off x="566928" y="4754880"/>
-            <a:ext cx="5029200" cy="384048"/>
-          </a:xfrm>
-          <a:prstGeom prst="roundRect">
-            <a:avLst>
-              <a:gd name="adj" fmla="val 10000"/>
-            </a:avLst>
-          </a:prstGeom>
-          <a:solidFill>
-            <a:srgbClr val="F7DFDF"/>
-          </a:solidFill>
-          <a:ln w="12700">
-            <a:solidFill>
-              <a:srgbClr val="8C2F2F"/>
-            </a:solidFill>
-          </a:ln>
-          <a:effectLst/>
-        </p:spPr>
-        <p:style>
-          <a:lnRef idx="1">
-            <a:schemeClr val="accent1"/>
-          </a:lnRef>
-          <a:fillRef idx="3">
-            <a:schemeClr val="accent1"/>
-          </a:fillRef>
-          <a:effectRef idx="2">
-            <a:schemeClr val="accent1"/>
-          </a:effectRef>
-          <a:fontRef idx="minor">
-            <a:schemeClr val="lt1"/>
-          </a:fontRef>
-        </p:style>
-        <p:txBody>
-          <a:bodyPr rtlCol="0" anchor="ctr" wrap="square" lIns="54864" rIns="54864" tIns="27432" bIns="27432"/>
-          <a:lstStyle/>
-          <a:p>
-            <a:pPr algn="ctr"/>
-            <a:r>
-              <a:rPr sz="1150" b="1">
-                <a:solidFill>
-                  <a:srgbClr val="8C2F2F"/>
-                </a:solidFill>
-                <a:latin typeface="Segoe UI"/>
-              </a:rPr>
-              <a:t>What we cannot prove yet</a:t>
-            </a:r>
-          </a:p>
-        </p:txBody>
-      </p:sp>
-      <p:sp>
-        <p:nvSpPr>
-          <p:cNvPr id="44" name="Rounded Rectangle 43"/>
-          <p:cNvSpPr/>
-          <p:nvPr/>
-        </p:nvSpPr>
-        <p:spPr>
-          <a:xfrm>
-            <a:off x="566928" y="5138928"/>
-            <a:ext cx="5029200" cy="1115568"/>
-          </a:xfrm>
-          <a:prstGeom prst="roundRect">
-            <a:avLst/>
-          </a:prstGeom>
-          <a:solidFill>
-            <a:srgbClr val="FFFFFF"/>
-          </a:solidFill>
-          <a:ln w="12700">
-            <a:solidFill>
-              <a:srgbClr val="8C2F2F"/>
-            </a:solidFill>
-          </a:ln>
-          <a:effectLst/>
-        </p:spPr>
-        <p:style>
-          <a:lnRef idx="1">
-            <a:schemeClr val="accent1"/>
-          </a:lnRef>
-          <a:fillRef idx="3">
-            <a:schemeClr val="accent1"/>
-          </a:fillRef>
-          <a:effectRef idx="2">
-            <a:schemeClr val="accent1"/>
-          </a:effectRef>
-          <a:fontRef idx="minor">
-            <a:schemeClr val="lt1"/>
-          </a:fontRef>
-        </p:style>
-        <p:txBody>
-          <a:bodyPr rtlCol="0" anchor="ctr"/>
-          <a:lstStyle/>
-          <a:p>
-            <a:pPr algn="ctr"/>
-          </a:p>
-        </p:txBody>
-      </p:sp>
-      <p:sp>
-        <p:nvSpPr>
-          <p:cNvPr id="45" name="Rounded Rectangle 44"/>
-          <p:cNvSpPr/>
-          <p:nvPr/>
-        </p:nvSpPr>
-        <p:spPr>
-          <a:xfrm>
-            <a:off x="676656" y="5230368"/>
-            <a:ext cx="4809744" cy="274320"/>
-          </a:xfrm>
-          <a:prstGeom prst="roundRect">
-            <a:avLst>
-              <a:gd name="adj" fmla="val 10000"/>
-            </a:avLst>
-          </a:prstGeom>
-          <a:solidFill>
-            <a:srgbClr val="FFFFFF"/>
-          </a:solidFill>
-          <a:ln w="12700">
-            <a:solidFill>
-              <a:srgbClr val="8C2F2F"/>
-            </a:solidFill>
-          </a:ln>
-          <a:effectLst/>
-        </p:spPr>
-        <p:style>
-          <a:lnRef idx="1">
-            <a:schemeClr val="accent1"/>
-          </a:lnRef>
-          <a:fillRef idx="3">
-            <a:schemeClr val="accent1"/>
-          </a:fillRef>
-          <a:effectRef idx="2">
-            <a:schemeClr val="accent1"/>
-          </a:effectRef>
-          <a:fontRef idx="minor">
-            <a:schemeClr val="lt1"/>
-          </a:fontRef>
-        </p:style>
-        <p:txBody>
-          <a:bodyPr rtlCol="0" anchor="ctr" wrap="square" lIns="54864" rIns="54864" tIns="27432" bIns="27432"/>
-          <a:lstStyle/>
-          <a:p>
-            <a:pPr algn="ctr"/>
-            <a:r>
-              <a:rPr sz="850" b="0">
-                <a:solidFill>
-                  <a:srgbClr val="8C2F2F"/>
-                </a:solidFill>
-                <a:latin typeface="Segoe UI"/>
-              </a:rPr>
-              <a:t>no set of old tickets is replayed to score its work</a:t>
-            </a:r>
-          </a:p>
-        </p:txBody>
-      </p:sp>
-      <p:sp>
-        <p:nvSpPr>
-          <p:cNvPr id="46" name="Rounded Rectangle 45"/>
-          <p:cNvSpPr/>
-          <p:nvPr/>
-        </p:nvSpPr>
-        <p:spPr>
-          <a:xfrm>
-            <a:off x="676656" y="5568696"/>
-            <a:ext cx="4809744" cy="274320"/>
-          </a:xfrm>
-          <a:prstGeom prst="roundRect">
-            <a:avLst>
-              <a:gd name="adj" fmla="val 10000"/>
-            </a:avLst>
-          </a:prstGeom>
-          <a:solidFill>
-            <a:srgbClr val="FFFFFF"/>
-          </a:solidFill>
-          <a:ln w="12700">
-            <a:solidFill>
-              <a:srgbClr val="8C2F2F"/>
-            </a:solidFill>
-          </a:ln>
-          <a:effectLst/>
-        </p:spPr>
-        <p:style>
-          <a:lnRef idx="1">
-            <a:schemeClr val="accent1"/>
-          </a:lnRef>
-          <a:fillRef idx="3">
-            <a:schemeClr val="accent1"/>
-          </a:fillRef>
-          <a:effectRef idx="2">
-            <a:schemeClr val="accent1"/>
-          </a:effectRef>
-          <a:fontRef idx="minor">
-            <a:schemeClr val="lt1"/>
-          </a:fontRef>
-        </p:style>
-        <p:txBody>
-          <a:bodyPr rtlCol="0" anchor="ctr" wrap="square" lIns="54864" rIns="54864" tIns="27432" bIns="27432"/>
-          <a:lstStyle/>
-          <a:p>
-            <a:pPr algn="ctr"/>
-            <a:r>
-              <a:rPr sz="850" b="0">
-                <a:solidFill>
-                  <a:srgbClr val="8C2F2F"/>
-                </a:solidFill>
-                <a:latin typeface="Segoe UI"/>
-              </a:rPr>
-              <a:t>no record of how often a person rewrites what it wrote</a:t>
-            </a:r>
-          </a:p>
-        </p:txBody>
-      </p:sp>
-      <p:sp>
-        <p:nvSpPr>
-          <p:cNvPr id="47" name="Rounded Rectangle 46"/>
-          <p:cNvSpPr/>
-          <p:nvPr/>
-        </p:nvSpPr>
-        <p:spPr>
-          <a:xfrm>
-            <a:off x="676656" y="5907024"/>
-            <a:ext cx="4809744" cy="274320"/>
-          </a:xfrm>
-          <a:prstGeom prst="roundRect">
-            <a:avLst>
-              <a:gd name="adj" fmla="val 10000"/>
-            </a:avLst>
-          </a:prstGeom>
-          <a:solidFill>
-            <a:srgbClr val="FFFFFF"/>
-          </a:solidFill>
-          <a:ln w="12700">
-            <a:solidFill>
-              <a:srgbClr val="8C2F2F"/>
-            </a:solidFill>
-          </a:ln>
-          <a:effectLst/>
-        </p:spPr>
-        <p:style>
-          <a:lnRef idx="1">
-            <a:schemeClr val="accent1"/>
-          </a:lnRef>
-          <a:fillRef idx="3">
-            <a:schemeClr val="accent1"/>
-          </a:fillRef>
-          <a:effectRef idx="2">
-            <a:schemeClr val="accent1"/>
-          </a:effectRef>
-          <a:fontRef idx="minor">
-            <a:schemeClr val="lt1"/>
-          </a:fontRef>
-        </p:style>
-        <p:txBody>
-          <a:bodyPr rtlCol="0" anchor="ctr" wrap="square" lIns="54864" rIns="54864" tIns="27432" bIns="27432"/>
-          <a:lstStyle/>
-          <a:p>
-            <a:pPr algn="ctr"/>
-            <a:r>
-              <a:rPr sz="850" b="0">
-                <a:solidFill>
-                  <a:srgbClr val="8C2F2F"/>
-                </a:solidFill>
-                <a:latin typeface="Segoe UI"/>
-              </a:rPr>
-              <a:t>never load-tested, so no honest users-per-machine number</a:t>
-            </a:r>
-          </a:p>
-        </p:txBody>
-      </p:sp>
-      <p:sp>
-        <p:nvSpPr>
-          <p:cNvPr id="48" name="Rounded Rectangle 47"/>
-          <p:cNvSpPr/>
-          <p:nvPr/>
-        </p:nvSpPr>
-        <p:spPr>
-          <a:xfrm>
-            <a:off x="5779008" y="4754880"/>
-            <a:ext cx="5852160" cy="384048"/>
-          </a:xfrm>
-          <a:prstGeom prst="roundRect">
-            <a:avLst>
-              <a:gd name="adj" fmla="val 10000"/>
-            </a:avLst>
-          </a:prstGeom>
-          <a:solidFill>
-            <a:srgbClr val="DCE7F2"/>
-          </a:solidFill>
-          <a:ln w="12700">
-            <a:solidFill>
-              <a:srgbClr val="1F4E79"/>
-            </a:solidFill>
-          </a:ln>
-          <a:effectLst/>
-        </p:spPr>
-        <p:style>
-          <a:lnRef idx="1">
-            <a:schemeClr val="accent1"/>
-          </a:lnRef>
-          <a:fillRef idx="3">
-            <a:schemeClr val="accent1"/>
-          </a:fillRef>
-          <a:effectRef idx="2">
-            <a:schemeClr val="accent1"/>
-          </a:effectRef>
-          <a:fontRef idx="minor">
-            <a:schemeClr val="lt1"/>
-          </a:fontRef>
-        </p:style>
-        <p:txBody>
-          <a:bodyPr rtlCol="0" anchor="ctr" wrap="square" lIns="54864" rIns="54864" tIns="27432" bIns="27432"/>
-          <a:lstStyle/>
-          <a:p>
-            <a:pPr algn="ctr"/>
-            <a:r>
-              <a:rPr sz="1150" b="1">
-                <a:solidFill>
-                  <a:srgbClr val="1F4E79"/>
-                </a:solidFill>
-                <a:latin typeface="Segoe UI"/>
-              </a:rPr>
-              <a:t>What we need you to decide</a:t>
-            </a:r>
-          </a:p>
-        </p:txBody>
-      </p:sp>
-      <p:sp>
-        <p:nvSpPr>
-          <p:cNvPr id="49" name="Rounded Rectangle 48"/>
-          <p:cNvSpPr/>
-          <p:nvPr/>
-        </p:nvSpPr>
-        <p:spPr>
-          <a:xfrm>
-            <a:off x="5779008" y="5138928"/>
-            <a:ext cx="5852160" cy="1115568"/>
-          </a:xfrm>
-          <a:prstGeom prst="roundRect">
-            <a:avLst/>
-          </a:prstGeom>
-          <a:solidFill>
-            <a:srgbClr val="FFFFFF"/>
-          </a:solidFill>
-          <a:ln w="12700">
-            <a:solidFill>
-              <a:srgbClr val="1F4E79"/>
-            </a:solidFill>
-          </a:ln>
-          <a:effectLst/>
-        </p:spPr>
-        <p:style>
-          <a:lnRef idx="1">
-            <a:schemeClr val="accent1"/>
-          </a:lnRef>
-          <a:fillRef idx="3">
-            <a:schemeClr val="accent1"/>
-          </a:fillRef>
-          <a:effectRef idx="2">
-            <a:schemeClr val="accent1"/>
-          </a:effectRef>
-          <a:fontRef idx="minor">
-            <a:schemeClr val="lt1"/>
-          </a:fontRef>
-        </p:style>
-        <p:txBody>
-          <a:bodyPr rtlCol="0" anchor="ctr"/>
-          <a:lstStyle/>
-          <a:p>
-            <a:pPr algn="ctr"/>
-          </a:p>
-        </p:txBody>
-      </p:sp>
-      <p:sp>
-        <p:nvSpPr>
-          <p:cNvPr id="50" name="Rounded Rectangle 49"/>
-          <p:cNvSpPr/>
-          <p:nvPr/>
-        </p:nvSpPr>
-        <p:spPr>
-          <a:xfrm>
-            <a:off x="5888736" y="5230368"/>
-            <a:ext cx="5632704" cy="274320"/>
-          </a:xfrm>
-          <a:prstGeom prst="roundRect">
-            <a:avLst>
-              <a:gd name="adj" fmla="val 10000"/>
-            </a:avLst>
-          </a:prstGeom>
-          <a:solidFill>
-            <a:srgbClr val="FFFFFF"/>
-          </a:solidFill>
-          <a:ln w="12700">
-            <a:solidFill>
-              <a:srgbClr val="1F4E79"/>
-            </a:solidFill>
-          </a:ln>
-          <a:effectLst/>
-        </p:spPr>
-        <p:style>
-          <a:lnRef idx="1">
-            <a:schemeClr val="accent1"/>
-          </a:lnRef>
-          <a:fillRef idx="3">
-            <a:schemeClr val="accent1"/>
-          </a:fillRef>
-          <a:effectRef idx="2">
-            <a:schemeClr val="accent1"/>
-          </a:effectRef>
-          <a:fontRef idx="minor">
-            <a:schemeClr val="lt1"/>
-          </a:fontRef>
-        </p:style>
-        <p:txBody>
-          <a:bodyPr rtlCol="0" anchor="ctr" wrap="square" lIns="54864" rIns="54864" tIns="27432" bIns="27432"/>
-          <a:lstStyle/>
-          <a:p>
-            <a:pPr algn="ctr"/>
-            <a:r>
-              <a:rPr sz="850" b="0">
-                <a:solidFill>
-                  <a:srgbClr val="1F4E79"/>
-                </a:solidFill>
-                <a:latin typeface="Segoe UI"/>
-              </a:rPr>
-              <a:t>pay for that scoring — it is the only thing that settles the question</a:t>
-            </a:r>
-          </a:p>
-        </p:txBody>
-      </p:sp>
-      <p:sp>
-        <p:nvSpPr>
-          <p:cNvPr id="51" name="Rounded Rectangle 50"/>
-          <p:cNvSpPr/>
-          <p:nvPr/>
-        </p:nvSpPr>
-        <p:spPr>
-          <a:xfrm>
-            <a:off x="5888736" y="5568696"/>
-            <a:ext cx="5632704" cy="274320"/>
-          </a:xfrm>
-          <a:prstGeom prst="roundRect">
-            <a:avLst>
-              <a:gd name="adj" fmla="val 10000"/>
-            </a:avLst>
-          </a:prstGeom>
-          <a:solidFill>
-            <a:srgbClr val="FFFFFF"/>
-          </a:solidFill>
-          <a:ln w="12700">
-            <a:solidFill>
-              <a:srgbClr val="1F4E79"/>
-            </a:solidFill>
-          </a:ln>
-          <a:effectLst/>
-        </p:spPr>
-        <p:style>
-          <a:lnRef idx="1">
-            <a:schemeClr val="accent1"/>
-          </a:lnRef>
-          <a:fillRef idx="3">
-            <a:schemeClr val="accent1"/>
-          </a:fillRef>
-          <a:effectRef idx="2">
-            <a:schemeClr val="accent1"/>
-          </a:effectRef>
-          <a:fontRef idx="minor">
-            <a:schemeClr val="lt1"/>
-          </a:fontRef>
-        </p:style>
-        <p:txBody>
-          <a:bodyPr rtlCol="0" anchor="ctr" wrap="square" lIns="54864" rIns="54864" tIns="27432" bIns="27432"/>
-          <a:lstStyle/>
-          <a:p>
-            <a:pPr algn="ctr"/>
-            <a:r>
-              <a:rPr sz="850" b="0">
-                <a:solidFill>
-                  <a:srgbClr val="1F4E79"/>
-                </a:solidFill>
-                <a:latin typeface="Segoe UI"/>
-              </a:rPr>
-              <a:t>name an owner and a stand-in: one person wrote all of this</a:t>
-            </a:r>
-          </a:p>
-        </p:txBody>
-      </p:sp>
-      <p:sp>
-        <p:nvSpPr>
-          <p:cNvPr id="52" name="Rounded Rectangle 51"/>
-          <p:cNvSpPr/>
-          <p:nvPr/>
-        </p:nvSpPr>
-        <p:spPr>
-          <a:xfrm>
-            <a:off x="5888736" y="5907024"/>
-            <a:ext cx="5632704" cy="274320"/>
-          </a:xfrm>
-          <a:prstGeom prst="roundRect">
-            <a:avLst>
-              <a:gd name="adj" fmla="val 10000"/>
-            </a:avLst>
-          </a:prstGeom>
-          <a:solidFill>
-            <a:srgbClr val="FFFFFF"/>
-          </a:solidFill>
-          <a:ln w="12700">
-            <a:solidFill>
-              <a:srgbClr val="1F4E79"/>
-            </a:solidFill>
-          </a:ln>
-          <a:effectLst/>
-        </p:spPr>
-        <p:style>
-          <a:lnRef idx="1">
-            <a:schemeClr val="accent1"/>
-          </a:lnRef>
-          <a:fillRef idx="3">
-            <a:schemeClr val="accent1"/>
-          </a:fillRef>
-          <a:effectRef idx="2">
-            <a:schemeClr val="accent1"/>
-          </a:effectRef>
-          <a:fontRef idx="minor">
-            <a:schemeClr val="lt1"/>
-          </a:fontRef>
-        </p:style>
-        <p:txBody>
-          <a:bodyPr rtlCol="0" anchor="ctr" wrap="square" lIns="54864" rIns="54864" tIns="27432" bIns="27432"/>
+          <a:bodyPr wrap="square" lIns="54864" tIns="27432" rIns="54864" bIns="27432" rtlCol="0" anchor="ctr"/>
           <a:lstStyle/>
           <a:p>
             <a:pPr algn="ctr"/>
@@ -12716,44 +12279,44 @@
         <a:sysClr val="window" lastClr="FFFFFF"/>
       </a:lt1>
       <a:dk2>
-        <a:srgbClr val="1F497D"/>
+        <a:srgbClr val="0E2841"/>
       </a:dk2>
       <a:lt2>
-        <a:srgbClr val="EEECE1"/>
+        <a:srgbClr val="E8E8E8"/>
       </a:lt2>
       <a:accent1>
-        <a:srgbClr val="4F81BD"/>
+        <a:srgbClr val="156082"/>
       </a:accent1>
       <a:accent2>
-        <a:srgbClr val="C0504D"/>
+        <a:srgbClr val="E97132"/>
       </a:accent2>
       <a:accent3>
-        <a:srgbClr val="9BBB59"/>
+        <a:srgbClr val="196B24"/>
       </a:accent3>
       <a:accent4>
-        <a:srgbClr val="8064A2"/>
+        <a:srgbClr val="0F9ED5"/>
       </a:accent4>
       <a:accent5>
-        <a:srgbClr val="4BACC6"/>
+        <a:srgbClr val="A02B93"/>
       </a:accent5>
       <a:accent6>
-        <a:srgbClr val="F79646"/>
+        <a:srgbClr val="4EA72E"/>
       </a:accent6>
       <a:hlink>
-        <a:srgbClr val="0000FF"/>
+        <a:srgbClr val="467886"/>
       </a:hlink>
       <a:folHlink>
-        <a:srgbClr val="800080"/>
+        <a:srgbClr val="96607D"/>
       </a:folHlink>
     </a:clrScheme>
     <a:fontScheme name="Office">
       <a:majorFont>
-        <a:latin typeface="Calibri"/>
+        <a:latin typeface="Aptos Display" panose="02110004020202020204"/>
         <a:ea typeface=""/>
         <a:cs typeface=""/>
-        <a:font script="Jpan" typeface="ＭＳ Ｐゴシック"/>
+        <a:font script="Jpan" typeface="游ゴシック Light"/>
         <a:font script="Hang" typeface="맑은 고딕"/>
-        <a:font script="Hans" typeface="宋体"/>
+        <a:font script="Hans" typeface="等线 Light"/>
         <a:font script="Hant" typeface="新細明體"/>
         <a:font script="Arab" typeface="Times New Roman"/>
         <a:font script="Hebr" typeface="Times New Roman"/>
@@ -12781,14 +12344,31 @@
         <a:font script="Viet" typeface="Times New Roman"/>
         <a:font script="Uigh" typeface="Microsoft Uighur"/>
         <a:font script="Geor" typeface="Sylfaen"/>
+        <a:font script="Armn" typeface="Arial"/>
+        <a:font script="Bugi" typeface="Leelawadee UI"/>
+        <a:font script="Bopo" typeface="Microsoft JhengHei"/>
+        <a:font script="Java" typeface="Javanese Text"/>
+        <a:font script="Lisu" typeface="Segoe UI"/>
+        <a:font script="Mymr" typeface="Myanmar Text"/>
+        <a:font script="Nkoo" typeface="Ebrima"/>
+        <a:font script="Olck" typeface="Nirmala UI"/>
+        <a:font script="Osma" typeface="Ebrima"/>
+        <a:font script="Phag" typeface="Phagspa"/>
+        <a:font script="Syrn" typeface="Estrangelo Edessa"/>
+        <a:font script="Syrj" typeface="Estrangelo Edessa"/>
+        <a:font script="Syre" typeface="Estrangelo Edessa"/>
+        <a:font script="Sora" typeface="Nirmala UI"/>
+        <a:font script="Tale" typeface="Microsoft Tai Le"/>
+        <a:font script="Talu" typeface="Microsoft New Tai Lue"/>
+        <a:font script="Tfng" typeface="Ebrima"/>
       </a:majorFont>
       <a:minorFont>
-        <a:latin typeface="Calibri"/>
+        <a:latin typeface="Aptos" panose="02110004020202020204"/>
         <a:ea typeface=""/>
         <a:cs typeface=""/>
-        <a:font script="Jpan" typeface="ＭＳ Ｐゴシック"/>
+        <a:font script="Jpan" typeface="游ゴシック"/>
         <a:font script="Hang" typeface="맑은 고딕"/>
-        <a:font script="Hans" typeface="宋体"/>
+        <a:font script="Hans" typeface="等线"/>
         <a:font script="Hant" typeface="新細明體"/>
         <a:font script="Arab" typeface="Arial"/>
         <a:font script="Hebr" typeface="Arial"/>
@@ -12816,6 +12396,23 @@
         <a:font script="Viet" typeface="Arial"/>
         <a:font script="Uigh" typeface="Microsoft Uighur"/>
         <a:font script="Geor" typeface="Sylfaen"/>
+        <a:font script="Armn" typeface="Arial"/>
+        <a:font script="Bugi" typeface="Leelawadee UI"/>
+        <a:font script="Bopo" typeface="Microsoft JhengHei"/>
+        <a:font script="Java" typeface="Javanese Text"/>
+        <a:font script="Lisu" typeface="Segoe UI"/>
+        <a:font script="Mymr" typeface="Myanmar Text"/>
+        <a:font script="Nkoo" typeface="Ebrima"/>
+        <a:font script="Olck" typeface="Nirmala UI"/>
+        <a:font script="Osma" typeface="Ebrima"/>
+        <a:font script="Phag" typeface="Phagspa"/>
+        <a:font script="Syrn" typeface="Estrangelo Edessa"/>
+        <a:font script="Syrj" typeface="Estrangelo Edessa"/>
+        <a:font script="Syre" typeface="Estrangelo Edessa"/>
+        <a:font script="Sora" typeface="Nirmala UI"/>
+        <a:font script="Tale" typeface="Microsoft Tai Le"/>
+        <a:font script="Talu" typeface="Microsoft New Tai Lue"/>
+        <a:font script="Tfng" typeface="Ebrima"/>
       </a:minorFont>
     </a:fontScheme>
     <a:fmtScheme name="Office">
@@ -12827,180 +12424,136 @@
           <a:gsLst>
             <a:gs pos="0">
               <a:schemeClr val="phClr">
-                <a:tint val="50000"/>
-                <a:satMod val="300000"/>
+                <a:lumMod val="110000"/>
+                <a:satMod val="105000"/>
+                <a:tint val="67000"/>
               </a:schemeClr>
             </a:gs>
-            <a:gs pos="35000">
+            <a:gs pos="50000">
               <a:schemeClr val="phClr">
-                <a:tint val="37000"/>
-                <a:satMod val="300000"/>
+                <a:lumMod val="105000"/>
+                <a:satMod val="103000"/>
+                <a:tint val="73000"/>
               </a:schemeClr>
             </a:gs>
             <a:gs pos="100000">
               <a:schemeClr val="phClr">
-                <a:tint val="15000"/>
-                <a:satMod val="350000"/>
+                <a:lumMod val="105000"/>
+                <a:satMod val="109000"/>
+                <a:tint val="81000"/>
               </a:schemeClr>
             </a:gs>
           </a:gsLst>
-          <a:lin ang="16200000" scaled="1"/>
+          <a:lin ang="5400000" scaled="0"/>
         </a:gradFill>
         <a:gradFill rotWithShape="1">
           <a:gsLst>
             <a:gs pos="0">
               <a:schemeClr val="phClr">
-                <a:tint val="100000"/>
+                <a:satMod val="103000"/>
+                <a:lumMod val="102000"/>
+                <a:tint val="94000"/>
+              </a:schemeClr>
+            </a:gs>
+            <a:gs pos="50000">
+              <a:schemeClr val="phClr">
+                <a:satMod val="110000"/>
+                <a:lumMod val="100000"/>
                 <a:shade val="100000"/>
-                <a:satMod val="130000"/>
               </a:schemeClr>
             </a:gs>
             <a:gs pos="100000">
               <a:schemeClr val="phClr">
-                <a:tint val="50000"/>
-                <a:shade val="100000"/>
-                <a:satMod val="350000"/>
+                <a:lumMod val="99000"/>
+                <a:satMod val="120000"/>
+                <a:shade val="78000"/>
               </a:schemeClr>
             </a:gs>
           </a:gsLst>
-          <a:lin ang="16200000" scaled="0"/>
+          <a:lin ang="5400000" scaled="0"/>
         </a:gradFill>
       </a:fillStyleLst>
       <a:lnStyleLst>
-        <a:ln w="9525" cap="flat" cmpd="sng" algn="ctr">
+        <a:ln w="12700" cap="flat" cmpd="sng" algn="ctr">
           <a:solidFill>
-            <a:schemeClr val="phClr">
-              <a:shade val="95000"/>
-              <a:satMod val="105000"/>
-            </a:schemeClr>
+            <a:schemeClr val="phClr"/>
           </a:solidFill>
           <a:prstDash val="solid"/>
+          <a:miter lim="800000"/>
+        </a:ln>
+        <a:ln w="19050" cap="flat" cmpd="sng" algn="ctr">
+          <a:solidFill>
+            <a:schemeClr val="phClr"/>
+          </a:solidFill>
+          <a:prstDash val="solid"/>
+          <a:miter lim="800000"/>
         </a:ln>
         <a:ln w="25400" cap="flat" cmpd="sng" algn="ctr">
           <a:solidFill>
             <a:schemeClr val="phClr"/>
           </a:solidFill>
           <a:prstDash val="solid"/>
-        </a:ln>
-        <a:ln w="38100" cap="flat" cmpd="sng" algn="ctr">
-          <a:solidFill>
-            <a:schemeClr val="phClr"/>
-          </a:solidFill>
-          <a:prstDash val="solid"/>
+          <a:miter lim="800000"/>
         </a:ln>
       </a:lnStyleLst>
       <a:effectStyleLst>
         <a:effectStyle>
+          <a:effectLst/>
+        </a:effectStyle>
+        <a:effectStyle>
+          <a:effectLst/>
+        </a:effectStyle>
+        <a:effectStyle>
           <a:effectLst>
-            <a:outerShdw blurRad="40000" dist="20000" dir="5400000" rotWithShape="0">
+            <a:outerShdw blurRad="57150" dist="19050" dir="5400000" algn="ctr" rotWithShape="0">
               <a:srgbClr val="000000">
-                <a:alpha val="38000"/>
+                <a:alpha val="63000"/>
               </a:srgbClr>
             </a:outerShdw>
           </a:effectLst>
-        </a:effectStyle>
-        <a:effectStyle>
-          <a:effectLst>
-            <a:outerShdw blurRad="40000" dist="23000" dir="5400000" rotWithShape="0">
-              <a:srgbClr val="000000">
-                <a:alpha val="35000"/>
-              </a:srgbClr>
-            </a:outerShdw>
-          </a:effectLst>
-        </a:effectStyle>
-        <a:effectStyle>
-          <a:effectLst>
-            <a:outerShdw blurRad="40000" dist="23000" dir="5400000" rotWithShape="0">
-              <a:srgbClr val="000000">
-                <a:alpha val="35000"/>
-              </a:srgbClr>
-            </a:outerShdw>
-          </a:effectLst>
-          <a:scene3d>
-            <a:camera prst="orthographicFront">
-              <a:rot lat="0" lon="0" rev="0"/>
-            </a:camera>
-            <a:lightRig rig="threePt" dir="t">
-              <a:rot lat="0" lon="0" rev="1200000"/>
-            </a:lightRig>
-          </a:scene3d>
-          <a:sp3d>
-            <a:bevelT w="63500" h="25400"/>
-          </a:sp3d>
         </a:effectStyle>
       </a:effectStyleLst>
       <a:bgFillStyleLst>
         <a:solidFill>
           <a:schemeClr val="phClr"/>
         </a:solidFill>
+        <a:solidFill>
+          <a:schemeClr val="phClr">
+            <a:tint val="95000"/>
+            <a:satMod val="170000"/>
+          </a:schemeClr>
+        </a:solidFill>
         <a:gradFill rotWithShape="1">
           <a:gsLst>
             <a:gs pos="0">
               <a:schemeClr val="phClr">
-                <a:tint val="40000"/>
-                <a:satMod val="350000"/>
+                <a:tint val="93000"/>
+                <a:satMod val="150000"/>
+                <a:shade val="98000"/>
+                <a:lumMod val="102000"/>
               </a:schemeClr>
             </a:gs>
-            <a:gs pos="40000">
+            <a:gs pos="50000">
               <a:schemeClr val="phClr">
-                <a:tint val="45000"/>
-                <a:shade val="99000"/>
-                <a:satMod val="350000"/>
+                <a:tint val="98000"/>
+                <a:satMod val="130000"/>
+                <a:shade val="90000"/>
+                <a:lumMod val="103000"/>
               </a:schemeClr>
             </a:gs>
             <a:gs pos="100000">
               <a:schemeClr val="phClr">
-                <a:shade val="20000"/>
-                <a:satMod val="255000"/>
+                <a:shade val="63000"/>
+                <a:satMod val="120000"/>
               </a:schemeClr>
             </a:gs>
           </a:gsLst>
-          <a:path path="circle">
-            <a:fillToRect l="50000" t="-80000" r="50000" b="180000"/>
-          </a:path>
-        </a:gradFill>
-        <a:gradFill rotWithShape="1">
-          <a:gsLst>
-            <a:gs pos="0">
-              <a:schemeClr val="phClr">
-                <a:tint val="80000"/>
-                <a:satMod val="300000"/>
-              </a:schemeClr>
-            </a:gs>
-            <a:gs pos="100000">
-              <a:schemeClr val="phClr">
-                <a:shade val="30000"/>
-                <a:satMod val="200000"/>
-              </a:schemeClr>
-            </a:gs>
-          </a:gsLst>
-          <a:path path="circle">
-            <a:fillToRect l="50000" t="50000" r="50000" b="50000"/>
-          </a:path>
+          <a:lin ang="5400000" scaled="0"/>
         </a:gradFill>
       </a:bgFillStyleLst>
     </a:fmtScheme>
   </a:themeElements>
   <a:objectDefaults>
-    <a:spDef>
-      <a:spPr/>
-      <a:bodyPr/>
-      <a:lstStyle/>
-      <a:style>
-        <a:lnRef idx="1">
-          <a:schemeClr val="accent1"/>
-        </a:lnRef>
-        <a:fillRef idx="3">
-          <a:schemeClr val="accent1"/>
-        </a:fillRef>
-        <a:effectRef idx="2">
-          <a:schemeClr val="accent1"/>
-        </a:effectRef>
-        <a:fontRef idx="minor">
-          <a:schemeClr val="lt1"/>
-        </a:fontRef>
-      </a:style>
-    </a:spDef>
     <a:lnDef>
       <a:spPr/>
       <a:bodyPr/>
@@ -13022,5 +12575,10 @@
     </a:lnDef>
   </a:objectDefaults>
   <a:extraClrSchemeLst/>
+  <a:extLst>
+    <a:ext uri="{05A4C25C-085E-4340-85A3-A5531E510DB2}">
+      <thm15:themeFamily xmlns:thm15="http://schemas.microsoft.com/office/thememl/2012/main" name="Office Theme" id="{2E142A2C-CD16-42D6-873A-C26D2A0506FA}" vid="{1BDDFF52-6CD6-40A5-AB3C-68EB2F1E4D0A}"/>
+    </a:ext>
+  </a:extLst>
 </a:theme>
 </file>
--- a/docs/AIForgeCrew-CTO-Summary.pptx
+++ b/docs/AIForgeCrew-CTO-Summary.pptx
@@ -4,15 +4,12 @@
   <p:sldMasterIdLst>
     <p:sldMasterId id="2147483648" r:id="rId1"/>
   </p:sldMasterIdLst>
-  <p:notesMasterIdLst>
-    <p:notesMasterId r:id="rId5"/>
-  </p:notesMasterIdLst>
   <p:sldIdLst>
-    <p:sldId id="256" r:id="rId2"/>
-    <p:sldId id="257" r:id="rId3"/>
-    <p:sldId id="258" r:id="rId4"/>
+    <p:sldId id="256" r:id="rId7"/>
+    <p:sldId id="257" r:id="rId9"/>
+    <p:sldId id="258" r:id="rId10"/>
   </p:sldIdLst>
-  <p:sldSz cx="12192000" cy="6858000"/>
+  <p:sldSz cx="12191695" cy="6858000" type="screen4x3"/>
   <p:notesSz cx="6858000" cy="9144000"/>
   <p:defaultTextStyle>
     <a:defPPr>
@@ -109,27 +106,11 @@
       </a:defRPr>
     </a:lvl9pPr>
   </p:defaultTextStyle>
-  <p:extLst>
-    <p:ext uri="{EFAFB233-063F-42B5-8137-9DF3F51BA10A}">
-      <p15:sldGuideLst xmlns:p15="http://schemas.microsoft.com/office/powerpoint/2012/main">
-        <p15:guide id="1" orient="horz" pos="2160">
-          <p15:clr>
-            <a:srgbClr val="A4A3A4"/>
-          </p15:clr>
-        </p15:guide>
-        <p15:guide id="2" pos="2880">
-          <p15:clr>
-            <a:srgbClr val="A4A3A4"/>
-          </p15:clr>
-        </p15:guide>
-      </p15:sldGuideLst>
-    </p:ext>
-  </p:extLst>
 </p:presentation>
 </file>
 
 <file path=ppt/notesMasters/notesMaster1.xml><?xml version="1.0" encoding="utf-8"?>
-<p:notesMaster xmlns:a="http://schemas.openxmlformats.org/drawingml/2006/main" xmlns:r="http://schemas.openxmlformats.org/officeDocument/2006/relationships" xmlns:p="http://schemas.openxmlformats.org/presentationml/2006/main">
+<p:notesMaster xmlns:a="http://schemas.openxmlformats.org/drawingml/2006/main" xmlns:p="http://schemas.openxmlformats.org/presentationml/2006/main" xmlns:r="http://schemas.openxmlformats.org/officeDocument/2006/relationships">
   <p:cSld>
     <p:bg>
       <p:bgRef idx="1001">
@@ -150,16 +131,241 @@
           <a:chExt cx="0" cy="0"/>
         </a:xfrm>
       </p:grpSpPr>
+      <p:sp>
+        <p:nvSpPr>
+          <p:cNvPr id="2" name="Header Placeholder 1"/>
+          <p:cNvSpPr>
+            <a:spLocks noGrp="1"/>
+          </p:cNvSpPr>
+          <p:nvPr>
+            <p:ph type="hdr" sz="quarter"/>
+          </p:nvPr>
+        </p:nvSpPr>
+        <p:spPr>
+          <a:xfrm>
+            <a:off x="0" y="0"/>
+            <a:ext cx="2971800" cy="457200"/>
+          </a:xfrm>
+          <a:prstGeom prst="rect">
+            <a:avLst/>
+          </a:prstGeom>
+        </p:spPr>
+        <p:txBody>
+          <a:bodyPr vert="horz" lIns="91440" tIns="45720" rIns="91440" bIns="45720" rtlCol="0"/>
+          <a:lstStyle>
+            <a:lvl1pPr algn="l">
+              <a:defRPr sz="1200"/>
+            </a:lvl1pPr>
+          </a:lstStyle>
+          <a:p>
+            <a:endParaRPr lang="en-US"/>
+          </a:p>
+        </p:txBody>
+      </p:sp>
+      <p:sp>
+        <p:nvSpPr>
+          <p:cNvPr id="3" name="Date Placeholder 2"/>
+          <p:cNvSpPr>
+            <a:spLocks noGrp="1"/>
+          </p:cNvSpPr>
+          <p:nvPr>
+            <p:ph type="dt" idx="1"/>
+          </p:nvPr>
+        </p:nvSpPr>
+        <p:spPr>
+          <a:xfrm>
+            <a:off x="3884613" y="0"/>
+            <a:ext cx="2971800" cy="457200"/>
+          </a:xfrm>
+          <a:prstGeom prst="rect">
+            <a:avLst/>
+          </a:prstGeom>
+        </p:spPr>
+        <p:txBody>
+          <a:bodyPr vert="horz" lIns="91440" tIns="45720" rIns="91440" bIns="45720" rtlCol="0"/>
+          <a:lstStyle>
+            <a:lvl1pPr algn="r">
+              <a:defRPr sz="1200"/>
+            </a:lvl1pPr>
+          </a:lstStyle>
+          <a:p>
+            <a:fld id="{0F89C1C7-3DCD-1040-A9CF-14679D8B5DDD}" type="datetimeFigureOut">
+              <a:rPr lang="en-US" smtClean="0"/>
+              <a:t>10/17/16</a:t>
+            </a:fld>
+            <a:endParaRPr lang="en-US"/>
+          </a:p>
+        </p:txBody>
+      </p:sp>
+      <p:sp>
+        <p:nvSpPr>
+          <p:cNvPr id="4" name="Slide Image Placeholder 3"/>
+          <p:cNvSpPr>
+            <a:spLocks noGrp="1" noRot="1" noChangeAspect="1"/>
+          </p:cNvSpPr>
+          <p:nvPr>
+            <p:ph type="sldImg" idx="2"/>
+          </p:nvPr>
+        </p:nvSpPr>
+        <p:spPr>
+          <a:xfrm>
+            <a:off x="1143000" y="685800"/>
+            <a:ext cx="4572000" cy="3429000"/>
+          </a:xfrm>
+          <a:prstGeom prst="rect">
+            <a:avLst/>
+          </a:prstGeom>
+          <a:noFill/>
+          <a:ln w="12700">
+            <a:solidFill>
+              <a:prstClr val="black"/>
+            </a:solidFill>
+          </a:ln>
+        </p:spPr>
+        <p:txBody>
+          <a:bodyPr vert="horz" lIns="91440" tIns="45720" rIns="91440" bIns="45720" rtlCol="0" anchor="ctr"/>
+          <a:lstStyle/>
+          <a:p>
+            <a:endParaRPr lang="en-US"/>
+          </a:p>
+        </p:txBody>
+      </p:sp>
+      <p:sp>
+        <p:nvSpPr>
+          <p:cNvPr id="5" name="Notes Placeholder 4"/>
+          <p:cNvSpPr>
+            <a:spLocks noGrp="1"/>
+          </p:cNvSpPr>
+          <p:nvPr>
+            <p:ph type="body" sz="quarter" idx="3"/>
+          </p:nvPr>
+        </p:nvSpPr>
+        <p:spPr>
+          <a:xfrm>
+            <a:off x="685800" y="4343400"/>
+            <a:ext cx="5486400" cy="4114800"/>
+          </a:xfrm>
+          <a:prstGeom prst="rect">
+            <a:avLst/>
+          </a:prstGeom>
+        </p:spPr>
+        <p:txBody>
+          <a:bodyPr vert="horz" lIns="91440" tIns="45720" rIns="91440" bIns="45720" rtlCol="0"/>
+          <a:lstStyle/>
+          <a:p>
+            <a:pPr lvl="0"/>
+            <a:r>
+              <a:rPr lang="en-US" smtClean="0"/>
+              <a:t>Click to edit Master text styles</a:t>
+            </a:r>
+          </a:p>
+          <a:p>
+            <a:pPr lvl="1"/>
+            <a:r>
+              <a:rPr lang="en-US" smtClean="0"/>
+              <a:t>Second level</a:t>
+            </a:r>
+          </a:p>
+          <a:p>
+            <a:pPr lvl="2"/>
+            <a:r>
+              <a:rPr lang="en-US" smtClean="0"/>
+              <a:t>Third level</a:t>
+            </a:r>
+          </a:p>
+          <a:p>
+            <a:pPr lvl="3"/>
+            <a:r>
+              <a:rPr lang="en-US" smtClean="0"/>
+              <a:t>Fourth level</a:t>
+            </a:r>
+          </a:p>
+          <a:p>
+            <a:pPr lvl="4"/>
+            <a:r>
+              <a:rPr lang="en-US" smtClean="0"/>
+              <a:t>Fifth level</a:t>
+            </a:r>
+            <a:endParaRPr lang="en-US"/>
+          </a:p>
+        </p:txBody>
+      </p:sp>
+      <p:sp>
+        <p:nvSpPr>
+          <p:cNvPr id="6" name="Footer Placeholder 5"/>
+          <p:cNvSpPr>
+            <a:spLocks noGrp="1"/>
+          </p:cNvSpPr>
+          <p:nvPr>
+            <p:ph type="ftr" sz="quarter" idx="4"/>
+          </p:nvPr>
+        </p:nvSpPr>
+        <p:spPr>
+          <a:xfrm>
+            <a:off x="0" y="8685213"/>
+            <a:ext cx="2971800" cy="457200"/>
+          </a:xfrm>
+          <a:prstGeom prst="rect">
+            <a:avLst/>
+          </a:prstGeom>
+        </p:spPr>
+        <p:txBody>
+          <a:bodyPr vert="horz" lIns="91440" tIns="45720" rIns="91440" bIns="45720" rtlCol="0" anchor="b"/>
+          <a:lstStyle>
+            <a:lvl1pPr algn="l">
+              <a:defRPr sz="1200"/>
+            </a:lvl1pPr>
+          </a:lstStyle>
+          <a:p>
+            <a:endParaRPr lang="en-US"/>
+          </a:p>
+        </p:txBody>
+      </p:sp>
+      <p:sp>
+        <p:nvSpPr>
+          <p:cNvPr id="7" name="Slide Number Placeholder 6"/>
+          <p:cNvSpPr>
+            <a:spLocks noGrp="1"/>
+          </p:cNvSpPr>
+          <p:nvPr>
+            <p:ph type="sldNum" sz="quarter" idx="5"/>
+          </p:nvPr>
+        </p:nvSpPr>
+        <p:spPr>
+          <a:xfrm>
+            <a:off x="3884613" y="8685213"/>
+            <a:ext cx="2971800" cy="457200"/>
+          </a:xfrm>
+          <a:prstGeom prst="rect">
+            <a:avLst/>
+          </a:prstGeom>
+        </p:spPr>
+        <p:txBody>
+          <a:bodyPr vert="horz" lIns="91440" tIns="45720" rIns="91440" bIns="45720" rtlCol="0" anchor="b"/>
+          <a:lstStyle>
+            <a:lvl1pPr algn="r">
+              <a:defRPr sz="1200"/>
+            </a:lvl1pPr>
+          </a:lstStyle>
+          <a:p>
+            <a:fld id="{BB5E49A5-4136-284D-997B-48E1D791AD67}" type="slidenum">
+              <a:rPr lang="en-US" smtClean="0"/>
+              <a:t>‹#›</a:t>
+            </a:fld>
+            <a:endParaRPr lang="en-US"/>
+          </a:p>
+        </p:txBody>
+      </p:sp>
     </p:spTree>
     <p:extLst>
       <p:ext uri="{BB962C8B-B14F-4D97-AF65-F5344CB8AC3E}">
-        <p14:creationId xmlns:p14="http://schemas.microsoft.com/office/powerpoint/2010/main" val="932693356"/>
+        <p14:creationId xmlns:p14="http://schemas.microsoft.com/office/powerpoint/2010/main" val="2623252185"/>
       </p:ext>
     </p:extLst>
   </p:cSld>
   <p:clrMap bg1="lt1" tx1="dk1" bg2="lt2" tx2="dk2" accent1="accent1" accent2="accent2" accent3="accent3" accent4="accent4" accent5="accent5" accent6="accent6" hlink="hlink" folHlink="folHlink"/>
   <p:notesStyle>
-    <a:lvl1pPr marL="0" algn="l" defTabSz="914400" rtl="0" eaLnBrk="1" latinLnBrk="0" hangingPunct="1">
+    <a:lvl1pPr marL="0" algn="l" defTabSz="457200" rtl="0" eaLnBrk="1" latinLnBrk="0" hangingPunct="1">
       <a:defRPr sz="1200" kern="1200">
         <a:solidFill>
           <a:schemeClr val="tx1"/>
@@ -169,7 +375,7 @@
         <a:cs typeface="+mn-cs"/>
       </a:defRPr>
     </a:lvl1pPr>
-    <a:lvl2pPr marL="457200" algn="l" defTabSz="914400" rtl="0" eaLnBrk="1" latinLnBrk="0" hangingPunct="1">
+    <a:lvl2pPr marL="457200" algn="l" defTabSz="457200" rtl="0" eaLnBrk="1" latinLnBrk="0" hangingPunct="1">
       <a:defRPr sz="1200" kern="1200">
         <a:solidFill>
           <a:schemeClr val="tx1"/>
@@ -179,7 +385,7 @@
         <a:cs typeface="+mn-cs"/>
       </a:defRPr>
     </a:lvl2pPr>
-    <a:lvl3pPr marL="914400" algn="l" defTabSz="914400" rtl="0" eaLnBrk="1" latinLnBrk="0" hangingPunct="1">
+    <a:lvl3pPr marL="914400" algn="l" defTabSz="457200" rtl="0" eaLnBrk="1" latinLnBrk="0" hangingPunct="1">
       <a:defRPr sz="1200" kern="1200">
         <a:solidFill>
           <a:schemeClr val="tx1"/>
@@ -189,7 +395,7 @@
         <a:cs typeface="+mn-cs"/>
       </a:defRPr>
     </a:lvl3pPr>
-    <a:lvl4pPr marL="1371600" algn="l" defTabSz="914400" rtl="0" eaLnBrk="1" latinLnBrk="0" hangingPunct="1">
+    <a:lvl4pPr marL="1371600" algn="l" defTabSz="457200" rtl="0" eaLnBrk="1" latinLnBrk="0" hangingPunct="1">
       <a:defRPr sz="1200" kern="1200">
         <a:solidFill>
           <a:schemeClr val="tx1"/>
@@ -199,7 +405,7 @@
         <a:cs typeface="+mn-cs"/>
       </a:defRPr>
     </a:lvl4pPr>
-    <a:lvl5pPr marL="1828800" algn="l" defTabSz="914400" rtl="0" eaLnBrk="1" latinLnBrk="0" hangingPunct="1">
+    <a:lvl5pPr marL="1828800" algn="l" defTabSz="457200" rtl="0" eaLnBrk="1" latinLnBrk="0" hangingPunct="1">
       <a:defRPr sz="1200" kern="1200">
         <a:solidFill>
           <a:schemeClr val="tx1"/>
@@ -209,7 +415,7 @@
         <a:cs typeface="+mn-cs"/>
       </a:defRPr>
     </a:lvl5pPr>
-    <a:lvl6pPr marL="2286000" algn="l" defTabSz="914400" rtl="0" eaLnBrk="1" latinLnBrk="0" hangingPunct="1">
+    <a:lvl6pPr marL="2286000" algn="l" defTabSz="457200" rtl="0" eaLnBrk="1" latinLnBrk="0" hangingPunct="1">
       <a:defRPr sz="1200" kern="1200">
         <a:solidFill>
           <a:schemeClr val="tx1"/>
@@ -219,7 +425,7 @@
         <a:cs typeface="+mn-cs"/>
       </a:defRPr>
     </a:lvl6pPr>
-    <a:lvl7pPr marL="2743200" algn="l" defTabSz="914400" rtl="0" eaLnBrk="1" latinLnBrk="0" hangingPunct="1">
+    <a:lvl7pPr marL="2743200" algn="l" defTabSz="457200" rtl="0" eaLnBrk="1" latinLnBrk="0" hangingPunct="1">
       <a:defRPr sz="1200" kern="1200">
         <a:solidFill>
           <a:schemeClr val="tx1"/>
@@ -229,7 +435,7 @@
         <a:cs typeface="+mn-cs"/>
       </a:defRPr>
     </a:lvl7pPr>
-    <a:lvl8pPr marL="3200400" algn="l" defTabSz="914400" rtl="0" eaLnBrk="1" latinLnBrk="0" hangingPunct="1">
+    <a:lvl8pPr marL="3200400" algn="l" defTabSz="457200" rtl="0" eaLnBrk="1" latinLnBrk="0" hangingPunct="1">
       <a:defRPr sz="1200" kern="1200">
         <a:solidFill>
           <a:schemeClr val="tx1"/>
@@ -239,7 +445,7 @@
         <a:cs typeface="+mn-cs"/>
       </a:defRPr>
     </a:lvl8pPr>
-    <a:lvl9pPr marL="3657600" algn="l" defTabSz="914400" rtl="0" eaLnBrk="1" latinLnBrk="0" hangingPunct="1">
+    <a:lvl9pPr marL="3657600" algn="l" defTabSz="457200" rtl="0" eaLnBrk="1" latinLnBrk="0" hangingPunct="1">
       <a:defRPr sz="1200" kern="1200">
         <a:solidFill>
           <a:schemeClr val="tx1"/>
@@ -254,7 +460,7 @@
 </file>
 
 <file path=ppt/notesSlides/notesSlide1.xml><?xml version="1.0" encoding="utf-8"?>
-<p:notes xmlns:a="http://schemas.openxmlformats.org/drawingml/2006/main" xmlns:r="http://schemas.openxmlformats.org/officeDocument/2006/relationships" xmlns:p="http://schemas.openxmlformats.org/presentationml/2006/main">
+<p:notes xmlns:a="http://schemas.openxmlformats.org/drawingml/2006/main" xmlns:p="http://schemas.openxmlformats.org/presentationml/2006/main" xmlns:r="http://schemas.openxmlformats.org/officeDocument/2006/relationships">
   <p:cSld>
     <p:spTree>
       <p:nvGrpSpPr>
@@ -274,7 +480,7 @@
         <p:nvSpPr>
           <p:cNvPr id="2" name="Slide Image Placeholder 1"/>
           <p:cNvSpPr>
-            <a:spLocks noGrp="1" noRot="1" noChangeAspect="1"/>
+            <a:spLocks noGrp="1"/>
           </p:cNvSpPr>
           <p:nvPr>
             <p:ph type="sldImg" idx="2"/>
@@ -289,7 +495,7 @@
             <a:spLocks noGrp="1"/>
           </p:cNvSpPr>
           <p:nvPr>
-            <p:ph type="body" sz="quarter" idx="3"/>
+            <p:ph type="body" idx="3" sz="quarter"/>
           </p:nvPr>
         </p:nvSpPr>
         <p:spPr/>
@@ -326,9 +532,7 @@
               <a:t>the environment and migrates in place.</a:t>
             </a:r>
           </a:p>
-          <a:p>
-            <a:endParaRPr/>
-          </a:p>
+          <a:p/>
           <a:p>
             <a:r>
               <a:t>The pipeline in full: Triage, Enhancer, Architect, Planner, Verifier, then a</a:t>
@@ -364,9 +568,7 @@
               <a:t>mode is read-only, Team mode runs the whole pipeline.</a:t>
             </a:r>
           </a:p>
-          <a:p>
-            <a:endParaRPr/>
-          </a:p>
+          <a:p/>
           <a:p>
             <a:r>
               <a:t>Rules, skills and workflows are markdown the agent writes and reuses; a nightly</a:t>
@@ -382,9 +584,7 @@
               <a:t>the members' scopes rather than silently narrowing one.</a:t>
             </a:r>
           </a:p>
-          <a:p>
-            <a:endParaRPr/>
-          </a:p>
+          <a:p/>
           <a:p>
             <a:r>
               <a:t>Integrations: Jira 21 tools, Confluence 14, GitLab 10, plus GitHub, e-mail and</a:t>
@@ -415,9 +615,7 @@
               <a:t>model can screenshot the running app and answer questions about it.</a:t>
             </a:r>
           </a:p>
-          <a:p>
-            <a:endParaRPr/>
-          </a:p>
+          <a:p/>
           <a:p>
             <a:r>
               <a:t>If your estate runs its own certificate authority, one setting —</a:t>
@@ -442,7 +640,7 @@
             <a:spLocks noGrp="1"/>
           </p:cNvSpPr>
           <p:nvPr>
-            <p:ph type="sldNum" sz="quarter" idx="5"/>
+            <p:ph type="sldNum" idx="5" sz="quarter"/>
           </p:nvPr>
         </p:nvSpPr>
         <p:spPr/>
@@ -456,7 +654,7 @@
 </file>
 
 <file path=ppt/notesSlides/notesSlide2.xml><?xml version="1.0" encoding="utf-8"?>
-<p:notes xmlns:a="http://schemas.openxmlformats.org/drawingml/2006/main" xmlns:r="http://schemas.openxmlformats.org/officeDocument/2006/relationships" xmlns:p="http://schemas.openxmlformats.org/presentationml/2006/main">
+<p:notes xmlns:a="http://schemas.openxmlformats.org/drawingml/2006/main" xmlns:p="http://schemas.openxmlformats.org/presentationml/2006/main" xmlns:r="http://schemas.openxmlformats.org/officeDocument/2006/relationships">
   <p:cSld>
     <p:spTree>
       <p:nvGrpSpPr>
@@ -476,7 +674,7 @@
         <p:nvSpPr>
           <p:cNvPr id="2" name="Slide Image Placeholder 1"/>
           <p:cNvSpPr>
-            <a:spLocks noGrp="1" noRot="1" noChangeAspect="1"/>
+            <a:spLocks noGrp="1"/>
           </p:cNvSpPr>
           <p:nvPr>
             <p:ph type="sldImg" idx="2"/>
@@ -491,7 +689,7 @@
             <a:spLocks noGrp="1"/>
           </p:cNvSpPr>
           <p:nvPr>
-            <p:ph type="body" sz="quarter" idx="3"/>
+            <p:ph type="body" idx="3" sz="quarter"/>
           </p:nvPr>
         </p:nvSpPr>
         <p:spPr/>
@@ -523,9 +721,7 @@
               <a:t>entry is DENIED rather than escalated to a human.</a:t>
             </a:r>
           </a:p>
-          <a:p>
-            <a:endParaRPr/>
-          </a:p>
+          <a:p/>
           <a:p>
             <a:r>
               <a:t>Refused outbound: scp, rsync, sftp, ssh host 'cmd', curl -d/-F/-T, aws s3 cp,</a:t>
@@ -571,9 +767,7 @@
               <a:t>that blocks ordinary work is a control that gets switched off.</a:t>
             </a:r>
           </a:p>
-          <a:p>
-            <a:endParaRPr/>
-          </a:p>
+          <a:p/>
           <a:p>
             <a:r>
               <a:t>Access: a token is required on every API route but health; a non-loopback bind</a:t>
@@ -604,9 +798,7 @@
               <a:t>shared token, so no per-user identity or SSO yet.</a:t>
             </a:r>
           </a:p>
-          <a:p>
-            <a:endParaRPr/>
-          </a:p>
+          <a:p/>
           <a:p>
             <a:r>
               <a:t>Untrusted input: a ticket description, a fetched page or a review comment</a:t>
@@ -632,9 +824,7 @@
               <a:t>mode cannot write, and unattended runs refuse writes outright.</a:t>
             </a:r>
           </a:p>
-          <a:p>
-            <a:endParaRPr/>
-          </a:p>
+          <a:p/>
           <a:p>
             <a:r>
               <a:t>Certificates and secrets: no CERT_NONE anywhere. One AIFORGE_CA_BUNDLE covers</a:t>
@@ -660,9 +850,7 @@
               <a:t>on boot.</a:t>
             </a:r>
           </a:p>
-          <a:p>
-            <a:endParaRPr/>
-          </a:p>
+          <a:p/>
           <a:p>
             <a:r>
               <a:t>Cost: a rate ceiling in requests per minute per role keeps background work from</a:t>
@@ -688,9 +876,7 @@
               <a:t>endpoint the marginal cost of a run is electricity.</a:t>
             </a:r>
           </a:p>
-          <a:p>
-            <a:endParaRPr/>
-          </a:p>
+          <a:p/>
           <a:p>
             <a:r>
               <a:t>Every control above began as a bypass that WORKED in testing, and each is</a:t>
@@ -710,7 +896,7 @@
             <a:spLocks noGrp="1"/>
           </p:cNvSpPr>
           <p:nvPr>
-            <p:ph type="sldNum" sz="quarter" idx="5"/>
+            <p:ph type="sldNum" idx="5" sz="quarter"/>
           </p:nvPr>
         </p:nvSpPr>
         <p:spPr/>
@@ -724,7 +910,7 @@
 </file>
 
 <file path=ppt/notesSlides/notesSlide3.xml><?xml version="1.0" encoding="utf-8"?>
-<p:notes xmlns:a="http://schemas.openxmlformats.org/drawingml/2006/main" xmlns:r="http://schemas.openxmlformats.org/officeDocument/2006/relationships" xmlns:p="http://schemas.openxmlformats.org/presentationml/2006/main">
+<p:notes xmlns:a="http://schemas.openxmlformats.org/drawingml/2006/main" xmlns:p="http://schemas.openxmlformats.org/presentationml/2006/main" xmlns:r="http://schemas.openxmlformats.org/officeDocument/2006/relationships">
   <p:cSld>
     <p:spTree>
       <p:nvGrpSpPr>
@@ -744,7 +930,7 @@
         <p:nvSpPr>
           <p:cNvPr id="2" name="Slide Image Placeholder 1"/>
           <p:cNvSpPr>
-            <a:spLocks noGrp="1" noRot="1" noChangeAspect="1"/>
+            <a:spLocks noGrp="1"/>
           </p:cNvSpPr>
           <p:nvPr>
             <p:ph type="sldImg" idx="2"/>
@@ -759,7 +945,7 @@
             <a:spLocks noGrp="1"/>
           </p:cNvSpPr>
           <p:nvPr>
-            <p:ph type="body" sz="quarter" idx="3"/>
+            <p:ph type="body" idx="3" sz="quarter"/>
           </p:nvPr>
         </p:nvSpPr>
         <p:spPr/>
@@ -821,9 +1007,7 @@
               <a:t>WireGuard network, because the sync surface is open by default on purpose.</a:t>
             </a:r>
           </a:p>
-          <a:p>
-            <a:endParaRPr/>
-          </a:p>
+          <a:p/>
           <a:p>
             <a:r>
               <a:t>The quality numbers are the PLATFORM's, read off the scanner API rather than</a:t>
@@ -864,9 +1048,7 @@
               <a:t>earlier passes had triaged them as accepted decisions.</a:t>
             </a:r>
           </a:p>
-          <a:p>
-            <a:endParaRPr/>
-          </a:p>
+          <a:p/>
           <a:p>
             <a:r>
               <a:t>What that number does NOT say: it is the platform's quality, not the agent's</a:t>
@@ -907,9 +1089,7 @@
               <a:t>BOX rather than a person, with no retention or tamper-evidence.</a:t>
             </a:r>
           </a:p>
-          <a:p>
-            <a:endParaRPr/>
-          </a:p>
+          <a:p/>
           <a:p>
             <a:r>
               <a:t>The full ask list: fund the scoring harness; name an owner and a support rota;</a:t>
@@ -939,7 +1119,7 @@
             <a:spLocks noGrp="1"/>
           </p:cNvSpPr>
           <p:nvPr>
-            <p:ph type="sldNum" sz="quarter" idx="5"/>
+            <p:ph type="sldNum" idx="5" sz="quarter"/>
           </p:nvPr>
         </p:nvSpPr>
         <p:spPr/>
@@ -990,9 +1170,10 @@
           <a:lstStyle/>
           <a:p>
             <a:r>
-              <a:rPr lang="en-US"/>
+              <a:rPr lang="en-US" smtClean="0"/>
               <a:t>Click to edit Master title style</a:t>
             </a:r>
+            <a:endParaRPr lang="en-US"/>
           </a:p>
         </p:txBody>
       </p:sp>
@@ -1108,9 +1289,10 @@
           </a:lstStyle>
           <a:p>
             <a:r>
-              <a:rPr lang="en-US"/>
+              <a:rPr lang="en-US" smtClean="0"/>
               <a:t>Click to edit Master subtitle style</a:t>
             </a:r>
+            <a:endParaRPr lang="en-US"/>
           </a:p>
         </p:txBody>
       </p:sp>
@@ -1131,7 +1313,7 @@
           <a:p>
             <a:fld id="{5BCAD085-E8A6-8845-BD4E-CB4CCA059FC4}" type="datetimeFigureOut">
               <a:rPr lang="en-US" smtClean="0"/>
-              <a:t>9/7/2026</a:t>
+              <a:t>1/27/13</a:t>
             </a:fld>
             <a:endParaRPr lang="en-US"/>
           </a:p>
@@ -1225,9 +1407,10 @@
           <a:lstStyle/>
           <a:p>
             <a:r>
-              <a:rPr lang="en-US"/>
+              <a:rPr lang="en-US" smtClean="0"/>
               <a:t>Click to edit Master title style</a:t>
             </a:r>
+            <a:endParaRPr lang="en-US"/>
           </a:p>
         </p:txBody>
       </p:sp>
@@ -1248,37 +1431,38 @@
           <a:p>
             <a:pPr lvl="0"/>
             <a:r>
-              <a:rPr lang="en-US"/>
+              <a:rPr lang="en-US" smtClean="0"/>
               <a:t>Click to edit Master text styles</a:t>
             </a:r>
           </a:p>
           <a:p>
             <a:pPr lvl="1"/>
             <a:r>
-              <a:rPr lang="en-US"/>
+              <a:rPr lang="en-US" smtClean="0"/>
               <a:t>Second level</a:t>
             </a:r>
           </a:p>
           <a:p>
             <a:pPr lvl="2"/>
             <a:r>
-              <a:rPr lang="en-US"/>
+              <a:rPr lang="en-US" smtClean="0"/>
               <a:t>Third level</a:t>
             </a:r>
           </a:p>
           <a:p>
             <a:pPr lvl="3"/>
             <a:r>
-              <a:rPr lang="en-US"/>
+              <a:rPr lang="en-US" smtClean="0"/>
               <a:t>Fourth level</a:t>
             </a:r>
           </a:p>
           <a:p>
             <a:pPr lvl="4"/>
             <a:r>
-              <a:rPr lang="en-US"/>
+              <a:rPr lang="en-US" smtClean="0"/>
               <a:t>Fifth level</a:t>
             </a:r>
+            <a:endParaRPr lang="en-US"/>
           </a:p>
         </p:txBody>
       </p:sp>
@@ -1299,7 +1483,7 @@
           <a:p>
             <a:fld id="{5BCAD085-E8A6-8845-BD4E-CB4CCA059FC4}" type="datetimeFigureOut">
               <a:rPr lang="en-US" smtClean="0"/>
-              <a:t>9/7/2026</a:t>
+              <a:t>1/27/13</a:t>
             </a:fld>
             <a:endParaRPr lang="en-US"/>
           </a:p>
@@ -1398,9 +1582,10 @@
           <a:lstStyle/>
           <a:p>
             <a:r>
-              <a:rPr lang="en-US"/>
+              <a:rPr lang="en-US" smtClean="0"/>
               <a:t>Click to edit Master title style</a:t>
             </a:r>
+            <a:endParaRPr lang="en-US"/>
           </a:p>
         </p:txBody>
       </p:sp>
@@ -1426,37 +1611,38 @@
           <a:p>
             <a:pPr lvl="0"/>
             <a:r>
-              <a:rPr lang="en-US"/>
+              <a:rPr lang="en-US" smtClean="0"/>
               <a:t>Click to edit Master text styles</a:t>
             </a:r>
           </a:p>
           <a:p>
             <a:pPr lvl="1"/>
             <a:r>
-              <a:rPr lang="en-US"/>
+              <a:rPr lang="en-US" smtClean="0"/>
               <a:t>Second level</a:t>
             </a:r>
           </a:p>
           <a:p>
             <a:pPr lvl="2"/>
             <a:r>
-              <a:rPr lang="en-US"/>
+              <a:rPr lang="en-US" smtClean="0"/>
               <a:t>Third level</a:t>
             </a:r>
           </a:p>
           <a:p>
             <a:pPr lvl="3"/>
             <a:r>
-              <a:rPr lang="en-US"/>
+              <a:rPr lang="en-US" smtClean="0"/>
               <a:t>Fourth level</a:t>
             </a:r>
           </a:p>
           <a:p>
             <a:pPr lvl="4"/>
             <a:r>
-              <a:rPr lang="en-US"/>
+              <a:rPr lang="en-US" smtClean="0"/>
               <a:t>Fifth level</a:t>
             </a:r>
+            <a:endParaRPr lang="en-US"/>
           </a:p>
         </p:txBody>
       </p:sp>
@@ -1477,7 +1663,7 @@
           <a:p>
             <a:fld id="{5BCAD085-E8A6-8845-BD4E-CB4CCA059FC4}" type="datetimeFigureOut">
               <a:rPr lang="en-US" smtClean="0"/>
-              <a:t>9/7/2026</a:t>
+              <a:t>1/27/13</a:t>
             </a:fld>
             <a:endParaRPr lang="en-US"/>
           </a:p>
@@ -1571,9 +1757,10 @@
           <a:lstStyle/>
           <a:p>
             <a:r>
-              <a:rPr lang="en-US"/>
+              <a:rPr lang="en-US" smtClean="0"/>
               <a:t>Click to edit Master title style</a:t>
             </a:r>
+            <a:endParaRPr lang="en-US"/>
           </a:p>
         </p:txBody>
       </p:sp>
@@ -1594,37 +1781,38 @@
           <a:p>
             <a:pPr lvl="0"/>
             <a:r>
-              <a:rPr lang="en-US"/>
+              <a:rPr lang="en-US" smtClean="0"/>
               <a:t>Click to edit Master text styles</a:t>
             </a:r>
           </a:p>
           <a:p>
             <a:pPr lvl="1"/>
             <a:r>
-              <a:rPr lang="en-US"/>
+              <a:rPr lang="en-US" smtClean="0"/>
               <a:t>Second level</a:t>
             </a:r>
           </a:p>
           <a:p>
             <a:pPr lvl="2"/>
             <a:r>
-              <a:rPr lang="en-US"/>
+              <a:rPr lang="en-US" smtClean="0"/>
               <a:t>Third level</a:t>
             </a:r>
           </a:p>
           <a:p>
             <a:pPr lvl="3"/>
             <a:r>
-              <a:rPr lang="en-US"/>
+              <a:rPr lang="en-US" smtClean="0"/>
               <a:t>Fourth level</a:t>
             </a:r>
           </a:p>
           <a:p>
             <a:pPr lvl="4"/>
             <a:r>
-              <a:rPr lang="en-US"/>
+              <a:rPr lang="en-US" smtClean="0"/>
               <a:t>Fifth level</a:t>
             </a:r>
+            <a:endParaRPr lang="en-US"/>
           </a:p>
         </p:txBody>
       </p:sp>
@@ -1645,7 +1833,7 @@
           <a:p>
             <a:fld id="{5BCAD085-E8A6-8845-BD4E-CB4CCA059FC4}" type="datetimeFigureOut">
               <a:rPr lang="en-US" smtClean="0"/>
-              <a:t>9/7/2026</a:t>
+              <a:t>1/27/13</a:t>
             </a:fld>
             <a:endParaRPr lang="en-US"/>
           </a:p>
@@ -1748,9 +1936,10 @@
           </a:lstStyle>
           <a:p>
             <a:r>
-              <a:rPr lang="en-US"/>
+              <a:rPr lang="en-US" smtClean="0"/>
               <a:t>Click to edit Master title style</a:t>
             </a:r>
+            <a:endParaRPr lang="en-US"/>
           </a:p>
         </p:txBody>
       </p:sp>
@@ -1867,7 +2056,7 @@
           <a:p>
             <a:pPr lvl="0"/>
             <a:r>
-              <a:rPr lang="en-US"/>
+              <a:rPr lang="en-US" smtClean="0"/>
               <a:t>Click to edit Master text styles</a:t>
             </a:r>
           </a:p>
@@ -1890,7 +2079,7 @@
           <a:p>
             <a:fld id="{5BCAD085-E8A6-8845-BD4E-CB4CCA059FC4}" type="datetimeFigureOut">
               <a:rPr lang="en-US" smtClean="0"/>
-              <a:t>9/7/2026</a:t>
+              <a:t>1/27/13</a:t>
             </a:fld>
             <a:endParaRPr lang="en-US"/>
           </a:p>
@@ -1984,9 +2173,10 @@
           <a:lstStyle/>
           <a:p>
             <a:r>
-              <a:rPr lang="en-US"/>
+              <a:rPr lang="en-US" smtClean="0"/>
               <a:t>Click to edit Master title style</a:t>
             </a:r>
+            <a:endParaRPr lang="en-US"/>
           </a:p>
         </p:txBody>
       </p:sp>
@@ -2040,37 +2230,38 @@
           <a:p>
             <a:pPr lvl="0"/>
             <a:r>
-              <a:rPr lang="en-US"/>
+              <a:rPr lang="en-US" smtClean="0"/>
               <a:t>Click to edit Master text styles</a:t>
             </a:r>
           </a:p>
           <a:p>
             <a:pPr lvl="1"/>
             <a:r>
-              <a:rPr lang="en-US"/>
+              <a:rPr lang="en-US" smtClean="0"/>
               <a:t>Second level</a:t>
             </a:r>
           </a:p>
           <a:p>
             <a:pPr lvl="2"/>
             <a:r>
-              <a:rPr lang="en-US"/>
+              <a:rPr lang="en-US" smtClean="0"/>
               <a:t>Third level</a:t>
             </a:r>
           </a:p>
           <a:p>
             <a:pPr lvl="3"/>
             <a:r>
-              <a:rPr lang="en-US"/>
+              <a:rPr lang="en-US" smtClean="0"/>
               <a:t>Fourth level</a:t>
             </a:r>
           </a:p>
           <a:p>
             <a:pPr lvl="4"/>
             <a:r>
-              <a:rPr lang="en-US"/>
+              <a:rPr lang="en-US" smtClean="0"/>
               <a:t>Fifth level</a:t>
             </a:r>
+            <a:endParaRPr lang="en-US"/>
           </a:p>
         </p:txBody>
       </p:sp>
@@ -2124,37 +2315,38 @@
           <a:p>
             <a:pPr lvl="0"/>
             <a:r>
-              <a:rPr lang="en-US"/>
+              <a:rPr lang="en-US" smtClean="0"/>
               <a:t>Click to edit Master text styles</a:t>
             </a:r>
           </a:p>
           <a:p>
             <a:pPr lvl="1"/>
             <a:r>
-              <a:rPr lang="en-US"/>
+              <a:rPr lang="en-US" smtClean="0"/>
               <a:t>Second level</a:t>
             </a:r>
           </a:p>
           <a:p>
             <a:pPr lvl="2"/>
             <a:r>
-              <a:rPr lang="en-US"/>
+              <a:rPr lang="en-US" smtClean="0"/>
               <a:t>Third level</a:t>
             </a:r>
           </a:p>
           <a:p>
             <a:pPr lvl="3"/>
             <a:r>
-              <a:rPr lang="en-US"/>
+              <a:rPr lang="en-US" smtClean="0"/>
               <a:t>Fourth level</a:t>
             </a:r>
           </a:p>
           <a:p>
             <a:pPr lvl="4"/>
             <a:r>
-              <a:rPr lang="en-US"/>
+              <a:rPr lang="en-US" smtClean="0"/>
               <a:t>Fifth level</a:t>
             </a:r>
+            <a:endParaRPr lang="en-US"/>
           </a:p>
         </p:txBody>
       </p:sp>
@@ -2175,7 +2367,7 @@
           <a:p>
             <a:fld id="{5BCAD085-E8A6-8845-BD4E-CB4CCA059FC4}" type="datetimeFigureOut">
               <a:rPr lang="en-US" smtClean="0"/>
-              <a:t>9/7/2026</a:t>
+              <a:t>1/27/13</a:t>
             </a:fld>
             <a:endParaRPr lang="en-US"/>
           </a:p>
@@ -2273,9 +2465,10 @@
           </a:lstStyle>
           <a:p>
             <a:r>
-              <a:rPr lang="en-US"/>
+              <a:rPr lang="en-US" smtClean="0"/>
               <a:t>Click to edit Master title style</a:t>
             </a:r>
+            <a:endParaRPr lang="en-US"/>
           </a:p>
         </p:txBody>
       </p:sp>
@@ -2338,7 +2531,7 @@
           <a:p>
             <a:pPr lvl="0"/>
             <a:r>
-              <a:rPr lang="en-US"/>
+              <a:rPr lang="en-US" smtClean="0"/>
               <a:t>Click to edit Master text styles</a:t>
             </a:r>
           </a:p>
@@ -2394,37 +2587,38 @@
           <a:p>
             <a:pPr lvl="0"/>
             <a:r>
-              <a:rPr lang="en-US"/>
+              <a:rPr lang="en-US" smtClean="0"/>
               <a:t>Click to edit Master text styles</a:t>
             </a:r>
           </a:p>
           <a:p>
             <a:pPr lvl="1"/>
             <a:r>
-              <a:rPr lang="en-US"/>
+              <a:rPr lang="en-US" smtClean="0"/>
               <a:t>Second level</a:t>
             </a:r>
           </a:p>
           <a:p>
             <a:pPr lvl="2"/>
             <a:r>
-              <a:rPr lang="en-US"/>
+              <a:rPr lang="en-US" smtClean="0"/>
               <a:t>Third level</a:t>
             </a:r>
           </a:p>
           <a:p>
             <a:pPr lvl="3"/>
             <a:r>
-              <a:rPr lang="en-US"/>
+              <a:rPr lang="en-US" smtClean="0"/>
               <a:t>Fourth level</a:t>
             </a:r>
           </a:p>
           <a:p>
             <a:pPr lvl="4"/>
             <a:r>
-              <a:rPr lang="en-US"/>
+              <a:rPr lang="en-US" smtClean="0"/>
               <a:t>Fifth level</a:t>
             </a:r>
+            <a:endParaRPr lang="en-US"/>
           </a:p>
         </p:txBody>
       </p:sp>
@@ -2487,7 +2681,7 @@
           <a:p>
             <a:pPr lvl="0"/>
             <a:r>
-              <a:rPr lang="en-US"/>
+              <a:rPr lang="en-US" smtClean="0"/>
               <a:t>Click to edit Master text styles</a:t>
             </a:r>
           </a:p>
@@ -2543,37 +2737,38 @@
           <a:p>
             <a:pPr lvl="0"/>
             <a:r>
-              <a:rPr lang="en-US"/>
+              <a:rPr lang="en-US" smtClean="0"/>
               <a:t>Click to edit Master text styles</a:t>
             </a:r>
           </a:p>
           <a:p>
             <a:pPr lvl="1"/>
             <a:r>
-              <a:rPr lang="en-US"/>
+              <a:rPr lang="en-US" smtClean="0"/>
               <a:t>Second level</a:t>
             </a:r>
           </a:p>
           <a:p>
             <a:pPr lvl="2"/>
             <a:r>
-              <a:rPr lang="en-US"/>
+              <a:rPr lang="en-US" smtClean="0"/>
               <a:t>Third level</a:t>
             </a:r>
           </a:p>
           <a:p>
             <a:pPr lvl="3"/>
             <a:r>
-              <a:rPr lang="en-US"/>
+              <a:rPr lang="en-US" smtClean="0"/>
               <a:t>Fourth level</a:t>
             </a:r>
           </a:p>
           <a:p>
             <a:pPr lvl="4"/>
             <a:r>
-              <a:rPr lang="en-US"/>
+              <a:rPr lang="en-US" smtClean="0"/>
               <a:t>Fifth level</a:t>
             </a:r>
+            <a:endParaRPr lang="en-US"/>
           </a:p>
         </p:txBody>
       </p:sp>
@@ -2594,7 +2789,7 @@
           <a:p>
             <a:fld id="{5BCAD085-E8A6-8845-BD4E-CB4CCA059FC4}" type="datetimeFigureOut">
               <a:rPr lang="en-US" smtClean="0"/>
-              <a:t>9/7/2026</a:t>
+              <a:t>1/27/13</a:t>
             </a:fld>
             <a:endParaRPr lang="en-US"/>
           </a:p>
@@ -2688,9 +2883,10 @@
           <a:lstStyle/>
           <a:p>
             <a:r>
-              <a:rPr lang="en-US"/>
+              <a:rPr lang="en-US" smtClean="0"/>
               <a:t>Click to edit Master title style</a:t>
             </a:r>
+            <a:endParaRPr lang="en-US"/>
           </a:p>
         </p:txBody>
       </p:sp>
@@ -2711,7 +2907,7 @@
           <a:p>
             <a:fld id="{5BCAD085-E8A6-8845-BD4E-CB4CCA059FC4}" type="datetimeFigureOut">
               <a:rPr lang="en-US" smtClean="0"/>
-              <a:t>9/7/2026</a:t>
+              <a:t>1/27/13</a:t>
             </a:fld>
             <a:endParaRPr lang="en-US"/>
           </a:p>
@@ -2806,7 +3002,7 @@
           <a:p>
             <a:fld id="{5BCAD085-E8A6-8845-BD4E-CB4CCA059FC4}" type="datetimeFigureOut">
               <a:rPr lang="en-US" smtClean="0"/>
-              <a:t>9/7/2026</a:t>
+              <a:t>1/27/13</a:t>
             </a:fld>
             <a:endParaRPr lang="en-US"/>
           </a:p>
@@ -2909,9 +3105,10 @@
           </a:lstStyle>
           <a:p>
             <a:r>
-              <a:rPr lang="en-US"/>
+              <a:rPr lang="en-US" smtClean="0"/>
               <a:t>Click to edit Master title style</a:t>
             </a:r>
+            <a:endParaRPr lang="en-US"/>
           </a:p>
         </p:txBody>
       </p:sp>
@@ -2965,37 +3162,38 @@
           <a:p>
             <a:pPr lvl="0"/>
             <a:r>
-              <a:rPr lang="en-US"/>
+              <a:rPr lang="en-US" smtClean="0"/>
               <a:t>Click to edit Master text styles</a:t>
             </a:r>
           </a:p>
           <a:p>
             <a:pPr lvl="1"/>
             <a:r>
-              <a:rPr lang="en-US"/>
+              <a:rPr lang="en-US" smtClean="0"/>
               <a:t>Second level</a:t>
             </a:r>
           </a:p>
           <a:p>
             <a:pPr lvl="2"/>
             <a:r>
-              <a:rPr lang="en-US"/>
+              <a:rPr lang="en-US" smtClean="0"/>
               <a:t>Third level</a:t>
             </a:r>
           </a:p>
           <a:p>
             <a:pPr lvl="3"/>
             <a:r>
-              <a:rPr lang="en-US"/>
+              <a:rPr lang="en-US" smtClean="0"/>
               <a:t>Fourth level</a:t>
             </a:r>
           </a:p>
           <a:p>
             <a:pPr lvl="4"/>
             <a:r>
-              <a:rPr lang="en-US"/>
+              <a:rPr lang="en-US" smtClean="0"/>
               <a:t>Fifth level</a:t>
             </a:r>
+            <a:endParaRPr lang="en-US"/>
           </a:p>
         </p:txBody>
       </p:sp>
@@ -3058,7 +3256,7 @@
           <a:p>
             <a:pPr lvl="0"/>
             <a:r>
-              <a:rPr lang="en-US"/>
+              <a:rPr lang="en-US" smtClean="0"/>
               <a:t>Click to edit Master text styles</a:t>
             </a:r>
           </a:p>
@@ -3081,7 +3279,7 @@
           <a:p>
             <a:fld id="{5BCAD085-E8A6-8845-BD4E-CB4CCA059FC4}" type="datetimeFigureOut">
               <a:rPr lang="en-US" smtClean="0"/>
-              <a:t>9/7/2026</a:t>
+              <a:t>1/27/13</a:t>
             </a:fld>
             <a:endParaRPr lang="en-US"/>
           </a:p>
@@ -3184,9 +3382,10 @@
           </a:lstStyle>
           <a:p>
             <a:r>
-              <a:rPr lang="en-US"/>
+              <a:rPr lang="en-US" smtClean="0"/>
               <a:t>Click to edit Master title style</a:t>
             </a:r>
+            <a:endParaRPr lang="en-US"/>
           </a:p>
         </p:txBody>
       </p:sp>
@@ -3310,7 +3509,7 @@
           <a:p>
             <a:pPr lvl="0"/>
             <a:r>
-              <a:rPr lang="en-US"/>
+              <a:rPr lang="en-US" smtClean="0"/>
               <a:t>Click to edit Master text styles</a:t>
             </a:r>
           </a:p>
@@ -3333,7 +3532,7 @@
           <a:p>
             <a:fld id="{5BCAD085-E8A6-8845-BD4E-CB4CCA059FC4}" type="datetimeFigureOut">
               <a:rPr lang="en-US" smtClean="0"/>
-              <a:t>9/7/2026</a:t>
+              <a:t>1/27/13</a:t>
             </a:fld>
             <a:endParaRPr lang="en-US"/>
           </a:p>
@@ -3442,9 +3641,10 @@
           <a:lstStyle/>
           <a:p>
             <a:r>
-              <a:rPr lang="en-US"/>
+              <a:rPr lang="en-US" smtClean="0"/>
               <a:t>Click to edit Master title style</a:t>
             </a:r>
+            <a:endParaRPr lang="en-US"/>
           </a:p>
         </p:txBody>
       </p:sp>
@@ -3475,37 +3675,38 @@
           <a:p>
             <a:pPr lvl="0"/>
             <a:r>
-              <a:rPr lang="en-US"/>
+              <a:rPr lang="en-US" smtClean="0"/>
               <a:t>Click to edit Master text styles</a:t>
             </a:r>
           </a:p>
           <a:p>
             <a:pPr lvl="1"/>
             <a:r>
-              <a:rPr lang="en-US"/>
+              <a:rPr lang="en-US" smtClean="0"/>
               <a:t>Second level</a:t>
             </a:r>
           </a:p>
           <a:p>
             <a:pPr lvl="2"/>
             <a:r>
-              <a:rPr lang="en-US"/>
+              <a:rPr lang="en-US" smtClean="0"/>
               <a:t>Third level</a:t>
             </a:r>
           </a:p>
           <a:p>
             <a:pPr lvl="3"/>
             <a:r>
-              <a:rPr lang="en-US"/>
+              <a:rPr lang="en-US" smtClean="0"/>
               <a:t>Fourth level</a:t>
             </a:r>
           </a:p>
           <a:p>
             <a:pPr lvl="4"/>
             <a:r>
-              <a:rPr lang="en-US"/>
+              <a:rPr lang="en-US" smtClean="0"/>
               <a:t>Fifth level</a:t>
             </a:r>
+            <a:endParaRPr lang="en-US"/>
           </a:p>
         </p:txBody>
       </p:sp>
@@ -3544,7 +3745,7 @@
           <a:p>
             <a:fld id="{5BCAD085-E8A6-8845-BD4E-CB4CCA059FC4}" type="datetimeFigureOut">
               <a:rPr lang="en-US" smtClean="0"/>
-              <a:t>9/7/2026</a:t>
+              <a:t>1/27/13</a:t>
             </a:fld>
             <a:endParaRPr lang="en-US"/>
           </a:p>
@@ -3903,7 +4104,7 @@
 </file>
 
 <file path=ppt/slides/slide1.xml><?xml version="1.0" encoding="utf-8"?>
-<p:sld xmlns:a="http://schemas.openxmlformats.org/drawingml/2006/main" xmlns:r="http://schemas.openxmlformats.org/officeDocument/2006/relationships" xmlns:p="http://schemas.openxmlformats.org/presentationml/2006/main">
+<p:sld xmlns:a="http://schemas.openxmlformats.org/drawingml/2006/main" xmlns:p="http://schemas.openxmlformats.org/presentationml/2006/main" xmlns:r="http://schemas.openxmlformats.org/officeDocument/2006/relationships">
   <p:cSld>
     <p:spTree>
       <p:nvGrpSpPr>
@@ -3911,14 +4112,7 @@
         <p:cNvGrpSpPr/>
         <p:nvPr/>
       </p:nvGrpSpPr>
-      <p:grpSpPr>
-        <a:xfrm>
-          <a:off x="0" y="0"/>
-          <a:ext cx="0" cy="0"/>
-          <a:chOff x="0" y="0"/>
-          <a:chExt cx="0" cy="0"/>
-        </a:xfrm>
-      </p:grpSpPr>
+      <p:grpSpPr/>
       <p:sp>
         <p:nvSpPr>
           <p:cNvPr id="2" name="TextBox 1"/>
@@ -3936,7 +4130,7 @@
           <a:noFill/>
         </p:spPr>
         <p:txBody>
-          <a:bodyPr wrap="square" lIns="0" tIns="0" rIns="0" bIns="0" anchor="t">
+          <a:bodyPr wrap="square" anchor="t" lIns="0" rIns="0" tIns="0" bIns="0">
             <a:spAutoFit/>
           </a:bodyPr>
           <a:lstStyle/>
@@ -3975,7 +4169,7 @@
           <a:noFill/>
         </p:spPr>
         <p:txBody>
-          <a:bodyPr wrap="square" lIns="0" tIns="0" rIns="0" bIns="0" anchor="t">
+          <a:bodyPr wrap="square" anchor="t" lIns="0" rIns="0" tIns="0" bIns="0">
             <a:spAutoFit/>
           </a:bodyPr>
           <a:lstStyle/>
@@ -3992,7 +4186,7 @@
                 </a:solidFill>
                 <a:latin typeface="Segoe UI"/>
               </a:rPr>
-              <a:t>Give it a ticket, get back a merge request. Your code stays on your hardware and talks to your own model.</a:t>
+              <a:t>Give it a ticket, get back a merge request. Our code stays on our hardware and talks to our own model.</a:t>
             </a:r>
           </a:p>
         </p:txBody>
@@ -4038,13 +4232,12 @@
           <a:lstStyle/>
           <a:p>
             <a:pPr algn="ctr"/>
-            <a:endParaRPr/>
-          </a:p>
-        </p:txBody>
-      </p:sp>
-      <p:sp>
-        <p:nvSpPr>
-          <p:cNvPr id="6" name="TextBox 5"/>
+          </a:p>
+        </p:txBody>
+      </p:sp>
+      <p:sp>
+        <p:nvSpPr>
+          <p:cNvPr id="5" name="TextBox 4"/>
           <p:cNvSpPr txBox="1"/>
           <p:nvPr/>
         </p:nvSpPr>
@@ -4059,7 +4252,7 @@
           <a:noFill/>
         </p:spPr>
         <p:txBody>
-          <a:bodyPr wrap="square" lIns="0" tIns="0" rIns="0" bIns="0" anchor="t">
+          <a:bodyPr wrap="square" anchor="t" lIns="0" rIns="0" tIns="0" bIns="0">
             <a:spAutoFit/>
           </a:bodyPr>
           <a:lstStyle/>
@@ -4083,7 +4276,7 @@
       </p:sp>
       <p:sp>
         <p:nvSpPr>
-          <p:cNvPr id="7" name="TextBox 6"/>
+          <p:cNvPr id="6" name="TextBox 5"/>
           <p:cNvSpPr txBox="1"/>
           <p:nvPr/>
         </p:nvSpPr>
@@ -4098,7 +4291,7 @@
           <a:noFill/>
         </p:spPr>
         <p:txBody>
-          <a:bodyPr wrap="square" lIns="0" tIns="0" rIns="0" bIns="0" anchor="t">
+          <a:bodyPr wrap="square" anchor="t" lIns="0" rIns="0" tIns="0" bIns="0">
             <a:spAutoFit/>
           </a:bodyPr>
           <a:lstStyle/>
@@ -4122,7 +4315,7 @@
       </p:sp>
       <p:sp>
         <p:nvSpPr>
-          <p:cNvPr id="8" name="TextBox 7"/>
+          <p:cNvPr id="7" name="TextBox 6"/>
           <p:cNvSpPr txBox="1"/>
           <p:nvPr/>
         </p:nvSpPr>
@@ -4137,7 +4330,7 @@
           <a:noFill/>
         </p:spPr>
         <p:txBody>
-          <a:bodyPr wrap="square" lIns="0" tIns="0" rIns="0" bIns="0" anchor="t">
+          <a:bodyPr wrap="square" anchor="t" lIns="0" rIns="0" tIns="0" bIns="0">
             <a:spAutoFit/>
           </a:bodyPr>
           <a:lstStyle/>
@@ -4161,7 +4354,7 @@
       </p:sp>
       <p:sp>
         <p:nvSpPr>
-          <p:cNvPr id="9" name="TextBox 8"/>
+          <p:cNvPr id="8" name="TextBox 7"/>
           <p:cNvSpPr txBox="1"/>
           <p:nvPr/>
         </p:nvSpPr>
@@ -4176,7 +4369,7 @@
           <a:noFill/>
         </p:spPr>
         <p:txBody>
-          <a:bodyPr wrap="square" lIns="0" tIns="0" rIns="0" bIns="0" anchor="t">
+          <a:bodyPr wrap="square" anchor="t" lIns="0" rIns="0" tIns="0" bIns="0">
             <a:spAutoFit/>
           </a:bodyPr>
           <a:lstStyle/>
@@ -4200,14 +4393,14 @@
       </p:sp>
       <p:sp>
         <p:nvSpPr>
-          <p:cNvPr id="10" name="TextBox 9"/>
+          <p:cNvPr id="9" name="TextBox 8"/>
           <p:cNvSpPr txBox="1"/>
           <p:nvPr/>
         </p:nvSpPr>
         <p:spPr>
           <a:xfrm>
             <a:off x="2484120" y="1645920"/>
-            <a:ext cx="1697736" cy="161583"/>
+            <a:ext cx="1697736" cy="384048"/>
           </a:xfrm>
           <a:prstGeom prst="rect">
             <a:avLst/>
@@ -4215,7 +4408,7 @@
           <a:noFill/>
         </p:spPr>
         <p:txBody>
-          <a:bodyPr wrap="square" lIns="0" tIns="0" rIns="0" bIns="0" anchor="t">
+          <a:bodyPr wrap="square" anchor="t" lIns="0" rIns="0" tIns="0" bIns="0">
             <a:spAutoFit/>
           </a:bodyPr>
           <a:lstStyle/>
@@ -4226,29 +4419,20 @@
               </a:spcAft>
             </a:pPr>
             <a:r>
-              <a:rPr lang="en-US" sz="1050" b="0" dirty="0">
+              <a:rPr sz="1050" b="0">
                 <a:solidFill>
                   <a:srgbClr val="6B6B6B"/>
                 </a:solidFill>
                 <a:latin typeface="Segoe UI"/>
               </a:rPr>
-              <a:t>Agents</a:t>
-            </a:r>
-            <a:r>
-              <a:rPr sz="1050" b="0" dirty="0">
-                <a:solidFill>
-                  <a:srgbClr val="6B6B6B"/>
-                </a:solidFill>
-                <a:latin typeface="Segoe UI"/>
-              </a:rPr>
-              <a:t> it runs</a:t>
-            </a:r>
-          </a:p>
-        </p:txBody>
-      </p:sp>
-      <p:sp>
-        <p:nvSpPr>
-          <p:cNvPr id="11" name="Rectangle 10"/>
+              <a:t>agents it runs</a:t>
+            </a:r>
+          </a:p>
+        </p:txBody>
+      </p:sp>
+      <p:sp>
+        <p:nvSpPr>
+          <p:cNvPr id="10" name="Rectangle 9"/>
           <p:cNvSpPr/>
           <p:nvPr/>
         </p:nvSpPr>
@@ -4287,13 +4471,12 @@
           <a:lstStyle/>
           <a:p>
             <a:pPr algn="ctr"/>
-            <a:endParaRPr/>
-          </a:p>
-        </p:txBody>
-      </p:sp>
-      <p:sp>
-        <p:nvSpPr>
-          <p:cNvPr id="12" name="TextBox 11"/>
+          </a:p>
+        </p:txBody>
+      </p:sp>
+      <p:sp>
+        <p:nvSpPr>
+          <p:cNvPr id="11" name="TextBox 10"/>
           <p:cNvSpPr txBox="1"/>
           <p:nvPr/>
         </p:nvSpPr>
@@ -4308,7 +4491,7 @@
           <a:noFill/>
         </p:spPr>
         <p:txBody>
-          <a:bodyPr wrap="square" lIns="0" tIns="0" rIns="0" bIns="0" anchor="t">
+          <a:bodyPr wrap="square" anchor="t" lIns="0" rIns="0" tIns="0" bIns="0">
             <a:spAutoFit/>
           </a:bodyPr>
           <a:lstStyle/>
@@ -4332,14 +4515,14 @@
       </p:sp>
       <p:sp>
         <p:nvSpPr>
-          <p:cNvPr id="13" name="TextBox 12"/>
+          <p:cNvPr id="12" name="TextBox 11"/>
           <p:cNvSpPr txBox="1"/>
           <p:nvPr/>
         </p:nvSpPr>
         <p:spPr>
           <a:xfrm>
             <a:off x="4328160" y="1645920"/>
-            <a:ext cx="1697736" cy="161583"/>
+            <a:ext cx="1697736" cy="384048"/>
           </a:xfrm>
           <a:prstGeom prst="rect">
             <a:avLst/>
@@ -4347,7 +4530,7 @@
           <a:noFill/>
         </p:spPr>
         <p:txBody>
-          <a:bodyPr wrap="square" lIns="0" tIns="0" rIns="0" bIns="0" anchor="t">
+          <a:bodyPr wrap="square" anchor="t" lIns="0" rIns="0" tIns="0" bIns="0">
             <a:spAutoFit/>
           </a:bodyPr>
           <a:lstStyle/>
@@ -4358,35 +4541,20 @@
               </a:spcAft>
             </a:pPr>
             <a:r>
-              <a:rPr sz="1050" b="0" dirty="0">
+              <a:rPr sz="1050" b="0">
                 <a:solidFill>
                   <a:srgbClr val="6B6B6B"/>
                 </a:solidFill>
                 <a:latin typeface="Segoe UI"/>
               </a:rPr>
-              <a:t>ways </a:t>
-            </a:r>
-            <a:r>
-              <a:rPr lang="en-US" sz="1050" b="0" dirty="0">
-                <a:solidFill>
-                  <a:srgbClr val="6B6B6B"/>
-                </a:solidFill>
-                <a:latin typeface="Segoe UI"/>
-              </a:rPr>
-              <a:t>run</a:t>
-            </a:r>
-            <a:endParaRPr sz="1050" b="0" dirty="0">
-              <a:solidFill>
-                <a:srgbClr val="6B6B6B"/>
-              </a:solidFill>
-              <a:latin typeface="Segoe UI"/>
-            </a:endParaRPr>
-          </a:p>
-        </p:txBody>
-      </p:sp>
-      <p:sp>
-        <p:nvSpPr>
-          <p:cNvPr id="14" name="Rectangle 13"/>
+              <a:t>ways to run it</a:t>
+            </a:r>
+          </a:p>
+        </p:txBody>
+      </p:sp>
+      <p:sp>
+        <p:nvSpPr>
+          <p:cNvPr id="13" name="Rectangle 12"/>
           <p:cNvSpPr/>
           <p:nvPr/>
         </p:nvSpPr>
@@ -4425,13 +4593,12 @@
           <a:lstStyle/>
           <a:p>
             <a:pPr algn="ctr"/>
-            <a:endParaRPr/>
-          </a:p>
-        </p:txBody>
-      </p:sp>
-      <p:sp>
-        <p:nvSpPr>
-          <p:cNvPr id="15" name="TextBox 14"/>
+          </a:p>
+        </p:txBody>
+      </p:sp>
+      <p:sp>
+        <p:nvSpPr>
+          <p:cNvPr id="14" name="TextBox 13"/>
           <p:cNvSpPr txBox="1"/>
           <p:nvPr/>
         </p:nvSpPr>
@@ -4446,7 +4613,7 @@
           <a:noFill/>
         </p:spPr>
         <p:txBody>
-          <a:bodyPr wrap="square" lIns="0" tIns="0" rIns="0" bIns="0" anchor="t">
+          <a:bodyPr wrap="square" anchor="t" lIns="0" rIns="0" tIns="0" bIns="0">
             <a:spAutoFit/>
           </a:bodyPr>
           <a:lstStyle/>
@@ -4470,7 +4637,7 @@
       </p:sp>
       <p:sp>
         <p:nvSpPr>
-          <p:cNvPr id="16" name="TextBox 15"/>
+          <p:cNvPr id="15" name="TextBox 14"/>
           <p:cNvSpPr txBox="1"/>
           <p:nvPr/>
         </p:nvSpPr>
@@ -4485,7 +4652,7 @@
           <a:noFill/>
         </p:spPr>
         <p:txBody>
-          <a:bodyPr wrap="square" lIns="0" tIns="0" rIns="0" bIns="0" anchor="t">
+          <a:bodyPr wrap="square" anchor="t" lIns="0" rIns="0" tIns="0" bIns="0">
             <a:spAutoFit/>
           </a:bodyPr>
           <a:lstStyle/>
@@ -4509,7 +4676,7 @@
       </p:sp>
       <p:sp>
         <p:nvSpPr>
-          <p:cNvPr id="17" name="Rectangle 16"/>
+          <p:cNvPr id="16" name="Rectangle 15"/>
           <p:cNvSpPr/>
           <p:nvPr/>
         </p:nvSpPr>
@@ -4548,13 +4715,12 @@
           <a:lstStyle/>
           <a:p>
             <a:pPr algn="ctr"/>
-            <a:endParaRPr/>
-          </a:p>
-        </p:txBody>
-      </p:sp>
-      <p:sp>
-        <p:nvSpPr>
-          <p:cNvPr id="18" name="TextBox 17"/>
+          </a:p>
+        </p:txBody>
+      </p:sp>
+      <p:sp>
+        <p:nvSpPr>
+          <p:cNvPr id="17" name="TextBox 16"/>
           <p:cNvSpPr txBox="1"/>
           <p:nvPr/>
         </p:nvSpPr>
@@ -4569,7 +4735,7 @@
           <a:noFill/>
         </p:spPr>
         <p:txBody>
-          <a:bodyPr wrap="square" lIns="0" tIns="0" rIns="0" bIns="0" anchor="t">
+          <a:bodyPr wrap="square" anchor="t" lIns="0" rIns="0" tIns="0" bIns="0">
             <a:spAutoFit/>
           </a:bodyPr>
           <a:lstStyle/>
@@ -4593,7 +4759,7 @@
       </p:sp>
       <p:sp>
         <p:nvSpPr>
-          <p:cNvPr id="19" name="TextBox 18"/>
+          <p:cNvPr id="18" name="TextBox 17"/>
           <p:cNvSpPr txBox="1"/>
           <p:nvPr/>
         </p:nvSpPr>
@@ -4608,7 +4774,7 @@
           <a:noFill/>
         </p:spPr>
         <p:txBody>
-          <a:bodyPr wrap="square" lIns="0" tIns="0" rIns="0" bIns="0" anchor="t">
+          <a:bodyPr wrap="square" anchor="t" lIns="0" rIns="0" tIns="0" bIns="0">
             <a:spAutoFit/>
           </a:bodyPr>
           <a:lstStyle/>
@@ -4632,7 +4798,7 @@
       </p:sp>
       <p:sp>
         <p:nvSpPr>
-          <p:cNvPr id="20" name="Rectangle 19"/>
+          <p:cNvPr id="19" name="Rectangle 18"/>
           <p:cNvSpPr/>
           <p:nvPr/>
         </p:nvSpPr>
@@ -4671,13 +4837,12 @@
           <a:lstStyle/>
           <a:p>
             <a:pPr algn="ctr"/>
-            <a:endParaRPr/>
-          </a:p>
-        </p:txBody>
-      </p:sp>
-      <p:sp>
-        <p:nvSpPr>
-          <p:cNvPr id="21" name="TextBox 20"/>
+          </a:p>
+        </p:txBody>
+      </p:sp>
+      <p:sp>
+        <p:nvSpPr>
+          <p:cNvPr id="20" name="TextBox 19"/>
           <p:cNvSpPr txBox="1"/>
           <p:nvPr/>
         </p:nvSpPr>
@@ -4692,7 +4857,7 @@
           <a:noFill/>
         </p:spPr>
         <p:txBody>
-          <a:bodyPr wrap="square" lIns="0" tIns="0" rIns="0" bIns="0" anchor="t">
+          <a:bodyPr wrap="square" anchor="t" lIns="0" rIns="0" tIns="0" bIns="0">
             <a:spAutoFit/>
           </a:bodyPr>
           <a:lstStyle/>
@@ -4716,7 +4881,7 @@
       </p:sp>
       <p:sp>
         <p:nvSpPr>
-          <p:cNvPr id="22" name="TextBox 21"/>
+          <p:cNvPr id="21" name="TextBox 20"/>
           <p:cNvSpPr txBox="1"/>
           <p:nvPr/>
         </p:nvSpPr>
@@ -4731,7 +4896,7 @@
           <a:noFill/>
         </p:spPr>
         <p:txBody>
-          <a:bodyPr wrap="square" lIns="0" tIns="0" rIns="0" bIns="0" anchor="t">
+          <a:bodyPr wrap="square" anchor="t" lIns="0" rIns="0" tIns="0" bIns="0">
             <a:spAutoFit/>
           </a:bodyPr>
           <a:lstStyle/>
@@ -4755,7 +4920,7 @@
       </p:sp>
       <p:sp>
         <p:nvSpPr>
-          <p:cNvPr id="23" name="Rectangle 22"/>
+          <p:cNvPr id="22" name="Rectangle 21"/>
           <p:cNvSpPr/>
           <p:nvPr/>
         </p:nvSpPr>
@@ -4794,13 +4959,12 @@
           <a:lstStyle/>
           <a:p>
             <a:pPr algn="ctr"/>
-            <a:endParaRPr/>
-          </a:p>
-        </p:txBody>
-      </p:sp>
-      <p:sp>
-        <p:nvSpPr>
-          <p:cNvPr id="24" name="Rounded Rectangle 23"/>
+          </a:p>
+        </p:txBody>
+      </p:sp>
+      <p:sp>
+        <p:nvSpPr>
+          <p:cNvPr id="23" name="Rounded Rectangle 22"/>
           <p:cNvSpPr/>
           <p:nvPr/>
         </p:nvSpPr>
@@ -4839,7 +5003,7 @@
           </a:fontRef>
         </p:style>
         <p:txBody>
-          <a:bodyPr wrap="square" lIns="54864" tIns="27432" rIns="54864" bIns="27432" rtlCol="0" anchor="ctr"/>
+          <a:bodyPr rtlCol="0" anchor="ctr" wrap="square" lIns="54864" rIns="54864" tIns="27432" bIns="27432"/>
           <a:lstStyle/>
           <a:p>
             <a:pPr algn="ctr"/>
@@ -4869,7 +5033,7 @@
       </p:sp>
       <p:cxnSp>
         <p:nvCxnSpPr>
-          <p:cNvPr id="25" name="Connector 24"/>
+          <p:cNvPr id="24" name="Connector 23"/>
           <p:cNvCxnSpPr/>
           <p:nvPr/>
         </p:nvCxnSpPr>
@@ -4905,7 +5069,7 @@
       </p:cxnSp>
       <p:sp>
         <p:nvSpPr>
-          <p:cNvPr id="26" name="Rounded Rectangle 25"/>
+          <p:cNvPr id="25" name="Rounded Rectangle 24"/>
           <p:cNvSpPr/>
           <p:nvPr/>
         </p:nvSpPr>
@@ -4944,7 +5108,7 @@
           </a:fontRef>
         </p:style>
         <p:txBody>
-          <a:bodyPr wrap="square" lIns="54864" tIns="27432" rIns="54864" bIns="27432" rtlCol="0" anchor="ctr"/>
+          <a:bodyPr rtlCol="0" anchor="ctr" wrap="square" lIns="54864" rIns="54864" tIns="27432" bIns="27432"/>
           <a:lstStyle/>
           <a:p>
             <a:pPr algn="ctr"/>
@@ -4974,7 +5138,7 @@
       </p:sp>
       <p:cxnSp>
         <p:nvCxnSpPr>
-          <p:cNvPr id="27" name="Connector 26"/>
+          <p:cNvPr id="26" name="Connector 25"/>
           <p:cNvCxnSpPr/>
           <p:nvPr/>
         </p:nvCxnSpPr>
@@ -5010,7 +5174,7 @@
       </p:cxnSp>
       <p:sp>
         <p:nvSpPr>
-          <p:cNvPr id="28" name="Rounded Rectangle 27"/>
+          <p:cNvPr id="27" name="Rounded Rectangle 26"/>
           <p:cNvSpPr/>
           <p:nvPr/>
         </p:nvSpPr>
@@ -5049,7 +5213,7 @@
           </a:fontRef>
         </p:style>
         <p:txBody>
-          <a:bodyPr wrap="square" lIns="54864" tIns="27432" rIns="54864" bIns="27432" rtlCol="0" anchor="ctr"/>
+          <a:bodyPr rtlCol="0" anchor="ctr" wrap="square" lIns="54864" rIns="54864" tIns="27432" bIns="27432"/>
           <a:lstStyle/>
           <a:p>
             <a:pPr algn="ctr"/>
@@ -5079,7 +5243,7 @@
       </p:sp>
       <p:cxnSp>
         <p:nvCxnSpPr>
-          <p:cNvPr id="29" name="Connector 28"/>
+          <p:cNvPr id="28" name="Connector 27"/>
           <p:cNvCxnSpPr/>
           <p:nvPr/>
         </p:nvCxnSpPr>
@@ -5115,7 +5279,7 @@
       </p:cxnSp>
       <p:sp>
         <p:nvSpPr>
-          <p:cNvPr id="30" name="Rounded Rectangle 29"/>
+          <p:cNvPr id="29" name="Rounded Rectangle 28"/>
           <p:cNvSpPr/>
           <p:nvPr/>
         </p:nvSpPr>
@@ -5154,12 +5318,12 @@
           </a:fontRef>
         </p:style>
         <p:txBody>
-          <a:bodyPr wrap="square" lIns="54864" tIns="27432" rIns="54864" bIns="27432" rtlCol="0" anchor="ctr"/>
-          <a:lstStyle/>
-          <a:p>
-            <a:pPr algn="ctr"/>
-            <a:r>
-              <a:rPr sz="1200" b="1" dirty="0">
+          <a:bodyPr rtlCol="0" anchor="ctr" wrap="square" lIns="54864" rIns="54864" tIns="27432" bIns="27432"/>
+          <a:lstStyle/>
+          <a:p>
+            <a:pPr algn="ctr"/>
+            <a:r>
+              <a:rPr sz="1200" b="1">
                 <a:solidFill>
                   <a:srgbClr val="3A3A3A"/>
                 </a:solidFill>
@@ -5171,49 +5335,31 @@
           <a:p>
             <a:pPr algn="ctr"/>
             <a:r>
-              <a:rPr sz="900" b="0" dirty="0">
+              <a:rPr sz="900" b="0">
                 <a:solidFill>
                   <a:srgbClr val="1A1A1A"/>
                 </a:solidFill>
                 <a:latin typeface="Segoe UI"/>
               </a:rPr>
-              <a:t>chat · the specialists</a:t>
-            </a:r>
-          </a:p>
-          <a:p>
-            <a:pPr algn="ctr"/>
-            <a:r>
-              <a:rPr sz="900" b="0" dirty="0">
+              <a:t>chat · the agents</a:t>
+            </a:r>
+          </a:p>
+          <a:p>
+            <a:pPr algn="ctr"/>
+            <a:r>
+              <a:rPr sz="900" b="0">
                 <a:solidFill>
                   <a:srgbClr val="1A1A1A"/>
                 </a:solidFill>
                 <a:latin typeface="Segoe UI"/>
               </a:rPr>
-              <a:t>memory · </a:t>
-            </a:r>
-            <a:r>
-              <a:rPr lang="en-US" sz="900" b="0" dirty="0">
-                <a:solidFill>
-                  <a:srgbClr val="1A1A1A"/>
-                </a:solidFill>
-                <a:latin typeface="Segoe UI"/>
-              </a:rPr>
-              <a:t>our</a:t>
-            </a:r>
-            <a:r>
-              <a:rPr sz="900" b="0" dirty="0">
-                <a:solidFill>
-                  <a:srgbClr val="1A1A1A"/>
-                </a:solidFill>
-                <a:latin typeface="Segoe UI"/>
-              </a:rPr>
-              <a:t> tools</a:t>
-            </a:r>
-          </a:p>
-          <a:p>
-            <a:pPr algn="ctr"/>
-            <a:r>
-              <a:rPr sz="900" b="0" dirty="0">
+              <a:t>memory · our tools</a:t>
+            </a:r>
+          </a:p>
+          <a:p>
+            <a:pPr algn="ctr"/>
+            <a:r>
+              <a:rPr sz="900" b="0">
                 <a:solidFill>
                   <a:srgbClr val="1A1A1A"/>
                 </a:solidFill>
@@ -5226,7 +5372,7 @@
       </p:sp>
       <p:cxnSp>
         <p:nvCxnSpPr>
-          <p:cNvPr id="31" name="Connector 30"/>
+          <p:cNvPr id="30" name="Connector 29"/>
           <p:cNvCxnSpPr/>
           <p:nvPr/>
         </p:nvCxnSpPr>
@@ -5262,7 +5408,7 @@
       </p:cxnSp>
       <p:sp>
         <p:nvSpPr>
-          <p:cNvPr id="32" name="Rounded Rectangle 31"/>
+          <p:cNvPr id="31" name="Rounded Rectangle 30"/>
           <p:cNvSpPr/>
           <p:nvPr/>
         </p:nvSpPr>
@@ -5301,73 +5447,64 @@
           </a:fontRef>
         </p:style>
         <p:txBody>
-          <a:bodyPr wrap="square" lIns="54864" tIns="27432" rIns="54864" bIns="27432" rtlCol="0" anchor="ctr"/>
-          <a:lstStyle/>
-          <a:p>
-            <a:pPr algn="ctr"/>
-            <a:r>
-              <a:rPr lang="en-US" sz="1200" b="1" dirty="0">
+          <a:bodyPr rtlCol="0" anchor="ctr" wrap="square" lIns="54864" rIns="54864" tIns="27432" bIns="27432"/>
+          <a:lstStyle/>
+          <a:p>
+            <a:pPr algn="ctr"/>
+            <a:r>
+              <a:rPr sz="1200" b="1">
                 <a:solidFill>
                   <a:srgbClr val="1E6B52"/>
                 </a:solidFill>
                 <a:latin typeface="Segoe UI"/>
               </a:rPr>
-              <a:t>Our</a:t>
-            </a:r>
-            <a:r>
-              <a:rPr sz="1200" b="1" dirty="0">
-                <a:solidFill>
-                  <a:srgbClr val="1E6B52"/>
-                </a:solidFill>
-                <a:latin typeface="Segoe UI"/>
-              </a:rPr>
-              <a:t> own model</a:t>
-            </a:r>
-          </a:p>
-          <a:p>
-            <a:pPr algn="ctr"/>
-            <a:r>
-              <a:rPr sz="850" b="0" dirty="0">
+              <a:t>Our own model</a:t>
+            </a:r>
+          </a:p>
+          <a:p>
+            <a:pPr algn="ctr"/>
+            <a:r>
+              <a:rPr sz="850" b="0">
                 <a:solidFill>
                   <a:srgbClr val="1A1A1A"/>
                 </a:solidFill>
                 <a:latin typeface="Segoe UI"/>
               </a:rPr>
-              <a:t>running on </a:t>
-            </a:r>
-            <a:r>
-              <a:rPr lang="en-US" sz="850" b="0" dirty="0">
+              <a:t>running on our hardware</a:t>
+            </a:r>
+          </a:p>
+          <a:p>
+            <a:pPr algn="ctr"/>
+          </a:p>
+          <a:p>
+            <a:pPr algn="ctr"/>
+            <a:r>
+              <a:rPr sz="850" b="0">
                 <a:solidFill>
                   <a:srgbClr val="1A1A1A"/>
                 </a:solidFill>
                 <a:latin typeface="Segoe UI"/>
               </a:rPr>
-              <a:t>Our</a:t>
-            </a:r>
-            <a:r>
-              <a:rPr sz="850" b="0" dirty="0">
+              <a:t>a paid cloud model only</a:t>
+            </a:r>
+          </a:p>
+          <a:p>
+            <a:pPr algn="ctr"/>
+            <a:r>
+              <a:rPr sz="850" b="0">
                 <a:solidFill>
                   <a:srgbClr val="1A1A1A"/>
                 </a:solidFill>
                 <a:latin typeface="Segoe UI"/>
               </a:rPr>
-              <a:t> hardware</a:t>
-            </a:r>
-          </a:p>
-          <a:p>
-            <a:pPr algn="ctr"/>
-            <a:endParaRPr sz="850" b="0" dirty="0">
-              <a:solidFill>
-                <a:srgbClr val="1A1A1A"/>
-              </a:solidFill>
-              <a:latin typeface="Segoe UI"/>
-            </a:endParaRPr>
-          </a:p>
-        </p:txBody>
-      </p:sp>
-      <p:sp>
-        <p:nvSpPr>
-          <p:cNvPr id="33" name="Rounded Rectangle 32"/>
+              <a:t>if we add one yourself</a:t>
+            </a:r>
+          </a:p>
+        </p:txBody>
+      </p:sp>
+      <p:sp>
+        <p:nvSpPr>
+          <p:cNvPr id="32" name="Rounded Rectangle 31"/>
           <p:cNvSpPr/>
           <p:nvPr/>
         </p:nvSpPr>
@@ -5406,7 +5543,7 @@
           </a:fontRef>
         </p:style>
         <p:txBody>
-          <a:bodyPr wrap="square" lIns="54864" tIns="27432" rIns="54864" bIns="27432" rtlCol="0" anchor="ctr"/>
+          <a:bodyPr rtlCol="0" anchor="ctr" wrap="square" lIns="54864" rIns="54864" tIns="27432" bIns="27432"/>
           <a:lstStyle/>
           <a:p>
             <a:pPr algn="ctr"/>
@@ -5446,12 +5583,6 @@
           </a:p>
           <a:p>
             <a:pPr algn="ctr"/>
-            <a:endParaRPr sz="850" b="0">
-              <a:solidFill>
-                <a:srgbClr val="1A1A1A"/>
-              </a:solidFill>
-              <a:latin typeface="Segoe UI"/>
-            </a:endParaRPr>
           </a:p>
           <a:p>
             <a:pPr algn="ctr"/>
@@ -5481,7 +5612,7 @@
       </p:sp>
       <p:sp>
         <p:nvSpPr>
-          <p:cNvPr id="34" name="TextBox 33"/>
+          <p:cNvPr id="33" name="TextBox 32"/>
           <p:cNvSpPr txBox="1"/>
           <p:nvPr/>
         </p:nvSpPr>
@@ -5496,7 +5627,7 @@
           <a:noFill/>
         </p:spPr>
         <p:txBody>
-          <a:bodyPr wrap="square" lIns="0" tIns="0" rIns="0" bIns="0" anchor="t">
+          <a:bodyPr wrap="square" anchor="t" lIns="0" rIns="0" tIns="0" bIns="0">
             <a:spAutoFit/>
           </a:bodyPr>
           <a:lstStyle/>
@@ -5520,7 +5651,7 @@
       </p:sp>
       <p:sp>
         <p:nvSpPr>
-          <p:cNvPr id="35" name="Rounded Rectangle 34"/>
+          <p:cNvPr id="34" name="Rounded Rectangle 33"/>
           <p:cNvSpPr/>
           <p:nvPr/>
         </p:nvSpPr>
@@ -5559,7 +5690,7 @@
           </a:fontRef>
         </p:style>
         <p:txBody>
-          <a:bodyPr wrap="square" lIns="54864" tIns="27432" rIns="54864" bIns="27432" rtlCol="0" anchor="ctr"/>
+          <a:bodyPr rtlCol="0" anchor="ctr" wrap="square" lIns="54864" rIns="54864" tIns="27432" bIns="27432"/>
           <a:lstStyle/>
           <a:p>
             <a:pPr algn="ctr"/>
@@ -5577,7 +5708,7 @@
       </p:sp>
       <p:cxnSp>
         <p:nvCxnSpPr>
-          <p:cNvPr id="36" name="Connector 35"/>
+          <p:cNvPr id="35" name="Connector 34"/>
           <p:cNvCxnSpPr/>
           <p:nvPr/>
         </p:nvCxnSpPr>
@@ -5613,7 +5744,7 @@
       </p:cxnSp>
       <p:sp>
         <p:nvSpPr>
-          <p:cNvPr id="37" name="Rounded Rectangle 36"/>
+          <p:cNvPr id="36" name="Rounded Rectangle 35"/>
           <p:cNvSpPr/>
           <p:nvPr/>
         </p:nvSpPr>
@@ -5652,7 +5783,7 @@
           </a:fontRef>
         </p:style>
         <p:txBody>
-          <a:bodyPr wrap="square" lIns="54864" tIns="27432" rIns="54864" bIns="27432" rtlCol="0" anchor="ctr"/>
+          <a:bodyPr rtlCol="0" anchor="ctr" wrap="square" lIns="54864" rIns="54864" tIns="27432" bIns="27432"/>
           <a:lstStyle/>
           <a:p>
             <a:pPr algn="ctr"/>
@@ -5670,7 +5801,7 @@
       </p:sp>
       <p:cxnSp>
         <p:nvCxnSpPr>
-          <p:cNvPr id="38" name="Connector 37"/>
+          <p:cNvPr id="37" name="Connector 36"/>
           <p:cNvCxnSpPr/>
           <p:nvPr/>
         </p:nvCxnSpPr>
@@ -5706,7 +5837,7 @@
       </p:cxnSp>
       <p:sp>
         <p:nvSpPr>
-          <p:cNvPr id="39" name="Rounded Rectangle 38"/>
+          <p:cNvPr id="38" name="Rounded Rectangle 37"/>
           <p:cNvSpPr/>
           <p:nvPr/>
         </p:nvSpPr>
@@ -5745,7 +5876,7 @@
           </a:fontRef>
         </p:style>
         <p:txBody>
-          <a:bodyPr wrap="square" lIns="54864" tIns="27432" rIns="54864" bIns="27432" rtlCol="0" anchor="ctr"/>
+          <a:bodyPr rtlCol="0" anchor="ctr" wrap="square" lIns="54864" rIns="54864" tIns="27432" bIns="27432"/>
           <a:lstStyle/>
           <a:p>
             <a:pPr algn="ctr"/>
@@ -5763,7 +5894,7 @@
       </p:sp>
       <p:cxnSp>
         <p:nvCxnSpPr>
-          <p:cNvPr id="40" name="Connector 39"/>
+          <p:cNvPr id="39" name="Connector 38"/>
           <p:cNvCxnSpPr/>
           <p:nvPr/>
         </p:nvCxnSpPr>
@@ -5799,7 +5930,7 @@
       </p:cxnSp>
       <p:sp>
         <p:nvSpPr>
-          <p:cNvPr id="41" name="Rounded Rectangle 40"/>
+          <p:cNvPr id="40" name="Rounded Rectangle 39"/>
           <p:cNvSpPr/>
           <p:nvPr/>
         </p:nvSpPr>
@@ -5838,7 +5969,7 @@
           </a:fontRef>
         </p:style>
         <p:txBody>
-          <a:bodyPr wrap="square" lIns="54864" tIns="27432" rIns="54864" bIns="27432" rtlCol="0" anchor="ctr"/>
+          <a:bodyPr rtlCol="0" anchor="ctr" wrap="square" lIns="54864" rIns="54864" tIns="27432" bIns="27432"/>
           <a:lstStyle/>
           <a:p>
             <a:pPr algn="ctr"/>
@@ -5856,7 +5987,7 @@
       </p:sp>
       <p:cxnSp>
         <p:nvCxnSpPr>
-          <p:cNvPr id="42" name="Connector 41"/>
+          <p:cNvPr id="41" name="Connector 40"/>
           <p:cNvCxnSpPr/>
           <p:nvPr/>
         </p:nvCxnSpPr>
@@ -5892,7 +6023,7 @@
       </p:cxnSp>
       <p:sp>
         <p:nvSpPr>
-          <p:cNvPr id="43" name="Rounded Rectangle 42"/>
+          <p:cNvPr id="42" name="Rounded Rectangle 41"/>
           <p:cNvSpPr/>
           <p:nvPr/>
         </p:nvSpPr>
@@ -5931,7 +6062,7 @@
           </a:fontRef>
         </p:style>
         <p:txBody>
-          <a:bodyPr wrap="square" lIns="54864" tIns="27432" rIns="54864" bIns="27432" rtlCol="0" anchor="ctr"/>
+          <a:bodyPr rtlCol="0" anchor="ctr" wrap="square" lIns="54864" rIns="54864" tIns="27432" bIns="27432"/>
           <a:lstStyle/>
           <a:p>
             <a:pPr algn="ctr"/>
@@ -5949,7 +6080,7 @@
       </p:sp>
       <p:cxnSp>
         <p:nvCxnSpPr>
-          <p:cNvPr id="44" name="Connector 43"/>
+          <p:cNvPr id="43" name="Connector 42"/>
           <p:cNvCxnSpPr/>
           <p:nvPr/>
         </p:nvCxnSpPr>
@@ -5985,7 +6116,7 @@
       </p:cxnSp>
       <p:sp>
         <p:nvSpPr>
-          <p:cNvPr id="45" name="Rounded Rectangle 44"/>
+          <p:cNvPr id="44" name="Rounded Rectangle 43"/>
           <p:cNvSpPr/>
           <p:nvPr/>
         </p:nvSpPr>
@@ -6024,7 +6155,7 @@
           </a:fontRef>
         </p:style>
         <p:txBody>
-          <a:bodyPr wrap="square" lIns="54864" tIns="27432" rIns="54864" bIns="27432" rtlCol="0" anchor="ctr"/>
+          <a:bodyPr rtlCol="0" anchor="ctr" wrap="square" lIns="54864" rIns="54864" tIns="27432" bIns="27432"/>
           <a:lstStyle/>
           <a:p>
             <a:pPr algn="ctr"/>
@@ -6042,7 +6173,7 @@
       </p:sp>
       <p:sp>
         <p:nvSpPr>
-          <p:cNvPr id="46" name="TextBox 45"/>
+          <p:cNvPr id="45" name="TextBox 44"/>
           <p:cNvSpPr txBox="1"/>
           <p:nvPr/>
         </p:nvSpPr>
@@ -6057,7 +6188,7 @@
           <a:noFill/>
         </p:spPr>
         <p:txBody>
-          <a:bodyPr wrap="square" lIns="0" tIns="0" rIns="0" bIns="0" anchor="t">
+          <a:bodyPr wrap="square" anchor="t" lIns="0" rIns="0" tIns="0" bIns="0">
             <a:spAutoFit/>
           </a:bodyPr>
           <a:lstStyle/>
@@ -6068,7 +6199,7 @@
               </a:spcAft>
             </a:pPr>
             <a:r>
-              <a:rPr sz="900" b="0" dirty="0">
+              <a:rPr sz="900" b="0">
                 <a:solidFill>
                   <a:srgbClr val="6B6B6B"/>
                 </a:solidFill>
@@ -6081,7 +6212,7 @@
       </p:sp>
       <p:sp>
         <p:nvSpPr>
-          <p:cNvPr id="47" name="Rounded Rectangle 46"/>
+          <p:cNvPr id="46" name="Rounded Rectangle 45"/>
           <p:cNvSpPr/>
           <p:nvPr/>
         </p:nvSpPr>
@@ -6120,7 +6251,7 @@
           </a:fontRef>
         </p:style>
         <p:txBody>
-          <a:bodyPr wrap="square" lIns="54864" tIns="27432" rIns="54864" bIns="27432" rtlCol="0" anchor="ctr"/>
+          <a:bodyPr rtlCol="0" anchor="ctr" wrap="square" lIns="54864" rIns="54864" tIns="27432" bIns="27432"/>
           <a:lstStyle/>
           <a:p>
             <a:pPr algn="ctr"/>
@@ -6138,7 +6269,7 @@
       </p:sp>
       <p:sp>
         <p:nvSpPr>
-          <p:cNvPr id="48" name="Rounded Rectangle 47"/>
+          <p:cNvPr id="47" name="Rounded Rectangle 46"/>
           <p:cNvSpPr/>
           <p:nvPr/>
         </p:nvSpPr>
@@ -6179,13 +6310,12 @@
           <a:lstStyle/>
           <a:p>
             <a:pPr algn="ctr"/>
-            <a:endParaRPr/>
-          </a:p>
-        </p:txBody>
-      </p:sp>
-      <p:sp>
-        <p:nvSpPr>
-          <p:cNvPr id="49" name="Rounded Rectangle 48"/>
+          </a:p>
+        </p:txBody>
+      </p:sp>
+      <p:sp>
+        <p:nvSpPr>
+          <p:cNvPr id="48" name="Rounded Rectangle 47"/>
           <p:cNvSpPr/>
           <p:nvPr/>
         </p:nvSpPr>
@@ -6224,7 +6354,7 @@
           </a:fontRef>
         </p:style>
         <p:txBody>
-          <a:bodyPr wrap="square" lIns="54864" tIns="27432" rIns="54864" bIns="27432" rtlCol="0" anchor="ctr"/>
+          <a:bodyPr rtlCol="0" anchor="ctr" wrap="square" lIns="54864" rIns="54864" tIns="27432" bIns="27432"/>
           <a:lstStyle/>
           <a:p>
             <a:pPr algn="ctr"/>
@@ -6242,7 +6372,7 @@
       </p:sp>
       <p:sp>
         <p:nvSpPr>
-          <p:cNvPr id="50" name="Rounded Rectangle 49"/>
+          <p:cNvPr id="49" name="Rounded Rectangle 48"/>
           <p:cNvSpPr/>
           <p:nvPr/>
         </p:nvSpPr>
@@ -6281,7 +6411,7 @@
           </a:fontRef>
         </p:style>
         <p:txBody>
-          <a:bodyPr wrap="square" lIns="54864" tIns="27432" rIns="54864" bIns="27432" rtlCol="0" anchor="ctr"/>
+          <a:bodyPr rtlCol="0" anchor="ctr" wrap="square" lIns="54864" rIns="54864" tIns="27432" bIns="27432"/>
           <a:lstStyle/>
           <a:p>
             <a:pPr algn="ctr"/>
@@ -6299,7 +6429,7 @@
       </p:sp>
       <p:sp>
         <p:nvSpPr>
-          <p:cNvPr id="51" name="Rounded Rectangle 50"/>
+          <p:cNvPr id="50" name="Rounded Rectangle 49"/>
           <p:cNvSpPr/>
           <p:nvPr/>
         </p:nvSpPr>
@@ -6338,7 +6468,7 @@
           </a:fontRef>
         </p:style>
         <p:txBody>
-          <a:bodyPr wrap="square" lIns="54864" tIns="27432" rIns="54864" bIns="27432" rtlCol="0" anchor="ctr"/>
+          <a:bodyPr rtlCol="0" anchor="ctr" wrap="square" lIns="54864" rIns="54864" tIns="27432" bIns="27432"/>
           <a:lstStyle/>
           <a:p>
             <a:pPr algn="ctr"/>
@@ -6356,7 +6486,7 @@
       </p:sp>
       <p:sp>
         <p:nvSpPr>
-          <p:cNvPr id="52" name="Rounded Rectangle 51"/>
+          <p:cNvPr id="51" name="Rounded Rectangle 50"/>
           <p:cNvSpPr/>
           <p:nvPr/>
         </p:nvSpPr>
@@ -6395,7 +6525,7 @@
           </a:fontRef>
         </p:style>
         <p:txBody>
-          <a:bodyPr wrap="square" lIns="54864" tIns="27432" rIns="54864" bIns="27432" rtlCol="0" anchor="ctr"/>
+          <a:bodyPr rtlCol="0" anchor="ctr" wrap="square" lIns="54864" rIns="54864" tIns="27432" bIns="27432"/>
           <a:lstStyle/>
           <a:p>
             <a:pPr algn="ctr"/>
@@ -6413,7 +6543,7 @@
       </p:sp>
       <p:sp>
         <p:nvSpPr>
-          <p:cNvPr id="53" name="TextBox 52"/>
+          <p:cNvPr id="52" name="TextBox 51"/>
           <p:cNvSpPr txBox="1"/>
           <p:nvPr/>
         </p:nvSpPr>
@@ -6428,7 +6558,7 @@
           <a:noFill/>
         </p:spPr>
         <p:txBody>
-          <a:bodyPr wrap="square" lIns="0" tIns="0" rIns="0" bIns="0" anchor="t">
+          <a:bodyPr wrap="square" anchor="t" lIns="0" rIns="0" tIns="0" bIns="0">
             <a:spAutoFit/>
           </a:bodyPr>
           <a:lstStyle/>
@@ -6439,7 +6569,7 @@
               </a:spcAft>
             </a:pPr>
             <a:r>
-              <a:rPr sz="850" b="0" dirty="0">
+              <a:rPr sz="850" b="0">
                 <a:solidFill>
                   <a:srgbClr val="6B6B6B"/>
                 </a:solidFill>
@@ -6452,7 +6582,7 @@
       </p:sp>
       <p:sp>
         <p:nvSpPr>
-          <p:cNvPr id="54" name="Rounded Rectangle 53"/>
+          <p:cNvPr id="53" name="Rounded Rectangle 52"/>
           <p:cNvSpPr/>
           <p:nvPr/>
         </p:nvSpPr>
@@ -6491,7 +6621,7 @@
           </a:fontRef>
         </p:style>
         <p:txBody>
-          <a:bodyPr wrap="square" lIns="54864" tIns="27432" rIns="54864" bIns="27432" rtlCol="0" anchor="ctr"/>
+          <a:bodyPr rtlCol="0" anchor="ctr" wrap="square" lIns="54864" rIns="54864" tIns="27432" bIns="27432"/>
           <a:lstStyle/>
           <a:p>
             <a:pPr algn="ctr"/>
@@ -6509,7 +6639,7 @@
       </p:sp>
       <p:sp>
         <p:nvSpPr>
-          <p:cNvPr id="55" name="Rounded Rectangle 54"/>
+          <p:cNvPr id="54" name="Rounded Rectangle 53"/>
           <p:cNvSpPr/>
           <p:nvPr/>
         </p:nvSpPr>
@@ -6550,13 +6680,12 @@
           <a:lstStyle/>
           <a:p>
             <a:pPr algn="ctr"/>
-            <a:endParaRPr/>
-          </a:p>
-        </p:txBody>
-      </p:sp>
-      <p:sp>
-        <p:nvSpPr>
-          <p:cNvPr id="56" name="Rounded Rectangle 55"/>
+          </a:p>
+        </p:txBody>
+      </p:sp>
+      <p:sp>
+        <p:nvSpPr>
+          <p:cNvPr id="55" name="Rounded Rectangle 54"/>
           <p:cNvSpPr/>
           <p:nvPr/>
         </p:nvSpPr>
@@ -6595,7 +6724,7 @@
           </a:fontRef>
         </p:style>
         <p:txBody>
-          <a:bodyPr wrap="square" lIns="54864" tIns="27432" rIns="54864" bIns="27432" rtlCol="0" anchor="ctr"/>
+          <a:bodyPr rtlCol="0" anchor="ctr" wrap="square" lIns="54864" rIns="54864" tIns="27432" bIns="27432"/>
           <a:lstStyle/>
           <a:p>
             <a:pPr algn="ctr"/>
@@ -6613,7 +6742,7 @@
       </p:sp>
       <p:sp>
         <p:nvSpPr>
-          <p:cNvPr id="57" name="Rounded Rectangle 56"/>
+          <p:cNvPr id="56" name="Rounded Rectangle 55"/>
           <p:cNvSpPr/>
           <p:nvPr/>
         </p:nvSpPr>
@@ -6652,7 +6781,7 @@
           </a:fontRef>
         </p:style>
         <p:txBody>
-          <a:bodyPr wrap="square" lIns="54864" tIns="27432" rIns="54864" bIns="27432" rtlCol="0" anchor="ctr"/>
+          <a:bodyPr rtlCol="0" anchor="ctr" wrap="square" lIns="54864" rIns="54864" tIns="27432" bIns="27432"/>
           <a:lstStyle/>
           <a:p>
             <a:pPr algn="ctr"/>
@@ -6670,7 +6799,7 @@
       </p:sp>
       <p:sp>
         <p:nvSpPr>
-          <p:cNvPr id="58" name="Rounded Rectangle 57"/>
+          <p:cNvPr id="57" name="Rounded Rectangle 56"/>
           <p:cNvSpPr/>
           <p:nvPr/>
         </p:nvSpPr>
@@ -6709,7 +6838,7 @@
           </a:fontRef>
         </p:style>
         <p:txBody>
-          <a:bodyPr wrap="square" lIns="54864" tIns="27432" rIns="54864" bIns="27432" rtlCol="0" anchor="ctr"/>
+          <a:bodyPr rtlCol="0" anchor="ctr" wrap="square" lIns="54864" rIns="54864" tIns="27432" bIns="27432"/>
           <a:lstStyle/>
           <a:p>
             <a:pPr algn="ctr"/>
@@ -6727,7 +6856,7 @@
       </p:sp>
       <p:sp>
         <p:nvSpPr>
-          <p:cNvPr id="59" name="Rounded Rectangle 58"/>
+          <p:cNvPr id="58" name="Rounded Rectangle 57"/>
           <p:cNvSpPr/>
           <p:nvPr/>
         </p:nvSpPr>
@@ -6766,7 +6895,7 @@
           </a:fontRef>
         </p:style>
         <p:txBody>
-          <a:bodyPr wrap="square" lIns="54864" tIns="27432" rIns="54864" bIns="27432" rtlCol="0" anchor="ctr"/>
+          <a:bodyPr rtlCol="0" anchor="ctr" wrap="square" lIns="54864" rIns="54864" tIns="27432" bIns="27432"/>
           <a:lstStyle/>
           <a:p>
             <a:pPr algn="ctr"/>
@@ -6784,7 +6913,7 @@
       </p:sp>
       <p:sp>
         <p:nvSpPr>
-          <p:cNvPr id="60" name="Rounded Rectangle 59"/>
+          <p:cNvPr id="59" name="Rounded Rectangle 58"/>
           <p:cNvSpPr/>
           <p:nvPr/>
         </p:nvSpPr>
@@ -6823,7 +6952,7 @@
           </a:fontRef>
         </p:style>
         <p:txBody>
-          <a:bodyPr wrap="square" lIns="54864" tIns="27432" rIns="54864" bIns="27432" rtlCol="0" anchor="ctr"/>
+          <a:bodyPr rtlCol="0" anchor="ctr" wrap="square" lIns="54864" rIns="54864" tIns="27432" bIns="27432"/>
           <a:lstStyle/>
           <a:p>
             <a:pPr algn="ctr"/>
@@ -6841,7 +6970,7 @@
       </p:sp>
       <p:sp>
         <p:nvSpPr>
-          <p:cNvPr id="61" name="TextBox 60"/>
+          <p:cNvPr id="60" name="TextBox 59"/>
           <p:cNvSpPr txBox="1"/>
           <p:nvPr/>
         </p:nvSpPr>
@@ -6856,7 +6985,7 @@
           <a:noFill/>
         </p:spPr>
         <p:txBody>
-          <a:bodyPr wrap="square" lIns="0" tIns="0" rIns="0" bIns="0" anchor="t">
+          <a:bodyPr wrap="square" anchor="t" lIns="0" rIns="0" tIns="0" bIns="0">
             <a:spAutoFit/>
           </a:bodyPr>
           <a:lstStyle/>
@@ -6867,7 +6996,7 @@
               </a:spcAft>
             </a:pPr>
             <a:r>
-              <a:rPr sz="850" b="0" dirty="0">
+              <a:rPr sz="850" b="0">
                 <a:solidFill>
                   <a:srgbClr val="6B6B6B"/>
                 </a:solidFill>
@@ -6887,7 +7016,7 @@
 </file>
 
 <file path=ppt/slides/slide2.xml><?xml version="1.0" encoding="utf-8"?>
-<p:sld xmlns:a="http://schemas.openxmlformats.org/drawingml/2006/main" xmlns:r="http://schemas.openxmlformats.org/officeDocument/2006/relationships" xmlns:p="http://schemas.openxmlformats.org/presentationml/2006/main">
+<p:sld xmlns:a="http://schemas.openxmlformats.org/drawingml/2006/main" xmlns:p="http://schemas.openxmlformats.org/presentationml/2006/main" xmlns:r="http://schemas.openxmlformats.org/officeDocument/2006/relationships">
   <p:cSld>
     <p:spTree>
       <p:nvGrpSpPr>
@@ -6895,14 +7024,7 @@
         <p:cNvGrpSpPr/>
         <p:nvPr/>
       </p:nvGrpSpPr>
-      <p:grpSpPr>
-        <a:xfrm>
-          <a:off x="0" y="0"/>
-          <a:ext cx="0" cy="0"/>
-          <a:chOff x="0" y="0"/>
-          <a:chExt cx="0" cy="0"/>
-        </a:xfrm>
-      </p:grpSpPr>
+      <p:grpSpPr/>
       <p:sp>
         <p:nvSpPr>
           <p:cNvPr id="2" name="TextBox 1"/>
@@ -6920,7 +7042,7 @@
           <a:noFill/>
         </p:spPr>
         <p:txBody>
-          <a:bodyPr wrap="square" lIns="0" tIns="0" rIns="0" bIns="0" anchor="t">
+          <a:bodyPr wrap="square" anchor="t" lIns="0" rIns="0" tIns="0" bIns="0">
             <a:spAutoFit/>
           </a:bodyPr>
           <a:lstStyle/>
@@ -6959,7 +7081,7 @@
           <a:noFill/>
         </p:spPr>
         <p:txBody>
-          <a:bodyPr wrap="square" lIns="0" tIns="0" rIns="0" bIns="0" anchor="t">
+          <a:bodyPr wrap="square" anchor="t" lIns="0" rIns="0" tIns="0" bIns="0">
             <a:spAutoFit/>
           </a:bodyPr>
           <a:lstStyle/>
@@ -7022,13 +7144,12 @@
           <a:lstStyle/>
           <a:p>
             <a:pPr algn="ctr"/>
-            <a:endParaRPr/>
-          </a:p>
-        </p:txBody>
-      </p:sp>
-      <p:sp>
-        <p:nvSpPr>
-          <p:cNvPr id="6" name="TextBox 5"/>
+          </a:p>
+        </p:txBody>
+      </p:sp>
+      <p:sp>
+        <p:nvSpPr>
+          <p:cNvPr id="5" name="TextBox 4"/>
           <p:cNvSpPr txBox="1"/>
           <p:nvPr/>
         </p:nvSpPr>
@@ -7043,7 +7164,7 @@
           <a:noFill/>
         </p:spPr>
         <p:txBody>
-          <a:bodyPr wrap="square" lIns="0" tIns="0" rIns="0" bIns="0" anchor="t">
+          <a:bodyPr wrap="square" anchor="t" lIns="0" rIns="0" tIns="0" bIns="0">
             <a:spAutoFit/>
           </a:bodyPr>
           <a:lstStyle/>
@@ -7067,7 +7188,7 @@
       </p:sp>
       <p:sp>
         <p:nvSpPr>
-          <p:cNvPr id="7" name="TextBox 6"/>
+          <p:cNvPr id="6" name="TextBox 5"/>
           <p:cNvSpPr txBox="1"/>
           <p:nvPr/>
         </p:nvSpPr>
@@ -7082,7 +7203,7 @@
           <a:noFill/>
         </p:spPr>
         <p:txBody>
-          <a:bodyPr wrap="square" lIns="0" tIns="0" rIns="0" bIns="0" anchor="t">
+          <a:bodyPr wrap="square" anchor="t" lIns="0" rIns="0" tIns="0" bIns="0">
             <a:spAutoFit/>
           </a:bodyPr>
           <a:lstStyle/>
@@ -7106,7 +7227,7 @@
       </p:sp>
       <p:sp>
         <p:nvSpPr>
-          <p:cNvPr id="8" name="TextBox 7"/>
+          <p:cNvPr id="7" name="TextBox 6"/>
           <p:cNvSpPr txBox="1"/>
           <p:nvPr/>
         </p:nvSpPr>
@@ -7121,7 +7242,7 @@
           <a:noFill/>
         </p:spPr>
         <p:txBody>
-          <a:bodyPr wrap="square" lIns="0" tIns="0" rIns="0" bIns="0" anchor="t">
+          <a:bodyPr wrap="square" anchor="t" lIns="0" rIns="0" tIns="0" bIns="0">
             <a:spAutoFit/>
           </a:bodyPr>
           <a:lstStyle/>
@@ -7145,7 +7266,7 @@
       </p:sp>
       <p:sp>
         <p:nvSpPr>
-          <p:cNvPr id="9" name="TextBox 8"/>
+          <p:cNvPr id="8" name="TextBox 7"/>
           <p:cNvSpPr txBox="1"/>
           <p:nvPr/>
         </p:nvSpPr>
@@ -7160,7 +7281,7 @@
           <a:noFill/>
         </p:spPr>
         <p:txBody>
-          <a:bodyPr wrap="square" lIns="0" tIns="0" rIns="0" bIns="0" anchor="t">
+          <a:bodyPr wrap="square" anchor="t" lIns="0" rIns="0" tIns="0" bIns="0">
             <a:spAutoFit/>
           </a:bodyPr>
           <a:lstStyle/>
@@ -7184,7 +7305,7 @@
       </p:sp>
       <p:sp>
         <p:nvSpPr>
-          <p:cNvPr id="10" name="TextBox 9"/>
+          <p:cNvPr id="9" name="TextBox 8"/>
           <p:cNvSpPr txBox="1"/>
           <p:nvPr/>
         </p:nvSpPr>
@@ -7199,7 +7320,7 @@
           <a:noFill/>
         </p:spPr>
         <p:txBody>
-          <a:bodyPr wrap="square" lIns="0" tIns="0" rIns="0" bIns="0" anchor="t">
+          <a:bodyPr wrap="square" anchor="t" lIns="0" rIns="0" tIns="0" bIns="0">
             <a:spAutoFit/>
           </a:bodyPr>
           <a:lstStyle/>
@@ -7223,7 +7344,7 @@
       </p:sp>
       <p:sp>
         <p:nvSpPr>
-          <p:cNvPr id="11" name="Rectangle 10"/>
+          <p:cNvPr id="10" name="Rectangle 9"/>
           <p:cNvSpPr/>
           <p:nvPr/>
         </p:nvSpPr>
@@ -7262,13 +7383,12 @@
           <a:lstStyle/>
           <a:p>
             <a:pPr algn="ctr"/>
-            <a:endParaRPr/>
-          </a:p>
-        </p:txBody>
-      </p:sp>
-      <p:sp>
-        <p:nvSpPr>
-          <p:cNvPr id="12" name="TextBox 11"/>
+          </a:p>
+        </p:txBody>
+      </p:sp>
+      <p:sp>
+        <p:nvSpPr>
+          <p:cNvPr id="11" name="TextBox 10"/>
           <p:cNvSpPr txBox="1"/>
           <p:nvPr/>
         </p:nvSpPr>
@@ -7283,7 +7403,7 @@
           <a:noFill/>
         </p:spPr>
         <p:txBody>
-          <a:bodyPr wrap="square" lIns="0" tIns="0" rIns="0" bIns="0" anchor="t">
+          <a:bodyPr wrap="square" anchor="t" lIns="0" rIns="0" tIns="0" bIns="0">
             <a:spAutoFit/>
           </a:bodyPr>
           <a:lstStyle/>
@@ -7307,7 +7427,7 @@
       </p:sp>
       <p:sp>
         <p:nvSpPr>
-          <p:cNvPr id="13" name="TextBox 12"/>
+          <p:cNvPr id="12" name="TextBox 11"/>
           <p:cNvSpPr txBox="1"/>
           <p:nvPr/>
         </p:nvSpPr>
@@ -7322,7 +7442,7 @@
           <a:noFill/>
         </p:spPr>
         <p:txBody>
-          <a:bodyPr wrap="square" lIns="0" tIns="0" rIns="0" bIns="0" anchor="t">
+          <a:bodyPr wrap="square" anchor="t" lIns="0" rIns="0" tIns="0" bIns="0">
             <a:spAutoFit/>
           </a:bodyPr>
           <a:lstStyle/>
@@ -7346,7 +7466,7 @@
       </p:sp>
       <p:sp>
         <p:nvSpPr>
-          <p:cNvPr id="14" name="Rectangle 13"/>
+          <p:cNvPr id="13" name="Rectangle 12"/>
           <p:cNvSpPr/>
           <p:nvPr/>
         </p:nvSpPr>
@@ -7385,13 +7505,12 @@
           <a:lstStyle/>
           <a:p>
             <a:pPr algn="ctr"/>
-            <a:endParaRPr/>
-          </a:p>
-        </p:txBody>
-      </p:sp>
-      <p:sp>
-        <p:nvSpPr>
-          <p:cNvPr id="15" name="TextBox 14"/>
+          </a:p>
+        </p:txBody>
+      </p:sp>
+      <p:sp>
+        <p:nvSpPr>
+          <p:cNvPr id="14" name="TextBox 13"/>
           <p:cNvSpPr txBox="1"/>
           <p:nvPr/>
         </p:nvSpPr>
@@ -7406,7 +7525,7 @@
           <a:noFill/>
         </p:spPr>
         <p:txBody>
-          <a:bodyPr wrap="square" lIns="0" tIns="0" rIns="0" bIns="0" anchor="t">
+          <a:bodyPr wrap="square" anchor="t" lIns="0" rIns="0" tIns="0" bIns="0">
             <a:spAutoFit/>
           </a:bodyPr>
           <a:lstStyle/>
@@ -7430,7 +7549,7 @@
       </p:sp>
       <p:sp>
         <p:nvSpPr>
-          <p:cNvPr id="16" name="TextBox 15"/>
+          <p:cNvPr id="15" name="TextBox 14"/>
           <p:cNvSpPr txBox="1"/>
           <p:nvPr/>
         </p:nvSpPr>
@@ -7445,7 +7564,7 @@
           <a:noFill/>
         </p:spPr>
         <p:txBody>
-          <a:bodyPr wrap="square" lIns="0" tIns="0" rIns="0" bIns="0" anchor="t">
+          <a:bodyPr wrap="square" anchor="t" lIns="0" rIns="0" tIns="0" bIns="0">
             <a:spAutoFit/>
           </a:bodyPr>
           <a:lstStyle/>
@@ -7469,7 +7588,7 @@
       </p:sp>
       <p:sp>
         <p:nvSpPr>
-          <p:cNvPr id="17" name="Rectangle 16"/>
+          <p:cNvPr id="16" name="Rectangle 15"/>
           <p:cNvSpPr/>
           <p:nvPr/>
         </p:nvSpPr>
@@ -7508,13 +7627,12 @@
           <a:lstStyle/>
           <a:p>
             <a:pPr algn="ctr"/>
-            <a:endParaRPr/>
-          </a:p>
-        </p:txBody>
-      </p:sp>
-      <p:sp>
-        <p:nvSpPr>
-          <p:cNvPr id="18" name="TextBox 17"/>
+          </a:p>
+        </p:txBody>
+      </p:sp>
+      <p:sp>
+        <p:nvSpPr>
+          <p:cNvPr id="17" name="TextBox 16"/>
           <p:cNvSpPr txBox="1"/>
           <p:nvPr/>
         </p:nvSpPr>
@@ -7529,7 +7647,7 @@
           <a:noFill/>
         </p:spPr>
         <p:txBody>
-          <a:bodyPr wrap="square" lIns="0" tIns="0" rIns="0" bIns="0" anchor="t">
+          <a:bodyPr wrap="square" anchor="t" lIns="0" rIns="0" tIns="0" bIns="0">
             <a:spAutoFit/>
           </a:bodyPr>
           <a:lstStyle/>
@@ -7553,7 +7671,7 @@
       </p:sp>
       <p:sp>
         <p:nvSpPr>
-          <p:cNvPr id="19" name="TextBox 18"/>
+          <p:cNvPr id="18" name="TextBox 17"/>
           <p:cNvSpPr txBox="1"/>
           <p:nvPr/>
         </p:nvSpPr>
@@ -7568,7 +7686,7 @@
           <a:noFill/>
         </p:spPr>
         <p:txBody>
-          <a:bodyPr wrap="square" lIns="0" tIns="0" rIns="0" bIns="0" anchor="t">
+          <a:bodyPr wrap="square" anchor="t" lIns="0" rIns="0" tIns="0" bIns="0">
             <a:spAutoFit/>
           </a:bodyPr>
           <a:lstStyle/>
@@ -7592,7 +7710,7 @@
       </p:sp>
       <p:sp>
         <p:nvSpPr>
-          <p:cNvPr id="20" name="Rectangle 19"/>
+          <p:cNvPr id="19" name="Rectangle 18"/>
           <p:cNvSpPr/>
           <p:nvPr/>
         </p:nvSpPr>
@@ -7631,13 +7749,12 @@
           <a:lstStyle/>
           <a:p>
             <a:pPr algn="ctr"/>
-            <a:endParaRPr/>
-          </a:p>
-        </p:txBody>
-      </p:sp>
-      <p:sp>
-        <p:nvSpPr>
-          <p:cNvPr id="21" name="Rounded Rectangle 20"/>
+          </a:p>
+        </p:txBody>
+      </p:sp>
+      <p:sp>
+        <p:nvSpPr>
+          <p:cNvPr id="20" name="Rounded Rectangle 19"/>
           <p:cNvSpPr/>
           <p:nvPr/>
         </p:nvSpPr>
@@ -7676,7 +7793,7 @@
           </a:fontRef>
         </p:style>
         <p:txBody>
-          <a:bodyPr wrap="square" lIns="54864" tIns="27432" rIns="54864" bIns="27432" rtlCol="0" anchor="ctr"/>
+          <a:bodyPr rtlCol="0" anchor="ctr" wrap="square" lIns="54864" rIns="54864" tIns="27432" bIns="27432"/>
           <a:lstStyle/>
           <a:p>
             <a:pPr algn="ctr"/>
@@ -7706,7 +7823,7 @@
       </p:sp>
       <p:cxnSp>
         <p:nvCxnSpPr>
-          <p:cNvPr id="22" name="Connector 21"/>
+          <p:cNvPr id="21" name="Connector 20"/>
           <p:cNvCxnSpPr/>
           <p:nvPr/>
         </p:nvCxnSpPr>
@@ -7742,7 +7859,7 @@
       </p:cxnSp>
       <p:sp>
         <p:nvSpPr>
-          <p:cNvPr id="23" name="Rounded Rectangle 22"/>
+          <p:cNvPr id="22" name="Rounded Rectangle 21"/>
           <p:cNvSpPr/>
           <p:nvPr/>
         </p:nvSpPr>
@@ -7781,7 +7898,7 @@
           </a:fontRef>
         </p:style>
         <p:txBody>
-          <a:bodyPr wrap="square" lIns="54864" tIns="27432" rIns="54864" bIns="27432" rtlCol="0" anchor="ctr"/>
+          <a:bodyPr rtlCol="0" anchor="ctr" wrap="square" lIns="54864" rIns="54864" tIns="27432" bIns="27432"/>
           <a:lstStyle/>
           <a:p>
             <a:pPr algn="ctr"/>
@@ -7811,7 +7928,7 @@
       </p:sp>
       <p:cxnSp>
         <p:nvCxnSpPr>
-          <p:cNvPr id="24" name="Connector 23"/>
+          <p:cNvPr id="23" name="Connector 22"/>
           <p:cNvCxnSpPr/>
           <p:nvPr/>
         </p:nvCxnSpPr>
@@ -7847,7 +7964,7 @@
       </p:cxnSp>
       <p:sp>
         <p:nvSpPr>
-          <p:cNvPr id="25" name="Rounded Rectangle 24"/>
+          <p:cNvPr id="24" name="Rounded Rectangle 23"/>
           <p:cNvSpPr/>
           <p:nvPr/>
         </p:nvSpPr>
@@ -7886,7 +8003,7 @@
           </a:fontRef>
         </p:style>
         <p:txBody>
-          <a:bodyPr wrap="square" lIns="54864" tIns="27432" rIns="54864" bIns="27432" rtlCol="0" anchor="ctr"/>
+          <a:bodyPr rtlCol="0" anchor="ctr" wrap="square" lIns="54864" rIns="54864" tIns="27432" bIns="27432"/>
           <a:lstStyle/>
           <a:p>
             <a:pPr algn="ctr"/>
@@ -7916,7 +8033,7 @@
       </p:sp>
       <p:cxnSp>
         <p:nvCxnSpPr>
-          <p:cNvPr id="26" name="Connector 25"/>
+          <p:cNvPr id="25" name="Connector 24"/>
           <p:cNvCxnSpPr/>
           <p:nvPr/>
         </p:nvCxnSpPr>
@@ -7952,7 +8069,7 @@
       </p:cxnSp>
       <p:sp>
         <p:nvSpPr>
-          <p:cNvPr id="27" name="Rounded Rectangle 26"/>
+          <p:cNvPr id="26" name="Rounded Rectangle 25"/>
           <p:cNvSpPr/>
           <p:nvPr/>
         </p:nvSpPr>
@@ -7991,7 +8108,7 @@
           </a:fontRef>
         </p:style>
         <p:txBody>
-          <a:bodyPr wrap="square" lIns="54864" tIns="27432" rIns="54864" bIns="27432" rtlCol="0" anchor="ctr"/>
+          <a:bodyPr rtlCol="0" anchor="ctr" wrap="square" lIns="54864" rIns="54864" tIns="27432" bIns="27432"/>
           <a:lstStyle/>
           <a:p>
             <a:pPr algn="ctr"/>
@@ -8043,12 +8160,6 @@
           </a:p>
           <a:p>
             <a:pPr algn="ctr"/>
-            <a:endParaRPr sz="850" b="0">
-              <a:solidFill>
-                <a:srgbClr val="1A1A1A"/>
-              </a:solidFill>
-              <a:latin typeface="Segoe UI"/>
-            </a:endParaRPr>
           </a:p>
           <a:p>
             <a:pPr algn="ctr"/>
@@ -8066,7 +8177,7 @@
       </p:sp>
       <p:cxnSp>
         <p:nvCxnSpPr>
-          <p:cNvPr id="28" name="Connector 27"/>
+          <p:cNvPr id="27" name="Connector 26"/>
           <p:cNvCxnSpPr/>
           <p:nvPr/>
         </p:nvCxnSpPr>
@@ -8102,7 +8213,7 @@
       </p:cxnSp>
       <p:cxnSp>
         <p:nvCxnSpPr>
-          <p:cNvPr id="29" name="Connector 28"/>
+          <p:cNvPr id="28" name="Connector 27"/>
           <p:cNvCxnSpPr/>
           <p:nvPr/>
         </p:nvCxnSpPr>
@@ -8138,7 +8249,7 @@
       </p:cxnSp>
       <p:sp>
         <p:nvSpPr>
-          <p:cNvPr id="30" name="Rounded Rectangle 29"/>
+          <p:cNvPr id="29" name="Rounded Rectangle 28"/>
           <p:cNvSpPr/>
           <p:nvPr/>
         </p:nvSpPr>
@@ -8177,7 +8288,7 @@
           </a:fontRef>
         </p:style>
         <p:txBody>
-          <a:bodyPr wrap="square" lIns="54864" tIns="27432" rIns="54864" bIns="27432" rtlCol="0" anchor="ctr"/>
+          <a:bodyPr rtlCol="0" anchor="ctr" wrap="square" lIns="54864" rIns="54864" tIns="27432" bIns="27432"/>
           <a:lstStyle/>
           <a:p>
             <a:pPr algn="ctr"/>
@@ -8195,7 +8306,7 @@
       </p:sp>
       <p:sp>
         <p:nvSpPr>
-          <p:cNvPr id="31" name="Rounded Rectangle 30"/>
+          <p:cNvPr id="30" name="Rounded Rectangle 29"/>
           <p:cNvSpPr/>
           <p:nvPr/>
         </p:nvSpPr>
@@ -8236,13 +8347,12 @@
           <a:lstStyle/>
           <a:p>
             <a:pPr algn="ctr"/>
-            <a:endParaRPr/>
-          </a:p>
-        </p:txBody>
-      </p:sp>
-      <p:sp>
-        <p:nvSpPr>
-          <p:cNvPr id="32" name="Rounded Rectangle 31"/>
+          </a:p>
+        </p:txBody>
+      </p:sp>
+      <p:sp>
+        <p:nvSpPr>
+          <p:cNvPr id="31" name="Rounded Rectangle 30"/>
           <p:cNvSpPr/>
           <p:nvPr/>
         </p:nvSpPr>
@@ -8281,12 +8391,12 @@
           </a:fontRef>
         </p:style>
         <p:txBody>
-          <a:bodyPr wrap="square" lIns="54864" tIns="27432" rIns="54864" bIns="27432" rtlCol="0" anchor="ctr"/>
-          <a:lstStyle/>
-          <a:p>
-            <a:pPr algn="ctr"/>
-            <a:r>
-              <a:rPr sz="850" b="0" dirty="0">
+          <a:bodyPr rtlCol="0" anchor="ctr" wrap="square" lIns="54864" rIns="54864" tIns="27432" bIns="27432"/>
+          <a:lstStyle/>
+          <a:p>
+            <a:pPr algn="ctr"/>
+            <a:r>
+              <a:rPr sz="850" b="0">
                 <a:solidFill>
                   <a:srgbClr val="1E6B52"/>
                 </a:solidFill>
@@ -8299,7 +8409,7 @@
       </p:sp>
       <p:sp>
         <p:nvSpPr>
-          <p:cNvPr id="33" name="Rounded Rectangle 32"/>
+          <p:cNvPr id="32" name="Rounded Rectangle 31"/>
           <p:cNvSpPr/>
           <p:nvPr/>
         </p:nvSpPr>
@@ -8338,7 +8448,7 @@
           </a:fontRef>
         </p:style>
         <p:txBody>
-          <a:bodyPr wrap="square" lIns="54864" tIns="27432" rIns="54864" bIns="27432" rtlCol="0" anchor="ctr"/>
+          <a:bodyPr rtlCol="0" anchor="ctr" wrap="square" lIns="54864" rIns="54864" tIns="27432" bIns="27432"/>
           <a:lstStyle/>
           <a:p>
             <a:pPr algn="ctr"/>
@@ -8349,14 +8459,14 @@
                 </a:solidFill>
                 <a:latin typeface="Segoe UI"/>
               </a:rPr>
-              <a:t>pushing to your own git remote</a:t>
-            </a:r>
-          </a:p>
-        </p:txBody>
-      </p:sp>
-      <p:sp>
-        <p:nvSpPr>
-          <p:cNvPr id="34" name="Rounded Rectangle 33"/>
+              <a:t>pushing to our own git remote</a:t>
+            </a:r>
+          </a:p>
+        </p:txBody>
+      </p:sp>
+      <p:sp>
+        <p:nvSpPr>
+          <p:cNvPr id="33" name="Rounded Rectangle 32"/>
           <p:cNvSpPr/>
           <p:nvPr/>
         </p:nvSpPr>
@@ -8395,7 +8505,7 @@
           </a:fontRef>
         </p:style>
         <p:txBody>
-          <a:bodyPr wrap="square" lIns="54864" tIns="27432" rIns="54864" bIns="27432" rtlCol="0" anchor="ctr"/>
+          <a:bodyPr rtlCol="0" anchor="ctr" wrap="square" lIns="54864" rIns="54864" tIns="27432" bIns="27432"/>
           <a:lstStyle/>
           <a:p>
             <a:pPr algn="ctr"/>
@@ -8413,7 +8523,7 @@
       </p:sp>
       <p:sp>
         <p:nvSpPr>
-          <p:cNvPr id="35" name="Rounded Rectangle 34"/>
+          <p:cNvPr id="34" name="Rounded Rectangle 33"/>
           <p:cNvSpPr/>
           <p:nvPr/>
         </p:nvSpPr>
@@ -8452,7 +8562,7 @@
           </a:fontRef>
         </p:style>
         <p:txBody>
-          <a:bodyPr wrap="square" lIns="54864" tIns="27432" rIns="54864" bIns="27432" rtlCol="0" anchor="ctr"/>
+          <a:bodyPr rtlCol="0" anchor="ctr" wrap="square" lIns="54864" rIns="54864" tIns="27432" bIns="27432"/>
           <a:lstStyle/>
           <a:p>
             <a:pPr algn="ctr"/>
@@ -8470,7 +8580,7 @@
       </p:sp>
       <p:sp>
         <p:nvSpPr>
-          <p:cNvPr id="36" name="Rounded Rectangle 35"/>
+          <p:cNvPr id="35" name="Rounded Rectangle 34"/>
           <p:cNvSpPr/>
           <p:nvPr/>
         </p:nvSpPr>
@@ -8511,13 +8621,12 @@
           <a:lstStyle/>
           <a:p>
             <a:pPr algn="ctr"/>
-            <a:endParaRPr/>
-          </a:p>
-        </p:txBody>
-      </p:sp>
-      <p:sp>
-        <p:nvSpPr>
-          <p:cNvPr id="37" name="Rounded Rectangle 36"/>
+          </a:p>
+        </p:txBody>
+      </p:sp>
+      <p:sp>
+        <p:nvSpPr>
+          <p:cNvPr id="36" name="Rounded Rectangle 35"/>
           <p:cNvSpPr/>
           <p:nvPr/>
         </p:nvSpPr>
@@ -8556,7 +8665,7 @@
           </a:fontRef>
         </p:style>
         <p:txBody>
-          <a:bodyPr wrap="square" lIns="54864" tIns="27432" rIns="54864" bIns="27432" rtlCol="0" anchor="ctr"/>
+          <a:bodyPr rtlCol="0" anchor="ctr" wrap="square" lIns="54864" rIns="54864" tIns="27432" bIns="27432"/>
           <a:lstStyle/>
           <a:p>
             <a:pPr algn="ctr"/>
@@ -8574,7 +8683,7 @@
       </p:sp>
       <p:sp>
         <p:nvSpPr>
-          <p:cNvPr id="38" name="Rounded Rectangle 37"/>
+          <p:cNvPr id="37" name="Rounded Rectangle 36"/>
           <p:cNvSpPr/>
           <p:nvPr/>
         </p:nvSpPr>
@@ -8613,7 +8722,7 @@
           </a:fontRef>
         </p:style>
         <p:txBody>
-          <a:bodyPr wrap="square" lIns="54864" tIns="27432" rIns="54864" bIns="27432" rtlCol="0" anchor="ctr"/>
+          <a:bodyPr rtlCol="0" anchor="ctr" wrap="square" lIns="54864" rIns="54864" tIns="27432" bIns="27432"/>
           <a:lstStyle/>
           <a:p>
             <a:pPr algn="ctr"/>
@@ -8631,7 +8740,7 @@
       </p:sp>
       <p:sp>
         <p:nvSpPr>
-          <p:cNvPr id="39" name="Rounded Rectangle 38"/>
+          <p:cNvPr id="38" name="Rounded Rectangle 37"/>
           <p:cNvSpPr/>
           <p:nvPr/>
         </p:nvSpPr>
@@ -8670,7 +8779,7 @@
           </a:fontRef>
         </p:style>
         <p:txBody>
-          <a:bodyPr wrap="square" lIns="54864" tIns="27432" rIns="54864" bIns="27432" rtlCol="0" anchor="ctr"/>
+          <a:bodyPr rtlCol="0" anchor="ctr" wrap="square" lIns="54864" rIns="54864" tIns="27432" bIns="27432"/>
           <a:lstStyle/>
           <a:p>
             <a:pPr algn="ctr"/>
@@ -8688,13 +8797,13 @@
       </p:sp>
       <p:sp>
         <p:nvSpPr>
-          <p:cNvPr id="40" name="Rounded Rectangle 39"/>
+          <p:cNvPr id="39" name="Rounded Rectangle 38"/>
           <p:cNvSpPr/>
           <p:nvPr/>
         </p:nvSpPr>
         <p:spPr>
           <a:xfrm>
-            <a:off x="566928" y="3840480"/>
+            <a:off x="566928" y="3712463"/>
             <a:ext cx="3621024" cy="384048"/>
           </a:xfrm>
           <a:prstGeom prst="roundRect">
@@ -8727,7 +8836,7 @@
           </a:fontRef>
         </p:style>
         <p:txBody>
-          <a:bodyPr wrap="square" lIns="54864" tIns="27432" rIns="54864" bIns="27432" rtlCol="0" anchor="ctr"/>
+          <a:bodyPr rtlCol="0" anchor="ctr" wrap="square" lIns="54864" rIns="54864" tIns="27432" bIns="27432"/>
           <a:lstStyle/>
           <a:p>
             <a:pPr algn="ctr"/>
@@ -8745,13 +8854,13 @@
       </p:sp>
       <p:sp>
         <p:nvSpPr>
-          <p:cNvPr id="41" name="Rounded Rectangle 40"/>
+          <p:cNvPr id="40" name="Rounded Rectangle 39"/>
           <p:cNvSpPr/>
           <p:nvPr/>
         </p:nvSpPr>
         <p:spPr>
           <a:xfrm>
-            <a:off x="566928" y="4224528"/>
+            <a:off x="566928" y="4096511"/>
             <a:ext cx="3621024" cy="804672"/>
           </a:xfrm>
           <a:prstGeom prst="roundRect">
@@ -8786,19 +8895,18 @@
           <a:lstStyle/>
           <a:p>
             <a:pPr algn="ctr"/>
-            <a:endParaRPr/>
-          </a:p>
-        </p:txBody>
-      </p:sp>
-      <p:sp>
-        <p:nvSpPr>
-          <p:cNvPr id="42" name="Rounded Rectangle 41"/>
+          </a:p>
+        </p:txBody>
+      </p:sp>
+      <p:sp>
+        <p:nvSpPr>
+          <p:cNvPr id="41" name="Rounded Rectangle 40"/>
           <p:cNvSpPr/>
           <p:nvPr/>
         </p:nvSpPr>
         <p:spPr>
           <a:xfrm>
-            <a:off x="676656" y="4315968"/>
+            <a:off x="676656" y="4187951"/>
             <a:ext cx="3401568" cy="274320"/>
           </a:xfrm>
           <a:prstGeom prst="roundRect">
@@ -8831,7 +8939,7 @@
           </a:fontRef>
         </p:style>
         <p:txBody>
-          <a:bodyPr wrap="square" lIns="54864" tIns="27432" rIns="54864" bIns="27432" rtlCol="0" anchor="ctr"/>
+          <a:bodyPr rtlCol="0" anchor="ctr" wrap="square" lIns="54864" rIns="54864" tIns="27432" bIns="27432"/>
           <a:lstStyle/>
           <a:p>
             <a:pPr algn="ctr"/>
@@ -8849,13 +8957,13 @@
       </p:sp>
       <p:sp>
         <p:nvSpPr>
-          <p:cNvPr id="43" name="Rounded Rectangle 42"/>
+          <p:cNvPr id="42" name="Rounded Rectangle 41"/>
           <p:cNvSpPr/>
           <p:nvPr/>
         </p:nvSpPr>
         <p:spPr>
           <a:xfrm>
-            <a:off x="676656" y="4654296"/>
+            <a:off x="676656" y="4526279"/>
             <a:ext cx="3401568" cy="274320"/>
           </a:xfrm>
           <a:prstGeom prst="roundRect">
@@ -8888,7 +8996,7 @@
           </a:fontRef>
         </p:style>
         <p:txBody>
-          <a:bodyPr wrap="square" lIns="54864" tIns="27432" rIns="54864" bIns="27432" rtlCol="0" anchor="ctr"/>
+          <a:bodyPr rtlCol="0" anchor="ctr" wrap="square" lIns="54864" rIns="54864" tIns="27432" bIns="27432"/>
           <a:lstStyle/>
           <a:p>
             <a:pPr algn="ctr"/>
@@ -8906,13 +9014,13 @@
       </p:sp>
       <p:sp>
         <p:nvSpPr>
-          <p:cNvPr id="44" name="Rounded Rectangle 43"/>
+          <p:cNvPr id="43" name="Rounded Rectangle 42"/>
           <p:cNvSpPr/>
           <p:nvPr/>
         </p:nvSpPr>
         <p:spPr>
           <a:xfrm>
-            <a:off x="4370832" y="3840480"/>
+            <a:off x="4370832" y="3712463"/>
             <a:ext cx="3621024" cy="384048"/>
           </a:xfrm>
           <a:prstGeom prst="roundRect">
@@ -8945,7 +9053,7 @@
           </a:fontRef>
         </p:style>
         <p:txBody>
-          <a:bodyPr wrap="square" lIns="54864" tIns="27432" rIns="54864" bIns="27432" rtlCol="0" anchor="ctr"/>
+          <a:bodyPr rtlCol="0" anchor="ctr" wrap="square" lIns="54864" rIns="54864" tIns="27432" bIns="27432"/>
           <a:lstStyle/>
           <a:p>
             <a:pPr algn="ctr"/>
@@ -8963,13 +9071,13 @@
       </p:sp>
       <p:sp>
         <p:nvSpPr>
-          <p:cNvPr id="45" name="Rounded Rectangle 44"/>
+          <p:cNvPr id="44" name="Rounded Rectangle 43"/>
           <p:cNvSpPr/>
           <p:nvPr/>
         </p:nvSpPr>
         <p:spPr>
           <a:xfrm>
-            <a:off x="4370832" y="4224528"/>
+            <a:off x="4370832" y="4096511"/>
             <a:ext cx="3621024" cy="804672"/>
           </a:xfrm>
           <a:prstGeom prst="roundRect">
@@ -9004,19 +9112,18 @@
           <a:lstStyle/>
           <a:p>
             <a:pPr algn="ctr"/>
-            <a:endParaRPr/>
-          </a:p>
-        </p:txBody>
-      </p:sp>
-      <p:sp>
-        <p:nvSpPr>
-          <p:cNvPr id="46" name="Rounded Rectangle 45"/>
+          </a:p>
+        </p:txBody>
+      </p:sp>
+      <p:sp>
+        <p:nvSpPr>
+          <p:cNvPr id="45" name="Rounded Rectangle 44"/>
           <p:cNvSpPr/>
           <p:nvPr/>
         </p:nvSpPr>
         <p:spPr>
           <a:xfrm>
-            <a:off x="4480560" y="4315968"/>
+            <a:off x="4480560" y="4187951"/>
             <a:ext cx="3401568" cy="274320"/>
           </a:xfrm>
           <a:prstGeom prst="roundRect">
@@ -9049,7 +9156,7 @@
           </a:fontRef>
         </p:style>
         <p:txBody>
-          <a:bodyPr wrap="square" lIns="54864" tIns="27432" rIns="54864" bIns="27432" rtlCol="0" anchor="ctr"/>
+          <a:bodyPr rtlCol="0" anchor="ctr" wrap="square" lIns="54864" rIns="54864" tIns="27432" bIns="27432"/>
           <a:lstStyle/>
           <a:p>
             <a:pPr algn="ctr"/>
@@ -9067,13 +9174,13 @@
       </p:sp>
       <p:sp>
         <p:nvSpPr>
-          <p:cNvPr id="47" name="Rounded Rectangle 46"/>
+          <p:cNvPr id="46" name="Rounded Rectangle 45"/>
           <p:cNvSpPr/>
           <p:nvPr/>
         </p:nvSpPr>
         <p:spPr>
           <a:xfrm>
-            <a:off x="4480560" y="4654296"/>
+            <a:off x="4480560" y="4526279"/>
             <a:ext cx="3401568" cy="274320"/>
           </a:xfrm>
           <a:prstGeom prst="roundRect">
@@ -9106,7 +9213,7 @@
           </a:fontRef>
         </p:style>
         <p:txBody>
-          <a:bodyPr wrap="square" lIns="54864" tIns="27432" rIns="54864" bIns="27432" rtlCol="0" anchor="ctr"/>
+          <a:bodyPr rtlCol="0" anchor="ctr" wrap="square" lIns="54864" rIns="54864" tIns="27432" bIns="27432"/>
           <a:lstStyle/>
           <a:p>
             <a:pPr algn="ctr"/>
@@ -9124,13 +9231,13 @@
       </p:sp>
       <p:sp>
         <p:nvSpPr>
-          <p:cNvPr id="48" name="Rounded Rectangle 47"/>
+          <p:cNvPr id="47" name="Rounded Rectangle 46"/>
           <p:cNvSpPr/>
           <p:nvPr/>
         </p:nvSpPr>
         <p:spPr>
           <a:xfrm>
-            <a:off x="8010144" y="3840480"/>
+            <a:off x="8010144" y="3712463"/>
             <a:ext cx="3621024" cy="384048"/>
           </a:xfrm>
           <a:prstGeom prst="roundRect">
@@ -9163,7 +9270,7 @@
           </a:fontRef>
         </p:style>
         <p:txBody>
-          <a:bodyPr wrap="square" lIns="54864" tIns="27432" rIns="54864" bIns="27432" rtlCol="0" anchor="ctr"/>
+          <a:bodyPr rtlCol="0" anchor="ctr" wrap="square" lIns="54864" rIns="54864" tIns="27432" bIns="27432"/>
           <a:lstStyle/>
           <a:p>
             <a:pPr algn="ctr"/>
@@ -9181,13 +9288,13 @@
       </p:sp>
       <p:sp>
         <p:nvSpPr>
-          <p:cNvPr id="49" name="Rounded Rectangle 48"/>
+          <p:cNvPr id="48" name="Rounded Rectangle 47"/>
           <p:cNvSpPr/>
           <p:nvPr/>
         </p:nvSpPr>
         <p:spPr>
           <a:xfrm>
-            <a:off x="8010144" y="4224528"/>
+            <a:off x="8010144" y="4096511"/>
             <a:ext cx="3621024" cy="804672"/>
           </a:xfrm>
           <a:prstGeom prst="roundRect">
@@ -9222,19 +9329,18 @@
           <a:lstStyle/>
           <a:p>
             <a:pPr algn="ctr"/>
-            <a:endParaRPr/>
-          </a:p>
-        </p:txBody>
-      </p:sp>
-      <p:sp>
-        <p:nvSpPr>
-          <p:cNvPr id="50" name="Rounded Rectangle 49"/>
+          </a:p>
+        </p:txBody>
+      </p:sp>
+      <p:sp>
+        <p:nvSpPr>
+          <p:cNvPr id="49" name="Rounded Rectangle 48"/>
           <p:cNvSpPr/>
           <p:nvPr/>
         </p:nvSpPr>
         <p:spPr>
           <a:xfrm>
-            <a:off x="8119872" y="4315968"/>
+            <a:off x="8119872" y="4187951"/>
             <a:ext cx="3401568" cy="274320"/>
           </a:xfrm>
           <a:prstGeom prst="roundRect">
@@ -9267,7 +9373,7 @@
           </a:fontRef>
         </p:style>
         <p:txBody>
-          <a:bodyPr wrap="square" lIns="54864" tIns="27432" rIns="54864" bIns="27432" rtlCol="0" anchor="ctr"/>
+          <a:bodyPr rtlCol="0" anchor="ctr" wrap="square" lIns="54864" rIns="54864" tIns="27432" bIns="27432"/>
           <a:lstStyle/>
           <a:p>
             <a:pPr algn="ctr"/>
@@ -9278,20 +9384,20 @@
                 </a:solidFill>
                 <a:latin typeface="Segoe UI"/>
               </a:rPr>
-              <a:t>a cap on how often each specialist may call the model</a:t>
-            </a:r>
-          </a:p>
-        </p:txBody>
-      </p:sp>
-      <p:sp>
-        <p:nvSpPr>
-          <p:cNvPr id="51" name="Rounded Rectangle 50"/>
+              <a:t>a cap on how often each agent may call the model</a:t>
+            </a:r>
+          </a:p>
+        </p:txBody>
+      </p:sp>
+      <p:sp>
+        <p:nvSpPr>
+          <p:cNvPr id="50" name="Rounded Rectangle 49"/>
           <p:cNvSpPr/>
           <p:nvPr/>
         </p:nvSpPr>
         <p:spPr>
           <a:xfrm>
-            <a:off x="8119872" y="4654296"/>
+            <a:off x="8119872" y="4526279"/>
             <a:ext cx="3401568" cy="274320"/>
           </a:xfrm>
           <a:prstGeom prst="roundRect">
@@ -9324,54 +9430,452 @@
           </a:fontRef>
         </p:style>
         <p:txBody>
-          <a:bodyPr wrap="square" lIns="54864" tIns="27432" rIns="54864" bIns="27432" rtlCol="0" anchor="ctr"/>
-          <a:lstStyle/>
-          <a:p>
-            <a:pPr algn="ctr"/>
-            <a:r>
-              <a:rPr lang="en-US" sz="850" dirty="0" err="1">
+          <a:bodyPr rtlCol="0" anchor="ctr" wrap="square" lIns="54864" rIns="54864" tIns="27432" bIns="27432"/>
+          <a:lstStyle/>
+          <a:p>
+            <a:pPr algn="ctr"/>
+            <a:r>
+              <a:rPr sz="850" b="0">
                 <a:solidFill>
                   <a:srgbClr val="1E6B52"/>
                 </a:solidFill>
                 <a:latin typeface="Segoe UI"/>
               </a:rPr>
-              <a:t>o</a:t>
-            </a:r>
-            <a:r>
-              <a:rPr sz="850" b="0" dirty="0" err="1">
+              <a:t>our local model first; a paid one only after a real failure</a:t>
+            </a:r>
+          </a:p>
+        </p:txBody>
+      </p:sp>
+      <p:sp>
+        <p:nvSpPr>
+          <p:cNvPr id="51" name="Rounded Rectangle 50"/>
+          <p:cNvSpPr/>
+          <p:nvPr/>
+        </p:nvSpPr>
+        <p:spPr>
+          <a:xfrm>
+            <a:off x="566928" y="4974336"/>
+            <a:ext cx="5486400" cy="384048"/>
+          </a:xfrm>
+          <a:prstGeom prst="roundRect">
+            <a:avLst>
+              <a:gd name="adj" fmla="val 10000"/>
+            </a:avLst>
+          </a:prstGeom>
+          <a:solidFill>
+            <a:srgbClr val="DCEEE7"/>
+          </a:solidFill>
+          <a:ln w="12700">
+            <a:solidFill>
+              <a:srgbClr val="1E6B52"/>
+            </a:solidFill>
+          </a:ln>
+          <a:effectLst/>
+        </p:spPr>
+        <p:style>
+          <a:lnRef idx="1">
+            <a:schemeClr val="accent1"/>
+          </a:lnRef>
+          <a:fillRef idx="3">
+            <a:schemeClr val="accent1"/>
+          </a:fillRef>
+          <a:effectRef idx="2">
+            <a:schemeClr val="accent1"/>
+          </a:effectRef>
+          <a:fontRef idx="minor">
+            <a:schemeClr val="lt1"/>
+          </a:fontRef>
+        </p:style>
+        <p:txBody>
+          <a:bodyPr rtlCol="0" anchor="ctr" wrap="square" lIns="54864" rIns="54864" tIns="27432" bIns="27432"/>
+          <a:lstStyle/>
+          <a:p>
+            <a:pPr algn="ctr"/>
+            <a:r>
+              <a:rPr sz="1150" b="1">
                 <a:solidFill>
                   <a:srgbClr val="1E6B52"/>
                 </a:solidFill>
                 <a:latin typeface="Segoe UI"/>
               </a:rPr>
-              <a:t>our</a:t>
-            </a:r>
-            <a:r>
-              <a:rPr sz="850" b="0" dirty="0">
+              <a:t>It works inside our own network</a:t>
+            </a:r>
+          </a:p>
+        </p:txBody>
+      </p:sp>
+      <p:sp>
+        <p:nvSpPr>
+          <p:cNvPr id="52" name="Rounded Rectangle 51"/>
+          <p:cNvSpPr/>
+          <p:nvPr/>
+        </p:nvSpPr>
+        <p:spPr>
+          <a:xfrm>
+            <a:off x="566928" y="5358384"/>
+            <a:ext cx="5486400" cy="804672"/>
+          </a:xfrm>
+          <a:prstGeom prst="roundRect">
+            <a:avLst/>
+          </a:prstGeom>
+          <a:solidFill>
+            <a:srgbClr val="FFFFFF"/>
+          </a:solidFill>
+          <a:ln w="12700">
+            <a:solidFill>
+              <a:srgbClr val="1E6B52"/>
+            </a:solidFill>
+          </a:ln>
+          <a:effectLst/>
+        </p:spPr>
+        <p:style>
+          <a:lnRef idx="1">
+            <a:schemeClr val="accent1"/>
+          </a:lnRef>
+          <a:fillRef idx="3">
+            <a:schemeClr val="accent1"/>
+          </a:fillRef>
+          <a:effectRef idx="2">
+            <a:schemeClr val="accent1"/>
+          </a:effectRef>
+          <a:fontRef idx="minor">
+            <a:schemeClr val="lt1"/>
+          </a:fontRef>
+        </p:style>
+        <p:txBody>
+          <a:bodyPr rtlCol="0" anchor="ctr"/>
+          <a:lstStyle/>
+          <a:p>
+            <a:pPr algn="ctr"/>
+          </a:p>
+        </p:txBody>
+      </p:sp>
+      <p:sp>
+        <p:nvSpPr>
+          <p:cNvPr id="53" name="Rounded Rectangle 52"/>
+          <p:cNvSpPr/>
+          <p:nvPr/>
+        </p:nvSpPr>
+        <p:spPr>
+          <a:xfrm>
+            <a:off x="694944" y="5449824"/>
+            <a:ext cx="5230368" cy="274320"/>
+          </a:xfrm>
+          <a:prstGeom prst="roundRect">
+            <a:avLst>
+              <a:gd name="adj" fmla="val 10000"/>
+            </a:avLst>
+          </a:prstGeom>
+          <a:solidFill>
+            <a:srgbClr val="FFFFFF"/>
+          </a:solidFill>
+          <a:ln w="12700">
+            <a:solidFill>
+              <a:srgbClr val="1E6B52"/>
+            </a:solidFill>
+          </a:ln>
+          <a:effectLst/>
+        </p:spPr>
+        <p:style>
+          <a:lnRef idx="1">
+            <a:schemeClr val="accent1"/>
+          </a:lnRef>
+          <a:fillRef idx="3">
+            <a:schemeClr val="accent1"/>
+          </a:fillRef>
+          <a:effectRef idx="2">
+            <a:schemeClr val="accent1"/>
+          </a:effectRef>
+          <a:fontRef idx="minor">
+            <a:schemeClr val="lt1"/>
+          </a:fontRef>
+        </p:style>
+        <p:txBody>
+          <a:bodyPr rtlCol="0" anchor="ctr" wrap="square" lIns="54864" rIns="54864" tIns="27432" bIns="27432"/>
+          <a:lstStyle/>
+          <a:p>
+            <a:pPr algn="ctr"/>
+            <a:r>
+              <a:rPr sz="850" b="0">
                 <a:solidFill>
                   <a:srgbClr val="1E6B52"/>
                 </a:solidFill>
                 <a:latin typeface="Segoe UI"/>
               </a:rPr>
-              <a:t> </a:t>
-            </a:r>
-            <a:r>
-              <a:rPr lang="en-US" sz="850" b="0" dirty="0">
+              <a:t>paste our own certificate authority into Settings — no restart</a:t>
+            </a:r>
+          </a:p>
+        </p:txBody>
+      </p:sp>
+      <p:sp>
+        <p:nvSpPr>
+          <p:cNvPr id="54" name="Rounded Rectangle 53"/>
+          <p:cNvSpPr/>
+          <p:nvPr/>
+        </p:nvSpPr>
+        <p:spPr>
+          <a:xfrm>
+            <a:off x="694944" y="5788152"/>
+            <a:ext cx="5230368" cy="274320"/>
+          </a:xfrm>
+          <a:prstGeom prst="roundRect">
+            <a:avLst>
+              <a:gd name="adj" fmla="val 10000"/>
+            </a:avLst>
+          </a:prstGeom>
+          <a:solidFill>
+            <a:srgbClr val="FFFFFF"/>
+          </a:solidFill>
+          <a:ln w="12700">
+            <a:solidFill>
+              <a:srgbClr val="1E6B52"/>
+            </a:solidFill>
+          </a:ln>
+          <a:effectLst/>
+        </p:spPr>
+        <p:style>
+          <a:lnRef idx="1">
+            <a:schemeClr val="accent1"/>
+          </a:lnRef>
+          <a:fillRef idx="3">
+            <a:schemeClr val="accent1"/>
+          </a:fillRef>
+          <a:effectRef idx="2">
+            <a:schemeClr val="accent1"/>
+          </a:effectRef>
+          <a:fontRef idx="minor">
+            <a:schemeClr val="lt1"/>
+          </a:fontRef>
+        </p:style>
+        <p:txBody>
+          <a:bodyPr rtlCol="0" anchor="ctr" wrap="square" lIns="54864" rIns="54864" tIns="27432" bIns="27432"/>
+          <a:lstStyle/>
+          <a:p>
+            <a:pPr algn="ctr"/>
+            <a:r>
+              <a:rPr sz="850" b="0">
                 <a:solidFill>
                   <a:srgbClr val="1E6B52"/>
                 </a:solidFill>
                 <a:latin typeface="Segoe UI"/>
               </a:rPr>
-              <a:t>local </a:t>
-            </a:r>
-            <a:r>
-              <a:rPr sz="850" b="0" dirty="0">
-                <a:solidFill>
-                  <a:srgbClr val="1E6B52"/>
-                </a:solidFill>
-                <a:latin typeface="Segoe UI"/>
-              </a:rPr>
-              <a:t>model</a:t>
+              <a:t>one setting covers the model, Jira, GitLab, git and curl</a:t>
+            </a:r>
+          </a:p>
+        </p:txBody>
+      </p:sp>
+      <p:sp>
+        <p:nvSpPr>
+          <p:cNvPr id="55" name="Rounded Rectangle 54"/>
+          <p:cNvSpPr/>
+          <p:nvPr/>
+        </p:nvSpPr>
+        <p:spPr>
+          <a:xfrm>
+            <a:off x="6144768" y="4974336"/>
+            <a:ext cx="5486400" cy="384048"/>
+          </a:xfrm>
+          <a:prstGeom prst="roundRect">
+            <a:avLst>
+              <a:gd name="adj" fmla="val 10000"/>
+            </a:avLst>
+          </a:prstGeom>
+          <a:solidFill>
+            <a:srgbClr val="F7ECD5"/>
+          </a:solidFill>
+          <a:ln w="12700">
+            <a:solidFill>
+              <a:srgbClr val="8A5A00"/>
+            </a:solidFill>
+          </a:ln>
+          <a:effectLst/>
+        </p:spPr>
+        <p:style>
+          <a:lnRef idx="1">
+            <a:schemeClr val="accent1"/>
+          </a:lnRef>
+          <a:fillRef idx="3">
+            <a:schemeClr val="accent1"/>
+          </a:fillRef>
+          <a:effectRef idx="2">
+            <a:schemeClr val="accent1"/>
+          </a:effectRef>
+          <a:fontRef idx="minor">
+            <a:schemeClr val="lt1"/>
+          </a:fontRef>
+        </p:style>
+        <p:txBody>
+          <a:bodyPr rtlCol="0" anchor="ctr" wrap="square" lIns="54864" rIns="54864" tIns="27432" bIns="27432"/>
+          <a:lstStyle/>
+          <a:p>
+            <a:pPr algn="ctr"/>
+            <a:r>
+              <a:rPr sz="1150" b="1">
+                <a:solidFill>
+                  <a:srgbClr val="8A5A00"/>
+                </a:solidFill>
+                <a:latin typeface="Segoe UI"/>
+              </a:rPr>
+              <a:t>Keys and tokens</a:t>
+            </a:r>
+          </a:p>
+        </p:txBody>
+      </p:sp>
+      <p:sp>
+        <p:nvSpPr>
+          <p:cNvPr id="56" name="Rounded Rectangle 55"/>
+          <p:cNvSpPr/>
+          <p:nvPr/>
+        </p:nvSpPr>
+        <p:spPr>
+          <a:xfrm>
+            <a:off x="6144768" y="5358384"/>
+            <a:ext cx="5486400" cy="804672"/>
+          </a:xfrm>
+          <a:prstGeom prst="roundRect">
+            <a:avLst/>
+          </a:prstGeom>
+          <a:solidFill>
+            <a:srgbClr val="FFFFFF"/>
+          </a:solidFill>
+          <a:ln w="12700">
+            <a:solidFill>
+              <a:srgbClr val="8A5A00"/>
+            </a:solidFill>
+          </a:ln>
+          <a:effectLst/>
+        </p:spPr>
+        <p:style>
+          <a:lnRef idx="1">
+            <a:schemeClr val="accent1"/>
+          </a:lnRef>
+          <a:fillRef idx="3">
+            <a:schemeClr val="accent1"/>
+          </a:fillRef>
+          <a:effectRef idx="2">
+            <a:schemeClr val="accent1"/>
+          </a:effectRef>
+          <a:fontRef idx="minor">
+            <a:schemeClr val="lt1"/>
+          </a:fontRef>
+        </p:style>
+        <p:txBody>
+          <a:bodyPr rtlCol="0" anchor="ctr"/>
+          <a:lstStyle/>
+          <a:p>
+            <a:pPr algn="ctr"/>
+          </a:p>
+        </p:txBody>
+      </p:sp>
+      <p:sp>
+        <p:nvSpPr>
+          <p:cNvPr id="57" name="Rounded Rectangle 56"/>
+          <p:cNvSpPr/>
+          <p:nvPr/>
+        </p:nvSpPr>
+        <p:spPr>
+          <a:xfrm>
+            <a:off x="6272784" y="5449824"/>
+            <a:ext cx="5230368" cy="274320"/>
+          </a:xfrm>
+          <a:prstGeom prst="roundRect">
+            <a:avLst>
+              <a:gd name="adj" fmla="val 10000"/>
+            </a:avLst>
+          </a:prstGeom>
+          <a:solidFill>
+            <a:srgbClr val="FFFFFF"/>
+          </a:solidFill>
+          <a:ln w="12700">
+            <a:solidFill>
+              <a:srgbClr val="8A5A00"/>
+            </a:solidFill>
+          </a:ln>
+          <a:effectLst/>
+        </p:spPr>
+        <p:style>
+          <a:lnRef idx="1">
+            <a:schemeClr val="accent1"/>
+          </a:lnRef>
+          <a:fillRef idx="3">
+            <a:schemeClr val="accent1"/>
+          </a:fillRef>
+          <a:effectRef idx="2">
+            <a:schemeClr val="accent1"/>
+          </a:effectRef>
+          <a:fontRef idx="minor">
+            <a:schemeClr val="lt1"/>
+          </a:fontRef>
+        </p:style>
+        <p:txBody>
+          <a:bodyPr rtlCol="0" anchor="ctr" wrap="square" lIns="54864" rIns="54864" tIns="27432" bIns="27432"/>
+          <a:lstStyle/>
+          <a:p>
+            <a:pPr algn="ctr"/>
+            <a:r>
+              <a:rPr sz="850" b="0">
+                <a:solidFill>
+                  <a:srgbClr val="8A5A00"/>
+                </a:solidFill>
+                <a:latin typeface="Segoe UI"/>
+              </a:rPr>
+              <a:t>all of them in one locked folder, readable only by the service</a:t>
+            </a:r>
+          </a:p>
+        </p:txBody>
+      </p:sp>
+      <p:sp>
+        <p:nvSpPr>
+          <p:cNvPr id="58" name="Rounded Rectangle 57"/>
+          <p:cNvSpPr/>
+          <p:nvPr/>
+        </p:nvSpPr>
+        <p:spPr>
+          <a:xfrm>
+            <a:off x="6272784" y="5788152"/>
+            <a:ext cx="5230368" cy="274320"/>
+          </a:xfrm>
+          <a:prstGeom prst="roundRect">
+            <a:avLst>
+              <a:gd name="adj" fmla="val 10000"/>
+            </a:avLst>
+          </a:prstGeom>
+          <a:solidFill>
+            <a:srgbClr val="FFFFFF"/>
+          </a:solidFill>
+          <a:ln w="12700">
+            <a:solidFill>
+              <a:srgbClr val="8A5A00"/>
+            </a:solidFill>
+          </a:ln>
+          <a:effectLst/>
+        </p:spPr>
+        <p:style>
+          <a:lnRef idx="1">
+            <a:schemeClr val="accent1"/>
+          </a:lnRef>
+          <a:fillRef idx="3">
+            <a:schemeClr val="accent1"/>
+          </a:fillRef>
+          <a:effectRef idx="2">
+            <a:schemeClr val="accent1"/>
+          </a:effectRef>
+          <a:fontRef idx="minor">
+            <a:schemeClr val="lt1"/>
+          </a:fontRef>
+        </p:style>
+        <p:txBody>
+          <a:bodyPr rtlCol="0" anchor="ctr" wrap="square" lIns="54864" rIns="54864" tIns="27432" bIns="27432"/>
+          <a:lstStyle/>
+          <a:p>
+            <a:pPr algn="ctr"/>
+            <a:r>
+              <a:rPr sz="850" b="0">
+                <a:solidFill>
+                  <a:srgbClr val="8A5A00"/>
+                </a:solidFill>
+                <a:latin typeface="Segoe UI"/>
+              </a:rPr>
+              <a:t>permissions are repaired every time it starts</a:t>
             </a:r>
           </a:p>
         </p:txBody>
@@ -9385,7 +9889,7 @@
 </file>
 
 <file path=ppt/slides/slide3.xml><?xml version="1.0" encoding="utf-8"?>
-<p:sld xmlns:a="http://schemas.openxmlformats.org/drawingml/2006/main" xmlns:r="http://schemas.openxmlformats.org/officeDocument/2006/relationships" xmlns:p="http://schemas.openxmlformats.org/presentationml/2006/main">
+<p:sld xmlns:a="http://schemas.openxmlformats.org/drawingml/2006/main" xmlns:p="http://schemas.openxmlformats.org/presentationml/2006/main" xmlns:r="http://schemas.openxmlformats.org/officeDocument/2006/relationships">
   <p:cSld>
     <p:spTree>
       <p:nvGrpSpPr>
@@ -9393,14 +9897,7 @@
         <p:cNvGrpSpPr/>
         <p:nvPr/>
       </p:nvGrpSpPr>
-      <p:grpSpPr>
-        <a:xfrm>
-          <a:off x="0" y="0"/>
-          <a:ext cx="0" cy="0"/>
-          <a:chOff x="0" y="0"/>
-          <a:chExt cx="0" cy="0"/>
-        </a:xfrm>
-      </p:grpSpPr>
+      <p:grpSpPr/>
       <p:sp>
         <p:nvSpPr>
           <p:cNvPr id="2" name="TextBox 1"/>
@@ -9418,7 +9915,7 @@
           <a:noFill/>
         </p:spPr>
         <p:txBody>
-          <a:bodyPr wrap="square" lIns="0" tIns="0" rIns="0" bIns="0" anchor="t">
+          <a:bodyPr wrap="square" anchor="t" lIns="0" rIns="0" tIns="0" bIns="0">
             <a:spAutoFit/>
           </a:bodyPr>
           <a:lstStyle/>
@@ -9457,7 +9954,7 @@
           <a:noFill/>
         </p:spPr>
         <p:txBody>
-          <a:bodyPr wrap="square" lIns="0" tIns="0" rIns="0" bIns="0" anchor="t">
+          <a:bodyPr wrap="square" anchor="t" lIns="0" rIns="0" tIns="0" bIns="0">
             <a:spAutoFit/>
           </a:bodyPr>
           <a:lstStyle/>
@@ -9520,13 +10017,12 @@
           <a:lstStyle/>
           <a:p>
             <a:pPr algn="ctr"/>
-            <a:endParaRPr/>
-          </a:p>
-        </p:txBody>
-      </p:sp>
-      <p:sp>
-        <p:nvSpPr>
-          <p:cNvPr id="6" name="TextBox 5"/>
+          </a:p>
+        </p:txBody>
+      </p:sp>
+      <p:sp>
+        <p:nvSpPr>
+          <p:cNvPr id="5" name="TextBox 4"/>
           <p:cNvSpPr txBox="1"/>
           <p:nvPr/>
         </p:nvSpPr>
@@ -9541,7 +10037,7 @@
           <a:noFill/>
         </p:spPr>
         <p:txBody>
-          <a:bodyPr wrap="square" lIns="0" tIns="0" rIns="0" bIns="0" anchor="t">
+          <a:bodyPr wrap="square" anchor="t" lIns="0" rIns="0" tIns="0" bIns="0">
             <a:spAutoFit/>
           </a:bodyPr>
           <a:lstStyle/>
@@ -9565,7 +10061,7 @@
       </p:sp>
       <p:sp>
         <p:nvSpPr>
-          <p:cNvPr id="7" name="Rounded Rectangle 6"/>
+          <p:cNvPr id="6" name="Rounded Rectangle 5"/>
           <p:cNvSpPr/>
           <p:nvPr/>
         </p:nvSpPr>
@@ -9604,7 +10100,7 @@
           </a:fontRef>
         </p:style>
         <p:txBody>
-          <a:bodyPr wrap="square" lIns="54864" tIns="27432" rIns="54864" bIns="27432" rtlCol="0" anchor="ctr"/>
+          <a:bodyPr rtlCol="0" anchor="ctr" wrap="square" lIns="54864" rIns="54864" tIns="27432" bIns="27432"/>
           <a:lstStyle/>
           <a:p>
             <a:pPr algn="ctr"/>
@@ -9646,7 +10142,7 @@
       </p:sp>
       <p:cxnSp>
         <p:nvCxnSpPr>
-          <p:cNvPr id="8" name="Connector 7"/>
+          <p:cNvPr id="7" name="Connector 6"/>
           <p:cNvCxnSpPr/>
           <p:nvPr/>
         </p:nvCxnSpPr>
@@ -9682,7 +10178,7 @@
       </p:cxnSp>
       <p:sp>
         <p:nvSpPr>
-          <p:cNvPr id="9" name="Rounded Rectangle 8"/>
+          <p:cNvPr id="8" name="Rounded Rectangle 7"/>
           <p:cNvSpPr/>
           <p:nvPr/>
         </p:nvSpPr>
@@ -9721,7 +10217,7 @@
           </a:fontRef>
         </p:style>
         <p:txBody>
-          <a:bodyPr wrap="square" lIns="54864" tIns="27432" rIns="54864" bIns="27432" rtlCol="0" anchor="ctr"/>
+          <a:bodyPr rtlCol="0" anchor="ctr" wrap="square" lIns="54864" rIns="54864" tIns="27432" bIns="27432"/>
           <a:lstStyle/>
           <a:p>
             <a:pPr algn="ctr"/>
@@ -9763,7 +10259,7 @@
       </p:sp>
       <p:cxnSp>
         <p:nvCxnSpPr>
-          <p:cNvPr id="10" name="Connector 9"/>
+          <p:cNvPr id="9" name="Connector 8"/>
           <p:cNvCxnSpPr/>
           <p:nvPr/>
         </p:nvCxnSpPr>
@@ -9799,7 +10295,7 @@
       </p:cxnSp>
       <p:sp>
         <p:nvSpPr>
-          <p:cNvPr id="11" name="Rounded Rectangle 10"/>
+          <p:cNvPr id="10" name="Rounded Rectangle 9"/>
           <p:cNvSpPr/>
           <p:nvPr/>
         </p:nvSpPr>
@@ -9838,24 +10334,24 @@
           </a:fontRef>
         </p:style>
         <p:txBody>
-          <a:bodyPr wrap="square" lIns="54864" tIns="27432" rIns="54864" bIns="27432" rtlCol="0" anchor="ctr"/>
-          <a:lstStyle/>
-          <a:p>
-            <a:pPr algn="ctr"/>
-            <a:r>
-              <a:rPr sz="1250" b="1" dirty="0">
+          <a:bodyPr rtlCol="0" anchor="ctr" wrap="square" lIns="54864" rIns="54864" tIns="27432" bIns="27432"/>
+          <a:lstStyle/>
+          <a:p>
+            <a:pPr algn="ctr"/>
+            <a:r>
+              <a:rPr sz="1250" b="1">
                 <a:solidFill>
                   <a:srgbClr val="1E6B52"/>
                 </a:solidFill>
                 <a:latin typeface="Segoe UI"/>
               </a:rPr>
-              <a:t>Your team</a:t>
-            </a:r>
-          </a:p>
-          <a:p>
-            <a:pPr algn="ctr"/>
-            <a:r>
-              <a:rPr sz="850" b="0" dirty="0">
+              <a:t>Our team</a:t>
+            </a:r>
+          </a:p>
+          <a:p>
+            <a:pPr algn="ctr"/>
+            <a:r>
+              <a:rPr sz="850" b="0">
                 <a:solidFill>
                   <a:srgbClr val="1A1A1A"/>
                 </a:solidFill>
@@ -9867,7 +10363,7 @@
           <a:p>
             <a:pPr algn="ctr"/>
             <a:r>
-              <a:rPr sz="850" b="0" dirty="0">
+              <a:rPr sz="850" b="0">
                 <a:solidFill>
                   <a:srgbClr val="1A1A1A"/>
                 </a:solidFill>
@@ -9880,7 +10376,7 @@
       </p:sp>
       <p:cxnSp>
         <p:nvCxnSpPr>
-          <p:cNvPr id="12" name="Connector 11"/>
+          <p:cNvPr id="11" name="Connector 10"/>
           <p:cNvCxnSpPr/>
           <p:nvPr/>
         </p:nvCxnSpPr>
@@ -9916,7 +10412,7 @@
       </p:cxnSp>
       <p:sp>
         <p:nvSpPr>
-          <p:cNvPr id="13" name="Rounded Rectangle 12"/>
+          <p:cNvPr id="12" name="Rounded Rectangle 11"/>
           <p:cNvSpPr/>
           <p:nvPr/>
         </p:nvSpPr>
@@ -9955,7 +10451,7 @@
           </a:fontRef>
         </p:style>
         <p:txBody>
-          <a:bodyPr wrap="square" lIns="54864" tIns="27432" rIns="54864" bIns="27432" rtlCol="0" anchor="ctr"/>
+          <a:bodyPr rtlCol="0" anchor="ctr" wrap="square" lIns="54864" rIns="54864" tIns="27432" bIns="27432"/>
           <a:lstStyle/>
           <a:p>
             <a:pPr algn="ctr"/>
@@ -9997,7 +10493,7 @@
       </p:sp>
       <p:sp>
         <p:nvSpPr>
-          <p:cNvPr id="14" name="Rounded Rectangle 13"/>
+          <p:cNvPr id="13" name="Rounded Rectangle 12"/>
           <p:cNvSpPr/>
           <p:nvPr/>
         </p:nvSpPr>
@@ -10036,7 +10532,7 @@
           </a:fontRef>
         </p:style>
         <p:txBody>
-          <a:bodyPr wrap="square" lIns="54864" tIns="27432" rIns="54864" bIns="27432" rtlCol="0" anchor="ctr"/>
+          <a:bodyPr rtlCol="0" anchor="ctr" wrap="square" lIns="54864" rIns="54864" tIns="27432" bIns="27432"/>
           <a:lstStyle/>
           <a:p>
             <a:pPr algn="ctr"/>
@@ -10047,14 +10543,14 @@
                 </a:solidFill>
                 <a:latin typeface="Segoe UI"/>
               </a:rPr>
-              <a:t>What your team gets</a:t>
-            </a:r>
-          </a:p>
-        </p:txBody>
-      </p:sp>
-      <p:sp>
-        <p:nvSpPr>
-          <p:cNvPr id="15" name="Rounded Rectangle 14"/>
+              <a:t>What our team gets</a:t>
+            </a:r>
+          </a:p>
+        </p:txBody>
+      </p:sp>
+      <p:sp>
+        <p:nvSpPr>
+          <p:cNvPr id="14" name="Rounded Rectangle 13"/>
           <p:cNvSpPr/>
           <p:nvPr/>
         </p:nvSpPr>
@@ -10095,13 +10591,12 @@
           <a:lstStyle/>
           <a:p>
             <a:pPr algn="ctr"/>
-            <a:endParaRPr/>
-          </a:p>
-        </p:txBody>
-      </p:sp>
-      <p:sp>
-        <p:nvSpPr>
-          <p:cNvPr id="16" name="Rounded Rectangle 15"/>
+          </a:p>
+        </p:txBody>
+      </p:sp>
+      <p:sp>
+        <p:nvSpPr>
+          <p:cNvPr id="15" name="Rounded Rectangle 14"/>
           <p:cNvSpPr/>
           <p:nvPr/>
         </p:nvSpPr>
@@ -10140,7 +10635,7 @@
           </a:fontRef>
         </p:style>
         <p:txBody>
-          <a:bodyPr wrap="square" lIns="54864" tIns="27432" rIns="54864" bIns="27432" rtlCol="0" anchor="ctr"/>
+          <a:bodyPr rtlCol="0" anchor="ctr" wrap="square" lIns="54864" rIns="54864" tIns="27432" bIns="27432"/>
           <a:lstStyle/>
           <a:p>
             <a:pPr algn="ctr"/>
@@ -10158,7 +10653,7 @@
       </p:sp>
       <p:sp>
         <p:nvSpPr>
-          <p:cNvPr id="17" name="Rounded Rectangle 16"/>
+          <p:cNvPr id="16" name="Rounded Rectangle 15"/>
           <p:cNvSpPr/>
           <p:nvPr/>
         </p:nvSpPr>
@@ -10197,7 +10692,7 @@
           </a:fontRef>
         </p:style>
         <p:txBody>
-          <a:bodyPr wrap="square" lIns="54864" tIns="27432" rIns="54864" bIns="27432" rtlCol="0" anchor="ctr"/>
+          <a:bodyPr rtlCol="0" anchor="ctr" wrap="square" lIns="54864" rIns="54864" tIns="27432" bIns="27432"/>
           <a:lstStyle/>
           <a:p>
             <a:pPr algn="ctr"/>
@@ -10215,7 +10710,7 @@
       </p:sp>
       <p:sp>
         <p:nvSpPr>
-          <p:cNvPr id="18" name="Rounded Rectangle 17"/>
+          <p:cNvPr id="17" name="Rounded Rectangle 16"/>
           <p:cNvSpPr/>
           <p:nvPr/>
         </p:nvSpPr>
@@ -10254,7 +10749,7 @@
           </a:fontRef>
         </p:style>
         <p:txBody>
-          <a:bodyPr wrap="square" lIns="54864" tIns="27432" rIns="54864" bIns="27432" rtlCol="0" anchor="ctr"/>
+          <a:bodyPr rtlCol="0" anchor="ctr" wrap="square" lIns="54864" rIns="54864" tIns="27432" bIns="27432"/>
           <a:lstStyle/>
           <a:p>
             <a:pPr algn="ctr"/>
@@ -10272,7 +10767,7 @@
       </p:sp>
       <p:sp>
         <p:nvSpPr>
-          <p:cNvPr id="19" name="Rounded Rectangle 18"/>
+          <p:cNvPr id="18" name="Rounded Rectangle 17"/>
           <p:cNvSpPr/>
           <p:nvPr/>
         </p:nvSpPr>
@@ -10311,7 +10806,7 @@
           </a:fontRef>
         </p:style>
         <p:txBody>
-          <a:bodyPr wrap="square" lIns="54864" tIns="27432" rIns="54864" bIns="27432" rtlCol="0" anchor="ctr"/>
+          <a:bodyPr rtlCol="0" anchor="ctr" wrap="square" lIns="54864" rIns="54864" tIns="27432" bIns="27432"/>
           <a:lstStyle/>
           <a:p>
             <a:pPr algn="ctr"/>
@@ -10329,7 +10824,7 @@
       </p:sp>
       <p:sp>
         <p:nvSpPr>
-          <p:cNvPr id="20" name="Rounded Rectangle 19"/>
+          <p:cNvPr id="19" name="Rounded Rectangle 18"/>
           <p:cNvSpPr/>
           <p:nvPr/>
         </p:nvSpPr>
@@ -10370,13 +10865,12 @@
           <a:lstStyle/>
           <a:p>
             <a:pPr algn="ctr"/>
-            <a:endParaRPr/>
-          </a:p>
-        </p:txBody>
-      </p:sp>
-      <p:sp>
-        <p:nvSpPr>
-          <p:cNvPr id="21" name="Rounded Rectangle 20"/>
+          </a:p>
+        </p:txBody>
+      </p:sp>
+      <p:sp>
+        <p:nvSpPr>
+          <p:cNvPr id="20" name="Rounded Rectangle 19"/>
           <p:cNvSpPr/>
           <p:nvPr/>
         </p:nvSpPr>
@@ -10415,7 +10909,7 @@
           </a:fontRef>
         </p:style>
         <p:txBody>
-          <a:bodyPr wrap="square" lIns="54864" tIns="27432" rIns="54864" bIns="27432" rtlCol="0" anchor="ctr"/>
+          <a:bodyPr rtlCol="0" anchor="ctr" wrap="square" lIns="54864" rIns="54864" tIns="27432" bIns="27432"/>
           <a:lstStyle/>
           <a:p>
             <a:pPr algn="ctr"/>
@@ -10433,7 +10927,7 @@
       </p:sp>
       <p:sp>
         <p:nvSpPr>
-          <p:cNvPr id="22" name="Rounded Rectangle 21"/>
+          <p:cNvPr id="21" name="Rounded Rectangle 20"/>
           <p:cNvSpPr/>
           <p:nvPr/>
         </p:nvSpPr>
@@ -10472,7 +10966,7 @@
           </a:fontRef>
         </p:style>
         <p:txBody>
-          <a:bodyPr wrap="square" lIns="54864" tIns="27432" rIns="54864" bIns="27432" rtlCol="0" anchor="ctr"/>
+          <a:bodyPr rtlCol="0" anchor="ctr" wrap="square" lIns="54864" rIns="54864" tIns="27432" bIns="27432"/>
           <a:lstStyle/>
           <a:p>
             <a:pPr algn="ctr"/>
@@ -10490,7 +10984,7 @@
       </p:sp>
       <p:sp>
         <p:nvSpPr>
-          <p:cNvPr id="23" name="Rounded Rectangle 22"/>
+          <p:cNvPr id="22" name="Rounded Rectangle 21"/>
           <p:cNvSpPr/>
           <p:nvPr/>
         </p:nvSpPr>
@@ -10529,7 +11023,7 @@
           </a:fontRef>
         </p:style>
         <p:txBody>
-          <a:bodyPr wrap="square" lIns="54864" tIns="27432" rIns="54864" bIns="27432" rtlCol="0" anchor="ctr"/>
+          <a:bodyPr rtlCol="0" anchor="ctr" wrap="square" lIns="54864" rIns="54864" tIns="27432" bIns="27432"/>
           <a:lstStyle/>
           <a:p>
             <a:pPr algn="ctr"/>
@@ -10547,7 +11041,7 @@
       </p:sp>
       <p:sp>
         <p:nvSpPr>
-          <p:cNvPr id="24" name="Rounded Rectangle 23"/>
+          <p:cNvPr id="23" name="Rounded Rectangle 22"/>
           <p:cNvSpPr/>
           <p:nvPr/>
         </p:nvSpPr>
@@ -10586,7 +11080,7 @@
           </a:fontRef>
         </p:style>
         <p:txBody>
-          <a:bodyPr wrap="square" lIns="54864" tIns="27432" rIns="54864" bIns="27432" rtlCol="0" anchor="ctr"/>
+          <a:bodyPr rtlCol="0" anchor="ctr" wrap="square" lIns="54864" rIns="54864" tIns="27432" bIns="27432"/>
           <a:lstStyle/>
           <a:p>
             <a:pPr algn="ctr"/>
@@ -10604,7 +11098,7 @@
       </p:sp>
       <p:sp>
         <p:nvSpPr>
-          <p:cNvPr id="25" name="Rounded Rectangle 24"/>
+          <p:cNvPr id="24" name="Rounded Rectangle 23"/>
           <p:cNvSpPr/>
           <p:nvPr/>
         </p:nvSpPr>
@@ -10645,13 +11139,12 @@
           <a:lstStyle/>
           <a:p>
             <a:pPr algn="ctr"/>
-            <a:endParaRPr/>
-          </a:p>
-        </p:txBody>
-      </p:sp>
-      <p:sp>
-        <p:nvSpPr>
-          <p:cNvPr id="26" name="Rounded Rectangle 25"/>
+          </a:p>
+        </p:txBody>
+      </p:sp>
+      <p:sp>
+        <p:nvSpPr>
+          <p:cNvPr id="25" name="Rounded Rectangle 24"/>
           <p:cNvSpPr/>
           <p:nvPr/>
         </p:nvSpPr>
@@ -10690,7 +11183,7 @@
           </a:fontRef>
         </p:style>
         <p:txBody>
-          <a:bodyPr wrap="square" lIns="54864" tIns="27432" rIns="54864" bIns="27432" rtlCol="0" anchor="ctr"/>
+          <a:bodyPr rtlCol="0" anchor="ctr" wrap="square" lIns="54864" rIns="54864" tIns="27432" bIns="27432"/>
           <a:lstStyle/>
           <a:p>
             <a:pPr algn="ctr"/>
@@ -10708,7 +11201,7 @@
       </p:sp>
       <p:sp>
         <p:nvSpPr>
-          <p:cNvPr id="27" name="Rounded Rectangle 26"/>
+          <p:cNvPr id="26" name="Rounded Rectangle 25"/>
           <p:cNvSpPr/>
           <p:nvPr/>
         </p:nvSpPr>
@@ -10747,7 +11240,7 @@
           </a:fontRef>
         </p:style>
         <p:txBody>
-          <a:bodyPr wrap="square" lIns="54864" tIns="27432" rIns="54864" bIns="27432" rtlCol="0" anchor="ctr"/>
+          <a:bodyPr rtlCol="0" anchor="ctr" wrap="square" lIns="54864" rIns="54864" tIns="27432" bIns="27432"/>
           <a:lstStyle/>
           <a:p>
             <a:pPr algn="ctr"/>
@@ -10765,7 +11258,7 @@
       </p:sp>
       <p:sp>
         <p:nvSpPr>
-          <p:cNvPr id="28" name="Rounded Rectangle 27"/>
+          <p:cNvPr id="27" name="Rounded Rectangle 26"/>
           <p:cNvSpPr/>
           <p:nvPr/>
         </p:nvSpPr>
@@ -10804,7 +11297,7 @@
           </a:fontRef>
         </p:style>
         <p:txBody>
-          <a:bodyPr wrap="square" lIns="54864" tIns="27432" rIns="54864" bIns="27432" rtlCol="0" anchor="ctr"/>
+          <a:bodyPr rtlCol="0" anchor="ctr" wrap="square" lIns="54864" rIns="54864" tIns="27432" bIns="27432"/>
           <a:lstStyle/>
           <a:p>
             <a:pPr algn="ctr"/>
@@ -10822,7 +11315,7 @@
       </p:sp>
       <p:sp>
         <p:nvSpPr>
-          <p:cNvPr id="29" name="TextBox 28"/>
+          <p:cNvPr id="28" name="TextBox 27"/>
           <p:cNvSpPr txBox="1"/>
           <p:nvPr/>
         </p:nvSpPr>
@@ -10837,7 +11330,7 @@
           <a:noFill/>
         </p:spPr>
         <p:txBody>
-          <a:bodyPr wrap="square" lIns="0" tIns="0" rIns="0" bIns="0" anchor="t">
+          <a:bodyPr wrap="square" anchor="t" lIns="0" rIns="0" tIns="0" bIns="0">
             <a:spAutoFit/>
           </a:bodyPr>
           <a:lstStyle/>
@@ -10861,7 +11354,7 @@
       </p:sp>
       <p:sp>
         <p:nvSpPr>
-          <p:cNvPr id="30" name="TextBox 29"/>
+          <p:cNvPr id="29" name="TextBox 28"/>
           <p:cNvSpPr txBox="1"/>
           <p:nvPr/>
         </p:nvSpPr>
@@ -10876,7 +11369,7 @@
           <a:noFill/>
         </p:spPr>
         <p:txBody>
-          <a:bodyPr wrap="square" lIns="0" tIns="0" rIns="0" bIns="0" anchor="t">
+          <a:bodyPr wrap="square" anchor="t" lIns="0" rIns="0" tIns="0" bIns="0">
             <a:spAutoFit/>
           </a:bodyPr>
           <a:lstStyle/>
@@ -10900,7 +11393,7 @@
       </p:sp>
       <p:sp>
         <p:nvSpPr>
-          <p:cNvPr id="31" name="TextBox 30"/>
+          <p:cNvPr id="30" name="TextBox 29"/>
           <p:cNvSpPr txBox="1"/>
           <p:nvPr/>
         </p:nvSpPr>
@@ -10915,7 +11408,7 @@
           <a:noFill/>
         </p:spPr>
         <p:txBody>
-          <a:bodyPr wrap="square" lIns="0" tIns="0" rIns="0" bIns="0" anchor="t">
+          <a:bodyPr wrap="square" anchor="t" lIns="0" rIns="0" tIns="0" bIns="0">
             <a:spAutoFit/>
           </a:bodyPr>
           <a:lstStyle/>
@@ -10939,7 +11432,7 @@
       </p:sp>
       <p:sp>
         <p:nvSpPr>
-          <p:cNvPr id="32" name="TextBox 31"/>
+          <p:cNvPr id="31" name="TextBox 30"/>
           <p:cNvSpPr txBox="1"/>
           <p:nvPr/>
         </p:nvSpPr>
@@ -10954,7 +11447,7 @@
           <a:noFill/>
         </p:spPr>
         <p:txBody>
-          <a:bodyPr wrap="square" lIns="0" tIns="0" rIns="0" bIns="0" anchor="t">
+          <a:bodyPr wrap="square" anchor="t" lIns="0" rIns="0" tIns="0" bIns="0">
             <a:spAutoFit/>
           </a:bodyPr>
           <a:lstStyle/>
@@ -10978,7 +11471,7 @@
       </p:sp>
       <p:sp>
         <p:nvSpPr>
-          <p:cNvPr id="33" name="Rectangle 32"/>
+          <p:cNvPr id="32" name="Rectangle 31"/>
           <p:cNvSpPr/>
           <p:nvPr/>
         </p:nvSpPr>
@@ -11017,13 +11510,12 @@
           <a:lstStyle/>
           <a:p>
             <a:pPr algn="ctr"/>
-            <a:endParaRPr/>
-          </a:p>
-        </p:txBody>
-      </p:sp>
-      <p:sp>
-        <p:nvSpPr>
-          <p:cNvPr id="34" name="TextBox 33"/>
+          </a:p>
+        </p:txBody>
+      </p:sp>
+      <p:sp>
+        <p:nvSpPr>
+          <p:cNvPr id="33" name="TextBox 32"/>
           <p:cNvSpPr txBox="1"/>
           <p:nvPr/>
         </p:nvSpPr>
@@ -11038,7 +11530,7 @@
           <a:noFill/>
         </p:spPr>
         <p:txBody>
-          <a:bodyPr wrap="square" lIns="0" tIns="0" rIns="0" bIns="0" anchor="t">
+          <a:bodyPr wrap="square" anchor="t" lIns="0" rIns="0" tIns="0" bIns="0">
             <a:spAutoFit/>
           </a:bodyPr>
           <a:lstStyle/>
@@ -11062,7 +11554,7 @@
       </p:sp>
       <p:sp>
         <p:nvSpPr>
-          <p:cNvPr id="35" name="TextBox 34"/>
+          <p:cNvPr id="34" name="TextBox 33"/>
           <p:cNvSpPr txBox="1"/>
           <p:nvPr/>
         </p:nvSpPr>
@@ -11077,7 +11569,7 @@
           <a:noFill/>
         </p:spPr>
         <p:txBody>
-          <a:bodyPr wrap="square" lIns="0" tIns="0" rIns="0" bIns="0" anchor="t">
+          <a:bodyPr wrap="square" anchor="t" lIns="0" rIns="0" tIns="0" bIns="0">
             <a:spAutoFit/>
           </a:bodyPr>
           <a:lstStyle/>
@@ -11101,7 +11593,7 @@
       </p:sp>
       <p:sp>
         <p:nvSpPr>
-          <p:cNvPr id="36" name="Rectangle 35"/>
+          <p:cNvPr id="35" name="Rectangle 34"/>
           <p:cNvSpPr/>
           <p:nvPr/>
         </p:nvSpPr>
@@ -11140,13 +11632,12 @@
           <a:lstStyle/>
           <a:p>
             <a:pPr algn="ctr"/>
-            <a:endParaRPr/>
-          </a:p>
-        </p:txBody>
-      </p:sp>
-      <p:sp>
-        <p:nvSpPr>
-          <p:cNvPr id="37" name="TextBox 36"/>
+          </a:p>
+        </p:txBody>
+      </p:sp>
+      <p:sp>
+        <p:nvSpPr>
+          <p:cNvPr id="36" name="TextBox 35"/>
           <p:cNvSpPr txBox="1"/>
           <p:nvPr/>
         </p:nvSpPr>
@@ -11161,7 +11652,7 @@
           <a:noFill/>
         </p:spPr>
         <p:txBody>
-          <a:bodyPr wrap="square" lIns="0" tIns="0" rIns="0" bIns="0" anchor="t">
+          <a:bodyPr wrap="square" anchor="t" lIns="0" rIns="0" tIns="0" bIns="0">
             <a:spAutoFit/>
           </a:bodyPr>
           <a:lstStyle/>
@@ -11185,7 +11676,7 @@
       </p:sp>
       <p:sp>
         <p:nvSpPr>
-          <p:cNvPr id="38" name="TextBox 37"/>
+          <p:cNvPr id="37" name="TextBox 36"/>
           <p:cNvSpPr txBox="1"/>
           <p:nvPr/>
         </p:nvSpPr>
@@ -11200,7 +11691,7 @@
           <a:noFill/>
         </p:spPr>
         <p:txBody>
-          <a:bodyPr wrap="square" lIns="0" tIns="0" rIns="0" bIns="0" anchor="t">
+          <a:bodyPr wrap="square" anchor="t" lIns="0" rIns="0" tIns="0" bIns="0">
             <a:spAutoFit/>
           </a:bodyPr>
           <a:lstStyle/>
@@ -11224,7 +11715,7 @@
       </p:sp>
       <p:sp>
         <p:nvSpPr>
-          <p:cNvPr id="39" name="Rectangle 38"/>
+          <p:cNvPr id="38" name="Rectangle 37"/>
           <p:cNvSpPr/>
           <p:nvPr/>
         </p:nvSpPr>
@@ -11263,13 +11754,12 @@
           <a:lstStyle/>
           <a:p>
             <a:pPr algn="ctr"/>
-            <a:endParaRPr/>
-          </a:p>
-        </p:txBody>
-      </p:sp>
-      <p:sp>
-        <p:nvSpPr>
-          <p:cNvPr id="40" name="TextBox 39"/>
+          </a:p>
+        </p:txBody>
+      </p:sp>
+      <p:sp>
+        <p:nvSpPr>
+          <p:cNvPr id="39" name="TextBox 38"/>
           <p:cNvSpPr txBox="1"/>
           <p:nvPr/>
         </p:nvSpPr>
@@ -11284,7 +11774,7 @@
           <a:noFill/>
         </p:spPr>
         <p:txBody>
-          <a:bodyPr wrap="square" lIns="0" tIns="0" rIns="0" bIns="0" anchor="t">
+          <a:bodyPr wrap="square" anchor="t" lIns="0" rIns="0" tIns="0" bIns="0">
             <a:spAutoFit/>
           </a:bodyPr>
           <a:lstStyle/>
@@ -11297,18 +11787,18 @@
             <a:r>
               <a:rPr sz="2500" b="1">
                 <a:solidFill>
-                  <a:srgbClr val="8C2F2F"/>
-                </a:solidFill>
-                <a:latin typeface="Segoe UI"/>
-              </a:rPr>
-              <a:t>0</a:t>
-            </a:r>
-          </a:p>
-        </p:txBody>
-      </p:sp>
-      <p:sp>
-        <p:nvSpPr>
-          <p:cNvPr id="41" name="TextBox 40"/>
+                  <a:srgbClr val="1E6B52"/>
+                </a:solidFill>
+                <a:latin typeface="Segoe UI"/>
+              </a:rPr>
+              <a:t>A·A·A</a:t>
+            </a:r>
+          </a:p>
+        </p:txBody>
+      </p:sp>
+      <p:sp>
+        <p:nvSpPr>
+          <p:cNvPr id="40" name="TextBox 39"/>
           <p:cNvSpPr txBox="1"/>
           <p:nvPr/>
         </p:nvSpPr>
@@ -11323,7 +11813,7 @@
           <a:noFill/>
         </p:spPr>
         <p:txBody>
-          <a:bodyPr wrap="square" lIns="0" tIns="0" rIns="0" bIns="0" anchor="t">
+          <a:bodyPr wrap="square" anchor="t" lIns="0" rIns="0" tIns="0" bIns="0">
             <a:spAutoFit/>
           </a:bodyPr>
           <a:lstStyle/>
@@ -11340,14 +11830,14 @@
                 </a:solidFill>
                 <a:latin typeface="Segoe UI"/>
               </a:rPr>
-              <a:t>of its OWN work ever scored</a:t>
-            </a:r>
-          </a:p>
-        </p:txBody>
-      </p:sp>
-      <p:sp>
-        <p:nvSpPr>
-          <p:cNvPr id="42" name="Rectangle 41"/>
+              <a:t>scanner ratings</a:t>
+            </a:r>
+          </a:p>
+        </p:txBody>
+      </p:sp>
+      <p:sp>
+        <p:nvSpPr>
+          <p:cNvPr id="41" name="Rectangle 40"/>
           <p:cNvSpPr/>
           <p:nvPr/>
         </p:nvSpPr>
@@ -11386,13 +11876,12 @@
           <a:lstStyle/>
           <a:p>
             <a:pPr algn="ctr"/>
-            <a:endParaRPr/>
-          </a:p>
-        </p:txBody>
-      </p:sp>
-      <p:sp>
-        <p:nvSpPr>
-          <p:cNvPr id="43" name="Rounded Rectangle 42"/>
+          </a:p>
+        </p:txBody>
+      </p:sp>
+      <p:sp>
+        <p:nvSpPr>
+          <p:cNvPr id="42" name="Rounded Rectangle 41"/>
           <p:cNvSpPr/>
           <p:nvPr/>
         </p:nvSpPr>
@@ -11407,11 +11896,11 @@
             </a:avLst>
           </a:prstGeom>
           <a:solidFill>
-            <a:srgbClr val="F7DFDF"/>
+            <a:srgbClr val="EAE1F0"/>
           </a:solidFill>
           <a:ln w="12700">
             <a:solidFill>
-              <a:srgbClr val="8C2F2F"/>
+              <a:srgbClr val="5B3A6E"/>
             </a:solidFill>
           </a:ln>
           <a:effectLst/>
@@ -11431,25 +11920,25 @@
           </a:fontRef>
         </p:style>
         <p:txBody>
-          <a:bodyPr wrap="square" lIns="54864" tIns="27432" rIns="54864" bIns="27432" rtlCol="0" anchor="ctr"/>
+          <a:bodyPr rtlCol="0" anchor="ctr" wrap="square" lIns="54864" rIns="54864" tIns="27432" bIns="27432"/>
           <a:lstStyle/>
           <a:p>
             <a:pPr algn="ctr"/>
             <a:r>
               <a:rPr sz="1150" b="1">
                 <a:solidFill>
-                  <a:srgbClr val="8C2F2F"/>
-                </a:solidFill>
-                <a:latin typeface="Segoe UI"/>
-              </a:rPr>
-              <a:t>What we cannot prove yet</a:t>
-            </a:r>
-          </a:p>
-        </p:txBody>
-      </p:sp>
-      <p:sp>
-        <p:nvSpPr>
-          <p:cNvPr id="44" name="Rounded Rectangle 43"/>
+                  <a:srgbClr val="5B3A6E"/>
+                </a:solidFill>
+                <a:latin typeface="Segoe UI"/>
+              </a:rPr>
+              <a:t>Open-source agents — and what this adds</a:t>
+            </a:r>
+          </a:p>
+        </p:txBody>
+      </p:sp>
+      <p:sp>
+        <p:nvSpPr>
+          <p:cNvPr id="43" name="Rounded Rectangle 42"/>
           <p:cNvSpPr/>
           <p:nvPr/>
         </p:nvSpPr>
@@ -11466,7 +11955,7 @@
           </a:solidFill>
           <a:ln w="12700">
             <a:solidFill>
-              <a:srgbClr val="8C2F2F"/>
+              <a:srgbClr val="5B3A6E"/>
             </a:solidFill>
           </a:ln>
           <a:effectLst/>
@@ -11490,13 +11979,12 @@
           <a:lstStyle/>
           <a:p>
             <a:pPr algn="ctr"/>
-            <a:endParaRPr/>
-          </a:p>
-        </p:txBody>
-      </p:sp>
-      <p:sp>
-        <p:nvSpPr>
-          <p:cNvPr id="45" name="Rounded Rectangle 44"/>
+          </a:p>
+        </p:txBody>
+      </p:sp>
+      <p:sp>
+        <p:nvSpPr>
+          <p:cNvPr id="44" name="Rounded Rectangle 43"/>
           <p:cNvSpPr/>
           <p:nvPr/>
         </p:nvSpPr>
@@ -11515,7 +12003,7 @@
           </a:solidFill>
           <a:ln w="12700">
             <a:solidFill>
-              <a:srgbClr val="8C2F2F"/>
+              <a:srgbClr val="5B3A6E"/>
             </a:solidFill>
           </a:ln>
           <a:effectLst/>
@@ -11535,25 +12023,25 @@
           </a:fontRef>
         </p:style>
         <p:txBody>
-          <a:bodyPr wrap="square" lIns="54864" tIns="27432" rIns="54864" bIns="27432" rtlCol="0" anchor="ctr"/>
+          <a:bodyPr rtlCol="0" anchor="ctr" wrap="square" lIns="54864" rIns="54864" tIns="27432" bIns="27432"/>
           <a:lstStyle/>
           <a:p>
             <a:pPr algn="ctr"/>
             <a:r>
               <a:rPr sz="850" b="0">
                 <a:solidFill>
-                  <a:srgbClr val="8C2F2F"/>
-                </a:solidFill>
-                <a:latin typeface="Segoe UI"/>
-              </a:rPr>
-              <a:t>no set of old tickets is replayed to score its work</a:t>
-            </a:r>
-          </a:p>
-        </p:txBody>
-      </p:sp>
-      <p:sp>
-        <p:nvSpPr>
-          <p:cNvPr id="46" name="Rounded Rectangle 45"/>
+                  <a:srgbClr val="5B3A6E"/>
+                </a:solidFill>
+                <a:latin typeface="Segoe UI"/>
+              </a:rPr>
+              <a:t>Aider · Cline · Continue — one developer at a keyboard</a:t>
+            </a:r>
+          </a:p>
+        </p:txBody>
+      </p:sp>
+      <p:sp>
+        <p:nvSpPr>
+          <p:cNvPr id="45" name="Rounded Rectangle 44"/>
           <p:cNvSpPr/>
           <p:nvPr/>
         </p:nvSpPr>
@@ -11572,7 +12060,7 @@
           </a:solidFill>
           <a:ln w="12700">
             <a:solidFill>
-              <a:srgbClr val="8C2F2F"/>
+              <a:srgbClr val="5B3A6E"/>
             </a:solidFill>
           </a:ln>
           <a:effectLst/>
@@ -11592,25 +12080,25 @@
           </a:fontRef>
         </p:style>
         <p:txBody>
-          <a:bodyPr wrap="square" lIns="54864" tIns="27432" rIns="54864" bIns="27432" rtlCol="0" anchor="ctr"/>
+          <a:bodyPr rtlCol="0" anchor="ctr" wrap="square" lIns="54864" rIns="54864" tIns="27432" bIns="27432"/>
           <a:lstStyle/>
           <a:p>
             <a:pPr algn="ctr"/>
             <a:r>
               <a:rPr sz="850" b="0">
                 <a:solidFill>
-                  <a:srgbClr val="8C2F2F"/>
-                </a:solidFill>
-                <a:latin typeface="Segoe UI"/>
-              </a:rPr>
-              <a:t>no record of how often a person rewrites what it wrote</a:t>
-            </a:r>
-          </a:p>
-        </p:txBody>
-      </p:sp>
-      <p:sp>
-        <p:nvSpPr>
-          <p:cNvPr id="47" name="Rounded Rectangle 46"/>
+                  <a:srgbClr val="5B3A6E"/>
+                </a:solidFill>
+                <a:latin typeface="Segoe UI"/>
+              </a:rPr>
+              <a:t>OpenHands · SWE-agent — a sandbox to run, models to bring</a:t>
+            </a:r>
+          </a:p>
+        </p:txBody>
+      </p:sp>
+      <p:sp>
+        <p:nvSpPr>
+          <p:cNvPr id="46" name="Rounded Rectangle 45"/>
           <p:cNvSpPr/>
           <p:nvPr/>
         </p:nvSpPr>
@@ -11629,7 +12117,7 @@
           </a:solidFill>
           <a:ln w="12700">
             <a:solidFill>
-              <a:srgbClr val="8C2F2F"/>
+              <a:srgbClr val="5B3A6E"/>
             </a:solidFill>
           </a:ln>
           <a:effectLst/>
@@ -11649,25 +12137,25 @@
           </a:fontRef>
         </p:style>
         <p:txBody>
-          <a:bodyPr wrap="square" lIns="54864" tIns="27432" rIns="54864" bIns="27432" rtlCol="0" anchor="ctr"/>
+          <a:bodyPr rtlCol="0" anchor="ctr" wrap="square" lIns="54864" rIns="54864" tIns="27432" bIns="27432"/>
           <a:lstStyle/>
           <a:p>
             <a:pPr algn="ctr"/>
             <a:r>
               <a:rPr sz="850" b="0">
                 <a:solidFill>
-                  <a:srgbClr val="8C2F2F"/>
-                </a:solidFill>
-                <a:latin typeface="Segoe UI"/>
-              </a:rPr>
-              <a:t>never load-tested, so no honest users-per-machine number</a:t>
-            </a:r>
-          </a:p>
-        </p:txBody>
-      </p:sp>
-      <p:sp>
-        <p:nvSpPr>
-          <p:cNvPr id="48" name="Rounded Rectangle 47"/>
+                  <a:srgbClr val="5B3A6E"/>
+                </a:solidFill>
+                <a:latin typeface="Segoe UI"/>
+              </a:rPr>
+              <a:t>CrewAI · LangGraph — parts to build with, not a product</a:t>
+            </a:r>
+          </a:p>
+        </p:txBody>
+      </p:sp>
+      <p:sp>
+        <p:nvSpPr>
+          <p:cNvPr id="47" name="Rounded Rectangle 46"/>
           <p:cNvSpPr/>
           <p:nvPr/>
         </p:nvSpPr>
@@ -11706,7 +12194,7 @@
           </a:fontRef>
         </p:style>
         <p:txBody>
-          <a:bodyPr wrap="square" lIns="54864" tIns="27432" rIns="54864" bIns="27432" rtlCol="0" anchor="ctr"/>
+          <a:bodyPr rtlCol="0" anchor="ctr" wrap="square" lIns="54864" rIns="54864" tIns="27432" bIns="27432"/>
           <a:lstStyle/>
           <a:p>
             <a:pPr algn="ctr"/>
@@ -11724,7 +12212,7 @@
       </p:sp>
       <p:sp>
         <p:nvSpPr>
-          <p:cNvPr id="49" name="Rounded Rectangle 48"/>
+          <p:cNvPr id="48" name="Rounded Rectangle 47"/>
           <p:cNvSpPr/>
           <p:nvPr/>
         </p:nvSpPr>
@@ -11765,13 +12253,12 @@
           <a:lstStyle/>
           <a:p>
             <a:pPr algn="ctr"/>
-            <a:endParaRPr/>
-          </a:p>
-        </p:txBody>
-      </p:sp>
-      <p:sp>
-        <p:nvSpPr>
-          <p:cNvPr id="50" name="Rounded Rectangle 49"/>
+          </a:p>
+        </p:txBody>
+      </p:sp>
+      <p:sp>
+        <p:nvSpPr>
+          <p:cNvPr id="49" name="Rounded Rectangle 48"/>
           <p:cNvSpPr/>
           <p:nvPr/>
         </p:nvSpPr>
@@ -11810,7 +12297,7 @@
           </a:fontRef>
         </p:style>
         <p:txBody>
-          <a:bodyPr wrap="square" lIns="54864" tIns="27432" rIns="54864" bIns="27432" rtlCol="0" anchor="ctr"/>
+          <a:bodyPr rtlCol="0" anchor="ctr" wrap="square" lIns="54864" rIns="54864" tIns="27432" bIns="27432"/>
           <a:lstStyle/>
           <a:p>
             <a:pPr algn="ctr"/>
@@ -11828,7 +12315,7 @@
       </p:sp>
       <p:sp>
         <p:nvSpPr>
-          <p:cNvPr id="51" name="Rounded Rectangle 50"/>
+          <p:cNvPr id="50" name="Rounded Rectangle 49"/>
           <p:cNvSpPr/>
           <p:nvPr/>
         </p:nvSpPr>
@@ -11867,7 +12354,7 @@
           </a:fontRef>
         </p:style>
         <p:txBody>
-          <a:bodyPr wrap="square" lIns="54864" tIns="27432" rIns="54864" bIns="27432" rtlCol="0" anchor="ctr"/>
+          <a:bodyPr rtlCol="0" anchor="ctr" wrap="square" lIns="54864" rIns="54864" tIns="27432" bIns="27432"/>
           <a:lstStyle/>
           <a:p>
             <a:pPr algn="ctr"/>
@@ -11885,7 +12372,7 @@
       </p:sp>
       <p:sp>
         <p:nvSpPr>
-          <p:cNvPr id="52" name="Rounded Rectangle 51"/>
+          <p:cNvPr id="51" name="Rounded Rectangle 50"/>
           <p:cNvSpPr/>
           <p:nvPr/>
         </p:nvSpPr>
@@ -11924,7 +12411,7 @@
           </a:fontRef>
         </p:style>
         <p:txBody>
-          <a:bodyPr wrap="square" lIns="54864" tIns="27432" rIns="54864" bIns="27432" rtlCol="0" anchor="ctr"/>
+          <a:bodyPr rtlCol="0" anchor="ctr" wrap="square" lIns="54864" rIns="54864" tIns="27432" bIns="27432"/>
           <a:lstStyle/>
           <a:p>
             <a:pPr algn="ctr"/>
@@ -12279,44 +12766,44 @@
         <a:sysClr val="window" lastClr="FFFFFF"/>
       </a:lt1>
       <a:dk2>
-        <a:srgbClr val="0E2841"/>
+        <a:srgbClr val="1F497D"/>
       </a:dk2>
       <a:lt2>
-        <a:srgbClr val="E8E8E8"/>
+        <a:srgbClr val="EEECE1"/>
       </a:lt2>
       <a:accent1>
-        <a:srgbClr val="156082"/>
+        <a:srgbClr val="4F81BD"/>
       </a:accent1>
       <a:accent2>
-        <a:srgbClr val="E97132"/>
+        <a:srgbClr val="C0504D"/>
       </a:accent2>
       <a:accent3>
-        <a:srgbClr val="196B24"/>
+        <a:srgbClr val="9BBB59"/>
       </a:accent3>
       <a:accent4>
-        <a:srgbClr val="0F9ED5"/>
+        <a:srgbClr val="8064A2"/>
       </a:accent4>
       <a:accent5>
-        <a:srgbClr val="A02B93"/>
+        <a:srgbClr val="4BACC6"/>
       </a:accent5>
       <a:accent6>
-        <a:srgbClr val="4EA72E"/>
+        <a:srgbClr val="F79646"/>
       </a:accent6>
       <a:hlink>
-        <a:srgbClr val="467886"/>
+        <a:srgbClr val="0000FF"/>
       </a:hlink>
       <a:folHlink>
-        <a:srgbClr val="96607D"/>
+        <a:srgbClr val="800080"/>
       </a:folHlink>
     </a:clrScheme>
     <a:fontScheme name="Office">
       <a:majorFont>
-        <a:latin typeface="Aptos Display" panose="02110004020202020204"/>
+        <a:latin typeface="Calibri"/>
         <a:ea typeface=""/>
         <a:cs typeface=""/>
-        <a:font script="Jpan" typeface="游ゴシック Light"/>
+        <a:font script="Jpan" typeface="ＭＳ Ｐゴシック"/>
         <a:font script="Hang" typeface="맑은 고딕"/>
-        <a:font script="Hans" typeface="等线 Light"/>
+        <a:font script="Hans" typeface="宋体"/>
         <a:font script="Hant" typeface="新細明體"/>
         <a:font script="Arab" typeface="Times New Roman"/>
         <a:font script="Hebr" typeface="Times New Roman"/>
@@ -12344,31 +12831,14 @@
         <a:font script="Viet" typeface="Times New Roman"/>
         <a:font script="Uigh" typeface="Microsoft Uighur"/>
         <a:font script="Geor" typeface="Sylfaen"/>
-        <a:font script="Armn" typeface="Arial"/>
-        <a:font script="Bugi" typeface="Leelawadee UI"/>
-        <a:font script="Bopo" typeface="Microsoft JhengHei"/>
-        <a:font script="Java" typeface="Javanese Text"/>
-        <a:font script="Lisu" typeface="Segoe UI"/>
-        <a:font script="Mymr" typeface="Myanmar Text"/>
-        <a:font script="Nkoo" typeface="Ebrima"/>
-        <a:font script="Olck" typeface="Nirmala UI"/>
-        <a:font script="Osma" typeface="Ebrima"/>
-        <a:font script="Phag" typeface="Phagspa"/>
-        <a:font script="Syrn" typeface="Estrangelo Edessa"/>
-        <a:font script="Syrj" typeface="Estrangelo Edessa"/>
-        <a:font script="Syre" typeface="Estrangelo Edessa"/>
-        <a:font script="Sora" typeface="Nirmala UI"/>
-        <a:font script="Tale" typeface="Microsoft Tai Le"/>
-        <a:font script="Talu" typeface="Microsoft New Tai Lue"/>
-        <a:font script="Tfng" typeface="Ebrima"/>
       </a:majorFont>
       <a:minorFont>
-        <a:latin typeface="Aptos" panose="02110004020202020204"/>
+        <a:latin typeface="Calibri"/>
         <a:ea typeface=""/>
         <a:cs typeface=""/>
-        <a:font script="Jpan" typeface="游ゴシック"/>
+        <a:font script="Jpan" typeface="ＭＳ Ｐゴシック"/>
         <a:font script="Hang" typeface="맑은 고딕"/>
-        <a:font script="Hans" typeface="等线"/>
+        <a:font script="Hans" typeface="宋体"/>
         <a:font script="Hant" typeface="新細明體"/>
         <a:font script="Arab" typeface="Arial"/>
         <a:font script="Hebr" typeface="Arial"/>
@@ -12396,23 +12866,6 @@
         <a:font script="Viet" typeface="Arial"/>
         <a:font script="Uigh" typeface="Microsoft Uighur"/>
         <a:font script="Geor" typeface="Sylfaen"/>
-        <a:font script="Armn" typeface="Arial"/>
-        <a:font script="Bugi" typeface="Leelawadee UI"/>
-        <a:font script="Bopo" typeface="Microsoft JhengHei"/>
-        <a:font script="Java" typeface="Javanese Text"/>
-        <a:font script="Lisu" typeface="Segoe UI"/>
-        <a:font script="Mymr" typeface="Myanmar Text"/>
-        <a:font script="Nkoo" typeface="Ebrima"/>
-        <a:font script="Olck" typeface="Nirmala UI"/>
-        <a:font script="Osma" typeface="Ebrima"/>
-        <a:font script="Phag" typeface="Phagspa"/>
-        <a:font script="Syrn" typeface="Estrangelo Edessa"/>
-        <a:font script="Syrj" typeface="Estrangelo Edessa"/>
-        <a:font script="Syre" typeface="Estrangelo Edessa"/>
-        <a:font script="Sora" typeface="Nirmala UI"/>
-        <a:font script="Tale" typeface="Microsoft Tai Le"/>
-        <a:font script="Talu" typeface="Microsoft New Tai Lue"/>
-        <a:font script="Tfng" typeface="Ebrima"/>
       </a:minorFont>
     </a:fontScheme>
     <a:fmtScheme name="Office">
@@ -12424,136 +12877,180 @@
           <a:gsLst>
             <a:gs pos="0">
               <a:schemeClr val="phClr">
-                <a:lumMod val="110000"/>
-                <a:satMod val="105000"/>
-                <a:tint val="67000"/>
+                <a:tint val="50000"/>
+                <a:satMod val="300000"/>
               </a:schemeClr>
             </a:gs>
-            <a:gs pos="50000">
+            <a:gs pos="35000">
               <a:schemeClr val="phClr">
-                <a:lumMod val="105000"/>
-                <a:satMod val="103000"/>
-                <a:tint val="73000"/>
+                <a:tint val="37000"/>
+                <a:satMod val="300000"/>
               </a:schemeClr>
             </a:gs>
             <a:gs pos="100000">
               <a:schemeClr val="phClr">
-                <a:lumMod val="105000"/>
-                <a:satMod val="109000"/>
-                <a:tint val="81000"/>
+                <a:tint val="15000"/>
+                <a:satMod val="350000"/>
               </a:schemeClr>
             </a:gs>
           </a:gsLst>
-          <a:lin ang="5400000" scaled="0"/>
+          <a:lin ang="16200000" scaled="1"/>
         </a:gradFill>
         <a:gradFill rotWithShape="1">
           <a:gsLst>
             <a:gs pos="0">
               <a:schemeClr val="phClr">
-                <a:satMod val="103000"/>
-                <a:lumMod val="102000"/>
-                <a:tint val="94000"/>
-              </a:schemeClr>
-            </a:gs>
-            <a:gs pos="50000">
-              <a:schemeClr val="phClr">
-                <a:satMod val="110000"/>
-                <a:lumMod val="100000"/>
+                <a:tint val="100000"/>
                 <a:shade val="100000"/>
+                <a:satMod val="130000"/>
               </a:schemeClr>
             </a:gs>
             <a:gs pos="100000">
               <a:schemeClr val="phClr">
-                <a:lumMod val="99000"/>
-                <a:satMod val="120000"/>
-                <a:shade val="78000"/>
+                <a:tint val="50000"/>
+                <a:shade val="100000"/>
+                <a:satMod val="350000"/>
               </a:schemeClr>
             </a:gs>
           </a:gsLst>
-          <a:lin ang="5400000" scaled="0"/>
+          <a:lin ang="16200000" scaled="0"/>
         </a:gradFill>
       </a:fillStyleLst>
       <a:lnStyleLst>
-        <a:ln w="12700" cap="flat" cmpd="sng" algn="ctr">
+        <a:ln w="9525" cap="flat" cmpd="sng" algn="ctr">
           <a:solidFill>
-            <a:schemeClr val="phClr"/>
+            <a:schemeClr val="phClr">
+              <a:shade val="95000"/>
+              <a:satMod val="105000"/>
+            </a:schemeClr>
           </a:solidFill>
           <a:prstDash val="solid"/>
-          <a:miter lim="800000"/>
-        </a:ln>
-        <a:ln w="19050" cap="flat" cmpd="sng" algn="ctr">
-          <a:solidFill>
-            <a:schemeClr val="phClr"/>
-          </a:solidFill>
-          <a:prstDash val="solid"/>
-          <a:miter lim="800000"/>
         </a:ln>
         <a:ln w="25400" cap="flat" cmpd="sng" algn="ctr">
           <a:solidFill>
             <a:schemeClr val="phClr"/>
           </a:solidFill>
           <a:prstDash val="solid"/>
-          <a:miter lim="800000"/>
+        </a:ln>
+        <a:ln w="38100" cap="flat" cmpd="sng" algn="ctr">
+          <a:solidFill>
+            <a:schemeClr val="phClr"/>
+          </a:solidFill>
+          <a:prstDash val="solid"/>
         </a:ln>
       </a:lnStyleLst>
       <a:effectStyleLst>
         <a:effectStyle>
-          <a:effectLst/>
-        </a:effectStyle>
-        <a:effectStyle>
-          <a:effectLst/>
+          <a:effectLst>
+            <a:outerShdw blurRad="40000" dist="20000" dir="5400000" rotWithShape="0">
+              <a:srgbClr val="000000">
+                <a:alpha val="38000"/>
+              </a:srgbClr>
+            </a:outerShdw>
+          </a:effectLst>
         </a:effectStyle>
         <a:effectStyle>
           <a:effectLst>
-            <a:outerShdw blurRad="57150" dist="19050" dir="5400000" algn="ctr" rotWithShape="0">
+            <a:outerShdw blurRad="40000" dist="23000" dir="5400000" rotWithShape="0">
               <a:srgbClr val="000000">
-                <a:alpha val="63000"/>
+                <a:alpha val="35000"/>
               </a:srgbClr>
             </a:outerShdw>
           </a:effectLst>
+        </a:effectStyle>
+        <a:effectStyle>
+          <a:effectLst>
+            <a:outerShdw blurRad="40000" dist="23000" dir="5400000" rotWithShape="0">
+              <a:srgbClr val="000000">
+                <a:alpha val="35000"/>
+              </a:srgbClr>
+            </a:outerShdw>
+          </a:effectLst>
+          <a:scene3d>
+            <a:camera prst="orthographicFront">
+              <a:rot lat="0" lon="0" rev="0"/>
+            </a:camera>
+            <a:lightRig rig="threePt" dir="t">
+              <a:rot lat="0" lon="0" rev="1200000"/>
+            </a:lightRig>
+          </a:scene3d>
+          <a:sp3d>
+            <a:bevelT w="63500" h="25400"/>
+          </a:sp3d>
         </a:effectStyle>
       </a:effectStyleLst>
       <a:bgFillStyleLst>
         <a:solidFill>
           <a:schemeClr val="phClr"/>
         </a:solidFill>
-        <a:solidFill>
-          <a:schemeClr val="phClr">
-            <a:tint val="95000"/>
-            <a:satMod val="170000"/>
-          </a:schemeClr>
-        </a:solidFill>
         <a:gradFill rotWithShape="1">
           <a:gsLst>
             <a:gs pos="0">
               <a:schemeClr val="phClr">
-                <a:tint val="93000"/>
-                <a:satMod val="150000"/>
-                <a:shade val="98000"/>
-                <a:lumMod val="102000"/>
+                <a:tint val="40000"/>
+                <a:satMod val="350000"/>
               </a:schemeClr>
             </a:gs>
-            <a:gs pos="50000">
+            <a:gs pos="40000">
               <a:schemeClr val="phClr">
-                <a:tint val="98000"/>
-                <a:satMod val="130000"/>
-                <a:shade val="90000"/>
-                <a:lumMod val="103000"/>
+                <a:tint val="45000"/>
+                <a:shade val="99000"/>
+                <a:satMod val="350000"/>
               </a:schemeClr>
             </a:gs>
             <a:gs pos="100000">
               <a:schemeClr val="phClr">
-                <a:shade val="63000"/>
-                <a:satMod val="120000"/>
+                <a:shade val="20000"/>
+                <a:satMod val="255000"/>
               </a:schemeClr>
             </a:gs>
           </a:gsLst>
-          <a:lin ang="5400000" scaled="0"/>
+          <a:path path="circle">
+            <a:fillToRect l="50000" t="-80000" r="50000" b="180000"/>
+          </a:path>
+        </a:gradFill>
+        <a:gradFill rotWithShape="1">
+          <a:gsLst>
+            <a:gs pos="0">
+              <a:schemeClr val="phClr">
+                <a:tint val="80000"/>
+                <a:satMod val="300000"/>
+              </a:schemeClr>
+            </a:gs>
+            <a:gs pos="100000">
+              <a:schemeClr val="phClr">
+                <a:shade val="30000"/>
+                <a:satMod val="200000"/>
+              </a:schemeClr>
+            </a:gs>
+          </a:gsLst>
+          <a:path path="circle">
+            <a:fillToRect l="50000" t="50000" r="50000" b="50000"/>
+          </a:path>
         </a:gradFill>
       </a:bgFillStyleLst>
     </a:fmtScheme>
   </a:themeElements>
   <a:objectDefaults>
+    <a:spDef>
+      <a:spPr/>
+      <a:bodyPr/>
+      <a:lstStyle/>
+      <a:style>
+        <a:lnRef idx="1">
+          <a:schemeClr val="accent1"/>
+        </a:lnRef>
+        <a:fillRef idx="3">
+          <a:schemeClr val="accent1"/>
+        </a:fillRef>
+        <a:effectRef idx="2">
+          <a:schemeClr val="accent1"/>
+        </a:effectRef>
+        <a:fontRef idx="minor">
+          <a:schemeClr val="lt1"/>
+        </a:fontRef>
+      </a:style>
+    </a:spDef>
     <a:lnDef>
       <a:spPr/>
       <a:bodyPr/>
@@ -12575,10 +13072,5 @@
     </a:lnDef>
   </a:objectDefaults>
   <a:extraClrSchemeLst/>
-  <a:extLst>
-    <a:ext uri="{05A4C25C-085E-4340-85A3-A5531E510DB2}">
-      <thm15:themeFamily xmlns:thm15="http://schemas.microsoft.com/office/thememl/2012/main" name="Office Theme" id="{2E142A2C-CD16-42D6-873A-C26D2A0506FA}" vid="{1BDDFF52-6CD6-40A5-AB3C-68EB2F1E4D0A}"/>
-    </a:ext>
-  </a:extLst>
 </a:theme>
 </file>
--- a/docs/AIForgeCrew-CTO-Summary.pptx
+++ b/docs/AIForgeCrew-CTO-Summary.pptx
@@ -9281,7 +9281,7 @@
                 </a:solidFill>
                 <a:latin typeface="Segoe UI"/>
               </a:rPr>
-              <a:t>What a run costs</a:t>
+              <a:t>Every action is written down</a:t>
             </a:r>
           </a:p>
         </p:txBody>
@@ -9384,7 +9384,7 @@
                 </a:solidFill>
                 <a:latin typeface="Segoe UI"/>
               </a:rPr>
-              <a:t>a cap on how often each agent may call the model</a:t>
+              <a:t>each run keeps a readable record of every step it took</a:t>
             </a:r>
           </a:p>
         </p:txBody>
@@ -9441,7 +9441,7 @@
                 </a:solidFill>
                 <a:latin typeface="Segoe UI"/>
               </a:rPr>
-              <a:t>our local model first; a paid one only after a real failure</a:t>
+              <a:t>20 actions that reach outside stop and ask a person</a:t>
             </a:r>
           </a:p>
         </p:txBody>
@@ -9463,11 +9463,11 @@
             </a:avLst>
           </a:prstGeom>
           <a:solidFill>
-            <a:srgbClr val="DCEEE7"/>
+            <a:srgbClr val="DCE7F2"/>
           </a:solidFill>
           <a:ln w="12700">
             <a:solidFill>
-              <a:srgbClr val="1E6B52"/>
+              <a:srgbClr val="1F4E79"/>
             </a:solidFill>
           </a:ln>
           <a:effectLst/>
@@ -9494,11 +9494,11 @@
             <a:r>
               <a:rPr sz="1150" b="1">
                 <a:solidFill>
-                  <a:srgbClr val="1E6B52"/>
-                </a:solidFill>
-                <a:latin typeface="Segoe UI"/>
-              </a:rPr>
-              <a:t>It works inside our own network</a:t>
+                  <a:srgbClr val="1F4E79"/>
+                </a:solidFill>
+                <a:latin typeface="Segoe UI"/>
+              </a:rPr>
+              <a:t>Our code never leaves the building</a:t>
             </a:r>
           </a:p>
         </p:txBody>
@@ -9522,7 +9522,7 @@
           </a:solidFill>
           <a:ln w="12700">
             <a:solidFill>
-              <a:srgbClr val="1E6B52"/>
+              <a:srgbClr val="1F4E79"/>
             </a:solidFill>
           </a:ln>
           <a:effectLst/>
@@ -9570,7 +9570,7 @@
           </a:solidFill>
           <a:ln w="12700">
             <a:solidFill>
-              <a:srgbClr val="1E6B52"/>
+              <a:srgbClr val="1F4E79"/>
             </a:solidFill>
           </a:ln>
           <a:effectLst/>
@@ -9597,11 +9597,11 @@
             <a:r>
               <a:rPr sz="850" b="0">
                 <a:solidFill>
-                  <a:srgbClr val="1E6B52"/>
-                </a:solidFill>
-                <a:latin typeface="Segoe UI"/>
-              </a:rPr>
-              <a:t>paste our own certificate authority into Settings — no restart</a:t>
+                  <a:srgbClr val="1F4E79"/>
+                </a:solidFill>
+                <a:latin typeface="Segoe UI"/>
+              </a:rPr>
+              <a:t>prompts and code go only to the model we point it at</a:t>
             </a:r>
           </a:p>
         </p:txBody>
@@ -9627,7 +9627,7 @@
           </a:solidFill>
           <a:ln w="12700">
             <a:solidFill>
-              <a:srgbClr val="1E6B52"/>
+              <a:srgbClr val="1F4E79"/>
             </a:solidFill>
           </a:ln>
           <a:effectLst/>
@@ -9654,11 +9654,11 @@
             <a:r>
               <a:rPr sz="850" b="0">
                 <a:solidFill>
-                  <a:srgbClr val="1E6B52"/>
-                </a:solidFill>
-                <a:latin typeface="Segoe UI"/>
-              </a:rPr>
-              <a:t>one setting covers the model, Jira, GitLab, git and curl</a:t>
+                  <a:srgbClr val="1F4E79"/>
+                </a:solidFill>
+                <a:latin typeface="Segoe UI"/>
+              </a:rPr>
+              <a:t>with that model on our own hardware, it runs with the network off</a:t>
             </a:r>
           </a:p>
         </p:txBody>
@@ -9715,7 +9715,7 @@
                 </a:solidFill>
                 <a:latin typeface="Segoe UI"/>
               </a:rPr>
-              <a:t>Keys and tokens</a:t>
+              <a:t>Our keys and our certificates</a:t>
             </a:r>
           </a:p>
         </p:txBody>
@@ -9818,7 +9818,7 @@
                 </a:solidFill>
                 <a:latin typeface="Segoe UI"/>
               </a:rPr>
-              <a:t>all of them in one locked folder, readable only by the service</a:t>
+              <a:t>keys sit in one locked folder and are never shown back</a:t>
             </a:r>
           </a:p>
         </p:txBody>
@@ -9875,7 +9875,7 @@
                 </a:solidFill>
                 <a:latin typeface="Segoe UI"/>
               </a:rPr>
-              <a:t>permissions are repaired every time it starts</a:t>
+              <a:t>our own certificate authority is added in Settings, no restart</a:t>
             </a:r>
           </a:p>
         </p:txBody>

--- a/docs/AIForgeCrew-CTO-Summary.pptx
+++ b/docs/AIForgeCrew-CTO-Summary.pptx
@@ -11896,11 +11896,11 @@
             </a:avLst>
           </a:prstGeom>
           <a:solidFill>
-            <a:srgbClr val="EAE1F0"/>
+            <a:srgbClr val="ECECEC"/>
           </a:solidFill>
           <a:ln w="12700">
             <a:solidFill>
-              <a:srgbClr val="5B3A6E"/>
+              <a:srgbClr val="3A3A3A"/>
             </a:solidFill>
           </a:ln>
           <a:effectLst/>
@@ -11927,11 +11927,11 @@
             <a:r>
               <a:rPr sz="1150" b="1">
                 <a:solidFill>
-                  <a:srgbClr val="5B3A6E"/>
-                </a:solidFill>
-                <a:latin typeface="Segoe UI"/>
-              </a:rPr>
-              <a:t>Open-source agents — and what this adds</a:t>
+                  <a:srgbClr val="3A3A3A"/>
+                </a:solidFill>
+                <a:latin typeface="Segoe UI"/>
+              </a:rPr>
+              <a:t>What it asks of us</a:t>
             </a:r>
           </a:p>
         </p:txBody>
@@ -11955,7 +11955,7 @@
           </a:solidFill>
           <a:ln w="12700">
             <a:solidFill>
-              <a:srgbClr val="5B3A6E"/>
+              <a:srgbClr val="3A3A3A"/>
             </a:solidFill>
           </a:ln>
           <a:effectLst/>
@@ -12003,7 +12003,7 @@
           </a:solidFill>
           <a:ln w="12700">
             <a:solidFill>
-              <a:srgbClr val="5B3A6E"/>
+              <a:srgbClr val="3A3A3A"/>
             </a:solidFill>
           </a:ln>
           <a:effectLst/>
@@ -12030,11 +12030,11 @@
             <a:r>
               <a:rPr sz="850" b="0">
                 <a:solidFill>
-                  <a:srgbClr val="5B3A6E"/>
-                </a:solidFill>
-                <a:latin typeface="Segoe UI"/>
-              </a:rPr>
-              <a:t>Aider · Cline · Continue — one developer at a keyboard</a:t>
+                  <a:srgbClr val="3A3A3A"/>
+                </a:solidFill>
+                <a:latin typeface="Segoe UI"/>
+              </a:rPr>
+              <a:t>one machine with a model on it — a desktop, a NUC or a server</a:t>
             </a:r>
           </a:p>
         </p:txBody>
@@ -12060,7 +12060,7 @@
           </a:solidFill>
           <a:ln w="12700">
             <a:solidFill>
-              <a:srgbClr val="5B3A6E"/>
+              <a:srgbClr val="3A3A3A"/>
             </a:solidFill>
           </a:ln>
           <a:effectLst/>
@@ -12087,11 +12087,11 @@
             <a:r>
               <a:rPr sz="850" b="0">
                 <a:solidFill>
-                  <a:srgbClr val="5B3A6E"/>
-                </a:solidFill>
-                <a:latin typeface="Segoe UI"/>
-              </a:rPr>
-              <a:t>OpenHands · SWE-agent — a sandbox to run, models to bring</a:t>
+                  <a:srgbClr val="3A3A3A"/>
+                </a:solidFill>
+                <a:latin typeface="Segoe UI"/>
+              </a:rPr>
+              <a:t>one folder to back up; copy it and the machine has moved</a:t>
             </a:r>
           </a:p>
         </p:txBody>
@@ -12117,7 +12117,7 @@
           </a:solidFill>
           <a:ln w="12700">
             <a:solidFill>
-              <a:srgbClr val="5B3A6E"/>
+              <a:srgbClr val="3A3A3A"/>
             </a:solidFill>
           </a:ln>
           <a:effectLst/>
@@ -12144,11 +12144,11 @@
             <a:r>
               <a:rPr sz="850" b="0">
                 <a:solidFill>
-                  <a:srgbClr val="5B3A6E"/>
-                </a:solidFill>
-                <a:latin typeface="Segoe UI"/>
-              </a:rPr>
-              <a:t>CrewAI · LangGraph — parts to build with, not a product</a:t>
+                  <a:srgbClr val="3A3A3A"/>
+                </a:solidFill>
+                <a:latin typeface="Segoe UI"/>
+              </a:rPr>
+              <a:t>upgrades pull and restart; the data migrates itself</a:t>
             </a:r>
           </a:p>
         </p:txBody>
@@ -12205,7 +12205,7 @@
                 </a:solidFill>
                 <a:latin typeface="Segoe UI"/>
               </a:rPr>
-              <a:t>What we need you to decide</a:t>
+              <a:t>How we would roll it out</a:t>
             </a:r>
           </a:p>
         </p:txBody>
@@ -12308,7 +12308,7 @@
                 </a:solidFill>
                 <a:latin typeface="Segoe UI"/>
               </a:rPr>
-              <a:t>pay for that scoring — it is the only thing that settles the question</a:t>
+              <a:t>one team runs it on real tickets and keeps what it learns</a:t>
             </a:r>
           </a:p>
         </p:txBody>
@@ -12365,7 +12365,7 @@
                 </a:solidFill>
                 <a:latin typeface="Segoe UI"/>
               </a:rPr>
-              <a:t>name an owner and a stand-in: one person wrote all of this</a:t>
+              <a:t>a second team joins the same admin — the memory is already there</a:t>
             </a:r>
           </a:p>
         </p:txBody>
@@ -12422,7 +12422,7 @@
                 </a:solidFill>
                 <a:latin typeface="Segoe UI"/>
               </a:rPr>
-              <a:t>pick the network that holds the company memory, and who owns it</a:t>
+              <a:t>company-wide once two teams have run it for a month</a:t>
             </a:r>
           </a:p>
         </p:txBody>

--- a/docs/AIForgeCrew-CTO-Summary.pptx
+++ b/docs/AIForgeCrew-CTO-Summary.pptx
@@ -11896,11 +11896,11 @@
             </a:avLst>
           </a:prstGeom>
           <a:solidFill>
-            <a:srgbClr val="ECECEC"/>
+            <a:srgbClr val="EAE1F0"/>
           </a:solidFill>
           <a:ln w="12700">
             <a:solidFill>
-              <a:srgbClr val="3A3A3A"/>
+              <a:srgbClr val="5B3A6E"/>
             </a:solidFill>
           </a:ln>
           <a:effectLst/>
@@ -11927,11 +11927,11 @@
             <a:r>
               <a:rPr sz="1150" b="1">
                 <a:solidFill>
-                  <a:srgbClr val="3A3A3A"/>
-                </a:solidFill>
-                <a:latin typeface="Segoe UI"/>
-              </a:rPr>
-              <a:t>What it asks of us</a:t>
+                  <a:srgbClr val="5B3A6E"/>
+                </a:solidFill>
+                <a:latin typeface="Segoe UI"/>
+              </a:rPr>
+              <a:t>What the open-source agents do not do</a:t>
             </a:r>
           </a:p>
         </p:txBody>
@@ -11955,7 +11955,7 @@
           </a:solidFill>
           <a:ln w="12700">
             <a:solidFill>
-              <a:srgbClr val="3A3A3A"/>
+              <a:srgbClr val="5B3A6E"/>
             </a:solidFill>
           </a:ln>
           <a:effectLst/>
@@ -12003,7 +12003,7 @@
           </a:solidFill>
           <a:ln w="12700">
             <a:solidFill>
-              <a:srgbClr val="3A3A3A"/>
+              <a:srgbClr val="5B3A6E"/>
             </a:solidFill>
           </a:ln>
           <a:effectLst/>
@@ -12030,11 +12030,11 @@
             <a:r>
               <a:rPr sz="850" b="0">
                 <a:solidFill>
-                  <a:srgbClr val="3A3A3A"/>
-                </a:solidFill>
-                <a:latin typeface="Segoe UI"/>
-              </a:rPr>
-              <a:t>one machine with a model on it — a desktop, a NUC or a server</a:t>
+                  <a:srgbClr val="5B3A6E"/>
+                </a:solidFill>
+                <a:latin typeface="Segoe UI"/>
+              </a:rPr>
+              <a:t>OpenCode, Aider and Cline stop at one machine — ours shares what it learns</a:t>
             </a:r>
           </a:p>
         </p:txBody>
@@ -12060,7 +12060,7 @@
           </a:solidFill>
           <a:ln w="12700">
             <a:solidFill>
-              <a:srgbClr val="3A3A3A"/>
+              <a:srgbClr val="5B3A6E"/>
             </a:solidFill>
           </a:ln>
           <a:effectLst/>
@@ -12087,11 +12087,11 @@
             <a:r>
               <a:rPr sz="850" b="0">
                 <a:solidFill>
-                  <a:srgbClr val="3A3A3A"/>
-                </a:solidFill>
-                <a:latin typeface="Segoe UI"/>
-              </a:rPr>
-              <a:t>one folder to back up; copy it and the machine has moved</a:t>
+                  <a:srgbClr val="5B3A6E"/>
+                </a:solidFill>
+                <a:latin typeface="Segoe UI"/>
+              </a:rPr>
+              <a:t>one chat loop there; 19 agents here, carrying a ticket to a merge request</a:t>
             </a:r>
           </a:p>
         </p:txBody>
@@ -12117,7 +12117,7 @@
           </a:solidFill>
           <a:ln w="12700">
             <a:solidFill>
-              <a:srgbClr val="3A3A3A"/>
+              <a:srgbClr val="5B3A6E"/>
             </a:solidFill>
           </a:ln>
           <a:effectLst/>
@@ -12144,11 +12144,11 @@
             <a:r>
               <a:rPr sz="850" b="0">
                 <a:solidFill>
-                  <a:srgbClr val="3A3A3A"/>
-                </a:solidFill>
-                <a:latin typeface="Segoe UI"/>
-              </a:rPr>
-              <a:t>upgrades pull and restart; the data migrates itself</a:t>
+                  <a:srgbClr val="5B3A6E"/>
+                </a:solidFill>
+                <a:latin typeface="Segoe UI"/>
+              </a:rPr>
+              <a:t>the enterprise parts they leave out: one gate out, our own CA, approvals</a:t>
             </a:r>
           </a:p>
         </p:txBody>

--- a/docs/AIForgeCrew-CTO-Summary.pptx
+++ b/docs/AIForgeCrew-CTO-Summary.pptx
@@ -4100,17 +4100,9 @@
           <a:prstGeom prst="rect">
             <a:avLst/>
           </a:prstGeom>
-          <a:gradFill rotWithShape="1">
-            <a:gsLst>
-              <a:gs pos="0">
-                <a:srgbClr val="0B1B2B"/>
-              </a:gs>
-              <a:gs pos="100000">
-                <a:srgbClr val="183B5C"/>
-              </a:gs>
-            </a:gsLst>
-            <a:lin scaled="0" ang="0"/>
-          </a:gradFill>
+          <a:solidFill>
+            <a:srgbClr val="0B1B2B"/>
+          </a:solidFill>
           <a:ln>
             <a:noFill/>
           </a:ln>
@@ -4141,6 +4133,94 @@
       <p:sp>
         <p:nvSpPr>
           <p:cNvPr id="3" name="Rectangle 2"/>
+          <p:cNvSpPr/>
+          <p:nvPr/>
+        </p:nvSpPr>
+        <p:spPr>
+          <a:xfrm>
+            <a:off x="7498079" y="0"/>
+            <a:ext cx="4693616" cy="1481328"/>
+          </a:xfrm>
+          <a:prstGeom prst="rect">
+            <a:avLst/>
+          </a:prstGeom>
+          <a:solidFill>
+            <a:srgbClr val="183B5C"/>
+          </a:solidFill>
+          <a:ln>
+            <a:noFill/>
+          </a:ln>
+          <a:effectLst/>
+        </p:spPr>
+        <p:style>
+          <a:lnRef idx="1">
+            <a:schemeClr val="accent1"/>
+          </a:lnRef>
+          <a:fillRef idx="3">
+            <a:schemeClr val="accent1"/>
+          </a:fillRef>
+          <a:effectRef idx="2">
+            <a:schemeClr val="accent1"/>
+          </a:effectRef>
+          <a:fontRef idx="minor">
+            <a:schemeClr val="lt1"/>
+          </a:fontRef>
+        </p:style>
+        <p:txBody>
+          <a:bodyPr rtlCol="0" anchor="ctr" wrap="square"/>
+          <a:lstStyle/>
+          <a:p>
+            <a:pPr algn="ctr"/>
+          </a:p>
+        </p:txBody>
+      </p:sp>
+      <p:sp>
+        <p:nvSpPr>
+          <p:cNvPr id="4" name="Rectangle 3"/>
+          <p:cNvSpPr/>
+          <p:nvPr/>
+        </p:nvSpPr>
+        <p:spPr>
+          <a:xfrm>
+            <a:off x="7040880" y="0"/>
+            <a:ext cx="457200" cy="1481328"/>
+          </a:xfrm>
+          <a:prstGeom prst="rect">
+            <a:avLst/>
+          </a:prstGeom>
+          <a:solidFill>
+            <a:srgbClr val="112B44"/>
+          </a:solidFill>
+          <a:ln>
+            <a:noFill/>
+          </a:ln>
+          <a:effectLst/>
+        </p:spPr>
+        <p:style>
+          <a:lnRef idx="1">
+            <a:schemeClr val="accent1"/>
+          </a:lnRef>
+          <a:fillRef idx="3">
+            <a:schemeClr val="accent1"/>
+          </a:fillRef>
+          <a:effectRef idx="2">
+            <a:schemeClr val="accent1"/>
+          </a:effectRef>
+          <a:fontRef idx="minor">
+            <a:schemeClr val="lt1"/>
+          </a:fontRef>
+        </p:style>
+        <p:txBody>
+          <a:bodyPr rtlCol="0" anchor="ctr" wrap="square"/>
+          <a:lstStyle/>
+          <a:p>
+            <a:pPr algn="ctr"/>
+          </a:p>
+        </p:txBody>
+      </p:sp>
+      <p:sp>
+        <p:nvSpPr>
+          <p:cNvPr id="5" name="Rectangle 4"/>
           <p:cNvSpPr/>
           <p:nvPr/>
         </p:nvSpPr>
@@ -4184,7 +4264,7 @@
       </p:sp>
       <p:sp>
         <p:nvSpPr>
-          <p:cNvPr id="4" name="TextBox 3"/>
+          <p:cNvPr id="6" name="TextBox 5"/>
           <p:cNvSpPr txBox="1"/>
           <p:nvPr/>
         </p:nvSpPr>
@@ -4219,7 +4299,7 @@
       </p:sp>
       <p:sp>
         <p:nvSpPr>
-          <p:cNvPr id="5" name="TextBox 4"/>
+          <p:cNvPr id="7" name="TextBox 6"/>
           <p:cNvSpPr txBox="1"/>
           <p:nvPr/>
         </p:nvSpPr>
@@ -4254,7 +4334,7 @@
       </p:sp>
       <p:sp>
         <p:nvSpPr>
-          <p:cNvPr id="6" name="Oval 5"/>
+          <p:cNvPr id="8" name="Oval 7"/>
           <p:cNvSpPr/>
           <p:nvPr/>
         </p:nvSpPr>
@@ -4300,7 +4380,7 @@
       </p:sp>
       <p:sp>
         <p:nvSpPr>
-          <p:cNvPr id="7" name="TextBox 6"/>
+          <p:cNvPr id="9" name="TextBox 8"/>
           <p:cNvSpPr txBox="1"/>
           <p:nvPr/>
         </p:nvSpPr>
@@ -4335,7 +4415,7 @@
       </p:sp>
       <p:sp>
         <p:nvSpPr>
-          <p:cNvPr id="8" name="TextBox 7"/>
+          <p:cNvPr id="10" name="TextBox 9"/>
           <p:cNvSpPr txBox="1"/>
           <p:nvPr/>
         </p:nvSpPr>
@@ -4370,7 +4450,7 @@
       </p:sp>
       <p:sp>
         <p:nvSpPr>
-          <p:cNvPr id="9" name="Oval 8"/>
+          <p:cNvPr id="11" name="Oval 10"/>
           <p:cNvSpPr/>
           <p:nvPr/>
         </p:nvSpPr>
@@ -4416,7 +4496,7 @@
       </p:sp>
       <p:sp>
         <p:nvSpPr>
-          <p:cNvPr id="10" name="TextBox 9"/>
+          <p:cNvPr id="12" name="TextBox 11"/>
           <p:cNvSpPr txBox="1"/>
           <p:nvPr/>
         </p:nvSpPr>
@@ -4451,7 +4531,7 @@
       </p:sp>
       <p:sp>
         <p:nvSpPr>
-          <p:cNvPr id="11" name="TextBox 10"/>
+          <p:cNvPr id="13" name="TextBox 12"/>
           <p:cNvSpPr txBox="1"/>
           <p:nvPr/>
         </p:nvSpPr>
@@ -4486,7 +4566,7 @@
       </p:sp>
       <p:sp>
         <p:nvSpPr>
-          <p:cNvPr id="12" name="Oval 11"/>
+          <p:cNvPr id="14" name="Oval 13"/>
           <p:cNvSpPr/>
           <p:nvPr/>
         </p:nvSpPr>
@@ -4532,7 +4612,7 @@
       </p:sp>
       <p:sp>
         <p:nvSpPr>
-          <p:cNvPr id="13" name="TextBox 12"/>
+          <p:cNvPr id="15" name="TextBox 14"/>
           <p:cNvSpPr txBox="1"/>
           <p:nvPr/>
         </p:nvSpPr>
@@ -4567,7 +4647,7 @@
       </p:sp>
       <p:sp>
         <p:nvSpPr>
-          <p:cNvPr id="14" name="TextBox 13"/>
+          <p:cNvPr id="16" name="TextBox 15"/>
           <p:cNvSpPr txBox="1"/>
           <p:nvPr/>
         </p:nvSpPr>
@@ -4602,7 +4682,7 @@
       </p:sp>
       <p:sp>
         <p:nvSpPr>
-          <p:cNvPr id="15" name="Oval 14"/>
+          <p:cNvPr id="17" name="Oval 16"/>
           <p:cNvSpPr/>
           <p:nvPr/>
         </p:nvSpPr>
@@ -4648,7 +4728,7 @@
       </p:sp>
       <p:sp>
         <p:nvSpPr>
-          <p:cNvPr id="16" name="TextBox 15"/>
+          <p:cNvPr id="18" name="TextBox 17"/>
           <p:cNvSpPr txBox="1"/>
           <p:nvPr/>
         </p:nvSpPr>
@@ -4683,7 +4763,7 @@
       </p:sp>
       <p:sp>
         <p:nvSpPr>
-          <p:cNvPr id="17" name="TextBox 16"/>
+          <p:cNvPr id="19" name="TextBox 18"/>
           <p:cNvSpPr txBox="1"/>
           <p:nvPr/>
         </p:nvSpPr>
@@ -4718,7 +4798,7 @@
       </p:sp>
       <p:sp>
         <p:nvSpPr>
-          <p:cNvPr id="18" name="TextBox 17"/>
+          <p:cNvPr id="20" name="TextBox 19"/>
           <p:cNvSpPr txBox="1"/>
           <p:nvPr/>
         </p:nvSpPr>
@@ -4753,7 +4833,7 @@
       </p:sp>
       <p:sp>
         <p:nvSpPr>
-          <p:cNvPr id="19" name="Oval 18"/>
+          <p:cNvPr id="21" name="Oval 20"/>
           <p:cNvSpPr/>
           <p:nvPr/>
         </p:nvSpPr>
@@ -4797,7 +4877,7 @@
       </p:sp>
       <p:sp>
         <p:nvSpPr>
-          <p:cNvPr id="20" name="Oval 19"/>
+          <p:cNvPr id="22" name="Oval 21"/>
           <p:cNvSpPr/>
           <p:nvPr/>
         </p:nvSpPr>
@@ -4809,17 +4889,9 @@
           <a:prstGeom prst="ellipse">
             <a:avLst/>
           </a:prstGeom>
-          <a:gradFill rotWithShape="1">
-            <a:gsLst>
-              <a:gs pos="0">
-                <a:srgbClr val="183B5C"/>
-              </a:gs>
-              <a:gs pos="100000">
-                <a:srgbClr val="2B6CB0"/>
-              </a:gs>
-            </a:gsLst>
-            <a:lin scaled="0" ang="18900000"/>
-          </a:gradFill>
+          <a:solidFill>
+            <a:srgbClr val="183B5C"/>
+          </a:solidFill>
           <a:ln>
             <a:noFill/>
           </a:ln>
@@ -4882,7 +4954,7 @@
       </p:sp>
       <p:sp>
         <p:nvSpPr>
-          <p:cNvPr id="21" name="Rounded Rectangle 20"/>
+          <p:cNvPr id="23" name="Rounded Rectangle 22"/>
           <p:cNvSpPr/>
           <p:nvPr/>
         </p:nvSpPr>
@@ -4951,7 +5023,7 @@
       </p:sp>
       <p:cxnSp>
         <p:nvCxnSpPr>
-          <p:cNvPr id="22" name="Connector 21"/>
+          <p:cNvPr id="24" name="Connector 23"/>
           <p:cNvCxnSpPr/>
           <p:nvPr/>
         </p:nvCxnSpPr>
@@ -4987,7 +5059,7 @@
       </p:cxnSp>
       <p:sp>
         <p:nvSpPr>
-          <p:cNvPr id="23" name="Rounded Rectangle 22"/>
+          <p:cNvPr id="25" name="Rounded Rectangle 24"/>
           <p:cNvSpPr/>
           <p:nvPr/>
         </p:nvSpPr>
@@ -5056,7 +5128,7 @@
       </p:sp>
       <p:cxnSp>
         <p:nvCxnSpPr>
-          <p:cNvPr id="24" name="Connector 23"/>
+          <p:cNvPr id="26" name="Connector 25"/>
           <p:cNvCxnSpPr/>
           <p:nvPr/>
         </p:nvCxnSpPr>
@@ -5092,7 +5164,7 @@
       </p:cxnSp>
       <p:sp>
         <p:nvSpPr>
-          <p:cNvPr id="25" name="Rounded Rectangle 24"/>
+          <p:cNvPr id="27" name="Rounded Rectangle 26"/>
           <p:cNvSpPr/>
           <p:nvPr/>
         </p:nvSpPr>
@@ -5161,7 +5233,7 @@
       </p:sp>
       <p:cxnSp>
         <p:nvCxnSpPr>
-          <p:cNvPr id="26" name="Connector 25"/>
+          <p:cNvPr id="28" name="Connector 27"/>
           <p:cNvCxnSpPr/>
           <p:nvPr/>
         </p:nvCxnSpPr>
@@ -5197,7 +5269,7 @@
       </p:cxnSp>
       <p:sp>
         <p:nvSpPr>
-          <p:cNvPr id="27" name="Rounded Rectangle 26"/>
+          <p:cNvPr id="29" name="Rounded Rectangle 28"/>
           <p:cNvSpPr/>
           <p:nvPr/>
         </p:nvSpPr>
@@ -5266,7 +5338,7 @@
       </p:sp>
       <p:cxnSp>
         <p:nvCxnSpPr>
-          <p:cNvPr id="28" name="Connector 27"/>
+          <p:cNvPr id="30" name="Connector 29"/>
           <p:cNvCxnSpPr/>
           <p:nvPr/>
         </p:nvCxnSpPr>
@@ -5302,7 +5374,7 @@
       </p:cxnSp>
       <p:sp>
         <p:nvSpPr>
-          <p:cNvPr id="29" name="Rounded Rectangle 28"/>
+          <p:cNvPr id="31" name="Rounded Rectangle 30"/>
           <p:cNvSpPr/>
           <p:nvPr/>
         </p:nvSpPr>
@@ -5371,7 +5443,7 @@
       </p:sp>
       <p:cxnSp>
         <p:nvCxnSpPr>
-          <p:cNvPr id="30" name="Connector 29"/>
+          <p:cNvPr id="32" name="Connector 31"/>
           <p:cNvCxnSpPr/>
           <p:nvPr/>
         </p:nvCxnSpPr>
@@ -5407,7 +5479,7 @@
       </p:cxnSp>
       <p:sp>
         <p:nvSpPr>
-          <p:cNvPr id="31" name="Rounded Rectangle 30"/>
+          <p:cNvPr id="33" name="Rounded Rectangle 32"/>
           <p:cNvSpPr/>
           <p:nvPr/>
         </p:nvSpPr>
@@ -5476,7 +5548,7 @@
       </p:sp>
       <p:cxnSp>
         <p:nvCxnSpPr>
-          <p:cNvPr id="32" name="Connector 31"/>
+          <p:cNvPr id="34" name="Connector 33"/>
           <p:cNvCxnSpPr/>
           <p:nvPr/>
         </p:nvCxnSpPr>
@@ -5512,7 +5584,7 @@
       </p:cxnSp>
       <p:sp>
         <p:nvSpPr>
-          <p:cNvPr id="33" name="TextBox 32"/>
+          <p:cNvPr id="35" name="TextBox 34"/>
           <p:cNvSpPr txBox="1"/>
           <p:nvPr/>
         </p:nvSpPr>
@@ -5547,7 +5619,7 @@
       </p:sp>
       <p:sp>
         <p:nvSpPr>
-          <p:cNvPr id="34" name="TextBox 33"/>
+          <p:cNvPr id="36" name="TextBox 35"/>
           <p:cNvSpPr txBox="1"/>
           <p:nvPr/>
         </p:nvSpPr>
@@ -5582,7 +5654,7 @@
       </p:sp>
       <p:sp>
         <p:nvSpPr>
-          <p:cNvPr id="35" name="TextBox 34"/>
+          <p:cNvPr id="37" name="TextBox 36"/>
           <p:cNvSpPr txBox="1"/>
           <p:nvPr/>
         </p:nvSpPr>
@@ -5617,7 +5689,7 @@
       </p:sp>
       <p:sp>
         <p:nvSpPr>
-          <p:cNvPr id="36" name="Chevron 35"/>
+          <p:cNvPr id="38" name="Chevron 37"/>
           <p:cNvSpPr/>
           <p:nvPr/>
         </p:nvSpPr>
@@ -5674,7 +5746,7 @@
       </p:sp>
       <p:sp>
         <p:nvSpPr>
-          <p:cNvPr id="37" name="Chevron 36"/>
+          <p:cNvPr id="39" name="Chevron 38"/>
           <p:cNvSpPr/>
           <p:nvPr/>
         </p:nvSpPr>
@@ -5731,7 +5803,7 @@
       </p:sp>
       <p:sp>
         <p:nvSpPr>
-          <p:cNvPr id="38" name="Chevron 37"/>
+          <p:cNvPr id="40" name="Chevron 39"/>
           <p:cNvSpPr/>
           <p:nvPr/>
         </p:nvSpPr>
@@ -5788,7 +5860,7 @@
       </p:sp>
       <p:sp>
         <p:nvSpPr>
-          <p:cNvPr id="39" name="Chevron 38"/>
+          <p:cNvPr id="41" name="Chevron 40"/>
           <p:cNvSpPr/>
           <p:nvPr/>
         </p:nvSpPr>
@@ -5845,7 +5917,7 @@
       </p:sp>
       <p:sp>
         <p:nvSpPr>
-          <p:cNvPr id="40" name="Chevron 39"/>
+          <p:cNvPr id="42" name="Chevron 41"/>
           <p:cNvSpPr/>
           <p:nvPr/>
         </p:nvSpPr>
@@ -5902,7 +5974,7 @@
       </p:sp>
       <p:sp>
         <p:nvSpPr>
-          <p:cNvPr id="41" name="Chevron 40"/>
+          <p:cNvPr id="43" name="Chevron 42"/>
           <p:cNvSpPr/>
           <p:nvPr/>
         </p:nvSpPr>
@@ -5959,7 +6031,7 @@
       </p:sp>
       <p:sp>
         <p:nvSpPr>
-          <p:cNvPr id="42" name="TextBox 41"/>
+          <p:cNvPr id="44" name="TextBox 43"/>
           <p:cNvSpPr txBox="1"/>
           <p:nvPr/>
         </p:nvSpPr>
@@ -5994,7 +6066,7 @@
       </p:sp>
       <p:sp>
         <p:nvSpPr>
-          <p:cNvPr id="43" name="Rounded Rectangle 42"/>
+          <p:cNvPr id="45" name="Rounded Rectangle 44"/>
           <p:cNvSpPr/>
           <p:nvPr/>
         </p:nvSpPr>
@@ -6040,7 +6112,7 @@
       </p:sp>
       <p:sp>
         <p:nvSpPr>
-          <p:cNvPr id="44" name="Oval 43"/>
+          <p:cNvPr id="46" name="Oval 45"/>
           <p:cNvSpPr/>
           <p:nvPr/>
         </p:nvSpPr>
@@ -6084,7 +6156,7 @@
       </p:sp>
       <p:sp>
         <p:nvSpPr>
-          <p:cNvPr id="45" name="TextBox 44"/>
+          <p:cNvPr id="47" name="TextBox 46"/>
           <p:cNvSpPr txBox="1"/>
           <p:nvPr/>
         </p:nvSpPr>
@@ -6119,7 +6191,7 @@
       </p:sp>
       <p:sp>
         <p:nvSpPr>
-          <p:cNvPr id="46" name="TextBox 45"/>
+          <p:cNvPr id="48" name="TextBox 47"/>
           <p:cNvSpPr txBox="1"/>
           <p:nvPr/>
         </p:nvSpPr>
@@ -6163,7 +6235,7 @@
       </p:sp>
       <p:sp>
         <p:nvSpPr>
-          <p:cNvPr id="47" name="Oval 46"/>
+          <p:cNvPr id="49" name="Oval 48"/>
           <p:cNvSpPr/>
           <p:nvPr/>
         </p:nvSpPr>
@@ -6207,7 +6279,7 @@
       </p:sp>
       <p:sp>
         <p:nvSpPr>
-          <p:cNvPr id="48" name="TextBox 47"/>
+          <p:cNvPr id="50" name="TextBox 49"/>
           <p:cNvSpPr txBox="1"/>
           <p:nvPr/>
         </p:nvSpPr>
@@ -6242,7 +6314,7 @@
       </p:sp>
       <p:sp>
         <p:nvSpPr>
-          <p:cNvPr id="49" name="TextBox 48"/>
+          <p:cNvPr id="51" name="TextBox 50"/>
           <p:cNvSpPr txBox="1"/>
           <p:nvPr/>
         </p:nvSpPr>
@@ -6286,7 +6358,7 @@
       </p:sp>
       <p:sp>
         <p:nvSpPr>
-          <p:cNvPr id="50" name="TextBox 49"/>
+          <p:cNvPr id="52" name="TextBox 51"/>
           <p:cNvSpPr txBox="1"/>
           <p:nvPr/>
         </p:nvSpPr>
@@ -6321,7 +6393,7 @@
       </p:sp>
       <p:sp>
         <p:nvSpPr>
-          <p:cNvPr id="51" name="TextBox 50"/>
+          <p:cNvPr id="53" name="TextBox 52"/>
           <p:cNvSpPr txBox="1"/>
           <p:nvPr/>
         </p:nvSpPr>
@@ -6386,17 +6458,9 @@
           <a:prstGeom prst="rect">
             <a:avLst/>
           </a:prstGeom>
-          <a:gradFill rotWithShape="1">
-            <a:gsLst>
-              <a:gs pos="0">
-                <a:srgbClr val="0B1B2B"/>
-              </a:gs>
-              <a:gs pos="100000">
-                <a:srgbClr val="183B5C"/>
-              </a:gs>
-            </a:gsLst>
-            <a:lin scaled="0" ang="0"/>
-          </a:gradFill>
+          <a:solidFill>
+            <a:srgbClr val="0B1B2B"/>
+          </a:solidFill>
           <a:ln>
             <a:noFill/>
           </a:ln>
@@ -6427,6 +6491,94 @@
       <p:sp>
         <p:nvSpPr>
           <p:cNvPr id="3" name="Rectangle 2"/>
+          <p:cNvSpPr/>
+          <p:nvPr/>
+        </p:nvSpPr>
+        <p:spPr>
+          <a:xfrm>
+            <a:off x="7498079" y="0"/>
+            <a:ext cx="4693616" cy="1481328"/>
+          </a:xfrm>
+          <a:prstGeom prst="rect">
+            <a:avLst/>
+          </a:prstGeom>
+          <a:solidFill>
+            <a:srgbClr val="183B5C"/>
+          </a:solidFill>
+          <a:ln>
+            <a:noFill/>
+          </a:ln>
+          <a:effectLst/>
+        </p:spPr>
+        <p:style>
+          <a:lnRef idx="1">
+            <a:schemeClr val="accent1"/>
+          </a:lnRef>
+          <a:fillRef idx="3">
+            <a:schemeClr val="accent1"/>
+          </a:fillRef>
+          <a:effectRef idx="2">
+            <a:schemeClr val="accent1"/>
+          </a:effectRef>
+          <a:fontRef idx="minor">
+            <a:schemeClr val="lt1"/>
+          </a:fontRef>
+        </p:style>
+        <p:txBody>
+          <a:bodyPr rtlCol="0" anchor="ctr" wrap="square"/>
+          <a:lstStyle/>
+          <a:p>
+            <a:pPr algn="ctr"/>
+          </a:p>
+        </p:txBody>
+      </p:sp>
+      <p:sp>
+        <p:nvSpPr>
+          <p:cNvPr id="4" name="Rectangle 3"/>
+          <p:cNvSpPr/>
+          <p:nvPr/>
+        </p:nvSpPr>
+        <p:spPr>
+          <a:xfrm>
+            <a:off x="7040880" y="0"/>
+            <a:ext cx="457200" cy="1481328"/>
+          </a:xfrm>
+          <a:prstGeom prst="rect">
+            <a:avLst/>
+          </a:prstGeom>
+          <a:solidFill>
+            <a:srgbClr val="112B44"/>
+          </a:solidFill>
+          <a:ln>
+            <a:noFill/>
+          </a:ln>
+          <a:effectLst/>
+        </p:spPr>
+        <p:style>
+          <a:lnRef idx="1">
+            <a:schemeClr val="accent1"/>
+          </a:lnRef>
+          <a:fillRef idx="3">
+            <a:schemeClr val="accent1"/>
+          </a:fillRef>
+          <a:effectRef idx="2">
+            <a:schemeClr val="accent1"/>
+          </a:effectRef>
+          <a:fontRef idx="minor">
+            <a:schemeClr val="lt1"/>
+          </a:fontRef>
+        </p:style>
+        <p:txBody>
+          <a:bodyPr rtlCol="0" anchor="ctr" wrap="square"/>
+          <a:lstStyle/>
+          <a:p>
+            <a:pPr algn="ctr"/>
+          </a:p>
+        </p:txBody>
+      </p:sp>
+      <p:sp>
+        <p:nvSpPr>
+          <p:cNvPr id="5" name="Rectangle 4"/>
           <p:cNvSpPr/>
           <p:nvPr/>
         </p:nvSpPr>
@@ -6470,7 +6622,7 @@
       </p:sp>
       <p:sp>
         <p:nvSpPr>
-          <p:cNvPr id="4" name="TextBox 3"/>
+          <p:cNvPr id="6" name="TextBox 5"/>
           <p:cNvSpPr txBox="1"/>
           <p:nvPr/>
         </p:nvSpPr>
@@ -6505,7 +6657,7 @@
       </p:sp>
       <p:sp>
         <p:nvSpPr>
-          <p:cNvPr id="5" name="TextBox 4"/>
+          <p:cNvPr id="7" name="TextBox 6"/>
           <p:cNvSpPr txBox="1"/>
           <p:nvPr/>
         </p:nvSpPr>
@@ -6540,7 +6692,7 @@
       </p:sp>
       <p:sp>
         <p:nvSpPr>
-          <p:cNvPr id="6" name="Oval 5"/>
+          <p:cNvPr id="8" name="Oval 7"/>
           <p:cNvSpPr/>
           <p:nvPr/>
         </p:nvSpPr>
@@ -6586,7 +6738,7 @@
       </p:sp>
       <p:sp>
         <p:nvSpPr>
-          <p:cNvPr id="7" name="TextBox 6"/>
+          <p:cNvPr id="9" name="TextBox 8"/>
           <p:cNvSpPr txBox="1"/>
           <p:nvPr/>
         </p:nvSpPr>
@@ -6621,7 +6773,7 @@
       </p:sp>
       <p:sp>
         <p:nvSpPr>
-          <p:cNvPr id="8" name="TextBox 7"/>
+          <p:cNvPr id="10" name="TextBox 9"/>
           <p:cNvSpPr txBox="1"/>
           <p:nvPr/>
         </p:nvSpPr>
@@ -6656,7 +6808,7 @@
       </p:sp>
       <p:sp>
         <p:nvSpPr>
-          <p:cNvPr id="9" name="Oval 8"/>
+          <p:cNvPr id="11" name="Oval 10"/>
           <p:cNvSpPr/>
           <p:nvPr/>
         </p:nvSpPr>
@@ -6702,7 +6854,7 @@
       </p:sp>
       <p:sp>
         <p:nvSpPr>
-          <p:cNvPr id="10" name="TextBox 9"/>
+          <p:cNvPr id="12" name="TextBox 11"/>
           <p:cNvSpPr txBox="1"/>
           <p:nvPr/>
         </p:nvSpPr>
@@ -6737,7 +6889,7 @@
       </p:sp>
       <p:sp>
         <p:nvSpPr>
-          <p:cNvPr id="11" name="TextBox 10"/>
+          <p:cNvPr id="13" name="TextBox 12"/>
           <p:cNvSpPr txBox="1"/>
           <p:nvPr/>
         </p:nvSpPr>
@@ -6772,7 +6924,7 @@
       </p:sp>
       <p:sp>
         <p:nvSpPr>
-          <p:cNvPr id="12" name="Oval 11"/>
+          <p:cNvPr id="14" name="Oval 13"/>
           <p:cNvSpPr/>
           <p:nvPr/>
         </p:nvSpPr>
@@ -6818,7 +6970,7 @@
       </p:sp>
       <p:sp>
         <p:nvSpPr>
-          <p:cNvPr id="13" name="TextBox 12"/>
+          <p:cNvPr id="15" name="TextBox 14"/>
           <p:cNvSpPr txBox="1"/>
           <p:nvPr/>
         </p:nvSpPr>
@@ -6853,7 +7005,7 @@
       </p:sp>
       <p:sp>
         <p:nvSpPr>
-          <p:cNvPr id="14" name="TextBox 13"/>
+          <p:cNvPr id="16" name="TextBox 15"/>
           <p:cNvSpPr txBox="1"/>
           <p:nvPr/>
         </p:nvSpPr>
@@ -6888,7 +7040,7 @@
       </p:sp>
       <p:sp>
         <p:nvSpPr>
-          <p:cNvPr id="15" name="TextBox 14"/>
+          <p:cNvPr id="17" name="TextBox 16"/>
           <p:cNvSpPr txBox="1"/>
           <p:nvPr/>
         </p:nvSpPr>
@@ -6923,7 +7075,7 @@
       </p:sp>
       <p:sp>
         <p:nvSpPr>
-          <p:cNvPr id="16" name="Oval 15"/>
+          <p:cNvPr id="18" name="Oval 17"/>
           <p:cNvSpPr/>
           <p:nvPr/>
         </p:nvSpPr>
@@ -6969,7 +7121,7 @@
       </p:sp>
       <p:sp>
         <p:nvSpPr>
-          <p:cNvPr id="17" name="Oval 16"/>
+          <p:cNvPr id="19" name="Oval 18"/>
           <p:cNvSpPr/>
           <p:nvPr/>
         </p:nvSpPr>
@@ -7015,7 +7167,7 @@
       </p:sp>
       <p:sp>
         <p:nvSpPr>
-          <p:cNvPr id="18" name="Oval 17"/>
+          <p:cNvPr id="20" name="Oval 19"/>
           <p:cNvSpPr/>
           <p:nvPr/>
         </p:nvSpPr>
@@ -7061,7 +7213,7 @@
       </p:sp>
       <p:sp>
         <p:nvSpPr>
-          <p:cNvPr id="19" name="Oval 18"/>
+          <p:cNvPr id="21" name="Oval 20"/>
           <p:cNvSpPr/>
           <p:nvPr/>
         </p:nvSpPr>
@@ -7073,17 +7225,9 @@
           <a:prstGeom prst="ellipse">
             <a:avLst/>
           </a:prstGeom>
-          <a:gradFill rotWithShape="1">
-            <a:gsLst>
-              <a:gs pos="0">
-                <a:srgbClr val="183B5C"/>
-              </a:gs>
-              <a:gs pos="100000">
-                <a:srgbClr val="2C7A7B"/>
-              </a:gs>
-            </a:gsLst>
-            <a:lin scaled="0" ang="18900000"/>
-          </a:gradFill>
+          <a:solidFill>
+            <a:srgbClr val="183B5C"/>
+          </a:solidFill>
           <a:ln>
             <a:noFill/>
           </a:ln>
@@ -7134,7 +7278,7 @@
       </p:sp>
       <p:sp>
         <p:nvSpPr>
-          <p:cNvPr id="20" name="Rounded Rectangle 19"/>
+          <p:cNvPr id="22" name="Rounded Rectangle 21"/>
           <p:cNvSpPr/>
           <p:nvPr/>
         </p:nvSpPr>
@@ -7182,7 +7326,7 @@
       </p:sp>
       <p:sp>
         <p:nvSpPr>
-          <p:cNvPr id="21" name="TextBox 20"/>
+          <p:cNvPr id="23" name="TextBox 22"/>
           <p:cNvSpPr txBox="1"/>
           <p:nvPr/>
         </p:nvSpPr>
@@ -7217,7 +7361,7 @@
       </p:sp>
       <p:sp>
         <p:nvSpPr>
-          <p:cNvPr id="22" name="Rounded Rectangle 21"/>
+          <p:cNvPr id="24" name="Rounded Rectangle 23"/>
           <p:cNvSpPr/>
           <p:nvPr/>
         </p:nvSpPr>
@@ -7265,7 +7409,7 @@
       </p:sp>
       <p:sp>
         <p:nvSpPr>
-          <p:cNvPr id="23" name="TextBox 22"/>
+          <p:cNvPr id="25" name="TextBox 24"/>
           <p:cNvSpPr txBox="1"/>
           <p:nvPr/>
         </p:nvSpPr>
@@ -7300,7 +7444,7 @@
       </p:sp>
       <p:sp>
         <p:nvSpPr>
-          <p:cNvPr id="24" name="Rounded Rectangle 23"/>
+          <p:cNvPr id="26" name="Rounded Rectangle 25"/>
           <p:cNvSpPr/>
           <p:nvPr/>
         </p:nvSpPr>
@@ -7348,7 +7492,7 @@
       </p:sp>
       <p:sp>
         <p:nvSpPr>
-          <p:cNvPr id="25" name="TextBox 24"/>
+          <p:cNvPr id="27" name="TextBox 26"/>
           <p:cNvSpPr txBox="1"/>
           <p:nvPr/>
         </p:nvSpPr>
@@ -7383,7 +7527,7 @@
       </p:sp>
       <p:sp>
         <p:nvSpPr>
-          <p:cNvPr id="26" name="TextBox 25"/>
+          <p:cNvPr id="28" name="TextBox 27"/>
           <p:cNvSpPr txBox="1"/>
           <p:nvPr/>
         </p:nvSpPr>
@@ -7418,7 +7562,7 @@
       </p:sp>
       <p:sp>
         <p:nvSpPr>
-          <p:cNvPr id="27" name="TextBox 26"/>
+          <p:cNvPr id="29" name="TextBox 28"/>
           <p:cNvSpPr txBox="1"/>
           <p:nvPr/>
         </p:nvSpPr>
@@ -7453,7 +7597,7 @@
       </p:sp>
       <p:cxnSp>
         <p:nvCxnSpPr>
-          <p:cNvPr id="28" name="Connector 27"/>
+          <p:cNvPr id="30" name="Connector 29"/>
           <p:cNvCxnSpPr/>
           <p:nvPr/>
         </p:nvCxnSpPr>
@@ -7489,7 +7633,7 @@
       </p:cxnSp>
       <p:sp>
         <p:nvSpPr>
-          <p:cNvPr id="29" name="TextBox 28"/>
+          <p:cNvPr id="31" name="TextBox 30"/>
           <p:cNvSpPr txBox="1"/>
           <p:nvPr/>
         </p:nvSpPr>
@@ -7524,7 +7668,7 @@
       </p:sp>
       <p:sp>
         <p:nvSpPr>
-          <p:cNvPr id="30" name="TextBox 29"/>
+          <p:cNvPr id="32" name="TextBox 31"/>
           <p:cNvSpPr txBox="1"/>
           <p:nvPr/>
         </p:nvSpPr>
@@ -7559,7 +7703,7 @@
       </p:sp>
       <p:cxnSp>
         <p:nvCxnSpPr>
-          <p:cNvPr id="31" name="Connector 30"/>
+          <p:cNvPr id="33" name="Connector 32"/>
           <p:cNvCxnSpPr/>
           <p:nvPr/>
         </p:nvCxnSpPr>
@@ -7595,7 +7739,7 @@
       </p:cxnSp>
       <p:sp>
         <p:nvSpPr>
-          <p:cNvPr id="32" name="TextBox 31"/>
+          <p:cNvPr id="34" name="TextBox 33"/>
           <p:cNvSpPr txBox="1"/>
           <p:nvPr/>
         </p:nvSpPr>
@@ -7630,7 +7774,7 @@
       </p:sp>
       <p:sp>
         <p:nvSpPr>
-          <p:cNvPr id="33" name="TextBox 32"/>
+          <p:cNvPr id="35" name="TextBox 34"/>
           <p:cNvSpPr txBox="1"/>
           <p:nvPr/>
         </p:nvSpPr>
@@ -7665,7 +7809,7 @@
       </p:sp>
       <p:cxnSp>
         <p:nvCxnSpPr>
-          <p:cNvPr id="34" name="Connector 33"/>
+          <p:cNvPr id="36" name="Connector 35"/>
           <p:cNvCxnSpPr/>
           <p:nvPr/>
         </p:nvCxnSpPr>
@@ -7701,7 +7845,7 @@
       </p:cxnSp>
       <p:sp>
         <p:nvSpPr>
-          <p:cNvPr id="35" name="TextBox 34"/>
+          <p:cNvPr id="37" name="TextBox 36"/>
           <p:cNvSpPr txBox="1"/>
           <p:nvPr/>
         </p:nvSpPr>
@@ -7736,7 +7880,7 @@
       </p:sp>
       <p:sp>
         <p:nvSpPr>
-          <p:cNvPr id="36" name="Rounded Rectangle 35"/>
+          <p:cNvPr id="38" name="Rounded Rectangle 37"/>
           <p:cNvSpPr/>
           <p:nvPr/>
         </p:nvSpPr>
@@ -7782,7 +7926,7 @@
       </p:sp>
       <p:sp>
         <p:nvSpPr>
-          <p:cNvPr id="37" name="TextBox 36"/>
+          <p:cNvPr id="39" name="TextBox 38"/>
           <p:cNvSpPr txBox="1"/>
           <p:nvPr/>
         </p:nvSpPr>
@@ -7817,7 +7961,7 @@
       </p:sp>
       <p:sp>
         <p:nvSpPr>
-          <p:cNvPr id="38" name="TextBox 37"/>
+          <p:cNvPr id="40" name="TextBox 39"/>
           <p:cNvSpPr txBox="1"/>
           <p:nvPr/>
         </p:nvSpPr>
@@ -7852,7 +7996,7 @@
       </p:sp>
       <p:sp>
         <p:nvSpPr>
-          <p:cNvPr id="39" name="TextBox 38"/>
+          <p:cNvPr id="41" name="TextBox 40"/>
           <p:cNvSpPr txBox="1"/>
           <p:nvPr/>
         </p:nvSpPr>
@@ -7887,7 +8031,7 @@
       </p:sp>
       <p:sp>
         <p:nvSpPr>
-          <p:cNvPr id="40" name="TextBox 39"/>
+          <p:cNvPr id="42" name="TextBox 41"/>
           <p:cNvSpPr txBox="1"/>
           <p:nvPr/>
         </p:nvSpPr>
@@ -7922,7 +8066,7 @@
       </p:sp>
       <p:sp>
         <p:nvSpPr>
-          <p:cNvPr id="41" name="Rounded Rectangle 40"/>
+          <p:cNvPr id="43" name="Rounded Rectangle 42"/>
           <p:cNvSpPr/>
           <p:nvPr/>
         </p:nvSpPr>
@@ -7968,7 +8112,7 @@
       </p:sp>
       <p:sp>
         <p:nvSpPr>
-          <p:cNvPr id="42" name="TextBox 41"/>
+          <p:cNvPr id="44" name="TextBox 43"/>
           <p:cNvSpPr txBox="1"/>
           <p:nvPr/>
         </p:nvSpPr>
@@ -8003,7 +8147,7 @@
       </p:sp>
       <p:sp>
         <p:nvSpPr>
-          <p:cNvPr id="43" name="TextBox 42"/>
+          <p:cNvPr id="45" name="TextBox 44"/>
           <p:cNvSpPr txBox="1"/>
           <p:nvPr/>
         </p:nvSpPr>
@@ -8038,7 +8182,7 @@
       </p:sp>
       <p:sp>
         <p:nvSpPr>
-          <p:cNvPr id="44" name="TextBox 43"/>
+          <p:cNvPr id="46" name="TextBox 45"/>
           <p:cNvSpPr txBox="1"/>
           <p:nvPr/>
         </p:nvSpPr>
@@ -8073,7 +8217,7 @@
       </p:sp>
       <p:sp>
         <p:nvSpPr>
-          <p:cNvPr id="45" name="TextBox 44"/>
+          <p:cNvPr id="47" name="TextBox 46"/>
           <p:cNvSpPr txBox="1"/>
           <p:nvPr/>
         </p:nvSpPr>
@@ -8108,7 +8252,7 @@
       </p:sp>
       <p:sp>
         <p:nvSpPr>
-          <p:cNvPr id="46" name="TextBox 45"/>
+          <p:cNvPr id="48" name="TextBox 47"/>
           <p:cNvSpPr txBox="1"/>
           <p:nvPr/>
         </p:nvSpPr>
@@ -8143,7 +8287,7 @@
       </p:sp>
       <p:sp>
         <p:nvSpPr>
-          <p:cNvPr id="47" name="Rectangle 46"/>
+          <p:cNvPr id="49" name="Rectangle 48"/>
           <p:cNvSpPr/>
           <p:nvPr/>
         </p:nvSpPr>
@@ -8187,7 +8331,7 @@
       </p:sp>
       <p:sp>
         <p:nvSpPr>
-          <p:cNvPr id="48" name="Oval 47"/>
+          <p:cNvPr id="50" name="Oval 49"/>
           <p:cNvSpPr/>
           <p:nvPr/>
         </p:nvSpPr>
@@ -8231,7 +8375,7 @@
       </p:sp>
       <p:sp>
         <p:nvSpPr>
-          <p:cNvPr id="49" name="TextBox 48"/>
+          <p:cNvPr id="51" name="TextBox 50"/>
           <p:cNvSpPr txBox="1"/>
           <p:nvPr/>
         </p:nvSpPr>
@@ -8266,7 +8410,7 @@
       </p:sp>
       <p:sp>
         <p:nvSpPr>
-          <p:cNvPr id="50" name="TextBox 49"/>
+          <p:cNvPr id="52" name="TextBox 51"/>
           <p:cNvSpPr txBox="1"/>
           <p:nvPr/>
         </p:nvSpPr>
@@ -8310,7 +8454,7 @@
       </p:sp>
       <p:sp>
         <p:nvSpPr>
-          <p:cNvPr id="51" name="Oval 50"/>
+          <p:cNvPr id="53" name="Oval 52"/>
           <p:cNvSpPr/>
           <p:nvPr/>
         </p:nvSpPr>
@@ -8354,7 +8498,7 @@
       </p:sp>
       <p:sp>
         <p:nvSpPr>
-          <p:cNvPr id="52" name="TextBox 51"/>
+          <p:cNvPr id="54" name="TextBox 53"/>
           <p:cNvSpPr txBox="1"/>
           <p:nvPr/>
         </p:nvSpPr>
@@ -8389,7 +8533,7 @@
       </p:sp>
       <p:sp>
         <p:nvSpPr>
-          <p:cNvPr id="53" name="TextBox 52"/>
+          <p:cNvPr id="55" name="TextBox 54"/>
           <p:cNvSpPr txBox="1"/>
           <p:nvPr/>
         </p:nvSpPr>
@@ -8433,7 +8577,7 @@
       </p:sp>
       <p:sp>
         <p:nvSpPr>
-          <p:cNvPr id="54" name="Oval 53"/>
+          <p:cNvPr id="56" name="Oval 55"/>
           <p:cNvSpPr/>
           <p:nvPr/>
         </p:nvSpPr>
@@ -8477,7 +8621,7 @@
       </p:sp>
       <p:sp>
         <p:nvSpPr>
-          <p:cNvPr id="55" name="TextBox 54"/>
+          <p:cNvPr id="57" name="TextBox 56"/>
           <p:cNvSpPr txBox="1"/>
           <p:nvPr/>
         </p:nvSpPr>
@@ -8512,7 +8656,7 @@
       </p:sp>
       <p:sp>
         <p:nvSpPr>
-          <p:cNvPr id="56" name="TextBox 55"/>
+          <p:cNvPr id="58" name="TextBox 57"/>
           <p:cNvSpPr txBox="1"/>
           <p:nvPr/>
         </p:nvSpPr>
@@ -8556,7 +8700,7 @@
       </p:sp>
       <p:sp>
         <p:nvSpPr>
-          <p:cNvPr id="57" name="Rounded Rectangle 56"/>
+          <p:cNvPr id="59" name="Rounded Rectangle 58"/>
           <p:cNvSpPr/>
           <p:nvPr/>
         </p:nvSpPr>
@@ -8602,7 +8746,7 @@
       </p:sp>
       <p:sp>
         <p:nvSpPr>
-          <p:cNvPr id="58" name="TextBox 57"/>
+          <p:cNvPr id="60" name="TextBox 59"/>
           <p:cNvSpPr txBox="1"/>
           <p:nvPr/>
         </p:nvSpPr>
@@ -8667,17 +8811,9 @@
           <a:prstGeom prst="rect">
             <a:avLst/>
           </a:prstGeom>
-          <a:gradFill rotWithShape="1">
-            <a:gsLst>
-              <a:gs pos="0">
-                <a:srgbClr val="0B1B2B"/>
-              </a:gs>
-              <a:gs pos="100000">
-                <a:srgbClr val="183B5C"/>
-              </a:gs>
-            </a:gsLst>
-            <a:lin scaled="0" ang="0"/>
-          </a:gradFill>
+          <a:solidFill>
+            <a:srgbClr val="0B1B2B"/>
+          </a:solidFill>
           <a:ln>
             <a:noFill/>
           </a:ln>
@@ -8708,6 +8844,94 @@
       <p:sp>
         <p:nvSpPr>
           <p:cNvPr id="3" name="Rectangle 2"/>
+          <p:cNvSpPr/>
+          <p:nvPr/>
+        </p:nvSpPr>
+        <p:spPr>
+          <a:xfrm>
+            <a:off x="7498079" y="0"/>
+            <a:ext cx="4693616" cy="1481328"/>
+          </a:xfrm>
+          <a:prstGeom prst="rect">
+            <a:avLst/>
+          </a:prstGeom>
+          <a:solidFill>
+            <a:srgbClr val="183B5C"/>
+          </a:solidFill>
+          <a:ln>
+            <a:noFill/>
+          </a:ln>
+          <a:effectLst/>
+        </p:spPr>
+        <p:style>
+          <a:lnRef idx="1">
+            <a:schemeClr val="accent1"/>
+          </a:lnRef>
+          <a:fillRef idx="3">
+            <a:schemeClr val="accent1"/>
+          </a:fillRef>
+          <a:effectRef idx="2">
+            <a:schemeClr val="accent1"/>
+          </a:effectRef>
+          <a:fontRef idx="minor">
+            <a:schemeClr val="lt1"/>
+          </a:fontRef>
+        </p:style>
+        <p:txBody>
+          <a:bodyPr rtlCol="0" anchor="ctr" wrap="square"/>
+          <a:lstStyle/>
+          <a:p>
+            <a:pPr algn="ctr"/>
+          </a:p>
+        </p:txBody>
+      </p:sp>
+      <p:sp>
+        <p:nvSpPr>
+          <p:cNvPr id="4" name="Rectangle 3"/>
+          <p:cNvSpPr/>
+          <p:nvPr/>
+        </p:nvSpPr>
+        <p:spPr>
+          <a:xfrm>
+            <a:off x="7040880" y="0"/>
+            <a:ext cx="457200" cy="1481328"/>
+          </a:xfrm>
+          <a:prstGeom prst="rect">
+            <a:avLst/>
+          </a:prstGeom>
+          <a:solidFill>
+            <a:srgbClr val="112B44"/>
+          </a:solidFill>
+          <a:ln>
+            <a:noFill/>
+          </a:ln>
+          <a:effectLst/>
+        </p:spPr>
+        <p:style>
+          <a:lnRef idx="1">
+            <a:schemeClr val="accent1"/>
+          </a:lnRef>
+          <a:fillRef idx="3">
+            <a:schemeClr val="accent1"/>
+          </a:fillRef>
+          <a:effectRef idx="2">
+            <a:schemeClr val="accent1"/>
+          </a:effectRef>
+          <a:fontRef idx="minor">
+            <a:schemeClr val="lt1"/>
+          </a:fontRef>
+        </p:style>
+        <p:txBody>
+          <a:bodyPr rtlCol="0" anchor="ctr" wrap="square"/>
+          <a:lstStyle/>
+          <a:p>
+            <a:pPr algn="ctr"/>
+          </a:p>
+        </p:txBody>
+      </p:sp>
+      <p:sp>
+        <p:nvSpPr>
+          <p:cNvPr id="5" name="Rectangle 4"/>
           <p:cNvSpPr/>
           <p:nvPr/>
         </p:nvSpPr>
@@ -8751,7 +8975,7 @@
       </p:sp>
       <p:sp>
         <p:nvSpPr>
-          <p:cNvPr id="4" name="TextBox 3"/>
+          <p:cNvPr id="6" name="TextBox 5"/>
           <p:cNvSpPr txBox="1"/>
           <p:nvPr/>
         </p:nvSpPr>
@@ -8786,7 +9010,7 @@
       </p:sp>
       <p:sp>
         <p:nvSpPr>
-          <p:cNvPr id="5" name="TextBox 4"/>
+          <p:cNvPr id="7" name="TextBox 6"/>
           <p:cNvSpPr txBox="1"/>
           <p:nvPr/>
         </p:nvSpPr>
@@ -8821,7 +9045,7 @@
       </p:sp>
       <p:sp>
         <p:nvSpPr>
-          <p:cNvPr id="6" name="Oval 5"/>
+          <p:cNvPr id="8" name="Oval 7"/>
           <p:cNvSpPr/>
           <p:nvPr/>
         </p:nvSpPr>
@@ -8867,7 +9091,7 @@
       </p:sp>
       <p:sp>
         <p:nvSpPr>
-          <p:cNvPr id="7" name="TextBox 6"/>
+          <p:cNvPr id="9" name="TextBox 8"/>
           <p:cNvSpPr txBox="1"/>
           <p:nvPr/>
         </p:nvSpPr>
@@ -8902,7 +9126,7 @@
       </p:sp>
       <p:sp>
         <p:nvSpPr>
-          <p:cNvPr id="8" name="TextBox 7"/>
+          <p:cNvPr id="10" name="TextBox 9"/>
           <p:cNvSpPr txBox="1"/>
           <p:nvPr/>
         </p:nvSpPr>
@@ -8937,7 +9161,7 @@
       </p:sp>
       <p:sp>
         <p:nvSpPr>
-          <p:cNvPr id="9" name="Oval 8"/>
+          <p:cNvPr id="11" name="Oval 10"/>
           <p:cNvSpPr/>
           <p:nvPr/>
         </p:nvSpPr>
@@ -8983,7 +9207,7 @@
       </p:sp>
       <p:sp>
         <p:nvSpPr>
-          <p:cNvPr id="10" name="TextBox 9"/>
+          <p:cNvPr id="12" name="TextBox 11"/>
           <p:cNvSpPr txBox="1"/>
           <p:nvPr/>
         </p:nvSpPr>
@@ -9018,7 +9242,7 @@
       </p:sp>
       <p:sp>
         <p:nvSpPr>
-          <p:cNvPr id="11" name="TextBox 10"/>
+          <p:cNvPr id="13" name="TextBox 12"/>
           <p:cNvSpPr txBox="1"/>
           <p:nvPr/>
         </p:nvSpPr>
@@ -9053,7 +9277,7 @@
       </p:sp>
       <p:sp>
         <p:nvSpPr>
-          <p:cNvPr id="12" name="Oval 11"/>
+          <p:cNvPr id="14" name="Oval 13"/>
           <p:cNvSpPr/>
           <p:nvPr/>
         </p:nvSpPr>
@@ -9099,7 +9323,7 @@
       </p:sp>
       <p:sp>
         <p:nvSpPr>
-          <p:cNvPr id="13" name="TextBox 12"/>
+          <p:cNvPr id="15" name="TextBox 14"/>
           <p:cNvSpPr txBox="1"/>
           <p:nvPr/>
         </p:nvSpPr>
@@ -9134,7 +9358,7 @@
       </p:sp>
       <p:sp>
         <p:nvSpPr>
-          <p:cNvPr id="14" name="TextBox 13"/>
+          <p:cNvPr id="16" name="TextBox 15"/>
           <p:cNvSpPr txBox="1"/>
           <p:nvPr/>
         </p:nvSpPr>
@@ -9169,7 +9393,7 @@
       </p:sp>
       <p:sp>
         <p:nvSpPr>
-          <p:cNvPr id="15" name="TextBox 14"/>
+          <p:cNvPr id="17" name="TextBox 16"/>
           <p:cNvSpPr txBox="1"/>
           <p:nvPr/>
         </p:nvSpPr>
@@ -9204,7 +9428,7 @@
       </p:sp>
       <p:sp>
         <p:nvSpPr>
-          <p:cNvPr id="16" name="Oval 15"/>
+          <p:cNvPr id="18" name="Oval 17"/>
           <p:cNvSpPr/>
           <p:nvPr/>
         </p:nvSpPr>
@@ -9250,7 +9474,7 @@
       </p:sp>
       <p:sp>
         <p:nvSpPr>
-          <p:cNvPr id="17" name="Oval 16"/>
+          <p:cNvPr id="19" name="Oval 18"/>
           <p:cNvSpPr/>
           <p:nvPr/>
         </p:nvSpPr>
@@ -9296,7 +9520,7 @@
       </p:sp>
       <p:sp>
         <p:nvSpPr>
-          <p:cNvPr id="18" name="Oval 17"/>
+          <p:cNvPr id="20" name="Oval 19"/>
           <p:cNvSpPr/>
           <p:nvPr/>
         </p:nvSpPr>
@@ -9342,7 +9566,7 @@
       </p:sp>
       <p:sp>
         <p:nvSpPr>
-          <p:cNvPr id="19" name="TextBox 18"/>
+          <p:cNvPr id="21" name="TextBox 20"/>
           <p:cNvSpPr txBox="1"/>
           <p:nvPr/>
         </p:nvSpPr>
@@ -9389,7 +9613,7 @@
       </p:sp>
       <p:sp>
         <p:nvSpPr>
-          <p:cNvPr id="20" name="TextBox 19"/>
+          <p:cNvPr id="22" name="TextBox 21"/>
           <p:cNvSpPr txBox="1"/>
           <p:nvPr/>
         </p:nvSpPr>
@@ -9424,7 +9648,7 @@
       </p:sp>
       <p:sp>
         <p:nvSpPr>
-          <p:cNvPr id="21" name="TextBox 20"/>
+          <p:cNvPr id="23" name="TextBox 22"/>
           <p:cNvSpPr txBox="1"/>
           <p:nvPr/>
         </p:nvSpPr>
@@ -9459,7 +9683,7 @@
       </p:sp>
       <p:sp>
         <p:nvSpPr>
-          <p:cNvPr id="22" name="Oval 21"/>
+          <p:cNvPr id="24" name="Oval 23"/>
           <p:cNvSpPr/>
           <p:nvPr/>
         </p:nvSpPr>
@@ -9505,7 +9729,7 @@
       </p:sp>
       <p:sp>
         <p:nvSpPr>
-          <p:cNvPr id="23" name="Oval 22"/>
+          <p:cNvPr id="25" name="Oval 24"/>
           <p:cNvSpPr/>
           <p:nvPr/>
         </p:nvSpPr>
@@ -9551,7 +9775,7 @@
       </p:sp>
       <p:sp>
         <p:nvSpPr>
-          <p:cNvPr id="24" name="Oval 23"/>
+          <p:cNvPr id="26" name="Oval 25"/>
           <p:cNvSpPr/>
           <p:nvPr/>
         </p:nvSpPr>
@@ -9597,7 +9821,7 @@
       </p:sp>
       <p:sp>
         <p:nvSpPr>
-          <p:cNvPr id="25" name="Oval 24"/>
+          <p:cNvPr id="27" name="Oval 26"/>
           <p:cNvSpPr/>
           <p:nvPr/>
         </p:nvSpPr>
@@ -9643,7 +9867,7 @@
       </p:sp>
       <p:sp>
         <p:nvSpPr>
-          <p:cNvPr id="26" name="Oval 25"/>
+          <p:cNvPr id="28" name="Oval 27"/>
           <p:cNvSpPr/>
           <p:nvPr/>
         </p:nvSpPr>
@@ -9689,7 +9913,7 @@
       </p:sp>
       <p:sp>
         <p:nvSpPr>
-          <p:cNvPr id="27" name="Oval 26"/>
+          <p:cNvPr id="29" name="Oval 28"/>
           <p:cNvSpPr/>
           <p:nvPr/>
         </p:nvSpPr>
@@ -9735,7 +9959,7 @@
       </p:sp>
       <p:sp>
         <p:nvSpPr>
-          <p:cNvPr id="28" name="Oval 27"/>
+          <p:cNvPr id="30" name="Oval 29"/>
           <p:cNvSpPr/>
           <p:nvPr/>
         </p:nvSpPr>
@@ -9781,7 +10005,7 @@
       </p:sp>
       <p:sp>
         <p:nvSpPr>
-          <p:cNvPr id="29" name="Oval 28"/>
+          <p:cNvPr id="31" name="Oval 30"/>
           <p:cNvSpPr/>
           <p:nvPr/>
         </p:nvSpPr>
@@ -9827,7 +10051,7 @@
       </p:sp>
       <p:sp>
         <p:nvSpPr>
-          <p:cNvPr id="30" name="Oval 29"/>
+          <p:cNvPr id="32" name="Oval 31"/>
           <p:cNvSpPr/>
           <p:nvPr/>
         </p:nvSpPr>
@@ -9873,7 +10097,7 @@
       </p:sp>
       <p:sp>
         <p:nvSpPr>
-          <p:cNvPr id="31" name="Oval 30"/>
+          <p:cNvPr id="33" name="Oval 32"/>
           <p:cNvSpPr/>
           <p:nvPr/>
         </p:nvSpPr>
@@ -9919,7 +10143,7 @@
       </p:sp>
       <p:sp>
         <p:nvSpPr>
-          <p:cNvPr id="32" name="Oval 31"/>
+          <p:cNvPr id="34" name="Oval 33"/>
           <p:cNvSpPr/>
           <p:nvPr/>
         </p:nvSpPr>
@@ -9965,7 +10189,7 @@
       </p:sp>
       <p:sp>
         <p:nvSpPr>
-          <p:cNvPr id="33" name="Oval 32"/>
+          <p:cNvPr id="35" name="Oval 34"/>
           <p:cNvSpPr/>
           <p:nvPr/>
         </p:nvSpPr>
@@ -10011,7 +10235,7 @@
       </p:sp>
       <p:sp>
         <p:nvSpPr>
-          <p:cNvPr id="34" name="Rounded Rectangle 33"/>
+          <p:cNvPr id="36" name="Rounded Rectangle 35"/>
           <p:cNvSpPr/>
           <p:nvPr/>
         </p:nvSpPr>
@@ -10059,7 +10283,7 @@
       </p:sp>
       <p:sp>
         <p:nvSpPr>
-          <p:cNvPr id="35" name="TextBox 34"/>
+          <p:cNvPr id="37" name="TextBox 36"/>
           <p:cNvSpPr txBox="1"/>
           <p:nvPr/>
         </p:nvSpPr>
@@ -10094,7 +10318,7 @@
       </p:sp>
       <p:sp>
         <p:nvSpPr>
-          <p:cNvPr id="36" name="TextBox 35"/>
+          <p:cNvPr id="38" name="TextBox 37"/>
           <p:cNvSpPr txBox="1"/>
           <p:nvPr/>
         </p:nvSpPr>
@@ -10129,7 +10353,7 @@
       </p:sp>
       <p:sp>
         <p:nvSpPr>
-          <p:cNvPr id="37" name="Rectangle 36"/>
+          <p:cNvPr id="39" name="Rectangle 38"/>
           <p:cNvSpPr/>
           <p:nvPr/>
         </p:nvSpPr>
@@ -10173,7 +10397,7 @@
       </p:sp>
       <p:sp>
         <p:nvSpPr>
-          <p:cNvPr id="38" name="TextBox 37"/>
+          <p:cNvPr id="40" name="TextBox 39"/>
           <p:cNvSpPr txBox="1"/>
           <p:nvPr/>
         </p:nvSpPr>
@@ -10208,7 +10432,7 @@
       </p:sp>
       <p:sp>
         <p:nvSpPr>
-          <p:cNvPr id="39" name="Oval 38"/>
+          <p:cNvPr id="41" name="Oval 40"/>
           <p:cNvSpPr/>
           <p:nvPr/>
         </p:nvSpPr>
@@ -10252,7 +10476,7 @@
       </p:sp>
       <p:sp>
         <p:nvSpPr>
-          <p:cNvPr id="40" name="TextBox 39"/>
+          <p:cNvPr id="42" name="TextBox 41"/>
           <p:cNvSpPr txBox="1"/>
           <p:nvPr/>
         </p:nvSpPr>
@@ -10287,7 +10511,7 @@
       </p:sp>
       <p:sp>
         <p:nvSpPr>
-          <p:cNvPr id="41" name="TextBox 40"/>
+          <p:cNvPr id="43" name="TextBox 42"/>
           <p:cNvSpPr txBox="1"/>
           <p:nvPr/>
         </p:nvSpPr>
@@ -10331,7 +10555,7 @@
       </p:sp>
       <p:sp>
         <p:nvSpPr>
-          <p:cNvPr id="42" name="Oval 41"/>
+          <p:cNvPr id="44" name="Oval 43"/>
           <p:cNvSpPr/>
           <p:nvPr/>
         </p:nvSpPr>
@@ -10375,7 +10599,7 @@
       </p:sp>
       <p:sp>
         <p:nvSpPr>
-          <p:cNvPr id="43" name="TextBox 42"/>
+          <p:cNvPr id="45" name="TextBox 44"/>
           <p:cNvSpPr txBox="1"/>
           <p:nvPr/>
         </p:nvSpPr>
@@ -10410,7 +10634,7 @@
       </p:sp>
       <p:sp>
         <p:nvSpPr>
-          <p:cNvPr id="44" name="TextBox 43"/>
+          <p:cNvPr id="46" name="TextBox 45"/>
           <p:cNvSpPr txBox="1"/>
           <p:nvPr/>
         </p:nvSpPr>
@@ -10454,7 +10678,7 @@
       </p:sp>
       <p:sp>
         <p:nvSpPr>
-          <p:cNvPr id="45" name="Oval 44"/>
+          <p:cNvPr id="47" name="Oval 46"/>
           <p:cNvSpPr/>
           <p:nvPr/>
         </p:nvSpPr>
@@ -10498,7 +10722,7 @@
       </p:sp>
       <p:sp>
         <p:nvSpPr>
-          <p:cNvPr id="46" name="TextBox 45"/>
+          <p:cNvPr id="48" name="TextBox 47"/>
           <p:cNvSpPr txBox="1"/>
           <p:nvPr/>
         </p:nvSpPr>
@@ -10533,7 +10757,7 @@
       </p:sp>
       <p:sp>
         <p:nvSpPr>
-          <p:cNvPr id="47" name="TextBox 46"/>
+          <p:cNvPr id="49" name="TextBox 48"/>
           <p:cNvSpPr txBox="1"/>
           <p:nvPr/>
         </p:nvSpPr>
@@ -10577,7 +10801,7 @@
       </p:sp>
       <p:sp>
         <p:nvSpPr>
-          <p:cNvPr id="48" name="Rectangle 47"/>
+          <p:cNvPr id="50" name="Rectangle 49"/>
           <p:cNvSpPr/>
           <p:nvPr/>
         </p:nvSpPr>
@@ -10621,7 +10845,7 @@
       </p:sp>
       <p:sp>
         <p:nvSpPr>
-          <p:cNvPr id="49" name="TextBox 48"/>
+          <p:cNvPr id="51" name="TextBox 50"/>
           <p:cNvSpPr txBox="1"/>
           <p:nvPr/>
         </p:nvSpPr>
@@ -10656,7 +10880,7 @@
       </p:sp>
       <p:sp>
         <p:nvSpPr>
-          <p:cNvPr id="50" name="Oval 49"/>
+          <p:cNvPr id="52" name="Oval 51"/>
           <p:cNvSpPr/>
           <p:nvPr/>
         </p:nvSpPr>
@@ -10700,7 +10924,7 @@
       </p:sp>
       <p:sp>
         <p:nvSpPr>
-          <p:cNvPr id="51" name="TextBox 50"/>
+          <p:cNvPr id="53" name="TextBox 52"/>
           <p:cNvSpPr txBox="1"/>
           <p:nvPr/>
         </p:nvSpPr>
@@ -10735,7 +10959,7 @@
       </p:sp>
       <p:sp>
         <p:nvSpPr>
-          <p:cNvPr id="52" name="TextBox 51"/>
+          <p:cNvPr id="54" name="TextBox 53"/>
           <p:cNvSpPr txBox="1"/>
           <p:nvPr/>
         </p:nvSpPr>
@@ -10779,7 +11003,7 @@
       </p:sp>
       <p:sp>
         <p:nvSpPr>
-          <p:cNvPr id="53" name="Oval 52"/>
+          <p:cNvPr id="55" name="Oval 54"/>
           <p:cNvSpPr/>
           <p:nvPr/>
         </p:nvSpPr>
@@ -10823,7 +11047,7 @@
       </p:sp>
       <p:sp>
         <p:nvSpPr>
-          <p:cNvPr id="54" name="TextBox 53"/>
+          <p:cNvPr id="56" name="TextBox 55"/>
           <p:cNvSpPr txBox="1"/>
           <p:nvPr/>
         </p:nvSpPr>
@@ -10858,7 +11082,7 @@
       </p:sp>
       <p:sp>
         <p:nvSpPr>
-          <p:cNvPr id="55" name="TextBox 54"/>
+          <p:cNvPr id="57" name="TextBox 56"/>
           <p:cNvSpPr txBox="1"/>
           <p:nvPr/>
         </p:nvSpPr>
@@ -10902,7 +11126,7 @@
       </p:sp>
       <p:sp>
         <p:nvSpPr>
-          <p:cNvPr id="56" name="Oval 55"/>
+          <p:cNvPr id="58" name="Oval 57"/>
           <p:cNvSpPr/>
           <p:nvPr/>
         </p:nvSpPr>
@@ -10946,7 +11170,7 @@
       </p:sp>
       <p:sp>
         <p:nvSpPr>
-          <p:cNvPr id="57" name="TextBox 56"/>
+          <p:cNvPr id="59" name="TextBox 58"/>
           <p:cNvSpPr txBox="1"/>
           <p:nvPr/>
         </p:nvSpPr>
@@ -10981,7 +11205,7 @@
       </p:sp>
       <p:sp>
         <p:nvSpPr>
-          <p:cNvPr id="58" name="TextBox 57"/>
+          <p:cNvPr id="60" name="TextBox 59"/>
           <p:cNvSpPr txBox="1"/>
           <p:nvPr/>
         </p:nvSpPr>
@@ -11025,7 +11249,7 @@
       </p:sp>
       <p:sp>
         <p:nvSpPr>
-          <p:cNvPr id="59" name="Rectangle 58"/>
+          <p:cNvPr id="61" name="Rectangle 60"/>
           <p:cNvSpPr/>
           <p:nvPr/>
         </p:nvSpPr>
@@ -11069,7 +11293,7 @@
       </p:sp>
       <p:sp>
         <p:nvSpPr>
-          <p:cNvPr id="60" name="TextBox 59"/>
+          <p:cNvPr id="62" name="TextBox 61"/>
           <p:cNvSpPr txBox="1"/>
           <p:nvPr/>
         </p:nvSpPr>
@@ -11104,7 +11328,7 @@
       </p:sp>
       <p:sp>
         <p:nvSpPr>
-          <p:cNvPr id="61" name="Oval 60"/>
+          <p:cNvPr id="63" name="Oval 62"/>
           <p:cNvSpPr/>
           <p:nvPr/>
         </p:nvSpPr>
@@ -11148,7 +11372,7 @@
       </p:sp>
       <p:sp>
         <p:nvSpPr>
-          <p:cNvPr id="62" name="TextBox 61"/>
+          <p:cNvPr id="64" name="TextBox 63"/>
           <p:cNvSpPr txBox="1"/>
           <p:nvPr/>
         </p:nvSpPr>
@@ -11183,7 +11407,7 @@
       </p:sp>
       <p:sp>
         <p:nvSpPr>
-          <p:cNvPr id="63" name="TextBox 62"/>
+          <p:cNvPr id="65" name="TextBox 64"/>
           <p:cNvSpPr txBox="1"/>
           <p:nvPr/>
         </p:nvSpPr>
@@ -11227,7 +11451,7 @@
       </p:sp>
       <p:sp>
         <p:nvSpPr>
-          <p:cNvPr id="64" name="Oval 63"/>
+          <p:cNvPr id="66" name="Oval 65"/>
           <p:cNvSpPr/>
           <p:nvPr/>
         </p:nvSpPr>
@@ -11271,7 +11495,7 @@
       </p:sp>
       <p:sp>
         <p:nvSpPr>
-          <p:cNvPr id="65" name="TextBox 64"/>
+          <p:cNvPr id="67" name="TextBox 66"/>
           <p:cNvSpPr txBox="1"/>
           <p:nvPr/>
         </p:nvSpPr>
@@ -11306,7 +11530,7 @@
       </p:sp>
       <p:sp>
         <p:nvSpPr>
-          <p:cNvPr id="66" name="TextBox 65"/>
+          <p:cNvPr id="68" name="TextBox 67"/>
           <p:cNvSpPr txBox="1"/>
           <p:nvPr/>
         </p:nvSpPr>
@@ -11350,7 +11574,7 @@
       </p:sp>
       <p:sp>
         <p:nvSpPr>
-          <p:cNvPr id="67" name="Oval 66"/>
+          <p:cNvPr id="69" name="Oval 68"/>
           <p:cNvSpPr/>
           <p:nvPr/>
         </p:nvSpPr>
@@ -11394,7 +11618,7 @@
       </p:sp>
       <p:sp>
         <p:nvSpPr>
-          <p:cNvPr id="68" name="TextBox 67"/>
+          <p:cNvPr id="70" name="TextBox 69"/>
           <p:cNvSpPr txBox="1"/>
           <p:nvPr/>
         </p:nvSpPr>
@@ -11429,7 +11653,7 @@
       </p:sp>
       <p:sp>
         <p:nvSpPr>
-          <p:cNvPr id="69" name="TextBox 68"/>
+          <p:cNvPr id="71" name="TextBox 70"/>
           <p:cNvSpPr txBox="1"/>
           <p:nvPr/>
         </p:nvSpPr>
@@ -11473,7 +11697,7 @@
       </p:sp>
       <p:sp>
         <p:nvSpPr>
-          <p:cNvPr id="70" name="TextBox 69"/>
+          <p:cNvPr id="72" name="TextBox 71"/>
           <p:cNvSpPr txBox="1"/>
           <p:nvPr/>
         </p:nvSpPr>
@@ -11508,7 +11732,7 @@
       </p:sp>
       <p:cxnSp>
         <p:nvCxnSpPr>
-          <p:cNvPr id="71" name="Connector 70"/>
+          <p:cNvPr id="73" name="Connector 72"/>
           <p:cNvCxnSpPr/>
           <p:nvPr/>
         </p:nvCxnSpPr>
@@ -11543,7 +11767,7 @@
       </p:cxnSp>
       <p:sp>
         <p:nvSpPr>
-          <p:cNvPr id="72" name="Oval 71"/>
+          <p:cNvPr id="74" name="Oval 73"/>
           <p:cNvSpPr/>
           <p:nvPr/>
         </p:nvSpPr>
@@ -11587,7 +11811,7 @@
       </p:sp>
       <p:sp>
         <p:nvSpPr>
-          <p:cNvPr id="73" name="TextBox 72"/>
+          <p:cNvPr id="75" name="TextBox 74"/>
           <p:cNvSpPr txBox="1"/>
           <p:nvPr/>
         </p:nvSpPr>
@@ -11622,7 +11846,7 @@
       </p:sp>
       <p:sp>
         <p:nvSpPr>
-          <p:cNvPr id="74" name="TextBox 73"/>
+          <p:cNvPr id="76" name="TextBox 75"/>
           <p:cNvSpPr txBox="1"/>
           <p:nvPr/>
         </p:nvSpPr>
@@ -11657,7 +11881,7 @@
       </p:sp>
       <p:sp>
         <p:nvSpPr>
-          <p:cNvPr id="75" name="Oval 74"/>
+          <p:cNvPr id="77" name="Oval 76"/>
           <p:cNvSpPr/>
           <p:nvPr/>
         </p:nvSpPr>
@@ -11701,7 +11925,7 @@
       </p:sp>
       <p:sp>
         <p:nvSpPr>
-          <p:cNvPr id="76" name="TextBox 75"/>
+          <p:cNvPr id="78" name="TextBox 77"/>
           <p:cNvSpPr txBox="1"/>
           <p:nvPr/>
         </p:nvSpPr>
@@ -11736,7 +11960,7 @@
       </p:sp>
       <p:sp>
         <p:nvSpPr>
-          <p:cNvPr id="77" name="TextBox 76"/>
+          <p:cNvPr id="79" name="TextBox 78"/>
           <p:cNvSpPr txBox="1"/>
           <p:nvPr/>
         </p:nvSpPr>
@@ -11771,7 +11995,7 @@
       </p:sp>
       <p:sp>
         <p:nvSpPr>
-          <p:cNvPr id="78" name="Oval 77"/>
+          <p:cNvPr id="80" name="Oval 79"/>
           <p:cNvSpPr/>
           <p:nvPr/>
         </p:nvSpPr>
@@ -11815,7 +12039,7 @@
       </p:sp>
       <p:sp>
         <p:nvSpPr>
-          <p:cNvPr id="79" name="TextBox 78"/>
+          <p:cNvPr id="81" name="TextBox 80"/>
           <p:cNvSpPr txBox="1"/>
           <p:nvPr/>
         </p:nvSpPr>
@@ -11850,7 +12074,7 @@
       </p:sp>
       <p:sp>
         <p:nvSpPr>
-          <p:cNvPr id="80" name="TextBox 79"/>
+          <p:cNvPr id="82" name="TextBox 81"/>
           <p:cNvSpPr txBox="1"/>
           <p:nvPr/>
         </p:nvSpPr>

--- a/docs/AIForgeCrew-CTO-Summary.pptx
+++ b/docs/AIForgeCrew-CTO-Summary.pptx
@@ -9,7 +9,7 @@
     <p:sldId id="257" r:id="rId9"/>
     <p:sldId id="258" r:id="rId10"/>
   </p:sldIdLst>
-  <p:sldSz cx="12191695" cy="6858000" type="screen4x3"/>
+  <p:sldSz cx="12192000" cy="6858000"/>
   <p:notesSz cx="6858000" cy="9144000"/>
   <p:defaultTextStyle>
     <a:defPPr>

--- a/docs/AIForgeCrew-CTO-Summary.pptx
+++ b/docs/AIForgeCrew-CTO-Summary.pptx
@@ -351,7 +351,7 @@
             <a:pPr indent="0" algn="r">
               <a:buNone/>
             </a:pPr>
-            <a:fld id="{9631CA6F-3251-418E-B9B7-9C9747995108}" type="slidenum">
+            <a:fld id="{058F88DB-9D90-4E90-9F92-9728E9E3FF72}" type="slidenum">
               <a:rPr b="0" lang="en-US" sz="1400" spc="-1" strike="noStrike">
                 <a:solidFill>
                   <a:srgbClr val="000000"/>
@@ -394,7 +394,7 @@
       </p:grpSpPr>
       <p:sp>
         <p:nvSpPr>
-          <p:cNvPr id="321" name="PlaceHolder 1"/>
+          <p:cNvPr id="326" name="PlaceHolder 1"/>
           <p:cNvSpPr>
             <a:spLocks noGrp="1"/>
           </p:cNvSpPr>
@@ -417,7 +417,7 @@
       </p:sp>
       <p:sp>
         <p:nvSpPr>
-          <p:cNvPr id="322" name="PlaceHolder 2"/>
+          <p:cNvPr id="327" name="PlaceHolder 2"/>
           <p:cNvSpPr>
             <a:spLocks noGrp="1"/>
           </p:cNvSpPr>
@@ -493,7 +493,7 @@
                 </a:solidFill>
                 <a:latin typeface="Arial"/>
               </a:rPr>
-              <a:t>1. Standing still is now the expensive option. The teams we compete with are</a:t>
+              <a:t>1. AI lifts every engineer. Not a miracle and not a headcount argument — a</a:t>
             </a:r>
             <a:endParaRPr b="0" lang="en-US" sz="2000" spc="-1" strike="noStrike">
               <a:solidFill>
@@ -516,7 +516,7 @@
                 </a:solidFill>
                 <a:latin typeface="Arial"/>
               </a:rPr>
-              <a:t>shipping with AI in the loop, and our own engineers already know it — the</a:t>
+              <a:t>steady boost on the work we already do, which holds day after day and</a:t>
             </a:r>
             <a:endParaRPr b="0" lang="en-US" sz="2000" spc="-1" strike="noStrike">
               <a:solidFill>
@@ -539,7 +539,7 @@
                 </a:solidFill>
                 <a:latin typeface="Arial"/>
               </a:rPr>
-              <a:t>demand is not hypothetical, it is here and it is being met somewhere else.</a:t>
+              <a:t>compounds through a codebase. Choosing not to decide is still a decision, and</a:t>
             </a:r>
             <a:endParaRPr b="0" lang="en-US" sz="2000" spc="-1" strike="noStrike">
               <a:solidFill>
@@ -562,7 +562,7 @@
                 </a:solidFill>
                 <a:latin typeface="Arial"/>
               </a:rPr>
-              <a:t>Choosing not to decide is still a decision, and it is the one that costs the</a:t>
+              <a:t>it is the one that leaves that lift on the table.</a:t>
             </a:r>
             <a:endParaRPr b="0" lang="en-US" sz="2000" spc="-1" strike="noStrike">
               <a:solidFill>
@@ -578,6 +578,20 @@
               </a:lnSpc>
               <a:buNone/>
             </a:pPr>
+            <a:endParaRPr b="0" lang="en-US" sz="2000" spc="-1" strike="noStrike">
+              <a:solidFill>
+                <a:srgbClr val="000000"/>
+              </a:solidFill>
+              <a:latin typeface="Arial"/>
+            </a:endParaRPr>
+          </a:p>
+          <a:p>
+            <a:pPr marL="216000" indent="0">
+              <a:lnSpc>
+                <a:spcPct val="100000"/>
+              </a:lnSpc>
+              <a:buNone/>
+            </a:pPr>
             <a:r>
               <a:rPr b="0" lang="en-US" sz="2000" spc="-1" strike="noStrike">
                 <a:solidFill>
@@ -585,7 +599,7 @@
                 </a:solidFill>
                 <a:latin typeface="Arial"/>
               </a:rPr>
-              <a:t>most.</a:t>
+              <a:t>2. It is already in use, and not through us. The agents are open source and</a:t>
             </a:r>
             <a:endParaRPr b="0" lang="en-US" sz="2000" spc="-1" strike="noStrike">
               <a:solidFill>
@@ -601,6 +615,15 @@
               </a:lnSpc>
               <a:buNone/>
             </a:pPr>
+            <a:r>
+              <a:rPr b="0" lang="en-US" sz="2000" spc="-1" strike="noStrike">
+                <a:solidFill>
+                  <a:srgbClr val="000000"/>
+                </a:solidFill>
+                <a:latin typeface="Arial"/>
+              </a:rPr>
+              <a:t>free: OpenCode, Kilo Code, Cline, Aider, and whatever ships next month.</a:t>
+            </a:r>
             <a:endParaRPr b="0" lang="en-US" sz="2000" spc="-1" strike="noStrike">
               <a:solidFill>
                 <a:srgbClr val="000000"/>
@@ -622,7 +645,7 @@
                 </a:solidFill>
                 <a:latin typeface="Arial"/>
               </a:rPr>
-              <a:t>2. It is already in the building, just not through us. People are using</a:t>
+              <a:t>Anyone can install one in a minute, point it at any model endpoint, and work</a:t>
             </a:r>
             <a:endParaRPr b="0" lang="en-US" sz="2000" spc="-1" strike="noStrike">
               <a:solidFill>
@@ -645,7 +668,7 @@
                 </a:solidFill>
                 <a:latin typeface="Arial"/>
               </a:rPr>
-              <a:t>personal accounts, browser extensions and free tiers, and pasting whatever</a:t>
+              <a:t>on our repositories with it. We cannot say which are in use, what left with</a:t>
             </a:r>
             <a:endParaRPr b="0" lang="en-US" sz="2000" spc="-1" strike="noStrike">
               <a:solidFill>
@@ -668,7 +691,7 @@
                 </a:solidFill>
                 <a:latin typeface="Arial"/>
               </a:rPr>
-              <a:t>they are working on into them. We cannot say which tools are in use, what left</a:t>
+              <a:t>them, or what a customer would be told if they asked. There is no approved</a:t>
             </a:r>
             <a:endParaRPr b="0" lang="en-US" sz="2000" spc="-1" strike="noStrike">
               <a:solidFill>
@@ -691,7 +714,7 @@
                 </a:solidFill>
                 <a:latin typeface="Arial"/>
               </a:rPr>
-              <a:t>with them, what it costs, or what a customer would be told if they asked.</a:t>
+              <a:t>list to enforce and no log to produce, and it gets harder to unwind every</a:t>
             </a:r>
             <a:endParaRPr b="0" lang="en-US" sz="2000" spc="-1" strike="noStrike">
               <a:solidFill>
@@ -714,7 +737,7 @@
                 </a:solidFill>
                 <a:latin typeface="Arial"/>
               </a:rPr>
-              <a:t>There is no allow-list to enforce and no log to produce. This is the control</a:t>
+              <a:t>month we leave it alone.</a:t>
             </a:r>
             <a:endParaRPr b="0" lang="en-US" sz="2000" spc="-1" strike="noStrike">
               <a:solidFill>
@@ -730,6 +753,20 @@
               </a:lnSpc>
               <a:buNone/>
             </a:pPr>
+            <a:endParaRPr b="0" lang="en-US" sz="2000" spc="-1" strike="noStrike">
+              <a:solidFill>
+                <a:srgbClr val="000000"/>
+              </a:solidFill>
+              <a:latin typeface="Arial"/>
+            </a:endParaRPr>
+          </a:p>
+          <a:p>
+            <a:pPr marL="216000" indent="0">
+              <a:lnSpc>
+                <a:spcPct val="100000"/>
+              </a:lnSpc>
+              <a:buNone/>
+            </a:pPr>
             <a:r>
               <a:rPr b="0" lang="en-US" sz="2000" spc="-1" strike="noStrike">
                 <a:solidFill>
@@ -737,7 +774,7 @@
                 </a:solidFill>
                 <a:latin typeface="Arial"/>
               </a:rPr>
-              <a:t>problem, and it gets worse every month we leave it alone.</a:t>
+              <a:t>3. We want that lift for everyone, on our terms. Today whoever went looking</a:t>
             </a:r>
             <a:endParaRPr b="0" lang="en-US" sz="2000" spc="-1" strike="noStrike">
               <a:solidFill>
@@ -753,6 +790,15 @@
               </a:lnSpc>
               <a:buNone/>
             </a:pPr>
+            <a:r>
+              <a:rPr b="0" lang="en-US" sz="2000" spc="-1" strike="noStrike">
+                <a:solidFill>
+                  <a:srgbClr val="000000"/>
+                </a:solidFill>
+                <a:latin typeface="Arial"/>
+              </a:rPr>
+              <a:t>got faster and nobody else did; none of it is standard, shared or measurable.</a:t>
+            </a:r>
             <a:endParaRPr b="0" lang="en-US" sz="2000" spc="-1" strike="noStrike">
               <a:solidFill>
                 <a:srgbClr val="000000"/>
@@ -774,7 +820,7 @@
                 </a:solidFill>
                 <a:latin typeface="Arial"/>
               </a:rPr>
-              <a:t>3. The gain is real but uneven. Whoever found a tool got faster; nobody else</a:t>
+              <a:t>One platform gives every engineer the same tooling and gives us numbers we</a:t>
             </a:r>
             <a:endParaRPr b="0" lang="en-US" sz="2000" spc="-1" strike="noStrike">
               <a:solidFill>
@@ -797,7 +843,7 @@
                 </a:solidFill>
                 <a:latin typeface="Arial"/>
               </a:rPr>
-              <a:t>did. None of that speed is shared, repeatable or measurable, so we cannot</a:t>
+              <a:t>can show.</a:t>
             </a:r>
             <a:endParaRPr b="0" lang="en-US" sz="2000" spc="-1" strike="noStrike">
               <a:solidFill>
@@ -813,6 +859,20 @@
               </a:lnSpc>
               <a:buNone/>
             </a:pPr>
+            <a:endParaRPr b="0" lang="en-US" sz="2000" spc="-1" strike="noStrike">
+              <a:solidFill>
+                <a:srgbClr val="000000"/>
+              </a:solidFill>
+              <a:latin typeface="Arial"/>
+            </a:endParaRPr>
+          </a:p>
+          <a:p>
+            <a:pPr marL="216000" indent="0">
+              <a:lnSpc>
+                <a:spcPct val="100000"/>
+              </a:lnSpc>
+              <a:buNone/>
+            </a:pPr>
             <a:r>
               <a:rPr b="0" lang="en-US" sz="2000" spc="-1" strike="noStrike">
                 <a:solidFill>
@@ -820,7 +880,7 @@
                 </a:solidFill>
                 <a:latin typeface="Arial"/>
               </a:rPr>
-              <a:t>plan around it or prove it.</a:t>
+              <a:t>So: the same engineers and the same work, inside one boundary. Our own model</a:t>
             </a:r>
             <a:endParaRPr b="0" lang="en-US" sz="2000" spc="-1" strike="noStrike">
               <a:solidFill>
@@ -836,6 +896,15 @@
               </a:lnSpc>
               <a:buNone/>
             </a:pPr>
+            <a:r>
+              <a:rPr b="0" lang="en-US" sz="2000" spc="-1" strike="noStrike">
+                <a:solidFill>
+                  <a:srgbClr val="000000"/>
+                </a:solidFill>
+                <a:latin typeface="Arial"/>
+              </a:rPr>
+              <a:t>on our own hardware, so code and customer data never leave. One gate, so</a:t>
+            </a:r>
             <a:endParaRPr b="0" lang="en-US" sz="2000" spc="-1" strike="noStrike">
               <a:solidFill>
                 <a:srgbClr val="000000"/>
@@ -857,7 +926,7 @@
                 </a:solidFill>
                 <a:latin typeface="Arial"/>
               </a:rPr>
-              <a:t>The answer: one platform we run ourselves. Our own model on our own hardware,</a:t>
+              <a:t>there is a log and an approved list. Tools scoped to the role, with approval</a:t>
             </a:r>
             <a:endParaRPr b="0" lang="en-US" sz="2000" spc="-1" strike="noStrike">
               <a:solidFill>
@@ -880,7 +949,7 @@
                 </a:solidFill>
                 <a:latin typeface="Arial"/>
               </a:rPr>
-              <a:t>so the code and the customer data never leave. Every call through one gate, so</a:t>
+              <a:t>before anything reaches outside.</a:t>
             </a:r>
             <a:endParaRPr b="0" lang="en-US" sz="2000" spc="-1" strike="noStrike">
               <a:solidFill>
@@ -896,6 +965,20 @@
               </a:lnSpc>
               <a:buNone/>
             </a:pPr>
+            <a:endParaRPr b="0" lang="en-US" sz="2000" spc="-1" strike="noStrike">
+              <a:solidFill>
+                <a:srgbClr val="000000"/>
+              </a:solidFill>
+              <a:latin typeface="Arial"/>
+            </a:endParaRPr>
+          </a:p>
+          <a:p>
+            <a:pPr marL="216000" indent="0">
+              <a:lnSpc>
+                <a:spcPct val="100000"/>
+              </a:lnSpc>
+              <a:buNone/>
+            </a:pPr>
             <a:r>
               <a:rPr b="0" lang="en-US" sz="2000" spc="-1" strike="noStrike">
                 <a:solidFill>
@@ -903,7 +986,7 @@
                 </a:solidFill>
                 <a:latin typeface="Arial"/>
               </a:rPr>
-              <a:t>there is a log and an allow-list. Tools scoped to a role, with approval before</a:t>
+              <a:t>The following pages describe what that platform is, how it is contained, and</a:t>
             </a:r>
             <a:endParaRPr b="0" lang="en-US" sz="2000" spc="-1" strike="noStrike">
               <a:solidFill>
@@ -926,7 +1009,7 @@
                 </a:solidFill>
                 <a:latin typeface="Arial"/>
               </a:rPr>
-              <a:t>anything reaches outside. And the same capability for every engineer, not just</a:t>
+              <a:t>what it measurably does today.</a:t>
             </a:r>
             <a:endParaRPr b="0" lang="en-US" sz="2000" spc="-1" strike="noStrike">
               <a:solidFill>
@@ -935,94 +1018,11 @@
               <a:latin typeface="Arial"/>
             </a:endParaRPr>
           </a:p>
-          <a:p>
-            <a:pPr marL="216000" indent="0">
-              <a:lnSpc>
-                <a:spcPct val="100000"/>
-              </a:lnSpc>
-              <a:buNone/>
-            </a:pPr>
-            <a:r>
-              <a:rPr b="0" lang="en-US" sz="2000" spc="-1" strike="noStrike">
-                <a:solidFill>
-                  <a:srgbClr val="000000"/>
-                </a:solidFill>
-                <a:latin typeface="Arial"/>
-              </a:rPr>
-              <a:t>the ones who went looking.</a:t>
-            </a:r>
-            <a:endParaRPr b="0" lang="en-US" sz="2000" spc="-1" strike="noStrike">
-              <a:solidFill>
-                <a:srgbClr val="000000"/>
-              </a:solidFill>
-              <a:latin typeface="Arial"/>
-            </a:endParaRPr>
-          </a:p>
-          <a:p>
-            <a:pPr marL="216000" indent="0">
-              <a:lnSpc>
-                <a:spcPct val="100000"/>
-              </a:lnSpc>
-              <a:buNone/>
-            </a:pPr>
-            <a:endParaRPr b="0" lang="en-US" sz="2000" spc="-1" strike="noStrike">
-              <a:solidFill>
-                <a:srgbClr val="000000"/>
-              </a:solidFill>
-              <a:latin typeface="Arial"/>
-            </a:endParaRPr>
-          </a:p>
-          <a:p>
-            <a:pPr marL="216000" indent="0">
-              <a:lnSpc>
-                <a:spcPct val="100000"/>
-              </a:lnSpc>
-              <a:buNone/>
-            </a:pPr>
-            <a:r>
-              <a:rPr b="0" lang="en-US" sz="2000" spc="-1" strike="noStrike">
-                <a:solidFill>
-                  <a:srgbClr val="000000"/>
-                </a:solidFill>
-                <a:latin typeface="Arial"/>
-              </a:rPr>
-              <a:t>The following pages describe what that platform is, how it is contained, and</a:t>
-            </a:r>
-            <a:endParaRPr b="0" lang="en-US" sz="2000" spc="-1" strike="noStrike">
-              <a:solidFill>
-                <a:srgbClr val="000000"/>
-              </a:solidFill>
-              <a:latin typeface="Arial"/>
-            </a:endParaRPr>
-          </a:p>
-          <a:p>
-            <a:pPr marL="216000" indent="0">
-              <a:lnSpc>
-                <a:spcPct val="100000"/>
-              </a:lnSpc>
-              <a:buNone/>
-            </a:pPr>
-            <a:r>
-              <a:rPr b="0" lang="en-US" sz="2000" spc="-1" strike="noStrike">
-                <a:solidFill>
-                  <a:srgbClr val="000000"/>
-                </a:solidFill>
-                <a:latin typeface="Arial"/>
-              </a:rPr>
-              <a:t>what it measurably does today.</a:t>
-            </a:r>
-            <a:endParaRPr b="0" lang="en-US" sz="2000" spc="-1" strike="noStrike">
-              <a:solidFill>
-                <a:srgbClr val="000000"/>
-              </a:solidFill>
-              <a:latin typeface="Arial"/>
-            </a:endParaRPr>
-          </a:p>
-        </p:txBody>
-      </p:sp>
-      <p:sp>
-        <p:nvSpPr>
-          <p:cNvPr id="323" name="PlaceHolder 3"/>
+        </p:txBody>
+      </p:sp>
+      <p:sp>
+        <p:nvSpPr>
+          <p:cNvPr id="328" name="PlaceHolder 3"/>
           <p:cNvSpPr>
             <a:spLocks noGrp="1"/>
           </p:cNvSpPr>
@@ -1068,7 +1068,7 @@
               </a:lnSpc>
               <a:buNone/>
             </a:pPr>
-            <a:fld id="{B215774A-B794-4E49-AE85-90550602BE4D}" type="slidenum">
+            <a:fld id="{BCE5BB68-41E3-4CE9-B462-E20FC3EBA7AB}" type="slidenum">
               <a:rPr b="0" lang="en-US" sz="1200" spc="-1" strike="noStrike">
                 <a:solidFill>
                   <a:srgbClr val="000000"/>
@@ -1110,7 +1110,7 @@
       </p:grpSpPr>
       <p:sp>
         <p:nvSpPr>
-          <p:cNvPr id="324" name="PlaceHolder 1"/>
+          <p:cNvPr id="329" name="PlaceHolder 1"/>
           <p:cNvSpPr>
             <a:spLocks noGrp="1"/>
           </p:cNvSpPr>
@@ -1133,7 +1133,7 @@
       </p:sp>
       <p:sp>
         <p:nvSpPr>
-          <p:cNvPr id="325" name="PlaceHolder 2"/>
+          <p:cNvPr id="330" name="PlaceHolder 2"/>
           <p:cNvSpPr>
             <a:spLocks noGrp="1"/>
           </p:cNvSpPr>
@@ -1802,7 +1802,7 @@
       </p:sp>
       <p:sp>
         <p:nvSpPr>
-          <p:cNvPr id="326" name="PlaceHolder 3"/>
+          <p:cNvPr id="331" name="PlaceHolder 3"/>
           <p:cNvSpPr>
             <a:spLocks noGrp="1"/>
           </p:cNvSpPr>
@@ -1848,7 +1848,7 @@
               </a:lnSpc>
               <a:buNone/>
             </a:pPr>
-            <a:fld id="{DCBCE99F-1349-489B-9578-7E779BEF505C}" type="slidenum">
+            <a:fld id="{E85300FE-7531-4688-859B-29C9B2DEC4C9}" type="slidenum">
               <a:rPr b="0" lang="en-US" sz="1200" spc="-1" strike="noStrike">
                 <a:solidFill>
                   <a:srgbClr val="000000"/>
@@ -1890,7 +1890,7 @@
       </p:grpSpPr>
       <p:sp>
         <p:nvSpPr>
-          <p:cNvPr id="327" name="PlaceHolder 1"/>
+          <p:cNvPr id="332" name="PlaceHolder 1"/>
           <p:cNvSpPr>
             <a:spLocks noGrp="1"/>
           </p:cNvSpPr>
@@ -1913,7 +1913,7 @@
       </p:sp>
       <p:sp>
         <p:nvSpPr>
-          <p:cNvPr id="328" name="PlaceHolder 2"/>
+          <p:cNvPr id="333" name="PlaceHolder 2"/>
           <p:cNvSpPr>
             <a:spLocks noGrp="1"/>
           </p:cNvSpPr>
@@ -2748,7 +2748,7 @@
       </p:sp>
       <p:sp>
         <p:nvSpPr>
-          <p:cNvPr id="329" name="PlaceHolder 3"/>
+          <p:cNvPr id="334" name="PlaceHolder 3"/>
           <p:cNvSpPr>
             <a:spLocks noGrp="1"/>
           </p:cNvSpPr>
@@ -2794,7 +2794,7 @@
               </a:lnSpc>
               <a:buNone/>
             </a:pPr>
-            <a:fld id="{6C79820E-83C8-4DE1-8C1A-FC09CF489D9C}" type="slidenum">
+            <a:fld id="{8FAD6600-754E-4CA1-89B6-545942631033}" type="slidenum">
               <a:rPr b="0" lang="en-US" sz="1200" spc="-1" strike="noStrike">
                 <a:solidFill>
                   <a:srgbClr val="000000"/>
@@ -2836,7 +2836,7 @@
       </p:grpSpPr>
       <p:sp>
         <p:nvSpPr>
-          <p:cNvPr id="330" name="PlaceHolder 1"/>
+          <p:cNvPr id="335" name="PlaceHolder 1"/>
           <p:cNvSpPr>
             <a:spLocks noGrp="1"/>
           </p:cNvSpPr>
@@ -2859,7 +2859,7 @@
       </p:sp>
       <p:sp>
         <p:nvSpPr>
-          <p:cNvPr id="331" name="PlaceHolder 2"/>
+          <p:cNvPr id="336" name="PlaceHolder 2"/>
           <p:cNvSpPr>
             <a:spLocks noGrp="1"/>
           </p:cNvSpPr>
@@ -3620,7 +3620,7 @@
       </p:sp>
       <p:sp>
         <p:nvSpPr>
-          <p:cNvPr id="332" name="PlaceHolder 3"/>
+          <p:cNvPr id="337" name="PlaceHolder 3"/>
           <p:cNvSpPr>
             <a:spLocks noGrp="1"/>
           </p:cNvSpPr>
@@ -3666,7 +3666,7 @@
               </a:lnSpc>
               <a:buNone/>
             </a:pPr>
-            <a:fld id="{F98134C9-5C98-428F-A70E-99894BD3561A}" type="slidenum">
+            <a:fld id="{1EE90826-51E9-450A-A0C7-F76E25F9B53D}" type="slidenum">
               <a:rPr b="0" lang="en-US" sz="1200" spc="-1" strike="noStrike">
                 <a:solidFill>
                   <a:srgbClr val="000000"/>
@@ -3820,7 +3820,7 @@
         <p:txBody>
           <a:bodyPr/>
           <a:p>
-            <a:fld id="{ECEADF77-C42D-4B96-82F2-1346C2A90F3A}" type="slidenum">
+            <a:fld id="{B17CD575-BF47-4472-97ED-4CAB4F011A74}" type="slidenum">
               <a:t>&lt;#&gt;</a:t>
             </a:fld>
           </a:p>
@@ -3903,7 +3903,7 @@
         <p:txBody>
           <a:bodyPr/>
           <a:p>
-            <a:fld id="{98D69096-F45E-469F-A663-FA01128A5A80}" type="slidenum">
+            <a:fld id="{5AD99EAA-EB90-4029-8046-72F1A029CDC4}" type="slidenum">
               <a:t>&lt;#&gt;</a:t>
             </a:fld>
           </a:p>
@@ -3986,7 +3986,7 @@
         <p:txBody>
           <a:bodyPr/>
           <a:p>
-            <a:fld id="{98C39C22-D482-4B34-8FF6-BB4C92630128}" type="slidenum">
+            <a:fld id="{B7344721-3AD5-4419-A0CA-39BDCFD04001}" type="slidenum">
               <a:t>&lt;#&gt;</a:t>
             </a:fld>
           </a:p>
@@ -4069,7 +4069,7 @@
         <p:txBody>
           <a:bodyPr/>
           <a:p>
-            <a:fld id="{D9BFE926-704B-44D5-BA56-726A3DDE6421}" type="slidenum">
+            <a:fld id="{F4127D12-6DC5-4BCF-B7CF-AC19B32BDF2C}" type="slidenum">
               <a:t>&lt;#&gt;</a:t>
             </a:fld>
           </a:p>
@@ -4152,7 +4152,7 @@
         <p:txBody>
           <a:bodyPr/>
           <a:p>
-            <a:fld id="{7DE2ECAB-0B59-4721-9BE7-E635FDF3CF0D}" type="slidenum">
+            <a:fld id="{215AF82D-5120-497B-AE9D-E870FDFE1190}" type="slidenum">
               <a:t>&lt;#&gt;</a:t>
             </a:fld>
           </a:p>
@@ -4318,7 +4318,7 @@
         <p:txBody>
           <a:bodyPr/>
           <a:p>
-            <a:fld id="{2987C6CE-7643-48A1-9DC3-89DDA187E72C}" type="slidenum">
+            <a:fld id="{E0BAFD86-897B-4408-966A-E174784841DE}" type="slidenum">
               <a:t>&lt;#&gt;</a:t>
             </a:fld>
           </a:p>
@@ -4401,7 +4401,7 @@
         <p:txBody>
           <a:bodyPr/>
           <a:p>
-            <a:fld id="{0BDFAAED-E246-4DB6-9C46-1B3E1F55A2FE}" type="slidenum">
+            <a:fld id="{AF3EEC93-0D96-466D-B90C-5D40DEC82B02}" type="slidenum">
               <a:t>&lt;#&gt;</a:t>
             </a:fld>
           </a:p>
@@ -4610,7 +4610,7 @@
         <p:txBody>
           <a:bodyPr/>
           <a:p>
-            <a:fld id="{A373002A-CF30-496B-9138-C16E081909F1}" type="slidenum">
+            <a:fld id="{1501C273-72F1-4B88-8AC7-93B6518C7A41}" type="slidenum">
               <a:t>&lt;#&gt;</a:t>
             </a:fld>
           </a:p>
@@ -4693,7 +4693,7 @@
         <p:txBody>
           <a:bodyPr/>
           <a:p>
-            <a:fld id="{FFE0E0DD-A39D-4440-8324-5ADC82479A7A}" type="slidenum">
+            <a:fld id="{30C8B56E-F05A-48B4-A9E4-780CA1ED03ED}" type="slidenum">
               <a:t>&lt;#&gt;</a:t>
             </a:fld>
           </a:p>
@@ -4816,7 +4816,7 @@
         <p:txBody>
           <a:bodyPr/>
           <a:p>
-            <a:fld id="{F8914DA0-8DEB-4BC5-AAD3-D4C48DA24BC3}" type="slidenum">
+            <a:fld id="{6CA20925-F75D-4B5C-8792-402EF884F9DC}" type="slidenum">
               <a:t>&lt;#&gt;</a:t>
             </a:fld>
           </a:p>
@@ -4899,7 +4899,7 @@
         <p:txBody>
           <a:bodyPr/>
           <a:p>
-            <a:fld id="{9B2045C0-92AC-4D1F-B455-EA6F524A7AF4}" type="slidenum">
+            <a:fld id="{004B2F05-6ED6-4DB9-92E9-55B33CBFE215}" type="slidenum">
               <a:t>&lt;#&gt;</a:t>
             </a:fld>
           </a:p>
@@ -5187,7 +5187,7 @@
               </a:lnSpc>
               <a:buNone/>
             </a:pPr>
-            <a:fld id="{B9F23F62-C6A9-4B46-9654-9AE6E8964DFC}" type="slidenum">
+            <a:fld id="{8E32FAFE-4FA8-4D6C-BA3F-408A9023F69A}" type="slidenum">
               <a:rPr b="0" lang="en-US" sz="1200" spc="-1" strike="noStrike">
                 <a:solidFill>
                   <a:schemeClr val="dk1">
@@ -5709,7 +5709,7 @@
               </a:lnSpc>
               <a:buNone/>
             </a:pPr>
-            <a:fld id="{27EB961B-D9B0-4CAE-A200-79F5BE95A730}" type="slidenum">
+            <a:fld id="{2A856E77-B310-495E-8C8A-580704C7102A}" type="slidenum">
               <a:rPr b="0" lang="en-US" sz="1200" spc="-1" strike="noStrike">
                 <a:solidFill>
                   <a:schemeClr val="dk1">
@@ -6277,7 +6277,7 @@
               </a:lnSpc>
               <a:buNone/>
             </a:pPr>
-            <a:fld id="{C0C100B3-91ED-4934-8C38-DCDC10FBD990}" type="slidenum">
+            <a:fld id="{CF607BED-497F-47AB-8F81-56451F6B973D}" type="slidenum">
               <a:rPr b="0" lang="en-US" sz="1200" spc="-1" strike="noStrike">
                 <a:solidFill>
                   <a:schemeClr val="dk1">
@@ -6741,7 +6741,7 @@
               </a:lnSpc>
               <a:buNone/>
             </a:pPr>
-            <a:fld id="{900D0FCE-4740-4C81-A842-A459DFFF0552}" type="slidenum">
+            <a:fld id="{364FE37C-5F7D-4849-8CC1-265857FFB7A3}" type="slidenum">
               <a:rPr b="0" lang="en-US" sz="1200" spc="-1" strike="noStrike">
                 <a:solidFill>
                   <a:schemeClr val="dk1">
@@ -7205,7 +7205,7 @@
               </a:lnSpc>
               <a:buNone/>
             </a:pPr>
-            <a:fld id="{D3BD5481-9163-42A3-BCF1-02B987CB2D30}" type="slidenum">
+            <a:fld id="{DE7CC232-7A26-4E19-9323-45B2411F604F}" type="slidenum">
               <a:rPr b="0" lang="en-US" sz="1200" spc="-1" strike="noStrike">
                 <a:solidFill>
                   <a:schemeClr val="dk1">
@@ -7669,7 +7669,7 @@
               </a:lnSpc>
               <a:buNone/>
             </a:pPr>
-            <a:fld id="{13F493EA-FC47-40F7-A7A2-917C0E0213F3}" type="slidenum">
+            <a:fld id="{88E6DB3F-4DE4-4966-9890-8A941C0B84FB}" type="slidenum">
               <a:rPr b="0" lang="en-US" sz="1200" spc="-1" strike="noStrike">
                 <a:solidFill>
                   <a:schemeClr val="dk1">
@@ -8014,7 +8014,7 @@
               </a:lnSpc>
               <a:buNone/>
             </a:pPr>
-            <a:fld id="{311DE8F6-8927-4AD6-B79A-7E7E07E39D9B}" type="slidenum">
+            <a:fld id="{0A1A6F49-8461-4570-B34E-E7D2078E3F99}" type="slidenum">
               <a:rPr b="0" lang="en-US" sz="1200" spc="-1" strike="noStrike">
                 <a:solidFill>
                   <a:schemeClr val="dk1">
@@ -8657,7 +8657,7 @@
               </a:lnSpc>
               <a:buNone/>
             </a:pPr>
-            <a:fld id="{5F9F5CB2-B77A-4074-A924-CD566C3A645F}" type="slidenum">
+            <a:fld id="{6041102C-2B7E-414F-B5F1-E5954D61FAB9}" type="slidenum">
               <a:rPr b="0" lang="en-US" sz="1200" spc="-1" strike="noStrike">
                 <a:solidFill>
                   <a:schemeClr val="dk1">
@@ -9416,7 +9416,7 @@
               </a:lnSpc>
               <a:buNone/>
             </a:pPr>
-            <a:fld id="{3D191E6F-7641-4F92-A801-03854967B422}" type="slidenum">
+            <a:fld id="{7F4970AB-3FB7-40C0-98B9-BFEA8226532A}" type="slidenum">
               <a:rPr b="0" lang="en-US" sz="1200" spc="-1" strike="noStrike">
                 <a:solidFill>
                   <a:schemeClr val="dk1">
@@ -9701,7 +9701,7 @@
               </a:lnSpc>
               <a:buNone/>
             </a:pPr>
-            <a:fld id="{41D692A5-4A0D-4F7D-AF9F-A0A1C37CBA0D}" type="slidenum">
+            <a:fld id="{D026328D-957E-45C8-8400-613FFC8D0F56}" type="slidenum">
               <a:rPr b="0" lang="en-US" sz="1200" spc="-1" strike="noStrike">
                 <a:solidFill>
                   <a:schemeClr val="dk1">
@@ -9934,7 +9934,7 @@
               </a:lnSpc>
               <a:buNone/>
             </a:pPr>
-            <a:fld id="{F007BB33-108D-488B-B217-51255FF1238B}" type="slidenum">
+            <a:fld id="{34384E98-A5DD-4377-839E-228EF81B778F}" type="slidenum">
               <a:rPr b="0" lang="en-US" sz="1200" spc="-1" strike="noStrike">
                 <a:solidFill>
                   <a:schemeClr val="dk1">
@@ -10585,7 +10585,7 @@
                 </a:solidFill>
                 <a:latin typeface="Segoe UI"/>
               </a:rPr>
-              <a:t>The question is not whether the company uses AI. It already does — through tools nobody approved, logged or paid for.</a:t>
+              <a:t>AI is already in the building — installed by whoever wanted it, approved by nobody. We want the lift, on our terms.</a:t>
             </a:r>
             <a:endParaRPr b="0" lang="en-US" sz="1150" spc="-1" strike="noStrike">
               <a:solidFill>
@@ -10651,26 +10651,132 @@
       </p:sp>
       <p:sp>
         <p:nvSpPr>
-          <p:cNvPr id="80" name="Rounded Rectangle 8"/>
+          <p:cNvPr id="80" name="TextBox 8"/>
           <p:cNvSpPr/>
           <p:nvPr/>
         </p:nvSpPr>
         <p:spPr>
           <a:xfrm>
-            <a:off x="567000" y="1847160"/>
-            <a:ext cx="3556800" cy="2395440"/>
+            <a:off x="567000" y="1774080"/>
+            <a:ext cx="5074560" cy="137880"/>
+          </a:xfrm>
+          <a:prstGeom prst="rect">
+            <a:avLst/>
+          </a:prstGeom>
+          <a:noFill/>
+          <a:ln w="0">
+            <a:noFill/>
+          </a:ln>
+        </p:spPr>
+        <p:style>
+          <a:lnRef idx="0"/>
+          <a:fillRef idx="0"/>
+          <a:effectRef idx="0"/>
+          <a:fontRef idx="minor"/>
+        </p:style>
+        <p:txBody>
+          <a:bodyPr lIns="0" rIns="0" tIns="0" bIns="0" anchor="t">
+            <a:spAutoFit/>
+          </a:bodyPr>
+          <a:p>
+            <a:pPr defTabSz="457200">
+              <a:lnSpc>
+                <a:spcPct val="100000"/>
+              </a:lnSpc>
+            </a:pPr>
+            <a:r>
+              <a:rPr b="1" lang="en-US" sz="900" spc="-1" strike="noStrike">
+                <a:solidFill>
+                  <a:srgbClr val="c53030"/>
+                </a:solidFill>
+                <a:latin typeface="Segoe UI"/>
+              </a:rPr>
+              <a:t>TODAY — HAPPENING ALREADY, JUST NOT THROUGH US</a:t>
+            </a:r>
+            <a:endParaRPr b="0" lang="en-US" sz="900" spc="-1" strike="noStrike">
+              <a:solidFill>
+                <a:srgbClr val="000000"/>
+              </a:solidFill>
+              <a:latin typeface="Arial"/>
+            </a:endParaRPr>
+          </a:p>
+        </p:txBody>
+      </p:sp>
+      <p:sp>
+        <p:nvSpPr>
+          <p:cNvPr id="81" name="TextBox 9"/>
+          <p:cNvSpPr/>
+          <p:nvPr/>
+        </p:nvSpPr>
+        <p:spPr>
+          <a:xfrm>
+            <a:off x="6546960" y="1774080"/>
+            <a:ext cx="5074560" cy="137880"/>
+          </a:xfrm>
+          <a:prstGeom prst="rect">
+            <a:avLst/>
+          </a:prstGeom>
+          <a:noFill/>
+          <a:ln w="0">
+            <a:noFill/>
+          </a:ln>
+        </p:spPr>
+        <p:style>
+          <a:lnRef idx="0"/>
+          <a:fillRef idx="0"/>
+          <a:effectRef idx="0"/>
+          <a:fontRef idx="minor"/>
+        </p:style>
+        <p:txBody>
+          <a:bodyPr lIns="0" rIns="0" tIns="0" bIns="0" anchor="t">
+            <a:spAutoFit/>
+          </a:bodyPr>
+          <a:p>
+            <a:pPr defTabSz="457200">
+              <a:lnSpc>
+                <a:spcPct val="100000"/>
+              </a:lnSpc>
+            </a:pPr>
+            <a:r>
+              <a:rPr b="1" lang="en-US" sz="900" spc="-1" strike="noStrike">
+                <a:solidFill>
+                  <a:srgbClr val="2f7a57"/>
+                </a:solidFill>
+                <a:latin typeface="Segoe UI"/>
+              </a:rPr>
+              <a:t>WHAT WE ARE BUILDING</a:t>
+            </a:r>
+            <a:endParaRPr b="0" lang="en-US" sz="900" spc="-1" strike="noStrike">
+              <a:solidFill>
+                <a:srgbClr val="000000"/>
+              </a:solidFill>
+              <a:latin typeface="Arial"/>
+            </a:endParaRPr>
+          </a:p>
+        </p:txBody>
+      </p:sp>
+      <p:sp>
+        <p:nvSpPr>
+          <p:cNvPr id="82" name="Rounded Rectangle 10"/>
+          <p:cNvSpPr/>
+          <p:nvPr/>
+        </p:nvSpPr>
+        <p:spPr>
+          <a:xfrm>
+            <a:off x="567000" y="2048400"/>
+            <a:ext cx="5074560" cy="2742840"/>
           </a:xfrm>
           <a:prstGeom prst="roundRect">
             <a:avLst>
-              <a:gd name="adj" fmla="val 5000"/>
+              <a:gd name="adj" fmla="val 4000"/>
             </a:avLst>
           </a:prstGeom>
           <a:solidFill>
             <a:srgbClr val="ffffff"/>
           </a:solidFill>
-          <a:ln w="15875">
+          <a:ln w="12700">
             <a:solidFill>
-              <a:srgbClr val="b7791f"/>
+              <a:srgbClr val="e2e8f0"/>
             </a:solidFill>
             <a:round/>
           </a:ln>
@@ -10715,23 +10821,27 @@
       </p:sp>
       <p:sp>
         <p:nvSpPr>
-          <p:cNvPr id="81" name="Oval 9"/>
+          <p:cNvPr id="83" name="Rectangle 11"/>
           <p:cNvSpPr/>
           <p:nvPr/>
         </p:nvSpPr>
         <p:spPr>
           <a:xfrm>
-            <a:off x="768240" y="2030040"/>
-            <a:ext cx="273960" cy="273960"/>
-          </a:xfrm>
-          <a:prstGeom prst="ellipse">
+            <a:off x="804600" y="2468880"/>
+            <a:ext cx="2395440" cy="1791720"/>
+          </a:xfrm>
+          <a:prstGeom prst="rect">
             <a:avLst/>
           </a:prstGeom>
           <a:solidFill>
-            <a:srgbClr val="b7791f"/>
+            <a:srgbClr val="f6f8fb"/>
           </a:solidFill>
-          <a:ln>
-            <a:noFill/>
+          <a:ln w="15875">
+            <a:solidFill>
+              <a:srgbClr val="c53030"/>
+            </a:solidFill>
+            <a:prstDash val="sysDash"/>
+            <a:round/>
           </a:ln>
           <a:effectLst>
             <a:outerShdw blurRad="39960" dir="5400000" dist="23040" rotWithShape="0">
@@ -10774,14 +10884,14 @@
       </p:sp>
       <p:sp>
         <p:nvSpPr>
-          <p:cNvPr id="82" name="TextBox 10"/>
+          <p:cNvPr id="84" name="TextBox 12"/>
           <p:cNvSpPr/>
           <p:nvPr/>
         </p:nvSpPr>
         <p:spPr>
           <a:xfrm>
-            <a:off x="768240" y="2062080"/>
-            <a:ext cx="273960" cy="153000"/>
+            <a:off x="896040" y="2541960"/>
+            <a:ext cx="1828440" cy="122040"/>
           </a:xfrm>
           <a:prstGeom prst="rect">
             <a:avLst/>
@@ -10802,209 +10912,51 @@
             <a:spAutoFit/>
           </a:bodyPr>
           <a:p>
-            <a:pPr algn="ctr" defTabSz="457200">
-              <a:lnSpc>
-                <a:spcPct val="100000"/>
-              </a:lnSpc>
-            </a:pPr>
-            <a:r>
-              <a:rPr b="1" lang="en-US" sz="1000" spc="-1" strike="noStrike">
-                <a:solidFill>
-                  <a:srgbClr val="ffffff"/>
+            <a:pPr defTabSz="457200">
+              <a:lnSpc>
+                <a:spcPct val="100000"/>
+              </a:lnSpc>
+            </a:pPr>
+            <a:r>
+              <a:rPr b="1" lang="en-US" sz="800" spc="-1" strike="noStrike">
+                <a:solidFill>
+                  <a:srgbClr val="94a3b8"/>
                 </a:solidFill>
                 <a:latin typeface="Segoe UI"/>
               </a:rPr>
-              <a:t>1</a:t>
-            </a:r>
-            <a:endParaRPr b="0" lang="en-US" sz="1000" spc="-1" strike="noStrike">
-              <a:solidFill>
-                <a:srgbClr val="000000"/>
-              </a:solidFill>
-              <a:latin typeface="Arial"/>
-            </a:endParaRPr>
-          </a:p>
-        </p:txBody>
-      </p:sp>
-      <p:sp>
-        <p:nvSpPr>
-          <p:cNvPr id="83" name="TextBox 11"/>
+              <a:t>OUR NETWORK</a:t>
+            </a:r>
+            <a:endParaRPr b="0" lang="en-US" sz="800" spc="-1" strike="noStrike">
+              <a:solidFill>
+                <a:srgbClr val="000000"/>
+              </a:solidFill>
+              <a:latin typeface="Arial"/>
+            </a:endParaRPr>
+          </a:p>
+        </p:txBody>
+      </p:sp>
+      <p:sp>
+        <p:nvSpPr>
+          <p:cNvPr id="85" name="Oval 13"/>
           <p:cNvSpPr/>
           <p:nvPr/>
         </p:nvSpPr>
         <p:spPr>
           <a:xfrm>
-            <a:off x="1134000" y="2011680"/>
-            <a:ext cx="2788560" cy="175680"/>
-          </a:xfrm>
-          <a:prstGeom prst="rect">
-            <a:avLst/>
-          </a:prstGeom>
-          <a:noFill/>
-          <a:ln w="0">
-            <a:noFill/>
-          </a:ln>
-        </p:spPr>
-        <p:style>
-          <a:lnRef idx="0"/>
-          <a:fillRef idx="0"/>
-          <a:effectRef idx="0"/>
-          <a:fontRef idx="minor"/>
-        </p:style>
-        <p:txBody>
-          <a:bodyPr lIns="0" rIns="0" tIns="0" bIns="0" anchor="t">
-            <a:spAutoFit/>
-          </a:bodyPr>
-          <a:p>
-            <a:pPr defTabSz="457200">
-              <a:lnSpc>
-                <a:spcPct val="100000"/>
-              </a:lnSpc>
-            </a:pPr>
-            <a:r>
-              <a:rPr b="1" lang="en-US" sz="1150" spc="-1" strike="noStrike">
-                <a:solidFill>
-                  <a:srgbClr val="b7791f"/>
-                </a:solidFill>
-                <a:latin typeface="Segoe UI"/>
-              </a:rPr>
-              <a:t>Standing still is now the risk</a:t>
-            </a:r>
-            <a:endParaRPr b="0" lang="en-US" sz="1150" spc="-1" strike="noStrike">
-              <a:solidFill>
-                <a:srgbClr val="000000"/>
-              </a:solidFill>
-              <a:latin typeface="Arial"/>
-            </a:endParaRPr>
-          </a:p>
-        </p:txBody>
-      </p:sp>
-      <p:sp>
-        <p:nvSpPr>
-          <p:cNvPr id="84" name="TextBox 12"/>
-          <p:cNvSpPr/>
-          <p:nvPr/>
-        </p:nvSpPr>
-        <p:spPr>
-          <a:xfrm>
-            <a:off x="768240" y="2633400"/>
-            <a:ext cx="3154320" cy="122040"/>
-          </a:xfrm>
-          <a:prstGeom prst="rect">
-            <a:avLst/>
-          </a:prstGeom>
-          <a:noFill/>
-          <a:ln w="0">
-            <a:noFill/>
-          </a:ln>
-        </p:spPr>
-        <p:style>
-          <a:lnRef idx="0"/>
-          <a:fillRef idx="0"/>
-          <a:effectRef idx="0"/>
-          <a:fontRef idx="minor"/>
-        </p:style>
-        <p:txBody>
-          <a:bodyPr lIns="0" rIns="0" tIns="0" bIns="0" anchor="t">
-            <a:spAutoFit/>
-          </a:bodyPr>
-          <a:p>
-            <a:pPr defTabSz="457200">
-              <a:lnSpc>
-                <a:spcPct val="100000"/>
-              </a:lnSpc>
-            </a:pPr>
-            <a:r>
-              <a:rPr b="1" lang="en-US" sz="800" spc="-1" strike="noStrike">
-                <a:solidFill>
-                  <a:srgbClr val="94a3b8"/>
-                </a:solidFill>
-                <a:latin typeface="Segoe UI"/>
-              </a:rPr>
-              <a:t>HOW FAST WORK SHIPS</a:t>
-            </a:r>
-            <a:endParaRPr b="0" lang="en-US" sz="800" spc="-1" strike="noStrike">
-              <a:solidFill>
-                <a:srgbClr val="000000"/>
-              </a:solidFill>
-              <a:latin typeface="Arial"/>
-            </a:endParaRPr>
-          </a:p>
-        </p:txBody>
-      </p:sp>
-      <p:sp>
-        <p:nvSpPr>
-          <p:cNvPr id="85" name="TextBox 13"/>
-          <p:cNvSpPr/>
-          <p:nvPr/>
-        </p:nvSpPr>
-        <p:spPr>
-          <a:xfrm>
-            <a:off x="768240" y="2921400"/>
-            <a:ext cx="749520" cy="129960"/>
-          </a:xfrm>
-          <a:prstGeom prst="rect">
-            <a:avLst/>
-          </a:prstGeom>
-          <a:noFill/>
-          <a:ln w="0">
-            <a:noFill/>
-          </a:ln>
-        </p:spPr>
-        <p:style>
-          <a:lnRef idx="0"/>
-          <a:fillRef idx="0"/>
-          <a:effectRef idx="0"/>
-          <a:fontRef idx="minor"/>
-        </p:style>
-        <p:txBody>
-          <a:bodyPr lIns="0" rIns="0" tIns="0" bIns="0" anchor="t">
-            <a:spAutoFit/>
-          </a:bodyPr>
-          <a:p>
-            <a:pPr algn="r" defTabSz="457200">
-              <a:lnSpc>
-                <a:spcPct val="100000"/>
-              </a:lnSpc>
-            </a:pPr>
-            <a:r>
-              <a:rPr b="0" lang="en-US" sz="850" spc="-1" strike="noStrike">
-                <a:solidFill>
-                  <a:srgbClr val="64748b"/>
-                </a:solidFill>
-                <a:latin typeface="Segoe UI"/>
-              </a:rPr>
-              <a:t>with AI</a:t>
-            </a:r>
-            <a:endParaRPr b="0" lang="en-US" sz="850" spc="-1" strike="noStrike">
-              <a:solidFill>
-                <a:srgbClr val="000000"/>
-              </a:solidFill>
-              <a:latin typeface="Arial"/>
-            </a:endParaRPr>
-          </a:p>
-        </p:txBody>
-      </p:sp>
-      <p:sp>
-        <p:nvSpPr>
-          <p:cNvPr id="86" name="Rounded Rectangle 14"/>
-          <p:cNvSpPr/>
-          <p:nvPr/>
-        </p:nvSpPr>
-        <p:spPr>
-          <a:xfrm>
-            <a:off x="1554480" y="2907720"/>
-            <a:ext cx="2304000" cy="182520"/>
-          </a:xfrm>
-          <a:prstGeom prst="roundRect">
-            <a:avLst>
-              <a:gd name="adj" fmla="val 50000"/>
-            </a:avLst>
+            <a:off x="1334880" y="2834640"/>
+            <a:ext cx="200880" cy="200880"/>
+          </a:xfrm>
+          <a:prstGeom prst="ellipse">
+            <a:avLst/>
           </a:prstGeom>
           <a:solidFill>
-            <a:srgbClr val="f6f8fb"/>
+            <a:srgbClr val="ffffff"/>
           </a:solidFill>
-          <a:ln>
-            <a:noFill/>
+          <a:ln w="15875">
+            <a:solidFill>
+              <a:srgbClr val="94a3b8"/>
+            </a:solidFill>
+            <a:round/>
           </a:ln>
           <a:effectLst>
             <a:outerShdw blurRad="39960" dir="5400000" dist="23040" rotWithShape="0">
@@ -11047,25 +10999,29 @@
       </p:sp>
       <p:sp>
         <p:nvSpPr>
-          <p:cNvPr id="87" name="Rounded Rectangle 15"/>
+          <p:cNvPr id="86" name="Round Same Side Corner Rectangle 14"/>
           <p:cNvSpPr/>
           <p:nvPr/>
         </p:nvSpPr>
         <p:spPr>
           <a:xfrm>
-            <a:off x="1554480" y="2907720"/>
-            <a:ext cx="2165760" cy="182520"/>
-          </a:xfrm>
-          <a:prstGeom prst="roundRect">
+            <a:off x="951120" y="3017520"/>
+            <a:ext cx="968760" cy="310680"/>
+          </a:xfrm>
+          <a:prstGeom prst="round2SameRect">
             <a:avLst>
-              <a:gd name="adj" fmla="val 50000"/>
+              <a:gd name="adj1" fmla="val 30000"/>
+              <a:gd name="adj2" fmla="val 0"/>
             </a:avLst>
           </a:prstGeom>
           <a:solidFill>
-            <a:srgbClr val="b7791f"/>
+            <a:srgbClr val="ffffff"/>
           </a:solidFill>
-          <a:ln>
-            <a:noFill/>
+          <a:ln w="15875">
+            <a:solidFill>
+              <a:srgbClr val="94a3b8"/>
+            </a:solidFill>
+            <a:round/>
           </a:ln>
           <a:effectLst>
             <a:outerShdw blurRad="39960" dir="5400000" dist="23040" rotWithShape="0">
@@ -11088,7 +11044,7 @@
           <a:fontRef idx="minor"/>
         </p:style>
         <p:txBody>
-          <a:bodyPr lIns="90000" rIns="90000" tIns="45000" bIns="45000" anchor="ctr">
+          <a:bodyPr lIns="45720" rIns="45720" tIns="18360" bIns="18360" anchor="ctr">
             <a:noAutofit/>
           </a:bodyPr>
           <a:p>
@@ -11097,89 +11053,46 @@
                 <a:spcPct val="100000"/>
               </a:lnSpc>
             </a:pPr>
-            <a:endParaRPr b="0" lang="en-US" sz="1800" spc="-1" strike="noStrike">
-              <a:solidFill>
-                <a:schemeClr val="lt1"/>
-              </a:solidFill>
-              <a:latin typeface="Calibri"/>
-            </a:endParaRPr>
-          </a:p>
-        </p:txBody>
-      </p:sp>
-      <p:sp>
-        <p:nvSpPr>
-          <p:cNvPr id="88" name="TextBox 16"/>
+            <a:r>
+              <a:rPr b="1" lang="en-US" sz="800" spc="-1" strike="noStrike">
+                <a:solidFill>
+                  <a:srgbClr val="64748b"/>
+                </a:solidFill>
+                <a:latin typeface="Segoe UI"/>
+              </a:rPr>
+              <a:t>engineer</a:t>
+            </a:r>
+            <a:endParaRPr b="0" lang="en-US" sz="800" spc="-1" strike="noStrike">
+              <a:solidFill>
+                <a:srgbClr val="000000"/>
+              </a:solidFill>
+              <a:latin typeface="Arial"/>
+            </a:endParaRPr>
+          </a:p>
+        </p:txBody>
+      </p:sp>
+      <p:sp>
+        <p:nvSpPr>
+          <p:cNvPr id="87" name="Oval 15"/>
           <p:cNvSpPr/>
           <p:nvPr/>
         </p:nvSpPr>
         <p:spPr>
           <a:xfrm>
-            <a:off x="768240" y="3232440"/>
-            <a:ext cx="749520" cy="129960"/>
-          </a:xfrm>
-          <a:prstGeom prst="rect">
-            <a:avLst/>
-          </a:prstGeom>
-          <a:noFill/>
-          <a:ln w="0">
-            <a:noFill/>
-          </a:ln>
-        </p:spPr>
-        <p:style>
-          <a:lnRef idx="0"/>
-          <a:fillRef idx="0"/>
-          <a:effectRef idx="0"/>
-          <a:fontRef idx="minor"/>
-        </p:style>
-        <p:txBody>
-          <a:bodyPr lIns="0" rIns="0" tIns="0" bIns="0" anchor="t">
-            <a:spAutoFit/>
-          </a:bodyPr>
-          <a:p>
-            <a:pPr algn="r" defTabSz="457200">
-              <a:lnSpc>
-                <a:spcPct val="100000"/>
-              </a:lnSpc>
-            </a:pPr>
-            <a:r>
-              <a:rPr b="0" lang="en-US" sz="850" spc="-1" strike="noStrike">
-                <a:solidFill>
-                  <a:srgbClr val="64748b"/>
-                </a:solidFill>
-                <a:latin typeface="Segoe UI"/>
-              </a:rPr>
-              <a:t>us today</a:t>
-            </a:r>
-            <a:endParaRPr b="0" lang="en-US" sz="850" spc="-1" strike="noStrike">
-              <a:solidFill>
-                <a:srgbClr val="000000"/>
-              </a:solidFill>
-              <a:latin typeface="Arial"/>
-            </a:endParaRPr>
-          </a:p>
-        </p:txBody>
-      </p:sp>
-      <p:sp>
-        <p:nvSpPr>
-          <p:cNvPr id="89" name="Rounded Rectangle 17"/>
-          <p:cNvSpPr/>
-          <p:nvPr/>
-        </p:nvSpPr>
-        <p:spPr>
-          <a:xfrm>
-            <a:off x="1554480" y="3218760"/>
-            <a:ext cx="2304000" cy="182520"/>
-          </a:xfrm>
-          <a:prstGeom prst="roundRect">
-            <a:avLst>
-              <a:gd name="adj" fmla="val 50000"/>
-            </a:avLst>
+            <a:off x="2468880" y="2834640"/>
+            <a:ext cx="200880" cy="200880"/>
+          </a:xfrm>
+          <a:prstGeom prst="ellipse">
+            <a:avLst/>
           </a:prstGeom>
           <a:solidFill>
-            <a:srgbClr val="f6f8fb"/>
+            <a:srgbClr val="ffffff"/>
           </a:solidFill>
-          <a:ln>
-            <a:noFill/>
+          <a:ln w="15875">
+            <a:solidFill>
+              <a:srgbClr val="94a3b8"/>
+            </a:solidFill>
+            <a:round/>
           </a:ln>
           <a:effectLst>
             <a:outerShdw blurRad="39960" dir="5400000" dist="23040" rotWithShape="0">
@@ -11222,25 +11135,29 @@
       </p:sp>
       <p:sp>
         <p:nvSpPr>
-          <p:cNvPr id="90" name="Rounded Rectangle 18"/>
+          <p:cNvPr id="88" name="Round Same Side Corner Rectangle 16"/>
           <p:cNvSpPr/>
           <p:nvPr/>
         </p:nvSpPr>
         <p:spPr>
           <a:xfrm>
-            <a:off x="1554480" y="3218760"/>
-            <a:ext cx="967320" cy="182520"/>
-          </a:xfrm>
-          <a:prstGeom prst="roundRect">
+            <a:off x="2084760" y="3017520"/>
+            <a:ext cx="968760" cy="310680"/>
+          </a:xfrm>
+          <a:prstGeom prst="round2SameRect">
             <a:avLst>
-              <a:gd name="adj" fmla="val 50000"/>
+              <a:gd name="adj1" fmla="val 30000"/>
+              <a:gd name="adj2" fmla="val 0"/>
             </a:avLst>
           </a:prstGeom>
           <a:solidFill>
-            <a:srgbClr val="cbd5e1"/>
+            <a:srgbClr val="ffffff"/>
           </a:solidFill>
-          <a:ln>
-            <a:noFill/>
+          <a:ln w="15875">
+            <a:solidFill>
+              <a:srgbClr val="94a3b8"/>
+            </a:solidFill>
+            <a:round/>
           </a:ln>
           <a:effectLst>
             <a:outerShdw blurRad="39960" dir="5400000" dist="23040" rotWithShape="0">
@@ -11263,7 +11180,7 @@
           <a:fontRef idx="minor"/>
         </p:style>
         <p:txBody>
-          <a:bodyPr lIns="90000" rIns="90000" tIns="45000" bIns="45000" anchor="ctr">
+          <a:bodyPr lIns="45720" rIns="45720" tIns="18360" bIns="18360" anchor="ctr">
             <a:noAutofit/>
           </a:bodyPr>
           <a:p>
@@ -11272,90 +11189,44 @@
                 <a:spcPct val="100000"/>
               </a:lnSpc>
             </a:pPr>
-            <a:endParaRPr b="0" lang="en-US" sz="1800" spc="-1" strike="noStrike">
-              <a:solidFill>
-                <a:schemeClr val="lt1"/>
-              </a:solidFill>
-              <a:latin typeface="Calibri"/>
-            </a:endParaRPr>
-          </a:p>
-        </p:txBody>
-      </p:sp>
-      <p:sp>
-        <p:nvSpPr>
-          <p:cNvPr id="91" name="TextBox 19"/>
+            <a:r>
+              <a:rPr b="1" lang="en-US" sz="800" spc="-1" strike="noStrike">
+                <a:solidFill>
+                  <a:srgbClr val="64748b"/>
+                </a:solidFill>
+                <a:latin typeface="Segoe UI"/>
+              </a:rPr>
+              <a:t>engineer</a:t>
+            </a:r>
+            <a:endParaRPr b="0" lang="en-US" sz="800" spc="-1" strike="noStrike">
+              <a:solidFill>
+                <a:srgbClr val="000000"/>
+              </a:solidFill>
+              <a:latin typeface="Arial"/>
+            </a:endParaRPr>
+          </a:p>
+        </p:txBody>
+      </p:sp>
+      <p:sp>
+        <p:nvSpPr>
+          <p:cNvPr id="89" name="Oval 17"/>
           <p:cNvSpPr/>
           <p:nvPr/>
         </p:nvSpPr>
         <p:spPr>
           <a:xfrm>
-            <a:off x="768240" y="3602880"/>
-            <a:ext cx="3154320" cy="434520"/>
-          </a:xfrm>
-          <a:prstGeom prst="rect">
-            <a:avLst/>
-          </a:prstGeom>
-          <a:noFill/>
-          <a:ln w="0">
-            <a:noFill/>
-          </a:ln>
-        </p:spPr>
-        <p:style>
-          <a:lnRef idx="0"/>
-          <a:fillRef idx="0"/>
-          <a:effectRef idx="0"/>
-          <a:fontRef idx="minor"/>
-        </p:style>
-        <p:txBody>
-          <a:bodyPr lIns="0" rIns="0" tIns="0" bIns="0" anchor="t">
-            <a:spAutoFit/>
-          </a:bodyPr>
-          <a:p>
-            <a:pPr defTabSz="457200">
-              <a:lnSpc>
-                <a:spcPct val="100000"/>
-              </a:lnSpc>
-            </a:pPr>
-            <a:r>
-              <a:rPr b="0" lang="en-US" sz="950" spc="-1" strike="noStrike">
-                <a:solidFill>
-                  <a:srgbClr val="1a202c"/>
-                </a:solidFill>
-                <a:latin typeface="Segoe UI"/>
-              </a:rPr>
-              <a:t>Teams shipping with AI are pulling ahead, and our engineers know it. They are not waiting for us to decide.</a:t>
-            </a:r>
-            <a:endParaRPr b="0" lang="en-US" sz="950" spc="-1" strike="noStrike">
-              <a:solidFill>
-                <a:srgbClr val="000000"/>
-              </a:solidFill>
-              <a:latin typeface="Arial"/>
-            </a:endParaRPr>
-          </a:p>
-        </p:txBody>
-      </p:sp>
-      <p:sp>
-        <p:nvSpPr>
-          <p:cNvPr id="92" name="Rounded Rectangle 20"/>
-          <p:cNvSpPr/>
-          <p:nvPr/>
-        </p:nvSpPr>
-        <p:spPr>
-          <a:xfrm>
-            <a:off x="4316040" y="1847160"/>
-            <a:ext cx="3556800" cy="2395440"/>
-          </a:xfrm>
-          <a:prstGeom prst="roundRect">
-            <a:avLst>
-              <a:gd name="adj" fmla="val 5000"/>
-            </a:avLst>
+            <a:off x="1334880" y="3438000"/>
+            <a:ext cx="200880" cy="200880"/>
+          </a:xfrm>
+          <a:prstGeom prst="ellipse">
+            <a:avLst/>
           </a:prstGeom>
           <a:solidFill>
             <a:srgbClr val="ffffff"/>
           </a:solidFill>
           <a:ln w="15875">
             <a:solidFill>
-              <a:srgbClr val="c53030"/>
+              <a:srgbClr val="94a3b8"/>
             </a:solidFill>
             <a:round/>
           </a:ln>
@@ -11400,23 +11271,29 @@
       </p:sp>
       <p:sp>
         <p:nvSpPr>
-          <p:cNvPr id="93" name="Oval 21"/>
+          <p:cNvPr id="90" name="Round Same Side Corner Rectangle 18"/>
           <p:cNvSpPr/>
           <p:nvPr/>
         </p:nvSpPr>
         <p:spPr>
           <a:xfrm>
-            <a:off x="4517280" y="2030040"/>
-            <a:ext cx="273960" cy="273960"/>
-          </a:xfrm>
-          <a:prstGeom prst="ellipse">
-            <a:avLst/>
+            <a:off x="951120" y="3620880"/>
+            <a:ext cx="968760" cy="310680"/>
+          </a:xfrm>
+          <a:prstGeom prst="round2SameRect">
+            <a:avLst>
+              <a:gd name="adj1" fmla="val 30000"/>
+              <a:gd name="adj2" fmla="val 0"/>
+            </a:avLst>
           </a:prstGeom>
           <a:solidFill>
-            <a:srgbClr val="c53030"/>
+            <a:srgbClr val="ffffff"/>
           </a:solidFill>
-          <a:ln>
-            <a:noFill/>
+          <a:ln w="15875">
+            <a:solidFill>
+              <a:srgbClr val="94a3b8"/>
+            </a:solidFill>
+            <a:round/>
           </a:ln>
           <a:effectLst>
             <a:outerShdw blurRad="39960" dir="5400000" dist="23040" rotWithShape="0">
@@ -11439,7 +11316,7 @@
           <a:fontRef idx="minor"/>
         </p:style>
         <p:txBody>
-          <a:bodyPr lIns="90000" rIns="90000" tIns="45000" bIns="45000" anchor="ctr">
+          <a:bodyPr lIns="45720" rIns="45720" tIns="18360" bIns="18360" anchor="ctr">
             <a:noAutofit/>
           </a:bodyPr>
           <a:p>
@@ -11448,196 +11325,45 @@
                 <a:spcPct val="100000"/>
               </a:lnSpc>
             </a:pPr>
-            <a:endParaRPr b="0" lang="en-US" sz="1800" spc="-1" strike="noStrike">
-              <a:solidFill>
-                <a:schemeClr val="lt1"/>
-              </a:solidFill>
-              <a:latin typeface="Calibri"/>
-            </a:endParaRPr>
-          </a:p>
-        </p:txBody>
-      </p:sp>
-      <p:sp>
-        <p:nvSpPr>
-          <p:cNvPr id="94" name="TextBox 22"/>
+            <a:r>
+              <a:rPr b="1" lang="en-US" sz="800" spc="-1" strike="noStrike">
+                <a:solidFill>
+                  <a:srgbClr val="64748b"/>
+                </a:solidFill>
+                <a:latin typeface="Segoe UI"/>
+              </a:rPr>
+              <a:t>engineer</a:t>
+            </a:r>
+            <a:endParaRPr b="0" lang="en-US" sz="800" spc="-1" strike="noStrike">
+              <a:solidFill>
+                <a:srgbClr val="000000"/>
+              </a:solidFill>
+              <a:latin typeface="Arial"/>
+            </a:endParaRPr>
+          </a:p>
+        </p:txBody>
+      </p:sp>
+      <p:sp>
+        <p:nvSpPr>
+          <p:cNvPr id="91" name="Oval 19"/>
           <p:cNvSpPr/>
           <p:nvPr/>
         </p:nvSpPr>
         <p:spPr>
           <a:xfrm>
-            <a:off x="4517280" y="2062080"/>
-            <a:ext cx="273960" cy="153000"/>
-          </a:xfrm>
-          <a:prstGeom prst="rect">
-            <a:avLst/>
-          </a:prstGeom>
-          <a:noFill/>
-          <a:ln w="0">
-            <a:noFill/>
-          </a:ln>
-        </p:spPr>
-        <p:style>
-          <a:lnRef idx="0"/>
-          <a:fillRef idx="0"/>
-          <a:effectRef idx="0"/>
-          <a:fontRef idx="minor"/>
-        </p:style>
-        <p:txBody>
-          <a:bodyPr lIns="0" rIns="0" tIns="0" bIns="0" anchor="t">
-            <a:spAutoFit/>
-          </a:bodyPr>
-          <a:p>
-            <a:pPr algn="ctr" defTabSz="457200">
-              <a:lnSpc>
-                <a:spcPct val="100000"/>
-              </a:lnSpc>
-            </a:pPr>
-            <a:r>
-              <a:rPr b="1" lang="en-US" sz="1000" spc="-1" strike="noStrike">
-                <a:solidFill>
-                  <a:srgbClr val="ffffff"/>
-                </a:solidFill>
-                <a:latin typeface="Segoe UI"/>
-              </a:rPr>
-              <a:t>2</a:t>
-            </a:r>
-            <a:endParaRPr b="0" lang="en-US" sz="1000" spc="-1" strike="noStrike">
-              <a:solidFill>
-                <a:srgbClr val="000000"/>
-              </a:solidFill>
-              <a:latin typeface="Arial"/>
-            </a:endParaRPr>
-          </a:p>
-        </p:txBody>
-      </p:sp>
-      <p:sp>
-        <p:nvSpPr>
-          <p:cNvPr id="95" name="TextBox 23"/>
-          <p:cNvSpPr/>
-          <p:nvPr/>
-        </p:nvSpPr>
-        <p:spPr>
-          <a:xfrm>
-            <a:off x="4883040" y="2011680"/>
-            <a:ext cx="2788560" cy="175680"/>
-          </a:xfrm>
-          <a:prstGeom prst="rect">
-            <a:avLst/>
-          </a:prstGeom>
-          <a:noFill/>
-          <a:ln w="0">
-            <a:noFill/>
-          </a:ln>
-        </p:spPr>
-        <p:style>
-          <a:lnRef idx="0"/>
-          <a:fillRef idx="0"/>
-          <a:effectRef idx="0"/>
-          <a:fontRef idx="minor"/>
-        </p:style>
-        <p:txBody>
-          <a:bodyPr lIns="0" rIns="0" tIns="0" bIns="0" anchor="t">
-            <a:spAutoFit/>
-          </a:bodyPr>
-          <a:p>
-            <a:pPr defTabSz="457200">
-              <a:lnSpc>
-                <a:spcPct val="100000"/>
-              </a:lnSpc>
-            </a:pPr>
-            <a:r>
-              <a:rPr b="1" lang="en-US" sz="1150" spc="-1" strike="noStrike">
-                <a:solidFill>
-                  <a:srgbClr val="c53030"/>
-                </a:solidFill>
-                <a:latin typeface="Segoe UI"/>
-              </a:rPr>
-              <a:t>It is here — but not through us</a:t>
-            </a:r>
-            <a:endParaRPr b="0" lang="en-US" sz="1150" spc="-1" strike="noStrike">
-              <a:solidFill>
-                <a:srgbClr val="000000"/>
-              </a:solidFill>
-              <a:latin typeface="Arial"/>
-            </a:endParaRPr>
-          </a:p>
-        </p:txBody>
-      </p:sp>
-      <p:sp>
-        <p:nvSpPr>
-          <p:cNvPr id="96" name="TextBox 24"/>
-          <p:cNvSpPr/>
-          <p:nvPr/>
-        </p:nvSpPr>
-        <p:spPr>
-          <a:xfrm>
-            <a:off x="4517280" y="2633400"/>
-            <a:ext cx="3154320" cy="122040"/>
-          </a:xfrm>
-          <a:prstGeom prst="rect">
-            <a:avLst/>
-          </a:prstGeom>
-          <a:noFill/>
-          <a:ln w="0">
-            <a:noFill/>
-          </a:ln>
-        </p:spPr>
-        <p:style>
-          <a:lnRef idx="0"/>
-          <a:fillRef idx="0"/>
-          <a:effectRef idx="0"/>
-          <a:fontRef idx="minor"/>
-        </p:style>
-        <p:txBody>
-          <a:bodyPr lIns="0" rIns="0" tIns="0" bIns="0" anchor="t">
-            <a:spAutoFit/>
-          </a:bodyPr>
-          <a:p>
-            <a:pPr defTabSz="457200">
-              <a:lnSpc>
-                <a:spcPct val="100000"/>
-              </a:lnSpc>
-            </a:pPr>
-            <a:r>
-              <a:rPr b="1" lang="en-US" sz="800" spc="-1" strike="noStrike">
-                <a:solidFill>
-                  <a:srgbClr val="94a3b8"/>
-                </a:solidFill>
-                <a:latin typeface="Segoe UI"/>
-              </a:rPr>
-              <a:t>OUR PERIMETER, AS IT STANDS</a:t>
-            </a:r>
-            <a:endParaRPr b="0" lang="en-US" sz="800" spc="-1" strike="noStrike">
-              <a:solidFill>
-                <a:srgbClr val="000000"/>
-              </a:solidFill>
-              <a:latin typeface="Arial"/>
-            </a:endParaRPr>
-          </a:p>
-        </p:txBody>
-      </p:sp>
-      <p:sp>
-        <p:nvSpPr>
-          <p:cNvPr id="97" name="Rectangle 25"/>
-          <p:cNvSpPr/>
-          <p:nvPr/>
-        </p:nvSpPr>
-        <p:spPr>
-          <a:xfrm>
-            <a:off x="4517280" y="2834640"/>
-            <a:ext cx="2541600" cy="676440"/>
-          </a:xfrm>
-          <a:prstGeom prst="rect">
+            <a:off x="2468880" y="3438000"/>
+            <a:ext cx="200880" cy="200880"/>
+          </a:xfrm>
+          <a:prstGeom prst="ellipse">
             <a:avLst/>
           </a:prstGeom>
           <a:solidFill>
-            <a:srgbClr val="fbecec"/>
+            <a:srgbClr val="ffffff"/>
           </a:solidFill>
           <a:ln w="15875">
             <a:solidFill>
-              <a:srgbClr val="c53030"/>
+              <a:srgbClr val="94a3b8"/>
             </a:solidFill>
-            <a:prstDash val="sysDash"/>
             <a:round/>
           </a:ln>
           <a:effectLst>
@@ -11681,26 +11407,27 @@
       </p:sp>
       <p:sp>
         <p:nvSpPr>
-          <p:cNvPr id="98" name="Rounded Rectangle 26"/>
+          <p:cNvPr id="92" name="Round Same Side Corner Rectangle 20"/>
           <p:cNvSpPr/>
           <p:nvPr/>
         </p:nvSpPr>
         <p:spPr>
           <a:xfrm>
-            <a:off x="4608720" y="2917080"/>
-            <a:ext cx="1133640" cy="237240"/>
-          </a:xfrm>
-          <a:prstGeom prst="roundRect">
+            <a:off x="2084760" y="3620880"/>
+            <a:ext cx="968760" cy="310680"/>
+          </a:xfrm>
+          <a:prstGeom prst="round2SameRect">
             <a:avLst>
-              <a:gd name="adj" fmla="val 30000"/>
+              <a:gd name="adj1" fmla="val 30000"/>
+              <a:gd name="adj2" fmla="val 0"/>
             </a:avLst>
           </a:prstGeom>
           <a:solidFill>
             <a:srgbClr val="ffffff"/>
           </a:solidFill>
-          <a:ln w="12700">
+          <a:ln w="15875">
             <a:solidFill>
-              <a:srgbClr val="e7b8b8"/>
+              <a:srgbClr val="94a3b8"/>
             </a:solidFill>
             <a:round/>
           </a:ln>
@@ -11737,11 +11464,11 @@
             <a:r>
               <a:rPr b="1" lang="en-US" sz="800" spc="-1" strike="noStrike">
                 <a:solidFill>
-                  <a:srgbClr val="c53030"/>
+                  <a:srgbClr val="64748b"/>
                 </a:solidFill>
                 <a:latin typeface="Segoe UI"/>
               </a:rPr>
-              <a:t>ChatGPT</a:t>
+              <a:t>engineer</a:t>
             </a:r>
             <a:endParaRPr b="0" lang="en-US" sz="800" spc="-1" strike="noStrike">
               <a:solidFill>
@@ -11754,26 +11481,79 @@
       </p:sp>
       <p:sp>
         <p:nvSpPr>
-          <p:cNvPr id="99" name="Rounded Rectangle 27"/>
+          <p:cNvPr id="93" name="TextBox 21"/>
           <p:cNvSpPr/>
           <p:nvPr/>
         </p:nvSpPr>
         <p:spPr>
           <a:xfrm>
-            <a:off x="5815440" y="2917080"/>
-            <a:ext cx="1133640" cy="237240"/>
+            <a:off x="3511440" y="2249280"/>
+            <a:ext cx="1883160" cy="122040"/>
+          </a:xfrm>
+          <a:prstGeom prst="rect">
+            <a:avLst/>
+          </a:prstGeom>
+          <a:noFill/>
+          <a:ln w="0">
+            <a:noFill/>
+          </a:ln>
+        </p:spPr>
+        <p:style>
+          <a:lnRef idx="0"/>
+          <a:fillRef idx="0"/>
+          <a:effectRef idx="0"/>
+          <a:fontRef idx="minor"/>
+        </p:style>
+        <p:txBody>
+          <a:bodyPr lIns="0" rIns="0" tIns="0" bIns="0" anchor="t">
+            <a:spAutoFit/>
+          </a:bodyPr>
+          <a:p>
+            <a:pPr defTabSz="457200">
+              <a:lnSpc>
+                <a:spcPct val="100000"/>
+              </a:lnSpc>
+            </a:pPr>
+            <a:r>
+              <a:rPr b="1" lang="en-US" sz="800" spc="-1" strike="noStrike">
+                <a:solidFill>
+                  <a:srgbClr val="94a3b8"/>
+                </a:solidFill>
+                <a:latin typeface="Segoe UI"/>
+              </a:rPr>
+              <a:t>PICKED AND INSTALLED ALONE</a:t>
+            </a:r>
+            <a:endParaRPr b="0" lang="en-US" sz="800" spc="-1" strike="noStrike">
+              <a:solidFill>
+                <a:srgbClr val="000000"/>
+              </a:solidFill>
+              <a:latin typeface="Arial"/>
+            </a:endParaRPr>
+          </a:p>
+        </p:txBody>
+      </p:sp>
+      <p:sp>
+        <p:nvSpPr>
+          <p:cNvPr id="94" name="Rounded Rectangle 22"/>
+          <p:cNvSpPr/>
+          <p:nvPr/>
+        </p:nvSpPr>
+        <p:spPr>
+          <a:xfrm>
+            <a:off x="3511440" y="2523600"/>
+            <a:ext cx="1883160" cy="310680"/>
           </a:xfrm>
           <a:prstGeom prst="roundRect">
             <a:avLst>
-              <a:gd name="adj" fmla="val 30000"/>
+              <a:gd name="adj" fmla="val 28000"/>
             </a:avLst>
           </a:prstGeom>
           <a:solidFill>
-            <a:srgbClr val="ffffff"/>
+            <a:srgbClr val="fbecec"/>
           </a:solidFill>
           <a:ln w="12700">
             <a:solidFill>
-              <a:srgbClr val="e7b8b8"/>
+              <a:srgbClr val="e0a8a8"/>
             </a:solidFill>
             <a:round/>
           </a:ln>
@@ -11808,45 +11588,69 @@
               </a:lnSpc>
             </a:pPr>
             <a:r>
-              <a:rPr b="1" lang="en-US" sz="800" spc="-1" strike="noStrike">
+              <a:rPr b="1" lang="en-US" sz="900" spc="-1" strike="noStrike">
                 <a:solidFill>
                   <a:srgbClr val="c53030"/>
                 </a:solidFill>
                 <a:latin typeface="Segoe UI"/>
               </a:rPr>
-              <a:t>Copilot</a:t>
-            </a:r>
-            <a:endParaRPr b="0" lang="en-US" sz="800" spc="-1" strike="noStrike">
-              <a:solidFill>
-                <a:srgbClr val="000000"/>
-              </a:solidFill>
-              <a:latin typeface="Arial"/>
-            </a:endParaRPr>
-          </a:p>
-        </p:txBody>
-      </p:sp>
-      <p:sp>
-        <p:nvSpPr>
-          <p:cNvPr id="100" name="Rounded Rectangle 28"/>
+              <a:t>OpenCode</a:t>
+            </a:r>
+            <a:endParaRPr b="0" lang="en-US" sz="900" spc="-1" strike="noStrike">
+              <a:solidFill>
+                <a:srgbClr val="000000"/>
+              </a:solidFill>
+              <a:latin typeface="Arial"/>
+            </a:endParaRPr>
+          </a:p>
+        </p:txBody>
+      </p:sp>
+      <p:cxnSp>
+        <p:nvCxnSpPr>
+          <p:cNvPr id="95" name="Connector 23"/>
+          <p:cNvCxnSpPr/>
+          <p:nvPr/>
+        </p:nvCxnSpPr>
+        <p:spPr>
+          <a:xfrm flipV="1">
+            <a:off x="3200400" y="2679120"/>
+            <a:ext cx="265320" cy="64440"/>
+          </a:xfrm>
+          <a:prstGeom prst="straightConnector1">
+            <a:avLst/>
+          </a:prstGeom>
+          <a:ln w="15875">
+            <a:solidFill>
+              <a:srgbClr val="c53030"/>
+            </a:solidFill>
+            <a:prstDash val="sysDash"/>
+            <a:round/>
+            <a:tailEnd len="med" type="triangle" w="med"/>
+          </a:ln>
+        </p:spPr>
+      </p:cxnSp>
+      <p:sp>
+        <p:nvSpPr>
+          <p:cNvPr id="96" name="Rounded Rectangle 24"/>
           <p:cNvSpPr/>
           <p:nvPr/>
         </p:nvSpPr>
         <p:spPr>
           <a:xfrm>
-            <a:off x="4608720" y="3209400"/>
-            <a:ext cx="1133640" cy="237240"/>
+            <a:off x="3511440" y="2944440"/>
+            <a:ext cx="1883160" cy="310680"/>
           </a:xfrm>
           <a:prstGeom prst="roundRect">
             <a:avLst>
-              <a:gd name="adj" fmla="val 30000"/>
+              <a:gd name="adj" fmla="val 28000"/>
             </a:avLst>
           </a:prstGeom>
           <a:solidFill>
-            <a:srgbClr val="ffffff"/>
+            <a:srgbClr val="fbecec"/>
           </a:solidFill>
           <a:ln w="12700">
             <a:solidFill>
-              <a:srgbClr val="e7b8b8"/>
+              <a:srgbClr val="e0a8a8"/>
             </a:solidFill>
             <a:round/>
           </a:ln>
@@ -11881,45 +11685,69 @@
               </a:lnSpc>
             </a:pPr>
             <a:r>
-              <a:rPr b="1" lang="en-US" sz="800" spc="-1" strike="noStrike">
+              <a:rPr b="1" lang="en-US" sz="900" spc="-1" strike="noStrike">
                 <a:solidFill>
                   <a:srgbClr val="c53030"/>
                 </a:solidFill>
                 <a:latin typeface="Segoe UI"/>
               </a:rPr>
-              <a:t>Cursor</a:t>
-            </a:r>
-            <a:endParaRPr b="0" lang="en-US" sz="800" spc="-1" strike="noStrike">
-              <a:solidFill>
-                <a:srgbClr val="000000"/>
-              </a:solidFill>
-              <a:latin typeface="Arial"/>
-            </a:endParaRPr>
-          </a:p>
-        </p:txBody>
-      </p:sp>
-      <p:sp>
-        <p:nvSpPr>
-          <p:cNvPr id="101" name="Rounded Rectangle 29"/>
+              <a:t>Kilo Code</a:t>
+            </a:r>
+            <a:endParaRPr b="0" lang="en-US" sz="900" spc="-1" strike="noStrike">
+              <a:solidFill>
+                <a:srgbClr val="000000"/>
+              </a:solidFill>
+              <a:latin typeface="Arial"/>
+            </a:endParaRPr>
+          </a:p>
+        </p:txBody>
+      </p:sp>
+      <p:cxnSp>
+        <p:nvCxnSpPr>
+          <p:cNvPr id="97" name="Connector 25"/>
+          <p:cNvCxnSpPr/>
+          <p:nvPr/>
+        </p:nvCxnSpPr>
+        <p:spPr>
+          <a:xfrm flipV="1">
+            <a:off x="3200400" y="3099600"/>
+            <a:ext cx="265320" cy="46080"/>
+          </a:xfrm>
+          <a:prstGeom prst="straightConnector1">
+            <a:avLst/>
+          </a:prstGeom>
+          <a:ln w="15875">
+            <a:solidFill>
+              <a:srgbClr val="c53030"/>
+            </a:solidFill>
+            <a:prstDash val="sysDash"/>
+            <a:round/>
+            <a:tailEnd len="med" type="triangle" w="med"/>
+          </a:ln>
+        </p:spPr>
+      </p:cxnSp>
+      <p:sp>
+        <p:nvSpPr>
+          <p:cNvPr id="98" name="Rounded Rectangle 26"/>
           <p:cNvSpPr/>
           <p:nvPr/>
         </p:nvSpPr>
         <p:spPr>
           <a:xfrm>
-            <a:off x="5815440" y="3209400"/>
-            <a:ext cx="1133640" cy="237240"/>
+            <a:off x="3511440" y="3364920"/>
+            <a:ext cx="1883160" cy="310680"/>
           </a:xfrm>
           <a:prstGeom prst="roundRect">
             <a:avLst>
-              <a:gd name="adj" fmla="val 30000"/>
+              <a:gd name="adj" fmla="val 28000"/>
             </a:avLst>
           </a:prstGeom>
           <a:solidFill>
-            <a:srgbClr val="ffffff"/>
+            <a:srgbClr val="fbecec"/>
           </a:solidFill>
           <a:ln w="12700">
             <a:solidFill>
-              <a:srgbClr val="e7b8b8"/>
+              <a:srgbClr val="e0a8a8"/>
             </a:solidFill>
             <a:round/>
           </a:ln>
@@ -11954,15 +11782,15 @@
               </a:lnSpc>
             </a:pPr>
             <a:r>
-              <a:rPr b="1" lang="en-US" sz="800" spc="-1" strike="noStrike">
+              <a:rPr b="1" lang="en-US" sz="900" spc="-1" strike="noStrike">
                 <a:solidFill>
                   <a:srgbClr val="c53030"/>
                 </a:solidFill>
                 <a:latin typeface="Segoe UI"/>
               </a:rPr>
-              <a:t>browser AI</a:t>
-            </a:r>
-            <a:endParaRPr b="0" lang="en-US" sz="800" spc="-1" strike="noStrike">
+              <a:t>Cline</a:t>
+            </a:r>
+            <a:endParaRPr b="0" lang="en-US" sz="900" spc="-1" strike="noStrike">
               <a:solidFill>
                 <a:srgbClr val="000000"/>
               </a:solidFill>
@@ -11973,14 +11801,14 @@
       </p:sp>
       <p:cxnSp>
         <p:nvCxnSpPr>
-          <p:cNvPr id="102" name="Connector 30"/>
+          <p:cNvPr id="99" name="Connector 27"/>
           <p:cNvCxnSpPr/>
           <p:nvPr/>
         </p:nvCxnSpPr>
         <p:spPr>
-          <a:xfrm>
-            <a:off x="7022520" y="2962440"/>
-            <a:ext cx="942120" cy="360"/>
+          <a:xfrm flipV="1">
+            <a:off x="3200400" y="3520440"/>
+            <a:ext cx="265320" cy="27720"/>
           </a:xfrm>
           <a:prstGeom prst="straightConnector1">
             <a:avLst/>
@@ -11989,132 +11817,34 @@
             <a:solidFill>
               <a:srgbClr val="c53030"/>
             </a:solidFill>
+            <a:prstDash val="sysDash"/>
             <a:round/>
             <a:tailEnd len="med" type="triangle" w="med"/>
           </a:ln>
         </p:spPr>
       </p:cxnSp>
-      <p:cxnSp>
-        <p:nvCxnSpPr>
-          <p:cNvPr id="103" name="Connector 31"/>
-          <p:cNvCxnSpPr/>
-          <p:nvPr/>
-        </p:nvCxnSpPr>
-        <p:spPr>
-          <a:xfrm>
-            <a:off x="7022520" y="3182040"/>
-            <a:ext cx="942120" cy="360"/>
-          </a:xfrm>
-          <a:prstGeom prst="straightConnector1">
-            <a:avLst/>
-          </a:prstGeom>
-          <a:ln w="15875">
-            <a:solidFill>
-              <a:srgbClr val="c53030"/>
-            </a:solidFill>
-            <a:round/>
-            <a:tailEnd len="med" type="triangle" w="med"/>
-          </a:ln>
-        </p:spPr>
-      </p:cxnSp>
-      <p:cxnSp>
-        <p:nvCxnSpPr>
-          <p:cNvPr id="104" name="Connector 32"/>
-          <p:cNvCxnSpPr/>
-          <p:nvPr/>
-        </p:nvCxnSpPr>
-        <p:spPr>
-          <a:xfrm>
-            <a:off x="7022520" y="3401280"/>
-            <a:ext cx="942120" cy="360"/>
-          </a:xfrm>
-          <a:prstGeom prst="straightConnector1">
-            <a:avLst/>
-          </a:prstGeom>
-          <a:ln w="15875">
-            <a:solidFill>
-              <a:srgbClr val="c53030"/>
-            </a:solidFill>
-            <a:round/>
-            <a:tailEnd len="med" type="triangle" w="med"/>
-          </a:ln>
-        </p:spPr>
-      </p:cxnSp>
-      <p:sp>
-        <p:nvSpPr>
-          <p:cNvPr id="105" name="TextBox 33"/>
+      <p:sp>
+        <p:nvSpPr>
+          <p:cNvPr id="100" name="Rounded Rectangle 28"/>
           <p:cNvSpPr/>
           <p:nvPr/>
         </p:nvSpPr>
         <p:spPr>
           <a:xfrm>
-            <a:off x="4517280" y="3602880"/>
-            <a:ext cx="3154320" cy="434520"/>
-          </a:xfrm>
-          <a:prstGeom prst="rect">
-            <a:avLst/>
-          </a:prstGeom>
-          <a:noFill/>
-          <a:ln w="0">
-            <a:noFill/>
-          </a:ln>
-        </p:spPr>
-        <p:style>
-          <a:lnRef idx="0"/>
-          <a:fillRef idx="0"/>
-          <a:effectRef idx="0"/>
-          <a:fontRef idx="minor"/>
-        </p:style>
-        <p:txBody>
-          <a:bodyPr lIns="0" rIns="0" tIns="0" bIns="0" anchor="t">
-            <a:spAutoFit/>
-          </a:bodyPr>
-          <a:p>
-            <a:pPr defTabSz="457200">
-              <a:lnSpc>
-                <a:spcPct val="100000"/>
-              </a:lnSpc>
-            </a:pPr>
-            <a:r>
-              <a:rPr b="0" lang="en-US" sz="950" spc="-1" strike="noStrike">
-                <a:solidFill>
-                  <a:srgbClr val="1a202c"/>
-                </a:solidFill>
-                <a:latin typeface="Segoe UI"/>
-              </a:rPr>
-              <a:t>Personal accounts, browser tools, code pasted into a chat box. We cannot name the tools, the data or the spend.</a:t>
-            </a:r>
-            <a:endParaRPr b="0" lang="en-US" sz="950" spc="-1" strike="noStrike">
-              <a:solidFill>
-                <a:srgbClr val="000000"/>
-              </a:solidFill>
-              <a:latin typeface="Arial"/>
-            </a:endParaRPr>
-          </a:p>
-        </p:txBody>
-      </p:sp>
-      <p:sp>
-        <p:nvSpPr>
-          <p:cNvPr id="106" name="Rounded Rectangle 34"/>
-          <p:cNvSpPr/>
-          <p:nvPr/>
-        </p:nvSpPr>
-        <p:spPr>
-          <a:xfrm>
-            <a:off x="8065080" y="1847160"/>
-            <a:ext cx="3556800" cy="2395440"/>
+            <a:off x="3511440" y="3785760"/>
+            <a:ext cx="1883160" cy="310680"/>
           </a:xfrm>
           <a:prstGeom prst="roundRect">
             <a:avLst>
-              <a:gd name="adj" fmla="val 5000"/>
+              <a:gd name="adj" fmla="val 28000"/>
             </a:avLst>
           </a:prstGeom>
           <a:solidFill>
-            <a:srgbClr val="ffffff"/>
+            <a:srgbClr val="fbecec"/>
           </a:solidFill>
-          <a:ln w="15875">
+          <a:ln w="12700">
             <a:solidFill>
-              <a:srgbClr val="2b6cb0"/>
+              <a:srgbClr val="e0a8a8"/>
             </a:solidFill>
             <a:round/>
           </a:ln>
@@ -12139,7 +11869,7 @@
           <a:fontRef idx="minor"/>
         </p:style>
         <p:txBody>
-          <a:bodyPr lIns="90000" rIns="90000" tIns="45000" bIns="45000" anchor="ctr">
+          <a:bodyPr lIns="45720" rIns="45720" tIns="18360" bIns="18360" anchor="ctr">
             <a:noAutofit/>
           </a:bodyPr>
           <a:p>
@@ -12148,31 +11878,172 @@
                 <a:spcPct val="100000"/>
               </a:lnSpc>
             </a:pPr>
-            <a:endParaRPr b="0" lang="en-US" sz="1800" spc="-1" strike="noStrike">
-              <a:solidFill>
-                <a:schemeClr val="lt1"/>
-              </a:solidFill>
-              <a:latin typeface="Calibri"/>
-            </a:endParaRPr>
-          </a:p>
-        </p:txBody>
-      </p:sp>
-      <p:sp>
-        <p:nvSpPr>
-          <p:cNvPr id="107" name="Oval 35"/>
+            <a:r>
+              <a:rPr b="1" lang="en-US" sz="900" spc="-1" strike="noStrike">
+                <a:solidFill>
+                  <a:srgbClr val="c53030"/>
+                </a:solidFill>
+                <a:latin typeface="Segoe UI"/>
+              </a:rPr>
+              <a:t>Aider</a:t>
+            </a:r>
+            <a:endParaRPr b="0" lang="en-US" sz="900" spc="-1" strike="noStrike">
+              <a:solidFill>
+                <a:srgbClr val="000000"/>
+              </a:solidFill>
+              <a:latin typeface="Arial"/>
+            </a:endParaRPr>
+          </a:p>
+        </p:txBody>
+      </p:sp>
+      <p:cxnSp>
+        <p:nvCxnSpPr>
+          <p:cNvPr id="101" name="Connector 29"/>
+          <p:cNvCxnSpPr/>
+          <p:nvPr/>
+        </p:nvCxnSpPr>
+        <p:spPr>
+          <a:xfrm flipV="1">
+            <a:off x="3200400" y="3940920"/>
+            <a:ext cx="265320" cy="9360"/>
+          </a:xfrm>
+          <a:prstGeom prst="straightConnector1">
+            <a:avLst/>
+          </a:prstGeom>
+          <a:ln w="15875">
+            <a:solidFill>
+              <a:srgbClr val="c53030"/>
+            </a:solidFill>
+            <a:prstDash val="sysDash"/>
+            <a:round/>
+            <a:tailEnd len="med" type="triangle" w="med"/>
+          </a:ln>
+        </p:spPr>
+      </p:cxnSp>
+      <p:sp>
+        <p:nvSpPr>
+          <p:cNvPr id="102" name="TextBox 30"/>
           <p:cNvSpPr/>
           <p:nvPr/>
         </p:nvSpPr>
         <p:spPr>
           <a:xfrm>
-            <a:off x="8266320" y="2030040"/>
-            <a:ext cx="273960" cy="273960"/>
-          </a:xfrm>
-          <a:prstGeom prst="ellipse">
-            <a:avLst/>
+            <a:off x="3511440" y="4151520"/>
+            <a:ext cx="1883160" cy="122040"/>
+          </a:xfrm>
+          <a:prstGeom prst="rect">
+            <a:avLst/>
+          </a:prstGeom>
+          <a:noFill/>
+          <a:ln w="0">
+            <a:noFill/>
+          </a:ln>
+        </p:spPr>
+        <p:style>
+          <a:lnRef idx="0"/>
+          <a:fillRef idx="0"/>
+          <a:effectRef idx="0"/>
+          <a:fontRef idx="minor"/>
+        </p:style>
+        <p:txBody>
+          <a:bodyPr lIns="0" rIns="0" tIns="0" bIns="0" anchor="t">
+            <a:spAutoFit/>
+          </a:bodyPr>
+          <a:p>
+            <a:pPr defTabSz="457200">
+              <a:lnSpc>
+                <a:spcPct val="100000"/>
+              </a:lnSpc>
+            </a:pPr>
+            <a:r>
+              <a:rPr b="0" i="1" lang="en-US" sz="800" spc="-1" strike="noStrike">
+                <a:solidFill>
+                  <a:srgbClr val="94a3b8"/>
+                </a:solidFill>
+                <a:latin typeface="Segoe UI"/>
+              </a:rPr>
+              <a:t>+ whatever ships next month</a:t>
+            </a:r>
+            <a:endParaRPr b="0" lang="en-US" sz="800" spc="-1" strike="noStrike">
+              <a:solidFill>
+                <a:srgbClr val="000000"/>
+              </a:solidFill>
+              <a:latin typeface="Arial"/>
+            </a:endParaRPr>
+          </a:p>
+        </p:txBody>
+      </p:sp>
+      <p:sp>
+        <p:nvSpPr>
+          <p:cNvPr id="103" name="TextBox 31"/>
+          <p:cNvSpPr/>
+          <p:nvPr/>
+        </p:nvSpPr>
+        <p:spPr>
+          <a:xfrm>
+            <a:off x="804600" y="4370760"/>
+            <a:ext cx="4599000" cy="145080"/>
+          </a:xfrm>
+          <a:prstGeom prst="rect">
+            <a:avLst/>
+          </a:prstGeom>
+          <a:noFill/>
+          <a:ln w="0">
+            <a:noFill/>
+          </a:ln>
+        </p:spPr>
+        <p:style>
+          <a:lnRef idx="0"/>
+          <a:fillRef idx="0"/>
+          <a:effectRef idx="0"/>
+          <a:fontRef idx="minor"/>
+        </p:style>
+        <p:txBody>
+          <a:bodyPr lIns="0" rIns="0" tIns="0" bIns="0" anchor="t">
+            <a:spAutoFit/>
+          </a:bodyPr>
+          <a:p>
+            <a:pPr defTabSz="457200">
+              <a:lnSpc>
+                <a:spcPct val="100000"/>
+              </a:lnSpc>
+            </a:pPr>
+            <a:r>
+              <a:rPr b="0" lang="en-US" sz="950" spc="-1" strike="noStrike">
+                <a:solidFill>
+                  <a:srgbClr val="1a202c"/>
+                </a:solidFill>
+                <a:latin typeface="Segoe UI"/>
+              </a:rPr>
+              <a:t>No approved list, no log, no answer when a customer asks where their data went.</a:t>
+            </a:r>
+            <a:endParaRPr b="0" lang="en-US" sz="950" spc="-1" strike="noStrike">
+              <a:solidFill>
+                <a:srgbClr val="000000"/>
+              </a:solidFill>
+              <a:latin typeface="Arial"/>
+            </a:endParaRPr>
+          </a:p>
+        </p:txBody>
+      </p:sp>
+      <p:sp>
+        <p:nvSpPr>
+          <p:cNvPr id="104" name="Chevron 32"/>
+          <p:cNvSpPr/>
+          <p:nvPr/>
+        </p:nvSpPr>
+        <p:spPr>
+          <a:xfrm>
+            <a:off x="5760720" y="2980800"/>
+            <a:ext cx="658080" cy="658080"/>
+          </a:xfrm>
+          <a:prstGeom prst="chevron">
+            <a:avLst>
+              <a:gd name="adj" fmla="val 42000"/>
+            </a:avLst>
           </a:prstGeom>
           <a:solidFill>
-            <a:srgbClr val="2b6cb0"/>
+            <a:srgbClr val="0b1b2b"/>
           </a:solidFill>
           <a:ln>
             <a:noFill/>
@@ -12218,184 +12089,28 @@
       </p:sp>
       <p:sp>
         <p:nvSpPr>
-          <p:cNvPr id="108" name="TextBox 36"/>
+          <p:cNvPr id="105" name="Rounded Rectangle 33"/>
           <p:cNvSpPr/>
           <p:nvPr/>
         </p:nvSpPr>
         <p:spPr>
           <a:xfrm>
-            <a:off x="8266320" y="2062080"/>
-            <a:ext cx="273960" cy="153000"/>
-          </a:xfrm>
-          <a:prstGeom prst="rect">
-            <a:avLst/>
-          </a:prstGeom>
-          <a:noFill/>
-          <a:ln w="0">
-            <a:noFill/>
-          </a:ln>
-        </p:spPr>
-        <p:style>
-          <a:lnRef idx="0"/>
-          <a:fillRef idx="0"/>
-          <a:effectRef idx="0"/>
-          <a:fontRef idx="minor"/>
-        </p:style>
-        <p:txBody>
-          <a:bodyPr lIns="0" rIns="0" tIns="0" bIns="0" anchor="t">
-            <a:spAutoFit/>
-          </a:bodyPr>
-          <a:p>
-            <a:pPr algn="ctr" defTabSz="457200">
-              <a:lnSpc>
-                <a:spcPct val="100000"/>
-              </a:lnSpc>
-            </a:pPr>
-            <a:r>
-              <a:rPr b="1" lang="en-US" sz="1000" spc="-1" strike="noStrike">
-                <a:solidFill>
-                  <a:srgbClr val="ffffff"/>
-                </a:solidFill>
-                <a:latin typeface="Segoe UI"/>
-              </a:rPr>
-              <a:t>3</a:t>
-            </a:r>
-            <a:endParaRPr b="0" lang="en-US" sz="1000" spc="-1" strike="noStrike">
-              <a:solidFill>
-                <a:srgbClr val="000000"/>
-              </a:solidFill>
-              <a:latin typeface="Arial"/>
-            </a:endParaRPr>
-          </a:p>
-        </p:txBody>
-      </p:sp>
-      <p:sp>
-        <p:nvSpPr>
-          <p:cNvPr id="109" name="TextBox 37"/>
-          <p:cNvSpPr/>
-          <p:nvPr/>
-        </p:nvSpPr>
-        <p:spPr>
-          <a:xfrm>
-            <a:off x="8632080" y="2011680"/>
-            <a:ext cx="2788560" cy="175680"/>
-          </a:xfrm>
-          <a:prstGeom prst="rect">
-            <a:avLst/>
-          </a:prstGeom>
-          <a:noFill/>
-          <a:ln w="0">
-            <a:noFill/>
-          </a:ln>
-        </p:spPr>
-        <p:style>
-          <a:lnRef idx="0"/>
-          <a:fillRef idx="0"/>
-          <a:effectRef idx="0"/>
-          <a:fontRef idx="minor"/>
-        </p:style>
-        <p:txBody>
-          <a:bodyPr lIns="0" rIns="0" tIns="0" bIns="0" anchor="t">
-            <a:spAutoFit/>
-          </a:bodyPr>
-          <a:p>
-            <a:pPr defTabSz="457200">
-              <a:lnSpc>
-                <a:spcPct val="100000"/>
-              </a:lnSpc>
-            </a:pPr>
-            <a:r>
-              <a:rPr b="1" lang="en-US" sz="1150" spc="-1" strike="noStrike">
-                <a:solidFill>
-                  <a:srgbClr val="2b6cb0"/>
-                </a:solidFill>
-                <a:latin typeface="Segoe UI"/>
-              </a:rPr>
-              <a:t>The gain is real, but uneven</a:t>
-            </a:r>
-            <a:endParaRPr b="0" lang="en-US" sz="1150" spc="-1" strike="noStrike">
-              <a:solidFill>
-                <a:srgbClr val="000000"/>
-              </a:solidFill>
-              <a:latin typeface="Arial"/>
-            </a:endParaRPr>
-          </a:p>
-        </p:txBody>
-      </p:sp>
-      <p:sp>
-        <p:nvSpPr>
-          <p:cNvPr id="110" name="TextBox 38"/>
-          <p:cNvSpPr/>
-          <p:nvPr/>
-        </p:nvSpPr>
-        <p:spPr>
-          <a:xfrm>
-            <a:off x="8266320" y="2633400"/>
-            <a:ext cx="3154320" cy="122040"/>
-          </a:xfrm>
-          <a:prstGeom prst="rect">
-            <a:avLst/>
-          </a:prstGeom>
-          <a:noFill/>
-          <a:ln w="0">
-            <a:noFill/>
-          </a:ln>
-        </p:spPr>
-        <p:style>
-          <a:lnRef idx="0"/>
-          <a:fillRef idx="0"/>
-          <a:effectRef idx="0"/>
-          <a:fontRef idx="minor"/>
-        </p:style>
-        <p:txBody>
-          <a:bodyPr lIns="0" rIns="0" tIns="0" bIns="0" anchor="t">
-            <a:spAutoFit/>
-          </a:bodyPr>
-          <a:p>
-            <a:pPr defTabSz="457200">
-              <a:lnSpc>
-                <a:spcPct val="100000"/>
-              </a:lnSpc>
-            </a:pPr>
-            <a:r>
-              <a:rPr b="1" lang="en-US" sz="800" spc="-1" strike="noStrike">
-                <a:solidFill>
-                  <a:srgbClr val="94a3b8"/>
-                </a:solidFill>
-                <a:latin typeface="Segoe UI"/>
-              </a:rPr>
-              <a:t>THE LIFT, PER PERSON</a:t>
-            </a:r>
-            <a:endParaRPr b="0" lang="en-US" sz="800" spc="-1" strike="noStrike">
-              <a:solidFill>
-                <a:srgbClr val="000000"/>
-              </a:solidFill>
-              <a:latin typeface="Arial"/>
-            </a:endParaRPr>
-          </a:p>
-        </p:txBody>
-      </p:sp>
-      <p:sp>
-        <p:nvSpPr>
-          <p:cNvPr id="111" name="Rounded Rectangle 39"/>
-          <p:cNvSpPr/>
-          <p:nvPr/>
-        </p:nvSpPr>
-        <p:spPr>
-          <a:xfrm>
-            <a:off x="8522280" y="2944440"/>
-            <a:ext cx="292320" cy="548280"/>
+            <a:off x="6546960" y="2048400"/>
+            <a:ext cx="5074560" cy="2742840"/>
           </a:xfrm>
           <a:prstGeom prst="roundRect">
             <a:avLst>
-              <a:gd name="adj" fmla="val 25000"/>
+              <a:gd name="adj" fmla="val 4000"/>
             </a:avLst>
           </a:prstGeom>
           <a:solidFill>
-            <a:srgbClr val="2b6cb0"/>
+            <a:srgbClr val="ffffff"/>
           </a:solidFill>
-          <a:ln>
-            <a:noFill/>
+          <a:ln w="12700">
+            <a:solidFill>
+              <a:srgbClr val="e2e8f0"/>
+            </a:solidFill>
+            <a:round/>
           </a:ln>
           <a:effectLst>
             <a:outerShdw blurRad="39960" dir="5400000" dist="23040" rotWithShape="0">
@@ -12438,25 +12153,26 @@
       </p:sp>
       <p:sp>
         <p:nvSpPr>
-          <p:cNvPr id="112" name="Rounded Rectangle 40"/>
+          <p:cNvPr id="106" name="Rectangle 34"/>
           <p:cNvSpPr/>
           <p:nvPr/>
         </p:nvSpPr>
         <p:spPr>
           <a:xfrm>
-            <a:off x="9052560" y="3346560"/>
-            <a:ext cx="292320" cy="145800"/>
-          </a:xfrm>
-          <a:prstGeom prst="roundRect">
-            <a:avLst>
-              <a:gd name="adj" fmla="val 25000"/>
-            </a:avLst>
+            <a:off x="6784920" y="2468880"/>
+            <a:ext cx="4599000" cy="1791720"/>
+          </a:xfrm>
+          <a:prstGeom prst="rect">
+            <a:avLst/>
           </a:prstGeom>
           <a:solidFill>
-            <a:srgbClr val="cbd5e1"/>
+            <a:srgbClr val="e8f5ee"/>
           </a:solidFill>
-          <a:ln>
-            <a:noFill/>
+          <a:ln w="19050">
+            <a:solidFill>
+              <a:srgbClr val="2f7a57"/>
+            </a:solidFill>
+            <a:round/>
           </a:ln>
           <a:effectLst>
             <a:outerShdw blurRad="39960" dir="5400000" dist="23040" rotWithShape="0">
@@ -12499,25 +12215,79 @@
       </p:sp>
       <p:sp>
         <p:nvSpPr>
-          <p:cNvPr id="113" name="Rounded Rectangle 41"/>
+          <p:cNvPr id="107" name="TextBox 35"/>
           <p:cNvSpPr/>
           <p:nvPr/>
         </p:nvSpPr>
         <p:spPr>
           <a:xfrm>
-            <a:off x="9582840" y="3145680"/>
-            <a:ext cx="292320" cy="347040"/>
-          </a:xfrm>
-          <a:prstGeom prst="roundRect">
-            <a:avLst>
-              <a:gd name="adj" fmla="val 25000"/>
-            </a:avLst>
+            <a:off x="6876360" y="2541960"/>
+            <a:ext cx="1828440" cy="122040"/>
+          </a:xfrm>
+          <a:prstGeom prst="rect">
+            <a:avLst/>
+          </a:prstGeom>
+          <a:noFill/>
+          <a:ln w="0">
+            <a:noFill/>
+          </a:ln>
+        </p:spPr>
+        <p:style>
+          <a:lnRef idx="0"/>
+          <a:fillRef idx="0"/>
+          <a:effectRef idx="0"/>
+          <a:fontRef idx="minor"/>
+        </p:style>
+        <p:txBody>
+          <a:bodyPr lIns="0" rIns="0" tIns="0" bIns="0" anchor="t">
+            <a:spAutoFit/>
+          </a:bodyPr>
+          <a:p>
+            <a:pPr defTabSz="457200">
+              <a:lnSpc>
+                <a:spcPct val="100000"/>
+              </a:lnSpc>
+            </a:pPr>
+            <a:r>
+              <a:rPr b="1" lang="en-US" sz="800" spc="-1" strike="noStrike">
+                <a:solidFill>
+                  <a:srgbClr val="2f7a57"/>
+                </a:solidFill>
+                <a:latin typeface="Segoe UI"/>
+              </a:rPr>
+              <a:t>OUR NETWORK</a:t>
+            </a:r>
+            <a:endParaRPr b="0" lang="en-US" sz="800" spc="-1" strike="noStrike">
+              <a:solidFill>
+                <a:srgbClr val="000000"/>
+              </a:solidFill>
+              <a:latin typeface="Arial"/>
+            </a:endParaRPr>
+          </a:p>
+        </p:txBody>
+      </p:sp>
+      <p:sp>
+        <p:nvSpPr>
+          <p:cNvPr id="108" name="Oval 36"/>
+          <p:cNvSpPr/>
+          <p:nvPr/>
+        </p:nvSpPr>
+        <p:spPr>
+          <a:xfrm>
+            <a:off x="7269480" y="2834640"/>
+            <a:ext cx="200880" cy="200880"/>
+          </a:xfrm>
+          <a:prstGeom prst="ellipse">
+            <a:avLst/>
           </a:prstGeom>
           <a:solidFill>
-            <a:srgbClr val="2b6cb0"/>
+            <a:srgbClr val="ffffff"/>
           </a:solidFill>
-          <a:ln>
-            <a:noFill/>
+          <a:ln w="15875">
+            <a:solidFill>
+              <a:srgbClr val="2f7a57"/>
+            </a:solidFill>
+            <a:round/>
           </a:ln>
           <a:effectLst>
             <a:outerShdw blurRad="39960" dir="5400000" dist="23040" rotWithShape="0">
@@ -12560,25 +12330,29 @@
       </p:sp>
       <p:sp>
         <p:nvSpPr>
-          <p:cNvPr id="114" name="Rounded Rectangle 42"/>
+          <p:cNvPr id="109" name="Round Same Side Corner Rectangle 37"/>
           <p:cNvSpPr/>
           <p:nvPr/>
         </p:nvSpPr>
         <p:spPr>
           <a:xfrm>
-            <a:off x="10113120" y="3410640"/>
-            <a:ext cx="292320" cy="82080"/>
-          </a:xfrm>
-          <a:prstGeom prst="roundRect">
+            <a:off x="6912720" y="3017520"/>
+            <a:ext cx="914040" cy="310680"/>
+          </a:xfrm>
+          <a:prstGeom prst="round2SameRect">
             <a:avLst>
-              <a:gd name="adj" fmla="val 25000"/>
+              <a:gd name="adj1" fmla="val 30000"/>
+              <a:gd name="adj2" fmla="val 0"/>
             </a:avLst>
           </a:prstGeom>
           <a:solidFill>
-            <a:srgbClr val="cbd5e1"/>
+            <a:srgbClr val="ffffff"/>
           </a:solidFill>
-          <a:ln>
-            <a:noFill/>
+          <a:ln w="15875">
+            <a:solidFill>
+              <a:srgbClr val="2f7a57"/>
+            </a:solidFill>
+            <a:round/>
           </a:ln>
           <a:effectLst>
             <a:outerShdw blurRad="39960" dir="5400000" dist="23040" rotWithShape="0">
@@ -12601,7 +12375,7 @@
           <a:fontRef idx="minor"/>
         </p:style>
         <p:txBody>
-          <a:bodyPr lIns="90000" rIns="90000" tIns="25560" bIns="25560" anchor="ctr">
+          <a:bodyPr lIns="45720" rIns="45720" tIns="18360" bIns="18360" anchor="ctr">
             <a:noAutofit/>
           </a:bodyPr>
           <a:p>
@@ -12610,36 +12384,46 @@
                 <a:spcPct val="100000"/>
               </a:lnSpc>
             </a:pPr>
-            <a:endParaRPr b="0" lang="en-US" sz="1800" spc="-1" strike="noStrike">
-              <a:solidFill>
-                <a:schemeClr val="lt1"/>
-              </a:solidFill>
-              <a:latin typeface="Calibri"/>
-            </a:endParaRPr>
-          </a:p>
-        </p:txBody>
-      </p:sp>
-      <p:sp>
-        <p:nvSpPr>
-          <p:cNvPr id="115" name="Rounded Rectangle 43"/>
+            <a:r>
+              <a:rPr b="1" lang="en-US" sz="800" spc="-1" strike="noStrike">
+                <a:solidFill>
+                  <a:srgbClr val="2f7a57"/>
+                </a:solidFill>
+                <a:latin typeface="Segoe UI"/>
+              </a:rPr>
+              <a:t>engineer</a:t>
+            </a:r>
+            <a:endParaRPr b="0" lang="en-US" sz="800" spc="-1" strike="noStrike">
+              <a:solidFill>
+                <a:srgbClr val="000000"/>
+              </a:solidFill>
+              <a:latin typeface="Arial"/>
+            </a:endParaRPr>
+          </a:p>
+        </p:txBody>
+      </p:sp>
+      <p:sp>
+        <p:nvSpPr>
+          <p:cNvPr id="110" name="Oval 38"/>
           <p:cNvSpPr/>
           <p:nvPr/>
         </p:nvSpPr>
         <p:spPr>
           <a:xfrm>
-            <a:off x="10643760" y="3017520"/>
-            <a:ext cx="292320" cy="475200"/>
-          </a:xfrm>
-          <a:prstGeom prst="roundRect">
-            <a:avLst>
-              <a:gd name="adj" fmla="val 25000"/>
-            </a:avLst>
+            <a:off x="8312040" y="2834640"/>
+            <a:ext cx="200880" cy="200880"/>
+          </a:xfrm>
+          <a:prstGeom prst="ellipse">
+            <a:avLst/>
           </a:prstGeom>
           <a:solidFill>
-            <a:srgbClr val="2b6cb0"/>
+            <a:srgbClr val="ffffff"/>
           </a:solidFill>
-          <a:ln>
-            <a:noFill/>
+          <a:ln w="15875">
+            <a:solidFill>
+              <a:srgbClr val="2f7a57"/>
+            </a:solidFill>
+            <a:round/>
           </a:ln>
           <a:effectLst>
             <a:outerShdw blurRad="39960" dir="5400000" dist="23040" rotWithShape="0">
@@ -12680,171 +12464,31 @@
           </a:p>
         </p:txBody>
       </p:sp>
-      <p:cxnSp>
-        <p:nvCxnSpPr>
-          <p:cNvPr id="116" name="Connector 44"/>
-          <p:cNvCxnSpPr/>
+      <p:sp>
+        <p:nvSpPr>
+          <p:cNvPr id="111" name="Round Same Side Corner Rectangle 39"/>
+          <p:cNvSpPr/>
           <p:nvPr/>
-        </p:nvCxnSpPr>
-        <p:spPr>
-          <a:xfrm>
-            <a:off x="8265960" y="3492720"/>
-            <a:ext cx="3155040" cy="360"/>
-          </a:xfrm>
-          <a:prstGeom prst="straightConnector1">
-            <a:avLst/>
-          </a:prstGeom>
-          <a:ln w="12700">
+        </p:nvSpPr>
+        <p:spPr>
+          <a:xfrm>
+            <a:off x="7955280" y="3017520"/>
+            <a:ext cx="914040" cy="310680"/>
+          </a:xfrm>
+          <a:prstGeom prst="round2SameRect">
+            <a:avLst>
+              <a:gd name="adj1" fmla="val 30000"/>
+              <a:gd name="adj2" fmla="val 0"/>
+            </a:avLst>
+          </a:prstGeom>
+          <a:solidFill>
+            <a:srgbClr val="ffffff"/>
+          </a:solidFill>
+          <a:ln w="15875">
             <a:solidFill>
-              <a:srgbClr val="e2e8f0"/>
+              <a:srgbClr val="2f7a57"/>
             </a:solidFill>
             <a:round/>
-          </a:ln>
-        </p:spPr>
-      </p:cxnSp>
-      <p:sp>
-        <p:nvSpPr>
-          <p:cNvPr id="117" name="TextBox 45"/>
-          <p:cNvSpPr/>
-          <p:nvPr/>
-        </p:nvSpPr>
-        <p:spPr>
-          <a:xfrm>
-            <a:off x="8266320" y="3602880"/>
-            <a:ext cx="3154320" cy="289800"/>
-          </a:xfrm>
-          <a:prstGeom prst="rect">
-            <a:avLst/>
-          </a:prstGeom>
-          <a:noFill/>
-          <a:ln w="0">
-            <a:noFill/>
-          </a:ln>
-        </p:spPr>
-        <p:style>
-          <a:lnRef idx="0"/>
-          <a:fillRef idx="0"/>
-          <a:effectRef idx="0"/>
-          <a:fontRef idx="minor"/>
-        </p:style>
-        <p:txBody>
-          <a:bodyPr lIns="0" rIns="0" tIns="0" bIns="0" anchor="t">
-            <a:spAutoFit/>
-          </a:bodyPr>
-          <a:p>
-            <a:pPr defTabSz="457200">
-              <a:lnSpc>
-                <a:spcPct val="100000"/>
-              </a:lnSpc>
-            </a:pPr>
-            <a:r>
-              <a:rPr b="0" lang="en-US" sz="950" spc="-1" strike="noStrike">
-                <a:solidFill>
-                  <a:srgbClr val="1a202c"/>
-                </a:solidFill>
-                <a:latin typeface="Segoe UI"/>
-              </a:rPr>
-              <a:t>Whoever found a tool got faster. None of it is shared, repeatable or measurable across the team.</a:t>
-            </a:r>
-            <a:endParaRPr b="0" lang="en-US" sz="950" spc="-1" strike="noStrike">
-              <a:solidFill>
-                <a:srgbClr val="000000"/>
-              </a:solidFill>
-              <a:latin typeface="Arial"/>
-            </a:endParaRPr>
-          </a:p>
-        </p:txBody>
-      </p:sp>
-      <p:cxnSp>
-        <p:nvCxnSpPr>
-          <p:cNvPr id="118" name="Connector 46"/>
-          <p:cNvCxnSpPr/>
-          <p:nvPr/>
-        </p:nvCxnSpPr>
-        <p:spPr>
-          <a:xfrm>
-            <a:off x="2345400" y="4297680"/>
-            <a:ext cx="3749400" cy="603720"/>
-          </a:xfrm>
-          <a:prstGeom prst="straightConnector1">
-            <a:avLst/>
-          </a:prstGeom>
-          <a:ln w="19050">
-            <a:solidFill>
-              <a:srgbClr val="c2d3e6"/>
-            </a:solidFill>
-            <a:round/>
-            <a:tailEnd len="med" type="triangle" w="med"/>
-          </a:ln>
-        </p:spPr>
-      </p:cxnSp>
-      <p:cxnSp>
-        <p:nvCxnSpPr>
-          <p:cNvPr id="119" name="Connector 47"/>
-          <p:cNvCxnSpPr/>
-          <p:nvPr/>
-        </p:nvCxnSpPr>
-        <p:spPr>
-          <a:xfrm>
-            <a:off x="6094440" y="4297680"/>
-            <a:ext cx="360" cy="603720"/>
-          </a:xfrm>
-          <a:prstGeom prst="straightConnector1">
-            <a:avLst/>
-          </a:prstGeom>
-          <a:ln w="19050">
-            <a:solidFill>
-              <a:srgbClr val="c2d3e6"/>
-            </a:solidFill>
-            <a:round/>
-            <a:tailEnd len="med" type="triangle" w="med"/>
-          </a:ln>
-        </p:spPr>
-      </p:cxnSp>
-      <p:cxnSp>
-        <p:nvCxnSpPr>
-          <p:cNvPr id="120" name="Connector 48"/>
-          <p:cNvCxnSpPr/>
-          <p:nvPr/>
-        </p:nvCxnSpPr>
-        <p:spPr>
-          <a:xfrm flipH="1">
-            <a:off x="6094440" y="4297680"/>
-            <a:ext cx="3749400" cy="603720"/>
-          </a:xfrm>
-          <a:prstGeom prst="straightConnector1">
-            <a:avLst/>
-          </a:prstGeom>
-          <a:ln w="19050">
-            <a:solidFill>
-              <a:srgbClr val="c2d3e6"/>
-            </a:solidFill>
-            <a:round/>
-            <a:tailEnd len="med" type="triangle" w="med"/>
-          </a:ln>
-        </p:spPr>
-      </p:cxnSp>
-      <p:sp>
-        <p:nvSpPr>
-          <p:cNvPr id="121" name="Rounded Rectangle 49"/>
-          <p:cNvSpPr/>
-          <p:nvPr/>
-        </p:nvSpPr>
-        <p:spPr>
-          <a:xfrm>
-            <a:off x="567000" y="4956120"/>
-            <a:ext cx="11054880" cy="840960"/>
-          </a:xfrm>
-          <a:prstGeom prst="roundRect">
-            <a:avLst>
-              <a:gd name="adj" fmla="val 10000"/>
-            </a:avLst>
-          </a:prstGeom>
-          <a:solidFill>
-            <a:srgbClr val="0b1b2b"/>
-          </a:solidFill>
-          <a:ln>
-            <a:noFill/>
           </a:ln>
           <a:effectLst>
             <a:outerShdw blurRad="39960" dir="5400000" dist="23040" rotWithShape="0">
@@ -12867,7 +12511,7 @@
           <a:fontRef idx="minor"/>
         </p:style>
         <p:txBody>
-          <a:bodyPr lIns="90000" rIns="90000" tIns="45000" bIns="45000" anchor="ctr">
+          <a:bodyPr lIns="45720" rIns="45720" tIns="18360" bIns="18360" anchor="ctr">
             <a:noAutofit/>
           </a:bodyPr>
           <a:p>
@@ -12876,34 +12520,46 @@
                 <a:spcPct val="100000"/>
               </a:lnSpc>
             </a:pPr>
-            <a:endParaRPr b="0" lang="en-US" sz="1800" spc="-1" strike="noStrike">
-              <a:solidFill>
-                <a:schemeClr val="lt1"/>
-              </a:solidFill>
-              <a:latin typeface="Calibri"/>
-            </a:endParaRPr>
-          </a:p>
-        </p:txBody>
-      </p:sp>
-      <p:sp>
-        <p:nvSpPr>
-          <p:cNvPr id="122" name="Rectangle 50"/>
+            <a:r>
+              <a:rPr b="1" lang="en-US" sz="800" spc="-1" strike="noStrike">
+                <a:solidFill>
+                  <a:srgbClr val="2f7a57"/>
+                </a:solidFill>
+                <a:latin typeface="Segoe UI"/>
+              </a:rPr>
+              <a:t>engineer</a:t>
+            </a:r>
+            <a:endParaRPr b="0" lang="en-US" sz="800" spc="-1" strike="noStrike">
+              <a:solidFill>
+                <a:srgbClr val="000000"/>
+              </a:solidFill>
+              <a:latin typeface="Arial"/>
+            </a:endParaRPr>
+          </a:p>
+        </p:txBody>
+      </p:sp>
+      <p:sp>
+        <p:nvSpPr>
+          <p:cNvPr id="112" name="Oval 40"/>
           <p:cNvSpPr/>
           <p:nvPr/>
         </p:nvSpPr>
         <p:spPr>
           <a:xfrm>
-            <a:off x="567000" y="4956120"/>
-            <a:ext cx="50400" cy="840960"/>
-          </a:xfrm>
-          <a:prstGeom prst="rect">
+            <a:off x="7269480" y="3401640"/>
+            <a:ext cx="200880" cy="200880"/>
+          </a:xfrm>
+          <a:prstGeom prst="ellipse">
             <a:avLst/>
           </a:prstGeom>
           <a:solidFill>
-            <a:srgbClr val="2f7a57"/>
+            <a:srgbClr val="ffffff"/>
           </a:solidFill>
-          <a:ln>
-            <a:noFill/>
+          <a:ln w="15875">
+            <a:solidFill>
+              <a:srgbClr val="2f7a57"/>
+            </a:solidFill>
+            <a:round/>
           </a:ln>
           <a:effectLst>
             <a:outerShdw blurRad="39960" dir="5400000" dist="23040" rotWithShape="0">
@@ -12946,77 +12602,25 @@
       </p:sp>
       <p:sp>
         <p:nvSpPr>
-          <p:cNvPr id="123" name="TextBox 51"/>
+          <p:cNvPr id="113" name="Round Same Side Corner Rectangle 41"/>
           <p:cNvSpPr/>
           <p:nvPr/>
         </p:nvSpPr>
         <p:spPr>
           <a:xfrm>
-            <a:off x="841320" y="5139000"/>
-            <a:ext cx="3840120" cy="411480"/>
-          </a:xfrm>
-          <a:prstGeom prst="rect">
-            <a:avLst/>
-          </a:prstGeom>
-          <a:noFill/>
-          <a:ln w="0">
-            <a:noFill/>
-          </a:ln>
-        </p:spPr>
-        <p:style>
-          <a:lnRef idx="0"/>
-          <a:fillRef idx="0"/>
-          <a:effectRef idx="0"/>
-          <a:fontRef idx="minor"/>
-        </p:style>
-        <p:txBody>
-          <a:bodyPr lIns="0" rIns="0" tIns="0" bIns="0" anchor="t">
-            <a:spAutoFit/>
-          </a:bodyPr>
-          <a:p>
-            <a:pPr defTabSz="457200">
-              <a:lnSpc>
-                <a:spcPct val="100000"/>
-              </a:lnSpc>
-            </a:pPr>
-            <a:r>
-              <a:rPr b="1" lang="en-US" sz="1350" spc="-1" strike="noStrike">
-                <a:solidFill>
-                  <a:srgbClr val="ffffff"/>
-                </a:solidFill>
-                <a:latin typeface="Segoe UI"/>
-              </a:rPr>
-              <a:t>So we build our own — and own the whole path</a:t>
-            </a:r>
-            <a:endParaRPr b="0" lang="en-US" sz="1350" spc="-1" strike="noStrike">
-              <a:solidFill>
-                <a:srgbClr val="000000"/>
-              </a:solidFill>
-              <a:latin typeface="Arial"/>
-            </a:endParaRPr>
-          </a:p>
-        </p:txBody>
-      </p:sp>
-      <p:sp>
-        <p:nvSpPr>
-          <p:cNvPr id="124" name="Rounded Rectangle 52"/>
-          <p:cNvSpPr/>
-          <p:nvPr/>
-        </p:nvSpPr>
-        <p:spPr>
-          <a:xfrm>
-            <a:off x="4883040" y="5175360"/>
-            <a:ext cx="1572480" cy="402120"/>
-          </a:xfrm>
-          <a:prstGeom prst="roundRect">
+            <a:off x="6912720" y="3584520"/>
+            <a:ext cx="914040" cy="310680"/>
+          </a:xfrm>
+          <a:prstGeom prst="round2SameRect">
             <a:avLst>
-              <a:gd name="adj" fmla="val 22000"/>
+              <a:gd name="adj1" fmla="val 30000"/>
+              <a:gd name="adj2" fmla="val 0"/>
             </a:avLst>
           </a:prstGeom>
           <a:solidFill>
-            <a:srgbClr val="142c45"/>
+            <a:srgbClr val="ffffff"/>
           </a:solidFill>
-          <a:ln w="12700">
+          <a:ln w="15875">
             <a:solidFill>
               <a:srgbClr val="2f7a57"/>
             </a:solidFill>
@@ -13053,43 +12657,41 @@
               </a:lnSpc>
             </a:pPr>
             <a:r>
-              <a:rPr b="0" lang="en-US" sz="850" spc="-1" strike="noStrike">
-                <a:solidFill>
-                  <a:srgbClr val="ffffff"/>
+              <a:rPr b="1" lang="en-US" sz="800" spc="-1" strike="noStrike">
+                <a:solidFill>
+                  <a:srgbClr val="2f7a57"/>
                 </a:solidFill>
                 <a:latin typeface="Segoe UI"/>
               </a:rPr>
-              <a:t>our model, our hardware</a:t>
-            </a:r>
-            <a:endParaRPr b="0" lang="en-US" sz="850" spc="-1" strike="noStrike">
-              <a:solidFill>
-                <a:srgbClr val="ffffff"/>
-              </a:solidFill>
-              <a:latin typeface="Arial"/>
-            </a:endParaRPr>
-          </a:p>
-        </p:txBody>
-      </p:sp>
-      <p:sp>
-        <p:nvSpPr>
-          <p:cNvPr id="125" name="Rounded Rectangle 53"/>
+              <a:t>engineer</a:t>
+            </a:r>
+            <a:endParaRPr b="0" lang="en-US" sz="800" spc="-1" strike="noStrike">
+              <a:solidFill>
+                <a:srgbClr val="000000"/>
+              </a:solidFill>
+              <a:latin typeface="Arial"/>
+            </a:endParaRPr>
+          </a:p>
+        </p:txBody>
+      </p:sp>
+      <p:sp>
+        <p:nvSpPr>
+          <p:cNvPr id="114" name="Oval 42"/>
           <p:cNvSpPr/>
           <p:nvPr/>
         </p:nvSpPr>
         <p:spPr>
           <a:xfrm>
-            <a:off x="6592680" y="5175360"/>
-            <a:ext cx="1572480" cy="402120"/>
-          </a:xfrm>
-          <a:prstGeom prst="roundRect">
-            <a:avLst>
-              <a:gd name="adj" fmla="val 22000"/>
-            </a:avLst>
+            <a:off x="8312040" y="3401640"/>
+            <a:ext cx="200880" cy="200880"/>
+          </a:xfrm>
+          <a:prstGeom prst="ellipse">
+            <a:avLst/>
           </a:prstGeom>
           <a:solidFill>
-            <a:srgbClr val="142c45"/>
+            <a:srgbClr val="ffffff"/>
           </a:solidFill>
-          <a:ln w="12700">
+          <a:ln w="15875">
             <a:solidFill>
               <a:srgbClr val="2f7a57"/>
             </a:solidFill>
@@ -13116,7 +12718,7 @@
           <a:fontRef idx="minor"/>
         </p:style>
         <p:txBody>
-          <a:bodyPr lIns="45720" rIns="45720" tIns="18360" bIns="18360" anchor="ctr">
+          <a:bodyPr lIns="90000" rIns="90000" tIns="45000" bIns="45000" anchor="ctr">
             <a:noAutofit/>
           </a:bodyPr>
           <a:p>
@@ -13125,44 +12727,36 @@
                 <a:spcPct val="100000"/>
               </a:lnSpc>
             </a:pPr>
-            <a:r>
-              <a:rPr b="0" lang="en-US" sz="850" spc="-1" strike="noStrike">
-                <a:solidFill>
-                  <a:srgbClr val="ffffff"/>
-                </a:solidFill>
-                <a:latin typeface="Segoe UI"/>
-              </a:rPr>
-              <a:t>every call logged</a:t>
-            </a:r>
-            <a:endParaRPr b="0" lang="en-US" sz="850" spc="-1" strike="noStrike">
-              <a:solidFill>
-                <a:srgbClr val="ffffff"/>
-              </a:solidFill>
-              <a:latin typeface="Arial"/>
-            </a:endParaRPr>
-          </a:p>
-        </p:txBody>
-      </p:sp>
-      <p:sp>
-        <p:nvSpPr>
-          <p:cNvPr id="126" name="Rounded Rectangle 54"/>
+            <a:endParaRPr b="0" lang="en-US" sz="1800" spc="-1" strike="noStrike">
+              <a:solidFill>
+                <a:schemeClr val="lt1"/>
+              </a:solidFill>
+              <a:latin typeface="Calibri"/>
+            </a:endParaRPr>
+          </a:p>
+        </p:txBody>
+      </p:sp>
+      <p:sp>
+        <p:nvSpPr>
+          <p:cNvPr id="115" name="Round Same Side Corner Rectangle 43"/>
           <p:cNvSpPr/>
           <p:nvPr/>
         </p:nvSpPr>
         <p:spPr>
           <a:xfrm>
-            <a:off x="8302680" y="5175360"/>
-            <a:ext cx="1572480" cy="402120"/>
-          </a:xfrm>
-          <a:prstGeom prst="roundRect">
+            <a:off x="7955280" y="3584520"/>
+            <a:ext cx="914040" cy="310680"/>
+          </a:xfrm>
+          <a:prstGeom prst="round2SameRect">
             <a:avLst>
-              <a:gd name="adj" fmla="val 22000"/>
+              <a:gd name="adj1" fmla="val 30000"/>
+              <a:gd name="adj2" fmla="val 0"/>
             </a:avLst>
           </a:prstGeom>
           <a:solidFill>
-            <a:srgbClr val="142c45"/>
+            <a:srgbClr val="ffffff"/>
           </a:solidFill>
-          <a:ln w="12700">
+          <a:ln w="15875">
             <a:solidFill>
               <a:srgbClr val="2f7a57"/>
             </a:solidFill>
@@ -13199,47 +12793,44 @@
               </a:lnSpc>
             </a:pPr>
             <a:r>
-              <a:rPr b="0" lang="en-US" sz="850" spc="-1" strike="noStrike">
-                <a:solidFill>
-                  <a:srgbClr val="ffffff"/>
+              <a:rPr b="1" lang="en-US" sz="800" spc="-1" strike="noStrike">
+                <a:solidFill>
+                  <a:srgbClr val="2f7a57"/>
                 </a:solidFill>
                 <a:latin typeface="Segoe UI"/>
               </a:rPr>
-              <a:t>scoped to the role</a:t>
-            </a:r>
-            <a:endParaRPr b="0" lang="en-US" sz="850" spc="-1" strike="noStrike">
-              <a:solidFill>
-                <a:srgbClr val="ffffff"/>
-              </a:solidFill>
-              <a:latin typeface="Arial"/>
-            </a:endParaRPr>
-          </a:p>
-        </p:txBody>
-      </p:sp>
-      <p:sp>
-        <p:nvSpPr>
-          <p:cNvPr id="127" name="Rounded Rectangle 55"/>
+              <a:t>engineer</a:t>
+            </a:r>
+            <a:endParaRPr b="0" lang="en-US" sz="800" spc="-1" strike="noStrike">
+              <a:solidFill>
+                <a:srgbClr val="000000"/>
+              </a:solidFill>
+              <a:latin typeface="Arial"/>
+            </a:endParaRPr>
+          </a:p>
+        </p:txBody>
+      </p:sp>
+      <p:sp>
+        <p:nvSpPr>
+          <p:cNvPr id="116" name="Chevron 44"/>
           <p:cNvSpPr/>
           <p:nvPr/>
         </p:nvSpPr>
         <p:spPr>
           <a:xfrm>
-            <a:off x="10012680" y="5175360"/>
-            <a:ext cx="1572480" cy="402120"/>
-          </a:xfrm>
-          <a:prstGeom prst="roundRect">
+            <a:off x="9070920" y="2999160"/>
+            <a:ext cx="914040" cy="658080"/>
+          </a:xfrm>
+          <a:prstGeom prst="chevron">
             <a:avLst>
-              <a:gd name="adj" fmla="val 22000"/>
+              <a:gd name="adj" fmla="val 28000"/>
             </a:avLst>
           </a:prstGeom>
           <a:solidFill>
-            <a:srgbClr val="142c45"/>
+            <a:srgbClr val="0b1b2b"/>
           </a:solidFill>
-          <a:ln w="12700">
-            <a:solidFill>
-              <a:srgbClr val="2f7a57"/>
-            </a:solidFill>
-            <a:round/>
+          <a:ln>
+            <a:noFill/>
           </a:ln>
           <a:effectLst>
             <a:outerShdw blurRad="39960" dir="5400000" dist="23040" rotWithShape="0">
@@ -13272,19 +12863,605 @@
               </a:lnSpc>
             </a:pPr>
             <a:r>
+              <a:rPr b="1" lang="en-US" sz="950" spc="-1" strike="noStrike">
+                <a:solidFill>
+                  <a:srgbClr val="ffffff"/>
+                </a:solidFill>
+                <a:latin typeface="Segoe UI"/>
+              </a:rPr>
+              <a:t>one gate</a:t>
+            </a:r>
+            <a:endParaRPr b="0" lang="en-US" sz="950" spc="-1" strike="noStrike">
+              <a:solidFill>
+                <a:srgbClr val="ffffff"/>
+              </a:solidFill>
+              <a:latin typeface="Arial"/>
+            </a:endParaRPr>
+          </a:p>
+        </p:txBody>
+      </p:sp>
+      <p:cxnSp>
+        <p:nvCxnSpPr>
+          <p:cNvPr id="117" name="Connector 45"/>
+          <p:cNvCxnSpPr/>
+          <p:nvPr/>
+        </p:nvCxnSpPr>
+        <p:spPr>
+          <a:xfrm>
+            <a:off x="8887680" y="2999160"/>
+            <a:ext cx="146880" cy="329400"/>
+          </a:xfrm>
+          <a:prstGeom prst="straightConnector1">
+            <a:avLst/>
+          </a:prstGeom>
+          <a:ln w="19050">
+            <a:solidFill>
+              <a:srgbClr val="9cc5b0"/>
+            </a:solidFill>
+            <a:round/>
+            <a:tailEnd len="med" type="triangle" w="med"/>
+          </a:ln>
+        </p:spPr>
+      </p:cxnSp>
+      <p:cxnSp>
+        <p:nvCxnSpPr>
+          <p:cNvPr id="118" name="Connector 46"/>
+          <p:cNvCxnSpPr/>
+          <p:nvPr/>
+        </p:nvCxnSpPr>
+        <p:spPr>
+          <a:xfrm flipV="1">
+            <a:off x="8887680" y="3328200"/>
+            <a:ext cx="146880" cy="238320"/>
+          </a:xfrm>
+          <a:prstGeom prst="straightConnector1">
+            <a:avLst/>
+          </a:prstGeom>
+          <a:ln w="19050">
+            <a:solidFill>
+              <a:srgbClr val="9cc5b0"/>
+            </a:solidFill>
+            <a:round/>
+            <a:tailEnd len="med" type="triangle" w="med"/>
+          </a:ln>
+        </p:spPr>
+      </p:cxnSp>
+      <p:sp>
+        <p:nvSpPr>
+          <p:cNvPr id="119" name="Rounded Rectangle 47"/>
+          <p:cNvSpPr/>
+          <p:nvPr/>
+        </p:nvSpPr>
+        <p:spPr>
+          <a:xfrm>
+            <a:off x="10095120" y="2779920"/>
+            <a:ext cx="1060200" cy="1060200"/>
+          </a:xfrm>
+          <a:prstGeom prst="roundRect">
+            <a:avLst>
+              <a:gd name="adj" fmla="val 10000"/>
+            </a:avLst>
+          </a:prstGeom>
+          <a:solidFill>
+            <a:srgbClr val="ffffff"/>
+          </a:solidFill>
+          <a:ln w="19050">
+            <a:solidFill>
+              <a:srgbClr val="2f7a57"/>
+            </a:solidFill>
+            <a:round/>
+          </a:ln>
+          <a:effectLst>
+            <a:outerShdw blurRad="39960" dir="5400000" dist="23040" rotWithShape="0">
+              <a:srgbClr val="000000">
+                <a:alpha val="35000"/>
+              </a:srgbClr>
+            </a:outerShdw>
+          </a:effectLst>
+        </p:spPr>
+        <p:style>
+          <a:lnRef idx="1">
+            <a:schemeClr val="accent1"/>
+          </a:lnRef>
+          <a:fillRef idx="3">
+            <a:schemeClr val="accent1"/>
+          </a:fillRef>
+          <a:effectRef idx="2">
+            <a:schemeClr val="accent1"/>
+          </a:effectRef>
+          <a:fontRef idx="minor"/>
+        </p:style>
+        <p:txBody>
+          <a:bodyPr lIns="45720" rIns="45720" tIns="18360" bIns="18360" anchor="ctr">
+            <a:noAutofit/>
+          </a:bodyPr>
+          <a:p>
+            <a:pPr algn="ctr" defTabSz="457200">
+              <a:lnSpc>
+                <a:spcPct val="100000"/>
+              </a:lnSpc>
+            </a:pPr>
+            <a:r>
+              <a:rPr b="1" lang="en-US" sz="950" spc="-1" strike="noStrike">
+                <a:solidFill>
+                  <a:srgbClr val="2f7a57"/>
+                </a:solidFill>
+                <a:latin typeface="Segoe UI"/>
+              </a:rPr>
+              <a:t>AIForgeCrew</a:t>
+            </a:r>
+            <a:endParaRPr b="0" lang="en-US" sz="950" spc="-1" strike="noStrike">
+              <a:solidFill>
+                <a:srgbClr val="000000"/>
+              </a:solidFill>
+              <a:latin typeface="Arial"/>
+            </a:endParaRPr>
+          </a:p>
+          <a:p>
+            <a:pPr algn="ctr" defTabSz="457200">
+              <a:lnSpc>
+                <a:spcPct val="100000"/>
+              </a:lnSpc>
+            </a:pPr>
+            <a:r>
+              <a:rPr b="0" lang="en-US" sz="690" spc="-1" strike="noStrike">
+                <a:solidFill>
+                  <a:srgbClr val="2f7a57"/>
+                </a:solidFill>
+                <a:latin typeface="Segoe UI"/>
+              </a:rPr>
+              <a:t>our model, on</a:t>
+            </a:r>
+            <a:endParaRPr b="0" lang="en-US" sz="690" spc="-1" strike="noStrike">
+              <a:solidFill>
+                <a:srgbClr val="000000"/>
+              </a:solidFill>
+              <a:latin typeface="Arial"/>
+            </a:endParaRPr>
+          </a:p>
+          <a:p>
+            <a:pPr algn="ctr" defTabSz="457200">
+              <a:lnSpc>
+                <a:spcPct val="100000"/>
+              </a:lnSpc>
+            </a:pPr>
+            <a:r>
+              <a:rPr b="0" lang="en-US" sz="690" spc="-1" strike="noStrike">
+                <a:solidFill>
+                  <a:srgbClr val="2f7a57"/>
+                </a:solidFill>
+                <a:latin typeface="Segoe UI"/>
+              </a:rPr>
+              <a:t>our hardware</a:t>
+            </a:r>
+            <a:endParaRPr b="0" lang="en-US" sz="690" spc="-1" strike="noStrike">
+              <a:solidFill>
+                <a:srgbClr val="000000"/>
+              </a:solidFill>
+              <a:latin typeface="Arial"/>
+            </a:endParaRPr>
+          </a:p>
+        </p:txBody>
+      </p:sp>
+      <p:cxnSp>
+        <p:nvCxnSpPr>
+          <p:cNvPr id="120" name="Connector 48"/>
+          <p:cNvCxnSpPr/>
+          <p:nvPr/>
+        </p:nvCxnSpPr>
+        <p:spPr>
+          <a:xfrm>
+            <a:off x="9984960" y="3328200"/>
+            <a:ext cx="73800" cy="360"/>
+          </a:xfrm>
+          <a:prstGeom prst="straightConnector1">
+            <a:avLst/>
+          </a:prstGeom>
+          <a:ln w="19050">
+            <a:solidFill>
+              <a:srgbClr val="9cc5b0"/>
+            </a:solidFill>
+            <a:round/>
+            <a:tailEnd len="med" type="triangle" w="med"/>
+          </a:ln>
+        </p:spPr>
+      </p:cxnSp>
+      <p:sp>
+        <p:nvSpPr>
+          <p:cNvPr id="121" name="TextBox 49"/>
+          <p:cNvSpPr/>
+          <p:nvPr/>
+        </p:nvSpPr>
+        <p:spPr>
+          <a:xfrm>
+            <a:off x="6912720" y="3986640"/>
+            <a:ext cx="4297320" cy="129960"/>
+          </a:xfrm>
+          <a:prstGeom prst="rect">
+            <a:avLst/>
+          </a:prstGeom>
+          <a:noFill/>
+          <a:ln w="0">
+            <a:noFill/>
+          </a:ln>
+        </p:spPr>
+        <p:style>
+          <a:lnRef idx="0"/>
+          <a:fillRef idx="0"/>
+          <a:effectRef idx="0"/>
+          <a:fontRef idx="minor"/>
+        </p:style>
+        <p:txBody>
+          <a:bodyPr lIns="0" rIns="0" tIns="0" bIns="0" anchor="t">
+            <a:spAutoFit/>
+          </a:bodyPr>
+          <a:p>
+            <a:pPr defTabSz="457200">
+              <a:lnSpc>
+                <a:spcPct val="100000"/>
+              </a:lnSpc>
+            </a:pPr>
+            <a:r>
               <a:rPr b="0" lang="en-US" sz="850" spc="-1" strike="noStrike">
                 <a:solidFill>
+                  <a:srgbClr val="2f7a57"/>
+                </a:solidFill>
+                <a:latin typeface="Segoe UI"/>
+              </a:rPr>
+              <a:t>every call logged  ·  tools scoped to the role  ·  approval before anything leaves</a:t>
+            </a:r>
+            <a:endParaRPr b="0" lang="en-US" sz="850" spc="-1" strike="noStrike">
+              <a:solidFill>
+                <a:srgbClr val="000000"/>
+              </a:solidFill>
+              <a:latin typeface="Arial"/>
+            </a:endParaRPr>
+          </a:p>
+        </p:txBody>
+      </p:sp>
+      <p:sp>
+        <p:nvSpPr>
+          <p:cNvPr id="122" name="TextBox 50"/>
+          <p:cNvSpPr/>
+          <p:nvPr/>
+        </p:nvSpPr>
+        <p:spPr>
+          <a:xfrm>
+            <a:off x="6784920" y="4370760"/>
+            <a:ext cx="4599000" cy="145080"/>
+          </a:xfrm>
+          <a:prstGeom prst="rect">
+            <a:avLst/>
+          </a:prstGeom>
+          <a:noFill/>
+          <a:ln w="0">
+            <a:noFill/>
+          </a:ln>
+        </p:spPr>
+        <p:style>
+          <a:lnRef idx="0"/>
+          <a:fillRef idx="0"/>
+          <a:effectRef idx="0"/>
+          <a:fontRef idx="minor"/>
+        </p:style>
+        <p:txBody>
+          <a:bodyPr lIns="0" rIns="0" tIns="0" bIns="0" anchor="t">
+            <a:spAutoFit/>
+          </a:bodyPr>
+          <a:p>
+            <a:pPr defTabSz="457200">
+              <a:lnSpc>
+                <a:spcPct val="100000"/>
+              </a:lnSpc>
+            </a:pPr>
+            <a:r>
+              <a:rPr b="0" lang="en-US" sz="950" spc="-1" strike="noStrike">
+                <a:solidFill>
+                  <a:srgbClr val="1a202c"/>
+                </a:solidFill>
+                <a:latin typeface="Segoe UI"/>
+              </a:rPr>
+              <a:t>Same engineers, same work — on one path we can see, log and change.</a:t>
+            </a:r>
+            <a:endParaRPr b="0" lang="en-US" sz="950" spc="-1" strike="noStrike">
+              <a:solidFill>
+                <a:srgbClr val="000000"/>
+              </a:solidFill>
+              <a:latin typeface="Arial"/>
+            </a:endParaRPr>
+          </a:p>
+        </p:txBody>
+      </p:sp>
+      <p:sp>
+        <p:nvSpPr>
+          <p:cNvPr id="123" name="Rounded Rectangle 51"/>
+          <p:cNvSpPr/>
+          <p:nvPr/>
+        </p:nvSpPr>
+        <p:spPr>
+          <a:xfrm>
+            <a:off x="567000" y="5047560"/>
+            <a:ext cx="11054880" cy="785880"/>
+          </a:xfrm>
+          <a:prstGeom prst="roundRect">
+            <a:avLst>
+              <a:gd name="adj" fmla="val 16000"/>
+            </a:avLst>
+          </a:prstGeom>
+          <a:solidFill>
+            <a:srgbClr val="f6f8fb"/>
+          </a:solidFill>
+          <a:ln>
+            <a:noFill/>
+          </a:ln>
+          <a:effectLst>
+            <a:outerShdw blurRad="39960" dir="5400000" dist="23040" rotWithShape="0">
+              <a:srgbClr val="000000">
+                <a:alpha val="35000"/>
+              </a:srgbClr>
+            </a:outerShdw>
+          </a:effectLst>
+        </p:spPr>
+        <p:style>
+          <a:lnRef idx="1">
+            <a:schemeClr val="accent1"/>
+          </a:lnRef>
+          <a:fillRef idx="3">
+            <a:schemeClr val="accent1"/>
+          </a:fillRef>
+          <a:effectRef idx="2">
+            <a:schemeClr val="accent1"/>
+          </a:effectRef>
+          <a:fontRef idx="minor"/>
+        </p:style>
+        <p:txBody>
+          <a:bodyPr lIns="90000" rIns="90000" tIns="45000" bIns="45000" anchor="ctr">
+            <a:noAutofit/>
+          </a:bodyPr>
+          <a:p>
+            <a:pPr algn="ctr" defTabSz="457200">
+              <a:lnSpc>
+                <a:spcPct val="100000"/>
+              </a:lnSpc>
+            </a:pPr>
+            <a:endParaRPr b="0" lang="en-US" sz="1800" spc="-1" strike="noStrike">
+              <a:solidFill>
+                <a:schemeClr val="lt1"/>
+              </a:solidFill>
+              <a:latin typeface="Calibri"/>
+            </a:endParaRPr>
+          </a:p>
+        </p:txBody>
+      </p:sp>
+      <p:sp>
+        <p:nvSpPr>
+          <p:cNvPr id="124" name="Oval 52"/>
+          <p:cNvSpPr/>
+          <p:nvPr/>
+        </p:nvSpPr>
+        <p:spPr>
+          <a:xfrm>
+            <a:off x="768240" y="5193720"/>
+            <a:ext cx="273960" cy="273960"/>
+          </a:xfrm>
+          <a:prstGeom prst="ellipse">
+            <a:avLst/>
+          </a:prstGeom>
+          <a:solidFill>
+            <a:srgbClr val="b7791f"/>
+          </a:solidFill>
+          <a:ln>
+            <a:noFill/>
+          </a:ln>
+          <a:effectLst>
+            <a:outerShdw blurRad="39960" dir="5400000" dist="23040" rotWithShape="0">
+              <a:srgbClr val="000000">
+                <a:alpha val="35000"/>
+              </a:srgbClr>
+            </a:outerShdw>
+          </a:effectLst>
+        </p:spPr>
+        <p:style>
+          <a:lnRef idx="1">
+            <a:schemeClr val="accent1"/>
+          </a:lnRef>
+          <a:fillRef idx="3">
+            <a:schemeClr val="accent1"/>
+          </a:fillRef>
+          <a:effectRef idx="2">
+            <a:schemeClr val="accent1"/>
+          </a:effectRef>
+          <a:fontRef idx="minor"/>
+        </p:style>
+        <p:txBody>
+          <a:bodyPr lIns="90000" rIns="90000" tIns="45000" bIns="45000" anchor="ctr">
+            <a:noAutofit/>
+          </a:bodyPr>
+          <a:p>
+            <a:pPr algn="ctr" defTabSz="457200">
+              <a:lnSpc>
+                <a:spcPct val="100000"/>
+              </a:lnSpc>
+            </a:pPr>
+            <a:endParaRPr b="0" lang="en-US" sz="1800" spc="-1" strike="noStrike">
+              <a:solidFill>
+                <a:schemeClr val="lt1"/>
+              </a:solidFill>
+              <a:latin typeface="Calibri"/>
+            </a:endParaRPr>
+          </a:p>
+        </p:txBody>
+      </p:sp>
+      <p:sp>
+        <p:nvSpPr>
+          <p:cNvPr id="125" name="TextBox 53"/>
+          <p:cNvSpPr/>
+          <p:nvPr/>
+        </p:nvSpPr>
+        <p:spPr>
+          <a:xfrm>
+            <a:off x="768240" y="5225760"/>
+            <a:ext cx="273960" cy="153000"/>
+          </a:xfrm>
+          <a:prstGeom prst="rect">
+            <a:avLst/>
+          </a:prstGeom>
+          <a:noFill/>
+          <a:ln w="0">
+            <a:noFill/>
+          </a:ln>
+        </p:spPr>
+        <p:style>
+          <a:lnRef idx="0"/>
+          <a:fillRef idx="0"/>
+          <a:effectRef idx="0"/>
+          <a:fontRef idx="minor"/>
+        </p:style>
+        <p:txBody>
+          <a:bodyPr lIns="0" rIns="0" tIns="0" bIns="0" anchor="t">
+            <a:spAutoFit/>
+          </a:bodyPr>
+          <a:p>
+            <a:pPr algn="ctr" defTabSz="457200">
+              <a:lnSpc>
+                <a:spcPct val="100000"/>
+              </a:lnSpc>
+            </a:pPr>
+            <a:r>
+              <a:rPr b="1" lang="en-US" sz="1000" spc="-1" strike="noStrike">
+                <a:solidFill>
                   <a:srgbClr val="ffffff"/>
                 </a:solidFill>
                 <a:latin typeface="Segoe UI"/>
               </a:rPr>
-              <a:t>the same tools for everyone</a:t>
-            </a:r>
-            <a:endParaRPr b="0" lang="en-US" sz="850" spc="-1" strike="noStrike">
-              <a:solidFill>
-                <a:srgbClr val="ffffff"/>
-              </a:solidFill>
-              <a:latin typeface="Arial"/>
+              <a:t>1</a:t>
+            </a:r>
+            <a:endParaRPr b="0" lang="en-US" sz="1000" spc="-1" strike="noStrike">
+              <a:solidFill>
+                <a:srgbClr val="000000"/>
+              </a:solidFill>
+              <a:latin typeface="Arial"/>
+            </a:endParaRPr>
+          </a:p>
+        </p:txBody>
+      </p:sp>
+      <p:sp>
+        <p:nvSpPr>
+          <p:cNvPr id="126" name="TextBox 54"/>
+          <p:cNvSpPr/>
+          <p:nvPr/>
+        </p:nvSpPr>
+        <p:spPr>
+          <a:xfrm>
+            <a:off x="1152000" y="5175360"/>
+            <a:ext cx="3090240" cy="289800"/>
+          </a:xfrm>
+          <a:prstGeom prst="rect">
+            <a:avLst/>
+          </a:prstGeom>
+          <a:noFill/>
+          <a:ln w="0">
+            <a:noFill/>
+          </a:ln>
+        </p:spPr>
+        <p:style>
+          <a:lnRef idx="0"/>
+          <a:fillRef idx="0"/>
+          <a:effectRef idx="0"/>
+          <a:fontRef idx="minor"/>
+        </p:style>
+        <p:txBody>
+          <a:bodyPr lIns="0" rIns="0" tIns="0" bIns="0" anchor="t">
+            <a:spAutoFit/>
+          </a:bodyPr>
+          <a:p>
+            <a:pPr defTabSz="457200">
+              <a:lnSpc>
+                <a:spcPct val="100000"/>
+              </a:lnSpc>
+            </a:pPr>
+            <a:r>
+              <a:rPr b="1" lang="en-US" sz="950" spc="-1" strike="noStrike">
+                <a:solidFill>
+                  <a:srgbClr val="b7791f"/>
+                </a:solidFill>
+                <a:latin typeface="Segoe UI"/>
+              </a:rPr>
+              <a:t>It lifts every engineer — </a:t>
+            </a:r>
+            <a:r>
+              <a:rPr b="0" lang="en-US" sz="950" spc="-1" strike="noStrike">
+                <a:solidFill>
+                  <a:srgbClr val="1a202c"/>
+                </a:solidFill>
+                <a:latin typeface="Segoe UI"/>
+              </a:rPr>
+              <a:t>a steady boost on real work, and it holds day after day.</a:t>
+            </a:r>
+            <a:endParaRPr b="0" lang="en-US" sz="950" spc="-1" strike="noStrike">
+              <a:solidFill>
+                <a:srgbClr val="000000"/>
+              </a:solidFill>
+              <a:latin typeface="Arial"/>
+            </a:endParaRPr>
+          </a:p>
+        </p:txBody>
+      </p:sp>
+      <p:sp>
+        <p:nvSpPr>
+          <p:cNvPr id="127" name="Oval 55"/>
+          <p:cNvSpPr/>
+          <p:nvPr/>
+        </p:nvSpPr>
+        <p:spPr>
+          <a:xfrm>
+            <a:off x="4443840" y="5193720"/>
+            <a:ext cx="273960" cy="273960"/>
+          </a:xfrm>
+          <a:prstGeom prst="ellipse">
+            <a:avLst/>
+          </a:prstGeom>
+          <a:solidFill>
+            <a:srgbClr val="c53030"/>
+          </a:solidFill>
+          <a:ln>
+            <a:noFill/>
+          </a:ln>
+          <a:effectLst>
+            <a:outerShdw blurRad="39960" dir="5400000" dist="23040" rotWithShape="0">
+              <a:srgbClr val="000000">
+                <a:alpha val="35000"/>
+              </a:srgbClr>
+            </a:outerShdw>
+          </a:effectLst>
+        </p:spPr>
+        <p:style>
+          <a:lnRef idx="1">
+            <a:schemeClr val="accent1"/>
+          </a:lnRef>
+          <a:fillRef idx="3">
+            <a:schemeClr val="accent1"/>
+          </a:fillRef>
+          <a:effectRef idx="2">
+            <a:schemeClr val="accent1"/>
+          </a:effectRef>
+          <a:fontRef idx="minor"/>
+        </p:style>
+        <p:txBody>
+          <a:bodyPr lIns="90000" rIns="90000" tIns="45000" bIns="45000" anchor="ctr">
+            <a:noAutofit/>
+          </a:bodyPr>
+          <a:p>
+            <a:pPr algn="ctr" defTabSz="457200">
+              <a:lnSpc>
+                <a:spcPct val="100000"/>
+              </a:lnSpc>
+            </a:pPr>
+            <a:endParaRPr b="0" lang="en-US" sz="1800" spc="-1" strike="noStrike">
+              <a:solidFill>
+                <a:schemeClr val="lt1"/>
+              </a:solidFill>
+              <a:latin typeface="Calibri"/>
             </a:endParaRPr>
           </a:p>
         </p:txBody>
@@ -13292,6 +13469,295 @@
       <p:sp>
         <p:nvSpPr>
           <p:cNvPr id="128" name="TextBox 56"/>
+          <p:cNvSpPr/>
+          <p:nvPr/>
+        </p:nvSpPr>
+        <p:spPr>
+          <a:xfrm>
+            <a:off x="4443840" y="5225760"/>
+            <a:ext cx="273960" cy="153000"/>
+          </a:xfrm>
+          <a:prstGeom prst="rect">
+            <a:avLst/>
+          </a:prstGeom>
+          <a:noFill/>
+          <a:ln w="0">
+            <a:noFill/>
+          </a:ln>
+        </p:spPr>
+        <p:style>
+          <a:lnRef idx="0"/>
+          <a:fillRef idx="0"/>
+          <a:effectRef idx="0"/>
+          <a:fontRef idx="minor"/>
+        </p:style>
+        <p:txBody>
+          <a:bodyPr lIns="0" rIns="0" tIns="0" bIns="0" anchor="t">
+            <a:spAutoFit/>
+          </a:bodyPr>
+          <a:p>
+            <a:pPr algn="ctr" defTabSz="457200">
+              <a:lnSpc>
+                <a:spcPct val="100000"/>
+              </a:lnSpc>
+            </a:pPr>
+            <a:r>
+              <a:rPr b="1" lang="en-US" sz="1000" spc="-1" strike="noStrike">
+                <a:solidFill>
+                  <a:srgbClr val="ffffff"/>
+                </a:solidFill>
+                <a:latin typeface="Segoe UI"/>
+              </a:rPr>
+              <a:t>2</a:t>
+            </a:r>
+            <a:endParaRPr b="0" lang="en-US" sz="1000" spc="-1" strike="noStrike">
+              <a:solidFill>
+                <a:srgbClr val="000000"/>
+              </a:solidFill>
+              <a:latin typeface="Arial"/>
+            </a:endParaRPr>
+          </a:p>
+        </p:txBody>
+      </p:sp>
+      <p:sp>
+        <p:nvSpPr>
+          <p:cNvPr id="129" name="TextBox 57"/>
+          <p:cNvSpPr/>
+          <p:nvPr/>
+        </p:nvSpPr>
+        <p:spPr>
+          <a:xfrm>
+            <a:off x="4827960" y="5175360"/>
+            <a:ext cx="3090240" cy="289800"/>
+          </a:xfrm>
+          <a:prstGeom prst="rect">
+            <a:avLst/>
+          </a:prstGeom>
+          <a:noFill/>
+          <a:ln w="0">
+            <a:noFill/>
+          </a:ln>
+        </p:spPr>
+        <p:style>
+          <a:lnRef idx="0"/>
+          <a:fillRef idx="0"/>
+          <a:effectRef idx="0"/>
+          <a:fontRef idx="minor"/>
+        </p:style>
+        <p:txBody>
+          <a:bodyPr lIns="0" rIns="0" tIns="0" bIns="0" anchor="t">
+            <a:spAutoFit/>
+          </a:bodyPr>
+          <a:p>
+            <a:pPr defTabSz="457200">
+              <a:lnSpc>
+                <a:spcPct val="100000"/>
+              </a:lnSpc>
+            </a:pPr>
+            <a:r>
+              <a:rPr b="1" lang="en-US" sz="950" spc="-1" strike="noStrike">
+                <a:solidFill>
+                  <a:srgbClr val="c53030"/>
+                </a:solidFill>
+                <a:latin typeface="Segoe UI"/>
+              </a:rPr>
+              <a:t>It is already in use — </a:t>
+            </a:r>
+            <a:r>
+              <a:rPr b="0" lang="en-US" sz="950" spc="-1" strike="noStrike">
+                <a:solidFill>
+                  <a:srgbClr val="1a202c"/>
+                </a:solidFill>
+                <a:latin typeface="Segoe UI"/>
+              </a:rPr>
+              <a:t>installed by whoever wanted it, approved by nobody, logged nowhere.</a:t>
+            </a:r>
+            <a:endParaRPr b="0" lang="en-US" sz="950" spc="-1" strike="noStrike">
+              <a:solidFill>
+                <a:srgbClr val="000000"/>
+              </a:solidFill>
+              <a:latin typeface="Arial"/>
+            </a:endParaRPr>
+          </a:p>
+        </p:txBody>
+      </p:sp>
+      <p:sp>
+        <p:nvSpPr>
+          <p:cNvPr id="130" name="Oval 58"/>
+          <p:cNvSpPr/>
+          <p:nvPr/>
+        </p:nvSpPr>
+        <p:spPr>
+          <a:xfrm>
+            <a:off x="8119800" y="5193720"/>
+            <a:ext cx="273960" cy="273960"/>
+          </a:xfrm>
+          <a:prstGeom prst="ellipse">
+            <a:avLst/>
+          </a:prstGeom>
+          <a:solidFill>
+            <a:srgbClr val="2b6cb0"/>
+          </a:solidFill>
+          <a:ln>
+            <a:noFill/>
+          </a:ln>
+          <a:effectLst>
+            <a:outerShdw blurRad="39960" dir="5400000" dist="23040" rotWithShape="0">
+              <a:srgbClr val="000000">
+                <a:alpha val="35000"/>
+              </a:srgbClr>
+            </a:outerShdw>
+          </a:effectLst>
+        </p:spPr>
+        <p:style>
+          <a:lnRef idx="1">
+            <a:schemeClr val="accent1"/>
+          </a:lnRef>
+          <a:fillRef idx="3">
+            <a:schemeClr val="accent1"/>
+          </a:fillRef>
+          <a:effectRef idx="2">
+            <a:schemeClr val="accent1"/>
+          </a:effectRef>
+          <a:fontRef idx="minor"/>
+        </p:style>
+        <p:txBody>
+          <a:bodyPr lIns="90000" rIns="90000" tIns="45000" bIns="45000" anchor="ctr">
+            <a:noAutofit/>
+          </a:bodyPr>
+          <a:p>
+            <a:pPr algn="ctr" defTabSz="457200">
+              <a:lnSpc>
+                <a:spcPct val="100000"/>
+              </a:lnSpc>
+            </a:pPr>
+            <a:endParaRPr b="0" lang="en-US" sz="1800" spc="-1" strike="noStrike">
+              <a:solidFill>
+                <a:schemeClr val="lt1"/>
+              </a:solidFill>
+              <a:latin typeface="Calibri"/>
+            </a:endParaRPr>
+          </a:p>
+        </p:txBody>
+      </p:sp>
+      <p:sp>
+        <p:nvSpPr>
+          <p:cNvPr id="131" name="TextBox 59"/>
+          <p:cNvSpPr/>
+          <p:nvPr/>
+        </p:nvSpPr>
+        <p:spPr>
+          <a:xfrm>
+            <a:off x="8119800" y="5225760"/>
+            <a:ext cx="273960" cy="153000"/>
+          </a:xfrm>
+          <a:prstGeom prst="rect">
+            <a:avLst/>
+          </a:prstGeom>
+          <a:noFill/>
+          <a:ln w="0">
+            <a:noFill/>
+          </a:ln>
+        </p:spPr>
+        <p:style>
+          <a:lnRef idx="0"/>
+          <a:fillRef idx="0"/>
+          <a:effectRef idx="0"/>
+          <a:fontRef idx="minor"/>
+        </p:style>
+        <p:txBody>
+          <a:bodyPr lIns="0" rIns="0" tIns="0" bIns="0" anchor="t">
+            <a:spAutoFit/>
+          </a:bodyPr>
+          <a:p>
+            <a:pPr algn="ctr" defTabSz="457200">
+              <a:lnSpc>
+                <a:spcPct val="100000"/>
+              </a:lnSpc>
+            </a:pPr>
+            <a:r>
+              <a:rPr b="1" lang="en-US" sz="1000" spc="-1" strike="noStrike">
+                <a:solidFill>
+                  <a:srgbClr val="ffffff"/>
+                </a:solidFill>
+                <a:latin typeface="Segoe UI"/>
+              </a:rPr>
+              <a:t>3</a:t>
+            </a:r>
+            <a:endParaRPr b="0" lang="en-US" sz="1000" spc="-1" strike="noStrike">
+              <a:solidFill>
+                <a:srgbClr val="000000"/>
+              </a:solidFill>
+              <a:latin typeface="Arial"/>
+            </a:endParaRPr>
+          </a:p>
+        </p:txBody>
+      </p:sp>
+      <p:sp>
+        <p:nvSpPr>
+          <p:cNvPr id="132" name="TextBox 60"/>
+          <p:cNvSpPr/>
+          <p:nvPr/>
+        </p:nvSpPr>
+        <p:spPr>
+          <a:xfrm>
+            <a:off x="8503920" y="5175360"/>
+            <a:ext cx="3090240" cy="289800"/>
+          </a:xfrm>
+          <a:prstGeom prst="rect">
+            <a:avLst/>
+          </a:prstGeom>
+          <a:noFill/>
+          <a:ln w="0">
+            <a:noFill/>
+          </a:ln>
+        </p:spPr>
+        <p:style>
+          <a:lnRef idx="0"/>
+          <a:fillRef idx="0"/>
+          <a:effectRef idx="0"/>
+          <a:fontRef idx="minor"/>
+        </p:style>
+        <p:txBody>
+          <a:bodyPr lIns="0" rIns="0" tIns="0" bIns="0" anchor="t">
+            <a:spAutoFit/>
+          </a:bodyPr>
+          <a:p>
+            <a:pPr defTabSz="457200">
+              <a:lnSpc>
+                <a:spcPct val="100000"/>
+              </a:lnSpc>
+            </a:pPr>
+            <a:r>
+              <a:rPr b="1" lang="en-US" sz="950" spc="-1" strike="noStrike">
+                <a:solidFill>
+                  <a:srgbClr val="2b6cb0"/>
+                </a:solidFill>
+                <a:latin typeface="Segoe UI"/>
+              </a:rPr>
+              <a:t>We want that lift for all of us — </a:t>
+            </a:r>
+            <a:r>
+              <a:rPr b="0" lang="en-US" sz="950" spc="-1" strike="noStrike">
+                <a:solidFill>
+                  <a:srgbClr val="1a202c"/>
+                </a:solidFill>
+                <a:latin typeface="Segoe UI"/>
+              </a:rPr>
+              <a:t>one standard toolset, and numbers we can actually show.</a:t>
+            </a:r>
+            <a:endParaRPr b="0" lang="en-US" sz="950" spc="-1" strike="noStrike">
+              <a:solidFill>
+                <a:srgbClr val="000000"/>
+              </a:solidFill>
+              <a:latin typeface="Arial"/>
+            </a:endParaRPr>
+          </a:p>
+        </p:txBody>
+      </p:sp>
+      <p:sp>
+        <p:nvSpPr>
+          <p:cNvPr id="133" name="TextBox 61"/>
           <p:cNvSpPr/>
           <p:nvPr/>
         </p:nvSpPr>
@@ -13374,7 +13840,7 @@
       </p:grpSpPr>
       <p:sp>
         <p:nvSpPr>
-          <p:cNvPr id="129" name="Rectangle 1"/>
+          <p:cNvPr id="134" name="Rectangle 1"/>
           <p:cNvSpPr/>
           <p:nvPr/>
         </p:nvSpPr>
@@ -13433,7 +13899,7 @@
       </p:sp>
       <p:sp>
         <p:nvSpPr>
-          <p:cNvPr id="130" name="Rectangle 2"/>
+          <p:cNvPr id="135" name="Rectangle 2"/>
           <p:cNvSpPr/>
           <p:nvPr/>
         </p:nvSpPr>
@@ -13492,7 +13958,7 @@
       </p:sp>
       <p:sp>
         <p:nvSpPr>
-          <p:cNvPr id="131" name="Rectangle 3"/>
+          <p:cNvPr id="136" name="Rectangle 3"/>
           <p:cNvSpPr/>
           <p:nvPr/>
         </p:nvSpPr>
@@ -13551,7 +14017,7 @@
       </p:sp>
       <p:sp>
         <p:nvSpPr>
-          <p:cNvPr id="132" name="Rectangle 4"/>
+          <p:cNvPr id="137" name="Rectangle 4"/>
           <p:cNvSpPr/>
           <p:nvPr/>
         </p:nvSpPr>
@@ -13610,7 +14076,7 @@
       </p:sp>
       <p:sp>
         <p:nvSpPr>
-          <p:cNvPr id="133" name="TextBox 5"/>
+          <p:cNvPr id="138" name="TextBox 5"/>
           <p:cNvSpPr/>
           <p:nvPr/>
         </p:nvSpPr>
@@ -13663,7 +14129,7 @@
       </p:sp>
       <p:sp>
         <p:nvSpPr>
-          <p:cNvPr id="134" name="TextBox 6"/>
+          <p:cNvPr id="139" name="TextBox 6"/>
           <p:cNvSpPr/>
           <p:nvPr/>
         </p:nvSpPr>
@@ -13716,7 +14182,7 @@
       </p:sp>
       <p:sp>
         <p:nvSpPr>
-          <p:cNvPr id="135" name="Oval 7"/>
+          <p:cNvPr id="140" name="Oval 7"/>
           <p:cNvSpPr/>
           <p:nvPr/>
         </p:nvSpPr>
@@ -13778,7 +14244,7 @@
       </p:sp>
       <p:sp>
         <p:nvSpPr>
-          <p:cNvPr id="136" name="TextBox 8"/>
+          <p:cNvPr id="141" name="TextBox 8"/>
           <p:cNvSpPr/>
           <p:nvPr/>
         </p:nvSpPr>
@@ -13831,7 +14297,7 @@
       </p:sp>
       <p:sp>
         <p:nvSpPr>
-          <p:cNvPr id="137" name="TextBox 9"/>
+          <p:cNvPr id="142" name="TextBox 9"/>
           <p:cNvSpPr/>
           <p:nvPr/>
         </p:nvSpPr>
@@ -13884,7 +14350,7 @@
       </p:sp>
       <p:sp>
         <p:nvSpPr>
-          <p:cNvPr id="138" name="Oval 10"/>
+          <p:cNvPr id="143" name="Oval 10"/>
           <p:cNvSpPr/>
           <p:nvPr/>
         </p:nvSpPr>
@@ -13946,7 +14412,7 @@
       </p:sp>
       <p:sp>
         <p:nvSpPr>
-          <p:cNvPr id="139" name="TextBox 11"/>
+          <p:cNvPr id="144" name="TextBox 11"/>
           <p:cNvSpPr/>
           <p:nvPr/>
         </p:nvSpPr>
@@ -13999,7 +14465,7 @@
       </p:sp>
       <p:sp>
         <p:nvSpPr>
-          <p:cNvPr id="140" name="TextBox 12"/>
+          <p:cNvPr id="145" name="TextBox 12"/>
           <p:cNvSpPr/>
           <p:nvPr/>
         </p:nvSpPr>
@@ -14052,7 +14518,7 @@
       </p:sp>
       <p:sp>
         <p:nvSpPr>
-          <p:cNvPr id="141" name="Oval 13"/>
+          <p:cNvPr id="146" name="Oval 13"/>
           <p:cNvSpPr/>
           <p:nvPr/>
         </p:nvSpPr>
@@ -14114,7 +14580,7 @@
       </p:sp>
       <p:sp>
         <p:nvSpPr>
-          <p:cNvPr id="142" name="TextBox 14"/>
+          <p:cNvPr id="147" name="TextBox 14"/>
           <p:cNvSpPr/>
           <p:nvPr/>
         </p:nvSpPr>
@@ -14167,7 +14633,7 @@
       </p:sp>
       <p:sp>
         <p:nvSpPr>
-          <p:cNvPr id="143" name="TextBox 15"/>
+          <p:cNvPr id="148" name="TextBox 15"/>
           <p:cNvSpPr/>
           <p:nvPr/>
         </p:nvSpPr>
@@ -14220,7 +14686,7 @@
       </p:sp>
       <p:sp>
         <p:nvSpPr>
-          <p:cNvPr id="144" name="Oval 16"/>
+          <p:cNvPr id="149" name="Oval 16"/>
           <p:cNvSpPr/>
           <p:nvPr/>
         </p:nvSpPr>
@@ -14282,7 +14748,7 @@
       </p:sp>
       <p:sp>
         <p:nvSpPr>
-          <p:cNvPr id="145" name="TextBox 17"/>
+          <p:cNvPr id="150" name="TextBox 17"/>
           <p:cNvSpPr/>
           <p:nvPr/>
         </p:nvSpPr>
@@ -14335,7 +14801,7 @@
       </p:sp>
       <p:sp>
         <p:nvSpPr>
-          <p:cNvPr id="146" name="TextBox 18"/>
+          <p:cNvPr id="151" name="TextBox 18"/>
           <p:cNvSpPr/>
           <p:nvPr/>
         </p:nvSpPr>
@@ -14388,7 +14854,7 @@
       </p:sp>
       <p:sp>
         <p:nvSpPr>
-          <p:cNvPr id="147" name="TextBox 19"/>
+          <p:cNvPr id="152" name="TextBox 19"/>
           <p:cNvSpPr/>
           <p:nvPr/>
         </p:nvSpPr>
@@ -14441,7 +14907,7 @@
       </p:sp>
       <p:sp>
         <p:nvSpPr>
-          <p:cNvPr id="148" name="Oval 20"/>
+          <p:cNvPr id="153" name="Oval 20"/>
           <p:cNvSpPr/>
           <p:nvPr/>
         </p:nvSpPr>
@@ -14500,7 +14966,7 @@
       </p:sp>
       <p:sp>
         <p:nvSpPr>
-          <p:cNvPr id="149" name="Oval 21"/>
+          <p:cNvPr id="154" name="Oval 21"/>
           <p:cNvSpPr/>
           <p:nvPr/>
         </p:nvSpPr>
@@ -14612,7 +15078,7 @@
       </p:sp>
       <p:sp>
         <p:nvSpPr>
-          <p:cNvPr id="150" name="Rounded Rectangle 22"/>
+          <p:cNvPr id="155" name="Rounded Rectangle 22"/>
           <p:cNvSpPr/>
           <p:nvPr/>
         </p:nvSpPr>
@@ -14707,7 +15173,7 @@
       </p:sp>
       <p:cxnSp>
         <p:nvCxnSpPr>
-          <p:cNvPr id="151" name="Connector 23"/>
+          <p:cNvPr id="156" name="Connector 23"/>
           <p:cNvCxnSpPr/>
           <p:nvPr/>
         </p:nvCxnSpPr>
@@ -14730,7 +15196,7 @@
       </p:cxnSp>
       <p:sp>
         <p:nvSpPr>
-          <p:cNvPr id="152" name="Rounded Rectangle 24"/>
+          <p:cNvPr id="157" name="Rounded Rectangle 24"/>
           <p:cNvSpPr/>
           <p:nvPr/>
         </p:nvSpPr>
@@ -14825,7 +15291,7 @@
       </p:sp>
       <p:cxnSp>
         <p:nvCxnSpPr>
-          <p:cNvPr id="153" name="Connector 25"/>
+          <p:cNvPr id="158" name="Connector 25"/>
           <p:cNvCxnSpPr/>
           <p:nvPr/>
         </p:nvCxnSpPr>
@@ -14848,7 +15314,7 @@
       </p:cxnSp>
       <p:sp>
         <p:nvSpPr>
-          <p:cNvPr id="154" name="Rounded Rectangle 26"/>
+          <p:cNvPr id="159" name="Rounded Rectangle 26"/>
           <p:cNvSpPr/>
           <p:nvPr/>
         </p:nvSpPr>
@@ -14943,7 +15409,7 @@
       </p:sp>
       <p:cxnSp>
         <p:nvCxnSpPr>
-          <p:cNvPr id="155" name="Connector 27"/>
+          <p:cNvPr id="160" name="Connector 27"/>
           <p:cNvCxnSpPr/>
           <p:nvPr/>
         </p:nvCxnSpPr>
@@ -14966,7 +15432,7 @@
       </p:cxnSp>
       <p:sp>
         <p:nvSpPr>
-          <p:cNvPr id="156" name="Rounded Rectangle 28"/>
+          <p:cNvPr id="161" name="Rounded Rectangle 28"/>
           <p:cNvSpPr/>
           <p:nvPr/>
         </p:nvSpPr>
@@ -15061,7 +15527,7 @@
       </p:sp>
       <p:cxnSp>
         <p:nvCxnSpPr>
-          <p:cNvPr id="157" name="Connector 29"/>
+          <p:cNvPr id="162" name="Connector 29"/>
           <p:cNvCxnSpPr/>
           <p:nvPr/>
         </p:nvCxnSpPr>
@@ -15084,7 +15550,7 @@
       </p:cxnSp>
       <p:sp>
         <p:nvSpPr>
-          <p:cNvPr id="158" name="Rounded Rectangle 30"/>
+          <p:cNvPr id="163" name="Rounded Rectangle 30"/>
           <p:cNvSpPr/>
           <p:nvPr/>
         </p:nvSpPr>
@@ -15179,7 +15645,7 @@
       </p:sp>
       <p:cxnSp>
         <p:nvCxnSpPr>
-          <p:cNvPr id="159" name="Connector 31"/>
+          <p:cNvPr id="164" name="Connector 31"/>
           <p:cNvCxnSpPr/>
           <p:nvPr/>
         </p:nvCxnSpPr>
@@ -15202,7 +15668,7 @@
       </p:cxnSp>
       <p:sp>
         <p:nvSpPr>
-          <p:cNvPr id="160" name="Rounded Rectangle 32"/>
+          <p:cNvPr id="165" name="Rounded Rectangle 32"/>
           <p:cNvSpPr/>
           <p:nvPr/>
         </p:nvSpPr>
@@ -15297,7 +15763,7 @@
       </p:sp>
       <p:cxnSp>
         <p:nvCxnSpPr>
-          <p:cNvPr id="161" name="Connector 33"/>
+          <p:cNvPr id="166" name="Connector 33"/>
           <p:cNvCxnSpPr/>
           <p:nvPr/>
         </p:nvCxnSpPr>
@@ -15320,7 +15786,7 @@
       </p:cxnSp>
       <p:sp>
         <p:nvSpPr>
-          <p:cNvPr id="162" name="TextBox 34"/>
+          <p:cNvPr id="167" name="TextBox 34"/>
           <p:cNvSpPr/>
           <p:nvPr/>
         </p:nvSpPr>
@@ -15373,7 +15839,7 @@
       </p:sp>
       <p:sp>
         <p:nvSpPr>
-          <p:cNvPr id="163" name="TextBox 35"/>
+          <p:cNvPr id="168" name="TextBox 35"/>
           <p:cNvSpPr/>
           <p:nvPr/>
         </p:nvSpPr>
@@ -15426,7 +15892,7 @@
       </p:sp>
       <p:sp>
         <p:nvSpPr>
-          <p:cNvPr id="164" name="TextBox 36"/>
+          <p:cNvPr id="169" name="TextBox 36"/>
           <p:cNvSpPr/>
           <p:nvPr/>
         </p:nvSpPr>
@@ -15479,7 +15945,7 @@
       </p:sp>
       <p:sp>
         <p:nvSpPr>
-          <p:cNvPr id="165" name="Chevron 37"/>
+          <p:cNvPr id="170" name="Chevron 37"/>
           <p:cNvSpPr/>
           <p:nvPr/>
         </p:nvSpPr>
@@ -15552,7 +16018,7 @@
       </p:sp>
       <p:sp>
         <p:nvSpPr>
-          <p:cNvPr id="166" name="Chevron 38"/>
+          <p:cNvPr id="171" name="Chevron 38"/>
           <p:cNvSpPr/>
           <p:nvPr/>
         </p:nvSpPr>
@@ -15625,7 +16091,7 @@
       </p:sp>
       <p:sp>
         <p:nvSpPr>
-          <p:cNvPr id="167" name="Chevron 39"/>
+          <p:cNvPr id="172" name="Chevron 39"/>
           <p:cNvSpPr/>
           <p:nvPr/>
         </p:nvSpPr>
@@ -15698,7 +16164,7 @@
       </p:sp>
       <p:sp>
         <p:nvSpPr>
-          <p:cNvPr id="168" name="Chevron 40"/>
+          <p:cNvPr id="173" name="Chevron 40"/>
           <p:cNvSpPr/>
           <p:nvPr/>
         </p:nvSpPr>
@@ -15771,7 +16237,7 @@
       </p:sp>
       <p:sp>
         <p:nvSpPr>
-          <p:cNvPr id="169" name="Chevron 41"/>
+          <p:cNvPr id="174" name="Chevron 41"/>
           <p:cNvSpPr/>
           <p:nvPr/>
         </p:nvSpPr>
@@ -15844,7 +16310,7 @@
       </p:sp>
       <p:sp>
         <p:nvSpPr>
-          <p:cNvPr id="170" name="Chevron 42"/>
+          <p:cNvPr id="175" name="Chevron 42"/>
           <p:cNvSpPr/>
           <p:nvPr/>
         </p:nvSpPr>
@@ -15917,7 +16383,7 @@
       </p:sp>
       <p:sp>
         <p:nvSpPr>
-          <p:cNvPr id="171" name="TextBox 43"/>
+          <p:cNvPr id="176" name="TextBox 43"/>
           <p:cNvSpPr/>
           <p:nvPr/>
         </p:nvSpPr>
@@ -15970,7 +16436,7 @@
       </p:sp>
       <p:sp>
         <p:nvSpPr>
-          <p:cNvPr id="172" name="Rounded Rectangle 44"/>
+          <p:cNvPr id="177" name="Rounded Rectangle 44"/>
           <p:cNvSpPr/>
           <p:nvPr/>
         </p:nvSpPr>
@@ -16031,7 +16497,7 @@
       </p:sp>
       <p:sp>
         <p:nvSpPr>
-          <p:cNvPr id="173" name="Oval 45"/>
+          <p:cNvPr id="178" name="Oval 45"/>
           <p:cNvSpPr/>
           <p:nvPr/>
         </p:nvSpPr>
@@ -16090,7 +16556,7 @@
       </p:sp>
       <p:sp>
         <p:nvSpPr>
-          <p:cNvPr id="174" name="TextBox 46"/>
+          <p:cNvPr id="179" name="TextBox 46"/>
           <p:cNvSpPr/>
           <p:nvPr/>
         </p:nvSpPr>
@@ -16143,7 +16609,7 @@
       </p:sp>
       <p:sp>
         <p:nvSpPr>
-          <p:cNvPr id="175" name="TextBox 47"/>
+          <p:cNvPr id="180" name="TextBox 47"/>
           <p:cNvSpPr/>
           <p:nvPr/>
         </p:nvSpPr>
@@ -16205,7 +16671,7 @@
       </p:sp>
       <p:sp>
         <p:nvSpPr>
-          <p:cNvPr id="176" name="Oval 48"/>
+          <p:cNvPr id="181" name="Oval 48"/>
           <p:cNvSpPr/>
           <p:nvPr/>
         </p:nvSpPr>
@@ -16264,7 +16730,7 @@
       </p:sp>
       <p:sp>
         <p:nvSpPr>
-          <p:cNvPr id="177" name="TextBox 49"/>
+          <p:cNvPr id="182" name="TextBox 49"/>
           <p:cNvSpPr/>
           <p:nvPr/>
         </p:nvSpPr>
@@ -16317,7 +16783,7 @@
       </p:sp>
       <p:sp>
         <p:nvSpPr>
-          <p:cNvPr id="178" name="TextBox 50"/>
+          <p:cNvPr id="183" name="TextBox 50"/>
           <p:cNvSpPr/>
           <p:nvPr/>
         </p:nvSpPr>
@@ -16379,7 +16845,7 @@
       </p:sp>
       <p:sp>
         <p:nvSpPr>
-          <p:cNvPr id="179" name="TextBox 51"/>
+          <p:cNvPr id="184" name="TextBox 51"/>
           <p:cNvSpPr/>
           <p:nvPr/>
         </p:nvSpPr>
@@ -16432,7 +16898,7 @@
       </p:sp>
       <p:sp>
         <p:nvSpPr>
-          <p:cNvPr id="180" name="TextBox 52"/>
+          <p:cNvPr id="185" name="TextBox 52"/>
           <p:cNvSpPr/>
           <p:nvPr/>
         </p:nvSpPr>
@@ -16515,7 +16981,7 @@
       </p:grpSpPr>
       <p:sp>
         <p:nvSpPr>
-          <p:cNvPr id="181" name="Rectangle 1"/>
+          <p:cNvPr id="186" name="Rectangle 1"/>
           <p:cNvSpPr/>
           <p:nvPr/>
         </p:nvSpPr>
@@ -16574,7 +17040,7 @@
       </p:sp>
       <p:sp>
         <p:nvSpPr>
-          <p:cNvPr id="182" name="Rectangle 2"/>
+          <p:cNvPr id="187" name="Rectangle 2"/>
           <p:cNvSpPr/>
           <p:nvPr/>
         </p:nvSpPr>
@@ -16633,7 +17099,7 @@
       </p:sp>
       <p:sp>
         <p:nvSpPr>
-          <p:cNvPr id="183" name="Rectangle 3"/>
+          <p:cNvPr id="188" name="Rectangle 3"/>
           <p:cNvSpPr/>
           <p:nvPr/>
         </p:nvSpPr>
@@ -16692,7 +17158,7 @@
       </p:sp>
       <p:sp>
         <p:nvSpPr>
-          <p:cNvPr id="184" name="Rectangle 4"/>
+          <p:cNvPr id="189" name="Rectangle 4"/>
           <p:cNvSpPr/>
           <p:nvPr/>
         </p:nvSpPr>
@@ -16751,7 +17217,7 @@
       </p:sp>
       <p:sp>
         <p:nvSpPr>
-          <p:cNvPr id="185" name="TextBox 5"/>
+          <p:cNvPr id="190" name="TextBox 5"/>
           <p:cNvSpPr/>
           <p:nvPr/>
         </p:nvSpPr>
@@ -16804,7 +17270,7 @@
       </p:sp>
       <p:sp>
         <p:nvSpPr>
-          <p:cNvPr id="186" name="TextBox 6"/>
+          <p:cNvPr id="191" name="TextBox 6"/>
           <p:cNvSpPr/>
           <p:nvPr/>
         </p:nvSpPr>
@@ -16857,7 +17323,7 @@
       </p:sp>
       <p:sp>
         <p:nvSpPr>
-          <p:cNvPr id="187" name="Oval 7"/>
+          <p:cNvPr id="192" name="Oval 7"/>
           <p:cNvSpPr/>
           <p:nvPr/>
         </p:nvSpPr>
@@ -16919,7 +17385,7 @@
       </p:sp>
       <p:sp>
         <p:nvSpPr>
-          <p:cNvPr id="188" name="TextBox 8"/>
+          <p:cNvPr id="193" name="TextBox 8"/>
           <p:cNvSpPr/>
           <p:nvPr/>
         </p:nvSpPr>
@@ -16972,7 +17438,7 @@
       </p:sp>
       <p:sp>
         <p:nvSpPr>
-          <p:cNvPr id="189" name="TextBox 9"/>
+          <p:cNvPr id="194" name="TextBox 9"/>
           <p:cNvSpPr/>
           <p:nvPr/>
         </p:nvSpPr>
@@ -17025,7 +17491,7 @@
       </p:sp>
       <p:sp>
         <p:nvSpPr>
-          <p:cNvPr id="190" name="Oval 10"/>
+          <p:cNvPr id="195" name="Oval 10"/>
           <p:cNvSpPr/>
           <p:nvPr/>
         </p:nvSpPr>
@@ -17087,7 +17553,7 @@
       </p:sp>
       <p:sp>
         <p:nvSpPr>
-          <p:cNvPr id="191" name="TextBox 11"/>
+          <p:cNvPr id="196" name="TextBox 11"/>
           <p:cNvSpPr/>
           <p:nvPr/>
         </p:nvSpPr>
@@ -17140,7 +17606,7 @@
       </p:sp>
       <p:sp>
         <p:nvSpPr>
-          <p:cNvPr id="192" name="TextBox 12"/>
+          <p:cNvPr id="197" name="TextBox 12"/>
           <p:cNvSpPr/>
           <p:nvPr/>
         </p:nvSpPr>
@@ -17193,7 +17659,7 @@
       </p:sp>
       <p:sp>
         <p:nvSpPr>
-          <p:cNvPr id="193" name="Oval 13"/>
+          <p:cNvPr id="198" name="Oval 13"/>
           <p:cNvSpPr/>
           <p:nvPr/>
         </p:nvSpPr>
@@ -17255,7 +17721,7 @@
       </p:sp>
       <p:sp>
         <p:nvSpPr>
-          <p:cNvPr id="194" name="TextBox 14"/>
+          <p:cNvPr id="199" name="TextBox 14"/>
           <p:cNvSpPr/>
           <p:nvPr/>
         </p:nvSpPr>
@@ -17308,7 +17774,7 @@
       </p:sp>
       <p:sp>
         <p:nvSpPr>
-          <p:cNvPr id="195" name="TextBox 15"/>
+          <p:cNvPr id="200" name="TextBox 15"/>
           <p:cNvSpPr/>
           <p:nvPr/>
         </p:nvSpPr>
@@ -17361,7 +17827,7 @@
       </p:sp>
       <p:sp>
         <p:nvSpPr>
-          <p:cNvPr id="196" name="TextBox 16"/>
+          <p:cNvPr id="201" name="TextBox 16"/>
           <p:cNvSpPr/>
           <p:nvPr/>
         </p:nvSpPr>
@@ -17414,7 +17880,7 @@
       </p:sp>
       <p:sp>
         <p:nvSpPr>
-          <p:cNvPr id="197" name="Oval 17"/>
+          <p:cNvPr id="202" name="Oval 17"/>
           <p:cNvSpPr/>
           <p:nvPr/>
         </p:nvSpPr>
@@ -17476,7 +17942,7 @@
       </p:sp>
       <p:sp>
         <p:nvSpPr>
-          <p:cNvPr id="198" name="Oval 18"/>
+          <p:cNvPr id="203" name="Oval 18"/>
           <p:cNvSpPr/>
           <p:nvPr/>
         </p:nvSpPr>
@@ -17538,7 +18004,7 @@
       </p:sp>
       <p:sp>
         <p:nvSpPr>
-          <p:cNvPr id="199" name="Oval 19"/>
+          <p:cNvPr id="204" name="Oval 19"/>
           <p:cNvSpPr/>
           <p:nvPr/>
         </p:nvSpPr>
@@ -17600,7 +18066,7 @@
       </p:sp>
       <p:sp>
         <p:nvSpPr>
-          <p:cNvPr id="200" name="Oval 20"/>
+          <p:cNvPr id="205" name="Oval 20"/>
           <p:cNvSpPr/>
           <p:nvPr/>
         </p:nvSpPr>
@@ -17690,7 +18156,7 @@
       </p:sp>
       <p:sp>
         <p:nvSpPr>
-          <p:cNvPr id="201" name="Rounded Rectangle 21"/>
+          <p:cNvPr id="206" name="Rounded Rectangle 21"/>
           <p:cNvSpPr/>
           <p:nvPr/>
         </p:nvSpPr>
@@ -17754,7 +18220,7 @@
       </p:sp>
       <p:sp>
         <p:nvSpPr>
-          <p:cNvPr id="202" name="TextBox 22"/>
+          <p:cNvPr id="207" name="TextBox 22"/>
           <p:cNvSpPr/>
           <p:nvPr/>
         </p:nvSpPr>
@@ -17807,7 +18273,7 @@
       </p:sp>
       <p:sp>
         <p:nvSpPr>
-          <p:cNvPr id="203" name="Rounded Rectangle 23"/>
+          <p:cNvPr id="208" name="Rounded Rectangle 23"/>
           <p:cNvSpPr/>
           <p:nvPr/>
         </p:nvSpPr>
@@ -17871,7 +18337,7 @@
       </p:sp>
       <p:sp>
         <p:nvSpPr>
-          <p:cNvPr id="204" name="TextBox 24"/>
+          <p:cNvPr id="209" name="TextBox 24"/>
           <p:cNvSpPr/>
           <p:nvPr/>
         </p:nvSpPr>
@@ -17924,7 +18390,7 @@
       </p:sp>
       <p:sp>
         <p:nvSpPr>
-          <p:cNvPr id="205" name="Rounded Rectangle 25"/>
+          <p:cNvPr id="210" name="Rounded Rectangle 25"/>
           <p:cNvSpPr/>
           <p:nvPr/>
         </p:nvSpPr>
@@ -17988,7 +18454,7 @@
       </p:sp>
       <p:sp>
         <p:nvSpPr>
-          <p:cNvPr id="206" name="TextBox 26"/>
+          <p:cNvPr id="211" name="TextBox 26"/>
           <p:cNvSpPr/>
           <p:nvPr/>
         </p:nvSpPr>
@@ -18041,7 +18507,7 @@
       </p:sp>
       <p:sp>
         <p:nvSpPr>
-          <p:cNvPr id="207" name="TextBox 27"/>
+          <p:cNvPr id="212" name="TextBox 27"/>
           <p:cNvSpPr/>
           <p:nvPr/>
         </p:nvSpPr>
@@ -18094,7 +18560,7 @@
       </p:sp>
       <p:sp>
         <p:nvSpPr>
-          <p:cNvPr id="208" name="TextBox 28"/>
+          <p:cNvPr id="213" name="TextBox 28"/>
           <p:cNvSpPr/>
           <p:nvPr/>
         </p:nvSpPr>
@@ -18147,7 +18613,7 @@
       </p:sp>
       <p:cxnSp>
         <p:nvCxnSpPr>
-          <p:cNvPr id="209" name="Connector 29"/>
+          <p:cNvPr id="214" name="Connector 29"/>
           <p:cNvCxnSpPr/>
           <p:nvPr/>
         </p:nvCxnSpPr>
@@ -18170,7 +18636,7 @@
       </p:cxnSp>
       <p:sp>
         <p:nvSpPr>
-          <p:cNvPr id="210" name="TextBox 30"/>
+          <p:cNvPr id="215" name="TextBox 30"/>
           <p:cNvSpPr/>
           <p:nvPr/>
         </p:nvSpPr>
@@ -18223,7 +18689,7 @@
       </p:sp>
       <p:sp>
         <p:nvSpPr>
-          <p:cNvPr id="211" name="TextBox 31"/>
+          <p:cNvPr id="216" name="TextBox 31"/>
           <p:cNvSpPr/>
           <p:nvPr/>
         </p:nvSpPr>
@@ -18276,7 +18742,7 @@
       </p:sp>
       <p:cxnSp>
         <p:nvCxnSpPr>
-          <p:cNvPr id="212" name="Connector 32"/>
+          <p:cNvPr id="217" name="Connector 32"/>
           <p:cNvCxnSpPr/>
           <p:nvPr/>
         </p:nvCxnSpPr>
@@ -18299,7 +18765,7 @@
       </p:cxnSp>
       <p:sp>
         <p:nvSpPr>
-          <p:cNvPr id="213" name="TextBox 33"/>
+          <p:cNvPr id="218" name="TextBox 33"/>
           <p:cNvSpPr/>
           <p:nvPr/>
         </p:nvSpPr>
@@ -18352,7 +18818,7 @@
       </p:sp>
       <p:sp>
         <p:nvSpPr>
-          <p:cNvPr id="214" name="TextBox 34"/>
+          <p:cNvPr id="219" name="TextBox 34"/>
           <p:cNvSpPr/>
           <p:nvPr/>
         </p:nvSpPr>
@@ -18405,7 +18871,7 @@
       </p:sp>
       <p:cxnSp>
         <p:nvCxnSpPr>
-          <p:cNvPr id="215" name="Connector 35"/>
+          <p:cNvPr id="220" name="Connector 35"/>
           <p:cNvCxnSpPr/>
           <p:nvPr/>
         </p:nvCxnSpPr>
@@ -18428,7 +18894,7 @@
       </p:cxnSp>
       <p:sp>
         <p:nvSpPr>
-          <p:cNvPr id="216" name="TextBox 36"/>
+          <p:cNvPr id="221" name="TextBox 36"/>
           <p:cNvSpPr/>
           <p:nvPr/>
         </p:nvSpPr>
@@ -18481,7 +18947,7 @@
       </p:sp>
       <p:sp>
         <p:nvSpPr>
-          <p:cNvPr id="217" name="Rounded Rectangle 37"/>
+          <p:cNvPr id="222" name="Rounded Rectangle 37"/>
           <p:cNvSpPr/>
           <p:nvPr/>
         </p:nvSpPr>
@@ -18542,7 +19008,7 @@
       </p:sp>
       <p:sp>
         <p:nvSpPr>
-          <p:cNvPr id="218" name="TextBox 38"/>
+          <p:cNvPr id="223" name="TextBox 38"/>
           <p:cNvSpPr/>
           <p:nvPr/>
         </p:nvSpPr>
@@ -18604,7 +19070,7 @@
       </p:sp>
       <p:sp>
         <p:nvSpPr>
-          <p:cNvPr id="219" name="TextBox 39"/>
+          <p:cNvPr id="224" name="TextBox 39"/>
           <p:cNvSpPr/>
           <p:nvPr/>
         </p:nvSpPr>
@@ -18657,7 +19123,7 @@
       </p:sp>
       <p:sp>
         <p:nvSpPr>
-          <p:cNvPr id="220" name="TextBox 40"/>
+          <p:cNvPr id="225" name="TextBox 40"/>
           <p:cNvSpPr/>
           <p:nvPr/>
         </p:nvSpPr>
@@ -18710,7 +19176,7 @@
       </p:sp>
       <p:sp>
         <p:nvSpPr>
-          <p:cNvPr id="221" name="TextBox 41"/>
+          <p:cNvPr id="226" name="TextBox 41"/>
           <p:cNvSpPr/>
           <p:nvPr/>
         </p:nvSpPr>
@@ -18763,7 +19229,7 @@
       </p:sp>
       <p:sp>
         <p:nvSpPr>
-          <p:cNvPr id="222" name="Rounded Rectangle 42"/>
+          <p:cNvPr id="227" name="Rounded Rectangle 42"/>
           <p:cNvSpPr/>
           <p:nvPr/>
         </p:nvSpPr>
@@ -18824,7 +19290,7 @@
       </p:sp>
       <p:sp>
         <p:nvSpPr>
-          <p:cNvPr id="223" name="TextBox 43"/>
+          <p:cNvPr id="228" name="TextBox 43"/>
           <p:cNvSpPr/>
           <p:nvPr/>
         </p:nvSpPr>
@@ -18886,7 +19352,7 @@
       </p:sp>
       <p:sp>
         <p:nvSpPr>
-          <p:cNvPr id="224" name="TextBox 44"/>
+          <p:cNvPr id="229" name="TextBox 44"/>
           <p:cNvSpPr/>
           <p:nvPr/>
         </p:nvSpPr>
@@ -18939,7 +19405,7 @@
       </p:sp>
       <p:sp>
         <p:nvSpPr>
-          <p:cNvPr id="225" name="TextBox 45"/>
+          <p:cNvPr id="230" name="TextBox 45"/>
           <p:cNvSpPr/>
           <p:nvPr/>
         </p:nvSpPr>
@@ -18992,7 +19458,7 @@
       </p:sp>
       <p:sp>
         <p:nvSpPr>
-          <p:cNvPr id="226" name="TextBox 46"/>
+          <p:cNvPr id="231" name="TextBox 46"/>
           <p:cNvSpPr/>
           <p:nvPr/>
         </p:nvSpPr>
@@ -19045,7 +19511,7 @@
       </p:sp>
       <p:sp>
         <p:nvSpPr>
-          <p:cNvPr id="227" name="TextBox 47"/>
+          <p:cNvPr id="232" name="TextBox 47"/>
           <p:cNvSpPr/>
           <p:nvPr/>
         </p:nvSpPr>
@@ -19098,7 +19564,7 @@
       </p:sp>
       <p:sp>
         <p:nvSpPr>
-          <p:cNvPr id="228" name="Rectangle 48"/>
+          <p:cNvPr id="233" name="Rectangle 48"/>
           <p:cNvSpPr/>
           <p:nvPr/>
         </p:nvSpPr>
@@ -19157,7 +19623,7 @@
       </p:sp>
       <p:sp>
         <p:nvSpPr>
-          <p:cNvPr id="229" name="Oval 49"/>
+          <p:cNvPr id="234" name="Oval 49"/>
           <p:cNvSpPr/>
           <p:nvPr/>
         </p:nvSpPr>
@@ -19216,7 +19682,7 @@
       </p:sp>
       <p:sp>
         <p:nvSpPr>
-          <p:cNvPr id="230" name="TextBox 50"/>
+          <p:cNvPr id="235" name="TextBox 50"/>
           <p:cNvSpPr/>
           <p:nvPr/>
         </p:nvSpPr>
@@ -19269,7 +19735,7 @@
       </p:sp>
       <p:sp>
         <p:nvSpPr>
-          <p:cNvPr id="231" name="TextBox 51"/>
+          <p:cNvPr id="236" name="TextBox 51"/>
           <p:cNvSpPr/>
           <p:nvPr/>
         </p:nvSpPr>
@@ -19331,7 +19797,7 @@
       </p:sp>
       <p:sp>
         <p:nvSpPr>
-          <p:cNvPr id="232" name="Oval 52"/>
+          <p:cNvPr id="237" name="Oval 52"/>
           <p:cNvSpPr/>
           <p:nvPr/>
         </p:nvSpPr>
@@ -19390,7 +19856,7 @@
       </p:sp>
       <p:sp>
         <p:nvSpPr>
-          <p:cNvPr id="233" name="TextBox 53"/>
+          <p:cNvPr id="238" name="TextBox 53"/>
           <p:cNvSpPr/>
           <p:nvPr/>
         </p:nvSpPr>
@@ -19443,7 +19909,7 @@
       </p:sp>
       <p:sp>
         <p:nvSpPr>
-          <p:cNvPr id="234" name="TextBox 54"/>
+          <p:cNvPr id="239" name="TextBox 54"/>
           <p:cNvSpPr/>
           <p:nvPr/>
         </p:nvSpPr>
@@ -19505,7 +19971,7 @@
       </p:sp>
       <p:sp>
         <p:nvSpPr>
-          <p:cNvPr id="235" name="Oval 55"/>
+          <p:cNvPr id="240" name="Oval 55"/>
           <p:cNvSpPr/>
           <p:nvPr/>
         </p:nvSpPr>
@@ -19564,7 +20030,7 @@
       </p:sp>
       <p:sp>
         <p:nvSpPr>
-          <p:cNvPr id="236" name="TextBox 56"/>
+          <p:cNvPr id="241" name="TextBox 56"/>
           <p:cNvSpPr/>
           <p:nvPr/>
         </p:nvSpPr>
@@ -19617,7 +20083,7 @@
       </p:sp>
       <p:sp>
         <p:nvSpPr>
-          <p:cNvPr id="237" name="TextBox 57"/>
+          <p:cNvPr id="242" name="TextBox 57"/>
           <p:cNvSpPr/>
           <p:nvPr/>
         </p:nvSpPr>
@@ -19679,7 +20145,7 @@
       </p:sp>
       <p:sp>
         <p:nvSpPr>
-          <p:cNvPr id="238" name="Rounded Rectangle 58"/>
+          <p:cNvPr id="243" name="Rounded Rectangle 58"/>
           <p:cNvSpPr/>
           <p:nvPr/>
         </p:nvSpPr>
@@ -19740,7 +20206,7 @@
       </p:sp>
       <p:sp>
         <p:nvSpPr>
-          <p:cNvPr id="239" name="TextBox 59"/>
+          <p:cNvPr id="244" name="TextBox 59"/>
           <p:cNvSpPr/>
           <p:nvPr/>
         </p:nvSpPr>
@@ -19823,7 +20289,7 @@
       </p:grpSpPr>
       <p:sp>
         <p:nvSpPr>
-          <p:cNvPr id="240" name="Rectangle 1"/>
+          <p:cNvPr id="245" name="Rectangle 1"/>
           <p:cNvSpPr/>
           <p:nvPr/>
         </p:nvSpPr>
@@ -19882,7 +20348,7 @@
       </p:sp>
       <p:sp>
         <p:nvSpPr>
-          <p:cNvPr id="241" name="Rectangle 2"/>
+          <p:cNvPr id="246" name="Rectangle 2"/>
           <p:cNvSpPr/>
           <p:nvPr/>
         </p:nvSpPr>
@@ -19941,7 +20407,7 @@
       </p:sp>
       <p:sp>
         <p:nvSpPr>
-          <p:cNvPr id="242" name="Rectangle 3"/>
+          <p:cNvPr id="247" name="Rectangle 3"/>
           <p:cNvSpPr/>
           <p:nvPr/>
         </p:nvSpPr>
@@ -20000,7 +20466,7 @@
       </p:sp>
       <p:sp>
         <p:nvSpPr>
-          <p:cNvPr id="243" name="Rectangle 4"/>
+          <p:cNvPr id="248" name="Rectangle 4"/>
           <p:cNvSpPr/>
           <p:nvPr/>
         </p:nvSpPr>
@@ -20059,7 +20525,7 @@
       </p:sp>
       <p:sp>
         <p:nvSpPr>
-          <p:cNvPr id="244" name="TextBox 5"/>
+          <p:cNvPr id="249" name="TextBox 5"/>
           <p:cNvSpPr/>
           <p:nvPr/>
         </p:nvSpPr>
@@ -20112,7 +20578,7 @@
       </p:sp>
       <p:sp>
         <p:nvSpPr>
-          <p:cNvPr id="245" name="TextBox 6"/>
+          <p:cNvPr id="250" name="TextBox 6"/>
           <p:cNvSpPr/>
           <p:nvPr/>
         </p:nvSpPr>
@@ -20165,7 +20631,7 @@
       </p:sp>
       <p:sp>
         <p:nvSpPr>
-          <p:cNvPr id="246" name="Oval 7"/>
+          <p:cNvPr id="251" name="Oval 7"/>
           <p:cNvSpPr/>
           <p:nvPr/>
         </p:nvSpPr>
@@ -20227,7 +20693,7 @@
       </p:sp>
       <p:sp>
         <p:nvSpPr>
-          <p:cNvPr id="247" name="TextBox 8"/>
+          <p:cNvPr id="252" name="TextBox 8"/>
           <p:cNvSpPr/>
           <p:nvPr/>
         </p:nvSpPr>
@@ -20280,7 +20746,7 @@
       </p:sp>
       <p:sp>
         <p:nvSpPr>
-          <p:cNvPr id="248" name="TextBox 9"/>
+          <p:cNvPr id="253" name="TextBox 9"/>
           <p:cNvSpPr/>
           <p:nvPr/>
         </p:nvSpPr>
@@ -20333,7 +20799,7 @@
       </p:sp>
       <p:sp>
         <p:nvSpPr>
-          <p:cNvPr id="249" name="Oval 10"/>
+          <p:cNvPr id="254" name="Oval 10"/>
           <p:cNvSpPr/>
           <p:nvPr/>
         </p:nvSpPr>
@@ -20395,7 +20861,7 @@
       </p:sp>
       <p:sp>
         <p:nvSpPr>
-          <p:cNvPr id="250" name="TextBox 11"/>
+          <p:cNvPr id="255" name="TextBox 11"/>
           <p:cNvSpPr/>
           <p:nvPr/>
         </p:nvSpPr>
@@ -20448,7 +20914,7 @@
       </p:sp>
       <p:sp>
         <p:nvSpPr>
-          <p:cNvPr id="251" name="TextBox 12"/>
+          <p:cNvPr id="256" name="TextBox 12"/>
           <p:cNvSpPr/>
           <p:nvPr/>
         </p:nvSpPr>
@@ -20501,7 +20967,7 @@
       </p:sp>
       <p:sp>
         <p:nvSpPr>
-          <p:cNvPr id="252" name="Oval 13"/>
+          <p:cNvPr id="257" name="Oval 13"/>
           <p:cNvSpPr/>
           <p:nvPr/>
         </p:nvSpPr>
@@ -20563,7 +21029,7 @@
       </p:sp>
       <p:sp>
         <p:nvSpPr>
-          <p:cNvPr id="253" name="TextBox 14"/>
+          <p:cNvPr id="258" name="TextBox 14"/>
           <p:cNvSpPr/>
           <p:nvPr/>
         </p:nvSpPr>
@@ -20616,7 +21082,7 @@
       </p:sp>
       <p:sp>
         <p:nvSpPr>
-          <p:cNvPr id="254" name="TextBox 15"/>
+          <p:cNvPr id="259" name="TextBox 15"/>
           <p:cNvSpPr/>
           <p:nvPr/>
         </p:nvSpPr>
@@ -20669,7 +21135,7 @@
       </p:sp>
       <p:sp>
         <p:nvSpPr>
-          <p:cNvPr id="255" name="TextBox 16"/>
+          <p:cNvPr id="260" name="TextBox 16"/>
           <p:cNvSpPr/>
           <p:nvPr/>
         </p:nvSpPr>
@@ -20722,7 +21188,7 @@
       </p:sp>
       <p:sp>
         <p:nvSpPr>
-          <p:cNvPr id="256" name="Oval 17"/>
+          <p:cNvPr id="261" name="Oval 17"/>
           <p:cNvSpPr/>
           <p:nvPr/>
         </p:nvSpPr>
@@ -20784,7 +21250,7 @@
       </p:sp>
       <p:sp>
         <p:nvSpPr>
-          <p:cNvPr id="257" name="Oval 18"/>
+          <p:cNvPr id="262" name="Oval 18"/>
           <p:cNvSpPr/>
           <p:nvPr/>
         </p:nvSpPr>
@@ -20846,7 +21312,7 @@
       </p:sp>
       <p:sp>
         <p:nvSpPr>
-          <p:cNvPr id="258" name="Oval 19"/>
+          <p:cNvPr id="263" name="Oval 19"/>
           <p:cNvSpPr/>
           <p:nvPr/>
         </p:nvSpPr>
@@ -20908,7 +21374,7 @@
       </p:sp>
       <p:sp>
         <p:nvSpPr>
-          <p:cNvPr id="259" name="TextBox 20"/>
+          <p:cNvPr id="264" name="TextBox 20"/>
           <p:cNvSpPr/>
           <p:nvPr/>
         </p:nvSpPr>
@@ -20983,7 +21449,7 @@
       </p:sp>
       <p:sp>
         <p:nvSpPr>
-          <p:cNvPr id="260" name="TextBox 21"/>
+          <p:cNvPr id="265" name="TextBox 21"/>
           <p:cNvSpPr/>
           <p:nvPr/>
         </p:nvSpPr>
@@ -21036,7 +21502,7 @@
       </p:sp>
       <p:sp>
         <p:nvSpPr>
-          <p:cNvPr id="261" name="TextBox 22"/>
+          <p:cNvPr id="266" name="TextBox 22"/>
           <p:cNvSpPr/>
           <p:nvPr/>
         </p:nvSpPr>
@@ -21089,7 +21555,7 @@
       </p:sp>
       <p:sp>
         <p:nvSpPr>
-          <p:cNvPr id="262" name="Oval 23"/>
+          <p:cNvPr id="267" name="Oval 23"/>
           <p:cNvSpPr/>
           <p:nvPr/>
         </p:nvSpPr>
@@ -21151,7 +21617,7 @@
       </p:sp>
       <p:sp>
         <p:nvSpPr>
-          <p:cNvPr id="263" name="Oval 24"/>
+          <p:cNvPr id="268" name="Oval 24"/>
           <p:cNvSpPr/>
           <p:nvPr/>
         </p:nvSpPr>
@@ -21213,7 +21679,7 @@
       </p:sp>
       <p:sp>
         <p:nvSpPr>
-          <p:cNvPr id="264" name="Oval 25"/>
+          <p:cNvPr id="269" name="Oval 25"/>
           <p:cNvSpPr/>
           <p:nvPr/>
         </p:nvSpPr>
@@ -21275,7 +21741,7 @@
       </p:sp>
       <p:sp>
         <p:nvSpPr>
-          <p:cNvPr id="265" name="Oval 26"/>
+          <p:cNvPr id="270" name="Oval 26"/>
           <p:cNvSpPr/>
           <p:nvPr/>
         </p:nvSpPr>
@@ -21337,7 +21803,7 @@
       </p:sp>
       <p:sp>
         <p:nvSpPr>
-          <p:cNvPr id="266" name="Oval 27"/>
+          <p:cNvPr id="271" name="Oval 27"/>
           <p:cNvSpPr/>
           <p:nvPr/>
         </p:nvSpPr>
@@ -21399,7 +21865,7 @@
       </p:sp>
       <p:sp>
         <p:nvSpPr>
-          <p:cNvPr id="267" name="Oval 28"/>
+          <p:cNvPr id="272" name="Oval 28"/>
           <p:cNvSpPr/>
           <p:nvPr/>
         </p:nvSpPr>
@@ -21461,7 +21927,7 @@
       </p:sp>
       <p:sp>
         <p:nvSpPr>
-          <p:cNvPr id="268" name="Oval 29"/>
+          <p:cNvPr id="273" name="Oval 29"/>
           <p:cNvSpPr/>
           <p:nvPr/>
         </p:nvSpPr>
@@ -21523,7 +21989,7 @@
       </p:sp>
       <p:sp>
         <p:nvSpPr>
-          <p:cNvPr id="269" name="Oval 30"/>
+          <p:cNvPr id="274" name="Oval 30"/>
           <p:cNvSpPr/>
           <p:nvPr/>
         </p:nvSpPr>
@@ -21585,7 +22051,7 @@
       </p:sp>
       <p:sp>
         <p:nvSpPr>
-          <p:cNvPr id="270" name="Oval 31"/>
+          <p:cNvPr id="275" name="Oval 31"/>
           <p:cNvSpPr/>
           <p:nvPr/>
         </p:nvSpPr>
@@ -21647,7 +22113,7 @@
       </p:sp>
       <p:sp>
         <p:nvSpPr>
-          <p:cNvPr id="271" name="Oval 32"/>
+          <p:cNvPr id="276" name="Oval 32"/>
           <p:cNvSpPr/>
           <p:nvPr/>
         </p:nvSpPr>
@@ -21709,7 +22175,7 @@
       </p:sp>
       <p:sp>
         <p:nvSpPr>
-          <p:cNvPr id="272" name="Oval 33"/>
+          <p:cNvPr id="277" name="Oval 33"/>
           <p:cNvSpPr/>
           <p:nvPr/>
         </p:nvSpPr>
@@ -21771,7 +22237,7 @@
       </p:sp>
       <p:sp>
         <p:nvSpPr>
-          <p:cNvPr id="273" name="Oval 34"/>
+          <p:cNvPr id="278" name="Oval 34"/>
           <p:cNvSpPr/>
           <p:nvPr/>
         </p:nvSpPr>
@@ -21833,7 +22299,7 @@
       </p:sp>
       <p:sp>
         <p:nvSpPr>
-          <p:cNvPr id="274" name="Rounded Rectangle 35"/>
+          <p:cNvPr id="279" name="Rounded Rectangle 35"/>
           <p:cNvSpPr/>
           <p:nvPr/>
         </p:nvSpPr>
@@ -21897,7 +22363,7 @@
       </p:sp>
       <p:sp>
         <p:nvSpPr>
-          <p:cNvPr id="275" name="TextBox 36"/>
+          <p:cNvPr id="280" name="TextBox 36"/>
           <p:cNvSpPr/>
           <p:nvPr/>
         </p:nvSpPr>
@@ -21950,7 +22416,7 @@
       </p:sp>
       <p:sp>
         <p:nvSpPr>
-          <p:cNvPr id="276" name="TextBox 37"/>
+          <p:cNvPr id="281" name="TextBox 37"/>
           <p:cNvSpPr/>
           <p:nvPr/>
         </p:nvSpPr>
@@ -22003,7 +22469,7 @@
       </p:sp>
       <p:sp>
         <p:nvSpPr>
-          <p:cNvPr id="277" name="Rectangle 38"/>
+          <p:cNvPr id="282" name="Rectangle 38"/>
           <p:cNvSpPr/>
           <p:nvPr/>
         </p:nvSpPr>
@@ -22062,7 +22528,7 @@
       </p:sp>
       <p:sp>
         <p:nvSpPr>
-          <p:cNvPr id="278" name="TextBox 39"/>
+          <p:cNvPr id="283" name="TextBox 39"/>
           <p:cNvSpPr/>
           <p:nvPr/>
         </p:nvSpPr>
@@ -22115,7 +22581,7 @@
       </p:sp>
       <p:sp>
         <p:nvSpPr>
-          <p:cNvPr id="279" name="Oval 40"/>
+          <p:cNvPr id="284" name="Oval 40"/>
           <p:cNvSpPr/>
           <p:nvPr/>
         </p:nvSpPr>
@@ -22174,7 +22640,7 @@
       </p:sp>
       <p:sp>
         <p:nvSpPr>
-          <p:cNvPr id="280" name="TextBox 41"/>
+          <p:cNvPr id="285" name="TextBox 41"/>
           <p:cNvSpPr/>
           <p:nvPr/>
         </p:nvSpPr>
@@ -22227,7 +22693,7 @@
       </p:sp>
       <p:sp>
         <p:nvSpPr>
-          <p:cNvPr id="281" name="TextBox 42"/>
+          <p:cNvPr id="286" name="TextBox 42"/>
           <p:cNvSpPr/>
           <p:nvPr/>
         </p:nvSpPr>
@@ -22289,7 +22755,7 @@
       </p:sp>
       <p:sp>
         <p:nvSpPr>
-          <p:cNvPr id="282" name="Oval 43"/>
+          <p:cNvPr id="287" name="Oval 43"/>
           <p:cNvSpPr/>
           <p:nvPr/>
         </p:nvSpPr>
@@ -22348,7 +22814,7 @@
       </p:sp>
       <p:sp>
         <p:nvSpPr>
-          <p:cNvPr id="283" name="TextBox 44"/>
+          <p:cNvPr id="288" name="TextBox 44"/>
           <p:cNvSpPr/>
           <p:nvPr/>
         </p:nvSpPr>
@@ -22401,7 +22867,7 @@
       </p:sp>
       <p:sp>
         <p:nvSpPr>
-          <p:cNvPr id="284" name="TextBox 45"/>
+          <p:cNvPr id="289" name="TextBox 45"/>
           <p:cNvSpPr/>
           <p:nvPr/>
         </p:nvSpPr>
@@ -22463,7 +22929,7 @@
       </p:sp>
       <p:sp>
         <p:nvSpPr>
-          <p:cNvPr id="285" name="Oval 46"/>
+          <p:cNvPr id="290" name="Oval 46"/>
           <p:cNvSpPr/>
           <p:nvPr/>
         </p:nvSpPr>
@@ -22522,7 +22988,7 @@
       </p:sp>
       <p:sp>
         <p:nvSpPr>
-          <p:cNvPr id="286" name="TextBox 47"/>
+          <p:cNvPr id="291" name="TextBox 47"/>
           <p:cNvSpPr/>
           <p:nvPr/>
         </p:nvSpPr>
@@ -22575,7 +23041,7 @@
       </p:sp>
       <p:sp>
         <p:nvSpPr>
-          <p:cNvPr id="287" name="TextBox 48"/>
+          <p:cNvPr id="292" name="TextBox 48"/>
           <p:cNvSpPr/>
           <p:nvPr/>
         </p:nvSpPr>
@@ -22637,7 +23103,7 @@
       </p:sp>
       <p:sp>
         <p:nvSpPr>
-          <p:cNvPr id="288" name="Rectangle 49"/>
+          <p:cNvPr id="293" name="Rectangle 49"/>
           <p:cNvSpPr/>
           <p:nvPr/>
         </p:nvSpPr>
@@ -22696,7 +23162,7 @@
       </p:sp>
       <p:sp>
         <p:nvSpPr>
-          <p:cNvPr id="289" name="TextBox 50"/>
+          <p:cNvPr id="294" name="TextBox 50"/>
           <p:cNvSpPr/>
           <p:nvPr/>
         </p:nvSpPr>
@@ -22749,7 +23215,7 @@
       </p:sp>
       <p:sp>
         <p:nvSpPr>
-          <p:cNvPr id="290" name="Oval 51"/>
+          <p:cNvPr id="295" name="Oval 51"/>
           <p:cNvSpPr/>
           <p:nvPr/>
         </p:nvSpPr>
@@ -22808,7 +23274,7 @@
       </p:sp>
       <p:sp>
         <p:nvSpPr>
-          <p:cNvPr id="291" name="TextBox 52"/>
+          <p:cNvPr id="296" name="TextBox 52"/>
           <p:cNvSpPr/>
           <p:nvPr/>
         </p:nvSpPr>
@@ -22861,7 +23327,7 @@
       </p:sp>
       <p:sp>
         <p:nvSpPr>
-          <p:cNvPr id="292" name="TextBox 53"/>
+          <p:cNvPr id="297" name="TextBox 53"/>
           <p:cNvSpPr/>
           <p:nvPr/>
         </p:nvSpPr>
@@ -22923,7 +23389,7 @@
       </p:sp>
       <p:sp>
         <p:nvSpPr>
-          <p:cNvPr id="293" name="Oval 54"/>
+          <p:cNvPr id="298" name="Oval 54"/>
           <p:cNvSpPr/>
           <p:nvPr/>
         </p:nvSpPr>
@@ -22982,7 +23448,7 @@
       </p:sp>
       <p:sp>
         <p:nvSpPr>
-          <p:cNvPr id="294" name="TextBox 55"/>
+          <p:cNvPr id="299" name="TextBox 55"/>
           <p:cNvSpPr/>
           <p:nvPr/>
         </p:nvSpPr>
@@ -23035,7 +23501,7 @@
       </p:sp>
       <p:sp>
         <p:nvSpPr>
-          <p:cNvPr id="295" name="TextBox 56"/>
+          <p:cNvPr id="300" name="TextBox 56"/>
           <p:cNvSpPr/>
           <p:nvPr/>
         </p:nvSpPr>
@@ -23097,7 +23563,7 @@
       </p:sp>
       <p:sp>
         <p:nvSpPr>
-          <p:cNvPr id="296" name="Oval 57"/>
+          <p:cNvPr id="301" name="Oval 57"/>
           <p:cNvSpPr/>
           <p:nvPr/>
         </p:nvSpPr>
@@ -23156,7 +23622,7 @@
       </p:sp>
       <p:sp>
         <p:nvSpPr>
-          <p:cNvPr id="297" name="TextBox 58"/>
+          <p:cNvPr id="302" name="TextBox 58"/>
           <p:cNvSpPr/>
           <p:nvPr/>
         </p:nvSpPr>
@@ -23209,7 +23675,7 @@
       </p:sp>
       <p:sp>
         <p:nvSpPr>
-          <p:cNvPr id="298" name="TextBox 59"/>
+          <p:cNvPr id="303" name="TextBox 59"/>
           <p:cNvSpPr/>
           <p:nvPr/>
         </p:nvSpPr>
@@ -23271,7 +23737,7 @@
       </p:sp>
       <p:sp>
         <p:nvSpPr>
-          <p:cNvPr id="299" name="Rectangle 60"/>
+          <p:cNvPr id="304" name="Rectangle 60"/>
           <p:cNvSpPr/>
           <p:nvPr/>
         </p:nvSpPr>
@@ -23330,7 +23796,7 @@
       </p:sp>
       <p:sp>
         <p:nvSpPr>
-          <p:cNvPr id="300" name="TextBox 61"/>
+          <p:cNvPr id="305" name="TextBox 61"/>
           <p:cNvSpPr/>
           <p:nvPr/>
         </p:nvSpPr>
@@ -23383,7 +23849,7 @@
       </p:sp>
       <p:sp>
         <p:nvSpPr>
-          <p:cNvPr id="301" name="Oval 62"/>
+          <p:cNvPr id="306" name="Oval 62"/>
           <p:cNvSpPr/>
           <p:nvPr/>
         </p:nvSpPr>
@@ -23442,7 +23908,7 @@
       </p:sp>
       <p:sp>
         <p:nvSpPr>
-          <p:cNvPr id="302" name="TextBox 63"/>
+          <p:cNvPr id="307" name="TextBox 63"/>
           <p:cNvSpPr/>
           <p:nvPr/>
         </p:nvSpPr>
@@ -23495,7 +23961,7 @@
       </p:sp>
       <p:sp>
         <p:nvSpPr>
-          <p:cNvPr id="303" name="TextBox 64"/>
+          <p:cNvPr id="308" name="TextBox 64"/>
           <p:cNvSpPr/>
           <p:nvPr/>
         </p:nvSpPr>
@@ -23557,7 +24023,7 @@
       </p:sp>
       <p:sp>
         <p:nvSpPr>
-          <p:cNvPr id="304" name="Oval 65"/>
+          <p:cNvPr id="309" name="Oval 65"/>
           <p:cNvSpPr/>
           <p:nvPr/>
         </p:nvSpPr>
@@ -23616,7 +24082,7 @@
       </p:sp>
       <p:sp>
         <p:nvSpPr>
-          <p:cNvPr id="305" name="TextBox 66"/>
+          <p:cNvPr id="310" name="TextBox 66"/>
           <p:cNvSpPr/>
           <p:nvPr/>
         </p:nvSpPr>
@@ -23669,7 +24135,7 @@
       </p:sp>
       <p:sp>
         <p:nvSpPr>
-          <p:cNvPr id="306" name="TextBox 67"/>
+          <p:cNvPr id="311" name="TextBox 67"/>
           <p:cNvSpPr/>
           <p:nvPr/>
         </p:nvSpPr>
@@ -23731,7 +24197,7 @@
       </p:sp>
       <p:sp>
         <p:nvSpPr>
-          <p:cNvPr id="307" name="Oval 68"/>
+          <p:cNvPr id="312" name="Oval 68"/>
           <p:cNvSpPr/>
           <p:nvPr/>
         </p:nvSpPr>
@@ -23790,7 +24256,7 @@
       </p:sp>
       <p:sp>
         <p:nvSpPr>
-          <p:cNvPr id="308" name="TextBox 69"/>
+          <p:cNvPr id="313" name="TextBox 69"/>
           <p:cNvSpPr/>
           <p:nvPr/>
         </p:nvSpPr>
@@ -23843,7 +24309,7 @@
       </p:sp>
       <p:sp>
         <p:nvSpPr>
-          <p:cNvPr id="309" name="TextBox 70"/>
+          <p:cNvPr id="314" name="TextBox 70"/>
           <p:cNvSpPr/>
           <p:nvPr/>
         </p:nvSpPr>
@@ -23905,7 +24371,7 @@
       </p:sp>
       <p:sp>
         <p:nvSpPr>
-          <p:cNvPr id="310" name="TextBox 71"/>
+          <p:cNvPr id="315" name="TextBox 71"/>
           <p:cNvSpPr/>
           <p:nvPr/>
         </p:nvSpPr>
@@ -23958,7 +24424,7 @@
       </p:sp>
       <p:cxnSp>
         <p:nvCxnSpPr>
-          <p:cNvPr id="311" name="Connector 72"/>
+          <p:cNvPr id="316" name="Connector 72"/>
           <p:cNvCxnSpPr/>
           <p:nvPr/>
         </p:nvCxnSpPr>
@@ -23980,7 +24446,7 @@
       </p:cxnSp>
       <p:sp>
         <p:nvSpPr>
-          <p:cNvPr id="312" name="Oval 73"/>
+          <p:cNvPr id="317" name="Oval 73"/>
           <p:cNvSpPr/>
           <p:nvPr/>
         </p:nvSpPr>
@@ -24039,7 +24505,7 @@
       </p:sp>
       <p:sp>
         <p:nvSpPr>
-          <p:cNvPr id="313" name="TextBox 74"/>
+          <p:cNvPr id="318" name="TextBox 74"/>
           <p:cNvSpPr/>
           <p:nvPr/>
         </p:nvSpPr>
@@ -24092,7 +24558,7 @@
       </p:sp>
       <p:sp>
         <p:nvSpPr>
-          <p:cNvPr id="314" name="TextBox 75"/>
+          <p:cNvPr id="319" name="TextBox 75"/>
           <p:cNvSpPr/>
           <p:nvPr/>
         </p:nvSpPr>
@@ -24145,7 +24611,7 @@
       </p:sp>
       <p:sp>
         <p:nvSpPr>
-          <p:cNvPr id="315" name="Oval 76"/>
+          <p:cNvPr id="320" name="Oval 76"/>
           <p:cNvSpPr/>
           <p:nvPr/>
         </p:nvSpPr>
@@ -24204,7 +24670,7 @@
       </p:sp>
       <p:sp>
         <p:nvSpPr>
-          <p:cNvPr id="316" name="TextBox 77"/>
+          <p:cNvPr id="321" name="TextBox 77"/>
           <p:cNvSpPr/>
           <p:nvPr/>
         </p:nvSpPr>
@@ -24257,7 +24723,7 @@
       </p:sp>
       <p:sp>
         <p:nvSpPr>
-          <p:cNvPr id="317" name="TextBox 78"/>
+          <p:cNvPr id="322" name="TextBox 78"/>
           <p:cNvSpPr/>
           <p:nvPr/>
         </p:nvSpPr>
@@ -24310,7 +24776,7 @@
       </p:sp>
       <p:sp>
         <p:nvSpPr>
-          <p:cNvPr id="318" name="Oval 79"/>
+          <p:cNvPr id="323" name="Oval 79"/>
           <p:cNvSpPr/>
           <p:nvPr/>
         </p:nvSpPr>
@@ -24369,7 +24835,7 @@
       </p:sp>
       <p:sp>
         <p:nvSpPr>
-          <p:cNvPr id="319" name="TextBox 80"/>
+          <p:cNvPr id="324" name="TextBox 80"/>
           <p:cNvSpPr/>
           <p:nvPr/>
         </p:nvSpPr>
@@ -24422,7 +24888,7 @@
       </p:sp>
       <p:sp>
         <p:nvSpPr>
-          <p:cNvPr id="320" name="TextBox 81"/>
+          <p:cNvPr id="325" name="TextBox 81"/>
           <p:cNvSpPr/>
           <p:nvPr/>
         </p:nvSpPr>
